--- a/Project and Tool Layout.pptx
+++ b/Project and Tool Layout.pptx
@@ -259,7 +259,7 @@
           <a:p>
             <a:fld id="{E779FE8C-703A-4904-A4E0-13778480428C}" type="datetimeFigureOut">
               <a:rPr lang="en-US" smtClean="0"/>
-              <a:t>8/31/2026</a:t>
+              <a:t>9/14/2026</a:t>
             </a:fld>
             <a:endParaRPr lang="en-US"/>
           </a:p>
@@ -457,7 +457,7 @@
           <a:p>
             <a:fld id="{E779FE8C-703A-4904-A4E0-13778480428C}" type="datetimeFigureOut">
               <a:rPr lang="en-US" smtClean="0"/>
-              <a:t>8/31/2026</a:t>
+              <a:t>9/14/2026</a:t>
             </a:fld>
             <a:endParaRPr lang="en-US"/>
           </a:p>
@@ -665,7 +665,7 @@
           <a:p>
             <a:fld id="{E779FE8C-703A-4904-A4E0-13778480428C}" type="datetimeFigureOut">
               <a:rPr lang="en-US" smtClean="0"/>
-              <a:t>8/31/2026</a:t>
+              <a:t>9/14/2026</a:t>
             </a:fld>
             <a:endParaRPr lang="en-US"/>
           </a:p>
@@ -863,7 +863,7 @@
           <a:p>
             <a:fld id="{E779FE8C-703A-4904-A4E0-13778480428C}" type="datetimeFigureOut">
               <a:rPr lang="en-US" smtClean="0"/>
-              <a:t>8/31/2026</a:t>
+              <a:t>9/14/2026</a:t>
             </a:fld>
             <a:endParaRPr lang="en-US"/>
           </a:p>
@@ -1138,7 +1138,7 @@
           <a:p>
             <a:fld id="{E779FE8C-703A-4904-A4E0-13778480428C}" type="datetimeFigureOut">
               <a:rPr lang="en-US" smtClean="0"/>
-              <a:t>8/31/2026</a:t>
+              <a:t>9/14/2026</a:t>
             </a:fld>
             <a:endParaRPr lang="en-US"/>
           </a:p>
@@ -1403,7 +1403,7 @@
           <a:p>
             <a:fld id="{E779FE8C-703A-4904-A4E0-13778480428C}" type="datetimeFigureOut">
               <a:rPr lang="en-US" smtClean="0"/>
-              <a:t>8/31/2026</a:t>
+              <a:t>9/14/2026</a:t>
             </a:fld>
             <a:endParaRPr lang="en-US"/>
           </a:p>
@@ -1815,7 +1815,7 @@
           <a:p>
             <a:fld id="{E779FE8C-703A-4904-A4E0-13778480428C}" type="datetimeFigureOut">
               <a:rPr lang="en-US" smtClean="0"/>
-              <a:t>8/31/2026</a:t>
+              <a:t>9/14/2026</a:t>
             </a:fld>
             <a:endParaRPr lang="en-US"/>
           </a:p>
@@ -1956,7 +1956,7 @@
           <a:p>
             <a:fld id="{E779FE8C-703A-4904-A4E0-13778480428C}" type="datetimeFigureOut">
               <a:rPr lang="en-US" smtClean="0"/>
-              <a:t>8/31/2026</a:t>
+              <a:t>9/14/2026</a:t>
             </a:fld>
             <a:endParaRPr lang="en-US"/>
           </a:p>
@@ -2069,7 +2069,7 @@
           <a:p>
             <a:fld id="{E779FE8C-703A-4904-A4E0-13778480428C}" type="datetimeFigureOut">
               <a:rPr lang="en-US" smtClean="0"/>
-              <a:t>8/31/2026</a:t>
+              <a:t>9/14/2026</a:t>
             </a:fld>
             <a:endParaRPr lang="en-US"/>
           </a:p>
@@ -2380,7 +2380,7 @@
           <a:p>
             <a:fld id="{E779FE8C-703A-4904-A4E0-13778480428C}" type="datetimeFigureOut">
               <a:rPr lang="en-US" smtClean="0"/>
-              <a:t>8/31/2026</a:t>
+              <a:t>9/14/2026</a:t>
             </a:fld>
             <a:endParaRPr lang="en-US"/>
           </a:p>
@@ -2668,7 +2668,7 @@
           <a:p>
             <a:fld id="{E779FE8C-703A-4904-A4E0-13778480428C}" type="datetimeFigureOut">
               <a:rPr lang="en-US" smtClean="0"/>
-              <a:t>8/31/2026</a:t>
+              <a:t>9/14/2026</a:t>
             </a:fld>
             <a:endParaRPr lang="en-US"/>
           </a:p>
@@ -2909,7 +2909,7 @@
           <a:p>
             <a:fld id="{E779FE8C-703A-4904-A4E0-13778480428C}" type="datetimeFigureOut">
               <a:rPr lang="en-US" smtClean="0"/>
-              <a:t>8/31/2026</a:t>
+              <a:t>9/14/2026</a:t>
             </a:fld>
             <a:endParaRPr lang="en-US"/>
           </a:p>
@@ -3328,10 +3328,10 @@
       </p:grpSpPr>
       <p:sp>
         <p:nvSpPr>
-          <p:cNvPr id="7" name="Rectangle 6">
-            <a:extLst>
-              <a:ext uri="{FF2B5EF4-FFF2-40B4-BE49-F238E27FC236}">
-                <a16:creationId xmlns:a16="http://schemas.microsoft.com/office/drawing/2014/main" id="{1CE05274-4548-E41B-58C8-75D317FE550B}"/>
+          <p:cNvPr id="73" name="Rectangle 72">
+            <a:extLst>
+              <a:ext uri="{FF2B5EF4-FFF2-40B4-BE49-F238E27FC236}">
+                <a16:creationId xmlns:a16="http://schemas.microsoft.com/office/drawing/2014/main" id="{1C37FB3A-8823-595A-E49C-1F3D559F712D}"/>
               </a:ext>
             </a:extLst>
           </p:cNvPr>
@@ -3340,8 +3340,8 @@
         </p:nvSpPr>
         <p:spPr>
           <a:xfrm>
-            <a:off x="8367658" y="4125997"/>
-            <a:ext cx="993676" cy="1187945"/>
+            <a:off x="2338176" y="292035"/>
+            <a:ext cx="3492379" cy="1656606"/>
           </a:xfrm>
           <a:prstGeom prst="rect">
             <a:avLst/>
@@ -3372,7 +3372,373 @@
           </a:fontRef>
         </p:style>
         <p:txBody>
-          <a:bodyPr rtlCol="0" anchor="t"/>
+          <a:bodyPr rtlCol="0" anchor="ctr"/>
+          <a:lstStyle/>
+          <a:p>
+            <a:pPr algn="ctr"/>
+            <a:endParaRPr lang="en-US" sz="1200" dirty="0">
+              <a:solidFill>
+                <a:schemeClr val="tx1"/>
+              </a:solidFill>
+            </a:endParaRPr>
+          </a:p>
+        </p:txBody>
+      </p:sp>
+      <p:sp>
+        <p:nvSpPr>
+          <p:cNvPr id="15" name="Rectangle 14">
+            <a:extLst>
+              <a:ext uri="{FF2B5EF4-FFF2-40B4-BE49-F238E27FC236}">
+                <a16:creationId xmlns:a16="http://schemas.microsoft.com/office/drawing/2014/main" id="{9BCFF54A-ABDC-829F-D38E-19DC6F0A6EAE}"/>
+              </a:ext>
+            </a:extLst>
+          </p:cNvPr>
+          <p:cNvSpPr/>
+          <p:nvPr/>
+        </p:nvSpPr>
+        <p:spPr>
+          <a:xfrm>
+            <a:off x="7114811" y="1909206"/>
+            <a:ext cx="1314542" cy="1426968"/>
+          </a:xfrm>
+          <a:prstGeom prst="rect">
+            <a:avLst/>
+          </a:prstGeom>
+          <a:solidFill>
+            <a:schemeClr val="accent1">
+              <a:lumMod val="40000"/>
+              <a:lumOff val="60000"/>
+            </a:schemeClr>
+          </a:solidFill>
+        </p:spPr>
+        <p:style>
+          <a:lnRef idx="2">
+            <a:schemeClr val="accent1">
+              <a:shade val="15000"/>
+            </a:schemeClr>
+          </a:lnRef>
+          <a:fillRef idx="1">
+            <a:schemeClr val="accent1"/>
+          </a:fillRef>
+          <a:effectRef idx="0">
+            <a:schemeClr val="accent1"/>
+          </a:effectRef>
+          <a:fontRef idx="minor">
+            <a:schemeClr val="lt1"/>
+          </a:fontRef>
+        </p:style>
+        <p:txBody>
+          <a:bodyPr lIns="0" tIns="45720" rIns="0" bIns="0" rtlCol="0" anchor="t"/>
+          <a:lstStyle/>
+          <a:p>
+            <a:pPr algn="ctr"/>
+            <a:r>
+              <a:rPr lang="en-US" sz="900" b="1" dirty="0"/>
+              <a:t>🐳 Docker Container</a:t>
+            </a:r>
+          </a:p>
+          <a:p>
+            <a:pPr algn="ctr"/>
+            <a:r>
+              <a:rPr lang="en-US" sz="900" i="1" dirty="0"/>
+              <a:t>“pgvector/pgvector:pg17”</a:t>
+            </a:r>
+          </a:p>
+        </p:txBody>
+      </p:sp>
+      <p:sp>
+        <p:nvSpPr>
+          <p:cNvPr id="3" name="Rectangle 2">
+            <a:extLst>
+              <a:ext uri="{FF2B5EF4-FFF2-40B4-BE49-F238E27FC236}">
+                <a16:creationId xmlns:a16="http://schemas.microsoft.com/office/drawing/2014/main" id="{CAAC8FDD-2CDB-1421-3C89-7271865A8AA6}"/>
+              </a:ext>
+            </a:extLst>
+          </p:cNvPr>
+          <p:cNvSpPr/>
+          <p:nvPr/>
+        </p:nvSpPr>
+        <p:spPr>
+          <a:xfrm>
+            <a:off x="7114811" y="691774"/>
+            <a:ext cx="1314542" cy="922951"/>
+          </a:xfrm>
+          <a:prstGeom prst="rect">
+            <a:avLst/>
+          </a:prstGeom>
+          <a:solidFill>
+            <a:schemeClr val="accent1">
+              <a:lumMod val="40000"/>
+              <a:lumOff val="60000"/>
+            </a:schemeClr>
+          </a:solidFill>
+        </p:spPr>
+        <p:style>
+          <a:lnRef idx="2">
+            <a:schemeClr val="accent1">
+              <a:shade val="15000"/>
+            </a:schemeClr>
+          </a:lnRef>
+          <a:fillRef idx="1">
+            <a:schemeClr val="accent1"/>
+          </a:fillRef>
+          <a:effectRef idx="0">
+            <a:schemeClr val="accent1"/>
+          </a:effectRef>
+          <a:fontRef idx="minor">
+            <a:schemeClr val="lt1"/>
+          </a:fontRef>
+        </p:style>
+        <p:txBody>
+          <a:bodyPr lIns="0" tIns="45720" rIns="0" bIns="0" rtlCol="0" anchor="t"/>
+          <a:lstStyle/>
+          <a:p>
+            <a:pPr algn="ctr"/>
+            <a:r>
+              <a:rPr lang="en-US" sz="900" b="1" dirty="0"/>
+              <a:t>🐳 Docker Container</a:t>
+            </a:r>
+          </a:p>
+          <a:p>
+            <a:pPr algn="ctr"/>
+            <a:r>
+              <a:rPr lang="en-US" sz="900" i="1" dirty="0"/>
+              <a:t>“dpage/pgadmin4”</a:t>
+            </a:r>
+          </a:p>
+        </p:txBody>
+      </p:sp>
+      <p:sp>
+        <p:nvSpPr>
+          <p:cNvPr id="97" name="Rectangle 96">
+            <a:extLst>
+              <a:ext uri="{FF2B5EF4-FFF2-40B4-BE49-F238E27FC236}">
+                <a16:creationId xmlns:a16="http://schemas.microsoft.com/office/drawing/2014/main" id="{3648F25D-F87B-BA73-4E34-C9B47F8DEFFF}"/>
+              </a:ext>
+            </a:extLst>
+          </p:cNvPr>
+          <p:cNvSpPr/>
+          <p:nvPr/>
+        </p:nvSpPr>
+        <p:spPr>
+          <a:xfrm>
+            <a:off x="7174004" y="2359559"/>
+            <a:ext cx="1196156" cy="895688"/>
+          </a:xfrm>
+          <a:prstGeom prst="rect">
+            <a:avLst/>
+          </a:prstGeom>
+          <a:solidFill>
+            <a:schemeClr val="accent2">
+              <a:lumMod val="60000"/>
+              <a:lumOff val="40000"/>
+            </a:schemeClr>
+          </a:solidFill>
+        </p:spPr>
+        <p:style>
+          <a:lnRef idx="2">
+            <a:schemeClr val="accent1">
+              <a:shade val="15000"/>
+            </a:schemeClr>
+          </a:lnRef>
+          <a:fillRef idx="1">
+            <a:schemeClr val="accent1"/>
+          </a:fillRef>
+          <a:effectRef idx="0">
+            <a:schemeClr val="accent1"/>
+          </a:effectRef>
+          <a:fontRef idx="minor">
+            <a:schemeClr val="lt1"/>
+          </a:fontRef>
+        </p:style>
+        <p:txBody>
+          <a:bodyPr lIns="0" tIns="0" rIns="0" bIns="0" rtlCol="0" anchor="t"/>
+          <a:lstStyle/>
+          <a:p>
+            <a:pPr algn="ctr"/>
+            <a:r>
+              <a:rPr lang="en-US" sz="1600" dirty="0"/>
+              <a:t>PostgreSQL Server</a:t>
+            </a:r>
+          </a:p>
+        </p:txBody>
+      </p:sp>
+      <p:sp>
+        <p:nvSpPr>
+          <p:cNvPr id="4" name="Thought Bubble: Cloud 3">
+            <a:extLst>
+              <a:ext uri="{FF2B5EF4-FFF2-40B4-BE49-F238E27FC236}">
+                <a16:creationId xmlns:a16="http://schemas.microsoft.com/office/drawing/2014/main" id="{AC1FB946-271A-7F06-1F3D-5F01BA6B3672}"/>
+              </a:ext>
+            </a:extLst>
+          </p:cNvPr>
+          <p:cNvSpPr/>
+          <p:nvPr/>
+        </p:nvSpPr>
+        <p:spPr>
+          <a:xfrm>
+            <a:off x="722032" y="327047"/>
+            <a:ext cx="1177564" cy="660952"/>
+          </a:xfrm>
+          <a:prstGeom prst="cloudCallout">
+            <a:avLst>
+              <a:gd name="adj1" fmla="val 964"/>
+              <a:gd name="adj2" fmla="val 111512"/>
+            </a:avLst>
+          </a:prstGeom>
+          <a:noFill/>
+        </p:spPr>
+        <p:style>
+          <a:lnRef idx="2">
+            <a:schemeClr val="accent1">
+              <a:shade val="15000"/>
+            </a:schemeClr>
+          </a:lnRef>
+          <a:fillRef idx="1">
+            <a:schemeClr val="accent1"/>
+          </a:fillRef>
+          <a:effectRef idx="0">
+            <a:schemeClr val="accent1"/>
+          </a:effectRef>
+          <a:fontRef idx="minor">
+            <a:schemeClr val="lt1"/>
+          </a:fontRef>
+        </p:style>
+        <p:txBody>
+          <a:bodyPr rtlCol="0" anchor="ctr"/>
+          <a:lstStyle/>
+          <a:p>
+            <a:pPr algn="ctr"/>
+            <a:r>
+              <a:rPr lang="en-US" sz="2800" b="1" dirty="0">
+                <a:solidFill>
+                  <a:schemeClr val="tx1"/>
+                </a:solidFill>
+              </a:rPr>
+              <a:t>SEC</a:t>
+            </a:r>
+          </a:p>
+        </p:txBody>
+      </p:sp>
+      <p:sp>
+        <p:nvSpPr>
+          <p:cNvPr id="5" name="Rectangle 4">
+            <a:extLst>
+              <a:ext uri="{FF2B5EF4-FFF2-40B4-BE49-F238E27FC236}">
+                <a16:creationId xmlns:a16="http://schemas.microsoft.com/office/drawing/2014/main" id="{A74C31EA-1C5A-D9F3-DE5D-D532F60566A9}"/>
+              </a:ext>
+            </a:extLst>
+          </p:cNvPr>
+          <p:cNvSpPr/>
+          <p:nvPr/>
+        </p:nvSpPr>
+        <p:spPr>
+          <a:xfrm>
+            <a:off x="750160" y="1475054"/>
+            <a:ext cx="1121308" cy="1361588"/>
+          </a:xfrm>
+          <a:prstGeom prst="rect">
+            <a:avLst/>
+          </a:prstGeom>
+          <a:solidFill>
+            <a:srgbClr val="7030A0"/>
+          </a:solidFill>
+        </p:spPr>
+        <p:style>
+          <a:lnRef idx="2">
+            <a:schemeClr val="accent1">
+              <a:shade val="15000"/>
+            </a:schemeClr>
+          </a:lnRef>
+          <a:fillRef idx="1">
+            <a:schemeClr val="accent1"/>
+          </a:fillRef>
+          <a:effectRef idx="0">
+            <a:schemeClr val="accent1"/>
+          </a:effectRef>
+          <a:fontRef idx="minor">
+            <a:schemeClr val="lt1"/>
+          </a:fontRef>
+        </p:style>
+        <p:txBody>
+          <a:bodyPr lIns="0" tIns="0" rIns="0" bIns="0" rtlCol="0" anchor="ctr"/>
+          <a:lstStyle/>
+          <a:p>
+            <a:pPr algn="ctr"/>
+            <a:r>
+              <a:rPr lang="en-US" dirty="0"/>
+              <a:t>Retrieval Client</a:t>
+            </a:r>
+          </a:p>
+          <a:p>
+            <a:pPr algn="ctr"/>
+            <a:r>
+              <a:rPr lang="en-US" sz="1100" dirty="0"/>
+              <a:t>📚 </a:t>
+            </a:r>
+            <a:r>
+              <a:rPr lang="en-US" sz="1100" u="sng" dirty="0"/>
+              <a:t>httpx</a:t>
+            </a:r>
+            <a:endParaRPr lang="en-US" u="sng" dirty="0"/>
+          </a:p>
+          <a:p>
+            <a:pPr algn="ctr"/>
+            <a:endParaRPr lang="en-US" sz="1050" dirty="0"/>
+          </a:p>
+          <a:p>
+            <a:pPr algn="ctr"/>
+            <a:r>
+              <a:rPr lang="en-US" sz="1000" dirty="0"/>
+              <a:t>= grabs data from site + stores locally</a:t>
+            </a:r>
+          </a:p>
+        </p:txBody>
+      </p:sp>
+      <p:sp>
+        <p:nvSpPr>
+          <p:cNvPr id="6" name="Rectangle 5">
+            <a:extLst>
+              <a:ext uri="{FF2B5EF4-FFF2-40B4-BE49-F238E27FC236}">
+                <a16:creationId xmlns:a16="http://schemas.microsoft.com/office/drawing/2014/main" id="{416172B8-57BB-0D77-7612-743EB92E5282}"/>
+              </a:ext>
+            </a:extLst>
+          </p:cNvPr>
+          <p:cNvSpPr/>
+          <p:nvPr/>
+        </p:nvSpPr>
+        <p:spPr>
+          <a:xfrm>
+            <a:off x="750160" y="3070560"/>
+            <a:ext cx="1121308" cy="548974"/>
+          </a:xfrm>
+          <a:prstGeom prst="rect">
+            <a:avLst/>
+          </a:prstGeom>
+          <a:solidFill>
+            <a:schemeClr val="bg1">
+              <a:lumMod val="85000"/>
+            </a:schemeClr>
+          </a:solidFill>
+        </p:spPr>
+        <p:style>
+          <a:lnRef idx="2">
+            <a:schemeClr val="accent1">
+              <a:shade val="15000"/>
+            </a:schemeClr>
+          </a:lnRef>
+          <a:fillRef idx="1">
+            <a:schemeClr val="accent1"/>
+          </a:fillRef>
+          <a:effectRef idx="0">
+            <a:schemeClr val="accent1"/>
+          </a:effectRef>
+          <a:fontRef idx="minor">
+            <a:schemeClr val="lt1"/>
+          </a:fontRef>
+        </p:style>
+        <p:txBody>
+          <a:bodyPr rtlCol="0" anchor="ctr"/>
           <a:lstStyle/>
           <a:p>
             <a:pPr algn="ctr"/>
@@ -3382,17 +3748,63 @@
                   <a:schemeClr val="tx1"/>
                 </a:solidFill>
               </a:rPr>
-              <a:t>On disk</a:t>
-            </a:r>
-          </a:p>
-        </p:txBody>
-      </p:sp>
-      <p:sp>
-        <p:nvSpPr>
-          <p:cNvPr id="73" name="Rectangle 72">
-            <a:extLst>
-              <a:ext uri="{FF2B5EF4-FFF2-40B4-BE49-F238E27FC236}">
-                <a16:creationId xmlns:a16="http://schemas.microsoft.com/office/drawing/2014/main" id="{1C37FB3A-8823-595A-E49C-1F3D559F712D}"/>
+              <a:t>HTTP Cache</a:t>
+            </a:r>
+          </a:p>
+        </p:txBody>
+      </p:sp>
+      <p:cxnSp>
+        <p:nvCxnSpPr>
+          <p:cNvPr id="8" name="Straight Arrow Connector 7">
+            <a:extLst>
+              <a:ext uri="{FF2B5EF4-FFF2-40B4-BE49-F238E27FC236}">
+                <a16:creationId xmlns:a16="http://schemas.microsoft.com/office/drawing/2014/main" id="{09C46E33-DA6D-C2D1-A479-21267E9A4CC8}"/>
+              </a:ext>
+            </a:extLst>
+          </p:cNvPr>
+          <p:cNvCxnSpPr>
+            <a:cxnSpLocks/>
+            <a:stCxn id="5" idx="2"/>
+            <a:endCxn id="6" idx="0"/>
+          </p:cNvCxnSpPr>
+          <p:nvPr/>
+        </p:nvCxnSpPr>
+        <p:spPr>
+          <a:xfrm>
+            <a:off x="1310814" y="2836642"/>
+            <a:ext cx="0" cy="233918"/>
+          </a:xfrm>
+          <a:prstGeom prst="straightConnector1">
+            <a:avLst/>
+          </a:prstGeom>
+          <a:ln w="12700">
+            <a:solidFill>
+              <a:schemeClr val="tx1"/>
+            </a:solidFill>
+            <a:tailEnd type="arrow"/>
+          </a:ln>
+        </p:spPr>
+        <p:style>
+          <a:lnRef idx="1">
+            <a:schemeClr val="accent1"/>
+          </a:lnRef>
+          <a:fillRef idx="0">
+            <a:schemeClr val="accent1"/>
+          </a:fillRef>
+          <a:effectRef idx="0">
+            <a:schemeClr val="accent1"/>
+          </a:effectRef>
+          <a:fontRef idx="minor">
+            <a:schemeClr val="tx1"/>
+          </a:fontRef>
+        </p:style>
+      </p:cxnSp>
+      <p:sp>
+        <p:nvSpPr>
+          <p:cNvPr id="11" name="Rectangle 10">
+            <a:extLst>
+              <a:ext uri="{FF2B5EF4-FFF2-40B4-BE49-F238E27FC236}">
+                <a16:creationId xmlns:a16="http://schemas.microsoft.com/office/drawing/2014/main" id="{3D486B51-56A3-85DE-929B-5ECA1F88C008}"/>
               </a:ext>
             </a:extLst>
           </p:cNvPr>
@@ -3401,8 +3813,2190 @@
         </p:nvSpPr>
         <p:spPr>
           <a:xfrm>
-            <a:off x="2338176" y="818595"/>
-            <a:ext cx="3492379" cy="1656606"/>
+            <a:off x="750160" y="3808253"/>
+            <a:ext cx="1121308" cy="957830"/>
+          </a:xfrm>
+          <a:prstGeom prst="rect">
+            <a:avLst/>
+          </a:prstGeom>
+          <a:solidFill>
+            <a:schemeClr val="bg1">
+              <a:lumMod val="85000"/>
+            </a:schemeClr>
+          </a:solidFill>
+        </p:spPr>
+        <p:style>
+          <a:lnRef idx="2">
+            <a:schemeClr val="accent1">
+              <a:shade val="15000"/>
+            </a:schemeClr>
+          </a:lnRef>
+          <a:fillRef idx="1">
+            <a:schemeClr val="accent1"/>
+          </a:fillRef>
+          <a:effectRef idx="0">
+            <a:schemeClr val="accent1"/>
+          </a:effectRef>
+          <a:fontRef idx="minor">
+            <a:schemeClr val="lt1"/>
+          </a:fontRef>
+        </p:style>
+        <p:txBody>
+          <a:bodyPr rtlCol="0" anchor="ctr"/>
+          <a:lstStyle/>
+          <a:p>
+            <a:pPr algn="ctr"/>
+            <a:r>
+              <a:rPr lang="en-US" sz="1600" dirty="0">
+                <a:solidFill>
+                  <a:schemeClr val="tx1"/>
+                </a:solidFill>
+              </a:rPr>
+              <a:t>JSONs</a:t>
+            </a:r>
+            <a:endParaRPr lang="en-US" sz="1200" dirty="0">
+              <a:solidFill>
+                <a:schemeClr val="tx1"/>
+              </a:solidFill>
+            </a:endParaRPr>
+          </a:p>
+          <a:p>
+            <a:pPr algn="ctr"/>
+            <a:r>
+              <a:rPr lang="en-US" sz="1100" dirty="0">
+                <a:solidFill>
+                  <a:schemeClr val="tx1"/>
+                </a:solidFill>
+              </a:rPr>
+              <a:t>(Submissions + XBRL)</a:t>
+            </a:r>
+          </a:p>
+        </p:txBody>
+      </p:sp>
+      <p:cxnSp>
+        <p:nvCxnSpPr>
+          <p:cNvPr id="12" name="Straight Arrow Connector 11">
+            <a:extLst>
+              <a:ext uri="{FF2B5EF4-FFF2-40B4-BE49-F238E27FC236}">
+                <a16:creationId xmlns:a16="http://schemas.microsoft.com/office/drawing/2014/main" id="{235F020E-037C-F85F-539F-6183F10D6F3C}"/>
+              </a:ext>
+            </a:extLst>
+          </p:cNvPr>
+          <p:cNvCxnSpPr>
+            <a:cxnSpLocks/>
+            <a:stCxn id="6" idx="2"/>
+            <a:endCxn id="11" idx="0"/>
+          </p:cNvCxnSpPr>
+          <p:nvPr/>
+        </p:nvCxnSpPr>
+        <p:spPr>
+          <a:xfrm>
+            <a:off x="1310814" y="3619534"/>
+            <a:ext cx="0" cy="188719"/>
+          </a:xfrm>
+          <a:prstGeom prst="straightConnector1">
+            <a:avLst/>
+          </a:prstGeom>
+          <a:ln w="12700">
+            <a:solidFill>
+              <a:schemeClr val="tx1"/>
+            </a:solidFill>
+            <a:tailEnd type="arrow"/>
+          </a:ln>
+        </p:spPr>
+        <p:style>
+          <a:lnRef idx="1">
+            <a:schemeClr val="accent1"/>
+          </a:lnRef>
+          <a:fillRef idx="0">
+            <a:schemeClr val="accent1"/>
+          </a:fillRef>
+          <a:effectRef idx="0">
+            <a:schemeClr val="accent1"/>
+          </a:effectRef>
+          <a:fontRef idx="minor">
+            <a:schemeClr val="tx1"/>
+          </a:fontRef>
+        </p:style>
+      </p:cxnSp>
+      <p:sp>
+        <p:nvSpPr>
+          <p:cNvPr id="18" name="Rectangle 17">
+            <a:extLst>
+              <a:ext uri="{FF2B5EF4-FFF2-40B4-BE49-F238E27FC236}">
+                <a16:creationId xmlns:a16="http://schemas.microsoft.com/office/drawing/2014/main" id="{A3076D25-8CEE-9646-810A-41A2213E6726}"/>
+              </a:ext>
+            </a:extLst>
+          </p:cNvPr>
+          <p:cNvSpPr/>
+          <p:nvPr/>
+        </p:nvSpPr>
+        <p:spPr>
+          <a:xfrm>
+            <a:off x="776856" y="1495077"/>
+            <a:ext cx="393791" cy="106792"/>
+          </a:xfrm>
+          <a:prstGeom prst="rect">
+            <a:avLst/>
+          </a:prstGeom>
+          <a:solidFill>
+            <a:srgbClr val="7030A0"/>
+          </a:solidFill>
+          <a:ln w="6350" cap="rnd"/>
+        </p:spPr>
+        <p:style>
+          <a:lnRef idx="2">
+            <a:schemeClr val="accent1">
+              <a:shade val="15000"/>
+            </a:schemeClr>
+          </a:lnRef>
+          <a:fillRef idx="1">
+            <a:schemeClr val="accent1"/>
+          </a:fillRef>
+          <a:effectRef idx="0">
+            <a:schemeClr val="accent1"/>
+          </a:effectRef>
+          <a:fontRef idx="minor">
+            <a:schemeClr val="lt1"/>
+          </a:fontRef>
+        </p:style>
+        <p:txBody>
+          <a:bodyPr lIns="0" tIns="0" rIns="0" bIns="0" rtlCol="0" anchor="ctr"/>
+          <a:lstStyle/>
+          <a:p>
+            <a:pPr algn="ctr"/>
+            <a:r>
+              <a:rPr lang="en-US" sz="700" dirty="0"/>
+              <a:t>.py script</a:t>
+            </a:r>
+          </a:p>
+        </p:txBody>
+      </p:sp>
+      <p:sp>
+        <p:nvSpPr>
+          <p:cNvPr id="22" name="Rectangle 21">
+            <a:extLst>
+              <a:ext uri="{FF2B5EF4-FFF2-40B4-BE49-F238E27FC236}">
+                <a16:creationId xmlns:a16="http://schemas.microsoft.com/office/drawing/2014/main" id="{364D00D2-941A-8B09-7718-5B11749968F7}"/>
+              </a:ext>
+            </a:extLst>
+          </p:cNvPr>
+          <p:cNvSpPr/>
+          <p:nvPr/>
+        </p:nvSpPr>
+        <p:spPr>
+          <a:xfrm>
+            <a:off x="2726187" y="525195"/>
+            <a:ext cx="1256228" cy="1301519"/>
+          </a:xfrm>
+          <a:prstGeom prst="rect">
+            <a:avLst/>
+          </a:prstGeom>
+          <a:solidFill>
+            <a:srgbClr val="B17ED8"/>
+          </a:solidFill>
+        </p:spPr>
+        <p:style>
+          <a:lnRef idx="2">
+            <a:schemeClr val="accent1">
+              <a:shade val="15000"/>
+            </a:schemeClr>
+          </a:lnRef>
+          <a:fillRef idx="1">
+            <a:schemeClr val="accent1"/>
+          </a:fillRef>
+          <a:effectRef idx="0">
+            <a:schemeClr val="accent1"/>
+          </a:effectRef>
+          <a:fontRef idx="minor">
+            <a:schemeClr val="lt1"/>
+          </a:fontRef>
+        </p:style>
+        <p:txBody>
+          <a:bodyPr lIns="0" tIns="0" rIns="0" bIns="0" rtlCol="0" anchor="t"/>
+          <a:lstStyle/>
+          <a:p>
+            <a:pPr algn="ctr"/>
+            <a:endParaRPr lang="en-US" sz="900" dirty="0"/>
+          </a:p>
+          <a:p>
+            <a:pPr algn="ctr"/>
+            <a:r>
+              <a:rPr lang="en-US" dirty="0"/>
+              <a:t>DB Models</a:t>
+            </a:r>
+          </a:p>
+          <a:p>
+            <a:pPr algn="ctr"/>
+            <a:r>
+              <a:rPr lang="en-US" sz="1100" dirty="0"/>
+              <a:t>📚 </a:t>
+            </a:r>
+            <a:r>
+              <a:rPr lang="en-US" sz="1100" b="1" u="sng" dirty="0"/>
+              <a:t>SQLAlchemy</a:t>
+            </a:r>
+            <a:endParaRPr lang="en-US" sz="1200" b="1" u="sng" dirty="0"/>
+          </a:p>
+          <a:p>
+            <a:pPr algn="ctr"/>
+            <a:r>
+              <a:rPr lang="en-US" sz="1000" i="1" dirty="0"/>
+              <a:t>[ORM features]</a:t>
+            </a:r>
+          </a:p>
+          <a:p>
+            <a:pPr algn="ctr"/>
+            <a:endParaRPr lang="en-US" sz="1200" dirty="0"/>
+          </a:p>
+          <a:p>
+            <a:pPr algn="ctr"/>
+            <a:r>
+              <a:rPr lang="en-US" sz="1200" dirty="0"/>
+              <a:t>= full def. of DB tables</a:t>
+            </a:r>
+          </a:p>
+        </p:txBody>
+      </p:sp>
+      <p:sp>
+        <p:nvSpPr>
+          <p:cNvPr id="23" name="Rectangle 22">
+            <a:extLst>
+              <a:ext uri="{FF2B5EF4-FFF2-40B4-BE49-F238E27FC236}">
+                <a16:creationId xmlns:a16="http://schemas.microsoft.com/office/drawing/2014/main" id="{27C00856-EFA1-9B34-94C3-604CA6A2EACE}"/>
+              </a:ext>
+            </a:extLst>
+          </p:cNvPr>
+          <p:cNvSpPr/>
+          <p:nvPr/>
+        </p:nvSpPr>
+        <p:spPr>
+          <a:xfrm>
+            <a:off x="2752883" y="545219"/>
+            <a:ext cx="468643" cy="106792"/>
+          </a:xfrm>
+          <a:prstGeom prst="rect">
+            <a:avLst/>
+          </a:prstGeom>
+          <a:solidFill>
+            <a:srgbClr val="B17ED8"/>
+          </a:solidFill>
+          <a:ln w="6350" cap="rnd"/>
+        </p:spPr>
+        <p:style>
+          <a:lnRef idx="2">
+            <a:schemeClr val="accent1">
+              <a:shade val="15000"/>
+            </a:schemeClr>
+          </a:lnRef>
+          <a:fillRef idx="1">
+            <a:schemeClr val="accent1"/>
+          </a:fillRef>
+          <a:effectRef idx="0">
+            <a:schemeClr val="accent1"/>
+          </a:effectRef>
+          <a:fontRef idx="minor">
+            <a:schemeClr val="lt1"/>
+          </a:fontRef>
+        </p:style>
+        <p:txBody>
+          <a:bodyPr lIns="0" tIns="0" rIns="0" bIns="0" rtlCol="0" anchor="ctr"/>
+          <a:lstStyle/>
+          <a:p>
+            <a:pPr algn="ctr"/>
+            <a:r>
+              <a:rPr lang="en-US" sz="700" dirty="0"/>
+              <a:t>.py Classes</a:t>
+            </a:r>
+          </a:p>
+        </p:txBody>
+      </p:sp>
+      <p:sp>
+        <p:nvSpPr>
+          <p:cNvPr id="24" name="Rectangle 23">
+            <a:extLst>
+              <a:ext uri="{FF2B5EF4-FFF2-40B4-BE49-F238E27FC236}">
+                <a16:creationId xmlns:a16="http://schemas.microsoft.com/office/drawing/2014/main" id="{B6B29512-177E-E14A-AE56-6D351F134797}"/>
+              </a:ext>
+            </a:extLst>
+          </p:cNvPr>
+          <p:cNvSpPr/>
+          <p:nvPr/>
+        </p:nvSpPr>
+        <p:spPr>
+          <a:xfrm>
+            <a:off x="4355862" y="525194"/>
+            <a:ext cx="1256225" cy="1301519"/>
+          </a:xfrm>
+          <a:prstGeom prst="rect">
+            <a:avLst/>
+          </a:prstGeom>
+          <a:solidFill>
+            <a:srgbClr val="B17ED8"/>
+          </a:solidFill>
+        </p:spPr>
+        <p:style>
+          <a:lnRef idx="2">
+            <a:schemeClr val="accent1">
+              <a:shade val="15000"/>
+            </a:schemeClr>
+          </a:lnRef>
+          <a:fillRef idx="1">
+            <a:schemeClr val="accent1"/>
+          </a:fillRef>
+          <a:effectRef idx="0">
+            <a:schemeClr val="accent1"/>
+          </a:effectRef>
+          <a:fontRef idx="minor">
+            <a:schemeClr val="lt1"/>
+          </a:fontRef>
+        </p:style>
+        <p:txBody>
+          <a:bodyPr lIns="0" tIns="0" rIns="0" bIns="0" rtlCol="0" anchor="t"/>
+          <a:lstStyle/>
+          <a:p>
+            <a:pPr algn="ctr"/>
+            <a:endParaRPr lang="en-US" sz="900" dirty="0"/>
+          </a:p>
+          <a:p>
+            <a:pPr algn="ctr"/>
+            <a:r>
+              <a:rPr lang="en-US" dirty="0"/>
+              <a:t>DB Schemas</a:t>
+            </a:r>
+            <a:r>
+              <a:rPr lang="en-US" sz="1100" dirty="0"/>
+              <a:t>*</a:t>
+            </a:r>
+            <a:endParaRPr lang="en-US" dirty="0"/>
+          </a:p>
+          <a:p>
+            <a:pPr algn="ctr"/>
+            <a:r>
+              <a:rPr lang="en-US" sz="1100" dirty="0"/>
+              <a:t>📚 </a:t>
+            </a:r>
+            <a:r>
+              <a:rPr lang="en-US" sz="1100" b="1" u="sng" dirty="0"/>
+              <a:t>Pydantic</a:t>
+            </a:r>
+            <a:endParaRPr lang="en-US" sz="1200" b="1" u="sng" dirty="0"/>
+          </a:p>
+          <a:p>
+            <a:pPr algn="ctr"/>
+            <a:endParaRPr lang="en-US" sz="1100" dirty="0"/>
+          </a:p>
+          <a:p>
+            <a:pPr algn="ctr"/>
+            <a:endParaRPr lang="en-US" sz="1100" dirty="0"/>
+          </a:p>
+          <a:p>
+            <a:pPr algn="ctr"/>
+            <a:r>
+              <a:rPr lang="en-US" sz="1200" dirty="0"/>
+              <a:t>= full </a:t>
+            </a:r>
+            <a:r>
+              <a:rPr lang="en-US" sz="1200" u="sng" dirty="0"/>
+              <a:t>C</a:t>
+            </a:r>
+            <a:r>
+              <a:rPr lang="en-US" sz="1200" dirty="0"/>
+              <a:t>RUD def. </a:t>
+            </a:r>
+          </a:p>
+          <a:p>
+            <a:pPr algn="ctr"/>
+            <a:r>
+              <a:rPr lang="en-US" sz="1200" dirty="0"/>
+              <a:t>for DB Models</a:t>
+            </a:r>
+          </a:p>
+        </p:txBody>
+      </p:sp>
+      <p:sp>
+        <p:nvSpPr>
+          <p:cNvPr id="26" name="Rectangle 25">
+            <a:extLst>
+              <a:ext uri="{FF2B5EF4-FFF2-40B4-BE49-F238E27FC236}">
+                <a16:creationId xmlns:a16="http://schemas.microsoft.com/office/drawing/2014/main" id="{6ADA0233-98EE-002E-0424-5789D9F350B8}"/>
+              </a:ext>
+            </a:extLst>
+          </p:cNvPr>
+          <p:cNvSpPr/>
+          <p:nvPr/>
+        </p:nvSpPr>
+        <p:spPr>
+          <a:xfrm>
+            <a:off x="4382559" y="554046"/>
+            <a:ext cx="468643" cy="106884"/>
+          </a:xfrm>
+          <a:prstGeom prst="rect">
+            <a:avLst/>
+          </a:prstGeom>
+          <a:solidFill>
+            <a:srgbClr val="B17ED8"/>
+          </a:solidFill>
+          <a:ln w="6350" cap="rnd"/>
+        </p:spPr>
+        <p:style>
+          <a:lnRef idx="2">
+            <a:schemeClr val="accent1">
+              <a:shade val="15000"/>
+            </a:schemeClr>
+          </a:lnRef>
+          <a:fillRef idx="1">
+            <a:schemeClr val="accent1"/>
+          </a:fillRef>
+          <a:effectRef idx="0">
+            <a:schemeClr val="accent1"/>
+          </a:effectRef>
+          <a:fontRef idx="minor">
+            <a:schemeClr val="lt1"/>
+          </a:fontRef>
+        </p:style>
+        <p:txBody>
+          <a:bodyPr lIns="0" tIns="0" rIns="0" bIns="0" rtlCol="0" anchor="ctr"/>
+          <a:lstStyle/>
+          <a:p>
+            <a:pPr algn="ctr"/>
+            <a:r>
+              <a:rPr lang="en-US" sz="700" dirty="0"/>
+              <a:t>.py Classes</a:t>
+            </a:r>
+          </a:p>
+        </p:txBody>
+      </p:sp>
+      <p:cxnSp>
+        <p:nvCxnSpPr>
+          <p:cNvPr id="28" name="Straight Connector 27">
+            <a:extLst>
+              <a:ext uri="{FF2B5EF4-FFF2-40B4-BE49-F238E27FC236}">
+                <a16:creationId xmlns:a16="http://schemas.microsoft.com/office/drawing/2014/main" id="{C5419D62-D42D-8BD9-5B51-2E3513C3CF06}"/>
+              </a:ext>
+            </a:extLst>
+          </p:cNvPr>
+          <p:cNvCxnSpPr>
+            <a:cxnSpLocks/>
+            <a:stCxn id="22" idx="3"/>
+            <a:endCxn id="24" idx="1"/>
+          </p:cNvCxnSpPr>
+          <p:nvPr/>
+        </p:nvCxnSpPr>
+        <p:spPr>
+          <a:xfrm flipV="1">
+            <a:off x="3982415" y="1175954"/>
+            <a:ext cx="373447" cy="1"/>
+          </a:xfrm>
+          <a:prstGeom prst="line">
+            <a:avLst/>
+          </a:prstGeom>
+          <a:ln w="38100">
+            <a:solidFill>
+              <a:srgbClr val="B17ED8"/>
+            </a:solidFill>
+            <a:prstDash val="sysDot"/>
+          </a:ln>
+        </p:spPr>
+        <p:style>
+          <a:lnRef idx="1">
+            <a:schemeClr val="accent1"/>
+          </a:lnRef>
+          <a:fillRef idx="0">
+            <a:schemeClr val="accent1"/>
+          </a:fillRef>
+          <a:effectRef idx="0">
+            <a:schemeClr val="accent1"/>
+          </a:effectRef>
+          <a:fontRef idx="minor">
+            <a:schemeClr val="tx1"/>
+          </a:fontRef>
+        </p:style>
+      </p:cxnSp>
+      <p:sp>
+        <p:nvSpPr>
+          <p:cNvPr id="30" name="Rectangle 29">
+            <a:extLst>
+              <a:ext uri="{FF2B5EF4-FFF2-40B4-BE49-F238E27FC236}">
+                <a16:creationId xmlns:a16="http://schemas.microsoft.com/office/drawing/2014/main" id="{224BAD58-B4F3-1659-77BA-CF132D8185D8}"/>
+              </a:ext>
+            </a:extLst>
+          </p:cNvPr>
+          <p:cNvSpPr/>
+          <p:nvPr/>
+        </p:nvSpPr>
+        <p:spPr>
+          <a:xfrm>
+            <a:off x="2708399" y="2109901"/>
+            <a:ext cx="1256227" cy="862212"/>
+          </a:xfrm>
+          <a:prstGeom prst="rect">
+            <a:avLst/>
+          </a:prstGeom>
+          <a:solidFill>
+            <a:schemeClr val="accent5">
+              <a:lumMod val="75000"/>
+            </a:schemeClr>
+          </a:solidFill>
+        </p:spPr>
+        <p:style>
+          <a:lnRef idx="2">
+            <a:schemeClr val="accent1">
+              <a:shade val="15000"/>
+            </a:schemeClr>
+          </a:lnRef>
+          <a:fillRef idx="1">
+            <a:schemeClr val="accent1"/>
+          </a:fillRef>
+          <a:effectRef idx="0">
+            <a:schemeClr val="accent1"/>
+          </a:effectRef>
+          <a:fontRef idx="minor">
+            <a:schemeClr val="lt1"/>
+          </a:fontRef>
+        </p:style>
+        <p:txBody>
+          <a:bodyPr lIns="0" tIns="0" rIns="0" bIns="0" rtlCol="0" anchor="t"/>
+          <a:lstStyle/>
+          <a:p>
+            <a:pPr algn="ctr"/>
+            <a:endParaRPr lang="en-US" sz="900" dirty="0"/>
+          </a:p>
+          <a:p>
+            <a:pPr algn="ctr"/>
+            <a:r>
+              <a:rPr lang="en-US" sz="1100" dirty="0"/>
+              <a:t>📚 </a:t>
+            </a:r>
+            <a:r>
+              <a:rPr lang="en-US" sz="1100" b="1" u="sng" dirty="0"/>
+              <a:t>Alembic</a:t>
+            </a:r>
+            <a:endParaRPr lang="en-US" sz="1050" dirty="0"/>
+          </a:p>
+          <a:p>
+            <a:pPr algn="ctr"/>
+            <a:r>
+              <a:rPr lang="en-US" sz="700" i="1" dirty="0"/>
+              <a:t>Uses DB Models to create .py scripts to interact with the DB. </a:t>
+            </a:r>
+          </a:p>
+          <a:p>
+            <a:pPr algn="ctr"/>
+            <a:endParaRPr lang="en-US" sz="700" i="1" dirty="0"/>
+          </a:p>
+          <a:p>
+            <a:pPr algn="ctr"/>
+            <a:r>
+              <a:rPr lang="en-US" sz="700" i="1" dirty="0"/>
+              <a:t>One .py script per revision of the table, so migrations are built in.</a:t>
+            </a:r>
+          </a:p>
+        </p:txBody>
+      </p:sp>
+      <p:sp>
+        <p:nvSpPr>
+          <p:cNvPr id="31" name="Rectangle 30">
+            <a:extLst>
+              <a:ext uri="{FF2B5EF4-FFF2-40B4-BE49-F238E27FC236}">
+                <a16:creationId xmlns:a16="http://schemas.microsoft.com/office/drawing/2014/main" id="{0BE29473-1C83-BE93-4761-E6F6DF9E7F2B}"/>
+              </a:ext>
+            </a:extLst>
+          </p:cNvPr>
+          <p:cNvSpPr/>
+          <p:nvPr/>
+        </p:nvSpPr>
+        <p:spPr>
+          <a:xfrm>
+            <a:off x="2735095" y="2129925"/>
+            <a:ext cx="548737" cy="106790"/>
+          </a:xfrm>
+          <a:prstGeom prst="rect">
+            <a:avLst/>
+          </a:prstGeom>
+          <a:solidFill>
+            <a:srgbClr val="0070C0"/>
+          </a:solidFill>
+          <a:ln w="6350" cap="rnd"/>
+        </p:spPr>
+        <p:style>
+          <a:lnRef idx="2">
+            <a:schemeClr val="accent1">
+              <a:shade val="15000"/>
+            </a:schemeClr>
+          </a:lnRef>
+          <a:fillRef idx="1">
+            <a:schemeClr val="accent1"/>
+          </a:fillRef>
+          <a:effectRef idx="0">
+            <a:schemeClr val="accent1"/>
+          </a:effectRef>
+          <a:fontRef idx="minor">
+            <a:schemeClr val="lt1"/>
+          </a:fontRef>
+        </p:style>
+        <p:txBody>
+          <a:bodyPr lIns="0" tIns="0" rIns="0" bIns="0" rtlCol="0" anchor="ctr"/>
+          <a:lstStyle/>
+          <a:p>
+            <a:pPr algn="ctr"/>
+            <a:r>
+              <a:rPr lang="en-US" sz="700" dirty="0"/>
+              <a:t>Console cmd</a:t>
+            </a:r>
+          </a:p>
+        </p:txBody>
+      </p:sp>
+      <p:sp>
+        <p:nvSpPr>
+          <p:cNvPr id="39" name="Rectangle 38">
+            <a:extLst>
+              <a:ext uri="{FF2B5EF4-FFF2-40B4-BE49-F238E27FC236}">
+                <a16:creationId xmlns:a16="http://schemas.microsoft.com/office/drawing/2014/main" id="{CB8C5D96-3572-ED9D-3C46-499AF5791C7B}"/>
+              </a:ext>
+            </a:extLst>
+          </p:cNvPr>
+          <p:cNvSpPr/>
+          <p:nvPr/>
+        </p:nvSpPr>
+        <p:spPr>
+          <a:xfrm>
+            <a:off x="4337114" y="2109901"/>
+            <a:ext cx="1257184" cy="862209"/>
+          </a:xfrm>
+          <a:prstGeom prst="rect">
+            <a:avLst/>
+          </a:prstGeom>
+          <a:solidFill>
+            <a:srgbClr val="7030A0"/>
+          </a:solidFill>
+        </p:spPr>
+        <p:style>
+          <a:lnRef idx="2">
+            <a:schemeClr val="accent1">
+              <a:shade val="15000"/>
+            </a:schemeClr>
+          </a:lnRef>
+          <a:fillRef idx="1">
+            <a:schemeClr val="accent1"/>
+          </a:fillRef>
+          <a:effectRef idx="0">
+            <a:schemeClr val="accent1"/>
+          </a:effectRef>
+          <a:fontRef idx="minor">
+            <a:schemeClr val="lt1"/>
+          </a:fontRef>
+        </p:style>
+        <p:txBody>
+          <a:bodyPr rtlCol="0" anchor="t"/>
+          <a:lstStyle/>
+          <a:p>
+            <a:pPr algn="ctr"/>
+            <a:r>
+              <a:rPr lang="en-US" sz="1200" dirty="0">
+                <a:solidFill>
+                  <a:schemeClr val="bg1"/>
+                </a:solidFill>
+              </a:rPr>
+              <a:t>Python Scripts</a:t>
+            </a:r>
+          </a:p>
+          <a:p>
+            <a:pPr algn="ctr"/>
+            <a:r>
+              <a:rPr lang="en-US" sz="1200" dirty="0">
+                <a:solidFill>
+                  <a:schemeClr val="bg1"/>
+                </a:solidFill>
+              </a:rPr>
+              <a:t>📚 </a:t>
+            </a:r>
+            <a:r>
+              <a:rPr lang="en-US" sz="1200" u="sng" dirty="0">
+                <a:solidFill>
+                  <a:schemeClr val="bg1"/>
+                </a:solidFill>
+              </a:rPr>
+              <a:t>SQLAlchemy</a:t>
+            </a:r>
+          </a:p>
+          <a:p>
+            <a:pPr algn="ctr"/>
+            <a:r>
+              <a:rPr lang="en-US" sz="1100" i="1" dirty="0">
+                <a:solidFill>
+                  <a:schemeClr val="bg1"/>
+                </a:solidFill>
+              </a:rPr>
+              <a:t>[Core features]</a:t>
+            </a:r>
+          </a:p>
+          <a:p>
+            <a:pPr algn="ctr"/>
+            <a:endParaRPr lang="en-US" sz="900" dirty="0">
+              <a:solidFill>
+                <a:schemeClr val="bg1"/>
+              </a:solidFill>
+            </a:endParaRPr>
+          </a:p>
+          <a:p>
+            <a:pPr algn="ctr"/>
+            <a:r>
+              <a:rPr lang="en-US" sz="900" dirty="0">
+                <a:solidFill>
+                  <a:schemeClr val="bg1"/>
+                </a:solidFill>
+              </a:rPr>
+              <a:t>= create empty tables</a:t>
+            </a:r>
+          </a:p>
+        </p:txBody>
+      </p:sp>
+      <p:cxnSp>
+        <p:nvCxnSpPr>
+          <p:cNvPr id="40" name="Straight Arrow Connector 39">
+            <a:extLst>
+              <a:ext uri="{FF2B5EF4-FFF2-40B4-BE49-F238E27FC236}">
+                <a16:creationId xmlns:a16="http://schemas.microsoft.com/office/drawing/2014/main" id="{1AD9706D-EA7F-72ED-ECE2-A572DE446AF6}"/>
+              </a:ext>
+            </a:extLst>
+          </p:cNvPr>
+          <p:cNvCxnSpPr>
+            <a:cxnSpLocks/>
+            <a:stCxn id="30" idx="3"/>
+            <a:endCxn id="39" idx="1"/>
+          </p:cNvCxnSpPr>
+          <p:nvPr/>
+        </p:nvCxnSpPr>
+        <p:spPr>
+          <a:xfrm flipV="1">
+            <a:off x="3964626" y="2541006"/>
+            <a:ext cx="372488" cy="1"/>
+          </a:xfrm>
+          <a:prstGeom prst="straightConnector1">
+            <a:avLst/>
+          </a:prstGeom>
+          <a:ln w="12700">
+            <a:solidFill>
+              <a:schemeClr val="tx1"/>
+            </a:solidFill>
+            <a:tailEnd type="arrow"/>
+          </a:ln>
+        </p:spPr>
+        <p:style>
+          <a:lnRef idx="1">
+            <a:schemeClr val="accent1"/>
+          </a:lnRef>
+          <a:fillRef idx="0">
+            <a:schemeClr val="accent1"/>
+          </a:fillRef>
+          <a:effectRef idx="0">
+            <a:schemeClr val="accent1"/>
+          </a:effectRef>
+          <a:fontRef idx="minor">
+            <a:schemeClr val="tx1"/>
+          </a:fontRef>
+        </p:style>
+      </p:cxnSp>
+      <p:cxnSp>
+        <p:nvCxnSpPr>
+          <p:cNvPr id="48" name="Straight Arrow Connector 47">
+            <a:extLst>
+              <a:ext uri="{FF2B5EF4-FFF2-40B4-BE49-F238E27FC236}">
+                <a16:creationId xmlns:a16="http://schemas.microsoft.com/office/drawing/2014/main" id="{868C1553-8B20-D677-F8CD-C7BFBCDD1FFA}"/>
+              </a:ext>
+            </a:extLst>
+          </p:cNvPr>
+          <p:cNvCxnSpPr>
+            <a:cxnSpLocks/>
+          </p:cNvCxnSpPr>
+          <p:nvPr/>
+        </p:nvCxnSpPr>
+        <p:spPr>
+          <a:xfrm>
+            <a:off x="1871468" y="4033993"/>
+            <a:ext cx="836929" cy="0"/>
+          </a:xfrm>
+          <a:prstGeom prst="straightConnector1">
+            <a:avLst/>
+          </a:prstGeom>
+          <a:ln w="12700">
+            <a:solidFill>
+              <a:schemeClr val="tx1"/>
+            </a:solidFill>
+            <a:tailEnd type="arrow"/>
+          </a:ln>
+        </p:spPr>
+        <p:style>
+          <a:lnRef idx="1">
+            <a:schemeClr val="accent1"/>
+          </a:lnRef>
+          <a:fillRef idx="0">
+            <a:schemeClr val="accent1"/>
+          </a:fillRef>
+          <a:effectRef idx="0">
+            <a:schemeClr val="accent1"/>
+          </a:effectRef>
+          <a:fontRef idx="minor">
+            <a:schemeClr val="tx1"/>
+          </a:fontRef>
+        </p:style>
+      </p:cxnSp>
+      <p:sp>
+        <p:nvSpPr>
+          <p:cNvPr id="56" name="Rectangle 55">
+            <a:extLst>
+              <a:ext uri="{FF2B5EF4-FFF2-40B4-BE49-F238E27FC236}">
+                <a16:creationId xmlns:a16="http://schemas.microsoft.com/office/drawing/2014/main" id="{18ADDC4F-4E2B-6DBC-599E-3234D89DA381}"/>
+              </a:ext>
+            </a:extLst>
+          </p:cNvPr>
+          <p:cNvSpPr/>
+          <p:nvPr/>
+        </p:nvSpPr>
+        <p:spPr>
+          <a:xfrm>
+            <a:off x="2708397" y="3423732"/>
+            <a:ext cx="1483159" cy="1397845"/>
+          </a:xfrm>
+          <a:prstGeom prst="rect">
+            <a:avLst/>
+          </a:prstGeom>
+          <a:solidFill>
+            <a:srgbClr val="7030A0"/>
+          </a:solidFill>
+        </p:spPr>
+        <p:style>
+          <a:lnRef idx="2">
+            <a:schemeClr val="accent1">
+              <a:shade val="15000"/>
+            </a:schemeClr>
+          </a:lnRef>
+          <a:fillRef idx="1">
+            <a:schemeClr val="accent1"/>
+          </a:fillRef>
+          <a:effectRef idx="0">
+            <a:schemeClr val="accent1"/>
+          </a:effectRef>
+          <a:fontRef idx="minor">
+            <a:schemeClr val="lt1"/>
+          </a:fontRef>
+        </p:style>
+        <p:txBody>
+          <a:bodyPr lIns="0" tIns="0" rIns="0" bIns="0" rtlCol="0" anchor="t"/>
+          <a:lstStyle/>
+          <a:p>
+            <a:pPr algn="ctr"/>
+            <a:endParaRPr lang="en-US" sz="1100" dirty="0"/>
+          </a:p>
+          <a:p>
+            <a:pPr algn="ctr"/>
+            <a:r>
+              <a:rPr lang="en-US" sz="1600" dirty="0"/>
+              <a:t>Data Loader</a:t>
+            </a:r>
+          </a:p>
+          <a:p>
+            <a:pPr algn="ctr"/>
+            <a:r>
+              <a:rPr lang="en-US" sz="1050" dirty="0"/>
+              <a:t>📚 </a:t>
+            </a:r>
+            <a:r>
+              <a:rPr lang="en-US" sz="1050" b="1" u="sng" dirty="0"/>
+              <a:t>SQLAlchemy</a:t>
+            </a:r>
+          </a:p>
+          <a:p>
+            <a:pPr algn="ctr"/>
+            <a:r>
+              <a:rPr lang="en-US" sz="1050" i="1" dirty="0"/>
+              <a:t>[Core features]</a:t>
+            </a:r>
+          </a:p>
+          <a:p>
+            <a:pPr algn="ctr"/>
+            <a:endParaRPr lang="en-US" sz="1600" dirty="0"/>
+          </a:p>
+          <a:p>
+            <a:pPr algn="ctr"/>
+            <a:r>
+              <a:rPr lang="en-US" sz="1100" dirty="0"/>
+              <a:t>= uses Pydantic schemas to </a:t>
+            </a:r>
+            <a:r>
+              <a:rPr lang="en-US" sz="1100" u="sng" dirty="0"/>
+              <a:t>C</a:t>
+            </a:r>
+            <a:r>
+              <a:rPr lang="en-US" sz="1100" dirty="0"/>
+              <a:t>reate DB entries</a:t>
+            </a:r>
+          </a:p>
+        </p:txBody>
+      </p:sp>
+      <p:sp>
+        <p:nvSpPr>
+          <p:cNvPr id="57" name="Rectangle 56">
+            <a:extLst>
+              <a:ext uri="{FF2B5EF4-FFF2-40B4-BE49-F238E27FC236}">
+                <a16:creationId xmlns:a16="http://schemas.microsoft.com/office/drawing/2014/main" id="{6EFBF2C6-D8B2-6371-8BF3-2F3E1EEBEC33}"/>
+              </a:ext>
+            </a:extLst>
+          </p:cNvPr>
+          <p:cNvSpPr/>
+          <p:nvPr/>
+        </p:nvSpPr>
+        <p:spPr>
+          <a:xfrm>
+            <a:off x="2735094" y="3443755"/>
+            <a:ext cx="393791" cy="105966"/>
+          </a:xfrm>
+          <a:prstGeom prst="rect">
+            <a:avLst/>
+          </a:prstGeom>
+          <a:solidFill>
+            <a:srgbClr val="7030A0"/>
+          </a:solidFill>
+          <a:ln w="6350" cap="rnd"/>
+        </p:spPr>
+        <p:style>
+          <a:lnRef idx="2">
+            <a:schemeClr val="accent1">
+              <a:shade val="15000"/>
+            </a:schemeClr>
+          </a:lnRef>
+          <a:fillRef idx="1">
+            <a:schemeClr val="accent1"/>
+          </a:fillRef>
+          <a:effectRef idx="0">
+            <a:schemeClr val="accent1"/>
+          </a:effectRef>
+          <a:fontRef idx="minor">
+            <a:schemeClr val="lt1"/>
+          </a:fontRef>
+        </p:style>
+        <p:txBody>
+          <a:bodyPr lIns="0" tIns="0" rIns="0" bIns="0" rtlCol="0" anchor="ctr"/>
+          <a:lstStyle/>
+          <a:p>
+            <a:pPr algn="ctr"/>
+            <a:r>
+              <a:rPr lang="en-US" sz="700" dirty="0"/>
+              <a:t>.py script</a:t>
+            </a:r>
+          </a:p>
+        </p:txBody>
+      </p:sp>
+      <p:sp>
+        <p:nvSpPr>
+          <p:cNvPr id="71" name="Rectangle 70">
+            <a:extLst>
+              <a:ext uri="{FF2B5EF4-FFF2-40B4-BE49-F238E27FC236}">
+                <a16:creationId xmlns:a16="http://schemas.microsoft.com/office/drawing/2014/main" id="{DA968180-27A3-3E9A-375B-8DE4CA2771B5}"/>
+              </a:ext>
+            </a:extLst>
+          </p:cNvPr>
+          <p:cNvSpPr/>
+          <p:nvPr/>
+        </p:nvSpPr>
+        <p:spPr>
+          <a:xfrm>
+            <a:off x="4191556" y="3423732"/>
+            <a:ext cx="1454713" cy="1397845"/>
+          </a:xfrm>
+          <a:prstGeom prst="rect">
+            <a:avLst/>
+          </a:prstGeom>
+          <a:solidFill>
+            <a:srgbClr val="7030A0"/>
+          </a:solidFill>
+        </p:spPr>
+        <p:style>
+          <a:lnRef idx="2">
+            <a:schemeClr val="accent1">
+              <a:shade val="15000"/>
+            </a:schemeClr>
+          </a:lnRef>
+          <a:fillRef idx="1">
+            <a:schemeClr val="accent1"/>
+          </a:fillRef>
+          <a:effectRef idx="0">
+            <a:schemeClr val="accent1"/>
+          </a:effectRef>
+          <a:fontRef idx="minor">
+            <a:schemeClr val="lt1"/>
+          </a:fontRef>
+        </p:style>
+        <p:txBody>
+          <a:bodyPr lIns="91440" tIns="0" rIns="0" bIns="0" rtlCol="0" anchor="ctr"/>
+          <a:lstStyle/>
+          <a:p>
+            <a:pPr marL="228600" indent="-228600">
+              <a:buAutoNum type="arabicPeriod"/>
+            </a:pPr>
+            <a:r>
+              <a:rPr lang="en-US" sz="1100" dirty="0"/>
+              <a:t>Format data</a:t>
+            </a:r>
+          </a:p>
+          <a:p>
+            <a:pPr marL="228600" indent="-228600">
+              <a:buFontTx/>
+              <a:buAutoNum type="arabicPeriod"/>
+            </a:pPr>
+            <a:r>
+              <a:rPr lang="en-US" sz="1100" dirty="0"/>
+              <a:t>Validate data</a:t>
+            </a:r>
+          </a:p>
+          <a:p>
+            <a:pPr marL="228600" indent="-228600">
+              <a:buFontTx/>
+              <a:buAutoNum type="arabicPeriod"/>
+            </a:pPr>
+            <a:r>
+              <a:rPr lang="en-US" sz="1100" dirty="0"/>
+              <a:t>Create DB session</a:t>
+            </a:r>
+            <a:endParaRPr lang="en-US" sz="900" dirty="0"/>
+          </a:p>
+          <a:p>
+            <a:pPr marL="228600" indent="-228600">
+              <a:buAutoNum type="arabicPeriod"/>
+            </a:pPr>
+            <a:r>
+              <a:rPr lang="en-US" sz="1100" dirty="0"/>
+              <a:t>Insert data (DML)</a:t>
+            </a:r>
+          </a:p>
+          <a:p>
+            <a:pPr marL="228600" indent="-228600">
+              <a:buAutoNum type="arabicPeriod"/>
+            </a:pPr>
+            <a:r>
+              <a:rPr lang="en-US" sz="1100" dirty="0"/>
+              <a:t>Close DB session</a:t>
+            </a:r>
+          </a:p>
+        </p:txBody>
+      </p:sp>
+      <p:cxnSp>
+        <p:nvCxnSpPr>
+          <p:cNvPr id="99" name="Straight Arrow Connector 98">
+            <a:extLst>
+              <a:ext uri="{FF2B5EF4-FFF2-40B4-BE49-F238E27FC236}">
+                <a16:creationId xmlns:a16="http://schemas.microsoft.com/office/drawing/2014/main" id="{6ADBAB5C-DE88-EF69-101B-8D2E4902AEAA}"/>
+              </a:ext>
+            </a:extLst>
+          </p:cNvPr>
+          <p:cNvCxnSpPr>
+            <a:cxnSpLocks/>
+            <a:stCxn id="39" idx="3"/>
+          </p:cNvCxnSpPr>
+          <p:nvPr/>
+        </p:nvCxnSpPr>
+        <p:spPr>
+          <a:xfrm>
+            <a:off x="5594298" y="2541006"/>
+            <a:ext cx="1370627" cy="0"/>
+          </a:xfrm>
+          <a:prstGeom prst="straightConnector1">
+            <a:avLst/>
+          </a:prstGeom>
+          <a:ln w="12700">
+            <a:solidFill>
+              <a:schemeClr val="tx1"/>
+            </a:solidFill>
+            <a:tailEnd type="arrow"/>
+          </a:ln>
+        </p:spPr>
+        <p:style>
+          <a:lnRef idx="1">
+            <a:schemeClr val="accent1"/>
+          </a:lnRef>
+          <a:fillRef idx="0">
+            <a:schemeClr val="accent1"/>
+          </a:fillRef>
+          <a:effectRef idx="0">
+            <a:schemeClr val="accent1"/>
+          </a:effectRef>
+          <a:fontRef idx="minor">
+            <a:schemeClr val="tx1"/>
+          </a:fontRef>
+        </p:style>
+      </p:cxnSp>
+      <p:sp>
+        <p:nvSpPr>
+          <p:cNvPr id="124" name="Flowchart: Off-page Connector 123">
+            <a:extLst>
+              <a:ext uri="{FF2B5EF4-FFF2-40B4-BE49-F238E27FC236}">
+                <a16:creationId xmlns:a16="http://schemas.microsoft.com/office/drawing/2014/main" id="{FFF72933-46A1-BED1-D03A-C066DE79B3F5}"/>
+              </a:ext>
+            </a:extLst>
+          </p:cNvPr>
+          <p:cNvSpPr/>
+          <p:nvPr/>
+        </p:nvSpPr>
+        <p:spPr>
+          <a:xfrm rot="16200000">
+            <a:off x="4099174" y="431165"/>
+            <a:ext cx="186884" cy="240280"/>
+          </a:xfrm>
+          <a:prstGeom prst="flowChartOffpageConnector">
+            <a:avLst/>
+          </a:prstGeom>
+          <a:solidFill>
+            <a:schemeClr val="accent6">
+              <a:lumMod val="75000"/>
+            </a:schemeClr>
+          </a:solidFill>
+        </p:spPr>
+        <p:style>
+          <a:lnRef idx="2">
+            <a:schemeClr val="accent1">
+              <a:shade val="15000"/>
+            </a:schemeClr>
+          </a:lnRef>
+          <a:fillRef idx="1">
+            <a:schemeClr val="accent1"/>
+          </a:fillRef>
+          <a:effectRef idx="0">
+            <a:schemeClr val="accent1"/>
+          </a:effectRef>
+          <a:fontRef idx="minor">
+            <a:schemeClr val="lt1"/>
+          </a:fontRef>
+        </p:style>
+        <p:txBody>
+          <a:bodyPr vert="vert" rtlCol="0" anchor="ctr"/>
+          <a:lstStyle/>
+          <a:p>
+            <a:pPr algn="ctr"/>
+            <a:r>
+              <a:rPr lang="en-US" sz="1400" b="1" dirty="0"/>
+              <a:t>3</a:t>
+            </a:r>
+          </a:p>
+        </p:txBody>
+      </p:sp>
+      <p:sp>
+        <p:nvSpPr>
+          <p:cNvPr id="126" name="Flowchart: Off-page Connector 125">
+            <a:extLst>
+              <a:ext uri="{FF2B5EF4-FFF2-40B4-BE49-F238E27FC236}">
+                <a16:creationId xmlns:a16="http://schemas.microsoft.com/office/drawing/2014/main" id="{20EA467F-5D98-E1BD-6A83-6CF223ABC153}"/>
+              </a:ext>
+            </a:extLst>
+          </p:cNvPr>
+          <p:cNvSpPr/>
+          <p:nvPr/>
+        </p:nvSpPr>
+        <p:spPr>
+          <a:xfrm rot="16200000">
+            <a:off x="2469498" y="411603"/>
+            <a:ext cx="186884" cy="240280"/>
+          </a:xfrm>
+          <a:prstGeom prst="flowChartOffpageConnector">
+            <a:avLst/>
+          </a:prstGeom>
+          <a:solidFill>
+            <a:schemeClr val="accent6">
+              <a:lumMod val="75000"/>
+            </a:schemeClr>
+          </a:solidFill>
+        </p:spPr>
+        <p:style>
+          <a:lnRef idx="2">
+            <a:schemeClr val="accent1">
+              <a:shade val="15000"/>
+            </a:schemeClr>
+          </a:lnRef>
+          <a:fillRef idx="1">
+            <a:schemeClr val="accent1"/>
+          </a:fillRef>
+          <a:effectRef idx="0">
+            <a:schemeClr val="accent1"/>
+          </a:effectRef>
+          <a:fontRef idx="minor">
+            <a:schemeClr val="lt1"/>
+          </a:fontRef>
+        </p:style>
+        <p:txBody>
+          <a:bodyPr vert="vert" rtlCol="0" anchor="ctr"/>
+          <a:lstStyle/>
+          <a:p>
+            <a:pPr algn="ctr"/>
+            <a:r>
+              <a:rPr lang="en-US" sz="1400" b="1" dirty="0"/>
+              <a:t>2</a:t>
+            </a:r>
+          </a:p>
+        </p:txBody>
+      </p:sp>
+      <p:sp>
+        <p:nvSpPr>
+          <p:cNvPr id="127" name="Flowchart: Off-page Connector 126">
+            <a:extLst>
+              <a:ext uri="{FF2B5EF4-FFF2-40B4-BE49-F238E27FC236}">
+                <a16:creationId xmlns:a16="http://schemas.microsoft.com/office/drawing/2014/main" id="{B83CCE7B-8833-91AF-39C7-C901ED114F09}"/>
+              </a:ext>
+            </a:extLst>
+          </p:cNvPr>
+          <p:cNvSpPr/>
+          <p:nvPr/>
+        </p:nvSpPr>
+        <p:spPr>
+          <a:xfrm rot="16200000">
+            <a:off x="2474911" y="1996310"/>
+            <a:ext cx="186884" cy="240280"/>
+          </a:xfrm>
+          <a:prstGeom prst="flowChartOffpageConnector">
+            <a:avLst/>
+          </a:prstGeom>
+          <a:solidFill>
+            <a:schemeClr val="accent6">
+              <a:lumMod val="75000"/>
+            </a:schemeClr>
+          </a:solidFill>
+        </p:spPr>
+        <p:style>
+          <a:lnRef idx="2">
+            <a:schemeClr val="accent1">
+              <a:shade val="15000"/>
+            </a:schemeClr>
+          </a:lnRef>
+          <a:fillRef idx="1">
+            <a:schemeClr val="accent1"/>
+          </a:fillRef>
+          <a:effectRef idx="0">
+            <a:schemeClr val="accent1"/>
+          </a:effectRef>
+          <a:fontRef idx="minor">
+            <a:schemeClr val="lt1"/>
+          </a:fontRef>
+        </p:style>
+        <p:txBody>
+          <a:bodyPr vert="vert" rtlCol="0" anchor="ctr"/>
+          <a:lstStyle/>
+          <a:p>
+            <a:pPr algn="ctr"/>
+            <a:r>
+              <a:rPr lang="en-US" sz="1400" b="1" dirty="0"/>
+              <a:t>5</a:t>
+            </a:r>
+          </a:p>
+        </p:txBody>
+      </p:sp>
+      <p:sp>
+        <p:nvSpPr>
+          <p:cNvPr id="128" name="Flowchart: Off-page Connector 127">
+            <a:extLst>
+              <a:ext uri="{FF2B5EF4-FFF2-40B4-BE49-F238E27FC236}">
+                <a16:creationId xmlns:a16="http://schemas.microsoft.com/office/drawing/2014/main" id="{42F75857-E87E-058F-51C8-1D399174B498}"/>
+              </a:ext>
+            </a:extLst>
+          </p:cNvPr>
+          <p:cNvSpPr/>
+          <p:nvPr/>
+        </p:nvSpPr>
+        <p:spPr>
+          <a:xfrm>
+            <a:off x="6031126" y="2093476"/>
+            <a:ext cx="186884" cy="240280"/>
+          </a:xfrm>
+          <a:prstGeom prst="flowChartOffpageConnector">
+            <a:avLst/>
+          </a:prstGeom>
+          <a:solidFill>
+            <a:schemeClr val="accent6">
+              <a:lumMod val="75000"/>
+            </a:schemeClr>
+          </a:solidFill>
+        </p:spPr>
+        <p:style>
+          <a:lnRef idx="2">
+            <a:schemeClr val="accent1">
+              <a:shade val="15000"/>
+            </a:schemeClr>
+          </a:lnRef>
+          <a:fillRef idx="1">
+            <a:schemeClr val="accent1"/>
+          </a:fillRef>
+          <a:effectRef idx="0">
+            <a:schemeClr val="accent1"/>
+          </a:effectRef>
+          <a:fontRef idx="minor">
+            <a:schemeClr val="lt1"/>
+          </a:fontRef>
+        </p:style>
+        <p:txBody>
+          <a:bodyPr vert="horz" rtlCol="0" anchor="ctr"/>
+          <a:lstStyle/>
+          <a:p>
+            <a:pPr algn="ctr"/>
+            <a:r>
+              <a:rPr lang="en-US" sz="1400" b="1" dirty="0"/>
+              <a:t>6</a:t>
+            </a:r>
+          </a:p>
+        </p:txBody>
+      </p:sp>
+      <p:sp>
+        <p:nvSpPr>
+          <p:cNvPr id="133" name="Flowchart: Off-page Connector 132">
+            <a:extLst>
+              <a:ext uri="{FF2B5EF4-FFF2-40B4-BE49-F238E27FC236}">
+                <a16:creationId xmlns:a16="http://schemas.microsoft.com/office/drawing/2014/main" id="{30A73FCB-2CE0-1B09-BC6B-F51C1868D9BF}"/>
+              </a:ext>
+            </a:extLst>
+          </p:cNvPr>
+          <p:cNvSpPr/>
+          <p:nvPr/>
+        </p:nvSpPr>
+        <p:spPr>
+          <a:xfrm rot="16200000">
+            <a:off x="2450239" y="3309477"/>
+            <a:ext cx="186884" cy="240280"/>
+          </a:xfrm>
+          <a:prstGeom prst="flowChartOffpageConnector">
+            <a:avLst/>
+          </a:prstGeom>
+          <a:solidFill>
+            <a:schemeClr val="accent6">
+              <a:lumMod val="75000"/>
+            </a:schemeClr>
+          </a:solidFill>
+        </p:spPr>
+        <p:style>
+          <a:lnRef idx="2">
+            <a:schemeClr val="accent1">
+              <a:shade val="15000"/>
+            </a:schemeClr>
+          </a:lnRef>
+          <a:fillRef idx="1">
+            <a:schemeClr val="accent1"/>
+          </a:fillRef>
+          <a:effectRef idx="0">
+            <a:schemeClr val="accent1"/>
+          </a:effectRef>
+          <a:fontRef idx="minor">
+            <a:schemeClr val="lt1"/>
+          </a:fontRef>
+        </p:style>
+        <p:txBody>
+          <a:bodyPr vert="vert" rtlCol="0" anchor="ctr"/>
+          <a:lstStyle/>
+          <a:p>
+            <a:pPr algn="ctr"/>
+            <a:r>
+              <a:rPr lang="en-US" sz="1400" b="1" dirty="0"/>
+              <a:t>7</a:t>
+            </a:r>
+          </a:p>
+        </p:txBody>
+      </p:sp>
+      <p:sp>
+        <p:nvSpPr>
+          <p:cNvPr id="134" name="Flowchart: Off-page Connector 133">
+            <a:extLst>
+              <a:ext uri="{FF2B5EF4-FFF2-40B4-BE49-F238E27FC236}">
+                <a16:creationId xmlns:a16="http://schemas.microsoft.com/office/drawing/2014/main" id="{60790620-000B-44A0-F9C3-20F3163B41BC}"/>
+              </a:ext>
+            </a:extLst>
+          </p:cNvPr>
+          <p:cNvSpPr/>
+          <p:nvPr/>
+        </p:nvSpPr>
+        <p:spPr>
+          <a:xfrm rot="16200000">
+            <a:off x="508450" y="1361461"/>
+            <a:ext cx="186884" cy="240280"/>
+          </a:xfrm>
+          <a:prstGeom prst="flowChartOffpageConnector">
+            <a:avLst/>
+          </a:prstGeom>
+          <a:solidFill>
+            <a:schemeClr val="accent6">
+              <a:lumMod val="75000"/>
+            </a:schemeClr>
+          </a:solidFill>
+        </p:spPr>
+        <p:style>
+          <a:lnRef idx="2">
+            <a:schemeClr val="accent1">
+              <a:shade val="15000"/>
+            </a:schemeClr>
+          </a:lnRef>
+          <a:fillRef idx="1">
+            <a:schemeClr val="accent1"/>
+          </a:fillRef>
+          <a:effectRef idx="0">
+            <a:schemeClr val="accent1"/>
+          </a:effectRef>
+          <a:fontRef idx="minor">
+            <a:schemeClr val="lt1"/>
+          </a:fontRef>
+        </p:style>
+        <p:txBody>
+          <a:bodyPr vert="vert" rtlCol="0" anchor="ctr"/>
+          <a:lstStyle/>
+          <a:p>
+            <a:pPr algn="ctr"/>
+            <a:r>
+              <a:rPr lang="en-US" sz="1400" b="1" dirty="0"/>
+              <a:t>1</a:t>
+            </a:r>
+          </a:p>
+        </p:txBody>
+      </p:sp>
+      <p:sp>
+        <p:nvSpPr>
+          <p:cNvPr id="136" name="TextBox 135">
+            <a:extLst>
+              <a:ext uri="{FF2B5EF4-FFF2-40B4-BE49-F238E27FC236}">
+                <a16:creationId xmlns:a16="http://schemas.microsoft.com/office/drawing/2014/main" id="{7897557C-84DE-28C0-EADC-46D499135460}"/>
+              </a:ext>
+            </a:extLst>
+          </p:cNvPr>
+          <p:cNvSpPr txBox="1"/>
+          <p:nvPr/>
+        </p:nvSpPr>
+        <p:spPr>
+          <a:xfrm>
+            <a:off x="5884129" y="2350373"/>
+            <a:ext cx="452047" cy="169277"/>
+          </a:xfrm>
+          <a:prstGeom prst="rect">
+            <a:avLst/>
+          </a:prstGeom>
+          <a:noFill/>
+        </p:spPr>
+        <p:txBody>
+          <a:bodyPr wrap="none" lIns="0" tIns="0" rIns="0" bIns="0" rtlCol="0">
+            <a:spAutoFit/>
+          </a:bodyPr>
+          <a:lstStyle/>
+          <a:p>
+            <a:r>
+              <a:rPr lang="en-US" sz="1100" i="1" dirty="0"/>
+              <a:t>execute</a:t>
+            </a:r>
+          </a:p>
+        </p:txBody>
+      </p:sp>
+      <p:sp>
+        <p:nvSpPr>
+          <p:cNvPr id="144" name="Rectangle 143">
+            <a:extLst>
+              <a:ext uri="{FF2B5EF4-FFF2-40B4-BE49-F238E27FC236}">
+                <a16:creationId xmlns:a16="http://schemas.microsoft.com/office/drawing/2014/main" id="{7650598A-6719-CF54-C48F-A07EA23EDB3C}"/>
+              </a:ext>
+            </a:extLst>
+          </p:cNvPr>
+          <p:cNvSpPr/>
+          <p:nvPr/>
+        </p:nvSpPr>
+        <p:spPr>
+          <a:xfrm>
+            <a:off x="7174004" y="285725"/>
+            <a:ext cx="1196156" cy="321580"/>
+          </a:xfrm>
+          <a:prstGeom prst="rect">
+            <a:avLst/>
+          </a:prstGeom>
+          <a:solidFill>
+            <a:schemeClr val="bg1">
+              <a:lumMod val="85000"/>
+            </a:schemeClr>
+          </a:solidFill>
+        </p:spPr>
+        <p:style>
+          <a:lnRef idx="2">
+            <a:schemeClr val="accent1">
+              <a:shade val="15000"/>
+            </a:schemeClr>
+          </a:lnRef>
+          <a:fillRef idx="1">
+            <a:schemeClr val="accent1"/>
+          </a:fillRef>
+          <a:effectRef idx="0">
+            <a:schemeClr val="accent1"/>
+          </a:effectRef>
+          <a:fontRef idx="minor">
+            <a:schemeClr val="lt1"/>
+          </a:fontRef>
+        </p:style>
+        <p:txBody>
+          <a:bodyPr rtlCol="0" anchor="ctr"/>
+          <a:lstStyle/>
+          <a:p>
+            <a:pPr algn="ctr"/>
+            <a:r>
+              <a:rPr lang="en-US" sz="1100" dirty="0">
+                <a:solidFill>
+                  <a:schemeClr val="tx1"/>
+                </a:solidFill>
+              </a:rPr>
+              <a:t>.env file</a:t>
+            </a:r>
+          </a:p>
+          <a:p>
+            <a:pPr algn="ctr"/>
+            <a:r>
+              <a:rPr lang="en-US" sz="800" dirty="0">
+                <a:solidFill>
+                  <a:schemeClr val="tx1"/>
+                </a:solidFill>
+              </a:rPr>
+              <a:t>= admin creds, et al</a:t>
+            </a:r>
+          </a:p>
+        </p:txBody>
+      </p:sp>
+      <p:sp>
+        <p:nvSpPr>
+          <p:cNvPr id="151" name="Rectangle 150">
+            <a:extLst>
+              <a:ext uri="{FF2B5EF4-FFF2-40B4-BE49-F238E27FC236}">
+                <a16:creationId xmlns:a16="http://schemas.microsoft.com/office/drawing/2014/main" id="{A1F35192-1F23-1A7E-F982-7D8C8411CE14}"/>
+              </a:ext>
+            </a:extLst>
+          </p:cNvPr>
+          <p:cNvSpPr/>
+          <p:nvPr/>
+        </p:nvSpPr>
+        <p:spPr>
+          <a:xfrm>
+            <a:off x="4337114" y="2972111"/>
+            <a:ext cx="1249962" cy="118721"/>
+          </a:xfrm>
+          <a:prstGeom prst="rect">
+            <a:avLst/>
+          </a:prstGeom>
+          <a:solidFill>
+            <a:srgbClr val="B0B0B0"/>
+          </a:solidFill>
+          <a:ln w="6350" cap="rnd"/>
+        </p:spPr>
+        <p:style>
+          <a:lnRef idx="2">
+            <a:schemeClr val="accent1">
+              <a:shade val="15000"/>
+            </a:schemeClr>
+          </a:lnRef>
+          <a:fillRef idx="1">
+            <a:schemeClr val="accent1"/>
+          </a:fillRef>
+          <a:effectRef idx="0">
+            <a:schemeClr val="accent1"/>
+          </a:effectRef>
+          <a:fontRef idx="minor">
+            <a:schemeClr val="lt1"/>
+          </a:fontRef>
+        </p:style>
+        <p:txBody>
+          <a:bodyPr lIns="0" tIns="0" rIns="0" bIns="0" rtlCol="0" anchor="ctr"/>
+          <a:lstStyle/>
+          <a:p>
+            <a:pPr algn="ctr"/>
+            <a:r>
+              <a:rPr lang="en-US" sz="700" dirty="0"/>
+              <a:t>DDL = data def. language</a:t>
+            </a:r>
+          </a:p>
+        </p:txBody>
+      </p:sp>
+      <p:sp>
+        <p:nvSpPr>
+          <p:cNvPr id="152" name="Rectangle 151">
+            <a:extLst>
+              <a:ext uri="{FF2B5EF4-FFF2-40B4-BE49-F238E27FC236}">
+                <a16:creationId xmlns:a16="http://schemas.microsoft.com/office/drawing/2014/main" id="{1FCB8362-7307-7200-10E2-DA71601A0359}"/>
+              </a:ext>
+            </a:extLst>
+          </p:cNvPr>
+          <p:cNvSpPr/>
+          <p:nvPr/>
+        </p:nvSpPr>
+        <p:spPr>
+          <a:xfrm>
+            <a:off x="4191556" y="4821577"/>
+            <a:ext cx="1454713" cy="135515"/>
+          </a:xfrm>
+          <a:prstGeom prst="rect">
+            <a:avLst/>
+          </a:prstGeom>
+          <a:solidFill>
+            <a:srgbClr val="B0B0B0"/>
+          </a:solidFill>
+          <a:ln w="6350" cap="rnd"/>
+        </p:spPr>
+        <p:style>
+          <a:lnRef idx="2">
+            <a:schemeClr val="accent1">
+              <a:shade val="15000"/>
+            </a:schemeClr>
+          </a:lnRef>
+          <a:fillRef idx="1">
+            <a:schemeClr val="accent1"/>
+          </a:fillRef>
+          <a:effectRef idx="0">
+            <a:schemeClr val="accent1"/>
+          </a:effectRef>
+          <a:fontRef idx="minor">
+            <a:schemeClr val="lt1"/>
+          </a:fontRef>
+        </p:style>
+        <p:txBody>
+          <a:bodyPr lIns="0" tIns="0" rIns="0" bIns="0" rtlCol="0" anchor="ctr"/>
+          <a:lstStyle/>
+          <a:p>
+            <a:pPr algn="ctr"/>
+            <a:r>
+              <a:rPr lang="en-US" sz="700" dirty="0"/>
+              <a:t>DML = data manip. language</a:t>
+            </a:r>
+          </a:p>
+        </p:txBody>
+      </p:sp>
+      <p:sp>
+        <p:nvSpPr>
+          <p:cNvPr id="154" name="Rectangle 153">
+            <a:extLst>
+              <a:ext uri="{FF2B5EF4-FFF2-40B4-BE49-F238E27FC236}">
+                <a16:creationId xmlns:a16="http://schemas.microsoft.com/office/drawing/2014/main" id="{476FAA6E-532E-811B-061E-21BC7C89326A}"/>
+              </a:ext>
+            </a:extLst>
+          </p:cNvPr>
+          <p:cNvSpPr/>
+          <p:nvPr/>
+        </p:nvSpPr>
+        <p:spPr>
+          <a:xfrm>
+            <a:off x="750159" y="6406284"/>
+            <a:ext cx="5345841" cy="249337"/>
+          </a:xfrm>
+          <a:prstGeom prst="rect">
+            <a:avLst/>
+          </a:prstGeom>
+          <a:solidFill>
+            <a:schemeClr val="bg1"/>
+          </a:solidFill>
+          <a:ln w="6350" cap="rnd"/>
+        </p:spPr>
+        <p:style>
+          <a:lnRef idx="2">
+            <a:schemeClr val="accent1">
+              <a:shade val="15000"/>
+            </a:schemeClr>
+          </a:lnRef>
+          <a:fillRef idx="1">
+            <a:schemeClr val="accent1"/>
+          </a:fillRef>
+          <a:effectRef idx="0">
+            <a:schemeClr val="accent1"/>
+          </a:effectRef>
+          <a:fontRef idx="minor">
+            <a:schemeClr val="lt1"/>
+          </a:fontRef>
+        </p:style>
+        <p:txBody>
+          <a:bodyPr lIns="91440" tIns="0" rIns="0" bIns="0" rtlCol="0" anchor="ctr"/>
+          <a:lstStyle/>
+          <a:p>
+            <a:r>
+              <a:rPr lang="en-US" sz="800" dirty="0">
+                <a:solidFill>
+                  <a:schemeClr val="tx1"/>
+                </a:solidFill>
+              </a:rPr>
+              <a:t>* Schemas in common parlance refers actually to the DB Models created for SQLAlchemy , but Pydantic uses it to refer to these Data Transfer Objects which define the interface boundary for the underlying DB Models</a:t>
+            </a:r>
+          </a:p>
+        </p:txBody>
+      </p:sp>
+      <p:sp>
+        <p:nvSpPr>
+          <p:cNvPr id="158" name="Rectangle 157">
+            <a:extLst>
+              <a:ext uri="{FF2B5EF4-FFF2-40B4-BE49-F238E27FC236}">
+                <a16:creationId xmlns:a16="http://schemas.microsoft.com/office/drawing/2014/main" id="{B0430F05-8A2C-8D80-2161-C4CC2231EF01}"/>
+              </a:ext>
+            </a:extLst>
+          </p:cNvPr>
+          <p:cNvSpPr/>
+          <p:nvPr/>
+        </p:nvSpPr>
+        <p:spPr>
+          <a:xfrm>
+            <a:off x="7174882" y="1072218"/>
+            <a:ext cx="1196156" cy="500584"/>
+          </a:xfrm>
+          <a:prstGeom prst="rect">
+            <a:avLst/>
+          </a:prstGeom>
+          <a:solidFill>
+            <a:schemeClr val="accent2">
+              <a:lumMod val="60000"/>
+              <a:lumOff val="40000"/>
+            </a:schemeClr>
+          </a:solidFill>
+        </p:spPr>
+        <p:style>
+          <a:lnRef idx="2">
+            <a:schemeClr val="accent1">
+              <a:shade val="15000"/>
+            </a:schemeClr>
+          </a:lnRef>
+          <a:fillRef idx="1">
+            <a:schemeClr val="accent1"/>
+          </a:fillRef>
+          <a:effectRef idx="0">
+            <a:schemeClr val="accent1"/>
+          </a:effectRef>
+          <a:fontRef idx="minor">
+            <a:schemeClr val="lt1"/>
+          </a:fontRef>
+        </p:style>
+        <p:txBody>
+          <a:bodyPr lIns="0" tIns="0" rIns="0" bIns="0" rtlCol="0" anchor="t"/>
+          <a:lstStyle/>
+          <a:p>
+            <a:pPr algn="ctr"/>
+            <a:endParaRPr lang="en-US" sz="600" dirty="0"/>
+          </a:p>
+          <a:p>
+            <a:pPr algn="ctr"/>
+            <a:r>
+              <a:rPr lang="en-US" sz="1200" dirty="0"/>
+              <a:t>DB Web Viewer</a:t>
+            </a:r>
+          </a:p>
+          <a:p>
+            <a:pPr algn="ctr"/>
+            <a:r>
+              <a:rPr lang="en-US" sz="1100" dirty="0"/>
+              <a:t>📚 </a:t>
+            </a:r>
+            <a:r>
+              <a:rPr lang="en-US" sz="1100" b="1" u="sng" dirty="0"/>
+              <a:t>pg-admin</a:t>
+            </a:r>
+            <a:endParaRPr lang="en-US" sz="1100" dirty="0"/>
+          </a:p>
+        </p:txBody>
+      </p:sp>
+      <p:cxnSp>
+        <p:nvCxnSpPr>
+          <p:cNvPr id="159" name="Straight Arrow Connector 158">
+            <a:extLst>
+              <a:ext uri="{FF2B5EF4-FFF2-40B4-BE49-F238E27FC236}">
+                <a16:creationId xmlns:a16="http://schemas.microsoft.com/office/drawing/2014/main" id="{A1CFC8EC-97A6-89F7-7896-FC2523FC381B}"/>
+              </a:ext>
+            </a:extLst>
+          </p:cNvPr>
+          <p:cNvCxnSpPr>
+            <a:cxnSpLocks/>
+            <a:stCxn id="3" idx="2"/>
+            <a:endCxn id="15" idx="0"/>
+          </p:cNvCxnSpPr>
+          <p:nvPr/>
+        </p:nvCxnSpPr>
+        <p:spPr>
+          <a:xfrm>
+            <a:off x="7772082" y="1614725"/>
+            <a:ext cx="0" cy="294481"/>
+          </a:xfrm>
+          <a:prstGeom prst="straightConnector1">
+            <a:avLst/>
+          </a:prstGeom>
+          <a:ln w="12700">
+            <a:solidFill>
+              <a:schemeClr val="tx1"/>
+            </a:solidFill>
+            <a:headEnd type="arrow"/>
+            <a:tailEnd type="arrow"/>
+          </a:ln>
+        </p:spPr>
+        <p:style>
+          <a:lnRef idx="1">
+            <a:schemeClr val="accent1"/>
+          </a:lnRef>
+          <a:fillRef idx="0">
+            <a:schemeClr val="accent1"/>
+          </a:fillRef>
+          <a:effectRef idx="0">
+            <a:schemeClr val="accent1"/>
+          </a:effectRef>
+          <a:fontRef idx="minor">
+            <a:schemeClr val="tx1"/>
+          </a:fontRef>
+        </p:style>
+      </p:cxnSp>
+      <p:sp>
+        <p:nvSpPr>
+          <p:cNvPr id="27" name="Rectangle 26">
+            <a:extLst>
+              <a:ext uri="{FF2B5EF4-FFF2-40B4-BE49-F238E27FC236}">
+                <a16:creationId xmlns:a16="http://schemas.microsoft.com/office/drawing/2014/main" id="{91F4102F-EE91-ED5F-D7CB-CA4F588BB5A7}"/>
+              </a:ext>
+            </a:extLst>
+          </p:cNvPr>
+          <p:cNvSpPr/>
+          <p:nvPr/>
+        </p:nvSpPr>
+        <p:spPr>
+          <a:xfrm>
+            <a:off x="7306388" y="2919114"/>
+            <a:ext cx="931388" cy="206948"/>
+          </a:xfrm>
+          <a:prstGeom prst="rect">
+            <a:avLst/>
+          </a:prstGeom>
+          <a:solidFill>
+            <a:schemeClr val="accent2">
+              <a:lumMod val="60000"/>
+              <a:lumOff val="40000"/>
+            </a:schemeClr>
+          </a:solidFill>
+        </p:spPr>
+        <p:style>
+          <a:lnRef idx="2">
+            <a:schemeClr val="accent1">
+              <a:shade val="15000"/>
+            </a:schemeClr>
+          </a:lnRef>
+          <a:fillRef idx="1">
+            <a:schemeClr val="accent1"/>
+          </a:fillRef>
+          <a:effectRef idx="0">
+            <a:schemeClr val="accent1"/>
+          </a:effectRef>
+          <a:fontRef idx="minor">
+            <a:schemeClr val="lt1"/>
+          </a:fontRef>
+        </p:style>
+        <p:txBody>
+          <a:bodyPr lIns="0" tIns="0" rIns="0" bIns="0" rtlCol="0" anchor="ctr"/>
+          <a:lstStyle/>
+          <a:p>
+            <a:pPr algn="ctr"/>
+            <a:r>
+              <a:rPr lang="en-US" sz="1100" dirty="0"/>
+              <a:t>📚 </a:t>
+            </a:r>
+            <a:r>
+              <a:rPr lang="en-US" sz="1100" b="1" u="sng" dirty="0"/>
+              <a:t>pg-vector</a:t>
+            </a:r>
+          </a:p>
+        </p:txBody>
+      </p:sp>
+      <p:sp>
+        <p:nvSpPr>
+          <p:cNvPr id="37" name="Flowchart: Off-page Connector 36">
+            <a:extLst>
+              <a:ext uri="{FF2B5EF4-FFF2-40B4-BE49-F238E27FC236}">
+                <a16:creationId xmlns:a16="http://schemas.microsoft.com/office/drawing/2014/main" id="{A1051958-E2DE-29E1-E221-338CBEA4536B}"/>
+              </a:ext>
+            </a:extLst>
+          </p:cNvPr>
+          <p:cNvSpPr/>
+          <p:nvPr/>
+        </p:nvSpPr>
+        <p:spPr>
+          <a:xfrm rot="16200000">
+            <a:off x="6873161" y="571634"/>
+            <a:ext cx="186884" cy="240280"/>
+          </a:xfrm>
+          <a:prstGeom prst="flowChartOffpageConnector">
+            <a:avLst/>
+          </a:prstGeom>
+          <a:solidFill>
+            <a:schemeClr val="accent6">
+              <a:lumMod val="75000"/>
+            </a:schemeClr>
+          </a:solidFill>
+        </p:spPr>
+        <p:style>
+          <a:lnRef idx="2">
+            <a:schemeClr val="accent1">
+              <a:shade val="15000"/>
+            </a:schemeClr>
+          </a:lnRef>
+          <a:fillRef idx="1">
+            <a:schemeClr val="accent1"/>
+          </a:fillRef>
+          <a:effectRef idx="0">
+            <a:schemeClr val="accent1"/>
+          </a:effectRef>
+          <a:fontRef idx="minor">
+            <a:schemeClr val="lt1"/>
+          </a:fontRef>
+        </p:style>
+        <p:txBody>
+          <a:bodyPr vert="vert" rtlCol="0" anchor="ctr"/>
+          <a:lstStyle/>
+          <a:p>
+            <a:pPr algn="ctr"/>
+            <a:r>
+              <a:rPr lang="en-US" sz="1400" b="1" dirty="0"/>
+              <a:t>4</a:t>
+            </a:r>
+          </a:p>
+        </p:txBody>
+      </p:sp>
+      <p:sp>
+        <p:nvSpPr>
+          <p:cNvPr id="38" name="Flowchart: Off-page Connector 37">
+            <a:extLst>
+              <a:ext uri="{FF2B5EF4-FFF2-40B4-BE49-F238E27FC236}">
+                <a16:creationId xmlns:a16="http://schemas.microsoft.com/office/drawing/2014/main" id="{82D3151C-F370-4949-4E46-2EFDE6393040}"/>
+              </a:ext>
+            </a:extLst>
+          </p:cNvPr>
+          <p:cNvSpPr/>
+          <p:nvPr/>
+        </p:nvSpPr>
+        <p:spPr>
+          <a:xfrm rot="16200000">
+            <a:off x="6873161" y="2118787"/>
+            <a:ext cx="186884" cy="240280"/>
+          </a:xfrm>
+          <a:prstGeom prst="flowChartOffpageConnector">
+            <a:avLst/>
+          </a:prstGeom>
+          <a:solidFill>
+            <a:schemeClr val="accent6">
+              <a:lumMod val="75000"/>
+            </a:schemeClr>
+          </a:solidFill>
+        </p:spPr>
+        <p:style>
+          <a:lnRef idx="2">
+            <a:schemeClr val="accent1">
+              <a:shade val="15000"/>
+            </a:schemeClr>
+          </a:lnRef>
+          <a:fillRef idx="1">
+            <a:schemeClr val="accent1"/>
+          </a:fillRef>
+          <a:effectRef idx="0">
+            <a:schemeClr val="accent1"/>
+          </a:effectRef>
+          <a:fontRef idx="minor">
+            <a:schemeClr val="lt1"/>
+          </a:fontRef>
+        </p:style>
+        <p:txBody>
+          <a:bodyPr vert="vert" rtlCol="0" anchor="ctr"/>
+          <a:lstStyle/>
+          <a:p>
+            <a:pPr algn="ctr"/>
+            <a:r>
+              <a:rPr lang="en-US" sz="1400" b="1" dirty="0"/>
+              <a:t>4</a:t>
+            </a:r>
+          </a:p>
+        </p:txBody>
+      </p:sp>
+      <p:sp>
+        <p:nvSpPr>
+          <p:cNvPr id="14" name="Rectangle 13">
+            <a:extLst>
+              <a:ext uri="{FF2B5EF4-FFF2-40B4-BE49-F238E27FC236}">
+                <a16:creationId xmlns:a16="http://schemas.microsoft.com/office/drawing/2014/main" id="{7B3D0089-C192-CA16-D91B-29EDF91F0A0B}"/>
+              </a:ext>
+            </a:extLst>
+          </p:cNvPr>
+          <p:cNvSpPr/>
+          <p:nvPr/>
+        </p:nvSpPr>
+        <p:spPr>
+          <a:xfrm>
+            <a:off x="7114811" y="3384564"/>
+            <a:ext cx="1314542" cy="740680"/>
+          </a:xfrm>
+          <a:prstGeom prst="rect">
+            <a:avLst/>
+          </a:prstGeom>
+          <a:solidFill>
+            <a:schemeClr val="accent1">
+              <a:lumMod val="40000"/>
+              <a:lumOff val="60000"/>
+            </a:schemeClr>
+          </a:solidFill>
+        </p:spPr>
+        <p:style>
+          <a:lnRef idx="2">
+            <a:schemeClr val="accent1">
+              <a:shade val="15000"/>
+            </a:schemeClr>
+          </a:lnRef>
+          <a:fillRef idx="1">
+            <a:schemeClr val="accent1"/>
+          </a:fillRef>
+          <a:effectRef idx="0">
+            <a:schemeClr val="accent1"/>
+          </a:effectRef>
+          <a:fontRef idx="minor">
+            <a:schemeClr val="lt1"/>
+          </a:fontRef>
+        </p:style>
+        <p:txBody>
+          <a:bodyPr lIns="0" tIns="45720" rIns="0" bIns="0" rtlCol="0" anchor="t"/>
+          <a:lstStyle/>
+          <a:p>
+            <a:pPr algn="ctr"/>
+            <a:r>
+              <a:rPr lang="en-US" sz="900" b="1" dirty="0"/>
+              <a:t>🐳 Docker Container</a:t>
+            </a:r>
+          </a:p>
+          <a:p>
+            <a:pPr algn="ctr"/>
+            <a:r>
+              <a:rPr lang="en-US" sz="900" i="1" dirty="0"/>
+              <a:t>“pgvector/pgvector:pg17”</a:t>
+            </a:r>
+          </a:p>
+        </p:txBody>
+      </p:sp>
+      <p:sp>
+        <p:nvSpPr>
+          <p:cNvPr id="16" name="Rectangle 15">
+            <a:extLst>
+              <a:ext uri="{FF2B5EF4-FFF2-40B4-BE49-F238E27FC236}">
+                <a16:creationId xmlns:a16="http://schemas.microsoft.com/office/drawing/2014/main" id="{587C3EA7-BCBD-F703-4C04-1F10B55FC777}"/>
+              </a:ext>
+            </a:extLst>
+          </p:cNvPr>
+          <p:cNvSpPr/>
+          <p:nvPr/>
+        </p:nvSpPr>
+        <p:spPr>
+          <a:xfrm>
+            <a:off x="7174004" y="3720967"/>
+            <a:ext cx="1196156" cy="356069"/>
+          </a:xfrm>
+          <a:prstGeom prst="rect">
+            <a:avLst/>
+          </a:prstGeom>
+          <a:solidFill>
+            <a:schemeClr val="accent2">
+              <a:lumMod val="60000"/>
+              <a:lumOff val="40000"/>
+            </a:schemeClr>
+          </a:solidFill>
+        </p:spPr>
+        <p:style>
+          <a:lnRef idx="2">
+            <a:schemeClr val="accent1">
+              <a:shade val="15000"/>
+            </a:schemeClr>
+          </a:lnRef>
+          <a:fillRef idx="1">
+            <a:schemeClr val="accent1"/>
+          </a:fillRef>
+          <a:effectRef idx="0">
+            <a:schemeClr val="accent1"/>
+          </a:effectRef>
+          <a:fontRef idx="minor">
+            <a:schemeClr val="lt1"/>
+          </a:fontRef>
+        </p:style>
+        <p:txBody>
+          <a:bodyPr lIns="0" tIns="0" rIns="0" bIns="0" rtlCol="0" anchor="t"/>
+          <a:lstStyle/>
+          <a:p>
+            <a:pPr algn="ctr"/>
+            <a:r>
+              <a:rPr lang="en-US" sz="1050" b="1" dirty="0"/>
+              <a:t>Test</a:t>
+            </a:r>
+            <a:r>
+              <a:rPr lang="en-US" sz="900" dirty="0"/>
+              <a:t> PostgreSQL Server</a:t>
+            </a:r>
+          </a:p>
+        </p:txBody>
+      </p:sp>
+      <p:sp>
+        <p:nvSpPr>
+          <p:cNvPr id="17" name="Rectangle 16">
+            <a:extLst>
+              <a:ext uri="{FF2B5EF4-FFF2-40B4-BE49-F238E27FC236}">
+                <a16:creationId xmlns:a16="http://schemas.microsoft.com/office/drawing/2014/main" id="{2B814015-7DE2-E6CF-83DF-F2CFE2A7AB61}"/>
+              </a:ext>
+            </a:extLst>
+          </p:cNvPr>
+          <p:cNvSpPr/>
+          <p:nvPr/>
+        </p:nvSpPr>
+        <p:spPr>
+          <a:xfrm>
+            <a:off x="7381698" y="3903500"/>
+            <a:ext cx="780768" cy="149563"/>
+          </a:xfrm>
+          <a:prstGeom prst="rect">
+            <a:avLst/>
+          </a:prstGeom>
+          <a:solidFill>
+            <a:schemeClr val="accent2">
+              <a:lumMod val="60000"/>
+              <a:lumOff val="40000"/>
+            </a:schemeClr>
+          </a:solidFill>
+        </p:spPr>
+        <p:style>
+          <a:lnRef idx="2">
+            <a:schemeClr val="accent1">
+              <a:shade val="15000"/>
+            </a:schemeClr>
+          </a:lnRef>
+          <a:fillRef idx="1">
+            <a:schemeClr val="accent1"/>
+          </a:fillRef>
+          <a:effectRef idx="0">
+            <a:schemeClr val="accent1"/>
+          </a:effectRef>
+          <a:fontRef idx="minor">
+            <a:schemeClr val="lt1"/>
+          </a:fontRef>
+        </p:style>
+        <p:txBody>
+          <a:bodyPr lIns="0" tIns="0" rIns="0" bIns="0" rtlCol="0" anchor="ctr"/>
+          <a:lstStyle/>
+          <a:p>
+            <a:pPr algn="ctr"/>
+            <a:r>
+              <a:rPr lang="en-US" sz="800" dirty="0"/>
+              <a:t>📚 </a:t>
+            </a:r>
+            <a:r>
+              <a:rPr lang="en-US" sz="800" b="1" u="sng" dirty="0"/>
+              <a:t>pg-vector</a:t>
+            </a:r>
+          </a:p>
+        </p:txBody>
+      </p:sp>
+      <p:sp>
+        <p:nvSpPr>
+          <p:cNvPr id="19" name="Rectangle 18">
+            <a:extLst>
+              <a:ext uri="{FF2B5EF4-FFF2-40B4-BE49-F238E27FC236}">
+                <a16:creationId xmlns:a16="http://schemas.microsoft.com/office/drawing/2014/main" id="{A1E4815B-12EB-5B81-7205-419D7DA693D5}"/>
+              </a:ext>
+            </a:extLst>
+          </p:cNvPr>
+          <p:cNvSpPr/>
+          <p:nvPr/>
+        </p:nvSpPr>
+        <p:spPr>
+          <a:xfrm>
+            <a:off x="8834889" y="2514567"/>
+            <a:ext cx="993676" cy="740680"/>
           </a:xfrm>
           <a:prstGeom prst="rect">
             <a:avLst/>
@@ -3433,3011 +6027,6 @@
           </a:fontRef>
         </p:style>
         <p:txBody>
-          <a:bodyPr rtlCol="0" anchor="ctr"/>
-          <a:lstStyle/>
-          <a:p>
-            <a:pPr algn="ctr"/>
-            <a:endParaRPr lang="en-US" sz="1200" dirty="0">
-              <a:solidFill>
-                <a:schemeClr val="tx1"/>
-              </a:solidFill>
-            </a:endParaRPr>
-          </a:p>
-        </p:txBody>
-      </p:sp>
-      <p:sp>
-        <p:nvSpPr>
-          <p:cNvPr id="15" name="Rectangle 14">
-            <a:extLst>
-              <a:ext uri="{FF2B5EF4-FFF2-40B4-BE49-F238E27FC236}">
-                <a16:creationId xmlns:a16="http://schemas.microsoft.com/office/drawing/2014/main" id="{9BCFF54A-ABDC-829F-D38E-19DC6F0A6EAE}"/>
-              </a:ext>
-            </a:extLst>
-          </p:cNvPr>
-          <p:cNvSpPr/>
-          <p:nvPr/>
-        </p:nvSpPr>
-        <p:spPr>
-          <a:xfrm>
-            <a:off x="6647580" y="2736527"/>
-            <a:ext cx="1314542" cy="2595411"/>
-          </a:xfrm>
-          <a:prstGeom prst="rect">
-            <a:avLst/>
-          </a:prstGeom>
-          <a:solidFill>
-            <a:schemeClr val="accent1">
-              <a:lumMod val="40000"/>
-              <a:lumOff val="60000"/>
-            </a:schemeClr>
-          </a:solidFill>
-        </p:spPr>
-        <p:style>
-          <a:lnRef idx="2">
-            <a:schemeClr val="accent1">
-              <a:shade val="15000"/>
-            </a:schemeClr>
-          </a:lnRef>
-          <a:fillRef idx="1">
-            <a:schemeClr val="accent1"/>
-          </a:fillRef>
-          <a:effectRef idx="0">
-            <a:schemeClr val="accent1"/>
-          </a:effectRef>
-          <a:fontRef idx="minor">
-            <a:schemeClr val="lt1"/>
-          </a:fontRef>
-        </p:style>
-        <p:txBody>
-          <a:bodyPr lIns="0" tIns="45720" rIns="0" bIns="0" rtlCol="0" anchor="t"/>
-          <a:lstStyle/>
-          <a:p>
-            <a:pPr algn="ctr"/>
-            <a:r>
-              <a:rPr lang="en-US" sz="900" b="1" dirty="0"/>
-              <a:t>🐳 Docker Container</a:t>
-            </a:r>
-          </a:p>
-          <a:p>
-            <a:pPr algn="ctr"/>
-            <a:r>
-              <a:rPr lang="en-US" sz="900" i="1" dirty="0"/>
-              <a:t>“pgvector/pgvector:pg17”</a:t>
-            </a:r>
-          </a:p>
-        </p:txBody>
-      </p:sp>
-      <p:sp>
-        <p:nvSpPr>
-          <p:cNvPr id="3" name="Rectangle 2">
-            <a:extLst>
-              <a:ext uri="{FF2B5EF4-FFF2-40B4-BE49-F238E27FC236}">
-                <a16:creationId xmlns:a16="http://schemas.microsoft.com/office/drawing/2014/main" id="{CAAC8FDD-2CDB-1421-3C89-7271865A8AA6}"/>
-              </a:ext>
-            </a:extLst>
-          </p:cNvPr>
-          <p:cNvSpPr/>
-          <p:nvPr/>
-        </p:nvSpPr>
-        <p:spPr>
-          <a:xfrm>
-            <a:off x="6647580" y="1526062"/>
-            <a:ext cx="1314542" cy="922951"/>
-          </a:xfrm>
-          <a:prstGeom prst="rect">
-            <a:avLst/>
-          </a:prstGeom>
-          <a:solidFill>
-            <a:schemeClr val="accent1">
-              <a:lumMod val="40000"/>
-              <a:lumOff val="60000"/>
-            </a:schemeClr>
-          </a:solidFill>
-        </p:spPr>
-        <p:style>
-          <a:lnRef idx="2">
-            <a:schemeClr val="accent1">
-              <a:shade val="15000"/>
-            </a:schemeClr>
-          </a:lnRef>
-          <a:fillRef idx="1">
-            <a:schemeClr val="accent1"/>
-          </a:fillRef>
-          <a:effectRef idx="0">
-            <a:schemeClr val="accent1"/>
-          </a:effectRef>
-          <a:fontRef idx="minor">
-            <a:schemeClr val="lt1"/>
-          </a:fontRef>
-        </p:style>
-        <p:txBody>
-          <a:bodyPr lIns="0" tIns="45720" rIns="0" bIns="0" rtlCol="0" anchor="t"/>
-          <a:lstStyle/>
-          <a:p>
-            <a:pPr algn="ctr"/>
-            <a:r>
-              <a:rPr lang="en-US" sz="900" b="1" dirty="0"/>
-              <a:t>🐳 Docker Container</a:t>
-            </a:r>
-          </a:p>
-          <a:p>
-            <a:pPr algn="ctr"/>
-            <a:r>
-              <a:rPr lang="en-US" sz="900" i="1" dirty="0"/>
-              <a:t>“dpage/pgadmin4”</a:t>
-            </a:r>
-          </a:p>
-        </p:txBody>
-      </p:sp>
-      <p:sp>
-        <p:nvSpPr>
-          <p:cNvPr id="97" name="Rectangle 96">
-            <a:extLst>
-              <a:ext uri="{FF2B5EF4-FFF2-40B4-BE49-F238E27FC236}">
-                <a16:creationId xmlns:a16="http://schemas.microsoft.com/office/drawing/2014/main" id="{3648F25D-F87B-BA73-4E34-C9B47F8DEFFF}"/>
-              </a:ext>
-            </a:extLst>
-          </p:cNvPr>
-          <p:cNvSpPr/>
-          <p:nvPr/>
-        </p:nvSpPr>
-        <p:spPr>
-          <a:xfrm>
-            <a:off x="6706773" y="3290505"/>
-            <a:ext cx="1196156" cy="1978181"/>
-          </a:xfrm>
-          <a:prstGeom prst="rect">
-            <a:avLst/>
-          </a:prstGeom>
-          <a:solidFill>
-            <a:schemeClr val="accent2">
-              <a:lumMod val="60000"/>
-              <a:lumOff val="40000"/>
-            </a:schemeClr>
-          </a:solidFill>
-        </p:spPr>
-        <p:style>
-          <a:lnRef idx="2">
-            <a:schemeClr val="accent1">
-              <a:shade val="15000"/>
-            </a:schemeClr>
-          </a:lnRef>
-          <a:fillRef idx="1">
-            <a:schemeClr val="accent1"/>
-          </a:fillRef>
-          <a:effectRef idx="0">
-            <a:schemeClr val="accent1"/>
-          </a:effectRef>
-          <a:fontRef idx="minor">
-            <a:schemeClr val="lt1"/>
-          </a:fontRef>
-        </p:style>
-        <p:txBody>
-          <a:bodyPr lIns="0" tIns="0" rIns="0" bIns="0" rtlCol="0" anchor="t"/>
-          <a:lstStyle/>
-          <a:p>
-            <a:pPr algn="ctr"/>
-            <a:r>
-              <a:rPr lang="en-US" sz="1600" dirty="0"/>
-              <a:t>PostgreSQL Server</a:t>
-            </a:r>
-          </a:p>
-        </p:txBody>
-      </p:sp>
-      <p:sp>
-        <p:nvSpPr>
-          <p:cNvPr id="4" name="Thought Bubble: Cloud 3">
-            <a:extLst>
-              <a:ext uri="{FF2B5EF4-FFF2-40B4-BE49-F238E27FC236}">
-                <a16:creationId xmlns:a16="http://schemas.microsoft.com/office/drawing/2014/main" id="{AC1FB946-271A-7F06-1F3D-5F01BA6B3672}"/>
-              </a:ext>
-            </a:extLst>
-          </p:cNvPr>
-          <p:cNvSpPr/>
-          <p:nvPr/>
-        </p:nvSpPr>
-        <p:spPr>
-          <a:xfrm>
-            <a:off x="722032" y="327047"/>
-            <a:ext cx="1177564" cy="660952"/>
-          </a:xfrm>
-          <a:prstGeom prst="cloudCallout">
-            <a:avLst>
-              <a:gd name="adj1" fmla="val 964"/>
-              <a:gd name="adj2" fmla="val 111512"/>
-            </a:avLst>
-          </a:prstGeom>
-          <a:noFill/>
-        </p:spPr>
-        <p:style>
-          <a:lnRef idx="2">
-            <a:schemeClr val="accent1">
-              <a:shade val="15000"/>
-            </a:schemeClr>
-          </a:lnRef>
-          <a:fillRef idx="1">
-            <a:schemeClr val="accent1"/>
-          </a:fillRef>
-          <a:effectRef idx="0">
-            <a:schemeClr val="accent1"/>
-          </a:effectRef>
-          <a:fontRef idx="minor">
-            <a:schemeClr val="lt1"/>
-          </a:fontRef>
-        </p:style>
-        <p:txBody>
-          <a:bodyPr rtlCol="0" anchor="ctr"/>
-          <a:lstStyle/>
-          <a:p>
-            <a:pPr algn="ctr"/>
-            <a:r>
-              <a:rPr lang="en-US" sz="2800" b="1" dirty="0">
-                <a:solidFill>
-                  <a:schemeClr val="tx1"/>
-                </a:solidFill>
-              </a:rPr>
-              <a:t>SEC</a:t>
-            </a:r>
-          </a:p>
-        </p:txBody>
-      </p:sp>
-      <p:sp>
-        <p:nvSpPr>
-          <p:cNvPr id="5" name="Rectangle 4">
-            <a:extLst>
-              <a:ext uri="{FF2B5EF4-FFF2-40B4-BE49-F238E27FC236}">
-                <a16:creationId xmlns:a16="http://schemas.microsoft.com/office/drawing/2014/main" id="{A74C31EA-1C5A-D9F3-DE5D-D532F60566A9}"/>
-              </a:ext>
-            </a:extLst>
-          </p:cNvPr>
-          <p:cNvSpPr/>
-          <p:nvPr/>
-        </p:nvSpPr>
-        <p:spPr>
-          <a:xfrm>
-            <a:off x="750160" y="1475054"/>
-            <a:ext cx="1121308" cy="1361588"/>
-          </a:xfrm>
-          <a:prstGeom prst="rect">
-            <a:avLst/>
-          </a:prstGeom>
-          <a:solidFill>
-            <a:srgbClr val="7030A0"/>
-          </a:solidFill>
-        </p:spPr>
-        <p:style>
-          <a:lnRef idx="2">
-            <a:schemeClr val="accent1">
-              <a:shade val="15000"/>
-            </a:schemeClr>
-          </a:lnRef>
-          <a:fillRef idx="1">
-            <a:schemeClr val="accent1"/>
-          </a:fillRef>
-          <a:effectRef idx="0">
-            <a:schemeClr val="accent1"/>
-          </a:effectRef>
-          <a:fontRef idx="minor">
-            <a:schemeClr val="lt1"/>
-          </a:fontRef>
-        </p:style>
-        <p:txBody>
-          <a:bodyPr lIns="0" tIns="0" rIns="0" bIns="0" rtlCol="0" anchor="ctr"/>
-          <a:lstStyle/>
-          <a:p>
-            <a:pPr algn="ctr"/>
-            <a:r>
-              <a:rPr lang="en-US" dirty="0"/>
-              <a:t>Retrieval Client</a:t>
-            </a:r>
-          </a:p>
-          <a:p>
-            <a:pPr algn="ctr"/>
-            <a:r>
-              <a:rPr lang="en-US" sz="1100" dirty="0"/>
-              <a:t>📚 </a:t>
-            </a:r>
-            <a:r>
-              <a:rPr lang="en-US" sz="1100" u="sng" dirty="0"/>
-              <a:t>httpx</a:t>
-            </a:r>
-            <a:endParaRPr lang="en-US" u="sng" dirty="0"/>
-          </a:p>
-          <a:p>
-            <a:pPr algn="ctr"/>
-            <a:endParaRPr lang="en-US" sz="1050" dirty="0"/>
-          </a:p>
-          <a:p>
-            <a:pPr algn="ctr"/>
-            <a:r>
-              <a:rPr lang="en-US" sz="1000" dirty="0"/>
-              <a:t>= grabs data from site + stores locally</a:t>
-            </a:r>
-          </a:p>
-        </p:txBody>
-      </p:sp>
-      <p:sp>
-        <p:nvSpPr>
-          <p:cNvPr id="6" name="Rectangle 5">
-            <a:extLst>
-              <a:ext uri="{FF2B5EF4-FFF2-40B4-BE49-F238E27FC236}">
-                <a16:creationId xmlns:a16="http://schemas.microsoft.com/office/drawing/2014/main" id="{416172B8-57BB-0D77-7612-743EB92E5282}"/>
-              </a:ext>
-            </a:extLst>
-          </p:cNvPr>
-          <p:cNvSpPr/>
-          <p:nvPr/>
-        </p:nvSpPr>
-        <p:spPr>
-          <a:xfrm>
-            <a:off x="750160" y="3131739"/>
-            <a:ext cx="1121308" cy="548974"/>
-          </a:xfrm>
-          <a:prstGeom prst="rect">
-            <a:avLst/>
-          </a:prstGeom>
-          <a:solidFill>
-            <a:schemeClr val="bg1">
-              <a:lumMod val="85000"/>
-            </a:schemeClr>
-          </a:solidFill>
-        </p:spPr>
-        <p:style>
-          <a:lnRef idx="2">
-            <a:schemeClr val="accent1">
-              <a:shade val="15000"/>
-            </a:schemeClr>
-          </a:lnRef>
-          <a:fillRef idx="1">
-            <a:schemeClr val="accent1"/>
-          </a:fillRef>
-          <a:effectRef idx="0">
-            <a:schemeClr val="accent1"/>
-          </a:effectRef>
-          <a:fontRef idx="minor">
-            <a:schemeClr val="lt1"/>
-          </a:fontRef>
-        </p:style>
-        <p:txBody>
-          <a:bodyPr rtlCol="0" anchor="ctr"/>
-          <a:lstStyle/>
-          <a:p>
-            <a:pPr algn="ctr"/>
-            <a:r>
-              <a:rPr lang="en-US" sz="1200" dirty="0">
-                <a:solidFill>
-                  <a:schemeClr val="tx1"/>
-                </a:solidFill>
-              </a:rPr>
-              <a:t>HTTP Cache</a:t>
-            </a:r>
-          </a:p>
-        </p:txBody>
-      </p:sp>
-      <p:cxnSp>
-        <p:nvCxnSpPr>
-          <p:cNvPr id="8" name="Straight Arrow Connector 7">
-            <a:extLst>
-              <a:ext uri="{FF2B5EF4-FFF2-40B4-BE49-F238E27FC236}">
-                <a16:creationId xmlns:a16="http://schemas.microsoft.com/office/drawing/2014/main" id="{09C46E33-DA6D-C2D1-A479-21267E9A4CC8}"/>
-              </a:ext>
-            </a:extLst>
-          </p:cNvPr>
-          <p:cNvCxnSpPr>
-            <a:cxnSpLocks/>
-            <a:stCxn id="5" idx="2"/>
-            <a:endCxn id="6" idx="0"/>
-          </p:cNvCxnSpPr>
-          <p:nvPr/>
-        </p:nvCxnSpPr>
-        <p:spPr>
-          <a:xfrm>
-            <a:off x="1310814" y="2836642"/>
-            <a:ext cx="0" cy="295097"/>
-          </a:xfrm>
-          <a:prstGeom prst="straightConnector1">
-            <a:avLst/>
-          </a:prstGeom>
-          <a:ln w="12700">
-            <a:solidFill>
-              <a:schemeClr val="tx1"/>
-            </a:solidFill>
-            <a:tailEnd type="arrow"/>
-          </a:ln>
-        </p:spPr>
-        <p:style>
-          <a:lnRef idx="1">
-            <a:schemeClr val="accent1"/>
-          </a:lnRef>
-          <a:fillRef idx="0">
-            <a:schemeClr val="accent1"/>
-          </a:fillRef>
-          <a:effectRef idx="0">
-            <a:schemeClr val="accent1"/>
-          </a:effectRef>
-          <a:fontRef idx="minor">
-            <a:schemeClr val="tx1"/>
-          </a:fontRef>
-        </p:style>
-      </p:cxnSp>
-      <p:sp>
-        <p:nvSpPr>
-          <p:cNvPr id="11" name="Rectangle 10">
-            <a:extLst>
-              <a:ext uri="{FF2B5EF4-FFF2-40B4-BE49-F238E27FC236}">
-                <a16:creationId xmlns:a16="http://schemas.microsoft.com/office/drawing/2014/main" id="{3D486B51-56A3-85DE-929B-5ECA1F88C008}"/>
-              </a:ext>
-            </a:extLst>
-          </p:cNvPr>
-          <p:cNvSpPr/>
-          <p:nvPr/>
-        </p:nvSpPr>
-        <p:spPr>
-          <a:xfrm>
-            <a:off x="750160" y="4005286"/>
-            <a:ext cx="1121308" cy="1841530"/>
-          </a:xfrm>
-          <a:prstGeom prst="rect">
-            <a:avLst/>
-          </a:prstGeom>
-          <a:solidFill>
-            <a:schemeClr val="bg1">
-              <a:lumMod val="85000"/>
-            </a:schemeClr>
-          </a:solidFill>
-        </p:spPr>
-        <p:style>
-          <a:lnRef idx="2">
-            <a:schemeClr val="accent1">
-              <a:shade val="15000"/>
-            </a:schemeClr>
-          </a:lnRef>
-          <a:fillRef idx="1">
-            <a:schemeClr val="accent1"/>
-          </a:fillRef>
-          <a:effectRef idx="0">
-            <a:schemeClr val="accent1"/>
-          </a:effectRef>
-          <a:fontRef idx="minor">
-            <a:schemeClr val="lt1"/>
-          </a:fontRef>
-        </p:style>
-        <p:txBody>
-          <a:bodyPr rtlCol="0" anchor="ctr"/>
-          <a:lstStyle/>
-          <a:p>
-            <a:pPr algn="ctr"/>
-            <a:r>
-              <a:rPr lang="en-US" sz="1600" dirty="0">
-                <a:solidFill>
-                  <a:schemeClr val="tx1"/>
-                </a:solidFill>
-              </a:rPr>
-              <a:t>JSONs</a:t>
-            </a:r>
-            <a:endParaRPr lang="en-US" sz="1200" dirty="0">
-              <a:solidFill>
-                <a:schemeClr val="tx1"/>
-              </a:solidFill>
-            </a:endParaRPr>
-          </a:p>
-          <a:p>
-            <a:pPr algn="ctr"/>
-            <a:r>
-              <a:rPr lang="en-US" sz="1100" dirty="0">
-                <a:solidFill>
-                  <a:schemeClr val="tx1"/>
-                </a:solidFill>
-              </a:rPr>
-              <a:t>(Submissions + XBRL)</a:t>
-            </a:r>
-          </a:p>
-        </p:txBody>
-      </p:sp>
-      <p:cxnSp>
-        <p:nvCxnSpPr>
-          <p:cNvPr id="12" name="Straight Arrow Connector 11">
-            <a:extLst>
-              <a:ext uri="{FF2B5EF4-FFF2-40B4-BE49-F238E27FC236}">
-                <a16:creationId xmlns:a16="http://schemas.microsoft.com/office/drawing/2014/main" id="{235F020E-037C-F85F-539F-6183F10D6F3C}"/>
-              </a:ext>
-            </a:extLst>
-          </p:cNvPr>
-          <p:cNvCxnSpPr>
-            <a:cxnSpLocks/>
-            <a:stCxn id="6" idx="2"/>
-            <a:endCxn id="11" idx="0"/>
-          </p:cNvCxnSpPr>
-          <p:nvPr/>
-        </p:nvCxnSpPr>
-        <p:spPr>
-          <a:xfrm>
-            <a:off x="1310814" y="3680713"/>
-            <a:ext cx="0" cy="324573"/>
-          </a:xfrm>
-          <a:prstGeom prst="straightConnector1">
-            <a:avLst/>
-          </a:prstGeom>
-          <a:ln w="12700">
-            <a:solidFill>
-              <a:schemeClr val="tx1"/>
-            </a:solidFill>
-            <a:tailEnd type="arrow"/>
-          </a:ln>
-        </p:spPr>
-        <p:style>
-          <a:lnRef idx="1">
-            <a:schemeClr val="accent1"/>
-          </a:lnRef>
-          <a:fillRef idx="0">
-            <a:schemeClr val="accent1"/>
-          </a:fillRef>
-          <a:effectRef idx="0">
-            <a:schemeClr val="accent1"/>
-          </a:effectRef>
-          <a:fontRef idx="minor">
-            <a:schemeClr val="tx1"/>
-          </a:fontRef>
-        </p:style>
-      </p:cxnSp>
-      <p:sp>
-        <p:nvSpPr>
-          <p:cNvPr id="18" name="Rectangle 17">
-            <a:extLst>
-              <a:ext uri="{FF2B5EF4-FFF2-40B4-BE49-F238E27FC236}">
-                <a16:creationId xmlns:a16="http://schemas.microsoft.com/office/drawing/2014/main" id="{A3076D25-8CEE-9646-810A-41A2213E6726}"/>
-              </a:ext>
-            </a:extLst>
-          </p:cNvPr>
-          <p:cNvSpPr/>
-          <p:nvPr/>
-        </p:nvSpPr>
-        <p:spPr>
-          <a:xfrm>
-            <a:off x="776856" y="1495077"/>
-            <a:ext cx="393791" cy="106792"/>
-          </a:xfrm>
-          <a:prstGeom prst="rect">
-            <a:avLst/>
-          </a:prstGeom>
-          <a:solidFill>
-            <a:srgbClr val="7030A0"/>
-          </a:solidFill>
-          <a:ln w="6350" cap="rnd"/>
-        </p:spPr>
-        <p:style>
-          <a:lnRef idx="2">
-            <a:schemeClr val="accent1">
-              <a:shade val="15000"/>
-            </a:schemeClr>
-          </a:lnRef>
-          <a:fillRef idx="1">
-            <a:schemeClr val="accent1"/>
-          </a:fillRef>
-          <a:effectRef idx="0">
-            <a:schemeClr val="accent1"/>
-          </a:effectRef>
-          <a:fontRef idx="minor">
-            <a:schemeClr val="lt1"/>
-          </a:fontRef>
-        </p:style>
-        <p:txBody>
-          <a:bodyPr lIns="0" tIns="0" rIns="0" bIns="0" rtlCol="0" anchor="ctr"/>
-          <a:lstStyle/>
-          <a:p>
-            <a:pPr algn="ctr"/>
-            <a:r>
-              <a:rPr lang="en-US" sz="700" dirty="0"/>
-              <a:t>.py script</a:t>
-            </a:r>
-          </a:p>
-        </p:txBody>
-      </p:sp>
-      <p:sp>
-        <p:nvSpPr>
-          <p:cNvPr id="22" name="Rectangle 21">
-            <a:extLst>
-              <a:ext uri="{FF2B5EF4-FFF2-40B4-BE49-F238E27FC236}">
-                <a16:creationId xmlns:a16="http://schemas.microsoft.com/office/drawing/2014/main" id="{364D00D2-941A-8B09-7718-5B11749968F7}"/>
-              </a:ext>
-            </a:extLst>
-          </p:cNvPr>
-          <p:cNvSpPr/>
-          <p:nvPr/>
-        </p:nvSpPr>
-        <p:spPr>
-          <a:xfrm>
-            <a:off x="2726187" y="1051755"/>
-            <a:ext cx="1256228" cy="1301519"/>
-          </a:xfrm>
-          <a:prstGeom prst="rect">
-            <a:avLst/>
-          </a:prstGeom>
-          <a:solidFill>
-            <a:srgbClr val="B17ED8"/>
-          </a:solidFill>
-        </p:spPr>
-        <p:style>
-          <a:lnRef idx="2">
-            <a:schemeClr val="accent1">
-              <a:shade val="15000"/>
-            </a:schemeClr>
-          </a:lnRef>
-          <a:fillRef idx="1">
-            <a:schemeClr val="accent1"/>
-          </a:fillRef>
-          <a:effectRef idx="0">
-            <a:schemeClr val="accent1"/>
-          </a:effectRef>
-          <a:fontRef idx="minor">
-            <a:schemeClr val="lt1"/>
-          </a:fontRef>
-        </p:style>
-        <p:txBody>
-          <a:bodyPr lIns="0" tIns="0" rIns="0" bIns="0" rtlCol="0" anchor="t"/>
-          <a:lstStyle/>
-          <a:p>
-            <a:pPr algn="ctr"/>
-            <a:endParaRPr lang="en-US" sz="900" dirty="0"/>
-          </a:p>
-          <a:p>
-            <a:pPr algn="ctr"/>
-            <a:r>
-              <a:rPr lang="en-US" dirty="0"/>
-              <a:t>DB Models</a:t>
-            </a:r>
-          </a:p>
-          <a:p>
-            <a:pPr algn="ctr"/>
-            <a:r>
-              <a:rPr lang="en-US" sz="1100" dirty="0"/>
-              <a:t>📚 </a:t>
-            </a:r>
-            <a:r>
-              <a:rPr lang="en-US" sz="1100" b="1" u="sng" dirty="0"/>
-              <a:t>SQLAlchemy</a:t>
-            </a:r>
-            <a:endParaRPr lang="en-US" sz="1200" b="1" u="sng" dirty="0"/>
-          </a:p>
-          <a:p>
-            <a:pPr algn="ctr"/>
-            <a:r>
-              <a:rPr lang="en-US" sz="1000" i="1" dirty="0"/>
-              <a:t>[ORM features]</a:t>
-            </a:r>
-          </a:p>
-          <a:p>
-            <a:pPr algn="ctr"/>
-            <a:endParaRPr lang="en-US" sz="1200" dirty="0"/>
-          </a:p>
-          <a:p>
-            <a:pPr algn="ctr"/>
-            <a:r>
-              <a:rPr lang="en-US" sz="1200" dirty="0"/>
-              <a:t>= full def. of DB tables</a:t>
-            </a:r>
-          </a:p>
-        </p:txBody>
-      </p:sp>
-      <p:sp>
-        <p:nvSpPr>
-          <p:cNvPr id="23" name="Rectangle 22">
-            <a:extLst>
-              <a:ext uri="{FF2B5EF4-FFF2-40B4-BE49-F238E27FC236}">
-                <a16:creationId xmlns:a16="http://schemas.microsoft.com/office/drawing/2014/main" id="{27C00856-EFA1-9B34-94C3-604CA6A2EACE}"/>
-              </a:ext>
-            </a:extLst>
-          </p:cNvPr>
-          <p:cNvSpPr/>
-          <p:nvPr/>
-        </p:nvSpPr>
-        <p:spPr>
-          <a:xfrm>
-            <a:off x="2752883" y="1071779"/>
-            <a:ext cx="468643" cy="106792"/>
-          </a:xfrm>
-          <a:prstGeom prst="rect">
-            <a:avLst/>
-          </a:prstGeom>
-          <a:solidFill>
-            <a:srgbClr val="B17ED8"/>
-          </a:solidFill>
-          <a:ln w="6350" cap="rnd"/>
-        </p:spPr>
-        <p:style>
-          <a:lnRef idx="2">
-            <a:schemeClr val="accent1">
-              <a:shade val="15000"/>
-            </a:schemeClr>
-          </a:lnRef>
-          <a:fillRef idx="1">
-            <a:schemeClr val="accent1"/>
-          </a:fillRef>
-          <a:effectRef idx="0">
-            <a:schemeClr val="accent1"/>
-          </a:effectRef>
-          <a:fontRef idx="minor">
-            <a:schemeClr val="lt1"/>
-          </a:fontRef>
-        </p:style>
-        <p:txBody>
-          <a:bodyPr lIns="0" tIns="0" rIns="0" bIns="0" rtlCol="0" anchor="ctr"/>
-          <a:lstStyle/>
-          <a:p>
-            <a:pPr algn="ctr"/>
-            <a:r>
-              <a:rPr lang="en-US" sz="700" dirty="0"/>
-              <a:t>.py Classes</a:t>
-            </a:r>
-          </a:p>
-        </p:txBody>
-      </p:sp>
-      <p:sp>
-        <p:nvSpPr>
-          <p:cNvPr id="24" name="Rectangle 23">
-            <a:extLst>
-              <a:ext uri="{FF2B5EF4-FFF2-40B4-BE49-F238E27FC236}">
-                <a16:creationId xmlns:a16="http://schemas.microsoft.com/office/drawing/2014/main" id="{B6B29512-177E-E14A-AE56-6D351F134797}"/>
-              </a:ext>
-            </a:extLst>
-          </p:cNvPr>
-          <p:cNvSpPr/>
-          <p:nvPr/>
-        </p:nvSpPr>
-        <p:spPr>
-          <a:xfrm>
-            <a:off x="4355862" y="1051754"/>
-            <a:ext cx="1256225" cy="1301519"/>
-          </a:xfrm>
-          <a:prstGeom prst="rect">
-            <a:avLst/>
-          </a:prstGeom>
-          <a:solidFill>
-            <a:srgbClr val="B17ED8"/>
-          </a:solidFill>
-        </p:spPr>
-        <p:style>
-          <a:lnRef idx="2">
-            <a:schemeClr val="accent1">
-              <a:shade val="15000"/>
-            </a:schemeClr>
-          </a:lnRef>
-          <a:fillRef idx="1">
-            <a:schemeClr val="accent1"/>
-          </a:fillRef>
-          <a:effectRef idx="0">
-            <a:schemeClr val="accent1"/>
-          </a:effectRef>
-          <a:fontRef idx="minor">
-            <a:schemeClr val="lt1"/>
-          </a:fontRef>
-        </p:style>
-        <p:txBody>
-          <a:bodyPr lIns="0" tIns="0" rIns="0" bIns="0" rtlCol="0" anchor="t"/>
-          <a:lstStyle/>
-          <a:p>
-            <a:pPr algn="ctr"/>
-            <a:endParaRPr lang="en-US" sz="900" dirty="0"/>
-          </a:p>
-          <a:p>
-            <a:pPr algn="ctr"/>
-            <a:r>
-              <a:rPr lang="en-US" dirty="0"/>
-              <a:t>DB Schemas</a:t>
-            </a:r>
-            <a:r>
-              <a:rPr lang="en-US" sz="1100" dirty="0"/>
-              <a:t>*</a:t>
-            </a:r>
-            <a:endParaRPr lang="en-US" dirty="0"/>
-          </a:p>
-          <a:p>
-            <a:pPr algn="ctr"/>
-            <a:r>
-              <a:rPr lang="en-US" sz="1100" dirty="0"/>
-              <a:t>📚 </a:t>
-            </a:r>
-            <a:r>
-              <a:rPr lang="en-US" sz="1100" b="1" u="sng" dirty="0"/>
-              <a:t>Pydantic</a:t>
-            </a:r>
-            <a:endParaRPr lang="en-US" sz="1200" b="1" u="sng" dirty="0"/>
-          </a:p>
-          <a:p>
-            <a:pPr algn="ctr"/>
-            <a:endParaRPr lang="en-US" sz="1100" dirty="0"/>
-          </a:p>
-          <a:p>
-            <a:pPr algn="ctr"/>
-            <a:endParaRPr lang="en-US" sz="1100" dirty="0"/>
-          </a:p>
-          <a:p>
-            <a:pPr algn="ctr"/>
-            <a:r>
-              <a:rPr lang="en-US" sz="1200" dirty="0"/>
-              <a:t>= full </a:t>
-            </a:r>
-            <a:r>
-              <a:rPr lang="en-US" sz="1200" u="sng" dirty="0"/>
-              <a:t>C</a:t>
-            </a:r>
-            <a:r>
-              <a:rPr lang="en-US" sz="1200" dirty="0"/>
-              <a:t>RUD def. </a:t>
-            </a:r>
-          </a:p>
-          <a:p>
-            <a:pPr algn="ctr"/>
-            <a:r>
-              <a:rPr lang="en-US" sz="1200" dirty="0"/>
-              <a:t>for DB Models</a:t>
-            </a:r>
-          </a:p>
-        </p:txBody>
-      </p:sp>
-      <p:sp>
-        <p:nvSpPr>
-          <p:cNvPr id="26" name="Rectangle 25">
-            <a:extLst>
-              <a:ext uri="{FF2B5EF4-FFF2-40B4-BE49-F238E27FC236}">
-                <a16:creationId xmlns:a16="http://schemas.microsoft.com/office/drawing/2014/main" id="{6ADA0233-98EE-002E-0424-5789D9F350B8}"/>
-              </a:ext>
-            </a:extLst>
-          </p:cNvPr>
-          <p:cNvSpPr/>
-          <p:nvPr/>
-        </p:nvSpPr>
-        <p:spPr>
-          <a:xfrm>
-            <a:off x="4382559" y="1080606"/>
-            <a:ext cx="468643" cy="106884"/>
-          </a:xfrm>
-          <a:prstGeom prst="rect">
-            <a:avLst/>
-          </a:prstGeom>
-          <a:solidFill>
-            <a:srgbClr val="B17ED8"/>
-          </a:solidFill>
-          <a:ln w="6350" cap="rnd"/>
-        </p:spPr>
-        <p:style>
-          <a:lnRef idx="2">
-            <a:schemeClr val="accent1">
-              <a:shade val="15000"/>
-            </a:schemeClr>
-          </a:lnRef>
-          <a:fillRef idx="1">
-            <a:schemeClr val="accent1"/>
-          </a:fillRef>
-          <a:effectRef idx="0">
-            <a:schemeClr val="accent1"/>
-          </a:effectRef>
-          <a:fontRef idx="minor">
-            <a:schemeClr val="lt1"/>
-          </a:fontRef>
-        </p:style>
-        <p:txBody>
-          <a:bodyPr lIns="0" tIns="0" rIns="0" bIns="0" rtlCol="0" anchor="ctr"/>
-          <a:lstStyle/>
-          <a:p>
-            <a:pPr algn="ctr"/>
-            <a:r>
-              <a:rPr lang="en-US" sz="700" dirty="0"/>
-              <a:t>.py Classes</a:t>
-            </a:r>
-          </a:p>
-        </p:txBody>
-      </p:sp>
-      <p:cxnSp>
-        <p:nvCxnSpPr>
-          <p:cNvPr id="28" name="Straight Connector 27">
-            <a:extLst>
-              <a:ext uri="{FF2B5EF4-FFF2-40B4-BE49-F238E27FC236}">
-                <a16:creationId xmlns:a16="http://schemas.microsoft.com/office/drawing/2014/main" id="{C5419D62-D42D-8BD9-5B51-2E3513C3CF06}"/>
-              </a:ext>
-            </a:extLst>
-          </p:cNvPr>
-          <p:cNvCxnSpPr>
-            <a:cxnSpLocks/>
-            <a:stCxn id="22" idx="3"/>
-            <a:endCxn id="24" idx="1"/>
-          </p:cNvCxnSpPr>
-          <p:nvPr/>
-        </p:nvCxnSpPr>
-        <p:spPr>
-          <a:xfrm flipV="1">
-            <a:off x="3982415" y="1702514"/>
-            <a:ext cx="373447" cy="1"/>
-          </a:xfrm>
-          <a:prstGeom prst="line">
-            <a:avLst/>
-          </a:prstGeom>
-          <a:ln w="38100">
-            <a:solidFill>
-              <a:srgbClr val="B17ED8"/>
-            </a:solidFill>
-            <a:prstDash val="sysDot"/>
-          </a:ln>
-        </p:spPr>
-        <p:style>
-          <a:lnRef idx="1">
-            <a:schemeClr val="accent1"/>
-          </a:lnRef>
-          <a:fillRef idx="0">
-            <a:schemeClr val="accent1"/>
-          </a:fillRef>
-          <a:effectRef idx="0">
-            <a:schemeClr val="accent1"/>
-          </a:effectRef>
-          <a:fontRef idx="minor">
-            <a:schemeClr val="tx1"/>
-          </a:fontRef>
-        </p:style>
-      </p:cxnSp>
-      <p:sp>
-        <p:nvSpPr>
-          <p:cNvPr id="30" name="Rectangle 29">
-            <a:extLst>
-              <a:ext uri="{FF2B5EF4-FFF2-40B4-BE49-F238E27FC236}">
-                <a16:creationId xmlns:a16="http://schemas.microsoft.com/office/drawing/2014/main" id="{224BAD58-B4F3-1659-77BA-CF132D8185D8}"/>
-              </a:ext>
-            </a:extLst>
-          </p:cNvPr>
-          <p:cNvSpPr/>
-          <p:nvPr/>
-        </p:nvSpPr>
-        <p:spPr>
-          <a:xfrm>
-            <a:off x="2708399" y="2973922"/>
-            <a:ext cx="1256227" cy="862212"/>
-          </a:xfrm>
-          <a:prstGeom prst="rect">
-            <a:avLst/>
-          </a:prstGeom>
-          <a:solidFill>
-            <a:schemeClr val="accent5">
-              <a:lumMod val="75000"/>
-            </a:schemeClr>
-          </a:solidFill>
-        </p:spPr>
-        <p:style>
-          <a:lnRef idx="2">
-            <a:schemeClr val="accent1">
-              <a:shade val="15000"/>
-            </a:schemeClr>
-          </a:lnRef>
-          <a:fillRef idx="1">
-            <a:schemeClr val="accent1"/>
-          </a:fillRef>
-          <a:effectRef idx="0">
-            <a:schemeClr val="accent1"/>
-          </a:effectRef>
-          <a:fontRef idx="minor">
-            <a:schemeClr val="lt1"/>
-          </a:fontRef>
-        </p:style>
-        <p:txBody>
-          <a:bodyPr lIns="0" tIns="0" rIns="0" bIns="0" rtlCol="0" anchor="t"/>
-          <a:lstStyle/>
-          <a:p>
-            <a:pPr algn="ctr"/>
-            <a:endParaRPr lang="en-US" sz="900" dirty="0"/>
-          </a:p>
-          <a:p>
-            <a:pPr algn="ctr"/>
-            <a:r>
-              <a:rPr lang="en-US" sz="1100" dirty="0"/>
-              <a:t>📚 </a:t>
-            </a:r>
-            <a:r>
-              <a:rPr lang="en-US" sz="1100" b="1" u="sng" dirty="0"/>
-              <a:t>Alembic</a:t>
-            </a:r>
-            <a:endParaRPr lang="en-US" sz="1050" dirty="0"/>
-          </a:p>
-          <a:p>
-            <a:pPr algn="ctr"/>
-            <a:r>
-              <a:rPr lang="en-US" sz="700" i="1" dirty="0"/>
-              <a:t>Uses DB Models to create .py scripts to interact with the DB. </a:t>
-            </a:r>
-          </a:p>
-          <a:p>
-            <a:pPr algn="ctr"/>
-            <a:endParaRPr lang="en-US" sz="700" i="1" dirty="0"/>
-          </a:p>
-          <a:p>
-            <a:pPr algn="ctr"/>
-            <a:r>
-              <a:rPr lang="en-US" sz="700" i="1" dirty="0"/>
-              <a:t>One .py script per revision of the table, so migrations are built in.</a:t>
-            </a:r>
-          </a:p>
-        </p:txBody>
-      </p:sp>
-      <p:sp>
-        <p:nvSpPr>
-          <p:cNvPr id="31" name="Rectangle 30">
-            <a:extLst>
-              <a:ext uri="{FF2B5EF4-FFF2-40B4-BE49-F238E27FC236}">
-                <a16:creationId xmlns:a16="http://schemas.microsoft.com/office/drawing/2014/main" id="{0BE29473-1C83-BE93-4761-E6F6DF9E7F2B}"/>
-              </a:ext>
-            </a:extLst>
-          </p:cNvPr>
-          <p:cNvSpPr/>
-          <p:nvPr/>
-        </p:nvSpPr>
-        <p:spPr>
-          <a:xfrm>
-            <a:off x="2735095" y="2993946"/>
-            <a:ext cx="548737" cy="106790"/>
-          </a:xfrm>
-          <a:prstGeom prst="rect">
-            <a:avLst/>
-          </a:prstGeom>
-          <a:solidFill>
-            <a:srgbClr val="0070C0"/>
-          </a:solidFill>
-          <a:ln w="6350" cap="rnd"/>
-        </p:spPr>
-        <p:style>
-          <a:lnRef idx="2">
-            <a:schemeClr val="accent1">
-              <a:shade val="15000"/>
-            </a:schemeClr>
-          </a:lnRef>
-          <a:fillRef idx="1">
-            <a:schemeClr val="accent1"/>
-          </a:fillRef>
-          <a:effectRef idx="0">
-            <a:schemeClr val="accent1"/>
-          </a:effectRef>
-          <a:fontRef idx="minor">
-            <a:schemeClr val="lt1"/>
-          </a:fontRef>
-        </p:style>
-        <p:txBody>
-          <a:bodyPr lIns="0" tIns="0" rIns="0" bIns="0" rtlCol="0" anchor="ctr"/>
-          <a:lstStyle/>
-          <a:p>
-            <a:pPr algn="ctr"/>
-            <a:r>
-              <a:rPr lang="en-US" sz="700" dirty="0"/>
-              <a:t>Console cmd</a:t>
-            </a:r>
-          </a:p>
-        </p:txBody>
-      </p:sp>
-      <p:sp>
-        <p:nvSpPr>
-          <p:cNvPr id="39" name="Rectangle 38">
-            <a:extLst>
-              <a:ext uri="{FF2B5EF4-FFF2-40B4-BE49-F238E27FC236}">
-                <a16:creationId xmlns:a16="http://schemas.microsoft.com/office/drawing/2014/main" id="{CB8C5D96-3572-ED9D-3C46-499AF5791C7B}"/>
-              </a:ext>
-            </a:extLst>
-          </p:cNvPr>
-          <p:cNvSpPr/>
-          <p:nvPr/>
-        </p:nvSpPr>
-        <p:spPr>
-          <a:xfrm>
-            <a:off x="4337114" y="2973922"/>
-            <a:ext cx="1257184" cy="862209"/>
-          </a:xfrm>
-          <a:prstGeom prst="rect">
-            <a:avLst/>
-          </a:prstGeom>
-          <a:solidFill>
-            <a:srgbClr val="7030A0"/>
-          </a:solidFill>
-        </p:spPr>
-        <p:style>
-          <a:lnRef idx="2">
-            <a:schemeClr val="accent1">
-              <a:shade val="15000"/>
-            </a:schemeClr>
-          </a:lnRef>
-          <a:fillRef idx="1">
-            <a:schemeClr val="accent1"/>
-          </a:fillRef>
-          <a:effectRef idx="0">
-            <a:schemeClr val="accent1"/>
-          </a:effectRef>
-          <a:fontRef idx="minor">
-            <a:schemeClr val="lt1"/>
-          </a:fontRef>
-        </p:style>
-        <p:txBody>
-          <a:bodyPr rtlCol="0" anchor="t"/>
-          <a:lstStyle/>
-          <a:p>
-            <a:pPr algn="ctr"/>
-            <a:r>
-              <a:rPr lang="en-US" sz="1200" dirty="0">
-                <a:solidFill>
-                  <a:schemeClr val="bg1"/>
-                </a:solidFill>
-              </a:rPr>
-              <a:t>Python Scripts</a:t>
-            </a:r>
-          </a:p>
-          <a:p>
-            <a:pPr algn="ctr"/>
-            <a:r>
-              <a:rPr lang="en-US" sz="1200" dirty="0">
-                <a:solidFill>
-                  <a:schemeClr val="bg1"/>
-                </a:solidFill>
-              </a:rPr>
-              <a:t>📚 </a:t>
-            </a:r>
-            <a:r>
-              <a:rPr lang="en-US" sz="1200" u="sng" dirty="0">
-                <a:solidFill>
-                  <a:schemeClr val="bg1"/>
-                </a:solidFill>
-              </a:rPr>
-              <a:t>SQLAlchemy</a:t>
-            </a:r>
-          </a:p>
-          <a:p>
-            <a:pPr algn="ctr"/>
-            <a:r>
-              <a:rPr lang="en-US" sz="1100" i="1" dirty="0">
-                <a:solidFill>
-                  <a:schemeClr val="bg1"/>
-                </a:solidFill>
-              </a:rPr>
-              <a:t>[Core features]</a:t>
-            </a:r>
-          </a:p>
-          <a:p>
-            <a:pPr algn="ctr"/>
-            <a:endParaRPr lang="en-US" sz="900" dirty="0">
-              <a:solidFill>
-                <a:schemeClr val="bg1"/>
-              </a:solidFill>
-            </a:endParaRPr>
-          </a:p>
-          <a:p>
-            <a:pPr algn="ctr"/>
-            <a:r>
-              <a:rPr lang="en-US" sz="900" dirty="0">
-                <a:solidFill>
-                  <a:schemeClr val="bg1"/>
-                </a:solidFill>
-              </a:rPr>
-              <a:t>= create empty tables</a:t>
-            </a:r>
-          </a:p>
-        </p:txBody>
-      </p:sp>
-      <p:cxnSp>
-        <p:nvCxnSpPr>
-          <p:cNvPr id="40" name="Straight Arrow Connector 39">
-            <a:extLst>
-              <a:ext uri="{FF2B5EF4-FFF2-40B4-BE49-F238E27FC236}">
-                <a16:creationId xmlns:a16="http://schemas.microsoft.com/office/drawing/2014/main" id="{1AD9706D-EA7F-72ED-ECE2-A572DE446AF6}"/>
-              </a:ext>
-            </a:extLst>
-          </p:cNvPr>
-          <p:cNvCxnSpPr>
-            <a:cxnSpLocks/>
-            <a:stCxn id="30" idx="3"/>
-            <a:endCxn id="39" idx="1"/>
-          </p:cNvCxnSpPr>
-          <p:nvPr/>
-        </p:nvCxnSpPr>
-        <p:spPr>
-          <a:xfrm flipV="1">
-            <a:off x="3964626" y="3405027"/>
-            <a:ext cx="372488" cy="1"/>
-          </a:xfrm>
-          <a:prstGeom prst="straightConnector1">
-            <a:avLst/>
-          </a:prstGeom>
-          <a:ln w="12700">
-            <a:solidFill>
-              <a:schemeClr val="tx1"/>
-            </a:solidFill>
-            <a:tailEnd type="arrow"/>
-          </a:ln>
-        </p:spPr>
-        <p:style>
-          <a:lnRef idx="1">
-            <a:schemeClr val="accent1"/>
-          </a:lnRef>
-          <a:fillRef idx="0">
-            <a:schemeClr val="accent1"/>
-          </a:fillRef>
-          <a:effectRef idx="0">
-            <a:schemeClr val="accent1"/>
-          </a:effectRef>
-          <a:fontRef idx="minor">
-            <a:schemeClr val="tx1"/>
-          </a:fontRef>
-        </p:style>
-      </p:cxnSp>
-      <p:cxnSp>
-        <p:nvCxnSpPr>
-          <p:cNvPr id="48" name="Straight Arrow Connector 47">
-            <a:extLst>
-              <a:ext uri="{FF2B5EF4-FFF2-40B4-BE49-F238E27FC236}">
-                <a16:creationId xmlns:a16="http://schemas.microsoft.com/office/drawing/2014/main" id="{868C1553-8B20-D677-F8CD-C7BFBCDD1FFA}"/>
-              </a:ext>
-            </a:extLst>
-          </p:cNvPr>
-          <p:cNvCxnSpPr>
-            <a:cxnSpLocks/>
-          </p:cNvCxnSpPr>
-          <p:nvPr/>
-        </p:nvCxnSpPr>
-        <p:spPr>
-          <a:xfrm>
-            <a:off x="1871468" y="5059235"/>
-            <a:ext cx="836929" cy="0"/>
-          </a:xfrm>
-          <a:prstGeom prst="straightConnector1">
-            <a:avLst/>
-          </a:prstGeom>
-          <a:ln w="12700">
-            <a:solidFill>
-              <a:schemeClr val="tx1"/>
-            </a:solidFill>
-            <a:tailEnd type="arrow"/>
-          </a:ln>
-        </p:spPr>
-        <p:style>
-          <a:lnRef idx="1">
-            <a:schemeClr val="accent1"/>
-          </a:lnRef>
-          <a:fillRef idx="0">
-            <a:schemeClr val="accent1"/>
-          </a:fillRef>
-          <a:effectRef idx="0">
-            <a:schemeClr val="accent1"/>
-          </a:effectRef>
-          <a:fontRef idx="minor">
-            <a:schemeClr val="tx1"/>
-          </a:fontRef>
-        </p:style>
-      </p:cxnSp>
-      <p:sp>
-        <p:nvSpPr>
-          <p:cNvPr id="56" name="Rectangle 55">
-            <a:extLst>
-              <a:ext uri="{FF2B5EF4-FFF2-40B4-BE49-F238E27FC236}">
-                <a16:creationId xmlns:a16="http://schemas.microsoft.com/office/drawing/2014/main" id="{18ADDC4F-4E2B-6DBC-599E-3234D89DA381}"/>
-              </a:ext>
-            </a:extLst>
-          </p:cNvPr>
-          <p:cNvSpPr/>
-          <p:nvPr/>
-        </p:nvSpPr>
-        <p:spPr>
-          <a:xfrm>
-            <a:off x="2708397" y="4448974"/>
-            <a:ext cx="1483159" cy="1397845"/>
-          </a:xfrm>
-          <a:prstGeom prst="rect">
-            <a:avLst/>
-          </a:prstGeom>
-          <a:solidFill>
-            <a:srgbClr val="7030A0"/>
-          </a:solidFill>
-        </p:spPr>
-        <p:style>
-          <a:lnRef idx="2">
-            <a:schemeClr val="accent1">
-              <a:shade val="15000"/>
-            </a:schemeClr>
-          </a:lnRef>
-          <a:fillRef idx="1">
-            <a:schemeClr val="accent1"/>
-          </a:fillRef>
-          <a:effectRef idx="0">
-            <a:schemeClr val="accent1"/>
-          </a:effectRef>
-          <a:fontRef idx="minor">
-            <a:schemeClr val="lt1"/>
-          </a:fontRef>
-        </p:style>
-        <p:txBody>
-          <a:bodyPr lIns="0" tIns="0" rIns="0" bIns="0" rtlCol="0" anchor="t"/>
-          <a:lstStyle/>
-          <a:p>
-            <a:pPr algn="ctr"/>
-            <a:endParaRPr lang="en-US" sz="1100" dirty="0"/>
-          </a:p>
-          <a:p>
-            <a:pPr algn="ctr"/>
-            <a:r>
-              <a:rPr lang="en-US" sz="1600" dirty="0"/>
-              <a:t>Data Loader</a:t>
-            </a:r>
-          </a:p>
-          <a:p>
-            <a:pPr algn="ctr"/>
-            <a:r>
-              <a:rPr lang="en-US" sz="1050" dirty="0"/>
-              <a:t>📚 </a:t>
-            </a:r>
-            <a:r>
-              <a:rPr lang="en-US" sz="1050" b="1" u="sng" dirty="0"/>
-              <a:t>SQLAlchemy</a:t>
-            </a:r>
-          </a:p>
-          <a:p>
-            <a:pPr algn="ctr"/>
-            <a:r>
-              <a:rPr lang="en-US" sz="1050" i="1" dirty="0"/>
-              <a:t>[Core features]</a:t>
-            </a:r>
-          </a:p>
-          <a:p>
-            <a:pPr algn="ctr"/>
-            <a:endParaRPr lang="en-US" sz="1600" dirty="0"/>
-          </a:p>
-          <a:p>
-            <a:pPr algn="ctr"/>
-            <a:r>
-              <a:rPr lang="en-US" sz="1100" dirty="0"/>
-              <a:t>= uses Pydantic schemas to </a:t>
-            </a:r>
-            <a:r>
-              <a:rPr lang="en-US" sz="1100" u="sng" dirty="0"/>
-              <a:t>C</a:t>
-            </a:r>
-            <a:r>
-              <a:rPr lang="en-US" sz="1100" dirty="0"/>
-              <a:t>reate DB entries</a:t>
-            </a:r>
-          </a:p>
-        </p:txBody>
-      </p:sp>
-      <p:sp>
-        <p:nvSpPr>
-          <p:cNvPr id="57" name="Rectangle 56">
-            <a:extLst>
-              <a:ext uri="{FF2B5EF4-FFF2-40B4-BE49-F238E27FC236}">
-                <a16:creationId xmlns:a16="http://schemas.microsoft.com/office/drawing/2014/main" id="{6EFBF2C6-D8B2-6371-8BF3-2F3E1EEBEC33}"/>
-              </a:ext>
-            </a:extLst>
-          </p:cNvPr>
-          <p:cNvSpPr/>
-          <p:nvPr/>
-        </p:nvSpPr>
-        <p:spPr>
-          <a:xfrm>
-            <a:off x="2735094" y="4468997"/>
-            <a:ext cx="393791" cy="105966"/>
-          </a:xfrm>
-          <a:prstGeom prst="rect">
-            <a:avLst/>
-          </a:prstGeom>
-          <a:solidFill>
-            <a:srgbClr val="7030A0"/>
-          </a:solidFill>
-          <a:ln w="6350" cap="rnd"/>
-        </p:spPr>
-        <p:style>
-          <a:lnRef idx="2">
-            <a:schemeClr val="accent1">
-              <a:shade val="15000"/>
-            </a:schemeClr>
-          </a:lnRef>
-          <a:fillRef idx="1">
-            <a:schemeClr val="accent1"/>
-          </a:fillRef>
-          <a:effectRef idx="0">
-            <a:schemeClr val="accent1"/>
-          </a:effectRef>
-          <a:fontRef idx="minor">
-            <a:schemeClr val="lt1"/>
-          </a:fontRef>
-        </p:style>
-        <p:txBody>
-          <a:bodyPr lIns="0" tIns="0" rIns="0" bIns="0" rtlCol="0" anchor="ctr"/>
-          <a:lstStyle/>
-          <a:p>
-            <a:pPr algn="ctr"/>
-            <a:r>
-              <a:rPr lang="en-US" sz="700" dirty="0"/>
-              <a:t>.py script</a:t>
-            </a:r>
-          </a:p>
-        </p:txBody>
-      </p:sp>
-      <p:sp>
-        <p:nvSpPr>
-          <p:cNvPr id="71" name="Rectangle 70">
-            <a:extLst>
-              <a:ext uri="{FF2B5EF4-FFF2-40B4-BE49-F238E27FC236}">
-                <a16:creationId xmlns:a16="http://schemas.microsoft.com/office/drawing/2014/main" id="{DA968180-27A3-3E9A-375B-8DE4CA2771B5}"/>
-              </a:ext>
-            </a:extLst>
-          </p:cNvPr>
-          <p:cNvSpPr/>
-          <p:nvPr/>
-        </p:nvSpPr>
-        <p:spPr>
-          <a:xfrm>
-            <a:off x="4191556" y="4448974"/>
-            <a:ext cx="1454713" cy="1397845"/>
-          </a:xfrm>
-          <a:prstGeom prst="rect">
-            <a:avLst/>
-          </a:prstGeom>
-          <a:solidFill>
-            <a:srgbClr val="7030A0"/>
-          </a:solidFill>
-        </p:spPr>
-        <p:style>
-          <a:lnRef idx="2">
-            <a:schemeClr val="accent1">
-              <a:shade val="15000"/>
-            </a:schemeClr>
-          </a:lnRef>
-          <a:fillRef idx="1">
-            <a:schemeClr val="accent1"/>
-          </a:fillRef>
-          <a:effectRef idx="0">
-            <a:schemeClr val="accent1"/>
-          </a:effectRef>
-          <a:fontRef idx="minor">
-            <a:schemeClr val="lt1"/>
-          </a:fontRef>
-        </p:style>
-        <p:txBody>
-          <a:bodyPr lIns="91440" tIns="0" rIns="0" bIns="0" rtlCol="0" anchor="ctr"/>
-          <a:lstStyle/>
-          <a:p>
-            <a:pPr marL="228600" indent="-228600">
-              <a:buAutoNum type="arabicPeriod"/>
-            </a:pPr>
-            <a:r>
-              <a:rPr lang="en-US" sz="1100" dirty="0"/>
-              <a:t>Format data</a:t>
-            </a:r>
-          </a:p>
-          <a:p>
-            <a:pPr marL="228600" indent="-228600">
-              <a:buFontTx/>
-              <a:buAutoNum type="arabicPeriod"/>
-            </a:pPr>
-            <a:r>
-              <a:rPr lang="en-US" sz="1100" dirty="0"/>
-              <a:t>Validate data</a:t>
-            </a:r>
-          </a:p>
-          <a:p>
-            <a:pPr marL="228600" indent="-228600">
-              <a:buFontTx/>
-              <a:buAutoNum type="arabicPeriod"/>
-            </a:pPr>
-            <a:r>
-              <a:rPr lang="en-US" sz="1100" dirty="0"/>
-              <a:t>Create DB session</a:t>
-            </a:r>
-            <a:endParaRPr lang="en-US" sz="900" dirty="0"/>
-          </a:p>
-          <a:p>
-            <a:pPr marL="228600" indent="-228600">
-              <a:buAutoNum type="arabicPeriod"/>
-            </a:pPr>
-            <a:r>
-              <a:rPr lang="en-US" sz="1100" dirty="0"/>
-              <a:t>Insert data (DML)</a:t>
-            </a:r>
-          </a:p>
-          <a:p>
-            <a:pPr marL="228600" indent="-228600">
-              <a:buAutoNum type="arabicPeriod"/>
-            </a:pPr>
-            <a:r>
-              <a:rPr lang="en-US" sz="1100" dirty="0"/>
-              <a:t>Close DB session</a:t>
-            </a:r>
-          </a:p>
-        </p:txBody>
-      </p:sp>
-      <p:grpSp>
-        <p:nvGrpSpPr>
-          <p:cNvPr id="98" name="Group 97">
-            <a:extLst>
-              <a:ext uri="{FF2B5EF4-FFF2-40B4-BE49-F238E27FC236}">
-                <a16:creationId xmlns:a16="http://schemas.microsoft.com/office/drawing/2014/main" id="{CC0DCC2B-F0ED-C44D-F912-30A273744E6B}"/>
-              </a:ext>
-            </a:extLst>
-          </p:cNvPr>
-          <p:cNvGrpSpPr/>
-          <p:nvPr/>
-        </p:nvGrpSpPr>
-        <p:grpSpPr>
-          <a:xfrm>
-            <a:off x="8530653" y="4411817"/>
-            <a:ext cx="680794" cy="785917"/>
-            <a:chOff x="8227377" y="3019807"/>
-            <a:chExt cx="680794" cy="785917"/>
-          </a:xfrm>
-        </p:grpSpPr>
-        <p:sp>
-          <p:nvSpPr>
-            <p:cNvPr id="91" name="Flowchart: Magnetic Disk 90">
-              <a:extLst>
-                <a:ext uri="{FF2B5EF4-FFF2-40B4-BE49-F238E27FC236}">
-                  <a16:creationId xmlns:a16="http://schemas.microsoft.com/office/drawing/2014/main" id="{961F415A-E701-B16B-43F7-898098F54C01}"/>
-                </a:ext>
-              </a:extLst>
-            </p:cNvPr>
-            <p:cNvSpPr/>
-            <p:nvPr/>
-          </p:nvSpPr>
-          <p:spPr>
-            <a:xfrm>
-              <a:off x="8227377" y="3458653"/>
-              <a:ext cx="680794" cy="347071"/>
-            </a:xfrm>
-            <a:prstGeom prst="flowChartMagneticDisk">
-              <a:avLst/>
-            </a:prstGeom>
-            <a:solidFill>
-              <a:schemeClr val="accent2">
-                <a:lumMod val="75000"/>
-              </a:schemeClr>
-            </a:solidFill>
-          </p:spPr>
-          <p:style>
-            <a:lnRef idx="2">
-              <a:schemeClr val="accent1">
-                <a:shade val="15000"/>
-              </a:schemeClr>
-            </a:lnRef>
-            <a:fillRef idx="1">
-              <a:schemeClr val="accent1"/>
-            </a:fillRef>
-            <a:effectRef idx="0">
-              <a:schemeClr val="accent1"/>
-            </a:effectRef>
-            <a:fontRef idx="minor">
-              <a:schemeClr val="lt1"/>
-            </a:fontRef>
-          </p:style>
-          <p:txBody>
-            <a:bodyPr rtlCol="0" anchor="ctr"/>
-            <a:lstStyle/>
-            <a:p>
-              <a:pPr algn="ctr"/>
-              <a:endParaRPr lang="en-US"/>
-            </a:p>
-          </p:txBody>
-        </p:sp>
-        <p:sp>
-          <p:nvSpPr>
-            <p:cNvPr id="94" name="Flowchart: Magnetic Disk 93">
-              <a:extLst>
-                <a:ext uri="{FF2B5EF4-FFF2-40B4-BE49-F238E27FC236}">
-                  <a16:creationId xmlns:a16="http://schemas.microsoft.com/office/drawing/2014/main" id="{CCE88E27-7F8B-4843-638A-CC2FD96BA271}"/>
-                </a:ext>
-              </a:extLst>
-            </p:cNvPr>
-            <p:cNvSpPr/>
-            <p:nvPr/>
-          </p:nvSpPr>
-          <p:spPr>
-            <a:xfrm>
-              <a:off x="8227377" y="3235058"/>
-              <a:ext cx="680794" cy="347071"/>
-            </a:xfrm>
-            <a:prstGeom prst="flowChartMagneticDisk">
-              <a:avLst/>
-            </a:prstGeom>
-            <a:solidFill>
-              <a:schemeClr val="accent2">
-                <a:lumMod val="75000"/>
-              </a:schemeClr>
-            </a:solidFill>
-          </p:spPr>
-          <p:style>
-            <a:lnRef idx="2">
-              <a:schemeClr val="accent1">
-                <a:shade val="15000"/>
-              </a:schemeClr>
-            </a:lnRef>
-            <a:fillRef idx="1">
-              <a:schemeClr val="accent1"/>
-            </a:fillRef>
-            <a:effectRef idx="0">
-              <a:schemeClr val="accent1"/>
-            </a:effectRef>
-            <a:fontRef idx="minor">
-              <a:schemeClr val="lt1"/>
-            </a:fontRef>
-          </p:style>
-          <p:txBody>
-            <a:bodyPr rtlCol="0" anchor="ctr"/>
-            <a:lstStyle/>
-            <a:p>
-              <a:pPr algn="ctr"/>
-              <a:endParaRPr lang="en-US"/>
-            </a:p>
-          </p:txBody>
-        </p:sp>
-        <p:sp>
-          <p:nvSpPr>
-            <p:cNvPr id="95" name="Flowchart: Magnetic Disk 94">
-              <a:extLst>
-                <a:ext uri="{FF2B5EF4-FFF2-40B4-BE49-F238E27FC236}">
-                  <a16:creationId xmlns:a16="http://schemas.microsoft.com/office/drawing/2014/main" id="{D809B7D5-7C3B-9CF8-6B19-ABDC31BC3418}"/>
-                </a:ext>
-              </a:extLst>
-            </p:cNvPr>
-            <p:cNvSpPr/>
-            <p:nvPr/>
-          </p:nvSpPr>
-          <p:spPr>
-            <a:xfrm>
-              <a:off x="8227377" y="3019807"/>
-              <a:ext cx="680794" cy="347071"/>
-            </a:xfrm>
-            <a:prstGeom prst="flowChartMagneticDisk">
-              <a:avLst/>
-            </a:prstGeom>
-            <a:solidFill>
-              <a:schemeClr val="accent2">
-                <a:lumMod val="75000"/>
-              </a:schemeClr>
-            </a:solidFill>
-          </p:spPr>
-          <p:style>
-            <a:lnRef idx="2">
-              <a:schemeClr val="accent1">
-                <a:shade val="15000"/>
-              </a:schemeClr>
-            </a:lnRef>
-            <a:fillRef idx="1">
-              <a:schemeClr val="accent1"/>
-            </a:fillRef>
-            <a:effectRef idx="0">
-              <a:schemeClr val="accent1"/>
-            </a:effectRef>
-            <a:fontRef idx="minor">
-              <a:schemeClr val="lt1"/>
-            </a:fontRef>
-          </p:style>
-          <p:txBody>
-            <a:bodyPr rtlCol="0" anchor="ctr"/>
-            <a:lstStyle/>
-            <a:p>
-              <a:pPr algn="ctr"/>
-              <a:endParaRPr lang="en-US"/>
-            </a:p>
-          </p:txBody>
-        </p:sp>
-      </p:grpSp>
-      <p:cxnSp>
-        <p:nvCxnSpPr>
-          <p:cNvPr id="99" name="Straight Arrow Connector 98">
-            <a:extLst>
-              <a:ext uri="{FF2B5EF4-FFF2-40B4-BE49-F238E27FC236}">
-                <a16:creationId xmlns:a16="http://schemas.microsoft.com/office/drawing/2014/main" id="{6ADBAB5C-DE88-EF69-101B-8D2E4902AEAA}"/>
-              </a:ext>
-            </a:extLst>
-          </p:cNvPr>
-          <p:cNvCxnSpPr>
-            <a:cxnSpLocks/>
-            <a:stCxn id="39" idx="3"/>
-          </p:cNvCxnSpPr>
-          <p:nvPr/>
-        </p:nvCxnSpPr>
-        <p:spPr>
-          <a:xfrm>
-            <a:off x="5594298" y="3405027"/>
-            <a:ext cx="1112475" cy="0"/>
-          </a:xfrm>
-          <a:prstGeom prst="straightConnector1">
-            <a:avLst/>
-          </a:prstGeom>
-          <a:ln w="12700">
-            <a:solidFill>
-              <a:schemeClr val="tx1"/>
-            </a:solidFill>
-            <a:tailEnd type="arrow"/>
-          </a:ln>
-        </p:spPr>
-        <p:style>
-          <a:lnRef idx="1">
-            <a:schemeClr val="accent1"/>
-          </a:lnRef>
-          <a:fillRef idx="0">
-            <a:schemeClr val="accent1"/>
-          </a:fillRef>
-          <a:effectRef idx="0">
-            <a:schemeClr val="accent1"/>
-          </a:effectRef>
-          <a:fontRef idx="minor">
-            <a:schemeClr val="tx1"/>
-          </a:fontRef>
-        </p:style>
-      </p:cxnSp>
-      <p:cxnSp>
-        <p:nvCxnSpPr>
-          <p:cNvPr id="102" name="Straight Arrow Connector 101">
-            <a:extLst>
-              <a:ext uri="{FF2B5EF4-FFF2-40B4-BE49-F238E27FC236}">
-                <a16:creationId xmlns:a16="http://schemas.microsoft.com/office/drawing/2014/main" id="{4B31FD5A-7DA6-457D-A863-359E5362F9F7}"/>
-              </a:ext>
-            </a:extLst>
-          </p:cNvPr>
-          <p:cNvCxnSpPr>
-            <a:cxnSpLocks/>
-            <a:stCxn id="71" idx="3"/>
-          </p:cNvCxnSpPr>
-          <p:nvPr/>
-        </p:nvCxnSpPr>
-        <p:spPr>
-          <a:xfrm>
-            <a:off x="5646269" y="5147897"/>
-            <a:ext cx="1060504" cy="0"/>
-          </a:xfrm>
-          <a:prstGeom prst="straightConnector1">
-            <a:avLst/>
-          </a:prstGeom>
-          <a:ln w="12700">
-            <a:solidFill>
-              <a:schemeClr val="tx1"/>
-            </a:solidFill>
-            <a:tailEnd type="arrow"/>
-          </a:ln>
-        </p:spPr>
-        <p:style>
-          <a:lnRef idx="1">
-            <a:schemeClr val="accent1"/>
-          </a:lnRef>
-          <a:fillRef idx="0">
-            <a:schemeClr val="accent1"/>
-          </a:fillRef>
-          <a:effectRef idx="0">
-            <a:schemeClr val="accent1"/>
-          </a:effectRef>
-          <a:fontRef idx="minor">
-            <a:schemeClr val="tx1"/>
-          </a:fontRef>
-        </p:style>
-      </p:cxnSp>
-      <p:sp>
-        <p:nvSpPr>
-          <p:cNvPr id="124" name="Flowchart: Off-page Connector 123">
-            <a:extLst>
-              <a:ext uri="{FF2B5EF4-FFF2-40B4-BE49-F238E27FC236}">
-                <a16:creationId xmlns:a16="http://schemas.microsoft.com/office/drawing/2014/main" id="{FFF72933-46A1-BED1-D03A-C066DE79B3F5}"/>
-              </a:ext>
-            </a:extLst>
-          </p:cNvPr>
-          <p:cNvSpPr/>
-          <p:nvPr/>
-        </p:nvSpPr>
-        <p:spPr>
-          <a:xfrm rot="16200000">
-            <a:off x="4099174" y="957725"/>
-            <a:ext cx="186884" cy="240280"/>
-          </a:xfrm>
-          <a:prstGeom prst="flowChartOffpageConnector">
-            <a:avLst/>
-          </a:prstGeom>
-          <a:solidFill>
-            <a:schemeClr val="accent6">
-              <a:lumMod val="75000"/>
-            </a:schemeClr>
-          </a:solidFill>
-        </p:spPr>
-        <p:style>
-          <a:lnRef idx="2">
-            <a:schemeClr val="accent1">
-              <a:shade val="15000"/>
-            </a:schemeClr>
-          </a:lnRef>
-          <a:fillRef idx="1">
-            <a:schemeClr val="accent1"/>
-          </a:fillRef>
-          <a:effectRef idx="0">
-            <a:schemeClr val="accent1"/>
-          </a:effectRef>
-          <a:fontRef idx="minor">
-            <a:schemeClr val="lt1"/>
-          </a:fontRef>
-        </p:style>
-        <p:txBody>
-          <a:bodyPr vert="vert" rtlCol="0" anchor="ctr"/>
-          <a:lstStyle/>
-          <a:p>
-            <a:pPr algn="ctr"/>
-            <a:r>
-              <a:rPr lang="en-US" sz="1400" b="1" dirty="0"/>
-              <a:t>3</a:t>
-            </a:r>
-          </a:p>
-        </p:txBody>
-      </p:sp>
-      <p:sp>
-        <p:nvSpPr>
-          <p:cNvPr id="126" name="Flowchart: Off-page Connector 125">
-            <a:extLst>
-              <a:ext uri="{FF2B5EF4-FFF2-40B4-BE49-F238E27FC236}">
-                <a16:creationId xmlns:a16="http://schemas.microsoft.com/office/drawing/2014/main" id="{20EA467F-5D98-E1BD-6A83-6CF223ABC153}"/>
-              </a:ext>
-            </a:extLst>
-          </p:cNvPr>
-          <p:cNvSpPr/>
-          <p:nvPr/>
-        </p:nvSpPr>
-        <p:spPr>
-          <a:xfrm rot="16200000">
-            <a:off x="2469498" y="938163"/>
-            <a:ext cx="186884" cy="240280"/>
-          </a:xfrm>
-          <a:prstGeom prst="flowChartOffpageConnector">
-            <a:avLst/>
-          </a:prstGeom>
-          <a:solidFill>
-            <a:schemeClr val="accent6">
-              <a:lumMod val="75000"/>
-            </a:schemeClr>
-          </a:solidFill>
-        </p:spPr>
-        <p:style>
-          <a:lnRef idx="2">
-            <a:schemeClr val="accent1">
-              <a:shade val="15000"/>
-            </a:schemeClr>
-          </a:lnRef>
-          <a:fillRef idx="1">
-            <a:schemeClr val="accent1"/>
-          </a:fillRef>
-          <a:effectRef idx="0">
-            <a:schemeClr val="accent1"/>
-          </a:effectRef>
-          <a:fontRef idx="minor">
-            <a:schemeClr val="lt1"/>
-          </a:fontRef>
-        </p:style>
-        <p:txBody>
-          <a:bodyPr vert="vert" rtlCol="0" anchor="ctr"/>
-          <a:lstStyle/>
-          <a:p>
-            <a:pPr algn="ctr"/>
-            <a:r>
-              <a:rPr lang="en-US" sz="1400" b="1" dirty="0"/>
-              <a:t>2</a:t>
-            </a:r>
-          </a:p>
-        </p:txBody>
-      </p:sp>
-      <p:sp>
-        <p:nvSpPr>
-          <p:cNvPr id="127" name="Flowchart: Off-page Connector 126">
-            <a:extLst>
-              <a:ext uri="{FF2B5EF4-FFF2-40B4-BE49-F238E27FC236}">
-                <a16:creationId xmlns:a16="http://schemas.microsoft.com/office/drawing/2014/main" id="{B83CCE7B-8833-91AF-39C7-C901ED114F09}"/>
-              </a:ext>
-            </a:extLst>
-          </p:cNvPr>
-          <p:cNvSpPr/>
-          <p:nvPr/>
-        </p:nvSpPr>
-        <p:spPr>
-          <a:xfrm rot="16200000">
-            <a:off x="2474911" y="2860331"/>
-            <a:ext cx="186884" cy="240280"/>
-          </a:xfrm>
-          <a:prstGeom prst="flowChartOffpageConnector">
-            <a:avLst/>
-          </a:prstGeom>
-          <a:solidFill>
-            <a:schemeClr val="accent6">
-              <a:lumMod val="75000"/>
-            </a:schemeClr>
-          </a:solidFill>
-        </p:spPr>
-        <p:style>
-          <a:lnRef idx="2">
-            <a:schemeClr val="accent1">
-              <a:shade val="15000"/>
-            </a:schemeClr>
-          </a:lnRef>
-          <a:fillRef idx="1">
-            <a:schemeClr val="accent1"/>
-          </a:fillRef>
-          <a:effectRef idx="0">
-            <a:schemeClr val="accent1"/>
-          </a:effectRef>
-          <a:fontRef idx="minor">
-            <a:schemeClr val="lt1"/>
-          </a:fontRef>
-        </p:style>
-        <p:txBody>
-          <a:bodyPr vert="vert" rtlCol="0" anchor="ctr"/>
-          <a:lstStyle/>
-          <a:p>
-            <a:pPr algn="ctr"/>
-            <a:r>
-              <a:rPr lang="en-US" sz="1400" b="1" dirty="0"/>
-              <a:t>5</a:t>
-            </a:r>
-          </a:p>
-        </p:txBody>
-      </p:sp>
-      <p:sp>
-        <p:nvSpPr>
-          <p:cNvPr id="128" name="Flowchart: Off-page Connector 127">
-            <a:extLst>
-              <a:ext uri="{FF2B5EF4-FFF2-40B4-BE49-F238E27FC236}">
-                <a16:creationId xmlns:a16="http://schemas.microsoft.com/office/drawing/2014/main" id="{42F75857-E87E-058F-51C8-1D399174B498}"/>
-              </a:ext>
-            </a:extLst>
-          </p:cNvPr>
-          <p:cNvSpPr/>
-          <p:nvPr/>
-        </p:nvSpPr>
-        <p:spPr>
-          <a:xfrm>
-            <a:off x="6031126" y="2957497"/>
-            <a:ext cx="186884" cy="240280"/>
-          </a:xfrm>
-          <a:prstGeom prst="flowChartOffpageConnector">
-            <a:avLst/>
-          </a:prstGeom>
-          <a:solidFill>
-            <a:schemeClr val="accent6">
-              <a:lumMod val="75000"/>
-            </a:schemeClr>
-          </a:solidFill>
-        </p:spPr>
-        <p:style>
-          <a:lnRef idx="2">
-            <a:schemeClr val="accent1">
-              <a:shade val="15000"/>
-            </a:schemeClr>
-          </a:lnRef>
-          <a:fillRef idx="1">
-            <a:schemeClr val="accent1"/>
-          </a:fillRef>
-          <a:effectRef idx="0">
-            <a:schemeClr val="accent1"/>
-          </a:effectRef>
-          <a:fontRef idx="minor">
-            <a:schemeClr val="lt1"/>
-          </a:fontRef>
-        </p:style>
-        <p:txBody>
-          <a:bodyPr vert="horz" rtlCol="0" anchor="ctr"/>
-          <a:lstStyle/>
-          <a:p>
-            <a:pPr algn="ctr"/>
-            <a:r>
-              <a:rPr lang="en-US" sz="1400" b="1" dirty="0"/>
-              <a:t>6</a:t>
-            </a:r>
-          </a:p>
-        </p:txBody>
-      </p:sp>
-      <p:sp>
-        <p:nvSpPr>
-          <p:cNvPr id="133" name="Flowchart: Off-page Connector 132">
-            <a:extLst>
-              <a:ext uri="{FF2B5EF4-FFF2-40B4-BE49-F238E27FC236}">
-                <a16:creationId xmlns:a16="http://schemas.microsoft.com/office/drawing/2014/main" id="{30A73FCB-2CE0-1B09-BC6B-F51C1868D9BF}"/>
-              </a:ext>
-            </a:extLst>
-          </p:cNvPr>
-          <p:cNvSpPr/>
-          <p:nvPr/>
-        </p:nvSpPr>
-        <p:spPr>
-          <a:xfrm rot="16200000">
-            <a:off x="2450239" y="4334719"/>
-            <a:ext cx="186884" cy="240280"/>
-          </a:xfrm>
-          <a:prstGeom prst="flowChartOffpageConnector">
-            <a:avLst/>
-          </a:prstGeom>
-          <a:solidFill>
-            <a:schemeClr val="accent6">
-              <a:lumMod val="75000"/>
-            </a:schemeClr>
-          </a:solidFill>
-        </p:spPr>
-        <p:style>
-          <a:lnRef idx="2">
-            <a:schemeClr val="accent1">
-              <a:shade val="15000"/>
-            </a:schemeClr>
-          </a:lnRef>
-          <a:fillRef idx="1">
-            <a:schemeClr val="accent1"/>
-          </a:fillRef>
-          <a:effectRef idx="0">
-            <a:schemeClr val="accent1"/>
-          </a:effectRef>
-          <a:fontRef idx="minor">
-            <a:schemeClr val="lt1"/>
-          </a:fontRef>
-        </p:style>
-        <p:txBody>
-          <a:bodyPr vert="vert" rtlCol="0" anchor="ctr"/>
-          <a:lstStyle/>
-          <a:p>
-            <a:pPr algn="ctr"/>
-            <a:r>
-              <a:rPr lang="en-US" sz="1400" b="1" dirty="0"/>
-              <a:t>7</a:t>
-            </a:r>
-          </a:p>
-        </p:txBody>
-      </p:sp>
-      <p:sp>
-        <p:nvSpPr>
-          <p:cNvPr id="134" name="Flowchart: Off-page Connector 133">
-            <a:extLst>
-              <a:ext uri="{FF2B5EF4-FFF2-40B4-BE49-F238E27FC236}">
-                <a16:creationId xmlns:a16="http://schemas.microsoft.com/office/drawing/2014/main" id="{60790620-000B-44A0-F9C3-20F3163B41BC}"/>
-              </a:ext>
-            </a:extLst>
-          </p:cNvPr>
-          <p:cNvSpPr/>
-          <p:nvPr/>
-        </p:nvSpPr>
-        <p:spPr>
-          <a:xfrm rot="16200000">
-            <a:off x="508450" y="1361461"/>
-            <a:ext cx="186884" cy="240280"/>
-          </a:xfrm>
-          <a:prstGeom prst="flowChartOffpageConnector">
-            <a:avLst/>
-          </a:prstGeom>
-          <a:solidFill>
-            <a:schemeClr val="accent6">
-              <a:lumMod val="75000"/>
-            </a:schemeClr>
-          </a:solidFill>
-        </p:spPr>
-        <p:style>
-          <a:lnRef idx="2">
-            <a:schemeClr val="accent1">
-              <a:shade val="15000"/>
-            </a:schemeClr>
-          </a:lnRef>
-          <a:fillRef idx="1">
-            <a:schemeClr val="accent1"/>
-          </a:fillRef>
-          <a:effectRef idx="0">
-            <a:schemeClr val="accent1"/>
-          </a:effectRef>
-          <a:fontRef idx="minor">
-            <a:schemeClr val="lt1"/>
-          </a:fontRef>
-        </p:style>
-        <p:txBody>
-          <a:bodyPr vert="vert" rtlCol="0" anchor="ctr"/>
-          <a:lstStyle/>
-          <a:p>
-            <a:pPr algn="ctr"/>
-            <a:r>
-              <a:rPr lang="en-US" sz="1400" b="1" dirty="0"/>
-              <a:t>1</a:t>
-            </a:r>
-          </a:p>
-        </p:txBody>
-      </p:sp>
-      <p:sp>
-        <p:nvSpPr>
-          <p:cNvPr id="136" name="TextBox 135">
-            <a:extLst>
-              <a:ext uri="{FF2B5EF4-FFF2-40B4-BE49-F238E27FC236}">
-                <a16:creationId xmlns:a16="http://schemas.microsoft.com/office/drawing/2014/main" id="{7897557C-84DE-28C0-EADC-46D499135460}"/>
-              </a:ext>
-            </a:extLst>
-          </p:cNvPr>
-          <p:cNvSpPr txBox="1"/>
-          <p:nvPr/>
-        </p:nvSpPr>
-        <p:spPr>
-          <a:xfrm>
-            <a:off x="5884129" y="3214394"/>
-            <a:ext cx="452047" cy="169277"/>
-          </a:xfrm>
-          <a:prstGeom prst="rect">
-            <a:avLst/>
-          </a:prstGeom>
-          <a:noFill/>
-        </p:spPr>
-        <p:txBody>
-          <a:bodyPr wrap="none" lIns="0" tIns="0" rIns="0" bIns="0" rtlCol="0">
-            <a:spAutoFit/>
-          </a:bodyPr>
-          <a:lstStyle/>
-          <a:p>
-            <a:r>
-              <a:rPr lang="en-US" sz="1100" i="1" dirty="0"/>
-              <a:t>execute</a:t>
-            </a:r>
-          </a:p>
-        </p:txBody>
-      </p:sp>
-      <p:sp>
-        <p:nvSpPr>
-          <p:cNvPr id="144" name="Rectangle 143">
-            <a:extLst>
-              <a:ext uri="{FF2B5EF4-FFF2-40B4-BE49-F238E27FC236}">
-                <a16:creationId xmlns:a16="http://schemas.microsoft.com/office/drawing/2014/main" id="{7650598A-6719-CF54-C48F-A07EA23EDB3C}"/>
-              </a:ext>
-            </a:extLst>
-          </p:cNvPr>
-          <p:cNvSpPr/>
-          <p:nvPr/>
-        </p:nvSpPr>
-        <p:spPr>
-          <a:xfrm>
-            <a:off x="6706773" y="1120013"/>
-            <a:ext cx="1196156" cy="321580"/>
-          </a:xfrm>
-          <a:prstGeom prst="rect">
-            <a:avLst/>
-          </a:prstGeom>
-          <a:solidFill>
-            <a:schemeClr val="bg1">
-              <a:lumMod val="85000"/>
-            </a:schemeClr>
-          </a:solidFill>
-        </p:spPr>
-        <p:style>
-          <a:lnRef idx="2">
-            <a:schemeClr val="accent1">
-              <a:shade val="15000"/>
-            </a:schemeClr>
-          </a:lnRef>
-          <a:fillRef idx="1">
-            <a:schemeClr val="accent1"/>
-          </a:fillRef>
-          <a:effectRef idx="0">
-            <a:schemeClr val="accent1"/>
-          </a:effectRef>
-          <a:fontRef idx="minor">
-            <a:schemeClr val="lt1"/>
-          </a:fontRef>
-        </p:style>
-        <p:txBody>
-          <a:bodyPr rtlCol="0" anchor="ctr"/>
-          <a:lstStyle/>
-          <a:p>
-            <a:pPr algn="ctr"/>
-            <a:r>
-              <a:rPr lang="en-US" sz="1100" dirty="0">
-                <a:solidFill>
-                  <a:schemeClr val="tx1"/>
-                </a:solidFill>
-              </a:rPr>
-              <a:t>.env file</a:t>
-            </a:r>
-          </a:p>
-          <a:p>
-            <a:pPr algn="ctr"/>
-            <a:r>
-              <a:rPr lang="en-US" sz="800" dirty="0">
-                <a:solidFill>
-                  <a:schemeClr val="tx1"/>
-                </a:solidFill>
-              </a:rPr>
-              <a:t>= admin creds, et al</a:t>
-            </a:r>
-          </a:p>
-        </p:txBody>
-      </p:sp>
-      <p:sp>
-        <p:nvSpPr>
-          <p:cNvPr id="151" name="Rectangle 150">
-            <a:extLst>
-              <a:ext uri="{FF2B5EF4-FFF2-40B4-BE49-F238E27FC236}">
-                <a16:creationId xmlns:a16="http://schemas.microsoft.com/office/drawing/2014/main" id="{A1F35192-1F23-1A7E-F982-7D8C8411CE14}"/>
-              </a:ext>
-            </a:extLst>
-          </p:cNvPr>
-          <p:cNvSpPr/>
-          <p:nvPr/>
-        </p:nvSpPr>
-        <p:spPr>
-          <a:xfrm>
-            <a:off x="4529165" y="3886609"/>
-            <a:ext cx="873082" cy="248173"/>
-          </a:xfrm>
-          <a:prstGeom prst="rect">
-            <a:avLst/>
-          </a:prstGeom>
-          <a:solidFill>
-            <a:srgbClr val="B0B0B0"/>
-          </a:solidFill>
-          <a:ln w="6350" cap="rnd"/>
-        </p:spPr>
-        <p:style>
-          <a:lnRef idx="2">
-            <a:schemeClr val="accent1">
-              <a:shade val="15000"/>
-            </a:schemeClr>
-          </a:lnRef>
-          <a:fillRef idx="1">
-            <a:schemeClr val="accent1"/>
-          </a:fillRef>
-          <a:effectRef idx="0">
-            <a:schemeClr val="accent1"/>
-          </a:effectRef>
-          <a:fontRef idx="minor">
-            <a:schemeClr val="lt1"/>
-          </a:fontRef>
-        </p:style>
-        <p:txBody>
-          <a:bodyPr lIns="0" tIns="0" rIns="0" bIns="0" rtlCol="0" anchor="ctr"/>
-          <a:lstStyle/>
-          <a:p>
-            <a:pPr algn="ctr"/>
-            <a:r>
-              <a:rPr lang="en-US" sz="700" dirty="0"/>
-              <a:t>DDL = </a:t>
-            </a:r>
-          </a:p>
-          <a:p>
-            <a:pPr algn="ctr"/>
-            <a:r>
-              <a:rPr lang="en-US" sz="700" dirty="0"/>
-              <a:t>data def. language</a:t>
-            </a:r>
-          </a:p>
-        </p:txBody>
-      </p:sp>
-      <p:sp>
-        <p:nvSpPr>
-          <p:cNvPr id="152" name="Rectangle 151">
-            <a:extLst>
-              <a:ext uri="{FF2B5EF4-FFF2-40B4-BE49-F238E27FC236}">
-                <a16:creationId xmlns:a16="http://schemas.microsoft.com/office/drawing/2014/main" id="{1FCB8362-7307-7200-10E2-DA71601A0359}"/>
-              </a:ext>
-            </a:extLst>
-          </p:cNvPr>
-          <p:cNvSpPr/>
-          <p:nvPr/>
-        </p:nvSpPr>
-        <p:spPr>
-          <a:xfrm>
-            <a:off x="4529165" y="5900631"/>
-            <a:ext cx="873083" cy="249337"/>
-          </a:xfrm>
-          <a:prstGeom prst="rect">
-            <a:avLst/>
-          </a:prstGeom>
-          <a:solidFill>
-            <a:srgbClr val="B0B0B0"/>
-          </a:solidFill>
-          <a:ln w="6350" cap="rnd"/>
-        </p:spPr>
-        <p:style>
-          <a:lnRef idx="2">
-            <a:schemeClr val="accent1">
-              <a:shade val="15000"/>
-            </a:schemeClr>
-          </a:lnRef>
-          <a:fillRef idx="1">
-            <a:schemeClr val="accent1"/>
-          </a:fillRef>
-          <a:effectRef idx="0">
-            <a:schemeClr val="accent1"/>
-          </a:effectRef>
-          <a:fontRef idx="minor">
-            <a:schemeClr val="lt1"/>
-          </a:fontRef>
-        </p:style>
-        <p:txBody>
-          <a:bodyPr lIns="0" tIns="0" rIns="0" bIns="0" rtlCol="0" anchor="ctr"/>
-          <a:lstStyle/>
-          <a:p>
-            <a:pPr algn="ctr"/>
-            <a:r>
-              <a:rPr lang="en-US" sz="700" dirty="0"/>
-              <a:t>DML = </a:t>
-            </a:r>
-          </a:p>
-          <a:p>
-            <a:pPr algn="ctr"/>
-            <a:r>
-              <a:rPr lang="en-US" sz="700" dirty="0"/>
-              <a:t>data manip. language</a:t>
-            </a:r>
-          </a:p>
-        </p:txBody>
-      </p:sp>
-      <p:sp>
-        <p:nvSpPr>
-          <p:cNvPr id="154" name="Rectangle 153">
-            <a:extLst>
-              <a:ext uri="{FF2B5EF4-FFF2-40B4-BE49-F238E27FC236}">
-                <a16:creationId xmlns:a16="http://schemas.microsoft.com/office/drawing/2014/main" id="{476FAA6E-532E-811B-061E-21BC7C89326A}"/>
-              </a:ext>
-            </a:extLst>
-          </p:cNvPr>
-          <p:cNvSpPr/>
-          <p:nvPr/>
-        </p:nvSpPr>
-        <p:spPr>
-          <a:xfrm>
-            <a:off x="750159" y="6406284"/>
-            <a:ext cx="5345841" cy="249337"/>
-          </a:xfrm>
-          <a:prstGeom prst="rect">
-            <a:avLst/>
-          </a:prstGeom>
-          <a:solidFill>
-            <a:schemeClr val="bg1"/>
-          </a:solidFill>
-          <a:ln w="6350" cap="rnd"/>
-        </p:spPr>
-        <p:style>
-          <a:lnRef idx="2">
-            <a:schemeClr val="accent1">
-              <a:shade val="15000"/>
-            </a:schemeClr>
-          </a:lnRef>
-          <a:fillRef idx="1">
-            <a:schemeClr val="accent1"/>
-          </a:fillRef>
-          <a:effectRef idx="0">
-            <a:schemeClr val="accent1"/>
-          </a:effectRef>
-          <a:fontRef idx="minor">
-            <a:schemeClr val="lt1"/>
-          </a:fontRef>
-        </p:style>
-        <p:txBody>
-          <a:bodyPr lIns="91440" tIns="0" rIns="0" bIns="0" rtlCol="0" anchor="ctr"/>
-          <a:lstStyle/>
-          <a:p>
-            <a:r>
-              <a:rPr lang="en-US" sz="800" dirty="0">
-                <a:solidFill>
-                  <a:schemeClr val="tx1"/>
-                </a:solidFill>
-              </a:rPr>
-              <a:t>* Schemas in common parlance refers actually to the DB Models created for SQLAlchemy , but Pydantic uses it to refer to these Data Transfer Objects which define the interface boundary for the underlying DB Models</a:t>
-            </a:r>
-          </a:p>
-        </p:txBody>
-      </p:sp>
-      <p:sp>
-        <p:nvSpPr>
-          <p:cNvPr id="156" name="TextBox 155">
-            <a:extLst>
-              <a:ext uri="{FF2B5EF4-FFF2-40B4-BE49-F238E27FC236}">
-                <a16:creationId xmlns:a16="http://schemas.microsoft.com/office/drawing/2014/main" id="{B2F6E475-DA7E-0118-0D9B-1058897002CF}"/>
-              </a:ext>
-            </a:extLst>
-          </p:cNvPr>
-          <p:cNvSpPr txBox="1"/>
-          <p:nvPr/>
-        </p:nvSpPr>
-        <p:spPr>
-          <a:xfrm>
-            <a:off x="5830555" y="3429000"/>
-            <a:ext cx="548227" cy="138499"/>
-          </a:xfrm>
-          <a:prstGeom prst="rect">
-            <a:avLst/>
-          </a:prstGeom>
-          <a:noFill/>
-        </p:spPr>
-        <p:txBody>
-          <a:bodyPr wrap="none" lIns="0" tIns="0" rIns="0" bIns="0" rtlCol="0">
-            <a:spAutoFit/>
-          </a:bodyPr>
-          <a:lstStyle/>
-          <a:p>
-            <a:pPr algn="ctr"/>
-            <a:r>
-              <a:rPr lang="en-US" sz="900" dirty="0"/>
-              <a:t>📚 asyncpg</a:t>
-            </a:r>
-          </a:p>
-        </p:txBody>
-      </p:sp>
-      <p:sp>
-        <p:nvSpPr>
-          <p:cNvPr id="157" name="TextBox 156">
-            <a:extLst>
-              <a:ext uri="{FF2B5EF4-FFF2-40B4-BE49-F238E27FC236}">
-                <a16:creationId xmlns:a16="http://schemas.microsoft.com/office/drawing/2014/main" id="{59052ABB-DB4C-5512-9E07-6F60D755833E}"/>
-              </a:ext>
-            </a:extLst>
-          </p:cNvPr>
-          <p:cNvSpPr txBox="1"/>
-          <p:nvPr/>
-        </p:nvSpPr>
-        <p:spPr>
-          <a:xfrm>
-            <a:off x="5873611" y="5175443"/>
-            <a:ext cx="548227" cy="138499"/>
-          </a:xfrm>
-          <a:prstGeom prst="rect">
-            <a:avLst/>
-          </a:prstGeom>
-          <a:noFill/>
-        </p:spPr>
-        <p:txBody>
-          <a:bodyPr wrap="none" lIns="0" tIns="0" rIns="0" bIns="0" rtlCol="0">
-            <a:spAutoFit/>
-          </a:bodyPr>
-          <a:lstStyle/>
-          <a:p>
-            <a:pPr algn="ctr"/>
-            <a:r>
-              <a:rPr lang="en-US" sz="900" dirty="0"/>
-              <a:t>📚 asyncpg</a:t>
-            </a:r>
-          </a:p>
-        </p:txBody>
-      </p:sp>
-      <p:sp>
-        <p:nvSpPr>
-          <p:cNvPr id="158" name="Rectangle 157">
-            <a:extLst>
-              <a:ext uri="{FF2B5EF4-FFF2-40B4-BE49-F238E27FC236}">
-                <a16:creationId xmlns:a16="http://schemas.microsoft.com/office/drawing/2014/main" id="{B0430F05-8A2C-8D80-2161-C4CC2231EF01}"/>
-              </a:ext>
-            </a:extLst>
-          </p:cNvPr>
-          <p:cNvSpPr/>
-          <p:nvPr/>
-        </p:nvSpPr>
-        <p:spPr>
-          <a:xfrm>
-            <a:off x="6707651" y="1906506"/>
-            <a:ext cx="1196156" cy="500584"/>
-          </a:xfrm>
-          <a:prstGeom prst="rect">
-            <a:avLst/>
-          </a:prstGeom>
-          <a:solidFill>
-            <a:schemeClr val="accent2">
-              <a:lumMod val="60000"/>
-              <a:lumOff val="40000"/>
-            </a:schemeClr>
-          </a:solidFill>
-        </p:spPr>
-        <p:style>
-          <a:lnRef idx="2">
-            <a:schemeClr val="accent1">
-              <a:shade val="15000"/>
-            </a:schemeClr>
-          </a:lnRef>
-          <a:fillRef idx="1">
-            <a:schemeClr val="accent1"/>
-          </a:fillRef>
-          <a:effectRef idx="0">
-            <a:schemeClr val="accent1"/>
-          </a:effectRef>
-          <a:fontRef idx="minor">
-            <a:schemeClr val="lt1"/>
-          </a:fontRef>
-        </p:style>
-        <p:txBody>
-          <a:bodyPr lIns="0" tIns="0" rIns="0" bIns="0" rtlCol="0" anchor="t"/>
-          <a:lstStyle/>
-          <a:p>
-            <a:pPr algn="ctr"/>
-            <a:endParaRPr lang="en-US" sz="600" dirty="0"/>
-          </a:p>
-          <a:p>
-            <a:pPr algn="ctr"/>
-            <a:r>
-              <a:rPr lang="en-US" sz="1200" dirty="0"/>
-              <a:t>DB Web Viewer</a:t>
-            </a:r>
-          </a:p>
-          <a:p>
-            <a:pPr algn="ctr"/>
-            <a:r>
-              <a:rPr lang="en-US" sz="1100" dirty="0"/>
-              <a:t>📚 </a:t>
-            </a:r>
-            <a:r>
-              <a:rPr lang="en-US" sz="1100" b="1" u="sng" dirty="0"/>
-              <a:t>pg-admin</a:t>
-            </a:r>
-            <a:endParaRPr lang="en-US" sz="1100" dirty="0"/>
-          </a:p>
-        </p:txBody>
-      </p:sp>
-      <p:cxnSp>
-        <p:nvCxnSpPr>
-          <p:cNvPr id="159" name="Straight Arrow Connector 158">
-            <a:extLst>
-              <a:ext uri="{FF2B5EF4-FFF2-40B4-BE49-F238E27FC236}">
-                <a16:creationId xmlns:a16="http://schemas.microsoft.com/office/drawing/2014/main" id="{A1CFC8EC-97A6-89F7-7896-FC2523FC381B}"/>
-              </a:ext>
-            </a:extLst>
-          </p:cNvPr>
-          <p:cNvCxnSpPr>
-            <a:cxnSpLocks/>
-            <a:stCxn id="3" idx="2"/>
-            <a:endCxn id="15" idx="0"/>
-          </p:cNvCxnSpPr>
-          <p:nvPr/>
-        </p:nvCxnSpPr>
-        <p:spPr>
-          <a:xfrm>
-            <a:off x="7304851" y="2449013"/>
-            <a:ext cx="0" cy="287514"/>
-          </a:xfrm>
-          <a:prstGeom prst="straightConnector1">
-            <a:avLst/>
-          </a:prstGeom>
-          <a:ln w="12700">
-            <a:solidFill>
-              <a:schemeClr val="tx1"/>
-            </a:solidFill>
-            <a:headEnd type="arrow"/>
-            <a:tailEnd type="arrow"/>
-          </a:ln>
-        </p:spPr>
-        <p:style>
-          <a:lnRef idx="1">
-            <a:schemeClr val="accent1"/>
-          </a:lnRef>
-          <a:fillRef idx="0">
-            <a:schemeClr val="accent1"/>
-          </a:fillRef>
-          <a:effectRef idx="0">
-            <a:schemeClr val="accent1"/>
-          </a:effectRef>
-          <a:fontRef idx="minor">
-            <a:schemeClr val="tx1"/>
-          </a:fontRef>
-        </p:style>
-      </p:cxnSp>
-      <p:sp>
-        <p:nvSpPr>
-          <p:cNvPr id="27" name="Rectangle 26">
-            <a:extLst>
-              <a:ext uri="{FF2B5EF4-FFF2-40B4-BE49-F238E27FC236}">
-                <a16:creationId xmlns:a16="http://schemas.microsoft.com/office/drawing/2014/main" id="{91F4102F-EE91-ED5F-D7CB-CA4F588BB5A7}"/>
-              </a:ext>
-            </a:extLst>
-          </p:cNvPr>
-          <p:cNvSpPr/>
-          <p:nvPr/>
-        </p:nvSpPr>
-        <p:spPr>
-          <a:xfrm>
-            <a:off x="6839157" y="3842999"/>
-            <a:ext cx="931388" cy="347071"/>
-          </a:xfrm>
-          <a:prstGeom prst="rect">
-            <a:avLst/>
-          </a:prstGeom>
-          <a:solidFill>
-            <a:schemeClr val="accent2">
-              <a:lumMod val="60000"/>
-              <a:lumOff val="40000"/>
-            </a:schemeClr>
-          </a:solidFill>
-        </p:spPr>
-        <p:style>
-          <a:lnRef idx="2">
-            <a:schemeClr val="accent1">
-              <a:shade val="15000"/>
-            </a:schemeClr>
-          </a:lnRef>
-          <a:fillRef idx="1">
-            <a:schemeClr val="accent1"/>
-          </a:fillRef>
-          <a:effectRef idx="0">
-            <a:schemeClr val="accent1"/>
-          </a:effectRef>
-          <a:fontRef idx="minor">
-            <a:schemeClr val="lt1"/>
-          </a:fontRef>
-        </p:style>
-        <p:txBody>
-          <a:bodyPr lIns="0" tIns="0" rIns="0" bIns="0" rtlCol="0" anchor="ctr"/>
-          <a:lstStyle/>
-          <a:p>
-            <a:pPr algn="ctr"/>
-            <a:r>
-              <a:rPr lang="en-US" sz="1200" dirty="0"/>
-              <a:t>📚 </a:t>
-            </a:r>
-            <a:r>
-              <a:rPr lang="en-US" sz="1200" b="1" u="sng" dirty="0"/>
-              <a:t>pg-vector</a:t>
-            </a:r>
-          </a:p>
-        </p:txBody>
-      </p:sp>
-      <p:sp>
-        <p:nvSpPr>
-          <p:cNvPr id="37" name="Flowchart: Off-page Connector 36">
-            <a:extLst>
-              <a:ext uri="{FF2B5EF4-FFF2-40B4-BE49-F238E27FC236}">
-                <a16:creationId xmlns:a16="http://schemas.microsoft.com/office/drawing/2014/main" id="{A1051958-E2DE-29E1-E221-338CBEA4536B}"/>
-              </a:ext>
-            </a:extLst>
-          </p:cNvPr>
-          <p:cNvSpPr/>
-          <p:nvPr/>
-        </p:nvSpPr>
-        <p:spPr>
-          <a:xfrm rot="16200000">
-            <a:off x="6405930" y="1405922"/>
-            <a:ext cx="186884" cy="240280"/>
-          </a:xfrm>
-          <a:prstGeom prst="flowChartOffpageConnector">
-            <a:avLst/>
-          </a:prstGeom>
-          <a:solidFill>
-            <a:schemeClr val="accent6">
-              <a:lumMod val="75000"/>
-            </a:schemeClr>
-          </a:solidFill>
-        </p:spPr>
-        <p:style>
-          <a:lnRef idx="2">
-            <a:schemeClr val="accent1">
-              <a:shade val="15000"/>
-            </a:schemeClr>
-          </a:lnRef>
-          <a:fillRef idx="1">
-            <a:schemeClr val="accent1"/>
-          </a:fillRef>
-          <a:effectRef idx="0">
-            <a:schemeClr val="accent1"/>
-          </a:effectRef>
-          <a:fontRef idx="minor">
-            <a:schemeClr val="lt1"/>
-          </a:fontRef>
-        </p:style>
-        <p:txBody>
-          <a:bodyPr vert="vert" rtlCol="0" anchor="ctr"/>
-          <a:lstStyle/>
-          <a:p>
-            <a:pPr algn="ctr"/>
-            <a:r>
-              <a:rPr lang="en-US" sz="1400" b="1" dirty="0"/>
-              <a:t>4</a:t>
-            </a:r>
-          </a:p>
-        </p:txBody>
-      </p:sp>
-      <p:sp>
-        <p:nvSpPr>
-          <p:cNvPr id="38" name="Flowchart: Off-page Connector 37">
-            <a:extLst>
-              <a:ext uri="{FF2B5EF4-FFF2-40B4-BE49-F238E27FC236}">
-                <a16:creationId xmlns:a16="http://schemas.microsoft.com/office/drawing/2014/main" id="{82D3151C-F370-4949-4E46-2EFDE6393040}"/>
-              </a:ext>
-            </a:extLst>
-          </p:cNvPr>
-          <p:cNvSpPr/>
-          <p:nvPr/>
-        </p:nvSpPr>
-        <p:spPr>
-          <a:xfrm rot="16200000">
-            <a:off x="6405930" y="2666644"/>
-            <a:ext cx="186884" cy="240280"/>
-          </a:xfrm>
-          <a:prstGeom prst="flowChartOffpageConnector">
-            <a:avLst/>
-          </a:prstGeom>
-          <a:solidFill>
-            <a:schemeClr val="accent6">
-              <a:lumMod val="75000"/>
-            </a:schemeClr>
-          </a:solidFill>
-        </p:spPr>
-        <p:style>
-          <a:lnRef idx="2">
-            <a:schemeClr val="accent1">
-              <a:shade val="15000"/>
-            </a:schemeClr>
-          </a:lnRef>
-          <a:fillRef idx="1">
-            <a:schemeClr val="accent1"/>
-          </a:fillRef>
-          <a:effectRef idx="0">
-            <a:schemeClr val="accent1"/>
-          </a:effectRef>
-          <a:fontRef idx="minor">
-            <a:schemeClr val="lt1"/>
-          </a:fontRef>
-        </p:style>
-        <p:txBody>
-          <a:bodyPr vert="vert" rtlCol="0" anchor="ctr"/>
-          <a:lstStyle/>
-          <a:p>
-            <a:pPr algn="ctr"/>
-            <a:r>
-              <a:rPr lang="en-US" sz="1400" b="1" dirty="0"/>
-              <a:t>4</a:t>
-            </a:r>
-          </a:p>
-        </p:txBody>
-      </p:sp>
-      <p:cxnSp>
-        <p:nvCxnSpPr>
-          <p:cNvPr id="9" name="Straight Arrow Connector 8">
-            <a:extLst>
-              <a:ext uri="{FF2B5EF4-FFF2-40B4-BE49-F238E27FC236}">
-                <a16:creationId xmlns:a16="http://schemas.microsoft.com/office/drawing/2014/main" id="{9458E378-64A6-E028-0C10-0269BED70907}"/>
-              </a:ext>
-            </a:extLst>
-          </p:cNvPr>
-          <p:cNvCxnSpPr>
-            <a:cxnSpLocks/>
-          </p:cNvCxnSpPr>
-          <p:nvPr/>
-        </p:nvCxnSpPr>
-        <p:spPr>
-          <a:xfrm>
-            <a:off x="7902929" y="4750067"/>
-            <a:ext cx="627724" cy="0"/>
-          </a:xfrm>
-          <a:prstGeom prst="straightConnector1">
-            <a:avLst/>
-          </a:prstGeom>
-          <a:ln w="12700">
-            <a:solidFill>
-              <a:schemeClr val="tx1"/>
-            </a:solidFill>
-            <a:headEnd type="arrow"/>
-            <a:tailEnd type="arrow"/>
-          </a:ln>
-        </p:spPr>
-        <p:style>
-          <a:lnRef idx="1">
-            <a:schemeClr val="accent1"/>
-          </a:lnRef>
-          <a:fillRef idx="0">
-            <a:schemeClr val="accent1"/>
-          </a:fillRef>
-          <a:effectRef idx="0">
-            <a:schemeClr val="accent1"/>
-          </a:effectRef>
-          <a:fontRef idx="minor">
-            <a:schemeClr val="tx1"/>
-          </a:fontRef>
-        </p:style>
-      </p:cxnSp>
-      <p:sp>
-        <p:nvSpPr>
-          <p:cNvPr id="14" name="Rectangle 13">
-            <a:extLst>
-              <a:ext uri="{FF2B5EF4-FFF2-40B4-BE49-F238E27FC236}">
-                <a16:creationId xmlns:a16="http://schemas.microsoft.com/office/drawing/2014/main" id="{7B3D0089-C192-CA16-D91B-29EDF91F0A0B}"/>
-              </a:ext>
-            </a:extLst>
-          </p:cNvPr>
-          <p:cNvSpPr/>
-          <p:nvPr/>
-        </p:nvSpPr>
-        <p:spPr>
-          <a:xfrm>
-            <a:off x="6647580" y="5387637"/>
-            <a:ext cx="1314542" cy="740680"/>
-          </a:xfrm>
-          <a:prstGeom prst="rect">
-            <a:avLst/>
-          </a:prstGeom>
-          <a:solidFill>
-            <a:schemeClr val="accent1">
-              <a:lumMod val="40000"/>
-              <a:lumOff val="60000"/>
-            </a:schemeClr>
-          </a:solidFill>
-        </p:spPr>
-        <p:style>
-          <a:lnRef idx="2">
-            <a:schemeClr val="accent1">
-              <a:shade val="15000"/>
-            </a:schemeClr>
-          </a:lnRef>
-          <a:fillRef idx="1">
-            <a:schemeClr val="accent1"/>
-          </a:fillRef>
-          <a:effectRef idx="0">
-            <a:schemeClr val="accent1"/>
-          </a:effectRef>
-          <a:fontRef idx="minor">
-            <a:schemeClr val="lt1"/>
-          </a:fontRef>
-        </p:style>
-        <p:txBody>
-          <a:bodyPr lIns="0" tIns="45720" rIns="0" bIns="0" rtlCol="0" anchor="t"/>
-          <a:lstStyle/>
-          <a:p>
-            <a:pPr algn="ctr"/>
-            <a:r>
-              <a:rPr lang="en-US" sz="900" b="1" dirty="0"/>
-              <a:t>🐳 Docker Container</a:t>
-            </a:r>
-          </a:p>
-          <a:p>
-            <a:pPr algn="ctr"/>
-            <a:r>
-              <a:rPr lang="en-US" sz="900" i="1" dirty="0"/>
-              <a:t>“pgvector/pgvector:pg17”</a:t>
-            </a:r>
-          </a:p>
-        </p:txBody>
-      </p:sp>
-      <p:sp>
-        <p:nvSpPr>
-          <p:cNvPr id="16" name="Rectangle 15">
-            <a:extLst>
-              <a:ext uri="{FF2B5EF4-FFF2-40B4-BE49-F238E27FC236}">
-                <a16:creationId xmlns:a16="http://schemas.microsoft.com/office/drawing/2014/main" id="{587C3EA7-BCBD-F703-4C04-1F10B55FC777}"/>
-              </a:ext>
-            </a:extLst>
-          </p:cNvPr>
-          <p:cNvSpPr/>
-          <p:nvPr/>
-        </p:nvSpPr>
-        <p:spPr>
-          <a:xfrm>
-            <a:off x="6706773" y="5724040"/>
-            <a:ext cx="1196156" cy="356069"/>
-          </a:xfrm>
-          <a:prstGeom prst="rect">
-            <a:avLst/>
-          </a:prstGeom>
-          <a:solidFill>
-            <a:schemeClr val="accent2">
-              <a:lumMod val="60000"/>
-              <a:lumOff val="40000"/>
-            </a:schemeClr>
-          </a:solidFill>
-        </p:spPr>
-        <p:style>
-          <a:lnRef idx="2">
-            <a:schemeClr val="accent1">
-              <a:shade val="15000"/>
-            </a:schemeClr>
-          </a:lnRef>
-          <a:fillRef idx="1">
-            <a:schemeClr val="accent1"/>
-          </a:fillRef>
-          <a:effectRef idx="0">
-            <a:schemeClr val="accent1"/>
-          </a:effectRef>
-          <a:fontRef idx="minor">
-            <a:schemeClr val="lt1"/>
-          </a:fontRef>
-        </p:style>
-        <p:txBody>
-          <a:bodyPr lIns="0" tIns="0" rIns="0" bIns="0" rtlCol="0" anchor="t"/>
-          <a:lstStyle/>
-          <a:p>
-            <a:pPr algn="ctr"/>
-            <a:r>
-              <a:rPr lang="en-US" sz="1050" b="1" dirty="0"/>
-              <a:t>Test</a:t>
-            </a:r>
-            <a:r>
-              <a:rPr lang="en-US" sz="900" dirty="0"/>
-              <a:t> PostgreSQL Server</a:t>
-            </a:r>
-          </a:p>
-        </p:txBody>
-      </p:sp>
-      <p:sp>
-        <p:nvSpPr>
-          <p:cNvPr id="17" name="Rectangle 16">
-            <a:extLst>
-              <a:ext uri="{FF2B5EF4-FFF2-40B4-BE49-F238E27FC236}">
-                <a16:creationId xmlns:a16="http://schemas.microsoft.com/office/drawing/2014/main" id="{2B814015-7DE2-E6CF-83DF-F2CFE2A7AB61}"/>
-              </a:ext>
-            </a:extLst>
-          </p:cNvPr>
-          <p:cNvSpPr/>
-          <p:nvPr/>
-        </p:nvSpPr>
-        <p:spPr>
-          <a:xfrm>
-            <a:off x="6914467" y="5906573"/>
-            <a:ext cx="780768" cy="149563"/>
-          </a:xfrm>
-          <a:prstGeom prst="rect">
-            <a:avLst/>
-          </a:prstGeom>
-          <a:solidFill>
-            <a:schemeClr val="accent2">
-              <a:lumMod val="60000"/>
-              <a:lumOff val="40000"/>
-            </a:schemeClr>
-          </a:solidFill>
-        </p:spPr>
-        <p:style>
-          <a:lnRef idx="2">
-            <a:schemeClr val="accent1">
-              <a:shade val="15000"/>
-            </a:schemeClr>
-          </a:lnRef>
-          <a:fillRef idx="1">
-            <a:schemeClr val="accent1"/>
-          </a:fillRef>
-          <a:effectRef idx="0">
-            <a:schemeClr val="accent1"/>
-          </a:effectRef>
-          <a:fontRef idx="minor">
-            <a:schemeClr val="lt1"/>
-          </a:fontRef>
-        </p:style>
-        <p:txBody>
-          <a:bodyPr lIns="0" tIns="0" rIns="0" bIns="0" rtlCol="0" anchor="ctr"/>
-          <a:lstStyle/>
-          <a:p>
-            <a:pPr algn="ctr"/>
-            <a:r>
-              <a:rPr lang="en-US" sz="800" dirty="0"/>
-              <a:t>📚 </a:t>
-            </a:r>
-            <a:r>
-              <a:rPr lang="en-US" sz="800" b="1" u="sng" dirty="0"/>
-              <a:t>pg-vector</a:t>
-            </a:r>
-          </a:p>
-        </p:txBody>
-      </p:sp>
-      <p:sp>
-        <p:nvSpPr>
-          <p:cNvPr id="19" name="Rectangle 18">
-            <a:extLst>
-              <a:ext uri="{FF2B5EF4-FFF2-40B4-BE49-F238E27FC236}">
-                <a16:creationId xmlns:a16="http://schemas.microsoft.com/office/drawing/2014/main" id="{A1E4815B-12EB-5B81-7205-419D7DA693D5}"/>
-              </a:ext>
-            </a:extLst>
-          </p:cNvPr>
-          <p:cNvSpPr/>
-          <p:nvPr/>
-        </p:nvSpPr>
-        <p:spPr>
-          <a:xfrm>
-            <a:off x="8367658" y="5468951"/>
-            <a:ext cx="993676" cy="740680"/>
-          </a:xfrm>
-          <a:prstGeom prst="rect">
-            <a:avLst/>
-          </a:prstGeom>
-          <a:solidFill>
-            <a:schemeClr val="bg1">
-              <a:lumMod val="95000"/>
-            </a:schemeClr>
-          </a:solidFill>
-          <a:ln>
-            <a:prstDash val="dash"/>
-          </a:ln>
-        </p:spPr>
-        <p:style>
-          <a:lnRef idx="2">
-            <a:schemeClr val="accent1">
-              <a:shade val="15000"/>
-            </a:schemeClr>
-          </a:lnRef>
-          <a:fillRef idx="1">
-            <a:schemeClr val="accent1"/>
-          </a:fillRef>
-          <a:effectRef idx="0">
-            <a:schemeClr val="accent1"/>
-          </a:effectRef>
-          <a:fontRef idx="minor">
-            <a:schemeClr val="lt1"/>
-          </a:fontRef>
-        </p:style>
-        <p:txBody>
           <a:bodyPr rtlCol="0" anchor="t"/>
           <a:lstStyle/>
           <a:p>
@@ -6467,7 +6056,7 @@
         </p:nvGrpSpPr>
         <p:grpSpPr>
           <a:xfrm>
-            <a:off x="8530653" y="5721371"/>
+            <a:off x="8997884" y="2766987"/>
             <a:ext cx="680794" cy="433282"/>
             <a:chOff x="8227377" y="3019807"/>
             <a:chExt cx="680794" cy="785917"/>
@@ -6643,7 +6232,7 @@
         </p:nvCxnSpPr>
         <p:spPr>
           <a:xfrm>
-            <a:off x="7902929" y="5961104"/>
+            <a:off x="8370160" y="3006720"/>
             <a:ext cx="627724" cy="0"/>
           </a:xfrm>
           <a:prstGeom prst="straightConnector1">
@@ -6672,6 +6261,967 @@
           </a:fontRef>
         </p:style>
       </p:cxnSp>
+      <p:sp>
+        <p:nvSpPr>
+          <p:cNvPr id="50" name="Rectangle 49">
+            <a:extLst>
+              <a:ext uri="{FF2B5EF4-FFF2-40B4-BE49-F238E27FC236}">
+                <a16:creationId xmlns:a16="http://schemas.microsoft.com/office/drawing/2014/main" id="{A704E17B-8006-1E54-EA84-DCC843A8BAA2}"/>
+              </a:ext>
+            </a:extLst>
+          </p:cNvPr>
+          <p:cNvSpPr/>
+          <p:nvPr/>
+        </p:nvSpPr>
+        <p:spPr>
+          <a:xfrm>
+            <a:off x="7114811" y="4296797"/>
+            <a:ext cx="1314542" cy="1755660"/>
+          </a:xfrm>
+          <a:prstGeom prst="rect">
+            <a:avLst/>
+          </a:prstGeom>
+          <a:solidFill>
+            <a:schemeClr val="accent1">
+              <a:lumMod val="40000"/>
+              <a:lumOff val="60000"/>
+            </a:schemeClr>
+          </a:solidFill>
+        </p:spPr>
+        <p:style>
+          <a:lnRef idx="2">
+            <a:schemeClr val="accent1">
+              <a:shade val="15000"/>
+            </a:schemeClr>
+          </a:lnRef>
+          <a:fillRef idx="1">
+            <a:schemeClr val="accent1"/>
+          </a:fillRef>
+          <a:effectRef idx="0">
+            <a:schemeClr val="accent1"/>
+          </a:effectRef>
+          <a:fontRef idx="minor">
+            <a:schemeClr val="lt1"/>
+          </a:fontRef>
+        </p:style>
+        <p:txBody>
+          <a:bodyPr lIns="0" tIns="45720" rIns="0" bIns="0" rtlCol="0" anchor="t"/>
+          <a:lstStyle/>
+          <a:p>
+            <a:pPr algn="ctr"/>
+            <a:r>
+              <a:rPr lang="en-US" sz="900" b="1" dirty="0"/>
+              <a:t>🐳 Docker Container</a:t>
+            </a:r>
+          </a:p>
+          <a:p>
+            <a:pPr algn="ctr"/>
+            <a:r>
+              <a:rPr lang="en-US" sz="900" i="1" dirty="0"/>
+              <a:t>“ollama/ollama:latest”</a:t>
+            </a:r>
+          </a:p>
+        </p:txBody>
+      </p:sp>
+      <p:sp>
+        <p:nvSpPr>
+          <p:cNvPr id="51" name="Rectangle 50">
+            <a:extLst>
+              <a:ext uri="{FF2B5EF4-FFF2-40B4-BE49-F238E27FC236}">
+                <a16:creationId xmlns:a16="http://schemas.microsoft.com/office/drawing/2014/main" id="{24279042-094F-6602-009C-0DF3E4513282}"/>
+              </a:ext>
+            </a:extLst>
+          </p:cNvPr>
+          <p:cNvSpPr/>
+          <p:nvPr/>
+        </p:nvSpPr>
+        <p:spPr>
+          <a:xfrm>
+            <a:off x="7174004" y="4747150"/>
+            <a:ext cx="1196156" cy="1112474"/>
+          </a:xfrm>
+          <a:prstGeom prst="rect">
+            <a:avLst/>
+          </a:prstGeom>
+          <a:solidFill>
+            <a:schemeClr val="accent2">
+              <a:lumMod val="60000"/>
+              <a:lumOff val="40000"/>
+            </a:schemeClr>
+          </a:solidFill>
+        </p:spPr>
+        <p:style>
+          <a:lnRef idx="2">
+            <a:schemeClr val="accent1">
+              <a:shade val="15000"/>
+            </a:schemeClr>
+          </a:lnRef>
+          <a:fillRef idx="1">
+            <a:schemeClr val="accent1"/>
+          </a:fillRef>
+          <a:effectRef idx="0">
+            <a:schemeClr val="accent1"/>
+          </a:effectRef>
+          <a:fontRef idx="minor">
+            <a:schemeClr val="lt1"/>
+          </a:fontRef>
+        </p:style>
+        <p:txBody>
+          <a:bodyPr lIns="0" tIns="0" rIns="0" bIns="0" rtlCol="0" anchor="t"/>
+          <a:lstStyle/>
+          <a:p>
+            <a:pPr algn="ctr"/>
+            <a:r>
+              <a:rPr lang="en-US" sz="1600" dirty="0"/>
+              <a:t>Ollama</a:t>
+            </a:r>
+          </a:p>
+        </p:txBody>
+      </p:sp>
+      <p:sp>
+        <p:nvSpPr>
+          <p:cNvPr id="52" name="Rectangle 51">
+            <a:extLst>
+              <a:ext uri="{FF2B5EF4-FFF2-40B4-BE49-F238E27FC236}">
+                <a16:creationId xmlns:a16="http://schemas.microsoft.com/office/drawing/2014/main" id="{777C000F-3064-393F-A13D-62223B40936B}"/>
+              </a:ext>
+            </a:extLst>
+          </p:cNvPr>
+          <p:cNvSpPr/>
+          <p:nvPr/>
+        </p:nvSpPr>
+        <p:spPr>
+          <a:xfrm>
+            <a:off x="7246776" y="5075208"/>
+            <a:ext cx="1050612" cy="336133"/>
+          </a:xfrm>
+          <a:prstGeom prst="rect">
+            <a:avLst/>
+          </a:prstGeom>
+          <a:solidFill>
+            <a:schemeClr val="accent2">
+              <a:lumMod val="60000"/>
+              <a:lumOff val="40000"/>
+            </a:schemeClr>
+          </a:solidFill>
+        </p:spPr>
+        <p:style>
+          <a:lnRef idx="2">
+            <a:schemeClr val="accent1">
+              <a:shade val="15000"/>
+            </a:schemeClr>
+          </a:lnRef>
+          <a:fillRef idx="1">
+            <a:schemeClr val="accent1"/>
+          </a:fillRef>
+          <a:effectRef idx="0">
+            <a:schemeClr val="accent1"/>
+          </a:effectRef>
+          <a:fontRef idx="minor">
+            <a:schemeClr val="lt1"/>
+          </a:fontRef>
+        </p:style>
+        <p:txBody>
+          <a:bodyPr lIns="0" tIns="0" rIns="0" bIns="0" rtlCol="0" anchor="ctr"/>
+          <a:lstStyle/>
+          <a:p>
+            <a:pPr algn="ctr"/>
+            <a:r>
+              <a:rPr lang="en-US" sz="900" dirty="0"/>
+              <a:t>📚 </a:t>
+            </a:r>
+            <a:r>
+              <a:rPr lang="en-US" sz="900" b="1" u="sng" dirty="0"/>
+              <a:t>nomic-embed-text-v1.5</a:t>
+            </a:r>
+          </a:p>
+        </p:txBody>
+      </p:sp>
+      <p:sp>
+        <p:nvSpPr>
+          <p:cNvPr id="54" name="Rectangle 53">
+            <a:extLst>
+              <a:ext uri="{FF2B5EF4-FFF2-40B4-BE49-F238E27FC236}">
+                <a16:creationId xmlns:a16="http://schemas.microsoft.com/office/drawing/2014/main" id="{85663D04-32E6-5B27-2015-8CEE4F7B89B4}"/>
+              </a:ext>
+            </a:extLst>
+          </p:cNvPr>
+          <p:cNvSpPr/>
+          <p:nvPr/>
+        </p:nvSpPr>
+        <p:spPr>
+          <a:xfrm>
+            <a:off x="2708397" y="5053784"/>
+            <a:ext cx="2937872" cy="728112"/>
+          </a:xfrm>
+          <a:prstGeom prst="rect">
+            <a:avLst/>
+          </a:prstGeom>
+          <a:solidFill>
+            <a:srgbClr val="7030A0"/>
+          </a:solidFill>
+        </p:spPr>
+        <p:style>
+          <a:lnRef idx="2">
+            <a:schemeClr val="accent1">
+              <a:shade val="15000"/>
+            </a:schemeClr>
+          </a:lnRef>
+          <a:fillRef idx="1">
+            <a:schemeClr val="accent1"/>
+          </a:fillRef>
+          <a:effectRef idx="0">
+            <a:schemeClr val="accent1"/>
+          </a:effectRef>
+          <a:fontRef idx="minor">
+            <a:schemeClr val="lt1"/>
+          </a:fontRef>
+        </p:style>
+        <p:txBody>
+          <a:bodyPr lIns="0" tIns="0" rIns="0" bIns="0" rtlCol="0" anchor="ctr"/>
+          <a:lstStyle/>
+          <a:p>
+            <a:pPr algn="ctr"/>
+            <a:r>
+              <a:rPr lang="en-US" dirty="0"/>
+              <a:t>Embedder</a:t>
+            </a:r>
+          </a:p>
+          <a:p>
+            <a:pPr algn="ctr"/>
+            <a:r>
+              <a:rPr lang="en-US" sz="1100" dirty="0"/>
+              <a:t>📚 </a:t>
+            </a:r>
+            <a:r>
+              <a:rPr lang="en-US" sz="1100" b="1" u="sng" dirty="0"/>
+              <a:t>Ollama</a:t>
+            </a:r>
+            <a:r>
+              <a:rPr lang="en-US" sz="1100" dirty="0"/>
+              <a:t>  📚 </a:t>
+            </a:r>
+            <a:r>
+              <a:rPr lang="en-US" sz="1100" b="1" u="sng" dirty="0"/>
+              <a:t>SQLAlchemy</a:t>
+            </a:r>
+            <a:r>
+              <a:rPr lang="en-US" sz="1100" u="sng" dirty="0"/>
+              <a:t> </a:t>
+            </a:r>
+            <a:endParaRPr lang="en-US" u="sng" dirty="0"/>
+          </a:p>
+          <a:p>
+            <a:pPr algn="ctr"/>
+            <a:endParaRPr lang="en-US" sz="100" dirty="0"/>
+          </a:p>
+          <a:p>
+            <a:pPr algn="ctr"/>
+            <a:r>
+              <a:rPr lang="en-US" sz="800" dirty="0"/>
+              <a:t>= Inserts vector representations for desired rows in database </a:t>
+            </a:r>
+          </a:p>
+          <a:p>
+            <a:pPr algn="ctr"/>
+            <a:r>
+              <a:rPr lang="en-US" sz="800" dirty="0"/>
+              <a:t>using chosen embedding model</a:t>
+            </a:r>
+          </a:p>
+        </p:txBody>
+      </p:sp>
+      <p:sp>
+        <p:nvSpPr>
+          <p:cNvPr id="55" name="Rectangle 54">
+            <a:extLst>
+              <a:ext uri="{FF2B5EF4-FFF2-40B4-BE49-F238E27FC236}">
+                <a16:creationId xmlns:a16="http://schemas.microsoft.com/office/drawing/2014/main" id="{C1C9CCAC-37F8-DC7C-4604-D6711AF5E90B}"/>
+              </a:ext>
+            </a:extLst>
+          </p:cNvPr>
+          <p:cNvSpPr/>
+          <p:nvPr/>
+        </p:nvSpPr>
+        <p:spPr>
+          <a:xfrm>
+            <a:off x="2735093" y="5073807"/>
+            <a:ext cx="393792" cy="101326"/>
+          </a:xfrm>
+          <a:prstGeom prst="rect">
+            <a:avLst/>
+          </a:prstGeom>
+          <a:solidFill>
+            <a:srgbClr val="7030A0"/>
+          </a:solidFill>
+          <a:ln w="6350" cap="rnd"/>
+        </p:spPr>
+        <p:style>
+          <a:lnRef idx="2">
+            <a:schemeClr val="accent1">
+              <a:shade val="15000"/>
+            </a:schemeClr>
+          </a:lnRef>
+          <a:fillRef idx="1">
+            <a:schemeClr val="accent1"/>
+          </a:fillRef>
+          <a:effectRef idx="0">
+            <a:schemeClr val="accent1"/>
+          </a:effectRef>
+          <a:fontRef idx="minor">
+            <a:schemeClr val="lt1"/>
+          </a:fontRef>
+        </p:style>
+        <p:txBody>
+          <a:bodyPr lIns="0" tIns="0" rIns="0" bIns="0" rtlCol="0" anchor="ctr"/>
+          <a:lstStyle/>
+          <a:p>
+            <a:pPr algn="ctr"/>
+            <a:r>
+              <a:rPr lang="en-US" sz="700" dirty="0"/>
+              <a:t>.py script</a:t>
+            </a:r>
+          </a:p>
+        </p:txBody>
+      </p:sp>
+      <p:sp>
+        <p:nvSpPr>
+          <p:cNvPr id="60" name="Rectangle 59">
+            <a:extLst>
+              <a:ext uri="{FF2B5EF4-FFF2-40B4-BE49-F238E27FC236}">
+                <a16:creationId xmlns:a16="http://schemas.microsoft.com/office/drawing/2014/main" id="{D12C56A1-944F-954F-2B8C-35C033490727}"/>
+              </a:ext>
+            </a:extLst>
+          </p:cNvPr>
+          <p:cNvSpPr/>
+          <p:nvPr/>
+        </p:nvSpPr>
+        <p:spPr>
+          <a:xfrm>
+            <a:off x="6964925" y="2359561"/>
+            <a:ext cx="202062" cy="895686"/>
+          </a:xfrm>
+          <a:prstGeom prst="rect">
+            <a:avLst/>
+          </a:prstGeom>
+          <a:solidFill>
+            <a:srgbClr val="B17ED8"/>
+          </a:solidFill>
+        </p:spPr>
+        <p:style>
+          <a:lnRef idx="2">
+            <a:schemeClr val="accent1">
+              <a:shade val="15000"/>
+            </a:schemeClr>
+          </a:lnRef>
+          <a:fillRef idx="1">
+            <a:schemeClr val="accent1"/>
+          </a:fillRef>
+          <a:effectRef idx="0">
+            <a:schemeClr val="accent1"/>
+          </a:effectRef>
+          <a:fontRef idx="minor">
+            <a:schemeClr val="lt1"/>
+          </a:fontRef>
+        </p:style>
+        <p:txBody>
+          <a:bodyPr vert="vert270" lIns="0" tIns="0" rIns="0" bIns="0" rtlCol="0" anchor="ctr"/>
+          <a:lstStyle/>
+          <a:p>
+            <a:pPr algn="ctr"/>
+            <a:r>
+              <a:rPr lang="en-US" sz="900" dirty="0"/>
+              <a:t>📚 asyncpg</a:t>
+            </a:r>
+          </a:p>
+        </p:txBody>
+      </p:sp>
+      <p:cxnSp>
+        <p:nvCxnSpPr>
+          <p:cNvPr id="62" name="Connector: Elbow 61">
+            <a:extLst>
+              <a:ext uri="{FF2B5EF4-FFF2-40B4-BE49-F238E27FC236}">
+                <a16:creationId xmlns:a16="http://schemas.microsoft.com/office/drawing/2014/main" id="{8D1ABD79-5421-CDF6-AB3A-BE283788495B}"/>
+              </a:ext>
+            </a:extLst>
+          </p:cNvPr>
+          <p:cNvCxnSpPr>
+            <a:cxnSpLocks/>
+          </p:cNvCxnSpPr>
+          <p:nvPr/>
+        </p:nvCxnSpPr>
+        <p:spPr>
+          <a:xfrm flipV="1">
+            <a:off x="5646269" y="2673111"/>
+            <a:ext cx="1318656" cy="1318793"/>
+          </a:xfrm>
+          <a:prstGeom prst="bentConnector3">
+            <a:avLst/>
+          </a:prstGeom>
+          <a:ln w="12700">
+            <a:solidFill>
+              <a:schemeClr val="tx1"/>
+            </a:solidFill>
+            <a:tailEnd type="arrow"/>
+          </a:ln>
+        </p:spPr>
+        <p:style>
+          <a:lnRef idx="1">
+            <a:schemeClr val="accent1"/>
+          </a:lnRef>
+          <a:fillRef idx="0">
+            <a:schemeClr val="accent1"/>
+          </a:fillRef>
+          <a:effectRef idx="0">
+            <a:schemeClr val="accent1"/>
+          </a:effectRef>
+          <a:fontRef idx="minor">
+            <a:schemeClr val="tx1"/>
+          </a:fontRef>
+        </p:style>
+      </p:cxnSp>
+      <p:cxnSp>
+        <p:nvCxnSpPr>
+          <p:cNvPr id="64" name="Connector: Elbow 63">
+            <a:extLst>
+              <a:ext uri="{FF2B5EF4-FFF2-40B4-BE49-F238E27FC236}">
+                <a16:creationId xmlns:a16="http://schemas.microsoft.com/office/drawing/2014/main" id="{11751A89-E551-A2BD-9E1D-6EBB198937B5}"/>
+              </a:ext>
+            </a:extLst>
+          </p:cNvPr>
+          <p:cNvCxnSpPr>
+            <a:cxnSpLocks/>
+          </p:cNvCxnSpPr>
+          <p:nvPr/>
+        </p:nvCxnSpPr>
+        <p:spPr>
+          <a:xfrm flipV="1">
+            <a:off x="5646269" y="2825321"/>
+            <a:ext cx="1318656" cy="2312605"/>
+          </a:xfrm>
+          <a:prstGeom prst="bentConnector3">
+            <a:avLst>
+              <a:gd name="adj1" fmla="val 59906"/>
+            </a:avLst>
+          </a:prstGeom>
+          <a:ln w="12700">
+            <a:solidFill>
+              <a:schemeClr val="tx1"/>
+            </a:solidFill>
+            <a:tailEnd type="arrow"/>
+          </a:ln>
+        </p:spPr>
+        <p:style>
+          <a:lnRef idx="1">
+            <a:schemeClr val="accent1"/>
+          </a:lnRef>
+          <a:fillRef idx="0">
+            <a:schemeClr val="accent1"/>
+          </a:fillRef>
+          <a:effectRef idx="0">
+            <a:schemeClr val="accent1"/>
+          </a:effectRef>
+          <a:fontRef idx="minor">
+            <a:schemeClr val="tx1"/>
+          </a:fontRef>
+        </p:style>
+      </p:cxnSp>
+      <p:cxnSp>
+        <p:nvCxnSpPr>
+          <p:cNvPr id="87" name="Straight Connector 86">
+            <a:extLst>
+              <a:ext uri="{FF2B5EF4-FFF2-40B4-BE49-F238E27FC236}">
+                <a16:creationId xmlns:a16="http://schemas.microsoft.com/office/drawing/2014/main" id="{0E25E5C5-8A27-B764-B166-E43986428E9E}"/>
+              </a:ext>
+            </a:extLst>
+          </p:cNvPr>
+          <p:cNvCxnSpPr>
+            <a:cxnSpLocks/>
+            <a:stCxn id="52" idx="1"/>
+          </p:cNvCxnSpPr>
+          <p:nvPr/>
+        </p:nvCxnSpPr>
+        <p:spPr>
+          <a:xfrm flipH="1">
+            <a:off x="5646269" y="5243275"/>
+            <a:ext cx="1600507" cy="0"/>
+          </a:xfrm>
+          <a:prstGeom prst="line">
+            <a:avLst/>
+          </a:prstGeom>
+          <a:ln w="12700">
+            <a:solidFill>
+              <a:schemeClr val="tx1"/>
+            </a:solidFill>
+            <a:headEnd type="arrow"/>
+            <a:tailEnd type="arrow"/>
+          </a:ln>
+        </p:spPr>
+        <p:style>
+          <a:lnRef idx="1">
+            <a:schemeClr val="accent1"/>
+          </a:lnRef>
+          <a:fillRef idx="0">
+            <a:schemeClr val="accent1"/>
+          </a:fillRef>
+          <a:effectRef idx="0">
+            <a:schemeClr val="accent1"/>
+          </a:effectRef>
+          <a:fontRef idx="minor">
+            <a:schemeClr val="tx1"/>
+          </a:fontRef>
+        </p:style>
+      </p:cxnSp>
+      <p:sp>
+        <p:nvSpPr>
+          <p:cNvPr id="89" name="Rectangle 88">
+            <a:extLst>
+              <a:ext uri="{FF2B5EF4-FFF2-40B4-BE49-F238E27FC236}">
+                <a16:creationId xmlns:a16="http://schemas.microsoft.com/office/drawing/2014/main" id="{DAB55712-B2D3-23FC-BFC7-359CEB972480}"/>
+              </a:ext>
+            </a:extLst>
+          </p:cNvPr>
+          <p:cNvSpPr/>
+          <p:nvPr/>
+        </p:nvSpPr>
+        <p:spPr>
+          <a:xfrm>
+            <a:off x="7246776" y="5477006"/>
+            <a:ext cx="1050612" cy="304890"/>
+          </a:xfrm>
+          <a:prstGeom prst="rect">
+            <a:avLst/>
+          </a:prstGeom>
+          <a:solidFill>
+            <a:schemeClr val="accent2">
+              <a:lumMod val="60000"/>
+              <a:lumOff val="40000"/>
+            </a:schemeClr>
+          </a:solidFill>
+        </p:spPr>
+        <p:style>
+          <a:lnRef idx="2">
+            <a:schemeClr val="accent1">
+              <a:shade val="15000"/>
+            </a:schemeClr>
+          </a:lnRef>
+          <a:fillRef idx="1">
+            <a:schemeClr val="accent1"/>
+          </a:fillRef>
+          <a:effectRef idx="0">
+            <a:schemeClr val="accent1"/>
+          </a:effectRef>
+          <a:fontRef idx="minor">
+            <a:schemeClr val="lt1"/>
+          </a:fontRef>
+        </p:style>
+        <p:txBody>
+          <a:bodyPr lIns="0" tIns="0" rIns="0" bIns="0" rtlCol="0" anchor="ctr"/>
+          <a:lstStyle/>
+          <a:p>
+            <a:pPr algn="ctr"/>
+            <a:r>
+              <a:rPr lang="en-US" sz="900" b="1" i="1" dirty="0"/>
+              <a:t>Local LLM</a:t>
+            </a:r>
+          </a:p>
+          <a:p>
+            <a:pPr algn="ctr"/>
+            <a:r>
+              <a:rPr lang="en-US" sz="900" dirty="0"/>
+              <a:t>📚 </a:t>
+            </a:r>
+            <a:r>
+              <a:rPr lang="en-US" sz="900" b="1" u="sng" dirty="0"/>
+              <a:t>Qwen2.5-Coder</a:t>
+            </a:r>
+          </a:p>
+        </p:txBody>
+      </p:sp>
+      <p:sp>
+        <p:nvSpPr>
+          <p:cNvPr id="90" name="Rectangle 89">
+            <a:extLst>
+              <a:ext uri="{FF2B5EF4-FFF2-40B4-BE49-F238E27FC236}">
+                <a16:creationId xmlns:a16="http://schemas.microsoft.com/office/drawing/2014/main" id="{E9A11068-2F85-B8AC-D139-7A94970A6B6F}"/>
+              </a:ext>
+            </a:extLst>
+          </p:cNvPr>
+          <p:cNvSpPr/>
+          <p:nvPr/>
+        </p:nvSpPr>
+        <p:spPr>
+          <a:xfrm>
+            <a:off x="9207382" y="3662607"/>
+            <a:ext cx="1947624" cy="509053"/>
+          </a:xfrm>
+          <a:prstGeom prst="rect">
+            <a:avLst/>
+          </a:prstGeom>
+          <a:solidFill>
+            <a:schemeClr val="bg1">
+              <a:lumMod val="85000"/>
+            </a:schemeClr>
+          </a:solidFill>
+        </p:spPr>
+        <p:style>
+          <a:lnRef idx="2">
+            <a:schemeClr val="accent1">
+              <a:shade val="15000"/>
+            </a:schemeClr>
+          </a:lnRef>
+          <a:fillRef idx="1">
+            <a:schemeClr val="accent1"/>
+          </a:fillRef>
+          <a:effectRef idx="0">
+            <a:schemeClr val="accent1"/>
+          </a:effectRef>
+          <a:fontRef idx="minor">
+            <a:schemeClr val="lt1"/>
+          </a:fontRef>
+        </p:style>
+        <p:txBody>
+          <a:bodyPr lIns="0" tIns="45720" rIns="0" bIns="0" rtlCol="0" anchor="t"/>
+          <a:lstStyle/>
+          <a:p>
+            <a:pPr algn="ctr"/>
+            <a:r>
+              <a:rPr lang="en-US" sz="1100" b="1" dirty="0"/>
+              <a:t>User-facing LLM</a:t>
+            </a:r>
+          </a:p>
+          <a:p>
+            <a:pPr algn="ctr"/>
+            <a:r>
+              <a:rPr lang="en-US" sz="1200" dirty="0">
+                <a:solidFill>
+                  <a:schemeClr val="tx1"/>
+                </a:solidFill>
+              </a:rPr>
+              <a:t>📚 …</a:t>
+            </a:r>
+          </a:p>
+        </p:txBody>
+      </p:sp>
+      <p:sp>
+        <p:nvSpPr>
+          <p:cNvPr id="92" name="Rectangle 91">
+            <a:extLst>
+              <a:ext uri="{FF2B5EF4-FFF2-40B4-BE49-F238E27FC236}">
+                <a16:creationId xmlns:a16="http://schemas.microsoft.com/office/drawing/2014/main" id="{D286EDA6-6361-ED43-DE75-245CF0C6A8BC}"/>
+              </a:ext>
+            </a:extLst>
+          </p:cNvPr>
+          <p:cNvSpPr/>
+          <p:nvPr/>
+        </p:nvSpPr>
+        <p:spPr>
+          <a:xfrm>
+            <a:off x="9207382" y="4689999"/>
+            <a:ext cx="1947624" cy="1106552"/>
+          </a:xfrm>
+          <a:prstGeom prst="rect">
+            <a:avLst/>
+          </a:prstGeom>
+          <a:solidFill>
+            <a:srgbClr val="7030A0"/>
+          </a:solidFill>
+        </p:spPr>
+        <p:style>
+          <a:lnRef idx="2">
+            <a:schemeClr val="accent1">
+              <a:shade val="15000"/>
+            </a:schemeClr>
+          </a:lnRef>
+          <a:fillRef idx="1">
+            <a:schemeClr val="accent1"/>
+          </a:fillRef>
+          <a:effectRef idx="0">
+            <a:schemeClr val="accent1"/>
+          </a:effectRef>
+          <a:fontRef idx="minor">
+            <a:schemeClr val="lt1"/>
+          </a:fontRef>
+        </p:style>
+        <p:txBody>
+          <a:bodyPr lIns="0" tIns="0" rIns="0" bIns="0" rtlCol="0" anchor="ctr"/>
+          <a:lstStyle/>
+          <a:p>
+            <a:pPr algn="ctr"/>
+            <a:r>
+              <a:rPr lang="en-US" dirty="0"/>
+              <a:t>Query Handler</a:t>
+            </a:r>
+          </a:p>
+          <a:p>
+            <a:pPr algn="ctr"/>
+            <a:r>
+              <a:rPr lang="en-US" sz="1100" dirty="0"/>
+              <a:t>📚 </a:t>
+            </a:r>
+            <a:r>
+              <a:rPr lang="en-US" sz="1100" b="1" u="sng" dirty="0"/>
+              <a:t>???</a:t>
+            </a:r>
+            <a:endParaRPr lang="en-US" u="sng" dirty="0"/>
+          </a:p>
+          <a:p>
+            <a:pPr algn="ctr"/>
+            <a:endParaRPr lang="en-US" sz="100" dirty="0"/>
+          </a:p>
+          <a:p>
+            <a:pPr algn="ctr"/>
+            <a:r>
+              <a:rPr lang="en-US" sz="800" dirty="0"/>
+              <a:t>= Receives queries from user, determines relevant Concepts, then uses Local LLM to get the data from PostgreSQL (read-only guard)</a:t>
+            </a:r>
+          </a:p>
+        </p:txBody>
+      </p:sp>
+      <p:sp>
+        <p:nvSpPr>
+          <p:cNvPr id="93" name="Rectangle 92">
+            <a:extLst>
+              <a:ext uri="{FF2B5EF4-FFF2-40B4-BE49-F238E27FC236}">
+                <a16:creationId xmlns:a16="http://schemas.microsoft.com/office/drawing/2014/main" id="{C470D739-A7E4-B20F-87C7-38FAB125269A}"/>
+              </a:ext>
+            </a:extLst>
+          </p:cNvPr>
+          <p:cNvSpPr/>
+          <p:nvPr/>
+        </p:nvSpPr>
+        <p:spPr>
+          <a:xfrm>
+            <a:off x="9238734" y="4788008"/>
+            <a:ext cx="393792" cy="101326"/>
+          </a:xfrm>
+          <a:prstGeom prst="rect">
+            <a:avLst/>
+          </a:prstGeom>
+          <a:solidFill>
+            <a:srgbClr val="7030A0"/>
+          </a:solidFill>
+          <a:ln w="6350" cap="rnd"/>
+        </p:spPr>
+        <p:style>
+          <a:lnRef idx="2">
+            <a:schemeClr val="accent1">
+              <a:shade val="15000"/>
+            </a:schemeClr>
+          </a:lnRef>
+          <a:fillRef idx="1">
+            <a:schemeClr val="accent1"/>
+          </a:fillRef>
+          <a:effectRef idx="0">
+            <a:schemeClr val="accent1"/>
+          </a:effectRef>
+          <a:fontRef idx="minor">
+            <a:schemeClr val="lt1"/>
+          </a:fontRef>
+        </p:style>
+        <p:txBody>
+          <a:bodyPr lIns="0" tIns="0" rIns="0" bIns="0" rtlCol="0" anchor="ctr"/>
+          <a:lstStyle/>
+          <a:p>
+            <a:pPr algn="ctr"/>
+            <a:r>
+              <a:rPr lang="en-US" sz="700" dirty="0"/>
+              <a:t>.py script</a:t>
+            </a:r>
+          </a:p>
+        </p:txBody>
+      </p:sp>
+      <p:cxnSp>
+        <p:nvCxnSpPr>
+          <p:cNvPr id="100" name="Straight Arrow Connector 99">
+            <a:extLst>
+              <a:ext uri="{FF2B5EF4-FFF2-40B4-BE49-F238E27FC236}">
+                <a16:creationId xmlns:a16="http://schemas.microsoft.com/office/drawing/2014/main" id="{048236B6-BEC2-3063-49AB-C4D8F7E5E371}"/>
+              </a:ext>
+            </a:extLst>
+          </p:cNvPr>
+          <p:cNvCxnSpPr>
+            <a:cxnSpLocks/>
+            <a:stCxn id="90" idx="2"/>
+            <a:endCxn id="92" idx="0"/>
+          </p:cNvCxnSpPr>
+          <p:nvPr/>
+        </p:nvCxnSpPr>
+        <p:spPr>
+          <a:xfrm>
+            <a:off x="10181194" y="4171660"/>
+            <a:ext cx="0" cy="518339"/>
+          </a:xfrm>
+          <a:prstGeom prst="straightConnector1">
+            <a:avLst/>
+          </a:prstGeom>
+          <a:ln w="12700">
+            <a:solidFill>
+              <a:schemeClr val="tx1"/>
+            </a:solidFill>
+            <a:tailEnd type="arrow"/>
+          </a:ln>
+        </p:spPr>
+        <p:style>
+          <a:lnRef idx="1">
+            <a:schemeClr val="accent1"/>
+          </a:lnRef>
+          <a:fillRef idx="0">
+            <a:schemeClr val="accent1"/>
+          </a:fillRef>
+          <a:effectRef idx="0">
+            <a:schemeClr val="accent1"/>
+          </a:effectRef>
+          <a:fontRef idx="minor">
+            <a:schemeClr val="tx1"/>
+          </a:fontRef>
+        </p:style>
+      </p:cxnSp>
+      <p:cxnSp>
+        <p:nvCxnSpPr>
+          <p:cNvPr id="103" name="Straight Arrow Connector 102">
+            <a:extLst>
+              <a:ext uri="{FF2B5EF4-FFF2-40B4-BE49-F238E27FC236}">
+                <a16:creationId xmlns:a16="http://schemas.microsoft.com/office/drawing/2014/main" id="{11A63202-9707-9FE3-CE76-F449C5D46B48}"/>
+              </a:ext>
+            </a:extLst>
+          </p:cNvPr>
+          <p:cNvCxnSpPr>
+            <a:cxnSpLocks/>
+            <a:stCxn id="92" idx="1"/>
+            <a:endCxn id="52" idx="3"/>
+          </p:cNvCxnSpPr>
+          <p:nvPr/>
+        </p:nvCxnSpPr>
+        <p:spPr>
+          <a:xfrm flipH="1">
+            <a:off x="8297388" y="5243275"/>
+            <a:ext cx="909994" cy="0"/>
+          </a:xfrm>
+          <a:prstGeom prst="straightConnector1">
+            <a:avLst/>
+          </a:prstGeom>
+          <a:ln w="12700">
+            <a:solidFill>
+              <a:schemeClr val="tx1"/>
+            </a:solidFill>
+            <a:headEnd type="arrow"/>
+            <a:tailEnd type="arrow"/>
+          </a:ln>
+        </p:spPr>
+        <p:style>
+          <a:lnRef idx="1">
+            <a:schemeClr val="accent1"/>
+          </a:lnRef>
+          <a:fillRef idx="0">
+            <a:schemeClr val="accent1"/>
+          </a:fillRef>
+          <a:effectRef idx="0">
+            <a:schemeClr val="accent1"/>
+          </a:effectRef>
+          <a:fontRef idx="minor">
+            <a:schemeClr val="tx1"/>
+          </a:fontRef>
+        </p:style>
+      </p:cxnSp>
+      <p:cxnSp>
+        <p:nvCxnSpPr>
+          <p:cNvPr id="111" name="Straight Arrow Connector 110">
+            <a:extLst>
+              <a:ext uri="{FF2B5EF4-FFF2-40B4-BE49-F238E27FC236}">
+                <a16:creationId xmlns:a16="http://schemas.microsoft.com/office/drawing/2014/main" id="{8822856E-54E9-6C62-EE17-9702CBA202C2}"/>
+              </a:ext>
+            </a:extLst>
+          </p:cNvPr>
+          <p:cNvCxnSpPr>
+            <a:cxnSpLocks/>
+          </p:cNvCxnSpPr>
+          <p:nvPr/>
+        </p:nvCxnSpPr>
+        <p:spPr>
+          <a:xfrm>
+            <a:off x="8370160" y="3255247"/>
+            <a:ext cx="837222" cy="1441161"/>
+          </a:xfrm>
+          <a:prstGeom prst="straightConnector1">
+            <a:avLst/>
+          </a:prstGeom>
+          <a:ln w="12700">
+            <a:solidFill>
+              <a:schemeClr val="tx1"/>
+            </a:solidFill>
+            <a:tailEnd type="arrow"/>
+          </a:ln>
+        </p:spPr>
+        <p:style>
+          <a:lnRef idx="1">
+            <a:schemeClr val="accent1"/>
+          </a:lnRef>
+          <a:fillRef idx="0">
+            <a:schemeClr val="accent1"/>
+          </a:fillRef>
+          <a:effectRef idx="0">
+            <a:schemeClr val="accent1"/>
+          </a:effectRef>
+          <a:fontRef idx="minor">
+            <a:schemeClr val="tx1"/>
+          </a:fontRef>
+        </p:style>
+      </p:cxnSp>
+      <p:sp>
+        <p:nvSpPr>
+          <p:cNvPr id="131" name="Flowchart: Off-page Connector 130">
+            <a:extLst>
+              <a:ext uri="{FF2B5EF4-FFF2-40B4-BE49-F238E27FC236}">
+                <a16:creationId xmlns:a16="http://schemas.microsoft.com/office/drawing/2014/main" id="{8DB5FFE1-B20F-BC4A-F98A-1DB0CDA11B3B}"/>
+              </a:ext>
+            </a:extLst>
+          </p:cNvPr>
+          <p:cNvSpPr/>
+          <p:nvPr/>
+        </p:nvSpPr>
+        <p:spPr>
+          <a:xfrm rot="16200000">
+            <a:off x="2450239" y="4924344"/>
+            <a:ext cx="186884" cy="240280"/>
+          </a:xfrm>
+          <a:prstGeom prst="flowChartOffpageConnector">
+            <a:avLst/>
+          </a:prstGeom>
+          <a:solidFill>
+            <a:schemeClr val="accent6">
+              <a:lumMod val="75000"/>
+            </a:schemeClr>
+          </a:solidFill>
+        </p:spPr>
+        <p:style>
+          <a:lnRef idx="2">
+            <a:schemeClr val="accent1">
+              <a:shade val="15000"/>
+            </a:schemeClr>
+          </a:lnRef>
+          <a:fillRef idx="1">
+            <a:schemeClr val="accent1"/>
+          </a:fillRef>
+          <a:effectRef idx="0">
+            <a:schemeClr val="accent1"/>
+          </a:effectRef>
+          <a:fontRef idx="minor">
+            <a:schemeClr val="lt1"/>
+          </a:fontRef>
+        </p:style>
+        <p:txBody>
+          <a:bodyPr vert="vert" rtlCol="0" anchor="ctr"/>
+          <a:lstStyle/>
+          <a:p>
+            <a:pPr algn="ctr"/>
+            <a:r>
+              <a:rPr lang="en-US" sz="1400" b="1" dirty="0"/>
+              <a:t>8</a:t>
+            </a:r>
+          </a:p>
+        </p:txBody>
+      </p:sp>
     </p:spTree>
     <p:extLst>
       <p:ext uri="{BB962C8B-B14F-4D97-AF65-F5344CB8AC3E}">

--- a/Project and Tool Layout.pptx
+++ b/Project and Tool Layout.pptx
@@ -3340,7 +3340,7 @@
         </p:nvSpPr>
         <p:spPr>
           <a:xfrm>
-            <a:off x="2338176" y="292035"/>
+            <a:off x="2097659" y="149458"/>
             <a:ext cx="3492379" cy="1656606"/>
           </a:xfrm>
           <a:prstGeom prst="rect">
@@ -3398,7 +3398,7 @@
         </p:nvSpPr>
         <p:spPr>
           <a:xfrm>
-            <a:off x="7114811" y="1909206"/>
+            <a:off x="6874294" y="1766629"/>
             <a:ext cx="1314542" cy="1426968"/>
           </a:xfrm>
           <a:prstGeom prst="rect">
@@ -3460,7 +3460,7 @@
         </p:nvSpPr>
         <p:spPr>
           <a:xfrm>
-            <a:off x="7114811" y="691774"/>
+            <a:off x="6874294" y="549197"/>
             <a:ext cx="1314542" cy="922951"/>
           </a:xfrm>
           <a:prstGeom prst="rect">
@@ -3522,7 +3522,7 @@
         </p:nvSpPr>
         <p:spPr>
           <a:xfrm>
-            <a:off x="7174004" y="2359559"/>
+            <a:off x="6933487" y="2216982"/>
             <a:ext cx="1196156" cy="895688"/>
           </a:xfrm>
           <a:prstGeom prst="rect">
@@ -3577,7 +3577,7 @@
         </p:nvSpPr>
         <p:spPr>
           <a:xfrm>
-            <a:off x="722032" y="327047"/>
+            <a:off x="481515" y="184470"/>
             <a:ext cx="1177564" cy="660952"/>
           </a:xfrm>
           <a:prstGeom prst="cloudCallout">
@@ -3634,7 +3634,7 @@
         </p:nvSpPr>
         <p:spPr>
           <a:xfrm>
-            <a:off x="750160" y="1475054"/>
+            <a:off x="509643" y="1332477"/>
             <a:ext cx="1121308" cy="1361588"/>
           </a:xfrm>
           <a:prstGeom prst="rect">
@@ -3709,7 +3709,7 @@
         </p:nvSpPr>
         <p:spPr>
           <a:xfrm>
-            <a:off x="750160" y="3070560"/>
+            <a:off x="509643" y="2927983"/>
             <a:ext cx="1121308" cy="548974"/>
           </a:xfrm>
           <a:prstGeom prst="rect">
@@ -3771,7 +3771,7 @@
         </p:nvCxnSpPr>
         <p:spPr>
           <a:xfrm>
-            <a:off x="1310814" y="2836642"/>
+            <a:off x="1070297" y="2694065"/>
             <a:ext cx="0" cy="233918"/>
           </a:xfrm>
           <a:prstGeom prst="straightConnector1">
@@ -3813,7 +3813,7 @@
         </p:nvSpPr>
         <p:spPr>
           <a:xfrm>
-            <a:off x="750160" y="3808253"/>
+            <a:off x="509643" y="3665676"/>
             <a:ext cx="1121308" cy="957830"/>
           </a:xfrm>
           <a:prstGeom prst="rect">
@@ -3891,7 +3891,7 @@
         </p:nvCxnSpPr>
         <p:spPr>
           <a:xfrm>
-            <a:off x="1310814" y="3619534"/>
+            <a:off x="1070297" y="3476957"/>
             <a:ext cx="0" cy="188719"/>
           </a:xfrm>
           <a:prstGeom prst="straightConnector1">
@@ -3933,7 +3933,7 @@
         </p:nvSpPr>
         <p:spPr>
           <a:xfrm>
-            <a:off x="776856" y="1495077"/>
+            <a:off x="536339" y="1352500"/>
             <a:ext cx="393791" cy="106792"/>
           </a:xfrm>
           <a:prstGeom prst="rect">
@@ -3986,7 +3986,7 @@
         </p:nvSpPr>
         <p:spPr>
           <a:xfrm>
-            <a:off x="2726187" y="525195"/>
+            <a:off x="2485670" y="382618"/>
             <a:ext cx="1256228" cy="1301519"/>
           </a:xfrm>
           <a:prstGeom prst="rect">
@@ -4072,7 +4072,7 @@
         </p:nvSpPr>
         <p:spPr>
           <a:xfrm>
-            <a:off x="2752883" y="545219"/>
+            <a:off x="2512366" y="402642"/>
             <a:ext cx="468643" cy="106792"/>
           </a:xfrm>
           <a:prstGeom prst="rect">
@@ -4125,7 +4125,7 @@
         </p:nvSpPr>
         <p:spPr>
           <a:xfrm>
-            <a:off x="4355862" y="525194"/>
+            <a:off x="4115345" y="382617"/>
             <a:ext cx="1256225" cy="1301519"/>
           </a:xfrm>
           <a:prstGeom prst="rect">
@@ -4228,7 +4228,7 @@
         </p:nvSpPr>
         <p:spPr>
           <a:xfrm>
-            <a:off x="4382559" y="554046"/>
+            <a:off x="4142042" y="411469"/>
             <a:ext cx="468643" cy="106884"/>
           </a:xfrm>
           <a:prstGeom prst="rect">
@@ -4285,7 +4285,7 @@
         </p:nvCxnSpPr>
         <p:spPr>
           <a:xfrm flipV="1">
-            <a:off x="3982415" y="1175954"/>
+            <a:off x="3741898" y="1033377"/>
             <a:ext cx="373447" cy="1"/>
           </a:xfrm>
           <a:prstGeom prst="line">
@@ -4327,7 +4327,7 @@
         </p:nvSpPr>
         <p:spPr>
           <a:xfrm>
-            <a:off x="2708399" y="2109901"/>
+            <a:off x="2467882" y="1967324"/>
             <a:ext cx="1256227" cy="862212"/>
           </a:xfrm>
           <a:prstGeom prst="rect">
@@ -4408,7 +4408,7 @@
         </p:nvSpPr>
         <p:spPr>
           <a:xfrm>
-            <a:off x="2735095" y="2129925"/>
+            <a:off x="2494578" y="1987348"/>
             <a:ext cx="548737" cy="106790"/>
           </a:xfrm>
           <a:prstGeom prst="rect">
@@ -4461,7 +4461,7 @@
         </p:nvSpPr>
         <p:spPr>
           <a:xfrm>
-            <a:off x="4337114" y="2109901"/>
+            <a:off x="4096597" y="1967324"/>
             <a:ext cx="1257184" cy="862209"/>
           </a:xfrm>
           <a:prstGeom prst="rect">
@@ -4570,7 +4570,7 @@
         </p:nvCxnSpPr>
         <p:spPr>
           <a:xfrm flipV="1">
-            <a:off x="3964626" y="2541006"/>
+            <a:off x="3724109" y="2398429"/>
             <a:ext cx="372488" cy="1"/>
           </a:xfrm>
           <a:prstGeom prst="straightConnector1">
@@ -4614,7 +4614,7 @@
         </p:nvCxnSpPr>
         <p:spPr>
           <a:xfrm>
-            <a:off x="1871468" y="4033993"/>
+            <a:off x="1630951" y="3891416"/>
             <a:ext cx="836929" cy="0"/>
           </a:xfrm>
           <a:prstGeom prst="straightConnector1">
@@ -4656,7 +4656,7 @@
         </p:nvSpPr>
         <p:spPr>
           <a:xfrm>
-            <a:off x="2708397" y="3423732"/>
+            <a:off x="2467880" y="3281155"/>
             <a:ext cx="1483159" cy="1397845"/>
           </a:xfrm>
           <a:prstGeom prst="rect">
@@ -4749,7 +4749,7 @@
         </p:nvSpPr>
         <p:spPr>
           <a:xfrm>
-            <a:off x="2735094" y="3443755"/>
+            <a:off x="2494577" y="3301178"/>
             <a:ext cx="393791" cy="105966"/>
           </a:xfrm>
           <a:prstGeom prst="rect">
@@ -4802,7 +4802,7 @@
         </p:nvSpPr>
         <p:spPr>
           <a:xfrm>
-            <a:off x="4191556" y="3423732"/>
+            <a:off x="3951039" y="3281155"/>
             <a:ext cx="1454713" cy="1397845"/>
           </a:xfrm>
           <a:prstGeom prst="rect">
@@ -4898,7 +4898,7 @@
         </p:nvCxnSpPr>
         <p:spPr>
           <a:xfrm>
-            <a:off x="5594298" y="2541006"/>
+            <a:off x="5353781" y="2398429"/>
             <a:ext cx="1370627" cy="0"/>
           </a:xfrm>
           <a:prstGeom prst="straightConnector1">
@@ -4940,7 +4940,7 @@
         </p:nvSpPr>
         <p:spPr>
           <a:xfrm rot="16200000">
-            <a:off x="4099174" y="431165"/>
+            <a:off x="3858657" y="288588"/>
             <a:ext cx="186884" cy="240280"/>
           </a:xfrm>
           <a:prstGeom prst="flowChartOffpageConnector">
@@ -4994,7 +4994,7 @@
         </p:nvSpPr>
         <p:spPr>
           <a:xfrm rot="16200000">
-            <a:off x="2469498" y="411603"/>
+            <a:off x="2228981" y="269026"/>
             <a:ext cx="186884" cy="240280"/>
           </a:xfrm>
           <a:prstGeom prst="flowChartOffpageConnector">
@@ -5048,7 +5048,7 @@
         </p:nvSpPr>
         <p:spPr>
           <a:xfrm rot="16200000">
-            <a:off x="2474911" y="1996310"/>
+            <a:off x="2234394" y="1853733"/>
             <a:ext cx="186884" cy="240280"/>
           </a:xfrm>
           <a:prstGeom prst="flowChartOffpageConnector">
@@ -5102,7 +5102,7 @@
         </p:nvSpPr>
         <p:spPr>
           <a:xfrm>
-            <a:off x="6031126" y="2093476"/>
+            <a:off x="5790609" y="1950899"/>
             <a:ext cx="186884" cy="240280"/>
           </a:xfrm>
           <a:prstGeom prst="flowChartOffpageConnector">
@@ -5156,7 +5156,7 @@
         </p:nvSpPr>
         <p:spPr>
           <a:xfrm rot="16200000">
-            <a:off x="2450239" y="3309477"/>
+            <a:off x="2209722" y="3166900"/>
             <a:ext cx="186884" cy="240280"/>
           </a:xfrm>
           <a:prstGeom prst="flowChartOffpageConnector">
@@ -5210,7 +5210,7 @@
         </p:nvSpPr>
         <p:spPr>
           <a:xfrm rot="16200000">
-            <a:off x="508450" y="1361461"/>
+            <a:off x="267933" y="1218884"/>
             <a:ext cx="186884" cy="240280"/>
           </a:xfrm>
           <a:prstGeom prst="flowChartOffpageConnector">
@@ -5264,7 +5264,7 @@
         </p:nvSpPr>
         <p:spPr>
           <a:xfrm>
-            <a:off x="5884129" y="2350373"/>
+            <a:off x="5643612" y="2207796"/>
             <a:ext cx="452047" cy="169277"/>
           </a:xfrm>
           <a:prstGeom prst="rect">
@@ -5299,7 +5299,7 @@
         </p:nvSpPr>
         <p:spPr>
           <a:xfrm>
-            <a:off x="7174004" y="285725"/>
+            <a:off x="6933487" y="143148"/>
             <a:ext cx="1196156" cy="321580"/>
           </a:xfrm>
           <a:prstGeom prst="rect">
@@ -5368,7 +5368,7 @@
         </p:nvSpPr>
         <p:spPr>
           <a:xfrm>
-            <a:off x="4337114" y="2972111"/>
+            <a:off x="4096597" y="2829534"/>
             <a:ext cx="1249962" cy="118721"/>
           </a:xfrm>
           <a:prstGeom prst="rect">
@@ -5421,7 +5421,7 @@
         </p:nvSpPr>
         <p:spPr>
           <a:xfrm>
-            <a:off x="4191556" y="4821577"/>
+            <a:off x="3951039" y="4679000"/>
             <a:ext cx="1454713" cy="135515"/>
           </a:xfrm>
           <a:prstGeom prst="rect">
@@ -5474,7 +5474,7 @@
         </p:nvSpPr>
         <p:spPr>
           <a:xfrm>
-            <a:off x="750159" y="6406284"/>
+            <a:off x="241235" y="6465515"/>
             <a:ext cx="5345841" cy="249337"/>
           </a:xfrm>
           <a:prstGeom prst="rect">
@@ -5511,7 +5511,7 @@
                   <a:schemeClr val="tx1"/>
                 </a:solidFill>
               </a:rPr>
-              <a:t>* Schemas in common parlance refers actually to the DB Models created for SQLAlchemy , but Pydantic uses it to refer to these Data Transfer Objects which define the interface boundary for the underlying DB Models</a:t>
+              <a:t>* Schemas in common parlance refers actually to the DB Models created for SQLAlchemy, but Pydantic uses it to refer to these Data Transfer Objects which define the interface boundary for the underlying DB Models</a:t>
             </a:r>
           </a:p>
         </p:txBody>
@@ -5530,7 +5530,7 @@
         </p:nvSpPr>
         <p:spPr>
           <a:xfrm>
-            <a:off x="7174882" y="1072218"/>
+            <a:off x="6934365" y="929641"/>
             <a:ext cx="1196156" cy="500584"/>
           </a:xfrm>
           <a:prstGeom prst="rect">
@@ -5605,7 +5605,7 @@
         </p:nvCxnSpPr>
         <p:spPr>
           <a:xfrm>
-            <a:off x="7772082" y="1614725"/>
+            <a:off x="7531565" y="1472148"/>
             <a:ext cx="0" cy="294481"/>
           </a:xfrm>
           <a:prstGeom prst="straightConnector1">
@@ -5648,7 +5648,7 @@
         </p:nvSpPr>
         <p:spPr>
           <a:xfrm>
-            <a:off x="7306388" y="2919114"/>
+            <a:off x="7065871" y="2776537"/>
             <a:ext cx="931388" cy="206948"/>
           </a:xfrm>
           <a:prstGeom prst="rect">
@@ -5707,7 +5707,7 @@
         </p:nvSpPr>
         <p:spPr>
           <a:xfrm rot="16200000">
-            <a:off x="6873161" y="571634"/>
+            <a:off x="6632644" y="429057"/>
             <a:ext cx="186884" cy="240280"/>
           </a:xfrm>
           <a:prstGeom prst="flowChartOffpageConnector">
@@ -5761,7 +5761,7 @@
         </p:nvSpPr>
         <p:spPr>
           <a:xfrm rot="16200000">
-            <a:off x="6873161" y="2118787"/>
+            <a:off x="6632644" y="1976210"/>
             <a:ext cx="186884" cy="240280"/>
           </a:xfrm>
           <a:prstGeom prst="flowChartOffpageConnector">
@@ -5815,7 +5815,7 @@
         </p:nvSpPr>
         <p:spPr>
           <a:xfrm>
-            <a:off x="7114811" y="3384564"/>
+            <a:off x="6874294" y="3241987"/>
             <a:ext cx="1314542" cy="740680"/>
           </a:xfrm>
           <a:prstGeom prst="rect">
@@ -5877,7 +5877,7 @@
         </p:nvSpPr>
         <p:spPr>
           <a:xfrm>
-            <a:off x="7174004" y="3720967"/>
+            <a:off x="6933487" y="3578390"/>
             <a:ext cx="1196156" cy="356069"/>
           </a:xfrm>
           <a:prstGeom prst="rect">
@@ -5936,7 +5936,7 @@
         </p:nvSpPr>
         <p:spPr>
           <a:xfrm>
-            <a:off x="7381698" y="3903500"/>
+            <a:off x="7141181" y="3760923"/>
             <a:ext cx="780768" cy="149563"/>
           </a:xfrm>
           <a:prstGeom prst="rect">
@@ -5995,7 +5995,7 @@
         </p:nvSpPr>
         <p:spPr>
           <a:xfrm>
-            <a:off x="8834889" y="2514567"/>
+            <a:off x="8594372" y="2371990"/>
             <a:ext cx="993676" cy="740680"/>
           </a:xfrm>
           <a:prstGeom prst="rect">
@@ -6056,7 +6056,7 @@
         </p:nvGrpSpPr>
         <p:grpSpPr>
           <a:xfrm>
-            <a:off x="8997884" y="2766987"/>
+            <a:off x="8757367" y="2624410"/>
             <a:ext cx="680794" cy="433282"/>
             <a:chOff x="8227377" y="3019807"/>
             <a:chExt cx="680794" cy="785917"/>
@@ -6232,7 +6232,7 @@
         </p:nvCxnSpPr>
         <p:spPr>
           <a:xfrm>
-            <a:off x="8370160" y="3006720"/>
+            <a:off x="8129643" y="2864143"/>
             <a:ext cx="627724" cy="0"/>
           </a:xfrm>
           <a:prstGeom prst="straightConnector1">
@@ -6275,7 +6275,7 @@
         </p:nvSpPr>
         <p:spPr>
           <a:xfrm>
-            <a:off x="7114811" y="4296797"/>
+            <a:off x="6874294" y="4154220"/>
             <a:ext cx="1314542" cy="1755660"/>
           </a:xfrm>
           <a:prstGeom prst="rect">
@@ -6337,7 +6337,7 @@
         </p:nvSpPr>
         <p:spPr>
           <a:xfrm>
-            <a:off x="7174004" y="4747150"/>
+            <a:off x="6933487" y="4604573"/>
             <a:ext cx="1196156" cy="1112474"/>
           </a:xfrm>
           <a:prstGeom prst="rect">
@@ -6392,7 +6392,7 @@
         </p:nvSpPr>
         <p:spPr>
           <a:xfrm>
-            <a:off x="7246776" y="5075208"/>
+            <a:off x="7006259" y="4932631"/>
             <a:ext cx="1050612" cy="336133"/>
           </a:xfrm>
           <a:prstGeom prst="rect">
@@ -6451,7 +6451,7 @@
         </p:nvSpPr>
         <p:spPr>
           <a:xfrm>
-            <a:off x="2708397" y="5053784"/>
+            <a:off x="2467880" y="4911207"/>
             <a:ext cx="2937872" cy="728112"/>
           </a:xfrm>
           <a:prstGeom prst="rect">
@@ -6545,7 +6545,7 @@
         </p:nvSpPr>
         <p:spPr>
           <a:xfrm>
-            <a:off x="2735093" y="5073807"/>
+            <a:off x="2494576" y="4931230"/>
             <a:ext cx="393792" cy="101326"/>
           </a:xfrm>
           <a:prstGeom prst="rect">
@@ -6598,7 +6598,7 @@
         </p:nvSpPr>
         <p:spPr>
           <a:xfrm>
-            <a:off x="6964925" y="2359561"/>
+            <a:off x="6724408" y="2216984"/>
             <a:ext cx="202062" cy="895686"/>
           </a:xfrm>
           <a:prstGeom prst="rect">
@@ -6652,7 +6652,7 @@
         </p:nvCxnSpPr>
         <p:spPr>
           <a:xfrm flipV="1">
-            <a:off x="5646269" y="2673111"/>
+            <a:off x="5405752" y="2530534"/>
             <a:ext cx="1318656" cy="1318793"/>
           </a:xfrm>
           <a:prstGeom prst="bentConnector3">
@@ -6696,7 +6696,7 @@
         </p:nvCxnSpPr>
         <p:spPr>
           <a:xfrm flipV="1">
-            <a:off x="5646269" y="2825321"/>
+            <a:off x="5405752" y="2682744"/>
             <a:ext cx="1318656" cy="2312605"/>
           </a:xfrm>
           <a:prstGeom prst="bentConnector3">
@@ -6743,7 +6743,7 @@
         </p:nvCxnSpPr>
         <p:spPr>
           <a:xfrm flipH="1">
-            <a:off x="5646269" y="5243275"/>
+            <a:off x="5405752" y="5100698"/>
             <a:ext cx="1600507" cy="0"/>
           </a:xfrm>
           <a:prstGeom prst="line">
@@ -6786,7 +6786,7 @@
         </p:nvSpPr>
         <p:spPr>
           <a:xfrm>
-            <a:off x="7246776" y="5477006"/>
+            <a:off x="7006259" y="5334429"/>
             <a:ext cx="1050612" cy="304890"/>
           </a:xfrm>
           <a:prstGeom prst="rect">
@@ -6852,7 +6852,7 @@
         </p:nvSpPr>
         <p:spPr>
           <a:xfrm>
-            <a:off x="9207382" y="3662607"/>
+            <a:off x="8966865" y="3520030"/>
             <a:ext cx="1947624" cy="509053"/>
           </a:xfrm>
           <a:prstGeom prst="rect">
@@ -6917,7 +6917,7 @@
         </p:nvSpPr>
         <p:spPr>
           <a:xfrm>
-            <a:off x="9207382" y="4689999"/>
+            <a:off x="8966865" y="4547422"/>
             <a:ext cx="1947624" cy="1106552"/>
           </a:xfrm>
           <a:prstGeom prst="rect">
@@ -6961,9 +6961,12 @@
             </a:r>
             <a:r>
               <a:rPr lang="en-US" sz="1100" b="1" u="sng" dirty="0"/>
-              <a:t>???</a:t>
-            </a:r>
-            <a:endParaRPr lang="en-US" u="sng" dirty="0"/>
+              <a:t>Ollama</a:t>
+            </a:r>
+            <a:r>
+              <a:rPr lang="en-US" sz="1100" dirty="0"/>
+              <a:t>  📚 ???</a:t>
+            </a:r>
           </a:p>
           <a:p>
             <a:pPr algn="ctr"/>
@@ -6992,7 +6995,7 @@
         </p:nvSpPr>
         <p:spPr>
           <a:xfrm>
-            <a:off x="9238734" y="4788008"/>
+            <a:off x="8998217" y="4599603"/>
             <a:ext cx="393792" cy="101326"/>
           </a:xfrm>
           <a:prstGeom prst="rect">
@@ -7049,7 +7052,7 @@
         </p:nvCxnSpPr>
         <p:spPr>
           <a:xfrm>
-            <a:off x="10181194" y="4171660"/>
+            <a:off x="9940677" y="4029083"/>
             <a:ext cx="0" cy="518339"/>
           </a:xfrm>
           <a:prstGeom prst="straightConnector1">
@@ -7095,7 +7098,7 @@
         </p:nvCxnSpPr>
         <p:spPr>
           <a:xfrm flipH="1">
-            <a:off x="8297388" y="5243275"/>
+            <a:off x="8056871" y="5100698"/>
             <a:ext cx="909994" cy="0"/>
           </a:xfrm>
           <a:prstGeom prst="straightConnector1">
@@ -7140,7 +7143,7 @@
         </p:nvCxnSpPr>
         <p:spPr>
           <a:xfrm>
-            <a:off x="8370160" y="3255247"/>
+            <a:off x="8129643" y="3112670"/>
             <a:ext cx="837222" cy="1441161"/>
           </a:xfrm>
           <a:prstGeom prst="straightConnector1">
@@ -7182,7 +7185,7 @@
         </p:nvSpPr>
         <p:spPr>
           <a:xfrm rot="16200000">
-            <a:off x="2450239" y="4924344"/>
+            <a:off x="2209722" y="4781767"/>
             <a:ext cx="186884" cy="240280"/>
           </a:xfrm>
           <a:prstGeom prst="flowChartOffpageConnector">
@@ -7222,6 +7225,118 @@
           </a:p>
         </p:txBody>
       </p:sp>
+      <p:sp>
+        <p:nvSpPr>
+          <p:cNvPr id="137" name="Rectangle 136">
+            <a:extLst>
+              <a:ext uri="{FF2B5EF4-FFF2-40B4-BE49-F238E27FC236}">
+                <a16:creationId xmlns:a16="http://schemas.microsoft.com/office/drawing/2014/main" id="{C12A4E2B-6096-150E-DA86-68333E328721}"/>
+              </a:ext>
+            </a:extLst>
+          </p:cNvPr>
+          <p:cNvSpPr/>
+          <p:nvPr/>
+        </p:nvSpPr>
+        <p:spPr>
+          <a:xfrm>
+            <a:off x="8966865" y="5751982"/>
+            <a:ext cx="1947624" cy="829702"/>
+          </a:xfrm>
+          <a:prstGeom prst="rect">
+            <a:avLst/>
+          </a:prstGeom>
+          <a:solidFill>
+            <a:srgbClr val="7030A0"/>
+          </a:solidFill>
+        </p:spPr>
+        <p:style>
+          <a:lnRef idx="2">
+            <a:schemeClr val="accent1">
+              <a:shade val="15000"/>
+            </a:schemeClr>
+          </a:lnRef>
+          <a:fillRef idx="1">
+            <a:schemeClr val="accent1"/>
+          </a:fillRef>
+          <a:effectRef idx="0">
+            <a:schemeClr val="accent1"/>
+          </a:effectRef>
+          <a:fontRef idx="minor">
+            <a:schemeClr val="lt1"/>
+          </a:fontRef>
+        </p:style>
+        <p:txBody>
+          <a:bodyPr lIns="0" tIns="0" rIns="0" bIns="0" rtlCol="0" anchor="ctr"/>
+          <a:lstStyle/>
+          <a:p>
+            <a:pPr algn="ctr"/>
+            <a:r>
+              <a:rPr lang="en-US" sz="1050" b="1" dirty="0"/>
+              <a:t>Concept Mapper</a:t>
+            </a:r>
+          </a:p>
+          <a:p>
+            <a:pPr algn="ctr"/>
+            <a:endParaRPr lang="en-US" sz="300" dirty="0"/>
+          </a:p>
+          <a:p>
+            <a:pPr algn="ctr"/>
+            <a:r>
+              <a:rPr lang="en-US" sz="900" dirty="0"/>
+              <a:t>Uses arcane SEC-specific knowledge of Concept usage to determine Concepts when the traditional match will be incorrect</a:t>
+            </a:r>
+          </a:p>
+          <a:p>
+            <a:pPr algn="ctr"/>
+            <a:endParaRPr lang="en-US" sz="500" dirty="0"/>
+          </a:p>
+        </p:txBody>
+      </p:sp>
+      <p:cxnSp>
+        <p:nvCxnSpPr>
+          <p:cNvPr id="138" name="Straight Arrow Connector 137">
+            <a:extLst>
+              <a:ext uri="{FF2B5EF4-FFF2-40B4-BE49-F238E27FC236}">
+                <a16:creationId xmlns:a16="http://schemas.microsoft.com/office/drawing/2014/main" id="{218F14AF-9931-3060-84FB-55E3AD301B67}"/>
+              </a:ext>
+            </a:extLst>
+          </p:cNvPr>
+          <p:cNvCxnSpPr>
+            <a:cxnSpLocks/>
+          </p:cNvCxnSpPr>
+          <p:nvPr/>
+        </p:nvCxnSpPr>
+        <p:spPr>
+          <a:xfrm flipH="1">
+            <a:off x="8056871" y="5492584"/>
+            <a:ext cx="909994" cy="0"/>
+          </a:xfrm>
+          <a:prstGeom prst="straightConnector1">
+            <a:avLst/>
+          </a:prstGeom>
+          <a:ln w="12700">
+            <a:solidFill>
+              <a:schemeClr val="tx1"/>
+            </a:solidFill>
+            <a:headEnd type="arrow"/>
+            <a:tailEnd type="arrow"/>
+          </a:ln>
+        </p:spPr>
+        <p:style>
+          <a:lnRef idx="1">
+            <a:schemeClr val="accent1"/>
+          </a:lnRef>
+          <a:fillRef idx="0">
+            <a:schemeClr val="accent1"/>
+          </a:fillRef>
+          <a:effectRef idx="0">
+            <a:schemeClr val="accent1"/>
+          </a:effectRef>
+          <a:fontRef idx="minor">
+            <a:schemeClr val="tx1"/>
+          </a:fontRef>
+        </p:style>
+      </p:cxnSp>
     </p:spTree>
     <p:extLst>
       <p:ext uri="{BB962C8B-B14F-4D97-AF65-F5344CB8AC3E}">

--- a/Project and Tool Layout.pptx
+++ b/Project and Tool Layout.pptx
@@ -4164,11 +4164,6 @@
               <a:rPr lang="en-US" dirty="0"/>
               <a:t>DB Schemas</a:t>
             </a:r>
-            <a:r>
-              <a:rPr lang="en-US" sz="1100" dirty="0"/>
-              <a:t>*</a:t>
-            </a:r>
-            <a:endParaRPr lang="en-US" dirty="0"/>
           </a:p>
           <a:p>
             <a:pPr algn="ctr"/>
@@ -5456,62 +5451,6 @@
             <a:r>
               <a:rPr lang="en-US" sz="700" dirty="0"/>
               <a:t>DML = data manip. language</a:t>
-            </a:r>
-          </a:p>
-        </p:txBody>
-      </p:sp>
-      <p:sp>
-        <p:nvSpPr>
-          <p:cNvPr id="154" name="Rectangle 153">
-            <a:extLst>
-              <a:ext uri="{FF2B5EF4-FFF2-40B4-BE49-F238E27FC236}">
-                <a16:creationId xmlns:a16="http://schemas.microsoft.com/office/drawing/2014/main" id="{476FAA6E-532E-811B-061E-21BC7C89326A}"/>
-              </a:ext>
-            </a:extLst>
-          </p:cNvPr>
-          <p:cNvSpPr/>
-          <p:nvPr/>
-        </p:nvSpPr>
-        <p:spPr>
-          <a:xfrm>
-            <a:off x="241235" y="6465515"/>
-            <a:ext cx="5345841" cy="249337"/>
-          </a:xfrm>
-          <a:prstGeom prst="rect">
-            <a:avLst/>
-          </a:prstGeom>
-          <a:solidFill>
-            <a:schemeClr val="bg1"/>
-          </a:solidFill>
-          <a:ln w="6350" cap="rnd"/>
-        </p:spPr>
-        <p:style>
-          <a:lnRef idx="2">
-            <a:schemeClr val="accent1">
-              <a:shade val="15000"/>
-            </a:schemeClr>
-          </a:lnRef>
-          <a:fillRef idx="1">
-            <a:schemeClr val="accent1"/>
-          </a:fillRef>
-          <a:effectRef idx="0">
-            <a:schemeClr val="accent1"/>
-          </a:effectRef>
-          <a:fontRef idx="minor">
-            <a:schemeClr val="lt1"/>
-          </a:fontRef>
-        </p:style>
-        <p:txBody>
-          <a:bodyPr lIns="91440" tIns="0" rIns="0" bIns="0" rtlCol="0" anchor="ctr"/>
-          <a:lstStyle/>
-          <a:p>
-            <a:r>
-              <a:rPr lang="en-US" sz="800" dirty="0">
-                <a:solidFill>
-                  <a:schemeClr val="tx1"/>
-                </a:solidFill>
-              </a:rPr>
-              <a:t>* Schemas in common parlance refers actually to the DB Models created for SQLAlchemy, but Pydantic uses it to refer to these Data Transfer Objects which define the interface boundary for the underlying DB Models</a:t>
             </a:r>
           </a:p>
         </p:txBody>
@@ -5995,7 +5934,7 @@
         </p:nvSpPr>
         <p:spPr>
           <a:xfrm>
-            <a:off x="8594372" y="2371990"/>
+            <a:off x="8594372" y="1985364"/>
             <a:ext cx="993676" cy="740680"/>
           </a:xfrm>
           <a:prstGeom prst="rect">
@@ -6056,7 +5995,7 @@
         </p:nvGrpSpPr>
         <p:grpSpPr>
           <a:xfrm>
-            <a:off x="8757367" y="2624410"/>
+            <a:off x="8757367" y="2237784"/>
             <a:ext cx="680794" cy="433282"/>
             <a:chOff x="8227377" y="3019807"/>
             <a:chExt cx="680794" cy="785917"/>
@@ -6232,7 +6171,7 @@
         </p:nvCxnSpPr>
         <p:spPr>
           <a:xfrm>
-            <a:off x="8129643" y="2864143"/>
+            <a:off x="8129643" y="2477517"/>
             <a:ext cx="627724" cy="0"/>
           </a:xfrm>
           <a:prstGeom prst="straightConnector1">
@@ -6275,8 +6214,8 @@
         </p:nvSpPr>
         <p:spPr>
           <a:xfrm>
-            <a:off x="6874294" y="4154220"/>
-            <a:ext cx="1314542" cy="1755660"/>
+            <a:off x="6874294" y="4154219"/>
+            <a:ext cx="1314542" cy="1904457"/>
           </a:xfrm>
           <a:prstGeom prst="rect">
             <a:avLst/>
@@ -6338,7 +6277,7 @@
         <p:spPr>
           <a:xfrm>
             <a:off x="6933487" y="4604573"/>
-            <a:ext cx="1196156" cy="1112474"/>
+            <a:ext cx="1196156" cy="1391900"/>
           </a:xfrm>
           <a:prstGeom prst="rect">
             <a:avLst/>
@@ -6787,7 +6726,7 @@
         <p:spPr>
           <a:xfrm>
             <a:off x="7006259" y="5334429"/>
-            <a:ext cx="1050612" cy="304890"/>
+            <a:ext cx="1050612" cy="611196"/>
           </a:xfrm>
           <a:prstGeom prst="rect">
             <a:avLst/>
@@ -6821,8 +6760,15 @@
           <a:p>
             <a:pPr algn="ctr"/>
             <a:r>
-              <a:rPr lang="en-US" sz="900" b="1" i="1" dirty="0"/>
-              <a:t>Local LLM</a:t>
+              <a:rPr lang="en-US" sz="1200" b="1" i="1" dirty="0"/>
+              <a:t>SQL Emitter</a:t>
+            </a:r>
+          </a:p>
+          <a:p>
+            <a:pPr algn="ctr"/>
+            <a:r>
+              <a:rPr lang="en-US" sz="800" b="1" i="1" dirty="0"/>
+              <a:t>(Local LLM)</a:t>
             </a:r>
           </a:p>
           <a:p>
@@ -6852,8 +6798,8 @@
         </p:nvSpPr>
         <p:spPr>
           <a:xfrm>
-            <a:off x="8966865" y="3520030"/>
-            <a:ext cx="1947624" cy="509053"/>
+            <a:off x="9311341" y="3827859"/>
+            <a:ext cx="2215437" cy="509053"/>
           </a:xfrm>
           <a:prstGeom prst="rect">
             <a:avLst/>
@@ -6917,8 +6863,8 @@
         </p:nvSpPr>
         <p:spPr>
           <a:xfrm>
-            <a:off x="8966865" y="4547422"/>
-            <a:ext cx="1947624" cy="1106552"/>
+            <a:off x="9706330" y="573017"/>
+            <a:ext cx="1947624" cy="779483"/>
           </a:xfrm>
           <a:prstGeom prst="rect">
             <a:avLst/>
@@ -6955,21 +6901,6 @@
           </a:p>
           <a:p>
             <a:pPr algn="ctr"/>
-            <a:r>
-              <a:rPr lang="en-US" sz="1100" dirty="0"/>
-              <a:t>📚 </a:t>
-            </a:r>
-            <a:r>
-              <a:rPr lang="en-US" sz="1100" b="1" u="sng" dirty="0"/>
-              <a:t>Ollama</a:t>
-            </a:r>
-            <a:r>
-              <a:rPr lang="en-US" sz="1100" dirty="0"/>
-              <a:t>  📚 ???</a:t>
-            </a:r>
-          </a:p>
-          <a:p>
-            <a:pPr algn="ctr"/>
             <a:endParaRPr lang="en-US" sz="100" dirty="0"/>
           </a:p>
           <a:p>
@@ -6977,59 +6908,6 @@
             <a:r>
               <a:rPr lang="en-US" sz="800" dirty="0"/>
               <a:t>= Receives queries from user, determines relevant Concepts, then uses Local LLM to get the data from PostgreSQL (read-only guard)</a:t>
-            </a:r>
-          </a:p>
-        </p:txBody>
-      </p:sp>
-      <p:sp>
-        <p:nvSpPr>
-          <p:cNvPr id="93" name="Rectangle 92">
-            <a:extLst>
-              <a:ext uri="{FF2B5EF4-FFF2-40B4-BE49-F238E27FC236}">
-                <a16:creationId xmlns:a16="http://schemas.microsoft.com/office/drawing/2014/main" id="{C470D739-A7E4-B20F-87C7-38FAB125269A}"/>
-              </a:ext>
-            </a:extLst>
-          </p:cNvPr>
-          <p:cNvSpPr/>
-          <p:nvPr/>
-        </p:nvSpPr>
-        <p:spPr>
-          <a:xfrm>
-            <a:off x="8998217" y="4599603"/>
-            <a:ext cx="393792" cy="101326"/>
-          </a:xfrm>
-          <a:prstGeom prst="rect">
-            <a:avLst/>
-          </a:prstGeom>
-          <a:solidFill>
-            <a:srgbClr val="7030A0"/>
-          </a:solidFill>
-          <a:ln w="6350" cap="rnd"/>
-        </p:spPr>
-        <p:style>
-          <a:lnRef idx="2">
-            <a:schemeClr val="accent1">
-              <a:shade val="15000"/>
-            </a:schemeClr>
-          </a:lnRef>
-          <a:fillRef idx="1">
-            <a:schemeClr val="accent1"/>
-          </a:fillRef>
-          <a:effectRef idx="0">
-            <a:schemeClr val="accent1"/>
-          </a:effectRef>
-          <a:fontRef idx="minor">
-            <a:schemeClr val="lt1"/>
-          </a:fontRef>
-        </p:style>
-        <p:txBody>
-          <a:bodyPr lIns="0" tIns="0" rIns="0" bIns="0" rtlCol="0" anchor="ctr"/>
-          <a:lstStyle/>
-          <a:p>
-            <a:pPr algn="ctr"/>
-            <a:r>
-              <a:rPr lang="en-US" sz="700" dirty="0"/>
-              <a:t>.py script</a:t>
             </a:r>
           </a:p>
         </p:txBody>
@@ -7045,15 +6923,13 @@
           </p:cNvPr>
           <p:cNvCxnSpPr>
             <a:cxnSpLocks/>
-            <a:stCxn id="90" idx="2"/>
-            <a:endCxn id="92" idx="0"/>
           </p:cNvCxnSpPr>
           <p:nvPr/>
         </p:nvCxnSpPr>
         <p:spPr>
           <a:xfrm>
-            <a:off x="9940677" y="4029083"/>
-            <a:ext cx="0" cy="518339"/>
+            <a:off x="9756433" y="4336912"/>
+            <a:ext cx="0" cy="547973"/>
           </a:xfrm>
           <a:prstGeom prst="straightConnector1">
             <a:avLst/>
@@ -7091,7 +6967,6 @@
           </p:cNvPr>
           <p:cNvCxnSpPr>
             <a:cxnSpLocks/>
-            <a:stCxn id="92" idx="1"/>
             <a:endCxn id="52" idx="3"/>
           </p:cNvCxnSpPr>
           <p:nvPr/>
@@ -7099,7 +6974,7 @@
         <p:spPr>
           <a:xfrm flipH="1">
             <a:off x="8056871" y="5100698"/>
-            <a:ext cx="909994" cy="0"/>
+            <a:ext cx="1254471" cy="0"/>
           </a:xfrm>
           <a:prstGeom prst="straightConnector1">
             <a:avLst/>
@@ -7127,12 +7002,151 @@
           </a:fontRef>
         </p:style>
       </p:cxnSp>
+      <p:sp>
+        <p:nvSpPr>
+          <p:cNvPr id="131" name="Flowchart: Off-page Connector 130">
+            <a:extLst>
+              <a:ext uri="{FF2B5EF4-FFF2-40B4-BE49-F238E27FC236}">
+                <a16:creationId xmlns:a16="http://schemas.microsoft.com/office/drawing/2014/main" id="{8DB5FFE1-B20F-BC4A-F98A-1DB0CDA11B3B}"/>
+              </a:ext>
+            </a:extLst>
+          </p:cNvPr>
+          <p:cNvSpPr/>
+          <p:nvPr/>
+        </p:nvSpPr>
+        <p:spPr>
+          <a:xfrm rot="16200000">
+            <a:off x="2209722" y="4781767"/>
+            <a:ext cx="186884" cy="240280"/>
+          </a:xfrm>
+          <a:prstGeom prst="flowChartOffpageConnector">
+            <a:avLst/>
+          </a:prstGeom>
+          <a:solidFill>
+            <a:schemeClr val="accent6">
+              <a:lumMod val="75000"/>
+            </a:schemeClr>
+          </a:solidFill>
+        </p:spPr>
+        <p:style>
+          <a:lnRef idx="2">
+            <a:schemeClr val="accent1">
+              <a:shade val="15000"/>
+            </a:schemeClr>
+          </a:lnRef>
+          <a:fillRef idx="1">
+            <a:schemeClr val="accent1"/>
+          </a:fillRef>
+          <a:effectRef idx="0">
+            <a:schemeClr val="accent1"/>
+          </a:effectRef>
+          <a:fontRef idx="minor">
+            <a:schemeClr val="lt1"/>
+          </a:fontRef>
+        </p:style>
+        <p:txBody>
+          <a:bodyPr vert="vert" rtlCol="0" anchor="ctr"/>
+          <a:lstStyle/>
+          <a:p>
+            <a:pPr algn="ctr"/>
+            <a:r>
+              <a:rPr lang="en-US" sz="1400" b="1" dirty="0"/>
+              <a:t>8</a:t>
+            </a:r>
+          </a:p>
+        </p:txBody>
+      </p:sp>
+      <p:sp>
+        <p:nvSpPr>
+          <p:cNvPr id="137" name="Rectangle 136">
+            <a:extLst>
+              <a:ext uri="{FF2B5EF4-FFF2-40B4-BE49-F238E27FC236}">
+                <a16:creationId xmlns:a16="http://schemas.microsoft.com/office/drawing/2014/main" id="{C12A4E2B-6096-150E-DA86-68333E328721}"/>
+              </a:ext>
+            </a:extLst>
+          </p:cNvPr>
+          <p:cNvSpPr/>
+          <p:nvPr/>
+        </p:nvSpPr>
+        <p:spPr>
+          <a:xfrm>
+            <a:off x="9311342" y="4884884"/>
+            <a:ext cx="2215438" cy="1195545"/>
+          </a:xfrm>
+          <a:prstGeom prst="rect">
+            <a:avLst/>
+          </a:prstGeom>
+          <a:solidFill>
+            <a:srgbClr val="7030A0"/>
+          </a:solidFill>
+        </p:spPr>
+        <p:style>
+          <a:lnRef idx="2">
+            <a:schemeClr val="accent1">
+              <a:shade val="15000"/>
+            </a:schemeClr>
+          </a:lnRef>
+          <a:fillRef idx="1">
+            <a:schemeClr val="accent1"/>
+          </a:fillRef>
+          <a:effectRef idx="0">
+            <a:schemeClr val="accent1"/>
+          </a:effectRef>
+          <a:fontRef idx="minor">
+            <a:schemeClr val="lt1"/>
+          </a:fontRef>
+        </p:style>
+        <p:txBody>
+          <a:bodyPr lIns="0" tIns="0" rIns="0" bIns="0" rtlCol="0" anchor="ctr"/>
+          <a:lstStyle/>
+          <a:p>
+            <a:pPr algn="ctr"/>
+            <a:r>
+              <a:rPr lang="en-US" sz="1050" b="1" dirty="0"/>
+              <a:t>Query Mapper</a:t>
+            </a:r>
+          </a:p>
+          <a:p>
+            <a:pPr algn="ctr"/>
+            <a:endParaRPr lang="en-US" sz="300" dirty="0"/>
+          </a:p>
+          <a:p>
+            <a:pPr algn="ctr"/>
+            <a:r>
+              <a:rPr lang="en-US" sz="900" dirty="0"/>
+              <a:t>Uses arcane SEC-specific knowledge to determine Concepts being asked about </a:t>
+            </a:r>
+          </a:p>
+          <a:p>
+            <a:pPr algn="ctr"/>
+            <a:r>
+              <a:rPr lang="en-US" sz="900" dirty="0"/>
+              <a:t>(via alias lookups, cosine distances, etc…)</a:t>
+            </a:r>
+          </a:p>
+          <a:p>
+            <a:pPr algn="ctr"/>
+            <a:endParaRPr lang="en-US" sz="900" dirty="0"/>
+          </a:p>
+          <a:p>
+            <a:pPr algn="ctr"/>
+            <a:r>
+              <a:rPr lang="en-US" sz="900" dirty="0"/>
+              <a:t>Produces a Query Plan for the local LLM to write a matching SQL query.</a:t>
+            </a:r>
+          </a:p>
+          <a:p>
+            <a:pPr algn="ctr"/>
+            <a:endParaRPr lang="en-US" sz="500" dirty="0"/>
+          </a:p>
+        </p:txBody>
+      </p:sp>
       <p:cxnSp>
         <p:nvCxnSpPr>
-          <p:cNvPr id="111" name="Straight Arrow Connector 110">
-            <a:extLst>
-              <a:ext uri="{FF2B5EF4-FFF2-40B4-BE49-F238E27FC236}">
-                <a16:creationId xmlns:a16="http://schemas.microsoft.com/office/drawing/2014/main" id="{8822856E-54E9-6C62-EE17-9702CBA202C2}"/>
+          <p:cNvPr id="138" name="Straight Arrow Connector 137">
+            <a:extLst>
+              <a:ext uri="{FF2B5EF4-FFF2-40B4-BE49-F238E27FC236}">
+                <a16:creationId xmlns:a16="http://schemas.microsoft.com/office/drawing/2014/main" id="{218F14AF-9931-3060-84FB-55E3AD301B67}"/>
               </a:ext>
             </a:extLst>
           </p:cNvPr>
@@ -7142,9 +7156,9 @@
           <p:nvPr/>
         </p:nvCxnSpPr>
         <p:spPr>
-          <a:xfrm>
-            <a:off x="8129643" y="3112670"/>
-            <a:ext cx="837222" cy="1441161"/>
+          <a:xfrm flipH="1">
+            <a:off x="8056871" y="5492584"/>
+            <a:ext cx="1254471" cy="0"/>
           </a:xfrm>
           <a:prstGeom prst="straightConnector1">
             <a:avLst/>
@@ -7153,6 +7167,7 @@
             <a:solidFill>
               <a:schemeClr val="tx1"/>
             </a:solidFill>
+            <a:headEnd type="none"/>
             <a:tailEnd type="arrow"/>
           </a:ln>
         </p:spPr>
@@ -7173,10 +7188,10 @@
       </p:cxnSp>
       <p:sp>
         <p:nvSpPr>
-          <p:cNvPr id="131" name="Flowchart: Off-page Connector 130">
-            <a:extLst>
-              <a:ext uri="{FF2B5EF4-FFF2-40B4-BE49-F238E27FC236}">
-                <a16:creationId xmlns:a16="http://schemas.microsoft.com/office/drawing/2014/main" id="{8DB5FFE1-B20F-BC4A-F98A-1DB0CDA11B3B}"/>
+          <p:cNvPr id="140" name="Rectangle 139">
+            <a:extLst>
+              <a:ext uri="{FF2B5EF4-FFF2-40B4-BE49-F238E27FC236}">
+                <a16:creationId xmlns:a16="http://schemas.microsoft.com/office/drawing/2014/main" id="{EFB83094-B4D6-F6AB-F052-7F3270A99A6B}"/>
               </a:ext>
             </a:extLst>
           </p:cNvPr>
@@ -7184,17 +7199,15 @@
           <p:nvPr/>
         </p:nvSpPr>
         <p:spPr>
-          <a:xfrm rot="16200000">
-            <a:off x="2209722" y="4781767"/>
-            <a:ext cx="186884" cy="240280"/>
-          </a:xfrm>
-          <a:prstGeom prst="flowChartOffpageConnector">
+          <a:xfrm>
+            <a:off x="9391751" y="4411928"/>
+            <a:ext cx="719593" cy="304891"/>
+          </a:xfrm>
+          <a:prstGeom prst="rect">
             <a:avLst/>
           </a:prstGeom>
           <a:solidFill>
-            <a:schemeClr val="accent6">
-              <a:lumMod val="75000"/>
-            </a:schemeClr>
+            <a:srgbClr val="B17ED8"/>
           </a:solidFill>
         </p:spPr>
         <p:style>
@@ -7214,23 +7227,36 @@
           </a:fontRef>
         </p:style>
         <p:txBody>
-          <a:bodyPr vert="vert" rtlCol="0" anchor="ctr"/>
-          <a:lstStyle/>
-          <a:p>
-            <a:pPr algn="ctr"/>
-            <a:r>
-              <a:rPr lang="en-US" sz="1400" b="1" dirty="0"/>
-              <a:t>8</a:t>
-            </a:r>
-          </a:p>
-        </p:txBody>
-      </p:sp>
-      <p:sp>
-        <p:nvSpPr>
-          <p:cNvPr id="137" name="Rectangle 136">
-            <a:extLst>
-              <a:ext uri="{FF2B5EF4-FFF2-40B4-BE49-F238E27FC236}">
-                <a16:creationId xmlns:a16="http://schemas.microsoft.com/office/drawing/2014/main" id="{C12A4E2B-6096-150E-DA86-68333E328721}"/>
+          <a:bodyPr lIns="0" tIns="0" rIns="0" bIns="0" rtlCol="0" anchor="t"/>
+          <a:lstStyle/>
+          <a:p>
+            <a:pPr algn="ctr"/>
+            <a:r>
+              <a:rPr lang="en-US" sz="1000" b="1" dirty="0"/>
+              <a:t>Query Object</a:t>
+            </a:r>
+            <a:endParaRPr lang="en-US" sz="1200" b="1" dirty="0"/>
+          </a:p>
+          <a:p>
+            <a:pPr algn="ctr"/>
+            <a:r>
+              <a:rPr lang="en-US" sz="700" dirty="0"/>
+              <a:t>📚 </a:t>
+            </a:r>
+            <a:r>
+              <a:rPr lang="en-US" sz="700" b="1" u="sng" dirty="0"/>
+              <a:t>Pydantic</a:t>
+            </a:r>
+            <a:endParaRPr lang="en-US" sz="800" b="1" u="sng" dirty="0"/>
+          </a:p>
+        </p:txBody>
+      </p:sp>
+      <p:sp>
+        <p:nvSpPr>
+          <p:cNvPr id="141" name="Rectangle 140">
+            <a:extLst>
+              <a:ext uri="{FF2B5EF4-FFF2-40B4-BE49-F238E27FC236}">
+                <a16:creationId xmlns:a16="http://schemas.microsoft.com/office/drawing/2014/main" id="{57D42052-BB79-A072-46BE-B34C46D0157D}"/>
               </a:ext>
             </a:extLst>
           </p:cNvPr>
@@ -7239,8 +7265,73 @@
         </p:nvSpPr>
         <p:spPr>
           <a:xfrm>
-            <a:off x="8966865" y="5751982"/>
-            <a:ext cx="1947624" cy="829702"/>
+            <a:off x="8370160" y="5353118"/>
+            <a:ext cx="719593" cy="304890"/>
+          </a:xfrm>
+          <a:prstGeom prst="rect">
+            <a:avLst/>
+          </a:prstGeom>
+          <a:solidFill>
+            <a:srgbClr val="B17ED8"/>
+          </a:solidFill>
+        </p:spPr>
+        <p:style>
+          <a:lnRef idx="2">
+            <a:schemeClr val="accent1">
+              <a:shade val="15000"/>
+            </a:schemeClr>
+          </a:lnRef>
+          <a:fillRef idx="1">
+            <a:schemeClr val="accent1"/>
+          </a:fillRef>
+          <a:effectRef idx="0">
+            <a:schemeClr val="accent1"/>
+          </a:effectRef>
+          <a:fontRef idx="minor">
+            <a:schemeClr val="lt1"/>
+          </a:fontRef>
+        </p:style>
+        <p:txBody>
+          <a:bodyPr lIns="0" tIns="0" rIns="0" bIns="0" rtlCol="0" anchor="t"/>
+          <a:lstStyle/>
+          <a:p>
+            <a:pPr algn="ctr"/>
+            <a:r>
+              <a:rPr lang="en-US" sz="1000" b="1" dirty="0"/>
+              <a:t>Query Plan</a:t>
+            </a:r>
+            <a:endParaRPr lang="en-US" sz="1200" b="1" dirty="0"/>
+          </a:p>
+          <a:p>
+            <a:pPr algn="ctr"/>
+            <a:r>
+              <a:rPr lang="en-US" sz="700" dirty="0"/>
+              <a:t>📚 </a:t>
+            </a:r>
+            <a:r>
+              <a:rPr lang="en-US" sz="700" b="1" u="sng" dirty="0"/>
+              <a:t>Pydantic</a:t>
+            </a:r>
+            <a:endParaRPr lang="en-US" sz="800" b="1" u="sng" dirty="0"/>
+          </a:p>
+        </p:txBody>
+      </p:sp>
+      <p:sp>
+        <p:nvSpPr>
+          <p:cNvPr id="93" name="Rectangle 92">
+            <a:extLst>
+              <a:ext uri="{FF2B5EF4-FFF2-40B4-BE49-F238E27FC236}">
+                <a16:creationId xmlns:a16="http://schemas.microsoft.com/office/drawing/2014/main" id="{C470D739-A7E4-B20F-87C7-38FAB125269A}"/>
+              </a:ext>
+            </a:extLst>
+          </p:cNvPr>
+          <p:cNvSpPr/>
+          <p:nvPr/>
+        </p:nvSpPr>
+        <p:spPr>
+          <a:xfrm>
+            <a:off x="9362414" y="4933772"/>
+            <a:ext cx="393792" cy="101326"/>
           </a:xfrm>
           <a:prstGeom prst="rect">
             <a:avLst/>
@@ -7248,6 +7339,7 @@
           <a:solidFill>
             <a:srgbClr val="7030A0"/>
           </a:solidFill>
+          <a:ln w="6350" cap="rnd"/>
         </p:spPr>
         <p:style>
           <a:lnRef idx="2">
@@ -7271,33 +7363,18 @@
           <a:p>
             <a:pPr algn="ctr"/>
             <a:r>
-              <a:rPr lang="en-US" sz="1050" b="1" dirty="0"/>
-              <a:t>Concept Mapper</a:t>
-            </a:r>
-          </a:p>
-          <a:p>
-            <a:pPr algn="ctr"/>
-            <a:endParaRPr lang="en-US" sz="300" dirty="0"/>
-          </a:p>
-          <a:p>
-            <a:pPr algn="ctr"/>
-            <a:r>
-              <a:rPr lang="en-US" sz="900" dirty="0"/>
-              <a:t>Uses arcane SEC-specific knowledge of Concept usage to determine Concepts when the traditional match will be incorrect</a:t>
-            </a:r>
-          </a:p>
-          <a:p>
-            <a:pPr algn="ctr"/>
-            <a:endParaRPr lang="en-US" sz="500" dirty="0"/>
+              <a:rPr lang="en-US" sz="700" dirty="0"/>
+              <a:t>.py script</a:t>
+            </a:r>
           </a:p>
         </p:txBody>
       </p:sp>
       <p:cxnSp>
         <p:nvCxnSpPr>
-          <p:cNvPr id="138" name="Straight Arrow Connector 137">
-            <a:extLst>
-              <a:ext uri="{FF2B5EF4-FFF2-40B4-BE49-F238E27FC236}">
-                <a16:creationId xmlns:a16="http://schemas.microsoft.com/office/drawing/2014/main" id="{218F14AF-9931-3060-84FB-55E3AD301B67}"/>
+          <p:cNvPr id="160" name="Straight Arrow Connector 159">
+            <a:extLst>
+              <a:ext uri="{FF2B5EF4-FFF2-40B4-BE49-F238E27FC236}">
+                <a16:creationId xmlns:a16="http://schemas.microsoft.com/office/drawing/2014/main" id="{544E47D5-B3E9-03E4-F236-9378DC14B57C}"/>
               </a:ext>
             </a:extLst>
           </p:cNvPr>
@@ -7308,8 +7385,133 @@
         </p:nvCxnSpPr>
         <p:spPr>
           <a:xfrm flipH="1">
-            <a:off x="8056871" y="5492584"/>
-            <a:ext cx="909994" cy="0"/>
+            <a:off x="8056871" y="5846330"/>
+            <a:ext cx="1254471" cy="0"/>
+          </a:xfrm>
+          <a:prstGeom prst="straightConnector1">
+            <a:avLst/>
+          </a:prstGeom>
+          <a:ln w="12700">
+            <a:solidFill>
+              <a:schemeClr val="tx1"/>
+            </a:solidFill>
+            <a:headEnd type="arrow"/>
+            <a:tailEnd type="none"/>
+          </a:ln>
+        </p:spPr>
+        <p:style>
+          <a:lnRef idx="1">
+            <a:schemeClr val="accent1"/>
+          </a:lnRef>
+          <a:fillRef idx="0">
+            <a:schemeClr val="accent1"/>
+          </a:fillRef>
+          <a:effectRef idx="0">
+            <a:schemeClr val="accent1"/>
+          </a:effectRef>
+          <a:fontRef idx="minor">
+            <a:schemeClr val="tx1"/>
+          </a:fontRef>
+        </p:style>
+      </p:cxnSp>
+      <p:sp>
+        <p:nvSpPr>
+          <p:cNvPr id="161" name="TextBox 160">
+            <a:extLst>
+              <a:ext uri="{FF2B5EF4-FFF2-40B4-BE49-F238E27FC236}">
+                <a16:creationId xmlns:a16="http://schemas.microsoft.com/office/drawing/2014/main" id="{EEB8931C-BA61-0618-C084-D24D32A32097}"/>
+              </a:ext>
+            </a:extLst>
+          </p:cNvPr>
+          <p:cNvSpPr txBox="1"/>
+          <p:nvPr/>
+        </p:nvSpPr>
+        <p:spPr>
+          <a:xfrm>
+            <a:off x="10731674" y="4511651"/>
+            <a:ext cx="652423" cy="169277"/>
+          </a:xfrm>
+          <a:prstGeom prst="rect">
+            <a:avLst/>
+          </a:prstGeom>
+          <a:noFill/>
+        </p:spPr>
+        <p:txBody>
+          <a:bodyPr wrap="none" lIns="0" tIns="0" rIns="0" bIns="0" rtlCol="0">
+            <a:spAutoFit/>
+          </a:bodyPr>
+          <a:lstStyle/>
+          <a:p>
+            <a:r>
+              <a:rPr lang="en-US" sz="1100" i="1" dirty="0"/>
+              <a:t>Query data</a:t>
+            </a:r>
+          </a:p>
+        </p:txBody>
+      </p:sp>
+      <p:cxnSp>
+        <p:nvCxnSpPr>
+          <p:cNvPr id="164" name="Straight Arrow Connector 163">
+            <a:extLst>
+              <a:ext uri="{FF2B5EF4-FFF2-40B4-BE49-F238E27FC236}">
+                <a16:creationId xmlns:a16="http://schemas.microsoft.com/office/drawing/2014/main" id="{AD5A96E6-5B59-6B19-7697-43661A71E9CA}"/>
+              </a:ext>
+            </a:extLst>
+          </p:cNvPr>
+          <p:cNvCxnSpPr>
+            <a:cxnSpLocks/>
+          </p:cNvCxnSpPr>
+          <p:nvPr/>
+        </p:nvCxnSpPr>
+        <p:spPr>
+          <a:xfrm>
+            <a:off x="11092940" y="4336911"/>
+            <a:ext cx="0" cy="547973"/>
+          </a:xfrm>
+          <a:prstGeom prst="straightConnector1">
+            <a:avLst/>
+          </a:prstGeom>
+          <a:ln w="12700">
+            <a:solidFill>
+              <a:schemeClr val="tx1"/>
+            </a:solidFill>
+            <a:headEnd type="arrow"/>
+            <a:tailEnd type="none"/>
+          </a:ln>
+        </p:spPr>
+        <p:style>
+          <a:lnRef idx="1">
+            <a:schemeClr val="accent1"/>
+          </a:lnRef>
+          <a:fillRef idx="0">
+            <a:schemeClr val="accent1"/>
+          </a:fillRef>
+          <a:effectRef idx="0">
+            <a:schemeClr val="accent1"/>
+          </a:effectRef>
+          <a:fontRef idx="minor">
+            <a:schemeClr val="tx1"/>
+          </a:fontRef>
+        </p:style>
+      </p:cxnSp>
+      <p:cxnSp>
+        <p:nvCxnSpPr>
+          <p:cNvPr id="167" name="Straight Arrow Connector 166">
+            <a:extLst>
+              <a:ext uri="{FF2B5EF4-FFF2-40B4-BE49-F238E27FC236}">
+                <a16:creationId xmlns:a16="http://schemas.microsoft.com/office/drawing/2014/main" id="{188E0E9D-CD8C-2DF9-9DD6-2809E60C06D4}"/>
+              </a:ext>
+            </a:extLst>
+          </p:cNvPr>
+          <p:cNvCxnSpPr>
+            <a:cxnSpLocks/>
+          </p:cNvCxnSpPr>
+          <p:nvPr/>
+        </p:nvCxnSpPr>
+        <p:spPr>
+          <a:xfrm flipH="1" flipV="1">
+            <a:off x="8129643" y="3112670"/>
+            <a:ext cx="1181698" cy="1772213"/>
           </a:xfrm>
           <a:prstGeom prst="straightConnector1">
             <a:avLst/>
@@ -7337,6 +7539,473 @@
           </a:fontRef>
         </p:style>
       </p:cxnSp>
+      <p:sp>
+        <p:nvSpPr>
+          <p:cNvPr id="170" name="TextBox 169">
+            <a:extLst>
+              <a:ext uri="{FF2B5EF4-FFF2-40B4-BE49-F238E27FC236}">
+                <a16:creationId xmlns:a16="http://schemas.microsoft.com/office/drawing/2014/main" id="{B083C1EC-BE03-48D2-C3AE-FADE3D496F76}"/>
+              </a:ext>
+            </a:extLst>
+          </p:cNvPr>
+          <p:cNvSpPr txBox="1"/>
+          <p:nvPr/>
+        </p:nvSpPr>
+        <p:spPr>
+          <a:xfrm>
+            <a:off x="8410425" y="5846330"/>
+            <a:ext cx="591509" cy="169277"/>
+          </a:xfrm>
+          <a:prstGeom prst="rect">
+            <a:avLst/>
+          </a:prstGeom>
+          <a:noFill/>
+        </p:spPr>
+        <p:txBody>
+          <a:bodyPr wrap="none" lIns="0" tIns="0" rIns="0" bIns="0" rtlCol="0">
+            <a:spAutoFit/>
+          </a:bodyPr>
+          <a:lstStyle/>
+          <a:p>
+            <a:r>
+              <a:rPr lang="en-US" sz="1100" i="1" dirty="0"/>
+              <a:t>SQL Query</a:t>
+            </a:r>
+          </a:p>
+        </p:txBody>
+      </p:sp>
+      <p:sp>
+        <p:nvSpPr>
+          <p:cNvPr id="171" name="TextBox 170">
+            <a:extLst>
+              <a:ext uri="{FF2B5EF4-FFF2-40B4-BE49-F238E27FC236}">
+                <a16:creationId xmlns:a16="http://schemas.microsoft.com/office/drawing/2014/main" id="{C4E25829-8F49-7D62-A8DF-A418112E679F}"/>
+              </a:ext>
+            </a:extLst>
+          </p:cNvPr>
+          <p:cNvSpPr txBox="1"/>
+          <p:nvPr/>
+        </p:nvSpPr>
+        <p:spPr>
+          <a:xfrm rot="3305483">
+            <a:off x="8268959" y="3850359"/>
+            <a:ext cx="1131720" cy="169277"/>
+          </a:xfrm>
+          <a:prstGeom prst="rect">
+            <a:avLst/>
+          </a:prstGeom>
+          <a:noFill/>
+        </p:spPr>
+        <p:txBody>
+          <a:bodyPr wrap="none" lIns="0" tIns="0" rIns="0" bIns="0" rtlCol="0">
+            <a:spAutoFit/>
+          </a:bodyPr>
+          <a:lstStyle/>
+          <a:p>
+            <a:r>
+              <a:rPr lang="en-US" sz="1100" i="1" dirty="0"/>
+              <a:t>Query and response</a:t>
+            </a:r>
+          </a:p>
+        </p:txBody>
+      </p:sp>
+      <p:sp>
+        <p:nvSpPr>
+          <p:cNvPr id="172" name="Flowchart: Off-page Connector 171">
+            <a:extLst>
+              <a:ext uri="{FF2B5EF4-FFF2-40B4-BE49-F238E27FC236}">
+                <a16:creationId xmlns:a16="http://schemas.microsoft.com/office/drawing/2014/main" id="{0447B003-9275-D120-E27F-58CA5443AE1E}"/>
+              </a:ext>
+            </a:extLst>
+          </p:cNvPr>
+          <p:cNvSpPr/>
+          <p:nvPr/>
+        </p:nvSpPr>
+        <p:spPr>
+          <a:xfrm rot="16200000">
+            <a:off x="9054676" y="3687072"/>
+            <a:ext cx="186884" cy="240280"/>
+          </a:xfrm>
+          <a:prstGeom prst="flowChartOffpageConnector">
+            <a:avLst/>
+          </a:prstGeom>
+          <a:solidFill>
+            <a:schemeClr val="accent4">
+              <a:lumMod val="60000"/>
+              <a:lumOff val="40000"/>
+            </a:schemeClr>
+          </a:solidFill>
+        </p:spPr>
+        <p:style>
+          <a:lnRef idx="2">
+            <a:schemeClr val="accent1">
+              <a:shade val="15000"/>
+            </a:schemeClr>
+          </a:lnRef>
+          <a:fillRef idx="1">
+            <a:schemeClr val="accent1"/>
+          </a:fillRef>
+          <a:effectRef idx="0">
+            <a:schemeClr val="accent1"/>
+          </a:effectRef>
+          <a:fontRef idx="minor">
+            <a:schemeClr val="lt1"/>
+          </a:fontRef>
+        </p:style>
+        <p:txBody>
+          <a:bodyPr vert="vert" rtlCol="0" anchor="ctr"/>
+          <a:lstStyle/>
+          <a:p>
+            <a:pPr algn="ctr"/>
+            <a:r>
+              <a:rPr lang="en-US" sz="1400" b="1" dirty="0">
+                <a:solidFill>
+                  <a:schemeClr val="accent4">
+                    <a:lumMod val="75000"/>
+                  </a:schemeClr>
+                </a:solidFill>
+              </a:rPr>
+              <a:t>1</a:t>
+            </a:r>
+          </a:p>
+        </p:txBody>
+      </p:sp>
+      <p:sp>
+        <p:nvSpPr>
+          <p:cNvPr id="173" name="Flowchart: Off-page Connector 172">
+            <a:extLst>
+              <a:ext uri="{FF2B5EF4-FFF2-40B4-BE49-F238E27FC236}">
+                <a16:creationId xmlns:a16="http://schemas.microsoft.com/office/drawing/2014/main" id="{2C8AEE21-31C9-8EE4-5BE2-13A0E04ABDE4}"/>
+              </a:ext>
+            </a:extLst>
+          </p:cNvPr>
+          <p:cNvSpPr/>
+          <p:nvPr/>
+        </p:nvSpPr>
+        <p:spPr>
+          <a:xfrm rot="16200000">
+            <a:off x="9206075" y="5166555"/>
+            <a:ext cx="186884" cy="240280"/>
+          </a:xfrm>
+          <a:prstGeom prst="flowChartOffpageConnector">
+            <a:avLst/>
+          </a:prstGeom>
+          <a:solidFill>
+            <a:schemeClr val="accent4">
+              <a:lumMod val="60000"/>
+              <a:lumOff val="40000"/>
+            </a:schemeClr>
+          </a:solidFill>
+        </p:spPr>
+        <p:style>
+          <a:lnRef idx="2">
+            <a:schemeClr val="accent1">
+              <a:shade val="15000"/>
+            </a:schemeClr>
+          </a:lnRef>
+          <a:fillRef idx="1">
+            <a:schemeClr val="accent1"/>
+          </a:fillRef>
+          <a:effectRef idx="0">
+            <a:schemeClr val="accent1"/>
+          </a:effectRef>
+          <a:fontRef idx="minor">
+            <a:schemeClr val="lt1"/>
+          </a:fontRef>
+        </p:style>
+        <p:txBody>
+          <a:bodyPr vert="vert" rtlCol="0" anchor="ctr"/>
+          <a:lstStyle/>
+          <a:p>
+            <a:pPr algn="ctr"/>
+            <a:r>
+              <a:rPr lang="en-US" sz="1400" b="1" dirty="0">
+                <a:solidFill>
+                  <a:schemeClr val="accent4">
+                    <a:lumMod val="75000"/>
+                  </a:schemeClr>
+                </a:solidFill>
+              </a:rPr>
+              <a:t>2</a:t>
+            </a:r>
+          </a:p>
+        </p:txBody>
+      </p:sp>
+      <p:sp>
+        <p:nvSpPr>
+          <p:cNvPr id="174" name="Flowchart: Off-page Connector 173">
+            <a:extLst>
+              <a:ext uri="{FF2B5EF4-FFF2-40B4-BE49-F238E27FC236}">
+                <a16:creationId xmlns:a16="http://schemas.microsoft.com/office/drawing/2014/main" id="{DC49F929-8236-C80A-DF74-45C92AFAD358}"/>
+              </a:ext>
+            </a:extLst>
+          </p:cNvPr>
+          <p:cNvSpPr/>
+          <p:nvPr/>
+        </p:nvSpPr>
+        <p:spPr>
+          <a:xfrm rot="16200000">
+            <a:off x="6789154" y="5248565"/>
+            <a:ext cx="186884" cy="240280"/>
+          </a:xfrm>
+          <a:prstGeom prst="flowChartOffpageConnector">
+            <a:avLst/>
+          </a:prstGeom>
+          <a:solidFill>
+            <a:schemeClr val="accent4">
+              <a:lumMod val="60000"/>
+              <a:lumOff val="40000"/>
+            </a:schemeClr>
+          </a:solidFill>
+        </p:spPr>
+        <p:style>
+          <a:lnRef idx="2">
+            <a:schemeClr val="accent1">
+              <a:shade val="15000"/>
+            </a:schemeClr>
+          </a:lnRef>
+          <a:fillRef idx="1">
+            <a:schemeClr val="accent1"/>
+          </a:fillRef>
+          <a:effectRef idx="0">
+            <a:schemeClr val="accent1"/>
+          </a:effectRef>
+          <a:fontRef idx="minor">
+            <a:schemeClr val="lt1"/>
+          </a:fontRef>
+        </p:style>
+        <p:txBody>
+          <a:bodyPr vert="vert" rtlCol="0" anchor="ctr"/>
+          <a:lstStyle/>
+          <a:p>
+            <a:pPr algn="ctr"/>
+            <a:r>
+              <a:rPr lang="en-US" sz="1400" b="1" dirty="0">
+                <a:solidFill>
+                  <a:schemeClr val="accent4">
+                    <a:lumMod val="75000"/>
+                  </a:schemeClr>
+                </a:solidFill>
+              </a:rPr>
+              <a:t>3</a:t>
+            </a:r>
+          </a:p>
+        </p:txBody>
+      </p:sp>
+      <p:sp>
+        <p:nvSpPr>
+          <p:cNvPr id="175" name="Flowchart: Off-page Connector 174">
+            <a:extLst>
+              <a:ext uri="{FF2B5EF4-FFF2-40B4-BE49-F238E27FC236}">
+                <a16:creationId xmlns:a16="http://schemas.microsoft.com/office/drawing/2014/main" id="{EAA4BC7C-AB35-5672-4A04-11F3AED98435}"/>
+              </a:ext>
+            </a:extLst>
+          </p:cNvPr>
+          <p:cNvSpPr/>
+          <p:nvPr/>
+        </p:nvSpPr>
+        <p:spPr>
+          <a:xfrm rot="16200000">
+            <a:off x="8244296" y="3376702"/>
+            <a:ext cx="186884" cy="240280"/>
+          </a:xfrm>
+          <a:prstGeom prst="flowChartOffpageConnector">
+            <a:avLst/>
+          </a:prstGeom>
+          <a:solidFill>
+            <a:schemeClr val="accent4">
+              <a:lumMod val="60000"/>
+              <a:lumOff val="40000"/>
+            </a:schemeClr>
+          </a:solidFill>
+        </p:spPr>
+        <p:style>
+          <a:lnRef idx="2">
+            <a:schemeClr val="accent1">
+              <a:shade val="15000"/>
+            </a:schemeClr>
+          </a:lnRef>
+          <a:fillRef idx="1">
+            <a:schemeClr val="accent1"/>
+          </a:fillRef>
+          <a:effectRef idx="0">
+            <a:schemeClr val="accent1"/>
+          </a:effectRef>
+          <a:fontRef idx="minor">
+            <a:schemeClr val="lt1"/>
+          </a:fontRef>
+        </p:style>
+        <p:txBody>
+          <a:bodyPr vert="vert" rtlCol="0" anchor="ctr"/>
+          <a:lstStyle/>
+          <a:p>
+            <a:pPr algn="ctr"/>
+            <a:r>
+              <a:rPr lang="en-US" sz="1400" b="1" dirty="0">
+                <a:solidFill>
+                  <a:schemeClr val="accent4">
+                    <a:lumMod val="75000"/>
+                  </a:schemeClr>
+                </a:solidFill>
+              </a:rPr>
+              <a:t>4</a:t>
+            </a:r>
+          </a:p>
+        </p:txBody>
+      </p:sp>
+      <p:sp>
+        <p:nvSpPr>
+          <p:cNvPr id="176" name="Flowchart: Off-page Connector 175">
+            <a:extLst>
+              <a:ext uri="{FF2B5EF4-FFF2-40B4-BE49-F238E27FC236}">
+                <a16:creationId xmlns:a16="http://schemas.microsoft.com/office/drawing/2014/main" id="{AFCC506F-4117-8D5C-A52D-382D4EF3B926}"/>
+              </a:ext>
+            </a:extLst>
+          </p:cNvPr>
+          <p:cNvSpPr/>
+          <p:nvPr/>
+        </p:nvSpPr>
+        <p:spPr>
+          <a:xfrm rot="16200000">
+            <a:off x="10473248" y="4465418"/>
+            <a:ext cx="186884" cy="240280"/>
+          </a:xfrm>
+          <a:prstGeom prst="flowChartOffpageConnector">
+            <a:avLst/>
+          </a:prstGeom>
+          <a:solidFill>
+            <a:schemeClr val="accent4">
+              <a:lumMod val="60000"/>
+              <a:lumOff val="40000"/>
+            </a:schemeClr>
+          </a:solidFill>
+        </p:spPr>
+        <p:style>
+          <a:lnRef idx="2">
+            <a:schemeClr val="accent1">
+              <a:shade val="15000"/>
+            </a:schemeClr>
+          </a:lnRef>
+          <a:fillRef idx="1">
+            <a:schemeClr val="accent1"/>
+          </a:fillRef>
+          <a:effectRef idx="0">
+            <a:schemeClr val="accent1"/>
+          </a:effectRef>
+          <a:fontRef idx="minor">
+            <a:schemeClr val="lt1"/>
+          </a:fontRef>
+        </p:style>
+        <p:txBody>
+          <a:bodyPr vert="vert" rtlCol="0" anchor="ctr"/>
+          <a:lstStyle/>
+          <a:p>
+            <a:pPr algn="ctr"/>
+            <a:r>
+              <a:rPr lang="en-US" sz="1400" b="1" dirty="0">
+                <a:solidFill>
+                  <a:schemeClr val="accent4">
+                    <a:lumMod val="75000"/>
+                  </a:schemeClr>
+                </a:solidFill>
+              </a:rPr>
+              <a:t>5</a:t>
+            </a:r>
+          </a:p>
+        </p:txBody>
+      </p:sp>
+      <p:sp>
+        <p:nvSpPr>
+          <p:cNvPr id="178" name="Thought Bubble: Cloud 177">
+            <a:extLst>
+              <a:ext uri="{FF2B5EF4-FFF2-40B4-BE49-F238E27FC236}">
+                <a16:creationId xmlns:a16="http://schemas.microsoft.com/office/drawing/2014/main" id="{22BE8A4D-DA4E-6EFE-842E-C807DCC86649}"/>
+              </a:ext>
+            </a:extLst>
+          </p:cNvPr>
+          <p:cNvSpPr/>
+          <p:nvPr/>
+        </p:nvSpPr>
+        <p:spPr>
+          <a:xfrm>
+            <a:off x="9697423" y="2919947"/>
+            <a:ext cx="1320449" cy="509053"/>
+          </a:xfrm>
+          <a:prstGeom prst="cloudCallout">
+            <a:avLst>
+              <a:gd name="adj1" fmla="val 1435"/>
+              <a:gd name="adj2" fmla="val 46748"/>
+            </a:avLst>
+          </a:prstGeom>
+          <a:noFill/>
+        </p:spPr>
+        <p:style>
+          <a:lnRef idx="2">
+            <a:schemeClr val="accent1">
+              <a:shade val="15000"/>
+            </a:schemeClr>
+          </a:lnRef>
+          <a:fillRef idx="1">
+            <a:schemeClr val="accent1"/>
+          </a:fillRef>
+          <a:effectRef idx="0">
+            <a:schemeClr val="accent1"/>
+          </a:effectRef>
+          <a:fontRef idx="minor">
+            <a:schemeClr val="lt1"/>
+          </a:fontRef>
+        </p:style>
+        <p:txBody>
+          <a:bodyPr rtlCol="0" anchor="ctr"/>
+          <a:lstStyle/>
+          <a:p>
+            <a:pPr algn="ctr"/>
+            <a:r>
+              <a:rPr lang="en-US" sz="2800" b="1" dirty="0">
+                <a:solidFill>
+                  <a:schemeClr val="tx1"/>
+                </a:solidFill>
+              </a:rPr>
+              <a:t>User</a:t>
+            </a:r>
+          </a:p>
+        </p:txBody>
+      </p:sp>
+      <p:sp>
+        <p:nvSpPr>
+          <p:cNvPr id="179" name="TextBox 178">
+            <a:extLst>
+              <a:ext uri="{FF2B5EF4-FFF2-40B4-BE49-F238E27FC236}">
+                <a16:creationId xmlns:a16="http://schemas.microsoft.com/office/drawing/2014/main" id="{7EE5DE43-57A1-40FD-4F3A-9493D38626A3}"/>
+              </a:ext>
+            </a:extLst>
+          </p:cNvPr>
+          <p:cNvSpPr txBox="1"/>
+          <p:nvPr/>
+        </p:nvSpPr>
+        <p:spPr>
+          <a:xfrm>
+            <a:off x="9665887" y="3519100"/>
+            <a:ext cx="1561325" cy="169277"/>
+          </a:xfrm>
+          <a:prstGeom prst="rect">
+            <a:avLst/>
+          </a:prstGeom>
+          <a:noFill/>
+        </p:spPr>
+        <p:txBody>
+          <a:bodyPr wrap="none" lIns="0" tIns="0" rIns="0" bIns="0" rtlCol="0">
+            <a:spAutoFit/>
+          </a:bodyPr>
+          <a:lstStyle/>
+          <a:p>
+            <a:r>
+              <a:rPr lang="en-US" sz="1100" i="1" dirty="0"/>
+              <a:t>Ask question / Display data</a:t>
+            </a:r>
+          </a:p>
+        </p:txBody>
+      </p:sp>
     </p:spTree>
     <p:extLst>
       <p:ext uri="{BB962C8B-B14F-4D97-AF65-F5344CB8AC3E}">

--- a/Project and Tool Layout.pptx
+++ b/Project and Tool Layout.pptx
@@ -6,6 +6,7 @@
   </p:sldMasterIdLst>
   <p:sldIdLst>
     <p:sldId id="256" r:id="rId2"/>
+    <p:sldId id="258" r:id="rId3"/>
   </p:sldIdLst>
   <p:sldSz cx="12192000" cy="6858000"/>
   <p:notesSz cx="6858000" cy="9144000"/>
@@ -3340,7 +3341,7 @@
         </p:nvSpPr>
         <p:spPr>
           <a:xfrm>
-            <a:off x="2097659" y="149458"/>
+            <a:off x="3086994" y="770182"/>
             <a:ext cx="3492379" cy="1656606"/>
           </a:xfrm>
           <a:prstGeom prst="rect">
@@ -3398,7 +3399,7 @@
         </p:nvSpPr>
         <p:spPr>
           <a:xfrm>
-            <a:off x="6874294" y="1766629"/>
+            <a:off x="7863629" y="2387353"/>
             <a:ext cx="1314542" cy="1426968"/>
           </a:xfrm>
           <a:prstGeom prst="rect">
@@ -3460,7 +3461,7 @@
         </p:nvSpPr>
         <p:spPr>
           <a:xfrm>
-            <a:off x="6874294" y="549197"/>
+            <a:off x="7863629" y="1169921"/>
             <a:ext cx="1314542" cy="922951"/>
           </a:xfrm>
           <a:prstGeom prst="rect">
@@ -3522,7 +3523,7 @@
         </p:nvSpPr>
         <p:spPr>
           <a:xfrm>
-            <a:off x="6933487" y="2216982"/>
+            <a:off x="7922822" y="2837706"/>
             <a:ext cx="1196156" cy="895688"/>
           </a:xfrm>
           <a:prstGeom prst="rect">
@@ -3577,7 +3578,7 @@
         </p:nvSpPr>
         <p:spPr>
           <a:xfrm>
-            <a:off x="481515" y="184470"/>
+            <a:off x="1470850" y="805194"/>
             <a:ext cx="1177564" cy="660952"/>
           </a:xfrm>
           <a:prstGeom prst="cloudCallout">
@@ -3634,7 +3635,7 @@
         </p:nvSpPr>
         <p:spPr>
           <a:xfrm>
-            <a:off x="509643" y="1332477"/>
+            <a:off x="1498978" y="1953201"/>
             <a:ext cx="1121308" cy="1361588"/>
           </a:xfrm>
           <a:prstGeom prst="rect">
@@ -3709,7 +3710,7 @@
         </p:nvSpPr>
         <p:spPr>
           <a:xfrm>
-            <a:off x="509643" y="2927983"/>
+            <a:off x="1498978" y="3548707"/>
             <a:ext cx="1121308" cy="548974"/>
           </a:xfrm>
           <a:prstGeom prst="rect">
@@ -3771,7 +3772,7 @@
         </p:nvCxnSpPr>
         <p:spPr>
           <a:xfrm>
-            <a:off x="1070297" y="2694065"/>
+            <a:off x="2059632" y="3314789"/>
             <a:ext cx="0" cy="233918"/>
           </a:xfrm>
           <a:prstGeom prst="straightConnector1">
@@ -3813,7 +3814,7 @@
         </p:nvSpPr>
         <p:spPr>
           <a:xfrm>
-            <a:off x="509643" y="3665676"/>
+            <a:off x="1498978" y="4286400"/>
             <a:ext cx="1121308" cy="957830"/>
           </a:xfrm>
           <a:prstGeom prst="rect">
@@ -3891,7 +3892,7 @@
         </p:nvCxnSpPr>
         <p:spPr>
           <a:xfrm>
-            <a:off x="1070297" y="3476957"/>
+            <a:off x="2059632" y="4097681"/>
             <a:ext cx="0" cy="188719"/>
           </a:xfrm>
           <a:prstGeom prst="straightConnector1">
@@ -3933,7 +3934,7 @@
         </p:nvSpPr>
         <p:spPr>
           <a:xfrm>
-            <a:off x="536339" y="1352500"/>
+            <a:off x="1525674" y="1973224"/>
             <a:ext cx="393791" cy="106792"/>
           </a:xfrm>
           <a:prstGeom prst="rect">
@@ -3986,7 +3987,7 @@
         </p:nvSpPr>
         <p:spPr>
           <a:xfrm>
-            <a:off x="2485670" y="382618"/>
+            <a:off x="3475005" y="1003342"/>
             <a:ext cx="1256228" cy="1301519"/>
           </a:xfrm>
           <a:prstGeom prst="rect">
@@ -4072,7 +4073,7 @@
         </p:nvSpPr>
         <p:spPr>
           <a:xfrm>
-            <a:off x="2512366" y="402642"/>
+            <a:off x="3501701" y="1023366"/>
             <a:ext cx="468643" cy="106792"/>
           </a:xfrm>
           <a:prstGeom prst="rect">
@@ -4125,7 +4126,7 @@
         </p:nvSpPr>
         <p:spPr>
           <a:xfrm>
-            <a:off x="4115345" y="382617"/>
+            <a:off x="5104680" y="1003341"/>
             <a:ext cx="1256225" cy="1301519"/>
           </a:xfrm>
           <a:prstGeom prst="rect">
@@ -4223,7 +4224,7 @@
         </p:nvSpPr>
         <p:spPr>
           <a:xfrm>
-            <a:off x="4142042" y="411469"/>
+            <a:off x="5131377" y="1032193"/>
             <a:ext cx="468643" cy="106884"/>
           </a:xfrm>
           <a:prstGeom prst="rect">
@@ -4280,7 +4281,7 @@
         </p:nvCxnSpPr>
         <p:spPr>
           <a:xfrm flipV="1">
-            <a:off x="3741898" y="1033377"/>
+            <a:off x="4731233" y="1654101"/>
             <a:ext cx="373447" cy="1"/>
           </a:xfrm>
           <a:prstGeom prst="line">
@@ -4322,7 +4323,7 @@
         </p:nvSpPr>
         <p:spPr>
           <a:xfrm>
-            <a:off x="2467882" y="1967324"/>
+            <a:off x="3457217" y="2588048"/>
             <a:ext cx="1256227" cy="862212"/>
           </a:xfrm>
           <a:prstGeom prst="rect">
@@ -4403,7 +4404,7 @@
         </p:nvSpPr>
         <p:spPr>
           <a:xfrm>
-            <a:off x="2494578" y="1987348"/>
+            <a:off x="3483913" y="2608072"/>
             <a:ext cx="548737" cy="106790"/>
           </a:xfrm>
           <a:prstGeom prst="rect">
@@ -4456,7 +4457,7 @@
         </p:nvSpPr>
         <p:spPr>
           <a:xfrm>
-            <a:off x="4096597" y="1967324"/>
+            <a:off x="5085932" y="2588048"/>
             <a:ext cx="1257184" cy="862209"/>
           </a:xfrm>
           <a:prstGeom prst="rect">
@@ -4565,7 +4566,7 @@
         </p:nvCxnSpPr>
         <p:spPr>
           <a:xfrm flipV="1">
-            <a:off x="3724109" y="2398429"/>
+            <a:off x="4713444" y="3019153"/>
             <a:ext cx="372488" cy="1"/>
           </a:xfrm>
           <a:prstGeom prst="straightConnector1">
@@ -4609,7 +4610,7 @@
         </p:nvCxnSpPr>
         <p:spPr>
           <a:xfrm>
-            <a:off x="1630951" y="3891416"/>
+            <a:off x="2620286" y="4512140"/>
             <a:ext cx="836929" cy="0"/>
           </a:xfrm>
           <a:prstGeom prst="straightConnector1">
@@ -4651,7 +4652,7 @@
         </p:nvSpPr>
         <p:spPr>
           <a:xfrm>
-            <a:off x="2467880" y="3281155"/>
+            <a:off x="3457215" y="3901879"/>
             <a:ext cx="1483159" cy="1397845"/>
           </a:xfrm>
           <a:prstGeom prst="rect">
@@ -4744,7 +4745,7 @@
         </p:nvSpPr>
         <p:spPr>
           <a:xfrm>
-            <a:off x="2494577" y="3301178"/>
+            <a:off x="3483912" y="3921902"/>
             <a:ext cx="393791" cy="105966"/>
           </a:xfrm>
           <a:prstGeom prst="rect">
@@ -4797,7 +4798,7 @@
         </p:nvSpPr>
         <p:spPr>
           <a:xfrm>
-            <a:off x="3951039" y="3281155"/>
+            <a:off x="4940374" y="3901879"/>
             <a:ext cx="1454713" cy="1397845"/>
           </a:xfrm>
           <a:prstGeom prst="rect">
@@ -4893,7 +4894,7 @@
         </p:nvCxnSpPr>
         <p:spPr>
           <a:xfrm>
-            <a:off x="5353781" y="2398429"/>
+            <a:off x="6343116" y="3019153"/>
             <a:ext cx="1370627" cy="0"/>
           </a:xfrm>
           <a:prstGeom prst="straightConnector1">
@@ -4935,7 +4936,7 @@
         </p:nvSpPr>
         <p:spPr>
           <a:xfrm rot="16200000">
-            <a:off x="3858657" y="288588"/>
+            <a:off x="4847992" y="909312"/>
             <a:ext cx="186884" cy="240280"/>
           </a:xfrm>
           <a:prstGeom prst="flowChartOffpageConnector">
@@ -4989,7 +4990,7 @@
         </p:nvSpPr>
         <p:spPr>
           <a:xfrm rot="16200000">
-            <a:off x="2228981" y="269026"/>
+            <a:off x="3218316" y="889750"/>
             <a:ext cx="186884" cy="240280"/>
           </a:xfrm>
           <a:prstGeom prst="flowChartOffpageConnector">
@@ -5043,7 +5044,7 @@
         </p:nvSpPr>
         <p:spPr>
           <a:xfrm rot="16200000">
-            <a:off x="2234394" y="1853733"/>
+            <a:off x="3223729" y="2474457"/>
             <a:ext cx="186884" cy="240280"/>
           </a:xfrm>
           <a:prstGeom prst="flowChartOffpageConnector">
@@ -5097,7 +5098,7 @@
         </p:nvSpPr>
         <p:spPr>
           <a:xfrm>
-            <a:off x="5790609" y="1950899"/>
+            <a:off x="6779944" y="2571623"/>
             <a:ext cx="186884" cy="240280"/>
           </a:xfrm>
           <a:prstGeom prst="flowChartOffpageConnector">
@@ -5151,7 +5152,7 @@
         </p:nvSpPr>
         <p:spPr>
           <a:xfrm rot="16200000">
-            <a:off x="2209722" y="3166900"/>
+            <a:off x="3199057" y="3787624"/>
             <a:ext cx="186884" cy="240280"/>
           </a:xfrm>
           <a:prstGeom prst="flowChartOffpageConnector">
@@ -5205,7 +5206,7 @@
         </p:nvSpPr>
         <p:spPr>
           <a:xfrm rot="16200000">
-            <a:off x="267933" y="1218884"/>
+            <a:off x="1257268" y="1839608"/>
             <a:ext cx="186884" cy="240280"/>
           </a:xfrm>
           <a:prstGeom prst="flowChartOffpageConnector">
@@ -5259,7 +5260,7 @@
         </p:nvSpPr>
         <p:spPr>
           <a:xfrm>
-            <a:off x="5643612" y="2207796"/>
+            <a:off x="6632947" y="2828520"/>
             <a:ext cx="452047" cy="169277"/>
           </a:xfrm>
           <a:prstGeom prst="rect">
@@ -5294,7 +5295,7 @@
         </p:nvSpPr>
         <p:spPr>
           <a:xfrm>
-            <a:off x="6933487" y="143148"/>
+            <a:off x="7922822" y="763872"/>
             <a:ext cx="1196156" cy="321580"/>
           </a:xfrm>
           <a:prstGeom prst="rect">
@@ -5363,7 +5364,7 @@
         </p:nvSpPr>
         <p:spPr>
           <a:xfrm>
-            <a:off x="4096597" y="2829534"/>
+            <a:off x="5085932" y="3450258"/>
             <a:ext cx="1249962" cy="118721"/>
           </a:xfrm>
           <a:prstGeom prst="rect">
@@ -5416,7 +5417,7 @@
         </p:nvSpPr>
         <p:spPr>
           <a:xfrm>
-            <a:off x="3951039" y="4679000"/>
+            <a:off x="4940374" y="5299724"/>
             <a:ext cx="1454713" cy="135515"/>
           </a:xfrm>
           <a:prstGeom prst="rect">
@@ -5469,7 +5470,7 @@
         </p:nvSpPr>
         <p:spPr>
           <a:xfrm>
-            <a:off x="6934365" y="929641"/>
+            <a:off x="7923700" y="1550365"/>
             <a:ext cx="1196156" cy="500584"/>
           </a:xfrm>
           <a:prstGeom prst="rect">
@@ -5544,7 +5545,7 @@
         </p:nvCxnSpPr>
         <p:spPr>
           <a:xfrm>
-            <a:off x="7531565" y="1472148"/>
+            <a:off x="8520900" y="2092872"/>
             <a:ext cx="0" cy="294481"/>
           </a:xfrm>
           <a:prstGeom prst="straightConnector1">
@@ -5587,7 +5588,7 @@
         </p:nvSpPr>
         <p:spPr>
           <a:xfrm>
-            <a:off x="7065871" y="2776537"/>
+            <a:off x="8055206" y="3397261"/>
             <a:ext cx="931388" cy="206948"/>
           </a:xfrm>
           <a:prstGeom prst="rect">
@@ -5646,7 +5647,7 @@
         </p:nvSpPr>
         <p:spPr>
           <a:xfrm rot="16200000">
-            <a:off x="6632644" y="429057"/>
+            <a:off x="7621979" y="1049781"/>
             <a:ext cx="186884" cy="240280"/>
           </a:xfrm>
           <a:prstGeom prst="flowChartOffpageConnector">
@@ -5700,7 +5701,7 @@
         </p:nvSpPr>
         <p:spPr>
           <a:xfrm rot="16200000">
-            <a:off x="6632644" y="1976210"/>
+            <a:off x="7621979" y="2596934"/>
             <a:ext cx="186884" cy="240280"/>
           </a:xfrm>
           <a:prstGeom prst="flowChartOffpageConnector">
@@ -5754,7 +5755,7 @@
         </p:nvSpPr>
         <p:spPr>
           <a:xfrm>
-            <a:off x="6874294" y="3241987"/>
+            <a:off x="7863629" y="3862711"/>
             <a:ext cx="1314542" cy="740680"/>
           </a:xfrm>
           <a:prstGeom prst="rect">
@@ -5816,7 +5817,7 @@
         </p:nvSpPr>
         <p:spPr>
           <a:xfrm>
-            <a:off x="6933487" y="3578390"/>
+            <a:off x="7922822" y="4199114"/>
             <a:ext cx="1196156" cy="356069"/>
           </a:xfrm>
           <a:prstGeom prst="rect">
@@ -5875,7 +5876,7 @@
         </p:nvSpPr>
         <p:spPr>
           <a:xfrm>
-            <a:off x="7141181" y="3760923"/>
+            <a:off x="8130516" y="4381647"/>
             <a:ext cx="780768" cy="149563"/>
           </a:xfrm>
           <a:prstGeom prst="rect">
@@ -5934,7 +5935,7 @@
         </p:nvSpPr>
         <p:spPr>
           <a:xfrm>
-            <a:off x="8594372" y="1985364"/>
+            <a:off x="9583707" y="2606088"/>
             <a:ext cx="993676" cy="740680"/>
           </a:xfrm>
           <a:prstGeom prst="rect">
@@ -5995,7 +5996,7 @@
         </p:nvGrpSpPr>
         <p:grpSpPr>
           <a:xfrm>
-            <a:off x="8757367" y="2237784"/>
+            <a:off x="9746702" y="2858508"/>
             <a:ext cx="680794" cy="433282"/>
             <a:chOff x="8227377" y="3019807"/>
             <a:chExt cx="680794" cy="785917"/>
@@ -6171,7 +6172,7 @@
         </p:nvCxnSpPr>
         <p:spPr>
           <a:xfrm>
-            <a:off x="8129643" y="2477517"/>
+            <a:off x="9118978" y="3098241"/>
             <a:ext cx="627724" cy="0"/>
           </a:xfrm>
           <a:prstGeom prst="straightConnector1">
@@ -6214,7 +6215,7 @@
         </p:nvSpPr>
         <p:spPr>
           <a:xfrm>
-            <a:off x="6874294" y="4154219"/>
+            <a:off x="7863629" y="4774943"/>
             <a:ext cx="1314542" cy="1904457"/>
           </a:xfrm>
           <a:prstGeom prst="rect">
@@ -6276,7 +6277,7 @@
         </p:nvSpPr>
         <p:spPr>
           <a:xfrm>
-            <a:off x="6933487" y="4604573"/>
+            <a:off x="7922822" y="5225297"/>
             <a:ext cx="1196156" cy="1391900"/>
           </a:xfrm>
           <a:prstGeom prst="rect">
@@ -6331,7 +6332,7 @@
         </p:nvSpPr>
         <p:spPr>
           <a:xfrm>
-            <a:off x="7006259" y="4932631"/>
+            <a:off x="7995594" y="5553355"/>
             <a:ext cx="1050612" cy="336133"/>
           </a:xfrm>
           <a:prstGeom prst="rect">
@@ -6390,7 +6391,7 @@
         </p:nvSpPr>
         <p:spPr>
           <a:xfrm>
-            <a:off x="2467880" y="4911207"/>
+            <a:off x="3457215" y="5531931"/>
             <a:ext cx="2937872" cy="728112"/>
           </a:xfrm>
           <a:prstGeom prst="rect">
@@ -6484,7 +6485,7 @@
         </p:nvSpPr>
         <p:spPr>
           <a:xfrm>
-            <a:off x="2494576" y="4931230"/>
+            <a:off x="3483911" y="5551954"/>
             <a:ext cx="393792" cy="101326"/>
           </a:xfrm>
           <a:prstGeom prst="rect">
@@ -6537,7 +6538,7 @@
         </p:nvSpPr>
         <p:spPr>
           <a:xfrm>
-            <a:off x="6724408" y="2216984"/>
+            <a:off x="7713743" y="2837708"/>
             <a:ext cx="202062" cy="895686"/>
           </a:xfrm>
           <a:prstGeom prst="rect">
@@ -6591,7 +6592,7 @@
         </p:nvCxnSpPr>
         <p:spPr>
           <a:xfrm flipV="1">
-            <a:off x="5405752" y="2530534"/>
+            <a:off x="6395087" y="3151258"/>
             <a:ext cx="1318656" cy="1318793"/>
           </a:xfrm>
           <a:prstGeom prst="bentConnector3">
@@ -6635,7 +6636,7 @@
         </p:nvCxnSpPr>
         <p:spPr>
           <a:xfrm flipV="1">
-            <a:off x="5405752" y="2682744"/>
+            <a:off x="6395087" y="3303468"/>
             <a:ext cx="1318656" cy="2312605"/>
           </a:xfrm>
           <a:prstGeom prst="bentConnector3">
@@ -6682,7 +6683,7 @@
         </p:nvCxnSpPr>
         <p:spPr>
           <a:xfrm flipH="1">
-            <a:off x="5405752" y="5100698"/>
+            <a:off x="6395087" y="5721422"/>
             <a:ext cx="1600507" cy="0"/>
           </a:xfrm>
           <a:prstGeom prst="line">
@@ -6725,7 +6726,7 @@
         </p:nvSpPr>
         <p:spPr>
           <a:xfrm>
-            <a:off x="7006259" y="5334429"/>
+            <a:off x="7995594" y="5955153"/>
             <a:ext cx="1050612" cy="611196"/>
           </a:xfrm>
           <a:prstGeom prst="rect">
@@ -6786,10 +6787,10 @@
       </p:sp>
       <p:sp>
         <p:nvSpPr>
-          <p:cNvPr id="90" name="Rectangle 89">
-            <a:extLst>
-              <a:ext uri="{FF2B5EF4-FFF2-40B4-BE49-F238E27FC236}">
-                <a16:creationId xmlns:a16="http://schemas.microsoft.com/office/drawing/2014/main" id="{E9A11068-2F85-B8AC-D139-7A94970A6B6F}"/>
+          <p:cNvPr id="131" name="Flowchart: Off-page Connector 130">
+            <a:extLst>
+              <a:ext uri="{FF2B5EF4-FFF2-40B4-BE49-F238E27FC236}">
+                <a16:creationId xmlns:a16="http://schemas.microsoft.com/office/drawing/2014/main" id="{8DB5FFE1-B20F-BC4A-F98A-1DB0CDA11B3B}"/>
               </a:ext>
             </a:extLst>
           </p:cNvPr>
@@ -6797,16 +6798,16 @@
           <p:nvPr/>
         </p:nvSpPr>
         <p:spPr>
-          <a:xfrm>
-            <a:off x="9311341" y="3827859"/>
-            <a:ext cx="2215437" cy="509053"/>
-          </a:xfrm>
-          <a:prstGeom prst="rect">
+          <a:xfrm rot="16200000">
+            <a:off x="3199057" y="5402491"/>
+            <a:ext cx="186884" cy="240280"/>
+          </a:xfrm>
+          <a:prstGeom prst="flowChartOffpageConnector">
             <a:avLst/>
           </a:prstGeom>
           <a:solidFill>
-            <a:schemeClr val="bg1">
-              <a:lumMod val="85000"/>
+            <a:schemeClr val="accent6">
+              <a:lumMod val="75000"/>
             </a:schemeClr>
           </a:solidFill>
         </p:spPr>
@@ -6827,15 +6828,65 @@
           </a:fontRef>
         </p:style>
         <p:txBody>
-          <a:bodyPr lIns="0" tIns="45720" rIns="0" bIns="0" rtlCol="0" anchor="t"/>
-          <a:lstStyle/>
-          <a:p>
-            <a:pPr algn="ctr"/>
-            <a:r>
-              <a:rPr lang="en-US" sz="1100" b="1" dirty="0"/>
-              <a:t>User-facing LLM</a:t>
-            </a:r>
-          </a:p>
+          <a:bodyPr vert="vert" rtlCol="0" anchor="ctr"/>
+          <a:lstStyle/>
+          <a:p>
+            <a:pPr algn="ctr"/>
+            <a:r>
+              <a:rPr lang="en-US" sz="1400" b="1" dirty="0"/>
+              <a:t>8</a:t>
+            </a:r>
+          </a:p>
+        </p:txBody>
+      </p:sp>
+      <p:sp>
+        <p:nvSpPr>
+          <p:cNvPr id="183" name="Rectangle 182">
+            <a:extLst>
+              <a:ext uri="{FF2B5EF4-FFF2-40B4-BE49-F238E27FC236}">
+                <a16:creationId xmlns:a16="http://schemas.microsoft.com/office/drawing/2014/main" id="{9E492C8C-E2EB-4DCC-8FC4-C53AECC1962C}"/>
+              </a:ext>
+            </a:extLst>
+          </p:cNvPr>
+          <p:cNvSpPr/>
+          <p:nvPr/>
+        </p:nvSpPr>
+        <p:spPr>
+          <a:xfrm>
+            <a:off x="9583707" y="5769777"/>
+            <a:ext cx="993676" cy="796571"/>
+          </a:xfrm>
+          <a:prstGeom prst="rect">
+            <a:avLst/>
+          </a:prstGeom>
+          <a:solidFill>
+            <a:schemeClr val="bg1">
+              <a:lumMod val="95000"/>
+            </a:schemeClr>
+          </a:solidFill>
+          <a:ln>
+            <a:prstDash val="dash"/>
+          </a:ln>
+        </p:spPr>
+        <p:style>
+          <a:lnRef idx="2">
+            <a:schemeClr val="accent1">
+              <a:shade val="15000"/>
+            </a:schemeClr>
+          </a:lnRef>
+          <a:fillRef idx="1">
+            <a:schemeClr val="accent1"/>
+          </a:fillRef>
+          <a:effectRef idx="0">
+            <a:schemeClr val="accent1"/>
+          </a:effectRef>
+          <a:fontRef idx="minor">
+            <a:schemeClr val="lt1"/>
+          </a:fontRef>
+        </p:style>
+        <p:txBody>
+          <a:bodyPr rtlCol="0" anchor="t"/>
+          <a:lstStyle/>
           <a:p>
             <a:pPr algn="ctr"/>
             <a:r>
@@ -6844,17 +6895,180 @@
                   <a:schemeClr val="tx1"/>
                 </a:solidFill>
               </a:rPr>
-              <a:t>📚 …</a:t>
-            </a:r>
-          </a:p>
-        </p:txBody>
-      </p:sp>
-      <p:sp>
-        <p:nvSpPr>
-          <p:cNvPr id="92" name="Rectangle 91">
-            <a:extLst>
-              <a:ext uri="{FF2B5EF4-FFF2-40B4-BE49-F238E27FC236}">
-                <a16:creationId xmlns:a16="http://schemas.microsoft.com/office/drawing/2014/main" id="{D286EDA6-6361-ED43-DE75-245CF0C6A8BC}"/>
+              <a:t>Host GPU</a:t>
+            </a:r>
+          </a:p>
+        </p:txBody>
+      </p:sp>
+      <p:cxnSp>
+        <p:nvCxnSpPr>
+          <p:cNvPr id="188" name="Straight Arrow Connector 187">
+            <a:extLst>
+              <a:ext uri="{FF2B5EF4-FFF2-40B4-BE49-F238E27FC236}">
+                <a16:creationId xmlns:a16="http://schemas.microsoft.com/office/drawing/2014/main" id="{0F362DED-BF34-5AF8-243D-B31EC86503E7}"/>
+              </a:ext>
+            </a:extLst>
+          </p:cNvPr>
+          <p:cNvCxnSpPr>
+            <a:cxnSpLocks/>
+          </p:cNvCxnSpPr>
+          <p:nvPr/>
+        </p:nvCxnSpPr>
+        <p:spPr>
+          <a:xfrm>
+            <a:off x="9118978" y="6261931"/>
+            <a:ext cx="627724" cy="0"/>
+          </a:xfrm>
+          <a:prstGeom prst="straightConnector1">
+            <a:avLst/>
+          </a:prstGeom>
+          <a:ln w="12700">
+            <a:solidFill>
+              <a:schemeClr val="tx1"/>
+            </a:solidFill>
+            <a:headEnd type="arrow"/>
+            <a:tailEnd type="arrow"/>
+          </a:ln>
+        </p:spPr>
+        <p:style>
+          <a:lnRef idx="1">
+            <a:schemeClr val="accent1"/>
+          </a:lnRef>
+          <a:fillRef idx="0">
+            <a:schemeClr val="accent1"/>
+          </a:fillRef>
+          <a:effectRef idx="0">
+            <a:schemeClr val="accent1"/>
+          </a:effectRef>
+          <a:fontRef idx="minor">
+            <a:schemeClr val="tx1"/>
+          </a:fontRef>
+        </p:style>
+      </p:cxnSp>
+      <p:pic>
+        <p:nvPicPr>
+          <p:cNvPr id="1024" name="Picture 2" descr="Gpu - Free computer icons">
+            <a:extLst>
+              <a:ext uri="{FF2B5EF4-FFF2-40B4-BE49-F238E27FC236}">
+                <a16:creationId xmlns:a16="http://schemas.microsoft.com/office/drawing/2014/main" id="{720321CC-3759-1DB6-FCD7-CF1E417DC114}"/>
+              </a:ext>
+            </a:extLst>
+          </p:cNvPr>
+          <p:cNvPicPr>
+            <a:picLocks noChangeAspect="1" noChangeArrowheads="1"/>
+          </p:cNvPicPr>
+          <p:nvPr/>
+        </p:nvPicPr>
+        <p:blipFill>
+          <a:blip r:embed="rId2">
+            <a:extLst>
+              <a:ext uri="{28A0092B-C50C-407E-A947-70E740481C1C}">
+                <a14:useLocalDpi xmlns:a14="http://schemas.microsoft.com/office/drawing/2010/main" val="0"/>
+              </a:ext>
+            </a:extLst>
+          </a:blip>
+          <a:srcRect/>
+          <a:stretch>
+            <a:fillRect/>
+          </a:stretch>
+        </p:blipFill>
+        <p:spPr bwMode="auto">
+          <a:xfrm>
+            <a:off x="9791515" y="5955153"/>
+            <a:ext cx="591168" cy="591168"/>
+          </a:xfrm>
+          <a:prstGeom prst="rect">
+            <a:avLst/>
+          </a:prstGeom>
+          <a:noFill/>
+          <a:extLst>
+            <a:ext uri="{909E8E84-426E-40DD-AFC4-6F175D3DCCD1}">
+              <a14:hiddenFill xmlns:a14="http://schemas.microsoft.com/office/drawing/2010/main">
+                <a:solidFill>
+                  <a:srgbClr val="FFFFFF"/>
+                </a:solidFill>
+              </a14:hiddenFill>
+            </a:ext>
+          </a:extLst>
+        </p:spPr>
+      </p:pic>
+      <p:sp>
+        <p:nvSpPr>
+          <p:cNvPr id="1025" name="Title 1024">
+            <a:extLst>
+              <a:ext uri="{FF2B5EF4-FFF2-40B4-BE49-F238E27FC236}">
+                <a16:creationId xmlns:a16="http://schemas.microsoft.com/office/drawing/2014/main" id="{D6F6158F-D78B-7FB3-5885-9E394282A4F9}"/>
+              </a:ext>
+            </a:extLst>
+          </p:cNvPr>
+          <p:cNvSpPr>
+            <a:spLocks noGrp="1"/>
+          </p:cNvSpPr>
+          <p:nvPr>
+            <p:ph type="title"/>
+          </p:nvPr>
+        </p:nvSpPr>
+        <p:spPr>
+          <a:xfrm>
+            <a:off x="115735" y="64032"/>
+            <a:ext cx="4615498" cy="476956"/>
+          </a:xfrm>
+        </p:spPr>
+        <p:txBody>
+          <a:bodyPr anchor="t">
+            <a:noAutofit/>
+          </a:bodyPr>
+          <a:lstStyle/>
+          <a:p>
+            <a:r>
+              <a:rPr lang="en-US" sz="4000" dirty="0"/>
+              <a:t>Priming Phase</a:t>
+            </a:r>
+          </a:p>
+        </p:txBody>
+      </p:sp>
+    </p:spTree>
+    <p:extLst>
+      <p:ext uri="{BB962C8B-B14F-4D97-AF65-F5344CB8AC3E}">
+        <p14:creationId xmlns:p14="http://schemas.microsoft.com/office/powerpoint/2010/main" val="467536827"/>
+      </p:ext>
+    </p:extLst>
+  </p:cSld>
+  <p:clrMapOvr>
+    <a:masterClrMapping/>
+  </p:clrMapOvr>
+</p:sld>
+</file>
+
+<file path=ppt/slides/slide2.xml><?xml version="1.0" encoding="utf-8"?>
+<p:sld xmlns:a="http://schemas.openxmlformats.org/drawingml/2006/main" xmlns:r="http://schemas.openxmlformats.org/officeDocument/2006/relationships" xmlns:p="http://schemas.openxmlformats.org/presentationml/2006/main">
+  <p:cSld>
+    <p:spTree>
+      <p:nvGrpSpPr>
+        <p:cNvPr id="1" name="">
+          <a:extLst>
+            <a:ext uri="{FF2B5EF4-FFF2-40B4-BE49-F238E27FC236}">
+              <a16:creationId xmlns:a16="http://schemas.microsoft.com/office/drawing/2014/main" id="{232DE0EE-A8BD-8F30-7418-87BB25146CDB}"/>
+            </a:ext>
+          </a:extLst>
+        </p:cNvPr>
+        <p:cNvGrpSpPr/>
+        <p:nvPr/>
+      </p:nvGrpSpPr>
+      <p:grpSpPr>
+        <a:xfrm>
+          <a:off x="0" y="0"/>
+          <a:ext cx="0" cy="0"/>
+          <a:chOff x="0" y="0"/>
+          <a:chExt cx="0" cy="0"/>
+        </a:xfrm>
+      </p:grpSpPr>
+      <p:sp>
+        <p:nvSpPr>
+          <p:cNvPr id="50" name="Rectangle 49">
+            <a:extLst>
+              <a:ext uri="{FF2B5EF4-FFF2-40B4-BE49-F238E27FC236}">
+                <a16:creationId xmlns:a16="http://schemas.microsoft.com/office/drawing/2014/main" id="{D620D2BF-387D-D4BF-5090-B9D7F5E1A177}"/>
               </a:ext>
             </a:extLst>
           </p:cNvPr>
@@ -6863,14 +7077,17 @@
         </p:nvSpPr>
         <p:spPr>
           <a:xfrm>
-            <a:off x="9706330" y="573017"/>
-            <a:ext cx="1947624" cy="779483"/>
+            <a:off x="4211972" y="5000371"/>
+            <a:ext cx="4028187" cy="1650802"/>
           </a:xfrm>
           <a:prstGeom prst="rect">
             <a:avLst/>
           </a:prstGeom>
           <a:solidFill>
-            <a:srgbClr val="7030A0"/>
+            <a:schemeClr val="accent1">
+              <a:lumMod val="40000"/>
+              <a:lumOff val="60000"/>
+            </a:schemeClr>
           </a:solidFill>
         </p:spPr>
         <p:style>
@@ -6890,46 +7107,914 @@
           </a:fontRef>
         </p:style>
         <p:txBody>
+          <a:bodyPr lIns="0" tIns="45720" rIns="0" bIns="0" rtlCol="0" anchor="b"/>
+          <a:lstStyle/>
+          <a:p>
+            <a:pPr algn="ctr"/>
+            <a:r>
+              <a:rPr lang="en-US" sz="900" b="1" dirty="0"/>
+              <a:t>🐳 Docker Container</a:t>
+            </a:r>
+          </a:p>
+          <a:p>
+            <a:pPr algn="ctr"/>
+            <a:r>
+              <a:rPr lang="en-US" sz="900" i="1" dirty="0"/>
+              <a:t>“ollama/ollama:latest”</a:t>
+            </a:r>
+          </a:p>
+          <a:p>
+            <a:pPr algn="ctr"/>
+            <a:endParaRPr lang="en-US" sz="200" i="1" dirty="0"/>
+          </a:p>
+        </p:txBody>
+      </p:sp>
+      <p:sp>
+        <p:nvSpPr>
+          <p:cNvPr id="51" name="Rectangle 50">
+            <a:extLst>
+              <a:ext uri="{FF2B5EF4-FFF2-40B4-BE49-F238E27FC236}">
+                <a16:creationId xmlns:a16="http://schemas.microsoft.com/office/drawing/2014/main" id="{E3B161CA-3951-5003-8932-A211335401FC}"/>
+              </a:ext>
+            </a:extLst>
+          </p:cNvPr>
+          <p:cNvSpPr/>
+          <p:nvPr/>
+        </p:nvSpPr>
+        <p:spPr>
+          <a:xfrm>
+            <a:off x="4271165" y="5000370"/>
+            <a:ext cx="3714012" cy="1313663"/>
+          </a:xfrm>
+          <a:prstGeom prst="rect">
+            <a:avLst/>
+          </a:prstGeom>
+          <a:solidFill>
+            <a:schemeClr val="accent2">
+              <a:lumMod val="60000"/>
+              <a:lumOff val="40000"/>
+            </a:schemeClr>
+          </a:solidFill>
+        </p:spPr>
+        <p:style>
+          <a:lnRef idx="2">
+            <a:schemeClr val="accent1">
+              <a:shade val="15000"/>
+            </a:schemeClr>
+          </a:lnRef>
+          <a:fillRef idx="1">
+            <a:schemeClr val="accent1"/>
+          </a:fillRef>
+          <a:effectRef idx="0">
+            <a:schemeClr val="accent1"/>
+          </a:effectRef>
+          <a:fontRef idx="minor">
+            <a:schemeClr val="lt1"/>
+          </a:fontRef>
+        </p:style>
+        <p:txBody>
+          <a:bodyPr lIns="0" tIns="0" rIns="0" bIns="0" rtlCol="0" anchor="b"/>
+          <a:lstStyle/>
+          <a:p>
+            <a:pPr algn="ctr"/>
+            <a:r>
+              <a:rPr lang="en-US" sz="1600" dirty="0"/>
+              <a:t>Ollama</a:t>
+            </a:r>
+          </a:p>
+        </p:txBody>
+      </p:sp>
+      <p:sp>
+        <p:nvSpPr>
+          <p:cNvPr id="52" name="Rectangle 51">
+            <a:extLst>
+              <a:ext uri="{FF2B5EF4-FFF2-40B4-BE49-F238E27FC236}">
+                <a16:creationId xmlns:a16="http://schemas.microsoft.com/office/drawing/2014/main" id="{562CBA80-95B2-D658-D869-139D92552C8F}"/>
+              </a:ext>
+            </a:extLst>
+          </p:cNvPr>
+          <p:cNvSpPr/>
+          <p:nvPr/>
+        </p:nvSpPr>
+        <p:spPr>
+          <a:xfrm>
+            <a:off x="5591241" y="5000369"/>
+            <a:ext cx="1020305" cy="1100081"/>
+          </a:xfrm>
+          <a:prstGeom prst="rect">
+            <a:avLst/>
+          </a:prstGeom>
+          <a:solidFill>
+            <a:schemeClr val="accent2">
+              <a:lumMod val="75000"/>
+            </a:schemeClr>
+          </a:solidFill>
+        </p:spPr>
+        <p:style>
+          <a:lnRef idx="2">
+            <a:schemeClr val="accent1">
+              <a:shade val="15000"/>
+            </a:schemeClr>
+          </a:lnRef>
+          <a:fillRef idx="1">
+            <a:schemeClr val="accent1"/>
+          </a:fillRef>
+          <a:effectRef idx="0">
+            <a:schemeClr val="accent1"/>
+          </a:effectRef>
+          <a:fontRef idx="minor">
+            <a:schemeClr val="lt1"/>
+          </a:fontRef>
+        </p:style>
+        <p:txBody>
           <a:bodyPr lIns="0" tIns="0" rIns="0" bIns="0" rtlCol="0" anchor="ctr"/>
           <a:lstStyle/>
           <a:p>
             <a:pPr algn="ctr"/>
             <a:r>
+              <a:rPr lang="en-US" sz="1200" b="1" dirty="0"/>
+              <a:t>Embedding Model</a:t>
+            </a:r>
+            <a:endParaRPr lang="en-US" sz="900" b="1" dirty="0"/>
+          </a:p>
+          <a:p>
+            <a:pPr algn="ctr"/>
+            <a:r>
+              <a:rPr lang="en-US" sz="900" dirty="0"/>
+              <a:t>📚 </a:t>
+            </a:r>
+            <a:r>
+              <a:rPr lang="en-US" sz="900" b="1" u="sng" dirty="0"/>
+              <a:t>nomic-embed-</a:t>
+            </a:r>
+          </a:p>
+          <a:p>
+            <a:pPr algn="ctr"/>
+            <a:r>
+              <a:rPr lang="en-US" sz="900" b="1" u="sng" dirty="0"/>
+              <a:t>text-v1.5</a:t>
+            </a:r>
+          </a:p>
+        </p:txBody>
+      </p:sp>
+      <p:sp>
+        <p:nvSpPr>
+          <p:cNvPr id="89" name="Rectangle 88">
+            <a:extLst>
+              <a:ext uri="{FF2B5EF4-FFF2-40B4-BE49-F238E27FC236}">
+                <a16:creationId xmlns:a16="http://schemas.microsoft.com/office/drawing/2014/main" id="{609F7108-FF93-609D-A945-2510E83DD8FF}"/>
+              </a:ext>
+            </a:extLst>
+          </p:cNvPr>
+          <p:cNvSpPr/>
+          <p:nvPr/>
+        </p:nvSpPr>
+        <p:spPr>
+          <a:xfrm>
+            <a:off x="6693641" y="5000367"/>
+            <a:ext cx="1222081" cy="1100083"/>
+          </a:xfrm>
+          <a:prstGeom prst="rect">
+            <a:avLst/>
+          </a:prstGeom>
+          <a:solidFill>
+            <a:schemeClr val="accent2">
+              <a:lumMod val="75000"/>
+            </a:schemeClr>
+          </a:solidFill>
+        </p:spPr>
+        <p:style>
+          <a:lnRef idx="2">
+            <a:schemeClr val="accent1">
+              <a:shade val="15000"/>
+            </a:schemeClr>
+          </a:lnRef>
+          <a:fillRef idx="1">
+            <a:schemeClr val="accent1"/>
+          </a:fillRef>
+          <a:effectRef idx="0">
+            <a:schemeClr val="accent1"/>
+          </a:effectRef>
+          <a:fontRef idx="minor">
+            <a:schemeClr val="lt1"/>
+          </a:fontRef>
+        </p:style>
+        <p:txBody>
+          <a:bodyPr lIns="0" tIns="0" rIns="0" bIns="0" rtlCol="0" anchor="ctr"/>
+          <a:lstStyle/>
+          <a:p>
+            <a:pPr algn="ctr"/>
+            <a:r>
+              <a:rPr lang="en-US" sz="1600" b="1" i="1" dirty="0"/>
+              <a:t>SQL Emitter</a:t>
+            </a:r>
+          </a:p>
+          <a:p>
+            <a:pPr algn="ctr"/>
+            <a:r>
+              <a:rPr lang="en-US" sz="800" b="1" i="1" dirty="0"/>
+              <a:t>(Local LLM)</a:t>
+            </a:r>
+          </a:p>
+          <a:p>
+            <a:pPr algn="ctr"/>
+            <a:endParaRPr lang="en-US" sz="800" b="1" i="1" dirty="0"/>
+          </a:p>
+          <a:p>
+            <a:pPr algn="ctr"/>
+            <a:r>
+              <a:rPr lang="en-US" sz="900" dirty="0"/>
+              <a:t>📚 </a:t>
+            </a:r>
+            <a:r>
+              <a:rPr lang="en-US" sz="900" b="1" u="sng" dirty="0"/>
+              <a:t>Qwen2.5-Coder:7b</a:t>
+            </a:r>
+          </a:p>
+        </p:txBody>
+      </p:sp>
+      <p:sp>
+        <p:nvSpPr>
+          <p:cNvPr id="2" name="Rectangle 1">
+            <a:extLst>
+              <a:ext uri="{FF2B5EF4-FFF2-40B4-BE49-F238E27FC236}">
+                <a16:creationId xmlns:a16="http://schemas.microsoft.com/office/drawing/2014/main" id="{81D6A0B9-4705-2CEA-1EC6-D1806A8968BE}"/>
+              </a:ext>
+            </a:extLst>
+          </p:cNvPr>
+          <p:cNvSpPr/>
+          <p:nvPr/>
+        </p:nvSpPr>
+        <p:spPr>
+          <a:xfrm>
+            <a:off x="7985177" y="5000371"/>
+            <a:ext cx="202062" cy="1313662"/>
+          </a:xfrm>
+          <a:prstGeom prst="rect">
+            <a:avLst/>
+          </a:prstGeom>
+          <a:solidFill>
+            <a:srgbClr val="B17ED8"/>
+          </a:solidFill>
+        </p:spPr>
+        <p:style>
+          <a:lnRef idx="2">
+            <a:schemeClr val="accent1">
+              <a:shade val="15000"/>
+            </a:schemeClr>
+          </a:lnRef>
+          <a:fillRef idx="1">
+            <a:schemeClr val="accent1"/>
+          </a:fillRef>
+          <a:effectRef idx="0">
+            <a:schemeClr val="accent1"/>
+          </a:effectRef>
+          <a:fontRef idx="minor">
+            <a:schemeClr val="lt1"/>
+          </a:fontRef>
+        </p:style>
+        <p:txBody>
+          <a:bodyPr vert="vert270" lIns="0" tIns="0" rIns="0" bIns="0" rtlCol="0" anchor="ctr"/>
+          <a:lstStyle/>
+          <a:p>
+            <a:pPr algn="ctr"/>
+            <a:r>
+              <a:rPr lang="en-US" sz="900" dirty="0"/>
+              <a:t>📚 httpx</a:t>
+            </a:r>
+          </a:p>
+        </p:txBody>
+      </p:sp>
+      <p:sp>
+        <p:nvSpPr>
+          <p:cNvPr id="3" name="Rectangle 2">
+            <a:extLst>
+              <a:ext uri="{FF2B5EF4-FFF2-40B4-BE49-F238E27FC236}">
+                <a16:creationId xmlns:a16="http://schemas.microsoft.com/office/drawing/2014/main" id="{2624562D-A1F3-CEF9-451E-331CC6461D6E}"/>
+              </a:ext>
+            </a:extLst>
+          </p:cNvPr>
+          <p:cNvSpPr/>
+          <p:nvPr/>
+        </p:nvSpPr>
+        <p:spPr>
+          <a:xfrm>
+            <a:off x="3114580" y="733345"/>
+            <a:ext cx="398031" cy="401369"/>
+          </a:xfrm>
+          <a:prstGeom prst="rect">
+            <a:avLst/>
+          </a:prstGeom>
+          <a:solidFill>
+            <a:schemeClr val="bg1">
+              <a:lumMod val="85000"/>
+            </a:schemeClr>
+          </a:solidFill>
+        </p:spPr>
+        <p:style>
+          <a:lnRef idx="2">
+            <a:schemeClr val="accent1">
+              <a:shade val="15000"/>
+            </a:schemeClr>
+          </a:lnRef>
+          <a:fillRef idx="1">
+            <a:schemeClr val="accent1"/>
+          </a:fillRef>
+          <a:effectRef idx="0">
+            <a:schemeClr val="accent1"/>
+          </a:effectRef>
+          <a:fontRef idx="minor">
+            <a:schemeClr val="lt1"/>
+          </a:fontRef>
+        </p:style>
+        <p:txBody>
+          <a:bodyPr lIns="0" tIns="45720" rIns="0" bIns="0" rtlCol="0" anchor="t"/>
+          <a:lstStyle/>
+          <a:p>
+            <a:pPr algn="ctr"/>
+            <a:r>
+              <a:rPr lang="en-US" sz="1100" b="1" dirty="0"/>
+              <a:t>Text Box</a:t>
+            </a:r>
+            <a:endParaRPr lang="en-US" sz="1200" dirty="0">
+              <a:solidFill>
+                <a:schemeClr val="tx1"/>
+              </a:solidFill>
+            </a:endParaRPr>
+          </a:p>
+        </p:txBody>
+      </p:sp>
+      <p:sp>
+        <p:nvSpPr>
+          <p:cNvPr id="5" name="Rectangle 4">
+            <a:extLst>
+              <a:ext uri="{FF2B5EF4-FFF2-40B4-BE49-F238E27FC236}">
+                <a16:creationId xmlns:a16="http://schemas.microsoft.com/office/drawing/2014/main" id="{377B6516-346C-8990-ACB5-79355B120195}"/>
+              </a:ext>
+            </a:extLst>
+          </p:cNvPr>
+          <p:cNvSpPr/>
+          <p:nvPr/>
+        </p:nvSpPr>
+        <p:spPr>
+          <a:xfrm>
+            <a:off x="1791433" y="733345"/>
+            <a:ext cx="1116053" cy="401369"/>
+          </a:xfrm>
+          <a:prstGeom prst="rect">
+            <a:avLst/>
+          </a:prstGeom>
+          <a:solidFill>
+            <a:schemeClr val="bg1">
+              <a:lumMod val="85000"/>
+            </a:schemeClr>
+          </a:solidFill>
+        </p:spPr>
+        <p:style>
+          <a:lnRef idx="2">
+            <a:schemeClr val="accent1">
+              <a:shade val="15000"/>
+            </a:schemeClr>
+          </a:lnRef>
+          <a:fillRef idx="1">
+            <a:schemeClr val="accent1"/>
+          </a:fillRef>
+          <a:effectRef idx="0">
+            <a:schemeClr val="accent1"/>
+          </a:effectRef>
+          <a:fontRef idx="minor">
+            <a:schemeClr val="lt1"/>
+          </a:fontRef>
+        </p:style>
+        <p:txBody>
+          <a:bodyPr lIns="0" tIns="45720" rIns="0" bIns="0" rtlCol="0" anchor="t"/>
+          <a:lstStyle/>
+          <a:p>
+            <a:pPr algn="ctr"/>
+            <a:r>
+              <a:rPr lang="en-US" sz="1100" b="1" dirty="0">
+                <a:solidFill>
+                  <a:schemeClr val="tx1"/>
+                </a:solidFill>
+              </a:rPr>
+              <a:t>User Input </a:t>
+            </a:r>
+          </a:p>
+          <a:p>
+            <a:pPr algn="ctr"/>
+            <a:r>
+              <a:rPr lang="en-US" sz="800" b="1" dirty="0">
+                <a:solidFill>
+                  <a:schemeClr val="tx1"/>
+                </a:solidFill>
+              </a:rPr>
+              <a:t>(Browser)</a:t>
+            </a:r>
+          </a:p>
+        </p:txBody>
+      </p:sp>
+      <p:sp>
+        <p:nvSpPr>
+          <p:cNvPr id="6" name="Rectangle 5">
+            <a:extLst>
+              <a:ext uri="{FF2B5EF4-FFF2-40B4-BE49-F238E27FC236}">
+                <a16:creationId xmlns:a16="http://schemas.microsoft.com/office/drawing/2014/main" id="{FDB002BE-836F-8408-1F21-4AD91EC21A2B}"/>
+              </a:ext>
+            </a:extLst>
+          </p:cNvPr>
+          <p:cNvSpPr/>
+          <p:nvPr/>
+        </p:nvSpPr>
+        <p:spPr>
+          <a:xfrm>
+            <a:off x="1791433" y="1926795"/>
+            <a:ext cx="1116053" cy="401369"/>
+          </a:xfrm>
+          <a:prstGeom prst="rect">
+            <a:avLst/>
+          </a:prstGeom>
+          <a:solidFill>
+            <a:schemeClr val="bg1">
+              <a:lumMod val="85000"/>
+            </a:schemeClr>
+          </a:solidFill>
+        </p:spPr>
+        <p:style>
+          <a:lnRef idx="2">
+            <a:schemeClr val="accent1">
+              <a:shade val="15000"/>
+            </a:schemeClr>
+          </a:lnRef>
+          <a:fillRef idx="1">
+            <a:schemeClr val="accent1"/>
+          </a:fillRef>
+          <a:effectRef idx="0">
+            <a:schemeClr val="accent1"/>
+          </a:effectRef>
+          <a:fontRef idx="minor">
+            <a:schemeClr val="lt1"/>
+          </a:fontRef>
+        </p:style>
+        <p:txBody>
+          <a:bodyPr lIns="0" tIns="45720" rIns="0" bIns="0" rtlCol="0" anchor="t"/>
+          <a:lstStyle/>
+          <a:p>
+            <a:pPr algn="ctr"/>
+            <a:r>
+              <a:rPr lang="en-US" sz="1100" b="1" dirty="0">
+                <a:solidFill>
+                  <a:schemeClr val="tx1"/>
+                </a:solidFill>
+              </a:rPr>
+              <a:t>User Display </a:t>
+            </a:r>
+          </a:p>
+          <a:p>
+            <a:pPr algn="ctr"/>
+            <a:r>
+              <a:rPr lang="en-US" sz="800" b="1" dirty="0">
+                <a:solidFill>
+                  <a:schemeClr val="tx1"/>
+                </a:solidFill>
+              </a:rPr>
+              <a:t>(Browser)</a:t>
+            </a:r>
+          </a:p>
+        </p:txBody>
+      </p:sp>
+      <p:sp>
+        <p:nvSpPr>
+          <p:cNvPr id="7" name="Rectangle 6">
+            <a:extLst>
+              <a:ext uri="{FF2B5EF4-FFF2-40B4-BE49-F238E27FC236}">
+                <a16:creationId xmlns:a16="http://schemas.microsoft.com/office/drawing/2014/main" id="{20F24B60-2905-0E09-E718-C84C2BFDB1B3}"/>
+              </a:ext>
+            </a:extLst>
+          </p:cNvPr>
+          <p:cNvSpPr/>
+          <p:nvPr/>
+        </p:nvSpPr>
+        <p:spPr>
+          <a:xfrm>
+            <a:off x="3737717" y="385973"/>
+            <a:ext cx="122599" cy="2248872"/>
+          </a:xfrm>
+          <a:prstGeom prst="rect">
+            <a:avLst/>
+          </a:prstGeom>
+          <a:solidFill>
+            <a:srgbClr val="7030A0"/>
+          </a:solidFill>
+        </p:spPr>
+        <p:style>
+          <a:lnRef idx="2">
+            <a:schemeClr val="accent1">
+              <a:shade val="15000"/>
+            </a:schemeClr>
+          </a:lnRef>
+          <a:fillRef idx="1">
+            <a:schemeClr val="accent1"/>
+          </a:fillRef>
+          <a:effectRef idx="0">
+            <a:schemeClr val="accent1"/>
+          </a:effectRef>
+          <a:fontRef idx="minor">
+            <a:schemeClr val="lt1"/>
+          </a:fontRef>
+        </p:style>
+        <p:txBody>
+          <a:bodyPr lIns="0" tIns="0" rIns="0" bIns="0" rtlCol="0" anchor="ctr"/>
+          <a:lstStyle/>
+          <a:p>
+            <a:pPr algn="ctr"/>
+            <a:r>
+              <a:rPr lang="en-US" sz="1200" dirty="0"/>
+              <a:t>HTTP</a:t>
+            </a:r>
+            <a:endParaRPr lang="en-US" sz="500" dirty="0"/>
+          </a:p>
+        </p:txBody>
+      </p:sp>
+      <p:sp>
+        <p:nvSpPr>
+          <p:cNvPr id="8" name="Rectangle 7">
+            <a:extLst>
+              <a:ext uri="{FF2B5EF4-FFF2-40B4-BE49-F238E27FC236}">
+                <a16:creationId xmlns:a16="http://schemas.microsoft.com/office/drawing/2014/main" id="{5F6E5B91-C632-7638-5DE6-41D98F5FAD3D}"/>
+              </a:ext>
+            </a:extLst>
+          </p:cNvPr>
+          <p:cNvSpPr/>
+          <p:nvPr/>
+        </p:nvSpPr>
+        <p:spPr>
+          <a:xfrm>
+            <a:off x="4215226" y="709327"/>
+            <a:ext cx="1022504" cy="1650807"/>
+          </a:xfrm>
+          <a:prstGeom prst="rect">
+            <a:avLst/>
+          </a:prstGeom>
+          <a:solidFill>
+            <a:srgbClr val="7030A0"/>
+          </a:solidFill>
+        </p:spPr>
+        <p:style>
+          <a:lnRef idx="2">
+            <a:schemeClr val="accent1">
+              <a:shade val="15000"/>
+            </a:schemeClr>
+          </a:lnRef>
+          <a:fillRef idx="1">
+            <a:schemeClr val="accent1"/>
+          </a:fillRef>
+          <a:effectRef idx="0">
+            <a:schemeClr val="accent1"/>
+          </a:effectRef>
+          <a:fontRef idx="minor">
+            <a:schemeClr val="lt1"/>
+          </a:fontRef>
+        </p:style>
+        <p:txBody>
+          <a:bodyPr lIns="0" tIns="0" rIns="0" bIns="0" rtlCol="0" anchor="ctr"/>
+          <a:lstStyle/>
+          <a:p>
+            <a:pPr algn="ctr"/>
+            <a:r>
+              <a:rPr lang="en-US" sz="1600" dirty="0"/>
+              <a:t>Web Display</a:t>
+            </a:r>
+            <a:endParaRPr lang="en-US" sz="1400" dirty="0"/>
+          </a:p>
+          <a:p>
+            <a:pPr algn="ctr"/>
+            <a:r>
+              <a:rPr lang="en-US" sz="1100" u="sng" dirty="0"/>
+              <a:t>app/web</a:t>
+            </a:r>
+          </a:p>
+          <a:p>
+            <a:pPr algn="ctr"/>
+            <a:endParaRPr lang="en-US" sz="800" dirty="0"/>
+          </a:p>
+          <a:p>
+            <a:pPr algn="ctr"/>
+            <a:r>
+              <a:rPr lang="en-US" sz="800" dirty="0"/>
+              <a:t>Handles </a:t>
+            </a:r>
+          </a:p>
+          <a:p>
+            <a:pPr algn="ctr"/>
+            <a:r>
+              <a:rPr lang="en-US" sz="800" dirty="0"/>
+              <a:t>display for user interactions</a:t>
+            </a:r>
+          </a:p>
+        </p:txBody>
+      </p:sp>
+      <p:sp>
+        <p:nvSpPr>
+          <p:cNvPr id="9" name="Rectangle 8">
+            <a:extLst>
+              <a:ext uri="{FF2B5EF4-FFF2-40B4-BE49-F238E27FC236}">
+                <a16:creationId xmlns:a16="http://schemas.microsoft.com/office/drawing/2014/main" id="{6337990E-CA5C-5E9E-B92E-0D2BC0C31F0B}"/>
+              </a:ext>
+            </a:extLst>
+          </p:cNvPr>
+          <p:cNvSpPr/>
+          <p:nvPr/>
+        </p:nvSpPr>
+        <p:spPr>
+          <a:xfrm>
+            <a:off x="4211972" y="2662037"/>
+            <a:ext cx="1025758" cy="1650807"/>
+          </a:xfrm>
+          <a:prstGeom prst="rect">
+            <a:avLst/>
+          </a:prstGeom>
+          <a:solidFill>
+            <a:srgbClr val="7030A0"/>
+          </a:solidFill>
+        </p:spPr>
+        <p:style>
+          <a:lnRef idx="2">
+            <a:schemeClr val="accent1">
+              <a:shade val="15000"/>
+            </a:schemeClr>
+          </a:lnRef>
+          <a:fillRef idx="1">
+            <a:schemeClr val="accent1"/>
+          </a:fillRef>
+          <a:effectRef idx="0">
+            <a:schemeClr val="accent1"/>
+          </a:effectRef>
+          <a:fontRef idx="minor">
+            <a:schemeClr val="lt1"/>
+          </a:fontRef>
+        </p:style>
+        <p:txBody>
+          <a:bodyPr lIns="0" tIns="0" rIns="0" bIns="0" rtlCol="0" anchor="ctr"/>
+          <a:lstStyle/>
+          <a:p>
+            <a:pPr algn="ctr"/>
+            <a:r>
               <a:rPr lang="en-US" dirty="0"/>
-              <a:t>Query Handler</a:t>
-            </a:r>
-          </a:p>
-          <a:p>
-            <a:pPr algn="ctr"/>
-            <a:endParaRPr lang="en-US" sz="100" dirty="0"/>
+              <a:t>Query Parser</a:t>
+            </a:r>
+            <a:endParaRPr lang="en-US" sz="1100" dirty="0"/>
+          </a:p>
+          <a:p>
+            <a:pPr algn="ctr"/>
+            <a:r>
+              <a:rPr lang="en-US" sz="1100" u="sng" dirty="0"/>
+              <a:t>app/producer</a:t>
+            </a:r>
+          </a:p>
+          <a:p>
+            <a:pPr algn="ctr"/>
+            <a:endParaRPr lang="en-US" sz="800" dirty="0"/>
           </a:p>
           <a:p>
             <a:pPr algn="ctr"/>
             <a:r>
               <a:rPr lang="en-US" sz="800" dirty="0"/>
-              <a:t>= Receives queries from user, determines relevant Concepts, then uses Local LLM to get the data from PostgreSQL (read-only guard)</a:t>
+              <a:t>Converts user string to </a:t>
+            </a:r>
+            <a:r>
+              <a:rPr lang="en-US" sz="800" dirty="0">
+                <a:solidFill>
+                  <a:srgbClr val="B17ED8"/>
+                </a:solidFill>
+                <a:latin typeface="Adobe Gothic Std B" panose="020B0800000000000000" pitchFamily="34" charset="-128"/>
+                <a:ea typeface="Adobe Gothic Std B" panose="020B0800000000000000" pitchFamily="34" charset="-128"/>
+              </a:rPr>
+              <a:t>Query</a:t>
+            </a:r>
+            <a:r>
+              <a:rPr lang="en-US" sz="800" dirty="0"/>
+              <a:t> object </a:t>
+            </a:r>
+          </a:p>
+          <a:p>
+            <a:pPr algn="ctr"/>
+            <a:r>
+              <a:rPr lang="en-US" sz="800" dirty="0"/>
+              <a:t>(via Qwen)</a:t>
+            </a:r>
+          </a:p>
+        </p:txBody>
+      </p:sp>
+      <p:sp>
+        <p:nvSpPr>
+          <p:cNvPr id="11" name="Rectangle 10">
+            <a:extLst>
+              <a:ext uri="{FF2B5EF4-FFF2-40B4-BE49-F238E27FC236}">
+                <a16:creationId xmlns:a16="http://schemas.microsoft.com/office/drawing/2014/main" id="{FD350345-C206-49FB-1B55-4BFF02E6ED8D}"/>
+              </a:ext>
+            </a:extLst>
+          </p:cNvPr>
+          <p:cNvSpPr/>
+          <p:nvPr/>
+        </p:nvSpPr>
+        <p:spPr>
+          <a:xfrm>
+            <a:off x="5983906" y="2662037"/>
+            <a:ext cx="1025758" cy="1650807"/>
+          </a:xfrm>
+          <a:prstGeom prst="rect">
+            <a:avLst/>
+          </a:prstGeom>
+          <a:solidFill>
+            <a:srgbClr val="7030A0"/>
+          </a:solidFill>
+        </p:spPr>
+        <p:style>
+          <a:lnRef idx="2">
+            <a:schemeClr val="accent1">
+              <a:shade val="15000"/>
+            </a:schemeClr>
+          </a:lnRef>
+          <a:fillRef idx="1">
+            <a:schemeClr val="accent1"/>
+          </a:fillRef>
+          <a:effectRef idx="0">
+            <a:schemeClr val="accent1"/>
+          </a:effectRef>
+          <a:fontRef idx="minor">
+            <a:schemeClr val="lt1"/>
+          </a:fontRef>
+        </p:style>
+        <p:txBody>
+          <a:bodyPr lIns="0" tIns="0" rIns="0" bIns="0" rtlCol="0" anchor="ctr"/>
+          <a:lstStyle/>
+          <a:p>
+            <a:pPr algn="ctr"/>
+            <a:r>
+              <a:rPr lang="en-US" dirty="0"/>
+              <a:t>Query Mapper</a:t>
+            </a:r>
+            <a:endParaRPr lang="en-US" sz="1100" dirty="0"/>
+          </a:p>
+          <a:p>
+            <a:pPr algn="ctr"/>
+            <a:r>
+              <a:rPr lang="en-US" sz="1100" u="sng" dirty="0"/>
+              <a:t>app/semantic</a:t>
+            </a:r>
+          </a:p>
+          <a:p>
+            <a:pPr algn="ctr"/>
+            <a:endParaRPr lang="en-US" sz="800" dirty="0"/>
+          </a:p>
+          <a:p>
+            <a:pPr algn="ctr"/>
+            <a:r>
+              <a:rPr lang="en-US" sz="800" dirty="0"/>
+              <a:t>Does mapping from </a:t>
+            </a:r>
+            <a:r>
+              <a:rPr lang="en-US" sz="800" dirty="0">
+                <a:solidFill>
+                  <a:srgbClr val="B17ED8"/>
+                </a:solidFill>
+                <a:latin typeface="Adobe Gothic Std B" panose="020B0800000000000000" pitchFamily="34" charset="-128"/>
+                <a:ea typeface="Adobe Gothic Std B" panose="020B0800000000000000" pitchFamily="34" charset="-128"/>
+              </a:rPr>
+              <a:t>Query</a:t>
+            </a:r>
+            <a:r>
+              <a:rPr lang="en-US" sz="800" dirty="0"/>
+              <a:t> into a </a:t>
+            </a:r>
+          </a:p>
+          <a:p>
+            <a:pPr algn="ctr"/>
+            <a:r>
+              <a:rPr lang="en-US" sz="800" dirty="0">
+                <a:solidFill>
+                  <a:srgbClr val="B17ED8"/>
+                </a:solidFill>
+                <a:latin typeface="Adobe Gothic Std B" panose="020B0800000000000000" pitchFamily="34" charset="-128"/>
+                <a:ea typeface="Adobe Gothic Std B" panose="020B0800000000000000" pitchFamily="34" charset="-128"/>
+              </a:rPr>
+              <a:t>QueryPlan </a:t>
+            </a:r>
+          </a:p>
+          <a:p>
+            <a:pPr algn="ctr"/>
+            <a:r>
+              <a:rPr lang="en-US" sz="800" dirty="0"/>
+              <a:t>(normalizes request to what is retrievable in the database)</a:t>
+            </a:r>
+          </a:p>
+        </p:txBody>
+      </p:sp>
+      <p:sp>
+        <p:nvSpPr>
+          <p:cNvPr id="13" name="Rectangle 12">
+            <a:extLst>
+              <a:ext uri="{FF2B5EF4-FFF2-40B4-BE49-F238E27FC236}">
+                <a16:creationId xmlns:a16="http://schemas.microsoft.com/office/drawing/2014/main" id="{59DE70CD-39A9-A20F-7E9F-7837F6D26DB9}"/>
+              </a:ext>
+            </a:extLst>
+          </p:cNvPr>
+          <p:cNvSpPr/>
+          <p:nvPr/>
+        </p:nvSpPr>
+        <p:spPr>
+          <a:xfrm>
+            <a:off x="7310810" y="2662037"/>
+            <a:ext cx="929349" cy="1650807"/>
+          </a:xfrm>
+          <a:prstGeom prst="rect">
+            <a:avLst/>
+          </a:prstGeom>
+          <a:solidFill>
+            <a:srgbClr val="7030A0"/>
+          </a:solidFill>
+        </p:spPr>
+        <p:style>
+          <a:lnRef idx="2">
+            <a:schemeClr val="accent1">
+              <a:shade val="15000"/>
+            </a:schemeClr>
+          </a:lnRef>
+          <a:fillRef idx="1">
+            <a:schemeClr val="accent1"/>
+          </a:fillRef>
+          <a:effectRef idx="0">
+            <a:schemeClr val="accent1"/>
+          </a:effectRef>
+          <a:fontRef idx="minor">
+            <a:schemeClr val="lt1"/>
+          </a:fontRef>
+        </p:style>
+        <p:txBody>
+          <a:bodyPr lIns="0" tIns="0" rIns="0" bIns="0" rtlCol="0" anchor="ctr"/>
+          <a:lstStyle/>
+          <a:p>
+            <a:pPr algn="ctr"/>
+            <a:r>
+              <a:rPr lang="en-US" sz="1600" dirty="0"/>
+              <a:t>Executor</a:t>
+            </a:r>
+            <a:endParaRPr lang="en-US" sz="1400" dirty="0"/>
+          </a:p>
+          <a:p>
+            <a:pPr algn="ctr"/>
+            <a:r>
+              <a:rPr lang="en-US" sz="1100" u="sng" dirty="0"/>
+              <a:t>app/retrieval</a:t>
+            </a:r>
+          </a:p>
+          <a:p>
+            <a:pPr algn="ctr"/>
+            <a:endParaRPr lang="en-US" sz="800" dirty="0"/>
+          </a:p>
+          <a:p>
+            <a:pPr algn="ctr"/>
+            <a:r>
+              <a:rPr lang="en-US" sz="800" dirty="0"/>
+              <a:t>Generates SQL to execute </a:t>
+            </a:r>
+            <a:r>
+              <a:rPr lang="en-US" sz="800" dirty="0">
+                <a:solidFill>
+                  <a:srgbClr val="B17ED8"/>
+                </a:solidFill>
+                <a:latin typeface="Adobe Gothic Std B" panose="020B0800000000000000" pitchFamily="34" charset="-128"/>
+                <a:ea typeface="Adobe Gothic Std B" panose="020B0800000000000000" pitchFamily="34" charset="-128"/>
+              </a:rPr>
+              <a:t>QueryPlan</a:t>
+            </a:r>
+            <a:r>
+              <a:rPr lang="en-US" sz="800" dirty="0"/>
+              <a:t> (via Qwen), sanitizes then executes SQL</a:t>
             </a:r>
           </a:p>
         </p:txBody>
       </p:sp>
       <p:cxnSp>
         <p:nvCxnSpPr>
-          <p:cNvPr id="100" name="Straight Arrow Connector 99">
-            <a:extLst>
-              <a:ext uri="{FF2B5EF4-FFF2-40B4-BE49-F238E27FC236}">
-                <a16:creationId xmlns:a16="http://schemas.microsoft.com/office/drawing/2014/main" id="{048236B6-BEC2-3063-49AB-C4D8F7E5E371}"/>
+          <p:cNvPr id="14" name="Straight Arrow Connector 13">
+            <a:extLst>
+              <a:ext uri="{FF2B5EF4-FFF2-40B4-BE49-F238E27FC236}">
+                <a16:creationId xmlns:a16="http://schemas.microsoft.com/office/drawing/2014/main" id="{C823C645-2515-192B-C854-507A34F34D39}"/>
               </a:ext>
             </a:extLst>
           </p:cNvPr>
           <p:cNvCxnSpPr>
             <a:cxnSpLocks/>
+            <a:stCxn id="3" idx="1"/>
+            <a:endCxn id="5" idx="3"/>
           </p:cNvCxnSpPr>
           <p:nvPr/>
         </p:nvCxnSpPr>
         <p:spPr>
-          <a:xfrm>
-            <a:off x="9756433" y="4336912"/>
-            <a:ext cx="0" cy="547973"/>
+          <a:xfrm flipH="1">
+            <a:off x="2907486" y="934030"/>
+            <a:ext cx="207094" cy="0"/>
           </a:xfrm>
           <a:prstGeom prst="straightConnector1">
             <a:avLst/>
@@ -6938,7 +8023,8 @@
             <a:solidFill>
               <a:schemeClr val="tx1"/>
             </a:solidFill>
-            <a:tailEnd type="arrow"/>
+            <a:headEnd type="arrow"/>
+            <a:tailEnd type="none"/>
           </a:ln>
         </p:spPr>
         <p:style>
@@ -6958,515 +8044,23 @@
       </p:cxnSp>
       <p:cxnSp>
         <p:nvCxnSpPr>
-          <p:cNvPr id="103" name="Straight Arrow Connector 102">
-            <a:extLst>
-              <a:ext uri="{FF2B5EF4-FFF2-40B4-BE49-F238E27FC236}">
-                <a16:creationId xmlns:a16="http://schemas.microsoft.com/office/drawing/2014/main" id="{11A63202-9707-9FE3-CE76-F449C5D46B48}"/>
+          <p:cNvPr id="18" name="Straight Arrow Connector 17">
+            <a:extLst>
+              <a:ext uri="{FF2B5EF4-FFF2-40B4-BE49-F238E27FC236}">
+                <a16:creationId xmlns:a16="http://schemas.microsoft.com/office/drawing/2014/main" id="{289F1476-8289-F0DD-9B6E-4A04F3B111E0}"/>
               </a:ext>
             </a:extLst>
           </p:cNvPr>
           <p:cNvCxnSpPr>
             <a:cxnSpLocks/>
-            <a:endCxn id="52" idx="3"/>
+            <a:endCxn id="3" idx="3"/>
           </p:cNvCxnSpPr>
           <p:nvPr/>
         </p:nvCxnSpPr>
         <p:spPr>
           <a:xfrm flipH="1">
-            <a:off x="8056871" y="5100698"/>
-            <a:ext cx="1254471" cy="0"/>
-          </a:xfrm>
-          <a:prstGeom prst="straightConnector1">
-            <a:avLst/>
-          </a:prstGeom>
-          <a:ln w="12700">
-            <a:solidFill>
-              <a:schemeClr val="tx1"/>
-            </a:solidFill>
-            <a:headEnd type="arrow"/>
-            <a:tailEnd type="arrow"/>
-          </a:ln>
-        </p:spPr>
-        <p:style>
-          <a:lnRef idx="1">
-            <a:schemeClr val="accent1"/>
-          </a:lnRef>
-          <a:fillRef idx="0">
-            <a:schemeClr val="accent1"/>
-          </a:fillRef>
-          <a:effectRef idx="0">
-            <a:schemeClr val="accent1"/>
-          </a:effectRef>
-          <a:fontRef idx="minor">
-            <a:schemeClr val="tx1"/>
-          </a:fontRef>
-        </p:style>
-      </p:cxnSp>
-      <p:sp>
-        <p:nvSpPr>
-          <p:cNvPr id="131" name="Flowchart: Off-page Connector 130">
-            <a:extLst>
-              <a:ext uri="{FF2B5EF4-FFF2-40B4-BE49-F238E27FC236}">
-                <a16:creationId xmlns:a16="http://schemas.microsoft.com/office/drawing/2014/main" id="{8DB5FFE1-B20F-BC4A-F98A-1DB0CDA11B3B}"/>
-              </a:ext>
-            </a:extLst>
-          </p:cNvPr>
-          <p:cNvSpPr/>
-          <p:nvPr/>
-        </p:nvSpPr>
-        <p:spPr>
-          <a:xfrm rot="16200000">
-            <a:off x="2209722" y="4781767"/>
-            <a:ext cx="186884" cy="240280"/>
-          </a:xfrm>
-          <a:prstGeom prst="flowChartOffpageConnector">
-            <a:avLst/>
-          </a:prstGeom>
-          <a:solidFill>
-            <a:schemeClr val="accent6">
-              <a:lumMod val="75000"/>
-            </a:schemeClr>
-          </a:solidFill>
-        </p:spPr>
-        <p:style>
-          <a:lnRef idx="2">
-            <a:schemeClr val="accent1">
-              <a:shade val="15000"/>
-            </a:schemeClr>
-          </a:lnRef>
-          <a:fillRef idx="1">
-            <a:schemeClr val="accent1"/>
-          </a:fillRef>
-          <a:effectRef idx="0">
-            <a:schemeClr val="accent1"/>
-          </a:effectRef>
-          <a:fontRef idx="minor">
-            <a:schemeClr val="lt1"/>
-          </a:fontRef>
-        </p:style>
-        <p:txBody>
-          <a:bodyPr vert="vert" rtlCol="0" anchor="ctr"/>
-          <a:lstStyle/>
-          <a:p>
-            <a:pPr algn="ctr"/>
-            <a:r>
-              <a:rPr lang="en-US" sz="1400" b="1" dirty="0"/>
-              <a:t>8</a:t>
-            </a:r>
-          </a:p>
-        </p:txBody>
-      </p:sp>
-      <p:sp>
-        <p:nvSpPr>
-          <p:cNvPr id="137" name="Rectangle 136">
-            <a:extLst>
-              <a:ext uri="{FF2B5EF4-FFF2-40B4-BE49-F238E27FC236}">
-                <a16:creationId xmlns:a16="http://schemas.microsoft.com/office/drawing/2014/main" id="{C12A4E2B-6096-150E-DA86-68333E328721}"/>
-              </a:ext>
-            </a:extLst>
-          </p:cNvPr>
-          <p:cNvSpPr/>
-          <p:nvPr/>
-        </p:nvSpPr>
-        <p:spPr>
-          <a:xfrm>
-            <a:off x="9311342" y="4884884"/>
-            <a:ext cx="2215438" cy="1195545"/>
-          </a:xfrm>
-          <a:prstGeom prst="rect">
-            <a:avLst/>
-          </a:prstGeom>
-          <a:solidFill>
-            <a:srgbClr val="7030A0"/>
-          </a:solidFill>
-        </p:spPr>
-        <p:style>
-          <a:lnRef idx="2">
-            <a:schemeClr val="accent1">
-              <a:shade val="15000"/>
-            </a:schemeClr>
-          </a:lnRef>
-          <a:fillRef idx="1">
-            <a:schemeClr val="accent1"/>
-          </a:fillRef>
-          <a:effectRef idx="0">
-            <a:schemeClr val="accent1"/>
-          </a:effectRef>
-          <a:fontRef idx="minor">
-            <a:schemeClr val="lt1"/>
-          </a:fontRef>
-        </p:style>
-        <p:txBody>
-          <a:bodyPr lIns="0" tIns="0" rIns="0" bIns="0" rtlCol="0" anchor="ctr"/>
-          <a:lstStyle/>
-          <a:p>
-            <a:pPr algn="ctr"/>
-            <a:r>
-              <a:rPr lang="en-US" sz="1050" b="1" dirty="0"/>
-              <a:t>Query Mapper</a:t>
-            </a:r>
-          </a:p>
-          <a:p>
-            <a:pPr algn="ctr"/>
-            <a:endParaRPr lang="en-US" sz="300" dirty="0"/>
-          </a:p>
-          <a:p>
-            <a:pPr algn="ctr"/>
-            <a:r>
-              <a:rPr lang="en-US" sz="900" dirty="0"/>
-              <a:t>Uses arcane SEC-specific knowledge to determine Concepts being asked about </a:t>
-            </a:r>
-          </a:p>
-          <a:p>
-            <a:pPr algn="ctr"/>
-            <a:r>
-              <a:rPr lang="en-US" sz="900" dirty="0"/>
-              <a:t>(via alias lookups, cosine distances, etc…)</a:t>
-            </a:r>
-          </a:p>
-          <a:p>
-            <a:pPr algn="ctr"/>
-            <a:endParaRPr lang="en-US" sz="900" dirty="0"/>
-          </a:p>
-          <a:p>
-            <a:pPr algn="ctr"/>
-            <a:r>
-              <a:rPr lang="en-US" sz="900" dirty="0"/>
-              <a:t>Produces a Query Plan for the local LLM to write a matching SQL query.</a:t>
-            </a:r>
-          </a:p>
-          <a:p>
-            <a:pPr algn="ctr"/>
-            <a:endParaRPr lang="en-US" sz="500" dirty="0"/>
-          </a:p>
-        </p:txBody>
-      </p:sp>
-      <p:cxnSp>
-        <p:nvCxnSpPr>
-          <p:cNvPr id="138" name="Straight Arrow Connector 137">
-            <a:extLst>
-              <a:ext uri="{FF2B5EF4-FFF2-40B4-BE49-F238E27FC236}">
-                <a16:creationId xmlns:a16="http://schemas.microsoft.com/office/drawing/2014/main" id="{218F14AF-9931-3060-84FB-55E3AD301B67}"/>
-              </a:ext>
-            </a:extLst>
-          </p:cNvPr>
-          <p:cNvCxnSpPr>
-            <a:cxnSpLocks/>
-          </p:cNvCxnSpPr>
-          <p:nvPr/>
-        </p:nvCxnSpPr>
-        <p:spPr>
-          <a:xfrm flipH="1">
-            <a:off x="8056871" y="5492584"/>
-            <a:ext cx="1254471" cy="0"/>
-          </a:xfrm>
-          <a:prstGeom prst="straightConnector1">
-            <a:avLst/>
-          </a:prstGeom>
-          <a:ln w="12700">
-            <a:solidFill>
-              <a:schemeClr val="tx1"/>
-            </a:solidFill>
-            <a:headEnd type="none"/>
-            <a:tailEnd type="arrow"/>
-          </a:ln>
-        </p:spPr>
-        <p:style>
-          <a:lnRef idx="1">
-            <a:schemeClr val="accent1"/>
-          </a:lnRef>
-          <a:fillRef idx="0">
-            <a:schemeClr val="accent1"/>
-          </a:fillRef>
-          <a:effectRef idx="0">
-            <a:schemeClr val="accent1"/>
-          </a:effectRef>
-          <a:fontRef idx="minor">
-            <a:schemeClr val="tx1"/>
-          </a:fontRef>
-        </p:style>
-      </p:cxnSp>
-      <p:sp>
-        <p:nvSpPr>
-          <p:cNvPr id="140" name="Rectangle 139">
-            <a:extLst>
-              <a:ext uri="{FF2B5EF4-FFF2-40B4-BE49-F238E27FC236}">
-                <a16:creationId xmlns:a16="http://schemas.microsoft.com/office/drawing/2014/main" id="{EFB83094-B4D6-F6AB-F052-7F3270A99A6B}"/>
-              </a:ext>
-            </a:extLst>
-          </p:cNvPr>
-          <p:cNvSpPr/>
-          <p:nvPr/>
-        </p:nvSpPr>
-        <p:spPr>
-          <a:xfrm>
-            <a:off x="9391751" y="4411928"/>
-            <a:ext cx="719593" cy="304891"/>
-          </a:xfrm>
-          <a:prstGeom prst="rect">
-            <a:avLst/>
-          </a:prstGeom>
-          <a:solidFill>
-            <a:srgbClr val="B17ED8"/>
-          </a:solidFill>
-        </p:spPr>
-        <p:style>
-          <a:lnRef idx="2">
-            <a:schemeClr val="accent1">
-              <a:shade val="15000"/>
-            </a:schemeClr>
-          </a:lnRef>
-          <a:fillRef idx="1">
-            <a:schemeClr val="accent1"/>
-          </a:fillRef>
-          <a:effectRef idx="0">
-            <a:schemeClr val="accent1"/>
-          </a:effectRef>
-          <a:fontRef idx="minor">
-            <a:schemeClr val="lt1"/>
-          </a:fontRef>
-        </p:style>
-        <p:txBody>
-          <a:bodyPr lIns="0" tIns="0" rIns="0" bIns="0" rtlCol="0" anchor="t"/>
-          <a:lstStyle/>
-          <a:p>
-            <a:pPr algn="ctr"/>
-            <a:r>
-              <a:rPr lang="en-US" sz="1000" b="1" dirty="0"/>
-              <a:t>Query Object</a:t>
-            </a:r>
-            <a:endParaRPr lang="en-US" sz="1200" b="1" dirty="0"/>
-          </a:p>
-          <a:p>
-            <a:pPr algn="ctr"/>
-            <a:r>
-              <a:rPr lang="en-US" sz="700" dirty="0"/>
-              <a:t>📚 </a:t>
-            </a:r>
-            <a:r>
-              <a:rPr lang="en-US" sz="700" b="1" u="sng" dirty="0"/>
-              <a:t>Pydantic</a:t>
-            </a:r>
-            <a:endParaRPr lang="en-US" sz="800" b="1" u="sng" dirty="0"/>
-          </a:p>
-        </p:txBody>
-      </p:sp>
-      <p:sp>
-        <p:nvSpPr>
-          <p:cNvPr id="141" name="Rectangle 140">
-            <a:extLst>
-              <a:ext uri="{FF2B5EF4-FFF2-40B4-BE49-F238E27FC236}">
-                <a16:creationId xmlns:a16="http://schemas.microsoft.com/office/drawing/2014/main" id="{57D42052-BB79-A072-46BE-B34C46D0157D}"/>
-              </a:ext>
-            </a:extLst>
-          </p:cNvPr>
-          <p:cNvSpPr/>
-          <p:nvPr/>
-        </p:nvSpPr>
-        <p:spPr>
-          <a:xfrm>
-            <a:off x="8370160" y="5353118"/>
-            <a:ext cx="719593" cy="304890"/>
-          </a:xfrm>
-          <a:prstGeom prst="rect">
-            <a:avLst/>
-          </a:prstGeom>
-          <a:solidFill>
-            <a:srgbClr val="B17ED8"/>
-          </a:solidFill>
-        </p:spPr>
-        <p:style>
-          <a:lnRef idx="2">
-            <a:schemeClr val="accent1">
-              <a:shade val="15000"/>
-            </a:schemeClr>
-          </a:lnRef>
-          <a:fillRef idx="1">
-            <a:schemeClr val="accent1"/>
-          </a:fillRef>
-          <a:effectRef idx="0">
-            <a:schemeClr val="accent1"/>
-          </a:effectRef>
-          <a:fontRef idx="minor">
-            <a:schemeClr val="lt1"/>
-          </a:fontRef>
-        </p:style>
-        <p:txBody>
-          <a:bodyPr lIns="0" tIns="0" rIns="0" bIns="0" rtlCol="0" anchor="t"/>
-          <a:lstStyle/>
-          <a:p>
-            <a:pPr algn="ctr"/>
-            <a:r>
-              <a:rPr lang="en-US" sz="1000" b="1" dirty="0"/>
-              <a:t>Query Plan</a:t>
-            </a:r>
-            <a:endParaRPr lang="en-US" sz="1200" b="1" dirty="0"/>
-          </a:p>
-          <a:p>
-            <a:pPr algn="ctr"/>
-            <a:r>
-              <a:rPr lang="en-US" sz="700" dirty="0"/>
-              <a:t>📚 </a:t>
-            </a:r>
-            <a:r>
-              <a:rPr lang="en-US" sz="700" b="1" u="sng" dirty="0"/>
-              <a:t>Pydantic</a:t>
-            </a:r>
-            <a:endParaRPr lang="en-US" sz="800" b="1" u="sng" dirty="0"/>
-          </a:p>
-        </p:txBody>
-      </p:sp>
-      <p:sp>
-        <p:nvSpPr>
-          <p:cNvPr id="93" name="Rectangle 92">
-            <a:extLst>
-              <a:ext uri="{FF2B5EF4-FFF2-40B4-BE49-F238E27FC236}">
-                <a16:creationId xmlns:a16="http://schemas.microsoft.com/office/drawing/2014/main" id="{C470D739-A7E4-B20F-87C7-38FAB125269A}"/>
-              </a:ext>
-            </a:extLst>
-          </p:cNvPr>
-          <p:cNvSpPr/>
-          <p:nvPr/>
-        </p:nvSpPr>
-        <p:spPr>
-          <a:xfrm>
-            <a:off x="9362414" y="4933772"/>
-            <a:ext cx="393792" cy="101326"/>
-          </a:xfrm>
-          <a:prstGeom prst="rect">
-            <a:avLst/>
-          </a:prstGeom>
-          <a:solidFill>
-            <a:srgbClr val="7030A0"/>
-          </a:solidFill>
-          <a:ln w="6350" cap="rnd"/>
-        </p:spPr>
-        <p:style>
-          <a:lnRef idx="2">
-            <a:schemeClr val="accent1">
-              <a:shade val="15000"/>
-            </a:schemeClr>
-          </a:lnRef>
-          <a:fillRef idx="1">
-            <a:schemeClr val="accent1"/>
-          </a:fillRef>
-          <a:effectRef idx="0">
-            <a:schemeClr val="accent1"/>
-          </a:effectRef>
-          <a:fontRef idx="minor">
-            <a:schemeClr val="lt1"/>
-          </a:fontRef>
-        </p:style>
-        <p:txBody>
-          <a:bodyPr lIns="0" tIns="0" rIns="0" bIns="0" rtlCol="0" anchor="ctr"/>
-          <a:lstStyle/>
-          <a:p>
-            <a:pPr algn="ctr"/>
-            <a:r>
-              <a:rPr lang="en-US" sz="700" dirty="0"/>
-              <a:t>.py script</a:t>
-            </a:r>
-          </a:p>
-        </p:txBody>
-      </p:sp>
-      <p:cxnSp>
-        <p:nvCxnSpPr>
-          <p:cNvPr id="160" name="Straight Arrow Connector 159">
-            <a:extLst>
-              <a:ext uri="{FF2B5EF4-FFF2-40B4-BE49-F238E27FC236}">
-                <a16:creationId xmlns:a16="http://schemas.microsoft.com/office/drawing/2014/main" id="{544E47D5-B3E9-03E4-F236-9378DC14B57C}"/>
-              </a:ext>
-            </a:extLst>
-          </p:cNvPr>
-          <p:cNvCxnSpPr>
-            <a:cxnSpLocks/>
-          </p:cNvCxnSpPr>
-          <p:nvPr/>
-        </p:nvCxnSpPr>
-        <p:spPr>
-          <a:xfrm flipH="1">
-            <a:off x="8056871" y="5846330"/>
-            <a:ext cx="1254471" cy="0"/>
-          </a:xfrm>
-          <a:prstGeom prst="straightConnector1">
-            <a:avLst/>
-          </a:prstGeom>
-          <a:ln w="12700">
-            <a:solidFill>
-              <a:schemeClr val="tx1"/>
-            </a:solidFill>
-            <a:headEnd type="arrow"/>
-            <a:tailEnd type="none"/>
-          </a:ln>
-        </p:spPr>
-        <p:style>
-          <a:lnRef idx="1">
-            <a:schemeClr val="accent1"/>
-          </a:lnRef>
-          <a:fillRef idx="0">
-            <a:schemeClr val="accent1"/>
-          </a:fillRef>
-          <a:effectRef idx="0">
-            <a:schemeClr val="accent1"/>
-          </a:effectRef>
-          <a:fontRef idx="minor">
-            <a:schemeClr val="tx1"/>
-          </a:fontRef>
-        </p:style>
-      </p:cxnSp>
-      <p:sp>
-        <p:nvSpPr>
-          <p:cNvPr id="161" name="TextBox 160">
-            <a:extLst>
-              <a:ext uri="{FF2B5EF4-FFF2-40B4-BE49-F238E27FC236}">
-                <a16:creationId xmlns:a16="http://schemas.microsoft.com/office/drawing/2014/main" id="{EEB8931C-BA61-0618-C084-D24D32A32097}"/>
-              </a:ext>
-            </a:extLst>
-          </p:cNvPr>
-          <p:cNvSpPr txBox="1"/>
-          <p:nvPr/>
-        </p:nvSpPr>
-        <p:spPr>
-          <a:xfrm>
-            <a:off x="10731674" y="4511651"/>
-            <a:ext cx="652423" cy="169277"/>
-          </a:xfrm>
-          <a:prstGeom prst="rect">
-            <a:avLst/>
-          </a:prstGeom>
-          <a:noFill/>
-        </p:spPr>
-        <p:txBody>
-          <a:bodyPr wrap="none" lIns="0" tIns="0" rIns="0" bIns="0" rtlCol="0">
-            <a:spAutoFit/>
-          </a:bodyPr>
-          <a:lstStyle/>
-          <a:p>
-            <a:r>
-              <a:rPr lang="en-US" sz="1100" i="1" dirty="0"/>
-              <a:t>Query data</a:t>
-            </a:r>
-          </a:p>
-        </p:txBody>
-      </p:sp>
-      <p:cxnSp>
-        <p:nvCxnSpPr>
-          <p:cNvPr id="164" name="Straight Arrow Connector 163">
-            <a:extLst>
-              <a:ext uri="{FF2B5EF4-FFF2-40B4-BE49-F238E27FC236}">
-                <a16:creationId xmlns:a16="http://schemas.microsoft.com/office/drawing/2014/main" id="{AD5A96E6-5B59-6B19-7697-43661A71E9CA}"/>
-              </a:ext>
-            </a:extLst>
-          </p:cNvPr>
-          <p:cNvCxnSpPr>
-            <a:cxnSpLocks/>
-          </p:cNvCxnSpPr>
-          <p:nvPr/>
-        </p:nvCxnSpPr>
-        <p:spPr>
-          <a:xfrm>
-            <a:off x="11092940" y="4336911"/>
-            <a:ext cx="0" cy="547973"/>
+            <a:off x="3512611" y="934029"/>
+            <a:ext cx="702615" cy="1"/>
           </a:xfrm>
           <a:prstGeom prst="straightConnector1">
             <a:avLst/>
@@ -7496,22 +8090,70 @@
       </p:cxnSp>
       <p:cxnSp>
         <p:nvCxnSpPr>
-          <p:cNvPr id="167" name="Straight Arrow Connector 166">
-            <a:extLst>
-              <a:ext uri="{FF2B5EF4-FFF2-40B4-BE49-F238E27FC236}">
-                <a16:creationId xmlns:a16="http://schemas.microsoft.com/office/drawing/2014/main" id="{188E0E9D-CD8C-2DF9-9DD6-2809E60C06D4}"/>
+          <p:cNvPr id="21" name="Straight Arrow Connector 20">
+            <a:extLst>
+              <a:ext uri="{FF2B5EF4-FFF2-40B4-BE49-F238E27FC236}">
+                <a16:creationId xmlns:a16="http://schemas.microsoft.com/office/drawing/2014/main" id="{03AF897F-7D7C-FBC4-FE31-D98E8DB3A99D}"/>
               </a:ext>
             </a:extLst>
           </p:cNvPr>
           <p:cNvCxnSpPr>
             <a:cxnSpLocks/>
+            <a:stCxn id="9" idx="0"/>
+            <a:endCxn id="8" idx="2"/>
           </p:cNvCxnSpPr>
           <p:nvPr/>
         </p:nvCxnSpPr>
         <p:spPr>
-          <a:xfrm flipH="1" flipV="1">
-            <a:off x="8129643" y="3112670"/>
-            <a:ext cx="1181698" cy="1772213"/>
+          <a:xfrm flipV="1">
+            <a:off x="4724851" y="2360134"/>
+            <a:ext cx="1627" cy="301903"/>
+          </a:xfrm>
+          <a:prstGeom prst="straightConnector1">
+            <a:avLst/>
+          </a:prstGeom>
+          <a:ln w="12700">
+            <a:solidFill>
+              <a:schemeClr val="tx1"/>
+            </a:solidFill>
+            <a:headEnd type="arrow"/>
+            <a:tailEnd type="none"/>
+          </a:ln>
+        </p:spPr>
+        <p:style>
+          <a:lnRef idx="1">
+            <a:schemeClr val="accent1"/>
+          </a:lnRef>
+          <a:fillRef idx="0">
+            <a:schemeClr val="accent1"/>
+          </a:fillRef>
+          <a:effectRef idx="0">
+            <a:schemeClr val="accent1"/>
+          </a:effectRef>
+          <a:fontRef idx="minor">
+            <a:schemeClr val="tx1"/>
+          </a:fontRef>
+        </p:style>
+      </p:cxnSp>
+      <p:cxnSp>
+        <p:nvCxnSpPr>
+          <p:cNvPr id="25" name="Straight Arrow Connector 24">
+            <a:extLst>
+              <a:ext uri="{FF2B5EF4-FFF2-40B4-BE49-F238E27FC236}">
+                <a16:creationId xmlns:a16="http://schemas.microsoft.com/office/drawing/2014/main" id="{827F5B4B-693B-6867-1F64-A4FD871C749E}"/>
+              </a:ext>
+            </a:extLst>
+          </p:cNvPr>
+          <p:cNvCxnSpPr>
+            <a:cxnSpLocks/>
+            <a:endCxn id="9" idx="2"/>
+          </p:cNvCxnSpPr>
+          <p:nvPr/>
+        </p:nvCxnSpPr>
+        <p:spPr>
+          <a:xfrm flipV="1">
+            <a:off x="4724851" y="4312844"/>
+            <a:ext cx="0" cy="687522"/>
           </a:xfrm>
           <a:prstGeom prst="straightConnector1">
             <a:avLst/>
@@ -7539,12 +8181,517 @@
           </a:fontRef>
         </p:style>
       </p:cxnSp>
-      <p:sp>
-        <p:nvSpPr>
-          <p:cNvPr id="170" name="TextBox 169">
-            <a:extLst>
-              <a:ext uri="{FF2B5EF4-FFF2-40B4-BE49-F238E27FC236}">
-                <a16:creationId xmlns:a16="http://schemas.microsoft.com/office/drawing/2014/main" id="{B083C1EC-BE03-48D2-C3AE-FADE3D496F76}"/>
+      <p:cxnSp>
+        <p:nvCxnSpPr>
+          <p:cNvPr id="29" name="Straight Arrow Connector 28">
+            <a:extLst>
+              <a:ext uri="{FF2B5EF4-FFF2-40B4-BE49-F238E27FC236}">
+                <a16:creationId xmlns:a16="http://schemas.microsoft.com/office/drawing/2014/main" id="{60EFA422-E47F-91E3-42D0-2A8BC5CE310A}"/>
+              </a:ext>
+            </a:extLst>
+          </p:cNvPr>
+          <p:cNvCxnSpPr>
+            <a:cxnSpLocks/>
+            <a:stCxn id="13" idx="1"/>
+            <a:endCxn id="11" idx="3"/>
+          </p:cNvCxnSpPr>
+          <p:nvPr/>
+        </p:nvCxnSpPr>
+        <p:spPr>
+          <a:xfrm flipH="1">
+            <a:off x="7009664" y="3487441"/>
+            <a:ext cx="301146" cy="0"/>
+          </a:xfrm>
+          <a:prstGeom prst="straightConnector1">
+            <a:avLst/>
+          </a:prstGeom>
+          <a:ln w="12700">
+            <a:solidFill>
+              <a:schemeClr val="tx1"/>
+            </a:solidFill>
+            <a:headEnd type="arrow"/>
+            <a:tailEnd type="none"/>
+          </a:ln>
+        </p:spPr>
+        <p:style>
+          <a:lnRef idx="1">
+            <a:schemeClr val="accent1"/>
+          </a:lnRef>
+          <a:fillRef idx="0">
+            <a:schemeClr val="accent1"/>
+          </a:fillRef>
+          <a:effectRef idx="0">
+            <a:schemeClr val="accent1"/>
+          </a:effectRef>
+          <a:fontRef idx="minor">
+            <a:schemeClr val="tx1"/>
+          </a:fontRef>
+        </p:style>
+      </p:cxnSp>
+      <p:cxnSp>
+        <p:nvCxnSpPr>
+          <p:cNvPr id="35" name="Straight Arrow Connector 34">
+            <a:extLst>
+              <a:ext uri="{FF2B5EF4-FFF2-40B4-BE49-F238E27FC236}">
+                <a16:creationId xmlns:a16="http://schemas.microsoft.com/office/drawing/2014/main" id="{A91024CF-1BBB-6447-AC43-8CCFBE29F66A}"/>
+              </a:ext>
+            </a:extLst>
+          </p:cNvPr>
+          <p:cNvCxnSpPr>
+            <a:cxnSpLocks/>
+          </p:cNvCxnSpPr>
+          <p:nvPr/>
+        </p:nvCxnSpPr>
+        <p:spPr>
+          <a:xfrm flipV="1">
+            <a:off x="6144512" y="4312844"/>
+            <a:ext cx="0" cy="687522"/>
+          </a:xfrm>
+          <a:prstGeom prst="straightConnector1">
+            <a:avLst/>
+          </a:prstGeom>
+          <a:ln w="12700">
+            <a:solidFill>
+              <a:schemeClr val="tx1"/>
+            </a:solidFill>
+            <a:headEnd type="arrow"/>
+            <a:tailEnd type="arrow"/>
+          </a:ln>
+        </p:spPr>
+        <p:style>
+          <a:lnRef idx="1">
+            <a:schemeClr val="accent1"/>
+          </a:lnRef>
+          <a:fillRef idx="0">
+            <a:schemeClr val="accent1"/>
+          </a:fillRef>
+          <a:effectRef idx="0">
+            <a:schemeClr val="accent1"/>
+          </a:effectRef>
+          <a:fontRef idx="minor">
+            <a:schemeClr val="tx1"/>
+          </a:fontRef>
+        </p:style>
+      </p:cxnSp>
+      <p:cxnSp>
+        <p:nvCxnSpPr>
+          <p:cNvPr id="37" name="Straight Arrow Connector 36">
+            <a:extLst>
+              <a:ext uri="{FF2B5EF4-FFF2-40B4-BE49-F238E27FC236}">
+                <a16:creationId xmlns:a16="http://schemas.microsoft.com/office/drawing/2014/main" id="{837E65A8-E98B-A3F1-EC69-60F3FB12BFCB}"/>
+              </a:ext>
+            </a:extLst>
+          </p:cNvPr>
+          <p:cNvCxnSpPr>
+            <a:cxnSpLocks/>
+            <a:endCxn id="73" idx="0"/>
+          </p:cNvCxnSpPr>
+          <p:nvPr/>
+        </p:nvCxnSpPr>
+        <p:spPr>
+          <a:xfrm flipH="1">
+            <a:off x="7140831" y="4312844"/>
+            <a:ext cx="231288" cy="208593"/>
+          </a:xfrm>
+          <a:prstGeom prst="straightConnector1">
+            <a:avLst/>
+          </a:prstGeom>
+          <a:ln w="12700">
+            <a:solidFill>
+              <a:schemeClr val="tx1"/>
+            </a:solidFill>
+            <a:headEnd type="arrow"/>
+            <a:tailEnd type="arrow"/>
+          </a:ln>
+        </p:spPr>
+        <p:style>
+          <a:lnRef idx="1">
+            <a:schemeClr val="accent1"/>
+          </a:lnRef>
+          <a:fillRef idx="0">
+            <a:schemeClr val="accent1"/>
+          </a:fillRef>
+          <a:effectRef idx="0">
+            <a:schemeClr val="accent1"/>
+          </a:effectRef>
+          <a:fontRef idx="minor">
+            <a:schemeClr val="tx1"/>
+          </a:fontRef>
+        </p:style>
+      </p:cxnSp>
+      <p:cxnSp>
+        <p:nvCxnSpPr>
+          <p:cNvPr id="42" name="Straight Arrow Connector 41">
+            <a:extLst>
+              <a:ext uri="{FF2B5EF4-FFF2-40B4-BE49-F238E27FC236}">
+                <a16:creationId xmlns:a16="http://schemas.microsoft.com/office/drawing/2014/main" id="{59FA540F-0D32-6ABF-F082-1F95536F248C}"/>
+              </a:ext>
+            </a:extLst>
+          </p:cNvPr>
+          <p:cNvCxnSpPr>
+            <a:cxnSpLocks/>
+            <a:endCxn id="73" idx="0"/>
+          </p:cNvCxnSpPr>
+          <p:nvPr/>
+        </p:nvCxnSpPr>
+        <p:spPr>
+          <a:xfrm>
+            <a:off x="6936102" y="4312844"/>
+            <a:ext cx="204729" cy="208593"/>
+          </a:xfrm>
+          <a:prstGeom prst="straightConnector1">
+            <a:avLst/>
+          </a:prstGeom>
+          <a:ln w="12700">
+            <a:solidFill>
+              <a:schemeClr val="tx1"/>
+            </a:solidFill>
+            <a:headEnd type="arrow"/>
+            <a:tailEnd type="arrow"/>
+          </a:ln>
+        </p:spPr>
+        <p:style>
+          <a:lnRef idx="1">
+            <a:schemeClr val="accent1"/>
+          </a:lnRef>
+          <a:fillRef idx="0">
+            <a:schemeClr val="accent1"/>
+          </a:fillRef>
+          <a:effectRef idx="0">
+            <a:schemeClr val="accent1"/>
+          </a:effectRef>
+          <a:fontRef idx="minor">
+            <a:schemeClr val="tx1"/>
+          </a:fontRef>
+        </p:style>
+      </p:cxnSp>
+      <p:cxnSp>
+        <p:nvCxnSpPr>
+          <p:cNvPr id="43" name="Straight Arrow Connector 42">
+            <a:extLst>
+              <a:ext uri="{FF2B5EF4-FFF2-40B4-BE49-F238E27FC236}">
+                <a16:creationId xmlns:a16="http://schemas.microsoft.com/office/drawing/2014/main" id="{6DD88032-5E17-4F47-AA9F-FBDAC2D2C59F}"/>
+              </a:ext>
+            </a:extLst>
+          </p:cNvPr>
+          <p:cNvCxnSpPr>
+            <a:cxnSpLocks/>
+            <a:stCxn id="11" idx="1"/>
+            <a:endCxn id="9" idx="3"/>
+          </p:cNvCxnSpPr>
+          <p:nvPr/>
+        </p:nvCxnSpPr>
+        <p:spPr>
+          <a:xfrm flipH="1">
+            <a:off x="5237730" y="3487441"/>
+            <a:ext cx="746176" cy="0"/>
+          </a:xfrm>
+          <a:prstGeom prst="straightConnector1">
+            <a:avLst/>
+          </a:prstGeom>
+          <a:ln w="12700">
+            <a:solidFill>
+              <a:schemeClr val="tx1"/>
+            </a:solidFill>
+            <a:headEnd type="arrow"/>
+            <a:tailEnd type="none"/>
+          </a:ln>
+        </p:spPr>
+        <p:style>
+          <a:lnRef idx="1">
+            <a:schemeClr val="accent1"/>
+          </a:lnRef>
+          <a:fillRef idx="0">
+            <a:schemeClr val="accent1"/>
+          </a:fillRef>
+          <a:effectRef idx="0">
+            <a:schemeClr val="accent1"/>
+          </a:effectRef>
+          <a:fontRef idx="minor">
+            <a:schemeClr val="tx1"/>
+          </a:fontRef>
+        </p:style>
+      </p:cxnSp>
+      <p:cxnSp>
+        <p:nvCxnSpPr>
+          <p:cNvPr id="47" name="Straight Arrow Connector 46">
+            <a:extLst>
+              <a:ext uri="{FF2B5EF4-FFF2-40B4-BE49-F238E27FC236}">
+                <a16:creationId xmlns:a16="http://schemas.microsoft.com/office/drawing/2014/main" id="{8365C1E3-C6AD-0E59-D654-7A64454F99F0}"/>
+              </a:ext>
+            </a:extLst>
+          </p:cNvPr>
+          <p:cNvCxnSpPr>
+            <a:cxnSpLocks/>
+          </p:cNvCxnSpPr>
+          <p:nvPr/>
+        </p:nvCxnSpPr>
+        <p:spPr>
+          <a:xfrm flipV="1">
+            <a:off x="7842885" y="4312844"/>
+            <a:ext cx="0" cy="687522"/>
+          </a:xfrm>
+          <a:prstGeom prst="straightConnector1">
+            <a:avLst/>
+          </a:prstGeom>
+          <a:ln w="12700">
+            <a:solidFill>
+              <a:schemeClr val="tx1"/>
+            </a:solidFill>
+            <a:headEnd type="arrow"/>
+            <a:tailEnd type="arrow"/>
+          </a:ln>
+        </p:spPr>
+        <p:style>
+          <a:lnRef idx="1">
+            <a:schemeClr val="accent1"/>
+          </a:lnRef>
+          <a:fillRef idx="0">
+            <a:schemeClr val="accent1"/>
+          </a:fillRef>
+          <a:effectRef idx="0">
+            <a:schemeClr val="accent1"/>
+          </a:effectRef>
+          <a:fontRef idx="minor">
+            <a:schemeClr val="tx1"/>
+          </a:fontRef>
+        </p:style>
+      </p:cxnSp>
+      <p:sp>
+        <p:nvSpPr>
+          <p:cNvPr id="48" name="Rectangle 47">
+            <a:extLst>
+              <a:ext uri="{FF2B5EF4-FFF2-40B4-BE49-F238E27FC236}">
+                <a16:creationId xmlns:a16="http://schemas.microsoft.com/office/drawing/2014/main" id="{A1207485-D60E-FB2A-3919-B3EDA31AD605}"/>
+              </a:ext>
+            </a:extLst>
+          </p:cNvPr>
+          <p:cNvSpPr/>
+          <p:nvPr/>
+        </p:nvSpPr>
+        <p:spPr>
+          <a:xfrm>
+            <a:off x="4341573" y="5000368"/>
+            <a:ext cx="1167573" cy="1100082"/>
+          </a:xfrm>
+          <a:prstGeom prst="rect">
+            <a:avLst/>
+          </a:prstGeom>
+          <a:solidFill>
+            <a:schemeClr val="accent2">
+              <a:lumMod val="75000"/>
+            </a:schemeClr>
+          </a:solidFill>
+        </p:spPr>
+        <p:style>
+          <a:lnRef idx="2">
+            <a:schemeClr val="accent1">
+              <a:shade val="15000"/>
+            </a:schemeClr>
+          </a:lnRef>
+          <a:fillRef idx="1">
+            <a:schemeClr val="accent1"/>
+          </a:fillRef>
+          <a:effectRef idx="0">
+            <a:schemeClr val="accent1"/>
+          </a:effectRef>
+          <a:fontRef idx="minor">
+            <a:schemeClr val="lt1"/>
+          </a:fontRef>
+        </p:style>
+        <p:txBody>
+          <a:bodyPr lIns="0" tIns="0" rIns="0" bIns="0" rtlCol="0" anchor="ctr"/>
+          <a:lstStyle/>
+          <a:p>
+            <a:pPr algn="ctr"/>
+            <a:r>
+              <a:rPr lang="en-US" sz="1600" b="1" i="1" dirty="0"/>
+              <a:t>Parser LLM</a:t>
+            </a:r>
+          </a:p>
+          <a:p>
+            <a:pPr algn="ctr"/>
+            <a:r>
+              <a:rPr lang="en-US" sz="800" b="1" i="1" dirty="0"/>
+              <a:t>(Local LLM)</a:t>
+            </a:r>
+          </a:p>
+          <a:p>
+            <a:pPr algn="ctr"/>
+            <a:endParaRPr lang="en-US" sz="800" b="1" i="1" dirty="0"/>
+          </a:p>
+          <a:p>
+            <a:pPr algn="ctr"/>
+            <a:r>
+              <a:rPr lang="en-US" sz="900" dirty="0"/>
+              <a:t>📚 </a:t>
+            </a:r>
+            <a:r>
+              <a:rPr lang="en-US" sz="900" b="1" u="sng" dirty="0"/>
+              <a:t>Qwen2.5-Coder:7b</a:t>
+            </a:r>
+          </a:p>
+        </p:txBody>
+      </p:sp>
+      <p:cxnSp>
+        <p:nvCxnSpPr>
+          <p:cNvPr id="64" name="Straight Arrow Connector 63">
+            <a:extLst>
+              <a:ext uri="{FF2B5EF4-FFF2-40B4-BE49-F238E27FC236}">
+                <a16:creationId xmlns:a16="http://schemas.microsoft.com/office/drawing/2014/main" id="{876C400E-DE7F-DE8B-23CD-DE4F9C59641B}"/>
+              </a:ext>
+            </a:extLst>
+          </p:cNvPr>
+          <p:cNvCxnSpPr>
+            <a:cxnSpLocks/>
+            <a:stCxn id="6" idx="3"/>
+          </p:cNvCxnSpPr>
+          <p:nvPr/>
+        </p:nvCxnSpPr>
+        <p:spPr>
+          <a:xfrm flipV="1">
+            <a:off x="2907486" y="2127479"/>
+            <a:ext cx="1307740" cy="1"/>
+          </a:xfrm>
+          <a:prstGeom prst="straightConnector1">
+            <a:avLst/>
+          </a:prstGeom>
+          <a:ln w="12700">
+            <a:solidFill>
+              <a:schemeClr val="tx1"/>
+            </a:solidFill>
+            <a:headEnd type="arrow"/>
+            <a:tailEnd type="none"/>
+          </a:ln>
+        </p:spPr>
+        <p:style>
+          <a:lnRef idx="1">
+            <a:schemeClr val="accent1"/>
+          </a:lnRef>
+          <a:fillRef idx="0">
+            <a:schemeClr val="accent1"/>
+          </a:fillRef>
+          <a:effectRef idx="0">
+            <a:schemeClr val="accent1"/>
+          </a:effectRef>
+          <a:fontRef idx="minor">
+            <a:schemeClr val="tx1"/>
+          </a:fontRef>
+        </p:style>
+      </p:cxnSp>
+      <p:sp>
+        <p:nvSpPr>
+          <p:cNvPr id="73" name="Rectangle 72">
+            <a:extLst>
+              <a:ext uri="{FF2B5EF4-FFF2-40B4-BE49-F238E27FC236}">
+                <a16:creationId xmlns:a16="http://schemas.microsoft.com/office/drawing/2014/main" id="{3A768D3E-E65E-59D0-A9DE-9B81B3F86D94}"/>
+              </a:ext>
+            </a:extLst>
+          </p:cNvPr>
+          <p:cNvSpPr/>
+          <p:nvPr/>
+        </p:nvSpPr>
+        <p:spPr>
+          <a:xfrm>
+            <a:off x="6779879" y="4521437"/>
+            <a:ext cx="721904" cy="270336"/>
+          </a:xfrm>
+          <a:prstGeom prst="rect">
+            <a:avLst/>
+          </a:prstGeom>
+          <a:solidFill>
+            <a:srgbClr val="F7A5A5"/>
+          </a:solidFill>
+        </p:spPr>
+        <p:style>
+          <a:lnRef idx="2">
+            <a:schemeClr val="accent1">
+              <a:shade val="15000"/>
+            </a:schemeClr>
+          </a:lnRef>
+          <a:fillRef idx="1">
+            <a:schemeClr val="accent1"/>
+          </a:fillRef>
+          <a:effectRef idx="0">
+            <a:schemeClr val="accent1"/>
+          </a:effectRef>
+          <a:fontRef idx="minor">
+            <a:schemeClr val="lt1"/>
+          </a:fontRef>
+        </p:style>
+        <p:txBody>
+          <a:bodyPr lIns="0" tIns="45720" rIns="0" bIns="0" rtlCol="0" anchor="t"/>
+          <a:lstStyle/>
+          <a:p>
+            <a:pPr algn="ctr"/>
+            <a:r>
+              <a:rPr lang="en-US" sz="1100" dirty="0"/>
+              <a:t>🛢️</a:t>
+            </a:r>
+            <a:r>
+              <a:rPr lang="en-US" sz="900" b="1" dirty="0"/>
+              <a:t> </a:t>
+            </a:r>
+            <a:r>
+              <a:rPr lang="en-US" sz="1200" b="1" dirty="0"/>
+              <a:t>DB</a:t>
+            </a:r>
+            <a:endParaRPr lang="en-US" sz="900" i="1" dirty="0"/>
+          </a:p>
+        </p:txBody>
+      </p:sp>
+      <p:cxnSp>
+        <p:nvCxnSpPr>
+          <p:cNvPr id="109" name="Connector: Elbow 108">
+            <a:extLst>
+              <a:ext uri="{FF2B5EF4-FFF2-40B4-BE49-F238E27FC236}">
+                <a16:creationId xmlns:a16="http://schemas.microsoft.com/office/drawing/2014/main" id="{68CCE979-38C1-892C-888A-C361A055421E}"/>
+              </a:ext>
+            </a:extLst>
+          </p:cNvPr>
+          <p:cNvCxnSpPr>
+            <a:stCxn id="11" idx="0"/>
+            <a:endCxn id="8" idx="3"/>
+          </p:cNvCxnSpPr>
+          <p:nvPr/>
+        </p:nvCxnSpPr>
+        <p:spPr>
+          <a:xfrm rot="16200000" flipV="1">
+            <a:off x="5303605" y="1468856"/>
+            <a:ext cx="1127306" cy="1259055"/>
+          </a:xfrm>
+          <a:prstGeom prst="curvedConnector2">
+            <a:avLst/>
+          </a:prstGeom>
+          <a:ln w="12700">
+            <a:solidFill>
+              <a:schemeClr val="tx1"/>
+            </a:solidFill>
+            <a:headEnd type="none"/>
+            <a:tailEnd type="arrow"/>
+          </a:ln>
+        </p:spPr>
+        <p:style>
+          <a:lnRef idx="1">
+            <a:schemeClr val="accent1"/>
+          </a:lnRef>
+          <a:fillRef idx="0">
+            <a:schemeClr val="accent1"/>
+          </a:fillRef>
+          <a:effectRef idx="0">
+            <a:schemeClr val="accent1"/>
+          </a:effectRef>
+          <a:fontRef idx="minor">
+            <a:schemeClr val="tx1"/>
+          </a:fontRef>
+        </p:style>
+      </p:cxnSp>
+      <p:sp>
+        <p:nvSpPr>
+          <p:cNvPr id="112" name="TextBox 111">
+            <a:extLst>
+              <a:ext uri="{FF2B5EF4-FFF2-40B4-BE49-F238E27FC236}">
+                <a16:creationId xmlns:a16="http://schemas.microsoft.com/office/drawing/2014/main" id="{9FFA8364-6776-D3D2-5096-EBE29B8BFD78}"/>
               </a:ext>
             </a:extLst>
           </p:cNvPr>
@@ -7553,8 +8700,8 @@
         </p:nvSpPr>
         <p:spPr>
           <a:xfrm>
-            <a:off x="8410425" y="5846330"/>
-            <a:ext cx="591509" cy="169277"/>
+            <a:off x="5598996" y="1903523"/>
+            <a:ext cx="687689" cy="338554"/>
           </a:xfrm>
           <a:prstGeom prst="rect">
             <a:avLst/>
@@ -7569,17 +8716,77 @@
           <a:p>
             <a:r>
               <a:rPr lang="en-US" sz="1100" i="1" dirty="0"/>
-              <a:t>SQL Query</a:t>
-            </a:r>
-          </a:p>
-        </p:txBody>
-      </p:sp>
-      <p:sp>
-        <p:nvSpPr>
-          <p:cNvPr id="171" name="TextBox 170">
-            <a:extLst>
-              <a:ext uri="{FF2B5EF4-FFF2-40B4-BE49-F238E27FC236}">
-                <a16:creationId xmlns:a16="http://schemas.microsoft.com/office/drawing/2014/main" id="{C4E25829-8F49-7D62-A8DF-A418112E679F}"/>
+              <a:t>Refusal </a:t>
+            </a:r>
+            <a:r>
+              <a:rPr lang="en-US" sz="1100" dirty="0"/>
+              <a:t>|</a:t>
+            </a:r>
+            <a:r>
+              <a:rPr lang="en-US" sz="1100" i="1" dirty="0"/>
+              <a:t> </a:t>
+            </a:r>
+          </a:p>
+          <a:p>
+            <a:r>
+              <a:rPr lang="en-US" sz="1100" i="1" dirty="0"/>
+              <a:t>Clarification</a:t>
+            </a:r>
+          </a:p>
+        </p:txBody>
+      </p:sp>
+      <p:cxnSp>
+        <p:nvCxnSpPr>
+          <p:cNvPr id="113" name="Connector: Elbow 108">
+            <a:extLst>
+              <a:ext uri="{FF2B5EF4-FFF2-40B4-BE49-F238E27FC236}">
+                <a16:creationId xmlns:a16="http://schemas.microsoft.com/office/drawing/2014/main" id="{AE26BF72-4C1B-E05E-E217-85426BF0C49D}"/>
+              </a:ext>
+            </a:extLst>
+          </p:cNvPr>
+          <p:cNvCxnSpPr>
+            <a:cxnSpLocks/>
+            <a:stCxn id="13" idx="0"/>
+          </p:cNvCxnSpPr>
+          <p:nvPr/>
+        </p:nvCxnSpPr>
+        <p:spPr>
+          <a:xfrm rot="16200000" flipV="1">
+            <a:off x="5825639" y="712191"/>
+            <a:ext cx="1367591" cy="2532102"/>
+          </a:xfrm>
+          <a:prstGeom prst="curvedConnector2">
+            <a:avLst/>
+          </a:prstGeom>
+          <a:ln w="12700">
+            <a:solidFill>
+              <a:schemeClr val="tx1"/>
+            </a:solidFill>
+            <a:headEnd type="none"/>
+            <a:tailEnd type="arrow"/>
+          </a:ln>
+        </p:spPr>
+        <p:style>
+          <a:lnRef idx="1">
+            <a:schemeClr val="accent1"/>
+          </a:lnRef>
+          <a:fillRef idx="0">
+            <a:schemeClr val="accent1"/>
+          </a:fillRef>
+          <a:effectRef idx="0">
+            <a:schemeClr val="accent1"/>
+          </a:effectRef>
+          <a:fontRef idx="minor">
+            <a:schemeClr val="tx1"/>
+          </a:fontRef>
+        </p:style>
+      </p:cxnSp>
+      <p:sp>
+        <p:nvSpPr>
+          <p:cNvPr id="114" name="TextBox 113">
+            <a:extLst>
+              <a:ext uri="{FF2B5EF4-FFF2-40B4-BE49-F238E27FC236}">
+                <a16:creationId xmlns:a16="http://schemas.microsoft.com/office/drawing/2014/main" id="{49CA53C4-D49B-F86E-D5A4-FD5CADAE70DC}"/>
               </a:ext>
             </a:extLst>
           </p:cNvPr>
@@ -7587,9 +8794,9 @@
           <p:nvPr/>
         </p:nvSpPr>
         <p:spPr>
-          <a:xfrm rot="3305483">
-            <a:off x="8268959" y="3850359"/>
-            <a:ext cx="1131720" cy="169277"/>
+          <a:xfrm>
+            <a:off x="6886049" y="1471316"/>
+            <a:ext cx="615163" cy="161583"/>
           </a:xfrm>
           <a:prstGeom prst="rect">
             <a:avLst/>
@@ -7597,24 +8804,30 @@
           <a:noFill/>
         </p:spPr>
         <p:txBody>
-          <a:bodyPr wrap="none" lIns="0" tIns="0" rIns="0" bIns="0" rtlCol="0">
+          <a:bodyPr wrap="square" lIns="0" tIns="0" rIns="0" bIns="0" rtlCol="0">
             <a:spAutoFit/>
           </a:bodyPr>
           <a:lstStyle/>
           <a:p>
             <a:r>
-              <a:rPr lang="en-US" sz="1100" i="1" dirty="0"/>
-              <a:t>Query and response</a:t>
-            </a:r>
-          </a:p>
-        </p:txBody>
-      </p:sp>
-      <p:sp>
-        <p:nvSpPr>
-          <p:cNvPr id="172" name="Flowchart: Off-page Connector 171">
-            <a:extLst>
-              <a:ext uri="{FF2B5EF4-FFF2-40B4-BE49-F238E27FC236}">
-                <a16:creationId xmlns:a16="http://schemas.microsoft.com/office/drawing/2014/main" id="{0447B003-9275-D120-E27F-58CA5443AE1E}"/>
+              <a:rPr lang="en-US" sz="1050" dirty="0">
+                <a:solidFill>
+                  <a:srgbClr val="B17ED8"/>
+                </a:solidFill>
+                <a:latin typeface="Adobe Gothic Std B" panose="020B0800000000000000" pitchFamily="34" charset="-128"/>
+                <a:ea typeface="Adobe Gothic Std B" panose="020B0800000000000000" pitchFamily="34" charset="-128"/>
+              </a:rPr>
+              <a:t>ResultSet</a:t>
+            </a:r>
+          </a:p>
+        </p:txBody>
+      </p:sp>
+      <p:sp>
+        <p:nvSpPr>
+          <p:cNvPr id="117" name="Flowchart: Off-page Connector 116">
+            <a:extLst>
+              <a:ext uri="{FF2B5EF4-FFF2-40B4-BE49-F238E27FC236}">
+                <a16:creationId xmlns:a16="http://schemas.microsoft.com/office/drawing/2014/main" id="{D7C4B127-ED58-CB38-3043-477F8C136243}"/>
               </a:ext>
             </a:extLst>
           </p:cNvPr>
@@ -7623,7 +8836,7 @@
         </p:nvSpPr>
         <p:spPr>
           <a:xfrm rot="16200000">
-            <a:off x="9054676" y="3687072"/>
+            <a:off x="1572198" y="813889"/>
             <a:ext cx="186884" cy="240280"/>
           </a:xfrm>
           <a:prstGeom prst="flowChartOffpageConnector">
@@ -7672,10 +8885,10 @@
       </p:sp>
       <p:sp>
         <p:nvSpPr>
-          <p:cNvPr id="173" name="Flowchart: Off-page Connector 172">
-            <a:extLst>
-              <a:ext uri="{FF2B5EF4-FFF2-40B4-BE49-F238E27FC236}">
-                <a16:creationId xmlns:a16="http://schemas.microsoft.com/office/drawing/2014/main" id="{2C8AEE21-31C9-8EE4-5BE2-13A0E04ABDE4}"/>
+          <p:cNvPr id="118" name="Flowchart: Off-page Connector 117">
+            <a:extLst>
+              <a:ext uri="{FF2B5EF4-FFF2-40B4-BE49-F238E27FC236}">
+                <a16:creationId xmlns:a16="http://schemas.microsoft.com/office/drawing/2014/main" id="{CC198E2C-579D-69D7-7BE8-AD75D8EE4092}"/>
               </a:ext>
             </a:extLst>
           </p:cNvPr>
@@ -7684,7 +8897,7 @@
         </p:nvSpPr>
         <p:spPr>
           <a:xfrm rot="16200000">
-            <a:off x="9206075" y="5166555"/>
+            <a:off x="3995991" y="589186"/>
             <a:ext cx="186884" cy="240280"/>
           </a:xfrm>
           <a:prstGeom prst="flowChartOffpageConnector">
@@ -7733,10 +8946,10 @@
       </p:sp>
       <p:sp>
         <p:nvSpPr>
-          <p:cNvPr id="174" name="Flowchart: Off-page Connector 173">
-            <a:extLst>
-              <a:ext uri="{FF2B5EF4-FFF2-40B4-BE49-F238E27FC236}">
-                <a16:creationId xmlns:a16="http://schemas.microsoft.com/office/drawing/2014/main" id="{DC49F929-8236-C80A-DF74-45C92AFAD358}"/>
+          <p:cNvPr id="119" name="Flowchart: Off-page Connector 118">
+            <a:extLst>
+              <a:ext uri="{FF2B5EF4-FFF2-40B4-BE49-F238E27FC236}">
+                <a16:creationId xmlns:a16="http://schemas.microsoft.com/office/drawing/2014/main" id="{94CB7192-7274-F3D6-30B4-7233CC08C58F}"/>
               </a:ext>
             </a:extLst>
           </p:cNvPr>
@@ -7745,7 +8958,7 @@
         </p:nvSpPr>
         <p:spPr>
           <a:xfrm rot="16200000">
-            <a:off x="6789154" y="5248565"/>
+            <a:off x="3983792" y="2541897"/>
             <a:ext cx="186884" cy="240280"/>
           </a:xfrm>
           <a:prstGeom prst="flowChartOffpageConnector">
@@ -7794,10 +9007,10 @@
       </p:sp>
       <p:sp>
         <p:nvSpPr>
-          <p:cNvPr id="175" name="Flowchart: Off-page Connector 174">
-            <a:extLst>
-              <a:ext uri="{FF2B5EF4-FFF2-40B4-BE49-F238E27FC236}">
-                <a16:creationId xmlns:a16="http://schemas.microsoft.com/office/drawing/2014/main" id="{EAA4BC7C-AB35-5672-4A04-11F3AED98435}"/>
+          <p:cNvPr id="120" name="Flowchart: Off-page Connector 119">
+            <a:extLst>
+              <a:ext uri="{FF2B5EF4-FFF2-40B4-BE49-F238E27FC236}">
+                <a16:creationId xmlns:a16="http://schemas.microsoft.com/office/drawing/2014/main" id="{01DB02D4-794E-6EA2-5C1C-E49399D79D95}"/>
               </a:ext>
             </a:extLst>
           </p:cNvPr>
@@ -7806,7 +9019,7 @@
         </p:nvSpPr>
         <p:spPr>
           <a:xfrm rot="16200000">
-            <a:off x="8244296" y="3376702"/>
+            <a:off x="5759297" y="2541896"/>
             <a:ext cx="186884" cy="240280"/>
           </a:xfrm>
           <a:prstGeom prst="flowChartOffpageConnector">
@@ -7855,10 +9068,10 @@
       </p:sp>
       <p:sp>
         <p:nvSpPr>
-          <p:cNvPr id="176" name="Flowchart: Off-page Connector 175">
-            <a:extLst>
-              <a:ext uri="{FF2B5EF4-FFF2-40B4-BE49-F238E27FC236}">
-                <a16:creationId xmlns:a16="http://schemas.microsoft.com/office/drawing/2014/main" id="{AFCC506F-4117-8D5C-A52D-382D4EF3B926}"/>
+          <p:cNvPr id="121" name="Flowchart: Off-page Connector 120">
+            <a:extLst>
+              <a:ext uri="{FF2B5EF4-FFF2-40B4-BE49-F238E27FC236}">
+                <a16:creationId xmlns:a16="http://schemas.microsoft.com/office/drawing/2014/main" id="{4E3134F4-88B8-F4FE-19CF-EE627B72415C}"/>
               </a:ext>
             </a:extLst>
           </p:cNvPr>
@@ -7867,7 +9080,7 @@
         </p:nvSpPr>
         <p:spPr>
           <a:xfrm rot="16200000">
-            <a:off x="10473248" y="4465418"/>
+            <a:off x="7081963" y="2541895"/>
             <a:ext cx="186884" cy="240280"/>
           </a:xfrm>
           <a:prstGeom prst="flowChartOffpageConnector">
@@ -7916,10 +9129,10 @@
       </p:sp>
       <p:sp>
         <p:nvSpPr>
-          <p:cNvPr id="178" name="Thought Bubble: Cloud 177">
-            <a:extLst>
-              <a:ext uri="{FF2B5EF4-FFF2-40B4-BE49-F238E27FC236}">
-                <a16:creationId xmlns:a16="http://schemas.microsoft.com/office/drawing/2014/main" id="{22BE8A4D-DA4E-6EFE-842E-C807DCC86649}"/>
+          <p:cNvPr id="122" name="Flowchart: Off-page Connector 121">
+            <a:extLst>
+              <a:ext uri="{FF2B5EF4-FFF2-40B4-BE49-F238E27FC236}">
+                <a16:creationId xmlns:a16="http://schemas.microsoft.com/office/drawing/2014/main" id="{473F88A9-2CB3-E503-D874-718B48B13C8E}"/>
               </a:ext>
             </a:extLst>
           </p:cNvPr>
@@ -7927,17 +9140,19 @@
           <p:nvPr/>
         </p:nvSpPr>
         <p:spPr>
-          <a:xfrm>
-            <a:off x="9697423" y="2919947"/>
-            <a:ext cx="1320449" cy="509053"/>
-          </a:xfrm>
-          <a:prstGeom prst="cloudCallout">
-            <a:avLst>
-              <a:gd name="adj1" fmla="val 1435"/>
-              <a:gd name="adj2" fmla="val 46748"/>
-            </a:avLst>
-          </a:prstGeom>
-          <a:noFill/>
+          <a:xfrm rot="16200000">
+            <a:off x="6638932" y="1366235"/>
+            <a:ext cx="186884" cy="210161"/>
+          </a:xfrm>
+          <a:prstGeom prst="flowChartOffpageConnector">
+            <a:avLst/>
+          </a:prstGeom>
+          <a:solidFill>
+            <a:schemeClr val="accent4">
+              <a:lumMod val="60000"/>
+              <a:lumOff val="40000"/>
+            </a:schemeClr>
+          </a:solidFill>
         </p:spPr>
         <p:style>
           <a:lnRef idx="2">
@@ -7956,52 +9171,135 @@
           </a:fontRef>
         </p:style>
         <p:txBody>
-          <a:bodyPr rtlCol="0" anchor="ctr"/>
-          <a:lstStyle/>
-          <a:p>
-            <a:pPr algn="ctr"/>
-            <a:r>
-              <a:rPr lang="en-US" sz="2800" b="1" dirty="0">
+          <a:bodyPr vert="vert" rtlCol="0" anchor="ctr"/>
+          <a:lstStyle/>
+          <a:p>
+            <a:pPr algn="ctr"/>
+            <a:r>
+              <a:rPr lang="en-US" sz="1400" b="1" dirty="0">
+                <a:solidFill>
+                  <a:schemeClr val="accent4">
+                    <a:lumMod val="75000"/>
+                  </a:schemeClr>
+                </a:solidFill>
+              </a:rPr>
+              <a:t>6</a:t>
+            </a:r>
+          </a:p>
+        </p:txBody>
+      </p:sp>
+      <p:sp>
+        <p:nvSpPr>
+          <p:cNvPr id="123" name="Flowchart: Off-page Connector 122">
+            <a:extLst>
+              <a:ext uri="{FF2B5EF4-FFF2-40B4-BE49-F238E27FC236}">
+                <a16:creationId xmlns:a16="http://schemas.microsoft.com/office/drawing/2014/main" id="{9BEDBC72-BA05-EBD9-A868-CF9DCC0AD9A0}"/>
+              </a:ext>
+            </a:extLst>
+          </p:cNvPr>
+          <p:cNvSpPr/>
+          <p:nvPr/>
+        </p:nvSpPr>
+        <p:spPr>
+          <a:xfrm rot="16200000">
+            <a:off x="1557137" y="2022398"/>
+            <a:ext cx="186884" cy="210161"/>
+          </a:xfrm>
+          <a:prstGeom prst="flowChartOffpageConnector">
+            <a:avLst/>
+          </a:prstGeom>
+          <a:solidFill>
+            <a:schemeClr val="accent4">
+              <a:lumMod val="60000"/>
+              <a:lumOff val="40000"/>
+            </a:schemeClr>
+          </a:solidFill>
+        </p:spPr>
+        <p:style>
+          <a:lnRef idx="2">
+            <a:schemeClr val="accent1">
+              <a:shade val="15000"/>
+            </a:schemeClr>
+          </a:lnRef>
+          <a:fillRef idx="1">
+            <a:schemeClr val="accent1"/>
+          </a:fillRef>
+          <a:effectRef idx="0">
+            <a:schemeClr val="accent1"/>
+          </a:effectRef>
+          <a:fontRef idx="minor">
+            <a:schemeClr val="lt1"/>
+          </a:fontRef>
+        </p:style>
+        <p:txBody>
+          <a:bodyPr vert="vert" rtlCol="0" anchor="ctr"/>
+          <a:lstStyle/>
+          <a:p>
+            <a:pPr algn="ctr"/>
+            <a:r>
+              <a:rPr lang="en-US" sz="1400" b="1" dirty="0">
+                <a:solidFill>
+                  <a:schemeClr val="accent4">
+                    <a:lumMod val="75000"/>
+                  </a:schemeClr>
+                </a:solidFill>
+              </a:rPr>
+              <a:t>7</a:t>
+            </a:r>
+          </a:p>
+        </p:txBody>
+      </p:sp>
+      <p:sp>
+        <p:nvSpPr>
+          <p:cNvPr id="125" name="Title 1024">
+            <a:extLst>
+              <a:ext uri="{FF2B5EF4-FFF2-40B4-BE49-F238E27FC236}">
+                <a16:creationId xmlns:a16="http://schemas.microsoft.com/office/drawing/2014/main" id="{068CC61E-01B3-DEF8-1A06-BC2F944CE8A4}"/>
+              </a:ext>
+            </a:extLst>
+          </p:cNvPr>
+          <p:cNvSpPr txBox="1">
+            <a:spLocks/>
+          </p:cNvSpPr>
+          <p:nvPr/>
+        </p:nvSpPr>
+        <p:spPr>
+          <a:xfrm>
+            <a:off x="115735" y="64032"/>
+            <a:ext cx="4615498" cy="476956"/>
+          </a:xfrm>
+          <a:prstGeom prst="rect">
+            <a:avLst/>
+          </a:prstGeom>
+        </p:spPr>
+        <p:txBody>
+          <a:bodyPr vert="horz" lIns="91440" tIns="45720" rIns="91440" bIns="45720" rtlCol="0" anchor="t">
+            <a:noAutofit/>
+          </a:bodyPr>
+          <a:lstStyle>
+            <a:lvl1pPr algn="ctr" defTabSz="914400" rtl="0" eaLnBrk="1" latinLnBrk="0" hangingPunct="1">
+              <a:lnSpc>
+                <a:spcPct val="90000"/>
+              </a:lnSpc>
+              <a:spcBef>
+                <a:spcPct val="0"/>
+              </a:spcBef>
+              <a:buNone/>
+              <a:defRPr sz="6000" kern="1200">
                 <a:solidFill>
                   <a:schemeClr val="tx1"/>
                 </a:solidFill>
-              </a:rPr>
-              <a:t>User</a:t>
-            </a:r>
-          </a:p>
-        </p:txBody>
-      </p:sp>
-      <p:sp>
-        <p:nvSpPr>
-          <p:cNvPr id="179" name="TextBox 178">
-            <a:extLst>
-              <a:ext uri="{FF2B5EF4-FFF2-40B4-BE49-F238E27FC236}">
-                <a16:creationId xmlns:a16="http://schemas.microsoft.com/office/drawing/2014/main" id="{7EE5DE43-57A1-40FD-4F3A-9493D38626A3}"/>
-              </a:ext>
-            </a:extLst>
-          </p:cNvPr>
-          <p:cNvSpPr txBox="1"/>
-          <p:nvPr/>
-        </p:nvSpPr>
-        <p:spPr>
-          <a:xfrm>
-            <a:off x="9665887" y="3519100"/>
-            <a:ext cx="1561325" cy="169277"/>
-          </a:xfrm>
-          <a:prstGeom prst="rect">
-            <a:avLst/>
-          </a:prstGeom>
-          <a:noFill/>
-        </p:spPr>
-        <p:txBody>
-          <a:bodyPr wrap="none" lIns="0" tIns="0" rIns="0" bIns="0" rtlCol="0">
-            <a:spAutoFit/>
-          </a:bodyPr>
-          <a:lstStyle/>
-          <a:p>
-            <a:r>
-              <a:rPr lang="en-US" sz="1100" i="1" dirty="0"/>
-              <a:t>Ask question / Display data</a:t>
+                <a:latin typeface="+mj-lt"/>
+                <a:ea typeface="+mj-ea"/>
+                <a:cs typeface="+mj-cs"/>
+              </a:defRPr>
+            </a:lvl1pPr>
+          </a:lstStyle>
+          <a:p>
+            <a:pPr algn="l"/>
+            <a:r>
+              <a:rPr lang="en-US" sz="4000" dirty="0"/>
+              <a:t>Query Phase</a:t>
             </a:r>
           </a:p>
         </p:txBody>
@@ -8009,7 +9307,7 @@
     </p:spTree>
     <p:extLst>
       <p:ext uri="{BB962C8B-B14F-4D97-AF65-F5344CB8AC3E}">
-        <p14:creationId xmlns:p14="http://schemas.microsoft.com/office/powerpoint/2010/main" val="467536827"/>
+        <p14:creationId xmlns:p14="http://schemas.microsoft.com/office/powerpoint/2010/main" val="3238737500"/>
       </p:ext>
     </p:extLst>
   </p:cSld>

--- a/Project and Tool Layout.pptx
+++ b/Project and Tool Layout.pptx
@@ -7077,7 +7077,7 @@
         </p:nvSpPr>
         <p:spPr>
           <a:xfrm>
-            <a:off x="4211972" y="5000371"/>
+            <a:off x="7670527" y="4920178"/>
             <a:ext cx="4028187" cy="1650802"/>
           </a:xfrm>
           <a:prstGeom prst="rect">
@@ -7143,7 +7143,7 @@
         </p:nvSpPr>
         <p:spPr>
           <a:xfrm>
-            <a:off x="4271165" y="5000370"/>
+            <a:off x="7729720" y="4920177"/>
             <a:ext cx="3714012" cy="1313663"/>
           </a:xfrm>
           <a:prstGeom prst="rect">
@@ -7198,7 +7198,7 @@
         </p:nvSpPr>
         <p:spPr>
           <a:xfrm>
-            <a:off x="5591241" y="5000369"/>
+            <a:off x="9049796" y="4920176"/>
             <a:ext cx="1020305" cy="1100081"/>
           </a:xfrm>
           <a:prstGeom prst="rect">
@@ -7271,7 +7271,7 @@
         </p:nvSpPr>
         <p:spPr>
           <a:xfrm>
-            <a:off x="6693641" y="5000367"/>
+            <a:off x="10152196" y="4920174"/>
             <a:ext cx="1222081" cy="1100083"/>
           </a:xfrm>
           <a:prstGeom prst="rect">
@@ -7347,7 +7347,7 @@
         </p:nvSpPr>
         <p:spPr>
           <a:xfrm>
-            <a:off x="7985177" y="5000371"/>
+            <a:off x="11443732" y="4920178"/>
             <a:ext cx="202062" cy="1313662"/>
           </a:xfrm>
           <a:prstGeom prst="rect">
@@ -7387,10 +7387,10 @@
       </p:sp>
       <p:sp>
         <p:nvSpPr>
-          <p:cNvPr id="3" name="Rectangle 2">
-            <a:extLst>
-              <a:ext uri="{FF2B5EF4-FFF2-40B4-BE49-F238E27FC236}">
-                <a16:creationId xmlns:a16="http://schemas.microsoft.com/office/drawing/2014/main" id="{2624562D-A1F3-CEF9-451E-331CC6461D6E}"/>
+          <p:cNvPr id="5" name="Rectangle 4">
+            <a:extLst>
+              <a:ext uri="{FF2B5EF4-FFF2-40B4-BE49-F238E27FC236}">
+                <a16:creationId xmlns:a16="http://schemas.microsoft.com/office/drawing/2014/main" id="{377B6516-346C-8990-ACB5-79355B120195}"/>
               </a:ext>
             </a:extLst>
           </p:cNvPr>
@@ -7399,66 +7399,7 @@
         </p:nvSpPr>
         <p:spPr>
           <a:xfrm>
-            <a:off x="3114580" y="733345"/>
-            <a:ext cx="398031" cy="401369"/>
-          </a:xfrm>
-          <a:prstGeom prst="rect">
-            <a:avLst/>
-          </a:prstGeom>
-          <a:solidFill>
-            <a:schemeClr val="bg1">
-              <a:lumMod val="85000"/>
-            </a:schemeClr>
-          </a:solidFill>
-        </p:spPr>
-        <p:style>
-          <a:lnRef idx="2">
-            <a:schemeClr val="accent1">
-              <a:shade val="15000"/>
-            </a:schemeClr>
-          </a:lnRef>
-          <a:fillRef idx="1">
-            <a:schemeClr val="accent1"/>
-          </a:fillRef>
-          <a:effectRef idx="0">
-            <a:schemeClr val="accent1"/>
-          </a:effectRef>
-          <a:fontRef idx="minor">
-            <a:schemeClr val="lt1"/>
-          </a:fontRef>
-        </p:style>
-        <p:txBody>
-          <a:bodyPr lIns="0" tIns="45720" rIns="0" bIns="0" rtlCol="0" anchor="t"/>
-          <a:lstStyle/>
-          <a:p>
-            <a:pPr algn="ctr"/>
-            <a:r>
-              <a:rPr lang="en-US" sz="1100" b="1" dirty="0"/>
-              <a:t>Text Box</a:t>
-            </a:r>
-            <a:endParaRPr lang="en-US" sz="1200" dirty="0">
-              <a:solidFill>
-                <a:schemeClr val="tx1"/>
-              </a:solidFill>
-            </a:endParaRPr>
-          </a:p>
-        </p:txBody>
-      </p:sp>
-      <p:sp>
-        <p:nvSpPr>
-          <p:cNvPr id="5" name="Rectangle 4">
-            <a:extLst>
-              <a:ext uri="{FF2B5EF4-FFF2-40B4-BE49-F238E27FC236}">
-                <a16:creationId xmlns:a16="http://schemas.microsoft.com/office/drawing/2014/main" id="{377B6516-346C-8990-ACB5-79355B120195}"/>
-              </a:ext>
-            </a:extLst>
-          </p:cNvPr>
-          <p:cNvSpPr/>
-          <p:nvPr/>
-        </p:nvSpPr>
-        <p:spPr>
-          <a:xfrm>
-            <a:off x="1791433" y="733345"/>
+            <a:off x="562127" y="2087031"/>
             <a:ext cx="1116053" cy="401369"/>
           </a:xfrm>
           <a:prstGeom prst="rect">
@@ -7527,7 +7468,7 @@
         </p:nvSpPr>
         <p:spPr>
           <a:xfrm>
-            <a:off x="1791433" y="1926795"/>
+            <a:off x="562127" y="945957"/>
             <a:ext cx="1116053" cy="401369"/>
           </a:xfrm>
           <a:prstGeom prst="rect">
@@ -7584,10 +7525,10 @@
       </p:sp>
       <p:sp>
         <p:nvSpPr>
-          <p:cNvPr id="7" name="Rectangle 6">
-            <a:extLst>
-              <a:ext uri="{FF2B5EF4-FFF2-40B4-BE49-F238E27FC236}">
-                <a16:creationId xmlns:a16="http://schemas.microsoft.com/office/drawing/2014/main" id="{20F24B60-2905-0E09-E718-C84C2BFDB1B3}"/>
+          <p:cNvPr id="8" name="Rectangle 7">
+            <a:extLst>
+              <a:ext uri="{FF2B5EF4-FFF2-40B4-BE49-F238E27FC236}">
+                <a16:creationId xmlns:a16="http://schemas.microsoft.com/office/drawing/2014/main" id="{5F6E5B91-C632-7638-5DE6-41D98F5FAD3D}"/>
               </a:ext>
             </a:extLst>
           </p:cNvPr>
@@ -7596,8 +7537,8 @@
         </p:nvSpPr>
         <p:spPr>
           <a:xfrm>
-            <a:off x="3737717" y="385973"/>
-            <a:ext cx="122599" cy="2248872"/>
+            <a:off x="4586615" y="829460"/>
+            <a:ext cx="1022504" cy="1891091"/>
           </a:xfrm>
           <a:prstGeom prst="rect">
             <a:avLst/>
@@ -7628,19 +7569,70 @@
           <a:p>
             <a:pPr algn="ctr"/>
             <a:r>
-              <a:rPr lang="en-US" sz="1200" dirty="0"/>
-              <a:t>HTTP</a:t>
-            </a:r>
-            <a:endParaRPr lang="en-US" sz="500" dirty="0"/>
-          </a:p>
-        </p:txBody>
-      </p:sp>
-      <p:sp>
-        <p:nvSpPr>
-          <p:cNvPr id="8" name="Rectangle 7">
-            <a:extLst>
-              <a:ext uri="{FF2B5EF4-FFF2-40B4-BE49-F238E27FC236}">
-                <a16:creationId xmlns:a16="http://schemas.microsoft.com/office/drawing/2014/main" id="{5F6E5B91-C632-7638-5DE6-41D98F5FAD3D}"/>
+              <a:rPr lang="en-US" sz="1600" dirty="0"/>
+              <a:t>Web Services</a:t>
+            </a:r>
+            <a:endParaRPr lang="en-US" sz="1400" dirty="0"/>
+          </a:p>
+          <a:p>
+            <a:pPr algn="ctr"/>
+            <a:r>
+              <a:rPr lang="en-US" sz="1100" u="sng" dirty="0"/>
+              <a:t>app/web</a:t>
+            </a:r>
+          </a:p>
+          <a:p>
+            <a:pPr algn="ctr"/>
+            <a:endParaRPr lang="en-US" sz="1100" u="sng" dirty="0"/>
+          </a:p>
+          <a:p>
+            <a:pPr algn="ctr"/>
+            <a:r>
+              <a:rPr lang="en-US" sz="800" dirty="0"/>
+              <a:t>📚 </a:t>
+            </a:r>
+            <a:r>
+              <a:rPr lang="en-US" sz="800" b="1" u="sng" dirty="0"/>
+              <a:t>FastAPI</a:t>
+            </a:r>
+          </a:p>
+          <a:p>
+            <a:pPr algn="ctr"/>
+            <a:endParaRPr lang="en-US" sz="800" dirty="0"/>
+          </a:p>
+          <a:p>
+            <a:pPr algn="ctr"/>
+            <a:r>
+              <a:rPr lang="en-US" sz="800" dirty="0"/>
+              <a:t>Handles </a:t>
+            </a:r>
+          </a:p>
+          <a:p>
+            <a:pPr algn="ctr"/>
+            <a:r>
+              <a:rPr lang="en-US" sz="800" dirty="0"/>
+              <a:t>display for user interactions. </a:t>
+            </a:r>
+          </a:p>
+          <a:p>
+            <a:pPr algn="ctr"/>
+            <a:endParaRPr lang="en-US" sz="800" dirty="0"/>
+          </a:p>
+          <a:p>
+            <a:pPr algn="ctr"/>
+            <a:r>
+              <a:rPr lang="en-US" sz="800" dirty="0"/>
+              <a:t>Services via REST API</a:t>
+            </a:r>
+          </a:p>
+        </p:txBody>
+      </p:sp>
+      <p:sp>
+        <p:nvSpPr>
+          <p:cNvPr id="9" name="Rectangle 8">
+            <a:extLst>
+              <a:ext uri="{FF2B5EF4-FFF2-40B4-BE49-F238E27FC236}">
+                <a16:creationId xmlns:a16="http://schemas.microsoft.com/office/drawing/2014/main" id="{6337990E-CA5C-5E9E-B92E-0D2BC0C31F0B}"/>
               </a:ext>
             </a:extLst>
           </p:cNvPr>
@@ -7649,8 +7641,8 @@
         </p:nvSpPr>
         <p:spPr>
           <a:xfrm>
-            <a:off x="4215226" y="709327"/>
-            <a:ext cx="1022504" cy="1650807"/>
+            <a:off x="7670527" y="2581844"/>
+            <a:ext cx="1025758" cy="1650807"/>
           </a:xfrm>
           <a:prstGeom prst="rect">
             <a:avLst/>
@@ -7681,84 +7673,6 @@
           <a:p>
             <a:pPr algn="ctr"/>
             <a:r>
-              <a:rPr lang="en-US" sz="1600" dirty="0"/>
-              <a:t>Web Display</a:t>
-            </a:r>
-            <a:endParaRPr lang="en-US" sz="1400" dirty="0"/>
-          </a:p>
-          <a:p>
-            <a:pPr algn="ctr"/>
-            <a:r>
-              <a:rPr lang="en-US" sz="1100" u="sng" dirty="0"/>
-              <a:t>app/web</a:t>
-            </a:r>
-          </a:p>
-          <a:p>
-            <a:pPr algn="ctr"/>
-            <a:endParaRPr lang="en-US" sz="800" dirty="0"/>
-          </a:p>
-          <a:p>
-            <a:pPr algn="ctr"/>
-            <a:r>
-              <a:rPr lang="en-US" sz="800" dirty="0"/>
-              <a:t>Handles </a:t>
-            </a:r>
-          </a:p>
-          <a:p>
-            <a:pPr algn="ctr"/>
-            <a:r>
-              <a:rPr lang="en-US" sz="800" dirty="0"/>
-              <a:t>display for user interactions</a:t>
-            </a:r>
-          </a:p>
-        </p:txBody>
-      </p:sp>
-      <p:sp>
-        <p:nvSpPr>
-          <p:cNvPr id="9" name="Rectangle 8">
-            <a:extLst>
-              <a:ext uri="{FF2B5EF4-FFF2-40B4-BE49-F238E27FC236}">
-                <a16:creationId xmlns:a16="http://schemas.microsoft.com/office/drawing/2014/main" id="{6337990E-CA5C-5E9E-B92E-0D2BC0C31F0B}"/>
-              </a:ext>
-            </a:extLst>
-          </p:cNvPr>
-          <p:cNvSpPr/>
-          <p:nvPr/>
-        </p:nvSpPr>
-        <p:spPr>
-          <a:xfrm>
-            <a:off x="4211972" y="2662037"/>
-            <a:ext cx="1025758" cy="1650807"/>
-          </a:xfrm>
-          <a:prstGeom prst="rect">
-            <a:avLst/>
-          </a:prstGeom>
-          <a:solidFill>
-            <a:srgbClr val="7030A0"/>
-          </a:solidFill>
-        </p:spPr>
-        <p:style>
-          <a:lnRef idx="2">
-            <a:schemeClr val="accent1">
-              <a:shade val="15000"/>
-            </a:schemeClr>
-          </a:lnRef>
-          <a:fillRef idx="1">
-            <a:schemeClr val="accent1"/>
-          </a:fillRef>
-          <a:effectRef idx="0">
-            <a:schemeClr val="accent1"/>
-          </a:effectRef>
-          <a:fontRef idx="minor">
-            <a:schemeClr val="lt1"/>
-          </a:fontRef>
-        </p:style>
-        <p:txBody>
-          <a:bodyPr lIns="0" tIns="0" rIns="0" bIns="0" rtlCol="0" anchor="ctr"/>
-          <a:lstStyle/>
-          <a:p>
-            <a:pPr algn="ctr"/>
-            <a:r>
               <a:rPr lang="en-US" dirty="0"/>
               <a:t>Query Parser</a:t>
             </a:r>
@@ -7768,7 +7682,7 @@
             <a:pPr algn="ctr"/>
             <a:r>
               <a:rPr lang="en-US" sz="1100" u="sng" dirty="0"/>
-              <a:t>app/producer</a:t>
+              <a:t>app/parser</a:t>
             </a:r>
           </a:p>
           <a:p>
@@ -7819,7 +7733,7 @@
         </p:nvSpPr>
         <p:spPr>
           <a:xfrm>
-            <a:off x="5983906" y="2662037"/>
+            <a:off x="9230729" y="2581844"/>
             <a:ext cx="1025758" cy="1650807"/>
           </a:xfrm>
           <a:prstGeom prst="rect">
@@ -7924,7 +7838,7 @@
         </p:nvSpPr>
         <p:spPr>
           <a:xfrm>
-            <a:off x="7310810" y="2662037"/>
+            <a:off x="10769365" y="2581844"/>
             <a:ext cx="929349" cy="1650807"/>
           </a:xfrm>
           <a:prstGeom prst="rect">
@@ -8006,15 +7920,14 @@
           </p:cNvPr>
           <p:cNvCxnSpPr>
             <a:cxnSpLocks/>
-            <a:stCxn id="3" idx="1"/>
             <a:endCxn id="5" idx="3"/>
           </p:cNvCxnSpPr>
           <p:nvPr/>
         </p:nvCxnSpPr>
         <p:spPr>
           <a:xfrm flipH="1">
-            <a:off x="2907486" y="934030"/>
-            <a:ext cx="207094" cy="0"/>
+            <a:off x="1678180" y="2287716"/>
+            <a:ext cx="552826" cy="0"/>
           </a:xfrm>
           <a:prstGeom prst="straightConnector1">
             <a:avLst/>
@@ -8053,61 +7966,13 @@
           </p:cNvPr>
           <p:cNvCxnSpPr>
             <a:cxnSpLocks/>
-            <a:endCxn id="3" idx="3"/>
           </p:cNvCxnSpPr>
           <p:nvPr/>
         </p:nvCxnSpPr>
         <p:spPr>
           <a:xfrm flipH="1">
-            <a:off x="3512611" y="934029"/>
-            <a:ext cx="702615" cy="1"/>
-          </a:xfrm>
-          <a:prstGeom prst="straightConnector1">
-            <a:avLst/>
-          </a:prstGeom>
-          <a:ln w="12700">
-            <a:solidFill>
-              <a:schemeClr val="tx1"/>
-            </a:solidFill>
-            <a:headEnd type="arrow"/>
-            <a:tailEnd type="none"/>
-          </a:ln>
-        </p:spPr>
-        <p:style>
-          <a:lnRef idx="1">
-            <a:schemeClr val="accent1"/>
-          </a:lnRef>
-          <a:fillRef idx="0">
-            <a:schemeClr val="accent1"/>
-          </a:fillRef>
-          <a:effectRef idx="0">
-            <a:schemeClr val="accent1"/>
-          </a:effectRef>
-          <a:fontRef idx="minor">
-            <a:schemeClr val="tx1"/>
-          </a:fontRef>
-        </p:style>
-      </p:cxnSp>
-      <p:cxnSp>
-        <p:nvCxnSpPr>
-          <p:cNvPr id="21" name="Straight Arrow Connector 20">
-            <a:extLst>
-              <a:ext uri="{FF2B5EF4-FFF2-40B4-BE49-F238E27FC236}">
-                <a16:creationId xmlns:a16="http://schemas.microsoft.com/office/drawing/2014/main" id="{03AF897F-7D7C-FBC4-FE31-D98E8DB3A99D}"/>
-              </a:ext>
-            </a:extLst>
-          </p:cNvPr>
-          <p:cNvCxnSpPr>
-            <a:cxnSpLocks/>
-            <a:stCxn id="9" idx="0"/>
-            <a:endCxn id="8" idx="2"/>
-          </p:cNvCxnSpPr>
-          <p:nvPr/>
-        </p:nvCxnSpPr>
-        <p:spPr>
-          <a:xfrm flipV="1">
-            <a:off x="4724851" y="2360134"/>
-            <a:ext cx="1627" cy="301903"/>
+            <a:off x="3259163" y="2287715"/>
+            <a:ext cx="1309366" cy="0"/>
           </a:xfrm>
           <a:prstGeom prst="straightConnector1">
             <a:avLst/>
@@ -8152,7 +8017,7 @@
         </p:nvCxnSpPr>
         <p:spPr>
           <a:xfrm flipV="1">
-            <a:off x="4724851" y="4312844"/>
+            <a:off x="8183406" y="4232651"/>
             <a:ext cx="0" cy="687522"/>
           </a:xfrm>
           <a:prstGeom prst="straightConnector1">
@@ -8162,6 +8027,7 @@
             <a:solidFill>
               <a:schemeClr val="tx1"/>
             </a:solidFill>
+            <a:prstDash val="dash"/>
             <a:headEnd type="arrow"/>
             <a:tailEnd type="arrow"/>
           </a:ln>
@@ -8199,8 +8065,8 @@
         </p:nvCxnSpPr>
         <p:spPr>
           <a:xfrm flipH="1">
-            <a:off x="7009664" y="3487441"/>
-            <a:ext cx="301146" cy="0"/>
+            <a:off x="10256487" y="3407248"/>
+            <a:ext cx="512878" cy="0"/>
           </a:xfrm>
           <a:prstGeom prst="straightConnector1">
             <a:avLst/>
@@ -8244,7 +8110,7 @@
         </p:nvCxnSpPr>
         <p:spPr>
           <a:xfrm flipV="1">
-            <a:off x="6144512" y="4312844"/>
+            <a:off x="9708766" y="4232651"/>
             <a:ext cx="0" cy="687522"/>
           </a:xfrm>
           <a:prstGeom prst="straightConnector1">
@@ -8254,6 +8120,7 @@
             <a:solidFill>
               <a:schemeClr val="tx1"/>
             </a:solidFill>
+            <a:prstDash val="dash"/>
             <a:headEnd type="arrow"/>
             <a:tailEnd type="arrow"/>
           </a:ln>
@@ -8284,13 +8151,12 @@
           </p:cNvPr>
           <p:cNvCxnSpPr>
             <a:cxnSpLocks/>
-            <a:endCxn id="73" idx="0"/>
           </p:cNvCxnSpPr>
           <p:nvPr/>
         </p:nvCxnSpPr>
         <p:spPr>
           <a:xfrm flipH="1">
-            <a:off x="7140831" y="4312844"/>
+            <a:off x="10657590" y="4232651"/>
             <a:ext cx="231288" cy="208593"/>
           </a:xfrm>
           <a:prstGeom prst="straightConnector1">
@@ -8300,6 +8166,7 @@
             <a:solidFill>
               <a:schemeClr val="tx1"/>
             </a:solidFill>
+            <a:prstDash val="dash"/>
             <a:headEnd type="arrow"/>
             <a:tailEnd type="arrow"/>
           </a:ln>
@@ -8330,13 +8197,12 @@
           </p:cNvPr>
           <p:cNvCxnSpPr>
             <a:cxnSpLocks/>
-            <a:endCxn id="73" idx="0"/>
           </p:cNvCxnSpPr>
           <p:nvPr/>
         </p:nvCxnSpPr>
         <p:spPr>
           <a:xfrm>
-            <a:off x="6936102" y="4312844"/>
+            <a:off x="10258677" y="4232651"/>
             <a:ext cx="204729" cy="208593"/>
           </a:xfrm>
           <a:prstGeom prst="straightConnector1">
@@ -8346,6 +8212,7 @@
             <a:solidFill>
               <a:schemeClr val="tx1"/>
             </a:solidFill>
+            <a:prstDash val="dash"/>
             <a:headEnd type="arrow"/>
             <a:tailEnd type="arrow"/>
           </a:ln>
@@ -8383,8 +8250,8 @@
         </p:nvCxnSpPr>
         <p:spPr>
           <a:xfrm flipH="1">
-            <a:off x="5237730" y="3487441"/>
-            <a:ext cx="746176" cy="0"/>
+            <a:off x="8696285" y="3407248"/>
+            <a:ext cx="534444" cy="0"/>
           </a:xfrm>
           <a:prstGeom prst="straightConnector1">
             <a:avLst/>
@@ -8428,7 +8295,7 @@
         </p:nvCxnSpPr>
         <p:spPr>
           <a:xfrm flipV="1">
-            <a:off x="7842885" y="4312844"/>
+            <a:off x="11301440" y="4232651"/>
             <a:ext cx="0" cy="687522"/>
           </a:xfrm>
           <a:prstGeom prst="straightConnector1">
@@ -8438,6 +8305,7 @@
             <a:solidFill>
               <a:schemeClr val="tx1"/>
             </a:solidFill>
+            <a:prstDash val="dash"/>
             <a:headEnd type="arrow"/>
             <a:tailEnd type="arrow"/>
           </a:ln>
@@ -8471,7 +8339,7 @@
         </p:nvSpPr>
         <p:spPr>
           <a:xfrm>
-            <a:off x="4341573" y="5000368"/>
+            <a:off x="7800128" y="4920175"/>
             <a:ext cx="1167573" cy="1100082"/>
           </a:xfrm>
           <a:prstGeom prst="rect">
@@ -8544,13 +8412,12 @@
           </p:cNvPr>
           <p:cNvCxnSpPr>
             <a:cxnSpLocks/>
-            <a:stCxn id="6" idx="3"/>
           </p:cNvCxnSpPr>
           <p:nvPr/>
         </p:nvCxnSpPr>
         <p:spPr>
           <a:xfrm flipV="1">
-            <a:off x="2907486" y="2127479"/>
+            <a:off x="3260789" y="1146641"/>
             <a:ext cx="1307740" cy="1"/>
           </a:xfrm>
           <a:prstGeom prst="straightConnector1">
@@ -8593,7 +8460,7 @@
         </p:nvSpPr>
         <p:spPr>
           <a:xfrm>
-            <a:off x="6779879" y="4521437"/>
+            <a:off x="10186804" y="4441244"/>
             <a:ext cx="721904" cy="270336"/>
           </a:xfrm>
           <a:prstGeom prst="rect">
@@ -8650,15 +8517,16 @@
             </a:extLst>
           </p:cNvPr>
           <p:cNvCxnSpPr>
+            <a:cxnSpLocks/>
             <a:stCxn id="11" idx="0"/>
-            <a:endCxn id="8" idx="3"/>
+            <a:endCxn id="143" idx="3"/>
           </p:cNvCxnSpPr>
           <p:nvPr/>
         </p:nvCxnSpPr>
         <p:spPr>
           <a:xfrm rot="16200000" flipV="1">
-            <a:off x="5303605" y="1468856"/>
-            <a:ext cx="1127306" cy="1259055"/>
+            <a:off x="7974790" y="813026"/>
+            <a:ext cx="1068588" cy="2469048"/>
           </a:xfrm>
           <a:prstGeom prst="curvedConnector2">
             <a:avLst/>
@@ -8700,7 +8568,7 @@
         </p:nvSpPr>
         <p:spPr>
           <a:xfrm>
-            <a:off x="5598996" y="1903523"/>
+            <a:off x="8183406" y="1775005"/>
             <a:ext cx="687689" cy="338554"/>
           </a:xfrm>
           <a:prstGeom prst="rect">
@@ -8752,8 +8620,8 @@
         </p:nvCxnSpPr>
         <p:spPr>
           <a:xfrm rot="16200000" flipV="1">
-            <a:off x="5825639" y="712191"/>
-            <a:ext cx="1367591" cy="2532102"/>
+            <a:off x="8563858" y="-88338"/>
+            <a:ext cx="1380885" cy="3959480"/>
           </a:xfrm>
           <a:prstGeom prst="curvedConnector2">
             <a:avLst/>
@@ -8795,7 +8663,7 @@
         </p:nvSpPr>
         <p:spPr>
           <a:xfrm>
-            <a:off x="6886049" y="1471316"/>
+            <a:off x="8638501" y="1120812"/>
             <a:ext cx="615163" cy="161583"/>
           </a:xfrm>
           <a:prstGeom prst="rect">
@@ -8836,7 +8704,7 @@
         </p:nvSpPr>
         <p:spPr>
           <a:xfrm rot="16200000">
-            <a:off x="1572198" y="813889"/>
+            <a:off x="1998780" y="1993941"/>
             <a:ext cx="186884" cy="240280"/>
           </a:xfrm>
           <a:prstGeom prst="flowChartOffpageConnector">
@@ -8897,7 +8765,7 @@
         </p:nvSpPr>
         <p:spPr>
           <a:xfrm rot="16200000">
-            <a:off x="3995991" y="589186"/>
+            <a:off x="4367380" y="1942872"/>
             <a:ext cx="186884" cy="240280"/>
           </a:xfrm>
           <a:prstGeom prst="flowChartOffpageConnector">
@@ -8958,7 +8826,7 @@
         </p:nvSpPr>
         <p:spPr>
           <a:xfrm rot="16200000">
-            <a:off x="3983792" y="2541897"/>
+            <a:off x="7442347" y="3043410"/>
             <a:ext cx="186884" cy="240280"/>
           </a:xfrm>
           <a:prstGeom prst="flowChartOffpageConnector">
@@ -9019,7 +8887,7 @@
         </p:nvSpPr>
         <p:spPr>
           <a:xfrm rot="16200000">
-            <a:off x="5759297" y="2541896"/>
+            <a:off x="9006120" y="3043409"/>
             <a:ext cx="186884" cy="240280"/>
           </a:xfrm>
           <a:prstGeom prst="flowChartOffpageConnector">
@@ -9080,7 +8948,7 @@
         </p:nvSpPr>
         <p:spPr>
           <a:xfrm rot="16200000">
-            <a:off x="7081963" y="2541895"/>
+            <a:off x="10540518" y="3043408"/>
             <a:ext cx="186884" cy="240280"/>
           </a:xfrm>
           <a:prstGeom prst="flowChartOffpageConnector">
@@ -9141,7 +9009,7 @@
         </p:nvSpPr>
         <p:spPr>
           <a:xfrm rot="16200000">
-            <a:off x="6638932" y="1366235"/>
+            <a:off x="8395553" y="1033332"/>
             <a:ext cx="186884" cy="210161"/>
           </a:xfrm>
           <a:prstGeom prst="flowChartOffpageConnector">
@@ -9202,7 +9070,7 @@
         </p:nvSpPr>
         <p:spPr>
           <a:xfrm rot="16200000">
-            <a:off x="1557137" y="2022398"/>
+            <a:off x="1983719" y="867926"/>
             <a:ext cx="186884" cy="210161"/>
           </a:xfrm>
           <a:prstGeom prst="flowChartOffpageConnector">
@@ -9244,7 +9112,7 @@
                   </a:schemeClr>
                 </a:solidFill>
               </a:rPr>
-              <a:t>7</a:t>
+              <a:t>9</a:t>
             </a:r>
           </a:p>
         </p:txBody>
@@ -9300,6 +9168,500 @@
             <a:r>
               <a:rPr lang="en-US" sz="4000" dirty="0"/>
               <a:t>Query Phase</a:t>
+            </a:r>
+          </a:p>
+        </p:txBody>
+      </p:sp>
+      <p:sp>
+        <p:nvSpPr>
+          <p:cNvPr id="128" name="Rectangle 127">
+            <a:extLst>
+              <a:ext uri="{FF2B5EF4-FFF2-40B4-BE49-F238E27FC236}">
+                <a16:creationId xmlns:a16="http://schemas.microsoft.com/office/drawing/2014/main" id="{A153D90E-A2E5-4404-AD68-B92944BEAE64}"/>
+              </a:ext>
+            </a:extLst>
+          </p:cNvPr>
+          <p:cNvSpPr/>
+          <p:nvPr/>
+        </p:nvSpPr>
+        <p:spPr>
+          <a:xfrm>
+            <a:off x="2236659" y="829460"/>
+            <a:ext cx="1022504" cy="1891091"/>
+          </a:xfrm>
+          <a:prstGeom prst="rect">
+            <a:avLst/>
+          </a:prstGeom>
+          <a:solidFill>
+            <a:schemeClr val="accent6">
+              <a:lumMod val="75000"/>
+            </a:schemeClr>
+          </a:solidFill>
+        </p:spPr>
+        <p:style>
+          <a:lnRef idx="2">
+            <a:schemeClr val="accent1">
+              <a:shade val="15000"/>
+            </a:schemeClr>
+          </a:lnRef>
+          <a:fillRef idx="1">
+            <a:schemeClr val="accent1"/>
+          </a:fillRef>
+          <a:effectRef idx="0">
+            <a:schemeClr val="accent1"/>
+          </a:effectRef>
+          <a:fontRef idx="minor">
+            <a:schemeClr val="lt1"/>
+          </a:fontRef>
+        </p:style>
+        <p:txBody>
+          <a:bodyPr lIns="0" tIns="0" rIns="0" bIns="0" rtlCol="0" anchor="ctr"/>
+          <a:lstStyle/>
+          <a:p>
+            <a:pPr algn="ctr"/>
+            <a:r>
+              <a:rPr lang="en-US" sz="1600" dirty="0"/>
+              <a:t>Web App</a:t>
+            </a:r>
+            <a:endParaRPr lang="en-US" sz="1400" dirty="0"/>
+          </a:p>
+          <a:p>
+            <a:pPr algn="ctr"/>
+            <a:r>
+              <a:rPr lang="en-US" sz="800" dirty="0"/>
+              <a:t>(Front End)</a:t>
+            </a:r>
+          </a:p>
+          <a:p>
+            <a:pPr algn="ctr"/>
+            <a:endParaRPr lang="en-US" sz="800" dirty="0"/>
+          </a:p>
+          <a:p>
+            <a:pPr algn="ctr"/>
+            <a:r>
+              <a:rPr lang="en-US" sz="800" dirty="0"/>
+              <a:t>📚 </a:t>
+            </a:r>
+            <a:r>
+              <a:rPr lang="en-US" sz="800" b="1" u="sng" dirty="0"/>
+              <a:t>Angular</a:t>
+            </a:r>
+            <a:endParaRPr lang="en-US" sz="800" dirty="0"/>
+          </a:p>
+          <a:p>
+            <a:pPr algn="ctr"/>
+            <a:r>
+              <a:rPr lang="en-US" sz="800" dirty="0"/>
+              <a:t>📚 </a:t>
+            </a:r>
+            <a:r>
+              <a:rPr lang="en-US" sz="800" b="1" u="sng" dirty="0"/>
+              <a:t>ngrx/signals</a:t>
+            </a:r>
+            <a:endParaRPr lang="en-US" sz="800" dirty="0"/>
+          </a:p>
+          <a:p>
+            <a:pPr algn="ctr"/>
+            <a:endParaRPr lang="en-US" sz="800" dirty="0"/>
+          </a:p>
+          <a:p>
+            <a:pPr algn="ctr"/>
+            <a:r>
+              <a:rPr lang="en-US" sz="800" dirty="0"/>
+              <a:t>Interacts with backend web services </a:t>
+            </a:r>
+          </a:p>
+        </p:txBody>
+      </p:sp>
+      <p:cxnSp>
+        <p:nvCxnSpPr>
+          <p:cNvPr id="132" name="Straight Arrow Connector 131">
+            <a:extLst>
+              <a:ext uri="{FF2B5EF4-FFF2-40B4-BE49-F238E27FC236}">
+                <a16:creationId xmlns:a16="http://schemas.microsoft.com/office/drawing/2014/main" id="{63A5CFC1-5969-1075-024E-14A656251337}"/>
+              </a:ext>
+            </a:extLst>
+          </p:cNvPr>
+          <p:cNvCxnSpPr>
+            <a:cxnSpLocks/>
+            <a:endCxn id="6" idx="3"/>
+          </p:cNvCxnSpPr>
+          <p:nvPr/>
+        </p:nvCxnSpPr>
+        <p:spPr>
+          <a:xfrm flipH="1">
+            <a:off x="1678180" y="1146642"/>
+            <a:ext cx="552826" cy="0"/>
+          </a:xfrm>
+          <a:prstGeom prst="straightConnector1">
+            <a:avLst/>
+          </a:prstGeom>
+          <a:ln w="12700">
+            <a:solidFill>
+              <a:schemeClr val="tx1"/>
+            </a:solidFill>
+            <a:headEnd type="arrow"/>
+            <a:tailEnd type="none"/>
+          </a:ln>
+        </p:spPr>
+        <p:style>
+          <a:lnRef idx="1">
+            <a:schemeClr val="accent1"/>
+          </a:lnRef>
+          <a:fillRef idx="0">
+            <a:schemeClr val="accent1"/>
+          </a:fillRef>
+          <a:effectRef idx="0">
+            <a:schemeClr val="accent1"/>
+          </a:effectRef>
+          <a:fontRef idx="minor">
+            <a:schemeClr val="tx1"/>
+          </a:fontRef>
+        </p:style>
+      </p:cxnSp>
+      <p:sp>
+        <p:nvSpPr>
+          <p:cNvPr id="136" name="Flowchart: Off-page Connector 135">
+            <a:extLst>
+              <a:ext uri="{FF2B5EF4-FFF2-40B4-BE49-F238E27FC236}">
+                <a16:creationId xmlns:a16="http://schemas.microsoft.com/office/drawing/2014/main" id="{A1B0BCD8-DCD6-7861-F57A-66F9A0626BD6}"/>
+              </a:ext>
+            </a:extLst>
+          </p:cNvPr>
+          <p:cNvSpPr/>
+          <p:nvPr/>
+        </p:nvSpPr>
+        <p:spPr>
+          <a:xfrm rot="16200000">
+            <a:off x="4343854" y="916049"/>
+            <a:ext cx="186884" cy="210161"/>
+          </a:xfrm>
+          <a:prstGeom prst="flowChartOffpageConnector">
+            <a:avLst/>
+          </a:prstGeom>
+          <a:solidFill>
+            <a:schemeClr val="accent4">
+              <a:lumMod val="60000"/>
+              <a:lumOff val="40000"/>
+            </a:schemeClr>
+          </a:solidFill>
+        </p:spPr>
+        <p:style>
+          <a:lnRef idx="2">
+            <a:schemeClr val="accent1">
+              <a:shade val="15000"/>
+            </a:schemeClr>
+          </a:lnRef>
+          <a:fillRef idx="1">
+            <a:schemeClr val="accent1"/>
+          </a:fillRef>
+          <a:effectRef idx="0">
+            <a:schemeClr val="accent1"/>
+          </a:effectRef>
+          <a:fontRef idx="minor">
+            <a:schemeClr val="lt1"/>
+          </a:fontRef>
+        </p:style>
+        <p:txBody>
+          <a:bodyPr vert="vert" rtlCol="0" anchor="ctr"/>
+          <a:lstStyle/>
+          <a:p>
+            <a:pPr algn="ctr"/>
+            <a:r>
+              <a:rPr lang="en-US" sz="1400" b="1" dirty="0">
+                <a:solidFill>
+                  <a:schemeClr val="accent4">
+                    <a:lumMod val="75000"/>
+                  </a:schemeClr>
+                </a:solidFill>
+              </a:rPr>
+              <a:t>8</a:t>
+            </a:r>
+          </a:p>
+        </p:txBody>
+      </p:sp>
+      <p:sp>
+        <p:nvSpPr>
+          <p:cNvPr id="7" name="Rectangle 6">
+            <a:extLst>
+              <a:ext uri="{FF2B5EF4-FFF2-40B4-BE49-F238E27FC236}">
+                <a16:creationId xmlns:a16="http://schemas.microsoft.com/office/drawing/2014/main" id="{20F24B60-2905-0E09-E718-C84C2BFDB1B3}"/>
+              </a:ext>
+            </a:extLst>
+          </p:cNvPr>
+          <p:cNvSpPr/>
+          <p:nvPr/>
+        </p:nvSpPr>
+        <p:spPr>
+          <a:xfrm>
+            <a:off x="3865914" y="746390"/>
+            <a:ext cx="122599" cy="2248872"/>
+          </a:xfrm>
+          <a:prstGeom prst="rect">
+            <a:avLst/>
+          </a:prstGeom>
+          <a:solidFill>
+            <a:schemeClr val="bg1">
+              <a:lumMod val="65000"/>
+            </a:schemeClr>
+          </a:solidFill>
+        </p:spPr>
+        <p:style>
+          <a:lnRef idx="2">
+            <a:schemeClr val="accent1">
+              <a:shade val="15000"/>
+            </a:schemeClr>
+          </a:lnRef>
+          <a:fillRef idx="1">
+            <a:schemeClr val="accent1"/>
+          </a:fillRef>
+          <a:effectRef idx="0">
+            <a:schemeClr val="accent1"/>
+          </a:effectRef>
+          <a:fontRef idx="minor">
+            <a:schemeClr val="lt1"/>
+          </a:fontRef>
+        </p:style>
+        <p:txBody>
+          <a:bodyPr lIns="0" tIns="0" rIns="0" bIns="0" rtlCol="0" anchor="ctr"/>
+          <a:lstStyle/>
+          <a:p>
+            <a:pPr algn="ctr"/>
+            <a:r>
+              <a:rPr lang="en-US" sz="1200" dirty="0"/>
+              <a:t>HTTP</a:t>
+            </a:r>
+            <a:endParaRPr lang="en-US" sz="500" dirty="0"/>
+          </a:p>
+        </p:txBody>
+      </p:sp>
+      <p:sp>
+        <p:nvSpPr>
+          <p:cNvPr id="143" name="Rectangle 142">
+            <a:extLst>
+              <a:ext uri="{FF2B5EF4-FFF2-40B4-BE49-F238E27FC236}">
+                <a16:creationId xmlns:a16="http://schemas.microsoft.com/office/drawing/2014/main" id="{38DEB2BA-D85C-50E6-40BC-A6CD7A7ADEEE}"/>
+              </a:ext>
+            </a:extLst>
+          </p:cNvPr>
+          <p:cNvSpPr/>
+          <p:nvPr/>
+        </p:nvSpPr>
+        <p:spPr>
+          <a:xfrm>
+            <a:off x="6252056" y="829460"/>
+            <a:ext cx="1022504" cy="1367591"/>
+          </a:xfrm>
+          <a:prstGeom prst="rect">
+            <a:avLst/>
+          </a:prstGeom>
+          <a:solidFill>
+            <a:srgbClr val="7030A0"/>
+          </a:solidFill>
+        </p:spPr>
+        <p:style>
+          <a:lnRef idx="2">
+            <a:schemeClr val="accent1">
+              <a:shade val="15000"/>
+            </a:schemeClr>
+          </a:lnRef>
+          <a:fillRef idx="1">
+            <a:schemeClr val="accent1"/>
+          </a:fillRef>
+          <a:effectRef idx="0">
+            <a:schemeClr val="accent1"/>
+          </a:effectRef>
+          <a:fontRef idx="minor">
+            <a:schemeClr val="lt1"/>
+          </a:fontRef>
+        </p:style>
+        <p:txBody>
+          <a:bodyPr lIns="0" tIns="0" rIns="0" bIns="0" rtlCol="0" anchor="ctr"/>
+          <a:lstStyle/>
+          <a:p>
+            <a:pPr algn="ctr"/>
+            <a:r>
+              <a:rPr lang="en-US" sz="1600" dirty="0"/>
+              <a:t>Prose</a:t>
+            </a:r>
+            <a:br>
+              <a:rPr lang="en-US" sz="1600" dirty="0"/>
+            </a:br>
+            <a:r>
+              <a:rPr lang="en-US" sz="1600" dirty="0"/>
+              <a:t>Formatter</a:t>
+            </a:r>
+            <a:endParaRPr lang="en-US" sz="1400" dirty="0"/>
+          </a:p>
+          <a:p>
+            <a:pPr algn="ctr"/>
+            <a:r>
+              <a:rPr lang="en-US" sz="1100" u="sng" dirty="0"/>
+              <a:t>app/?</a:t>
+            </a:r>
+          </a:p>
+          <a:p>
+            <a:pPr algn="ctr"/>
+            <a:endParaRPr lang="en-US" sz="800" dirty="0"/>
+          </a:p>
+          <a:p>
+            <a:pPr algn="ctr"/>
+            <a:r>
+              <a:rPr lang="en-US" sz="800" dirty="0"/>
+              <a:t>Formats any query result into proper format for display</a:t>
+            </a:r>
+          </a:p>
+        </p:txBody>
+      </p:sp>
+      <p:cxnSp>
+        <p:nvCxnSpPr>
+          <p:cNvPr id="145" name="Connector: Elbow 144">
+            <a:extLst>
+              <a:ext uri="{FF2B5EF4-FFF2-40B4-BE49-F238E27FC236}">
+                <a16:creationId xmlns:a16="http://schemas.microsoft.com/office/drawing/2014/main" id="{A6A16BBE-2B6E-7F70-B4BE-7034BADC2191}"/>
+              </a:ext>
+            </a:extLst>
+          </p:cNvPr>
+          <p:cNvCxnSpPr>
+            <a:stCxn id="8" idx="2"/>
+            <a:endCxn id="9" idx="1"/>
+          </p:cNvCxnSpPr>
+          <p:nvPr/>
+        </p:nvCxnSpPr>
+        <p:spPr>
+          <a:xfrm rot="16200000" flipH="1">
+            <a:off x="6040849" y="1777569"/>
+            <a:ext cx="686697" cy="2572660"/>
+          </a:xfrm>
+          <a:prstGeom prst="bentConnector2">
+            <a:avLst/>
+          </a:prstGeom>
+          <a:ln w="12700">
+            <a:solidFill>
+              <a:schemeClr val="tx1"/>
+            </a:solidFill>
+            <a:headEnd type="none"/>
+            <a:tailEnd type="arrow"/>
+          </a:ln>
+        </p:spPr>
+        <p:style>
+          <a:lnRef idx="1">
+            <a:schemeClr val="accent1"/>
+          </a:lnRef>
+          <a:fillRef idx="0">
+            <a:schemeClr val="accent1"/>
+          </a:fillRef>
+          <a:effectRef idx="0">
+            <a:schemeClr val="accent1"/>
+          </a:effectRef>
+          <a:fontRef idx="minor">
+            <a:schemeClr val="tx1"/>
+          </a:fontRef>
+        </p:style>
+      </p:cxnSp>
+      <p:cxnSp>
+        <p:nvCxnSpPr>
+          <p:cNvPr id="146" name="Straight Arrow Connector 145">
+            <a:extLst>
+              <a:ext uri="{FF2B5EF4-FFF2-40B4-BE49-F238E27FC236}">
+                <a16:creationId xmlns:a16="http://schemas.microsoft.com/office/drawing/2014/main" id="{7B9890BF-AA75-9B52-CA47-20B28D8B417A}"/>
+              </a:ext>
+            </a:extLst>
+          </p:cNvPr>
+          <p:cNvCxnSpPr>
+            <a:cxnSpLocks/>
+            <a:endCxn id="143" idx="1"/>
+          </p:cNvCxnSpPr>
+          <p:nvPr/>
+        </p:nvCxnSpPr>
+        <p:spPr>
+          <a:xfrm>
+            <a:off x="5627205" y="1513256"/>
+            <a:ext cx="624851" cy="0"/>
+          </a:xfrm>
+          <a:prstGeom prst="straightConnector1">
+            <a:avLst/>
+          </a:prstGeom>
+          <a:ln w="12700">
+            <a:solidFill>
+              <a:schemeClr val="tx1"/>
+            </a:solidFill>
+            <a:headEnd type="arrow"/>
+            <a:tailEnd type="none"/>
+          </a:ln>
+        </p:spPr>
+        <p:style>
+          <a:lnRef idx="1">
+            <a:schemeClr val="accent1"/>
+          </a:lnRef>
+          <a:fillRef idx="0">
+            <a:schemeClr val="accent1"/>
+          </a:fillRef>
+          <a:effectRef idx="0">
+            <a:schemeClr val="accent1"/>
+          </a:effectRef>
+          <a:fontRef idx="minor">
+            <a:schemeClr val="tx1"/>
+          </a:fontRef>
+        </p:style>
+      </p:cxnSp>
+      <p:sp>
+        <p:nvSpPr>
+          <p:cNvPr id="154" name="Flowchart: Off-page Connector 153">
+            <a:extLst>
+              <a:ext uri="{FF2B5EF4-FFF2-40B4-BE49-F238E27FC236}">
+                <a16:creationId xmlns:a16="http://schemas.microsoft.com/office/drawing/2014/main" id="{A3D4D619-1AF9-A9AD-A963-8280C6167FD0}"/>
+              </a:ext>
+            </a:extLst>
+          </p:cNvPr>
+          <p:cNvSpPr/>
+          <p:nvPr/>
+        </p:nvSpPr>
+        <p:spPr>
+          <a:xfrm rot="16200000">
+            <a:off x="5944109" y="1270756"/>
+            <a:ext cx="186884" cy="210161"/>
+          </a:xfrm>
+          <a:prstGeom prst="flowChartOffpageConnector">
+            <a:avLst/>
+          </a:prstGeom>
+          <a:solidFill>
+            <a:schemeClr val="accent4">
+              <a:lumMod val="60000"/>
+              <a:lumOff val="40000"/>
+            </a:schemeClr>
+          </a:solidFill>
+        </p:spPr>
+        <p:style>
+          <a:lnRef idx="2">
+            <a:schemeClr val="accent1">
+              <a:shade val="15000"/>
+            </a:schemeClr>
+          </a:lnRef>
+          <a:fillRef idx="1">
+            <a:schemeClr val="accent1"/>
+          </a:fillRef>
+          <a:effectRef idx="0">
+            <a:schemeClr val="accent1"/>
+          </a:effectRef>
+          <a:fontRef idx="minor">
+            <a:schemeClr val="lt1"/>
+          </a:fontRef>
+        </p:style>
+        <p:txBody>
+          <a:bodyPr vert="vert" rtlCol="0" anchor="ctr"/>
+          <a:lstStyle/>
+          <a:p>
+            <a:pPr algn="ctr"/>
+            <a:r>
+              <a:rPr lang="en-US" sz="1400" b="1" dirty="0">
+                <a:solidFill>
+                  <a:schemeClr val="accent4">
+                    <a:lumMod val="75000"/>
+                  </a:schemeClr>
+                </a:solidFill>
+              </a:rPr>
+              <a:t>7</a:t>
             </a:r>
           </a:p>
         </p:txBody>

--- a/Project and Tool Layout.pptx
+++ b/Project and Tool Layout.pptx
@@ -7570,7 +7570,7 @@
             <a:pPr algn="ctr"/>
             <a:r>
               <a:rPr lang="en-US" sz="1600" dirty="0"/>
-              <a:t>Web Services</a:t>
+              <a:t>Web Server</a:t>
             </a:r>
             <a:endParaRPr lang="en-US" sz="1400" dirty="0"/>
           </a:p>
@@ -7578,7 +7578,15 @@
             <a:pPr algn="ctr"/>
             <a:r>
               <a:rPr lang="en-US" sz="1100" u="sng" dirty="0"/>
-              <a:t>app/web</a:t>
+              <a:t>app/</a:t>
+            </a:r>
+            <a:r>
+              <a:rPr lang="en-US" sz="1100" u="sng" dirty="0" err="1"/>
+              <a:t>api</a:t>
+            </a:r>
+            <a:r>
+              <a:rPr lang="en-US" sz="1100" u="sng" dirty="0"/>
+              <a:t>/</a:t>
             </a:r>
           </a:p>
           <a:p>
@@ -8525,8 +8533,8 @@
         </p:nvCxnSpPr>
         <p:spPr>
           <a:xfrm rot="16200000" flipV="1">
-            <a:off x="7974790" y="813026"/>
-            <a:ext cx="1068588" cy="2469048"/>
+            <a:off x="8685653" y="1523888"/>
+            <a:ext cx="1068588" cy="1047323"/>
           </a:xfrm>
           <a:prstGeom prst="curvedConnector2">
             <a:avLst/>
@@ -8568,7 +8576,7 @@
         </p:nvSpPr>
         <p:spPr>
           <a:xfrm>
-            <a:off x="8183406" y="1775005"/>
+            <a:off x="8712076" y="2038246"/>
             <a:ext cx="687689" cy="338554"/>
           </a:xfrm>
           <a:prstGeom prst="rect">
@@ -8577,11 +8585,12 @@
           <a:noFill/>
         </p:spPr>
         <p:txBody>
-          <a:bodyPr wrap="none" lIns="0" tIns="0" rIns="0" bIns="0" rtlCol="0">
+          <a:bodyPr wrap="square" lIns="0" tIns="0" rIns="0" bIns="0" rtlCol="0">
             <a:spAutoFit/>
           </a:bodyPr>
           <a:lstStyle/>
           <a:p>
+            <a:pPr algn="r"/>
             <a:r>
               <a:rPr lang="en-US" sz="1100" i="1" dirty="0"/>
               <a:t>Refusal </a:t>
@@ -8596,6 +8605,7 @@
             </a:r>
           </a:p>
           <a:p>
+            <a:pPr algn="r"/>
             <a:r>
               <a:rPr lang="en-US" sz="1100" i="1" dirty="0"/>
               <a:t>Clarification</a:t>
@@ -8620,8 +8630,8 @@
         </p:nvCxnSpPr>
         <p:spPr>
           <a:xfrm rot="16200000" flipV="1">
-            <a:off x="8563858" y="-88338"/>
-            <a:ext cx="1380885" cy="3959480"/>
+            <a:off x="9323179" y="670982"/>
+            <a:ext cx="1283969" cy="2537755"/>
           </a:xfrm>
           <a:prstGeom prst="curvedConnector2">
             <a:avLst/>
@@ -8663,7 +8673,7 @@
         </p:nvSpPr>
         <p:spPr>
           <a:xfrm>
-            <a:off x="8638501" y="1120812"/>
+            <a:off x="9219702" y="1118029"/>
             <a:ext cx="615163" cy="161583"/>
           </a:xfrm>
           <a:prstGeom prst="rect">
@@ -9234,6 +9244,17 @@
           </a:p>
           <a:p>
             <a:pPr algn="ctr"/>
+            <a:r>
+              <a:rPr lang="en-US" sz="800" u="sng" dirty="0"/>
+              <a:t>web/</a:t>
+            </a:r>
+          </a:p>
+          <a:p>
+            <a:pPr algn="ctr"/>
+            <a:endParaRPr lang="en-US" sz="800" dirty="0"/>
+          </a:p>
+          <a:p>
+            <a:pPr algn="ctr"/>
             <a:endParaRPr lang="en-US" sz="800" dirty="0"/>
           </a:p>
           <a:p>
@@ -9449,7 +9470,7 @@
         </p:nvSpPr>
         <p:spPr>
           <a:xfrm>
-            <a:off x="6252056" y="829460"/>
+            <a:off x="7673781" y="829460"/>
             <a:ext cx="1022504" cy="1367591"/>
           </a:xfrm>
           <a:prstGeom prst="rect">
@@ -9482,14 +9503,7 @@
             <a:pPr algn="ctr"/>
             <a:r>
               <a:rPr lang="en-US" sz="1600" dirty="0"/>
-              <a:t>Prose</a:t>
-            </a:r>
-            <a:br>
-              <a:rPr lang="en-US" sz="1600" dirty="0"/>
-            </a:br>
-            <a:r>
-              <a:rPr lang="en-US" sz="1600" dirty="0"/>
-              <a:t>Formatter</a:t>
+              <a:t>Presenter</a:t>
             </a:r>
             <a:endParaRPr lang="en-US" sz="1400" dirty="0"/>
           </a:p>
@@ -9497,7 +9511,7 @@
             <a:pPr algn="ctr"/>
             <a:r>
               <a:rPr lang="en-US" sz="1100" u="sng" dirty="0"/>
-              <a:t>app/?</a:t>
+              <a:t>app/presenter/</a:t>
             </a:r>
           </a:p>
           <a:p>
@@ -9576,8 +9590,8 @@
         </p:nvCxnSpPr>
         <p:spPr>
           <a:xfrm>
-            <a:off x="5627205" y="1513256"/>
-            <a:ext cx="624851" cy="0"/>
+            <a:off x="5609119" y="1513256"/>
+            <a:ext cx="2064662" cy="0"/>
           </a:xfrm>
           <a:prstGeom prst="straightConnector1">
             <a:avLst/>
@@ -9619,7 +9633,7 @@
         </p:nvSpPr>
         <p:spPr>
           <a:xfrm rot="16200000">
-            <a:off x="5944109" y="1270756"/>
+            <a:off x="7427288" y="934318"/>
             <a:ext cx="186884" cy="210161"/>
           </a:xfrm>
           <a:prstGeom prst="flowChartOffpageConnector">
@@ -9666,6 +9680,92 @@
           </a:p>
         </p:txBody>
       </p:sp>
+      <p:sp>
+        <p:nvSpPr>
+          <p:cNvPr id="165" name="TextBox 164">
+            <a:extLst>
+              <a:ext uri="{FF2B5EF4-FFF2-40B4-BE49-F238E27FC236}">
+                <a16:creationId xmlns:a16="http://schemas.microsoft.com/office/drawing/2014/main" id="{505832D6-FBC7-265D-705F-64A8EB21D9EC}"/>
+              </a:ext>
+            </a:extLst>
+          </p:cNvPr>
+          <p:cNvSpPr txBox="1"/>
+          <p:nvPr/>
+        </p:nvSpPr>
+        <p:spPr>
+          <a:xfrm>
+            <a:off x="6187329" y="1297875"/>
+            <a:ext cx="816496" cy="161583"/>
+          </a:xfrm>
+          <a:prstGeom prst="rect">
+            <a:avLst/>
+          </a:prstGeom>
+          <a:noFill/>
+        </p:spPr>
+        <p:txBody>
+          <a:bodyPr wrap="square" lIns="0" tIns="0" rIns="0" bIns="0" rtlCol="0">
+            <a:spAutoFit/>
+          </a:bodyPr>
+          <a:lstStyle/>
+          <a:p>
+            <a:r>
+              <a:rPr lang="en-US" sz="1050" dirty="0">
+                <a:solidFill>
+                  <a:srgbClr val="B17ED8"/>
+                </a:solidFill>
+                <a:latin typeface="Adobe Gothic Std B" panose="020B0800000000000000" pitchFamily="34" charset="-128"/>
+                <a:ea typeface="Adobe Gothic Std B" panose="020B0800000000000000" pitchFamily="34" charset="-128"/>
+              </a:rPr>
+              <a:t>AnswerView</a:t>
+            </a:r>
+          </a:p>
+        </p:txBody>
+      </p:sp>
+      <p:cxnSp>
+        <p:nvCxnSpPr>
+          <p:cNvPr id="166" name="Straight Arrow Connector 165">
+            <a:extLst>
+              <a:ext uri="{FF2B5EF4-FFF2-40B4-BE49-F238E27FC236}">
+                <a16:creationId xmlns:a16="http://schemas.microsoft.com/office/drawing/2014/main" id="{CFFBE3C2-AC0C-258A-4C4D-A6CFE921302D}"/>
+              </a:ext>
+            </a:extLst>
+          </p:cNvPr>
+          <p:cNvCxnSpPr>
+            <a:cxnSpLocks/>
+          </p:cNvCxnSpPr>
+          <p:nvPr/>
+        </p:nvCxnSpPr>
+        <p:spPr>
+          <a:xfrm flipH="1">
+            <a:off x="8451201" y="2197051"/>
+            <a:ext cx="1627" cy="384793"/>
+          </a:xfrm>
+          <a:prstGeom prst="straightConnector1">
+            <a:avLst/>
+          </a:prstGeom>
+          <a:ln w="12700">
+            <a:solidFill>
+              <a:schemeClr val="tx1"/>
+            </a:solidFill>
+            <a:headEnd type="arrow"/>
+            <a:tailEnd type="none"/>
+          </a:ln>
+        </p:spPr>
+        <p:style>
+          <a:lnRef idx="1">
+            <a:schemeClr val="accent1"/>
+          </a:lnRef>
+          <a:fillRef idx="0">
+            <a:schemeClr val="accent1"/>
+          </a:fillRef>
+          <a:effectRef idx="0">
+            <a:schemeClr val="accent1"/>
+          </a:effectRef>
+          <a:fontRef idx="minor">
+            <a:schemeClr val="tx1"/>
+          </a:fontRef>
+        </p:style>
+      </p:cxnSp>
     </p:spTree>
     <p:extLst>
       <p:ext uri="{BB962C8B-B14F-4D97-AF65-F5344CB8AC3E}">

--- a/Project and Tool Layout.pptx
+++ b/Project and Tool Layout.pptx
@@ -7537,8 +7537,8 @@
         </p:nvSpPr>
         <p:spPr>
           <a:xfrm>
-            <a:off x="4586615" y="829460"/>
-            <a:ext cx="1022504" cy="1891091"/>
+            <a:off x="4586614" y="829460"/>
+            <a:ext cx="1194727" cy="1891091"/>
           </a:xfrm>
           <a:prstGeom prst="rect">
             <a:avLst/>
@@ -7578,15 +7578,7 @@
             <a:pPr algn="ctr"/>
             <a:r>
               <a:rPr lang="en-US" sz="1100" u="sng" dirty="0"/>
-              <a:t>app/</a:t>
-            </a:r>
-            <a:r>
-              <a:rPr lang="en-US" sz="1100" u="sng" dirty="0" err="1"/>
-              <a:t>api</a:t>
-            </a:r>
-            <a:r>
-              <a:rPr lang="en-US" sz="1100" u="sng" dirty="0"/>
-              <a:t>/</a:t>
+              <a:t>app/api/</a:t>
             </a:r>
           </a:p>
           <a:p>
@@ -7601,7 +7593,22 @@
             </a:r>
             <a:r>
               <a:rPr lang="en-US" sz="800" b="1" u="sng" dirty="0"/>
-              <a:t>FastAPI</a:t>
+              <a:t>FastAPI Users 15.0.5</a:t>
+            </a:r>
+          </a:p>
+          <a:p>
+            <a:pPr algn="ctr"/>
+            <a:r>
+              <a:rPr lang="en-US" sz="800" b="1" dirty="0"/>
+              <a:t> </a:t>
+            </a:r>
+            <a:r>
+              <a:rPr lang="en-US" sz="800" dirty="0"/>
+              <a:t>📚 </a:t>
+            </a:r>
+            <a:r>
+              <a:rPr lang="en-US" sz="800" b="1" u="sng" dirty="0"/>
+              <a:t>httpx-oauth 0.17.0</a:t>
             </a:r>
           </a:p>
           <a:p>
@@ -8469,7 +8476,7 @@
         <p:spPr>
           <a:xfrm>
             <a:off x="10186804" y="4441244"/>
-            <a:ext cx="721904" cy="270336"/>
+            <a:ext cx="721904" cy="404410"/>
           </a:xfrm>
           <a:prstGeom prst="rect">
             <a:avLst/>
@@ -8511,7 +8518,16 @@
               <a:rPr lang="en-US" sz="1200" b="1" dirty="0"/>
               <a:t>DB</a:t>
             </a:r>
-            <a:endParaRPr lang="en-US" sz="900" i="1" dirty="0"/>
+          </a:p>
+          <a:p>
+            <a:pPr marL="171450" indent="-171450" algn="ctr">
+              <a:buFont typeface="Arial" panose="020B0604020202020204" pitchFamily="34" charset="0"/>
+              <a:buChar char="•"/>
+            </a:pPr>
+            <a:r>
+              <a:rPr lang="en-US" sz="900" dirty="0"/>
+              <a:t>xbrl</a:t>
+            </a:r>
           </a:p>
         </p:txBody>
       </p:sp>
@@ -9537,18 +9553,20 @@
             </a:extLst>
           </p:cNvPr>
           <p:cNvCxnSpPr>
-            <a:stCxn id="8" idx="2"/>
+            <a:cxnSpLocks/>
             <a:endCxn id="9" idx="1"/>
           </p:cNvCxnSpPr>
           <p:nvPr/>
         </p:nvCxnSpPr>
         <p:spPr>
-          <a:xfrm rot="16200000" flipH="1">
-            <a:off x="6040849" y="1777569"/>
-            <a:ext cx="686697" cy="2572660"/>
-          </a:xfrm>
-          <a:prstGeom prst="bentConnector2">
-            <a:avLst/>
+          <a:xfrm>
+            <a:off x="5781341" y="2287715"/>
+            <a:ext cx="1889186" cy="1119533"/>
+          </a:xfrm>
+          <a:prstGeom prst="bentConnector3">
+            <a:avLst>
+              <a:gd name="adj1" fmla="val 50000"/>
+            </a:avLst>
           </a:prstGeom>
           <a:ln w="12700">
             <a:solidFill>
@@ -9590,8 +9608,8 @@
         </p:nvCxnSpPr>
         <p:spPr>
           <a:xfrm>
-            <a:off x="5609119" y="1513256"/>
-            <a:ext cx="2064662" cy="0"/>
+            <a:off x="5781341" y="1513255"/>
+            <a:ext cx="1892440" cy="1"/>
           </a:xfrm>
           <a:prstGeom prst="straightConnector1">
             <a:avLst/>
@@ -9749,6 +9767,184 @@
             </a:solidFill>
             <a:headEnd type="arrow"/>
             <a:tailEnd type="none"/>
+          </a:ln>
+        </p:spPr>
+        <p:style>
+          <a:lnRef idx="1">
+            <a:schemeClr val="accent1"/>
+          </a:lnRef>
+          <a:fillRef idx="0">
+            <a:schemeClr val="accent1"/>
+          </a:fillRef>
+          <a:effectRef idx="0">
+            <a:schemeClr val="accent1"/>
+          </a:effectRef>
+          <a:fontRef idx="minor">
+            <a:schemeClr val="tx1"/>
+          </a:fontRef>
+        </p:style>
+      </p:cxnSp>
+      <p:sp>
+        <p:nvSpPr>
+          <p:cNvPr id="183" name="Rectangle 182">
+            <a:extLst>
+              <a:ext uri="{FF2B5EF4-FFF2-40B4-BE49-F238E27FC236}">
+                <a16:creationId xmlns:a16="http://schemas.microsoft.com/office/drawing/2014/main" id="{D43E0C22-7646-FF2D-BCA6-8C88A2D3837F}"/>
+              </a:ext>
+            </a:extLst>
+          </p:cNvPr>
+          <p:cNvSpPr/>
+          <p:nvPr/>
+        </p:nvSpPr>
+        <p:spPr>
+          <a:xfrm>
+            <a:off x="4684549" y="3098801"/>
+            <a:ext cx="998858" cy="1276986"/>
+          </a:xfrm>
+          <a:prstGeom prst="rect">
+            <a:avLst/>
+          </a:prstGeom>
+          <a:solidFill>
+            <a:srgbClr val="F7A5A5"/>
+          </a:solidFill>
+        </p:spPr>
+        <p:style>
+          <a:lnRef idx="2">
+            <a:schemeClr val="accent1">
+              <a:shade val="15000"/>
+            </a:schemeClr>
+          </a:lnRef>
+          <a:fillRef idx="1">
+            <a:schemeClr val="accent1"/>
+          </a:fillRef>
+          <a:effectRef idx="0">
+            <a:schemeClr val="accent1"/>
+          </a:effectRef>
+          <a:fontRef idx="minor">
+            <a:schemeClr val="lt1"/>
+          </a:fontRef>
+        </p:style>
+        <p:txBody>
+          <a:bodyPr lIns="0" tIns="45720" rIns="0" bIns="0" rtlCol="0" anchor="t"/>
+          <a:lstStyle/>
+          <a:p>
+            <a:pPr algn="ctr"/>
+            <a:r>
+              <a:rPr lang="en-US" sz="1100" dirty="0"/>
+              <a:t>🛢️</a:t>
+            </a:r>
+            <a:r>
+              <a:rPr lang="en-US" sz="900" b="1" dirty="0"/>
+              <a:t> </a:t>
+            </a:r>
+            <a:r>
+              <a:rPr lang="en-US" sz="1200" b="1" dirty="0"/>
+              <a:t>DB</a:t>
+            </a:r>
+          </a:p>
+          <a:p>
+            <a:pPr marL="171450" indent="-171450">
+              <a:buFont typeface="Arial" panose="020B0604020202020204" pitchFamily="34" charset="0"/>
+              <a:buChar char="•"/>
+            </a:pPr>
+            <a:r>
+              <a:rPr lang="en-US" sz="900" dirty="0"/>
+              <a:t>user</a:t>
+            </a:r>
+          </a:p>
+          <a:p>
+            <a:pPr marL="171450" indent="-171450">
+              <a:buFont typeface="Arial" panose="020B0604020202020204" pitchFamily="34" charset="0"/>
+              <a:buChar char="•"/>
+            </a:pPr>
+            <a:r>
+              <a:rPr lang="en-US" sz="900" dirty="0"/>
+              <a:t>oauth_account</a:t>
+            </a:r>
+          </a:p>
+          <a:p>
+            <a:pPr marL="171450" indent="-171450">
+              <a:buFont typeface="Arial" panose="020B0604020202020204" pitchFamily="34" charset="0"/>
+              <a:buChar char="•"/>
+            </a:pPr>
+            <a:r>
+              <a:rPr lang="en-US" sz="900" dirty="0"/>
+              <a:t>access_token</a:t>
+            </a:r>
+          </a:p>
+          <a:p>
+            <a:pPr marL="171450" indent="-171450">
+              <a:buFont typeface="Arial" panose="020B0604020202020204" pitchFamily="34" charset="0"/>
+              <a:buChar char="•"/>
+            </a:pPr>
+            <a:r>
+              <a:rPr lang="en-US" sz="900" dirty="0"/>
+              <a:t>invite</a:t>
+            </a:r>
+          </a:p>
+          <a:p>
+            <a:pPr marL="171450" indent="-171450">
+              <a:buFont typeface="Arial" panose="020B0604020202020204" pitchFamily="34" charset="0"/>
+              <a:buChar char="•"/>
+            </a:pPr>
+            <a:r>
+              <a:rPr lang="en-US" sz="900" dirty="0"/>
+              <a:t>conversation</a:t>
+            </a:r>
+          </a:p>
+          <a:p>
+            <a:pPr marL="171450" indent="-171450">
+              <a:buFont typeface="Arial" panose="020B0604020202020204" pitchFamily="34" charset="0"/>
+              <a:buChar char="•"/>
+            </a:pPr>
+            <a:r>
+              <a:rPr lang="en-US" sz="900" dirty="0"/>
+              <a:t>job</a:t>
+            </a:r>
+          </a:p>
+          <a:p>
+            <a:pPr marL="171450" indent="-171450">
+              <a:buFont typeface="Arial" panose="020B0604020202020204" pitchFamily="34" charset="0"/>
+              <a:buChar char="•"/>
+            </a:pPr>
+            <a:r>
+              <a:rPr lang="en-US" sz="900" dirty="0"/>
+              <a:t>job_trace</a:t>
+            </a:r>
+          </a:p>
+        </p:txBody>
+      </p:sp>
+      <p:cxnSp>
+        <p:nvCxnSpPr>
+          <p:cNvPr id="185" name="Straight Arrow Connector 184">
+            <a:extLst>
+              <a:ext uri="{FF2B5EF4-FFF2-40B4-BE49-F238E27FC236}">
+                <a16:creationId xmlns:a16="http://schemas.microsoft.com/office/drawing/2014/main" id="{055BC9F6-8C0A-8440-8CB2-B3B3E5CAD35D}"/>
+              </a:ext>
+            </a:extLst>
+          </p:cNvPr>
+          <p:cNvCxnSpPr>
+            <a:cxnSpLocks/>
+            <a:stCxn id="8" idx="2"/>
+            <a:endCxn id="183" idx="0"/>
+          </p:cNvCxnSpPr>
+          <p:nvPr/>
+        </p:nvCxnSpPr>
+        <p:spPr>
+          <a:xfrm>
+            <a:off x="5183978" y="2720551"/>
+            <a:ext cx="0" cy="378250"/>
+          </a:xfrm>
+          <a:prstGeom prst="straightConnector1">
+            <a:avLst/>
+          </a:prstGeom>
+          <a:ln w="12700">
+            <a:solidFill>
+              <a:schemeClr val="tx1"/>
+            </a:solidFill>
+            <a:prstDash val="dash"/>
+            <a:headEnd type="arrow"/>
+            <a:tailEnd type="arrow"/>
           </a:ln>
         </p:spPr>
         <p:style>

--- a/Project and Tool Layout.pptx
+++ b/Project and Tool Layout.pptx
@@ -7583,7 +7583,18 @@
           </a:p>
           <a:p>
             <a:pPr algn="ctr"/>
-            <a:endParaRPr lang="en-US" sz="1100" u="sng" dirty="0"/>
+            <a:r>
+              <a:rPr lang="en-US" sz="800" dirty="0"/>
+              <a:t>📚</a:t>
+            </a:r>
+            <a:r>
+              <a:rPr lang="en-US" sz="1100" dirty="0"/>
+              <a:t> </a:t>
+            </a:r>
+            <a:r>
+              <a:rPr lang="en-US" sz="800" b="1" u="sng" dirty="0"/>
+              <a:t>uvicorn</a:t>
+            </a:r>
           </a:p>
           <a:p>
             <a:pPr algn="ctr"/>
@@ -7593,7 +7604,7 @@
             </a:r>
             <a:r>
               <a:rPr lang="en-US" sz="800" b="1" u="sng" dirty="0"/>
-              <a:t>FastAPI Users 15.0.5</a:t>
+              <a:t>FastAPI Users</a:t>
             </a:r>
           </a:p>
           <a:p>
@@ -7608,7 +7619,7 @@
             </a:r>
             <a:r>
               <a:rPr lang="en-US" sz="800" b="1" u="sng" dirty="0"/>
-              <a:t>httpx-oauth 0.17.0</a:t>
+              <a:t>httpx-oauth</a:t>
             </a:r>
           </a:p>
           <a:p>
@@ -8852,7 +8863,7 @@
         </p:nvSpPr>
         <p:spPr>
           <a:xfrm rot="16200000">
-            <a:off x="7442347" y="3043410"/>
+            <a:off x="7442347" y="2608945"/>
             <a:ext cx="186884" cy="240280"/>
           </a:xfrm>
           <a:prstGeom prst="flowChartOffpageConnector">
@@ -8913,7 +8924,7 @@
         </p:nvSpPr>
         <p:spPr>
           <a:xfrm rot="16200000">
-            <a:off x="9006120" y="3043409"/>
+            <a:off x="9006120" y="2608944"/>
             <a:ext cx="186884" cy="240280"/>
           </a:xfrm>
           <a:prstGeom prst="flowChartOffpageConnector">
@@ -8974,7 +8985,7 @@
         </p:nvSpPr>
         <p:spPr>
           <a:xfrm rot="16200000">
-            <a:off x="10540518" y="3043408"/>
+            <a:off x="10540518" y="2608943"/>
             <a:ext cx="186884" cy="240280"/>
           </a:xfrm>
           <a:prstGeom prst="flowChartOffpageConnector">
@@ -9962,6 +9973,47 @@
           </a:fontRef>
         </p:style>
       </p:cxnSp>
+      <p:sp>
+        <p:nvSpPr>
+          <p:cNvPr id="189" name="TextBox 188">
+            <a:extLst>
+              <a:ext uri="{FF2B5EF4-FFF2-40B4-BE49-F238E27FC236}">
+                <a16:creationId xmlns:a16="http://schemas.microsoft.com/office/drawing/2014/main" id="{5D7D4E3B-7177-E706-D8D1-F7B7B8B72474}"/>
+              </a:ext>
+            </a:extLst>
+          </p:cNvPr>
+          <p:cNvSpPr txBox="1"/>
+          <p:nvPr/>
+        </p:nvSpPr>
+        <p:spPr>
+          <a:xfrm>
+            <a:off x="10254864" y="3141368"/>
+            <a:ext cx="615163" cy="323165"/>
+          </a:xfrm>
+          <a:prstGeom prst="rect">
+            <a:avLst/>
+          </a:prstGeom>
+          <a:noFill/>
+        </p:spPr>
+        <p:txBody>
+          <a:bodyPr wrap="square" lIns="0" tIns="0" rIns="0" bIns="0" rtlCol="0">
+            <a:spAutoFit/>
+          </a:bodyPr>
+          <a:lstStyle/>
+          <a:p>
+            <a:r>
+              <a:rPr lang="en-US" sz="1050" dirty="0">
+                <a:solidFill>
+                  <a:srgbClr val="B17ED8"/>
+                </a:solidFill>
+                <a:latin typeface="Adobe Gothic Std B" panose="020B0800000000000000" pitchFamily="34" charset="-128"/>
+                <a:ea typeface="Adobe Gothic Std B" panose="020B0800000000000000" pitchFamily="34" charset="-128"/>
+              </a:rPr>
+              <a:t>QueryPlan</a:t>
+            </a:r>
+          </a:p>
+        </p:txBody>
+      </p:sp>
     </p:spTree>
     <p:extLst>
       <p:ext uri="{BB962C8B-B14F-4D97-AF65-F5344CB8AC3E}">

--- a/Project and Tool Layout.pptx
+++ b/Project and Tool Layout.pptx
@@ -8531,7 +8531,7 @@
             </a:r>
           </a:p>
           <a:p>
-            <a:pPr marL="171450" indent="-171450" algn="ctr">
+            <a:pPr marL="171450" indent="-91440">
               <a:buFont typeface="Arial" panose="020B0604020202020204" pitchFamily="34" charset="0"/>
               <a:buChar char="•"/>
             </a:pPr>
@@ -9836,7 +9836,7 @@
           </a:fontRef>
         </p:style>
         <p:txBody>
-          <a:bodyPr lIns="0" tIns="45720" rIns="0" bIns="0" rtlCol="0" anchor="t"/>
+          <a:bodyPr lIns="45720" tIns="45720" rIns="0" bIns="0" rtlCol="0" anchor="t"/>
           <a:lstStyle/>
           <a:p>
             <a:pPr algn="ctr"/>
@@ -9854,7 +9854,7 @@
             </a:r>
           </a:p>
           <a:p>
-            <a:pPr marL="171450" indent="-171450">
+            <a:pPr marL="171450" indent="-91440">
               <a:buFont typeface="Arial" panose="020B0604020202020204" pitchFamily="34" charset="0"/>
               <a:buChar char="•"/>
             </a:pPr>
@@ -9864,7 +9864,7 @@
             </a:r>
           </a:p>
           <a:p>
-            <a:pPr marL="171450" indent="-171450">
+            <a:pPr marL="171450" indent="-91440">
               <a:buFont typeface="Arial" panose="020B0604020202020204" pitchFamily="34" charset="0"/>
               <a:buChar char="•"/>
             </a:pPr>
@@ -9874,7 +9874,7 @@
             </a:r>
           </a:p>
           <a:p>
-            <a:pPr marL="171450" indent="-171450">
+            <a:pPr marL="171450" indent="-91440">
               <a:buFont typeface="Arial" panose="020B0604020202020204" pitchFamily="34" charset="0"/>
               <a:buChar char="•"/>
             </a:pPr>
@@ -9884,7 +9884,7 @@
             </a:r>
           </a:p>
           <a:p>
-            <a:pPr marL="171450" indent="-171450">
+            <a:pPr marL="171450" indent="-91440">
               <a:buFont typeface="Arial" panose="020B0604020202020204" pitchFamily="34" charset="0"/>
               <a:buChar char="•"/>
             </a:pPr>
@@ -9894,7 +9894,7 @@
             </a:r>
           </a:p>
           <a:p>
-            <a:pPr marL="171450" indent="-171450">
+            <a:pPr marL="171450" indent="-91440">
               <a:buFont typeface="Arial" panose="020B0604020202020204" pitchFamily="34" charset="0"/>
               <a:buChar char="•"/>
             </a:pPr>
@@ -9904,7 +9904,7 @@
             </a:r>
           </a:p>
           <a:p>
-            <a:pPr marL="171450" indent="-171450">
+            <a:pPr marL="171450" indent="-91440">
               <a:buFont typeface="Arial" panose="020B0604020202020204" pitchFamily="34" charset="0"/>
               <a:buChar char="•"/>
             </a:pPr>
@@ -9914,7 +9914,7 @@
             </a:r>
           </a:p>
           <a:p>
-            <a:pPr marL="171450" indent="-171450">
+            <a:pPr marL="171450" indent="-91440">
               <a:buFont typeface="Arial" panose="020B0604020202020204" pitchFamily="34" charset="0"/>
               <a:buChar char="•"/>
             </a:pPr>

--- a/Project and Tool Layout.pptx
+++ b/Project and Tool Layout.pptx
@@ -260,7 +260,7 @@
           <a:p>
             <a:fld id="{E779FE8C-703A-4904-A4E0-13778480428C}" type="datetimeFigureOut">
               <a:rPr lang="en-US" smtClean="0"/>
-              <a:t>9/14/2026</a:t>
+              <a:t>9/28/2026</a:t>
             </a:fld>
             <a:endParaRPr lang="en-US"/>
           </a:p>
@@ -458,7 +458,7 @@
           <a:p>
             <a:fld id="{E779FE8C-703A-4904-A4E0-13778480428C}" type="datetimeFigureOut">
               <a:rPr lang="en-US" smtClean="0"/>
-              <a:t>9/14/2026</a:t>
+              <a:t>9/28/2026</a:t>
             </a:fld>
             <a:endParaRPr lang="en-US"/>
           </a:p>
@@ -666,7 +666,7 @@
           <a:p>
             <a:fld id="{E779FE8C-703A-4904-A4E0-13778480428C}" type="datetimeFigureOut">
               <a:rPr lang="en-US" smtClean="0"/>
-              <a:t>9/14/2026</a:t>
+              <a:t>9/28/2026</a:t>
             </a:fld>
             <a:endParaRPr lang="en-US"/>
           </a:p>
@@ -864,7 +864,7 @@
           <a:p>
             <a:fld id="{E779FE8C-703A-4904-A4E0-13778480428C}" type="datetimeFigureOut">
               <a:rPr lang="en-US" smtClean="0"/>
-              <a:t>9/14/2026</a:t>
+              <a:t>9/28/2026</a:t>
             </a:fld>
             <a:endParaRPr lang="en-US"/>
           </a:p>
@@ -1139,7 +1139,7 @@
           <a:p>
             <a:fld id="{E779FE8C-703A-4904-A4E0-13778480428C}" type="datetimeFigureOut">
               <a:rPr lang="en-US" smtClean="0"/>
-              <a:t>9/14/2026</a:t>
+              <a:t>9/28/2026</a:t>
             </a:fld>
             <a:endParaRPr lang="en-US"/>
           </a:p>
@@ -1404,7 +1404,7 @@
           <a:p>
             <a:fld id="{E779FE8C-703A-4904-A4E0-13778480428C}" type="datetimeFigureOut">
               <a:rPr lang="en-US" smtClean="0"/>
-              <a:t>9/14/2026</a:t>
+              <a:t>9/28/2026</a:t>
             </a:fld>
             <a:endParaRPr lang="en-US"/>
           </a:p>
@@ -1816,7 +1816,7 @@
           <a:p>
             <a:fld id="{E779FE8C-703A-4904-A4E0-13778480428C}" type="datetimeFigureOut">
               <a:rPr lang="en-US" smtClean="0"/>
-              <a:t>9/14/2026</a:t>
+              <a:t>9/28/2026</a:t>
             </a:fld>
             <a:endParaRPr lang="en-US"/>
           </a:p>
@@ -1957,7 +1957,7 @@
           <a:p>
             <a:fld id="{E779FE8C-703A-4904-A4E0-13778480428C}" type="datetimeFigureOut">
               <a:rPr lang="en-US" smtClean="0"/>
-              <a:t>9/14/2026</a:t>
+              <a:t>9/28/2026</a:t>
             </a:fld>
             <a:endParaRPr lang="en-US"/>
           </a:p>
@@ -2070,7 +2070,7 @@
           <a:p>
             <a:fld id="{E779FE8C-703A-4904-A4E0-13778480428C}" type="datetimeFigureOut">
               <a:rPr lang="en-US" smtClean="0"/>
-              <a:t>9/14/2026</a:t>
+              <a:t>9/28/2026</a:t>
             </a:fld>
             <a:endParaRPr lang="en-US"/>
           </a:p>
@@ -2381,7 +2381,7 @@
           <a:p>
             <a:fld id="{E779FE8C-703A-4904-A4E0-13778480428C}" type="datetimeFigureOut">
               <a:rPr lang="en-US" smtClean="0"/>
-              <a:t>9/14/2026</a:t>
+              <a:t>9/28/2026</a:t>
             </a:fld>
             <a:endParaRPr lang="en-US"/>
           </a:p>
@@ -2669,7 +2669,7 @@
           <a:p>
             <a:fld id="{E779FE8C-703A-4904-A4E0-13778480428C}" type="datetimeFigureOut">
               <a:rPr lang="en-US" smtClean="0"/>
-              <a:t>9/14/2026</a:t>
+              <a:t>9/28/2026</a:t>
             </a:fld>
             <a:endParaRPr lang="en-US"/>
           </a:p>
@@ -2910,7 +2910,7 @@
           <a:p>
             <a:fld id="{E779FE8C-703A-4904-A4E0-13778480428C}" type="datetimeFigureOut">
               <a:rPr lang="en-US" smtClean="0"/>
-              <a:t>9/14/2026</a:t>
+              <a:t>9/28/2026</a:t>
             </a:fld>
             <a:endParaRPr lang="en-US"/>
           </a:p>
@@ -7667,8 +7667,8 @@
         </p:nvSpPr>
         <p:spPr>
           <a:xfrm>
-            <a:off x="7670527" y="2581844"/>
-            <a:ext cx="1025758" cy="1650807"/>
+            <a:off x="7748724" y="2581844"/>
+            <a:ext cx="869364" cy="1650807"/>
           </a:xfrm>
           <a:prstGeom prst="rect">
             <a:avLst/>
@@ -7759,8 +7759,8 @@
         </p:nvSpPr>
         <p:spPr>
           <a:xfrm>
-            <a:off x="9230729" y="2581844"/>
-            <a:ext cx="1025758" cy="1650807"/>
+            <a:off x="9136593" y="2581844"/>
+            <a:ext cx="1102254" cy="1650807"/>
           </a:xfrm>
           <a:prstGeom prst="rect">
             <a:avLst/>
@@ -7811,41 +7811,7 @@
             <a:pPr algn="ctr"/>
             <a:r>
               <a:rPr lang="en-US" sz="800" dirty="0"/>
-              <a:t>Does mapping from </a:t>
-            </a:r>
-            <a:r>
-              <a:rPr lang="en-US" sz="800" dirty="0">
-                <a:solidFill>
-                  <a:srgbClr val="B17ED8"/>
-                </a:solidFill>
-                <a:latin typeface="Adobe Gothic Std B" panose="020B0800000000000000" pitchFamily="34" charset="-128"/>
-                <a:ea typeface="Adobe Gothic Std B" panose="020B0800000000000000" pitchFamily="34" charset="-128"/>
-              </a:rPr>
-              <a:t>Query</a:t>
-            </a:r>
-            <a:r>
-              <a:rPr lang="en-US" sz="800" dirty="0"/>
-              <a:t> into a </a:t>
-            </a:r>
-          </a:p>
-          <a:p>
-            <a:pPr algn="ctr"/>
-            <a:r>
-              <a:rPr lang="en-US" sz="800" dirty="0">
-                <a:solidFill>
-                  <a:srgbClr val="B17ED8"/>
-                </a:solidFill>
-                <a:latin typeface="Adobe Gothic Std B" panose="020B0800000000000000" pitchFamily="34" charset="-128"/>
-                <a:ea typeface="Adobe Gothic Std B" panose="020B0800000000000000" pitchFamily="34" charset="-128"/>
-              </a:rPr>
-              <a:t>QueryPlan </a:t>
-            </a:r>
-          </a:p>
-          <a:p>
-            <a:pPr algn="ctr"/>
-            <a:r>
-              <a:rPr lang="en-US" sz="800" dirty="0"/>
-              <a:t>(normalizes request to what is retrievable in the database)</a:t>
+              <a:t>Normalizes request to what is retrievable from the database</a:t>
             </a:r>
           </a:p>
         </p:txBody>
@@ -7864,7 +7830,7 @@
         </p:nvSpPr>
         <p:spPr>
           <a:xfrm>
-            <a:off x="10769365" y="2581844"/>
+            <a:off x="10823273" y="2581844"/>
             <a:ext cx="929349" cy="1650807"/>
           </a:xfrm>
           <a:prstGeom prst="rect">
@@ -8091,8 +8057,8 @@
         </p:nvCxnSpPr>
         <p:spPr>
           <a:xfrm flipH="1">
-            <a:off x="10256487" y="3407248"/>
-            <a:ext cx="512878" cy="0"/>
+            <a:off x="10238847" y="3407248"/>
+            <a:ext cx="584426" cy="0"/>
           </a:xfrm>
           <a:prstGeom prst="straightConnector1">
             <a:avLst/>
@@ -8131,13 +8097,14 @@
           </p:cNvPr>
           <p:cNvCxnSpPr>
             <a:cxnSpLocks/>
+            <a:endCxn id="11" idx="2"/>
           </p:cNvCxnSpPr>
           <p:nvPr/>
         </p:nvCxnSpPr>
         <p:spPr>
-          <a:xfrm flipV="1">
-            <a:off x="9708766" y="4232651"/>
-            <a:ext cx="0" cy="687522"/>
+          <a:xfrm flipH="1" flipV="1">
+            <a:off x="9687720" y="4232651"/>
+            <a:ext cx="15264" cy="687522"/>
           </a:xfrm>
           <a:prstGeom prst="straightConnector1">
             <a:avLst/>
@@ -8276,8 +8243,8 @@
         </p:nvCxnSpPr>
         <p:spPr>
           <a:xfrm flipH="1">
-            <a:off x="8696285" y="3407248"/>
-            <a:ext cx="534444" cy="0"/>
+            <a:off x="8618088" y="3407248"/>
+            <a:ext cx="518505" cy="0"/>
           </a:xfrm>
           <a:prstGeom prst="straightConnector1">
             <a:avLst/>
@@ -8321,7 +8288,7 @@
         </p:nvCxnSpPr>
         <p:spPr>
           <a:xfrm flipV="1">
-            <a:off x="11301440" y="4232651"/>
+            <a:off x="11181177" y="4232651"/>
             <a:ext cx="0" cy="687522"/>
           </a:xfrm>
           <a:prstGeom prst="straightConnector1">
@@ -8560,8 +8527,8 @@
         </p:nvCxnSpPr>
         <p:spPr>
           <a:xfrm rot="16200000" flipV="1">
-            <a:off x="8685653" y="1523888"/>
-            <a:ext cx="1068588" cy="1047323"/>
+            <a:off x="8657709" y="1551832"/>
+            <a:ext cx="1068588" cy="991435"/>
           </a:xfrm>
           <a:prstGeom prst="curvedConnector2">
             <a:avLst/>
@@ -8657,8 +8624,8 @@
         </p:nvCxnSpPr>
         <p:spPr>
           <a:xfrm rot="16200000" flipV="1">
-            <a:off x="9323179" y="670982"/>
-            <a:ext cx="1283969" cy="2537755"/>
+            <a:off x="9340062" y="633957"/>
+            <a:ext cx="1302232" cy="2593541"/>
           </a:xfrm>
           <a:prstGeom prst="curvedConnector2">
             <a:avLst/>
@@ -8863,7 +8830,7 @@
         </p:nvSpPr>
         <p:spPr>
           <a:xfrm rot="16200000">
-            <a:off x="7442347" y="2608945"/>
+            <a:off x="7516138" y="2608945"/>
             <a:ext cx="186884" cy="240280"/>
           </a:xfrm>
           <a:prstGeom prst="flowChartOffpageConnector">
@@ -8924,7 +8891,7 @@
         </p:nvSpPr>
         <p:spPr>
           <a:xfrm rot="16200000">
-            <a:off x="9006120" y="2608944"/>
+            <a:off x="8907723" y="2608944"/>
             <a:ext cx="186884" cy="240280"/>
           </a:xfrm>
           <a:prstGeom prst="flowChartOffpageConnector">
@@ -8985,7 +8952,7 @@
         </p:nvSpPr>
         <p:spPr>
           <a:xfrm rot="16200000">
-            <a:off x="10540518" y="2608943"/>
+            <a:off x="10601774" y="2608944"/>
             <a:ext cx="186884" cy="240280"/>
           </a:xfrm>
           <a:prstGeom prst="flowChartOffpageConnector">
@@ -9572,7 +9539,7 @@
         <p:spPr>
           <a:xfrm>
             <a:off x="5781341" y="2287715"/>
-            <a:ext cx="1889186" cy="1119533"/>
+            <a:ext cx="1967383" cy="1119533"/>
           </a:xfrm>
           <a:prstGeom prst="bentConnector3">
             <a:avLst>
@@ -9987,8 +9954,8 @@
         </p:nvSpPr>
         <p:spPr>
           <a:xfrm>
-            <a:off x="10254864" y="3141368"/>
-            <a:ext cx="615163" cy="323165"/>
+            <a:off x="10273715" y="3265564"/>
+            <a:ext cx="615163" cy="123111"/>
           </a:xfrm>
           <a:prstGeom prst="rect">
             <a:avLst/>
@@ -10002,7 +9969,7 @@
           <a:lstStyle/>
           <a:p>
             <a:r>
-              <a:rPr lang="en-US" sz="1050" dirty="0">
+              <a:rPr lang="en-US" sz="800" dirty="0">
                 <a:solidFill>
                   <a:srgbClr val="B17ED8"/>
                 </a:solidFill>
@@ -10010,6 +9977,47 @@
                 <a:ea typeface="Adobe Gothic Std B" panose="020B0800000000000000" pitchFamily="34" charset="-128"/>
               </a:rPr>
               <a:t>QueryPlan</a:t>
+            </a:r>
+          </a:p>
+        </p:txBody>
+      </p:sp>
+      <p:sp>
+        <p:nvSpPr>
+          <p:cNvPr id="3" name="TextBox 2">
+            <a:extLst>
+              <a:ext uri="{FF2B5EF4-FFF2-40B4-BE49-F238E27FC236}">
+                <a16:creationId xmlns:a16="http://schemas.microsoft.com/office/drawing/2014/main" id="{4FF3AF5F-2767-8959-DD92-DEA8FE731543}"/>
+              </a:ext>
+            </a:extLst>
+          </p:cNvPr>
+          <p:cNvSpPr txBox="1"/>
+          <p:nvPr/>
+        </p:nvSpPr>
+        <p:spPr>
+          <a:xfrm>
+            <a:off x="8717850" y="3265639"/>
+            <a:ext cx="346693" cy="123111"/>
+          </a:xfrm>
+          <a:prstGeom prst="rect">
+            <a:avLst/>
+          </a:prstGeom>
+          <a:noFill/>
+        </p:spPr>
+        <p:txBody>
+          <a:bodyPr wrap="square" lIns="0" tIns="0" rIns="0" bIns="0" rtlCol="0">
+            <a:spAutoFit/>
+          </a:bodyPr>
+          <a:lstStyle/>
+          <a:p>
+            <a:r>
+              <a:rPr lang="en-US" sz="800" dirty="0">
+                <a:solidFill>
+                  <a:srgbClr val="B17ED8"/>
+                </a:solidFill>
+                <a:latin typeface="Adobe Gothic Std B" panose="020B0800000000000000" pitchFamily="34" charset="-128"/>
+                <a:ea typeface="Adobe Gothic Std B" panose="020B0800000000000000" pitchFamily="34" charset="-128"/>
+              </a:rPr>
+              <a:t>Query</a:t>
             </a:r>
           </a:p>
         </p:txBody>

--- a/Project and Tool Layout.pptx
+++ b/Project and Tool Layout.pptx
@@ -9116,7 +9116,7 @@
                   </a:schemeClr>
                 </a:solidFill>
               </a:rPr>
-              <a:t>9</a:t>
+              <a:t>8</a:t>
             </a:r>
           </a:p>
         </p:txBody>
@@ -9390,7 +9390,7 @@
                   </a:schemeClr>
                 </a:solidFill>
               </a:rPr>
-              <a:t>8</a:t>
+              <a:t>7</a:t>
             </a:r>
           </a:p>
         </p:txBody>
@@ -9671,7 +9671,7 @@
                   </a:schemeClr>
                 </a:solidFill>
               </a:rPr>
-              <a:t>7</a:t>
+              <a:t>6</a:t>
             </a:r>
           </a:p>
         </p:txBody>

--- a/Project and Tool Layout.pptx
+++ b/Project and Tool Layout.pptx
@@ -7,6 +7,7 @@
   <p:sldIdLst>
     <p:sldId id="256" r:id="rId2"/>
     <p:sldId id="258" r:id="rId3"/>
+    <p:sldId id="259" r:id="rId4"/>
   </p:sldIdLst>
   <p:sldSz cx="12192000" cy="6858000"/>
   <p:notesSz cx="6858000" cy="9144000"/>
@@ -260,7 +261,7 @@
           <a:p>
             <a:fld id="{E779FE8C-703A-4904-A4E0-13778480428C}" type="datetimeFigureOut">
               <a:rPr lang="en-US" smtClean="0"/>
-              <a:t>9/28/2026</a:t>
+              <a:t>9/29/2026</a:t>
             </a:fld>
             <a:endParaRPr lang="en-US"/>
           </a:p>
@@ -458,7 +459,7 @@
           <a:p>
             <a:fld id="{E779FE8C-703A-4904-A4E0-13778480428C}" type="datetimeFigureOut">
               <a:rPr lang="en-US" smtClean="0"/>
-              <a:t>9/28/2026</a:t>
+              <a:t>9/29/2026</a:t>
             </a:fld>
             <a:endParaRPr lang="en-US"/>
           </a:p>
@@ -666,7 +667,7 @@
           <a:p>
             <a:fld id="{E779FE8C-703A-4904-A4E0-13778480428C}" type="datetimeFigureOut">
               <a:rPr lang="en-US" smtClean="0"/>
-              <a:t>9/28/2026</a:t>
+              <a:t>9/29/2026</a:t>
             </a:fld>
             <a:endParaRPr lang="en-US"/>
           </a:p>
@@ -864,7 +865,7 @@
           <a:p>
             <a:fld id="{E779FE8C-703A-4904-A4E0-13778480428C}" type="datetimeFigureOut">
               <a:rPr lang="en-US" smtClean="0"/>
-              <a:t>9/28/2026</a:t>
+              <a:t>9/29/2026</a:t>
             </a:fld>
             <a:endParaRPr lang="en-US"/>
           </a:p>
@@ -1139,7 +1140,7 @@
           <a:p>
             <a:fld id="{E779FE8C-703A-4904-A4E0-13778480428C}" type="datetimeFigureOut">
               <a:rPr lang="en-US" smtClean="0"/>
-              <a:t>9/28/2026</a:t>
+              <a:t>9/29/2026</a:t>
             </a:fld>
             <a:endParaRPr lang="en-US"/>
           </a:p>
@@ -1404,7 +1405,7 @@
           <a:p>
             <a:fld id="{E779FE8C-703A-4904-A4E0-13778480428C}" type="datetimeFigureOut">
               <a:rPr lang="en-US" smtClean="0"/>
-              <a:t>9/28/2026</a:t>
+              <a:t>9/29/2026</a:t>
             </a:fld>
             <a:endParaRPr lang="en-US"/>
           </a:p>
@@ -1816,7 +1817,7 @@
           <a:p>
             <a:fld id="{E779FE8C-703A-4904-A4E0-13778480428C}" type="datetimeFigureOut">
               <a:rPr lang="en-US" smtClean="0"/>
-              <a:t>9/28/2026</a:t>
+              <a:t>9/29/2026</a:t>
             </a:fld>
             <a:endParaRPr lang="en-US"/>
           </a:p>
@@ -1957,7 +1958,7 @@
           <a:p>
             <a:fld id="{E779FE8C-703A-4904-A4E0-13778480428C}" type="datetimeFigureOut">
               <a:rPr lang="en-US" smtClean="0"/>
-              <a:t>9/28/2026</a:t>
+              <a:t>9/29/2026</a:t>
             </a:fld>
             <a:endParaRPr lang="en-US"/>
           </a:p>
@@ -2070,7 +2071,7 @@
           <a:p>
             <a:fld id="{E779FE8C-703A-4904-A4E0-13778480428C}" type="datetimeFigureOut">
               <a:rPr lang="en-US" smtClean="0"/>
-              <a:t>9/28/2026</a:t>
+              <a:t>9/29/2026</a:t>
             </a:fld>
             <a:endParaRPr lang="en-US"/>
           </a:p>
@@ -2381,7 +2382,7 @@
           <a:p>
             <a:fld id="{E779FE8C-703A-4904-A4E0-13778480428C}" type="datetimeFigureOut">
               <a:rPr lang="en-US" smtClean="0"/>
-              <a:t>9/28/2026</a:t>
+              <a:t>9/29/2026</a:t>
             </a:fld>
             <a:endParaRPr lang="en-US"/>
           </a:p>
@@ -2669,7 +2670,7 @@
           <a:p>
             <a:fld id="{E779FE8C-703A-4904-A4E0-13778480428C}" type="datetimeFigureOut">
               <a:rPr lang="en-US" smtClean="0"/>
-              <a:t>9/28/2026</a:t>
+              <a:t>9/29/2026</a:t>
             </a:fld>
             <a:endParaRPr lang="en-US"/>
           </a:p>
@@ -2910,7 +2911,7 @@
           <a:p>
             <a:fld id="{E779FE8C-703A-4904-A4E0-13778480428C}" type="datetimeFigureOut">
               <a:rPr lang="en-US" smtClean="0"/>
-              <a:t>9/28/2026</a:t>
+              <a:t>9/29/2026</a:t>
             </a:fld>
             <a:endParaRPr lang="en-US"/>
           </a:p>
@@ -7065,10 +7066,10 @@
       </p:grpSpPr>
       <p:sp>
         <p:nvSpPr>
-          <p:cNvPr id="50" name="Rectangle 49">
-            <a:extLst>
-              <a:ext uri="{FF2B5EF4-FFF2-40B4-BE49-F238E27FC236}">
-                <a16:creationId xmlns:a16="http://schemas.microsoft.com/office/drawing/2014/main" id="{D620D2BF-387D-D4BF-5090-B9D7F5E1A177}"/>
+          <p:cNvPr id="16" name="Rectangle 15">
+            <a:extLst>
+              <a:ext uri="{FF2B5EF4-FFF2-40B4-BE49-F238E27FC236}">
+                <a16:creationId xmlns:a16="http://schemas.microsoft.com/office/drawing/2014/main" id="{1AEE394A-9CF7-8092-C774-EE074321C810}"/>
               </a:ext>
             </a:extLst>
           </p:cNvPr>
@@ -7077,8 +7078,8 @@
         </p:nvSpPr>
         <p:spPr>
           <a:xfrm>
-            <a:off x="7670527" y="4920178"/>
-            <a:ext cx="4028187" cy="1650802"/>
+            <a:off x="4363385" y="4022191"/>
+            <a:ext cx="1054194" cy="1650802"/>
           </a:xfrm>
           <a:prstGeom prst="rect">
             <a:avLst/>
@@ -7113,14 +7114,7 @@
             <a:pPr algn="ctr"/>
             <a:r>
               <a:rPr lang="en-US" sz="900" b="1" dirty="0"/>
-              <a:t>🐳 Docker Container</a:t>
-            </a:r>
-          </a:p>
-          <a:p>
-            <a:pPr algn="ctr"/>
-            <a:r>
-              <a:rPr lang="en-US" sz="900" i="1" dirty="0"/>
-              <a:t>“ollama/ollama:latest”</a:t>
+              <a:t>🐳</a:t>
             </a:r>
           </a:p>
           <a:p>
@@ -7131,10 +7125,10 @@
       </p:sp>
       <p:sp>
         <p:nvSpPr>
-          <p:cNvPr id="51" name="Rectangle 50">
-            <a:extLst>
-              <a:ext uri="{FF2B5EF4-FFF2-40B4-BE49-F238E27FC236}">
-                <a16:creationId xmlns:a16="http://schemas.microsoft.com/office/drawing/2014/main" id="{E3B161CA-3951-5003-8932-A211335401FC}"/>
+          <p:cNvPr id="70" name="Rectangle 69">
+            <a:extLst>
+              <a:ext uri="{FF2B5EF4-FFF2-40B4-BE49-F238E27FC236}">
+                <a16:creationId xmlns:a16="http://schemas.microsoft.com/office/drawing/2014/main" id="{BFB9CE4D-708B-E48E-981B-EFC68A40D09E}"/>
               </a:ext>
             </a:extLst>
           </p:cNvPr>
@@ -7143,16 +7137,16 @@
         </p:nvSpPr>
         <p:spPr>
           <a:xfrm>
-            <a:off x="7729720" y="4920177"/>
-            <a:ext cx="3714012" cy="1313663"/>
+            <a:off x="3991324" y="1019045"/>
+            <a:ext cx="3582830" cy="2525089"/>
           </a:xfrm>
           <a:prstGeom prst="rect">
             <a:avLst/>
           </a:prstGeom>
           <a:solidFill>
-            <a:schemeClr val="accent2">
-              <a:lumMod val="60000"/>
-              <a:lumOff val="40000"/>
+            <a:schemeClr val="accent1">
+              <a:lumMod val="40000"/>
+              <a:lumOff val="60000"/>
             </a:schemeClr>
           </a:solidFill>
         </p:spPr>
@@ -7173,23 +7167,34 @@
           </a:fontRef>
         </p:style>
         <p:txBody>
-          <a:bodyPr lIns="0" tIns="0" rIns="0" bIns="0" rtlCol="0" anchor="b"/>
-          <a:lstStyle/>
-          <a:p>
-            <a:pPr algn="ctr"/>
-            <a:r>
-              <a:rPr lang="en-US" sz="1600" dirty="0"/>
-              <a:t>Ollama</a:t>
-            </a:r>
-          </a:p>
-        </p:txBody>
-      </p:sp>
-      <p:sp>
-        <p:nvSpPr>
-          <p:cNvPr id="52" name="Rectangle 51">
-            <a:extLst>
-              <a:ext uri="{FF2B5EF4-FFF2-40B4-BE49-F238E27FC236}">
-                <a16:creationId xmlns:a16="http://schemas.microsoft.com/office/drawing/2014/main" id="{562CBA80-95B2-D658-D869-139D92552C8F}"/>
+          <a:bodyPr lIns="0" tIns="45720" rIns="0" bIns="0" rtlCol="0" anchor="t"/>
+          <a:lstStyle/>
+          <a:p>
+            <a:pPr algn="ctr"/>
+            <a:r>
+              <a:rPr lang="en-US" sz="900" b="1" dirty="0"/>
+              <a:t>🐳 Docker Container</a:t>
+            </a:r>
+          </a:p>
+          <a:p>
+            <a:pPr algn="ctr"/>
+            <a:r>
+              <a:rPr lang="en-US" sz="900" i="1" dirty="0"/>
+              <a:t>“python:3.13-slim”</a:t>
+            </a:r>
+          </a:p>
+          <a:p>
+            <a:pPr algn="ctr"/>
+            <a:endParaRPr lang="en-US" sz="200" i="1" dirty="0"/>
+          </a:p>
+        </p:txBody>
+      </p:sp>
+      <p:sp>
+        <p:nvSpPr>
+          <p:cNvPr id="50" name="Rectangle 49">
+            <a:extLst>
+              <a:ext uri="{FF2B5EF4-FFF2-40B4-BE49-F238E27FC236}">
+                <a16:creationId xmlns:a16="http://schemas.microsoft.com/office/drawing/2014/main" id="{D620D2BF-387D-D4BF-5090-B9D7F5E1A177}"/>
               </a:ext>
             </a:extLst>
           </p:cNvPr>
@@ -7198,15 +7203,16 @@
         </p:nvSpPr>
         <p:spPr>
           <a:xfrm>
-            <a:off x="9049796" y="4920176"/>
-            <a:ext cx="1020305" cy="1100081"/>
+            <a:off x="6393311" y="4022195"/>
+            <a:ext cx="4028187" cy="1650802"/>
           </a:xfrm>
           <a:prstGeom prst="rect">
             <a:avLst/>
           </a:prstGeom>
           <a:solidFill>
-            <a:schemeClr val="accent2">
-              <a:lumMod val="75000"/>
+            <a:schemeClr val="accent1">
+              <a:lumMod val="40000"/>
+              <a:lumOff val="60000"/>
             </a:schemeClr>
           </a:solidFill>
         </p:spPr>
@@ -7227,42 +7233,34 @@
           </a:fontRef>
         </p:style>
         <p:txBody>
-          <a:bodyPr lIns="0" tIns="0" rIns="0" bIns="0" rtlCol="0" anchor="ctr"/>
-          <a:lstStyle/>
-          <a:p>
-            <a:pPr algn="ctr"/>
-            <a:r>
-              <a:rPr lang="en-US" sz="1200" b="1" dirty="0"/>
-              <a:t>Embedding Model</a:t>
-            </a:r>
-            <a:endParaRPr lang="en-US" sz="900" b="1" dirty="0"/>
-          </a:p>
-          <a:p>
-            <a:pPr algn="ctr"/>
-            <a:r>
-              <a:rPr lang="en-US" sz="900" dirty="0"/>
-              <a:t>📚 </a:t>
-            </a:r>
-            <a:r>
-              <a:rPr lang="en-US" sz="900" b="1" u="sng" dirty="0"/>
-              <a:t>nomic-embed-</a:t>
-            </a:r>
-          </a:p>
-          <a:p>
-            <a:pPr algn="ctr"/>
-            <a:r>
-              <a:rPr lang="en-US" sz="900" b="1" u="sng" dirty="0"/>
-              <a:t>text-v1.5</a:t>
-            </a:r>
-          </a:p>
-        </p:txBody>
-      </p:sp>
-      <p:sp>
-        <p:nvSpPr>
-          <p:cNvPr id="89" name="Rectangle 88">
-            <a:extLst>
-              <a:ext uri="{FF2B5EF4-FFF2-40B4-BE49-F238E27FC236}">
-                <a16:creationId xmlns:a16="http://schemas.microsoft.com/office/drawing/2014/main" id="{609F7108-FF93-609D-A945-2510E83DD8FF}"/>
+          <a:bodyPr lIns="0" tIns="45720" rIns="0" bIns="0" rtlCol="0" anchor="b"/>
+          <a:lstStyle/>
+          <a:p>
+            <a:pPr algn="ctr"/>
+            <a:r>
+              <a:rPr lang="en-US" sz="900" b="1" dirty="0"/>
+              <a:t>🐳 Docker Container</a:t>
+            </a:r>
+          </a:p>
+          <a:p>
+            <a:pPr algn="ctr"/>
+            <a:r>
+              <a:rPr lang="en-US" sz="900" i="1" dirty="0"/>
+              <a:t>“ollama/ollama:latest”</a:t>
+            </a:r>
+          </a:p>
+          <a:p>
+            <a:pPr algn="ctr"/>
+            <a:endParaRPr lang="en-US" sz="200" i="1" dirty="0"/>
+          </a:p>
+        </p:txBody>
+      </p:sp>
+      <p:sp>
+        <p:nvSpPr>
+          <p:cNvPr id="51" name="Rectangle 50">
+            <a:extLst>
+              <a:ext uri="{FF2B5EF4-FFF2-40B4-BE49-F238E27FC236}">
+                <a16:creationId xmlns:a16="http://schemas.microsoft.com/office/drawing/2014/main" id="{E3B161CA-3951-5003-8932-A211335401FC}"/>
               </a:ext>
             </a:extLst>
           </p:cNvPr>
@@ -7271,15 +7269,16 @@
         </p:nvSpPr>
         <p:spPr>
           <a:xfrm>
-            <a:off x="10152196" y="4920174"/>
-            <a:ext cx="1222081" cy="1100083"/>
+            <a:off x="6452504" y="4070264"/>
+            <a:ext cx="3714012" cy="1249275"/>
           </a:xfrm>
           <a:prstGeom prst="rect">
             <a:avLst/>
           </a:prstGeom>
           <a:solidFill>
             <a:schemeClr val="accent2">
-              <a:lumMod val="75000"/>
+              <a:lumMod val="60000"/>
+              <a:lumOff val="40000"/>
             </a:schemeClr>
           </a:solidFill>
         </p:spPr>
@@ -7300,45 +7299,23 @@
           </a:fontRef>
         </p:style>
         <p:txBody>
-          <a:bodyPr lIns="0" tIns="0" rIns="0" bIns="0" rtlCol="0" anchor="ctr"/>
-          <a:lstStyle/>
-          <a:p>
-            <a:pPr algn="ctr"/>
-            <a:r>
-              <a:rPr lang="en-US" sz="1600" b="1" i="1" dirty="0"/>
-              <a:t>SQL Emitter</a:t>
-            </a:r>
-          </a:p>
-          <a:p>
-            <a:pPr algn="ctr"/>
-            <a:r>
-              <a:rPr lang="en-US" sz="800" b="1" i="1" dirty="0"/>
-              <a:t>(Local LLM)</a:t>
-            </a:r>
-          </a:p>
-          <a:p>
-            <a:pPr algn="ctr"/>
-            <a:endParaRPr lang="en-US" sz="800" b="1" i="1" dirty="0"/>
-          </a:p>
-          <a:p>
-            <a:pPr algn="ctr"/>
-            <a:r>
-              <a:rPr lang="en-US" sz="900" dirty="0"/>
-              <a:t>📚 </a:t>
-            </a:r>
-            <a:r>
-              <a:rPr lang="en-US" sz="900" b="1" u="sng" dirty="0"/>
-              <a:t>Qwen2.5-Coder:7b</a:t>
-            </a:r>
-          </a:p>
-        </p:txBody>
-      </p:sp>
-      <p:sp>
-        <p:nvSpPr>
-          <p:cNvPr id="2" name="Rectangle 1">
-            <a:extLst>
-              <a:ext uri="{FF2B5EF4-FFF2-40B4-BE49-F238E27FC236}">
-                <a16:creationId xmlns:a16="http://schemas.microsoft.com/office/drawing/2014/main" id="{81D6A0B9-4705-2CEA-1EC6-D1806A8968BE}"/>
+          <a:bodyPr lIns="0" tIns="0" rIns="0" bIns="0" rtlCol="0" anchor="b"/>
+          <a:lstStyle/>
+          <a:p>
+            <a:pPr algn="ctr"/>
+            <a:r>
+              <a:rPr lang="en-US" sz="1600" dirty="0"/>
+              <a:t>Ollama</a:t>
+            </a:r>
+          </a:p>
+        </p:txBody>
+      </p:sp>
+      <p:sp>
+        <p:nvSpPr>
+          <p:cNvPr id="52" name="Rectangle 51">
+            <a:extLst>
+              <a:ext uri="{FF2B5EF4-FFF2-40B4-BE49-F238E27FC236}">
+                <a16:creationId xmlns:a16="http://schemas.microsoft.com/office/drawing/2014/main" id="{562CBA80-95B2-D658-D869-139D92552C8F}"/>
               </a:ext>
             </a:extLst>
           </p:cNvPr>
@@ -7347,14 +7324,16 @@
         </p:nvSpPr>
         <p:spPr>
           <a:xfrm>
-            <a:off x="11443732" y="4920178"/>
-            <a:ext cx="202062" cy="1313662"/>
+            <a:off x="7772580" y="4070263"/>
+            <a:ext cx="1020305" cy="1020069"/>
           </a:xfrm>
           <a:prstGeom prst="rect">
             <a:avLst/>
           </a:prstGeom>
           <a:solidFill>
-            <a:srgbClr val="B17ED8"/>
+            <a:schemeClr val="accent2">
+              <a:lumMod val="75000"/>
+            </a:schemeClr>
           </a:solidFill>
         </p:spPr>
         <p:style>
@@ -7374,6 +7353,153 @@
           </a:fontRef>
         </p:style>
         <p:txBody>
+          <a:bodyPr lIns="0" tIns="0" rIns="0" bIns="0" rtlCol="0" anchor="ctr"/>
+          <a:lstStyle/>
+          <a:p>
+            <a:pPr algn="ctr"/>
+            <a:r>
+              <a:rPr lang="en-US" sz="1200" b="1" dirty="0"/>
+              <a:t>Embedding Model</a:t>
+            </a:r>
+            <a:endParaRPr lang="en-US" sz="900" b="1" dirty="0"/>
+          </a:p>
+          <a:p>
+            <a:pPr algn="ctr"/>
+            <a:r>
+              <a:rPr lang="en-US" sz="900" dirty="0"/>
+              <a:t>📚 </a:t>
+            </a:r>
+            <a:r>
+              <a:rPr lang="en-US" sz="900" b="1" u="sng" dirty="0"/>
+              <a:t>nomic-embed-</a:t>
+            </a:r>
+          </a:p>
+          <a:p>
+            <a:pPr algn="ctr"/>
+            <a:r>
+              <a:rPr lang="en-US" sz="900" b="1" u="sng" dirty="0"/>
+              <a:t>text-v1.5</a:t>
+            </a:r>
+          </a:p>
+        </p:txBody>
+      </p:sp>
+      <p:sp>
+        <p:nvSpPr>
+          <p:cNvPr id="89" name="Rectangle 88">
+            <a:extLst>
+              <a:ext uri="{FF2B5EF4-FFF2-40B4-BE49-F238E27FC236}">
+                <a16:creationId xmlns:a16="http://schemas.microsoft.com/office/drawing/2014/main" id="{609F7108-FF93-609D-A945-2510E83DD8FF}"/>
+              </a:ext>
+            </a:extLst>
+          </p:cNvPr>
+          <p:cNvSpPr/>
+          <p:nvPr/>
+        </p:nvSpPr>
+        <p:spPr>
+          <a:xfrm>
+            <a:off x="8874980" y="4070261"/>
+            <a:ext cx="1222081" cy="1020069"/>
+          </a:xfrm>
+          <a:prstGeom prst="rect">
+            <a:avLst/>
+          </a:prstGeom>
+          <a:solidFill>
+            <a:schemeClr val="accent2">
+              <a:lumMod val="75000"/>
+            </a:schemeClr>
+          </a:solidFill>
+        </p:spPr>
+        <p:style>
+          <a:lnRef idx="2">
+            <a:schemeClr val="accent1">
+              <a:shade val="15000"/>
+            </a:schemeClr>
+          </a:lnRef>
+          <a:fillRef idx="1">
+            <a:schemeClr val="accent1"/>
+          </a:fillRef>
+          <a:effectRef idx="0">
+            <a:schemeClr val="accent1"/>
+          </a:effectRef>
+          <a:fontRef idx="minor">
+            <a:schemeClr val="lt1"/>
+          </a:fontRef>
+        </p:style>
+        <p:txBody>
+          <a:bodyPr lIns="0" tIns="0" rIns="0" bIns="0" rtlCol="0" anchor="ctr"/>
+          <a:lstStyle/>
+          <a:p>
+            <a:pPr algn="ctr"/>
+            <a:r>
+              <a:rPr lang="en-US" sz="1600" b="1" i="1" dirty="0"/>
+              <a:t>SQL Emitter</a:t>
+            </a:r>
+          </a:p>
+          <a:p>
+            <a:pPr algn="ctr"/>
+            <a:r>
+              <a:rPr lang="en-US" sz="800" b="1" i="1" dirty="0"/>
+              <a:t>(Local LLM)</a:t>
+            </a:r>
+          </a:p>
+          <a:p>
+            <a:pPr algn="ctr"/>
+            <a:endParaRPr lang="en-US" sz="800" b="1" i="1" dirty="0"/>
+          </a:p>
+          <a:p>
+            <a:pPr algn="ctr"/>
+            <a:r>
+              <a:rPr lang="en-US" sz="900" dirty="0"/>
+              <a:t>📚 </a:t>
+            </a:r>
+            <a:r>
+              <a:rPr lang="en-US" sz="900" b="1" u="sng" dirty="0"/>
+              <a:t>Qwen2.5-Coder:7b</a:t>
+            </a:r>
+          </a:p>
+        </p:txBody>
+      </p:sp>
+      <p:sp>
+        <p:nvSpPr>
+          <p:cNvPr id="2" name="Rectangle 1">
+            <a:extLst>
+              <a:ext uri="{FF2B5EF4-FFF2-40B4-BE49-F238E27FC236}">
+                <a16:creationId xmlns:a16="http://schemas.microsoft.com/office/drawing/2014/main" id="{81D6A0B9-4705-2CEA-1EC6-D1806A8968BE}"/>
+              </a:ext>
+            </a:extLst>
+          </p:cNvPr>
+          <p:cNvSpPr/>
+          <p:nvPr/>
+        </p:nvSpPr>
+        <p:spPr>
+          <a:xfrm>
+            <a:off x="10166516" y="4070265"/>
+            <a:ext cx="202062" cy="1249274"/>
+          </a:xfrm>
+          <a:prstGeom prst="rect">
+            <a:avLst/>
+          </a:prstGeom>
+          <a:solidFill>
+            <a:srgbClr val="B17ED8"/>
+          </a:solidFill>
+        </p:spPr>
+        <p:style>
+          <a:lnRef idx="2">
+            <a:schemeClr val="accent1">
+              <a:shade val="15000"/>
+            </a:schemeClr>
+          </a:lnRef>
+          <a:fillRef idx="1">
+            <a:schemeClr val="accent1"/>
+          </a:fillRef>
+          <a:effectRef idx="0">
+            <a:schemeClr val="accent1"/>
+          </a:effectRef>
+          <a:fontRef idx="minor">
+            <a:schemeClr val="lt1"/>
+          </a:fontRef>
+        </p:style>
+        <p:txBody>
           <a:bodyPr vert="vert270" lIns="0" tIns="0" rIns="0" bIns="0" rtlCol="0" anchor="ctr"/>
           <a:lstStyle/>
           <a:p>
@@ -7399,7 +7525,7 @@
         </p:nvSpPr>
         <p:spPr>
           <a:xfrm>
-            <a:off x="562127" y="2087031"/>
+            <a:off x="562127" y="2634336"/>
             <a:ext cx="1116053" cy="401369"/>
           </a:xfrm>
           <a:prstGeom prst="rect">
@@ -7468,7 +7594,7 @@
         </p:nvSpPr>
         <p:spPr>
           <a:xfrm>
-            <a:off x="562127" y="945957"/>
+            <a:off x="562127" y="1493262"/>
             <a:ext cx="1116053" cy="401369"/>
           </a:xfrm>
           <a:prstGeom prst="rect">
@@ -7523,384 +7649,6 @@
           </a:p>
         </p:txBody>
       </p:sp>
-      <p:sp>
-        <p:nvSpPr>
-          <p:cNvPr id="8" name="Rectangle 7">
-            <a:extLst>
-              <a:ext uri="{FF2B5EF4-FFF2-40B4-BE49-F238E27FC236}">
-                <a16:creationId xmlns:a16="http://schemas.microsoft.com/office/drawing/2014/main" id="{5F6E5B91-C632-7638-5DE6-41D98F5FAD3D}"/>
-              </a:ext>
-            </a:extLst>
-          </p:cNvPr>
-          <p:cNvSpPr/>
-          <p:nvPr/>
-        </p:nvSpPr>
-        <p:spPr>
-          <a:xfrm>
-            <a:off x="4586614" y="829460"/>
-            <a:ext cx="1194727" cy="1891091"/>
-          </a:xfrm>
-          <a:prstGeom prst="rect">
-            <a:avLst/>
-          </a:prstGeom>
-          <a:solidFill>
-            <a:srgbClr val="7030A0"/>
-          </a:solidFill>
-        </p:spPr>
-        <p:style>
-          <a:lnRef idx="2">
-            <a:schemeClr val="accent1">
-              <a:shade val="15000"/>
-            </a:schemeClr>
-          </a:lnRef>
-          <a:fillRef idx="1">
-            <a:schemeClr val="accent1"/>
-          </a:fillRef>
-          <a:effectRef idx="0">
-            <a:schemeClr val="accent1"/>
-          </a:effectRef>
-          <a:fontRef idx="minor">
-            <a:schemeClr val="lt1"/>
-          </a:fontRef>
-        </p:style>
-        <p:txBody>
-          <a:bodyPr lIns="0" tIns="0" rIns="0" bIns="0" rtlCol="0" anchor="ctr"/>
-          <a:lstStyle/>
-          <a:p>
-            <a:pPr algn="ctr"/>
-            <a:r>
-              <a:rPr lang="en-US" sz="1600" dirty="0"/>
-              <a:t>Web Server</a:t>
-            </a:r>
-            <a:endParaRPr lang="en-US" sz="1400" dirty="0"/>
-          </a:p>
-          <a:p>
-            <a:pPr algn="ctr"/>
-            <a:r>
-              <a:rPr lang="en-US" sz="1100" u="sng" dirty="0"/>
-              <a:t>app/api/</a:t>
-            </a:r>
-          </a:p>
-          <a:p>
-            <a:pPr algn="ctr"/>
-            <a:r>
-              <a:rPr lang="en-US" sz="800" dirty="0"/>
-              <a:t>📚</a:t>
-            </a:r>
-            <a:r>
-              <a:rPr lang="en-US" sz="1100" dirty="0"/>
-              <a:t> </a:t>
-            </a:r>
-            <a:r>
-              <a:rPr lang="en-US" sz="800" b="1" u="sng" dirty="0"/>
-              <a:t>uvicorn</a:t>
-            </a:r>
-          </a:p>
-          <a:p>
-            <a:pPr algn="ctr"/>
-            <a:r>
-              <a:rPr lang="en-US" sz="800" dirty="0"/>
-              <a:t>📚 </a:t>
-            </a:r>
-            <a:r>
-              <a:rPr lang="en-US" sz="800" b="1" u="sng" dirty="0"/>
-              <a:t>FastAPI Users</a:t>
-            </a:r>
-          </a:p>
-          <a:p>
-            <a:pPr algn="ctr"/>
-            <a:r>
-              <a:rPr lang="en-US" sz="800" b="1" dirty="0"/>
-              <a:t> </a:t>
-            </a:r>
-            <a:r>
-              <a:rPr lang="en-US" sz="800" dirty="0"/>
-              <a:t>📚 </a:t>
-            </a:r>
-            <a:r>
-              <a:rPr lang="en-US" sz="800" b="1" u="sng" dirty="0"/>
-              <a:t>httpx-oauth</a:t>
-            </a:r>
-          </a:p>
-          <a:p>
-            <a:pPr algn="ctr"/>
-            <a:endParaRPr lang="en-US" sz="800" dirty="0"/>
-          </a:p>
-          <a:p>
-            <a:pPr algn="ctr"/>
-            <a:r>
-              <a:rPr lang="en-US" sz="800" dirty="0"/>
-              <a:t>Handles </a:t>
-            </a:r>
-          </a:p>
-          <a:p>
-            <a:pPr algn="ctr"/>
-            <a:r>
-              <a:rPr lang="en-US" sz="800" dirty="0"/>
-              <a:t>display for user interactions. </a:t>
-            </a:r>
-          </a:p>
-          <a:p>
-            <a:pPr algn="ctr"/>
-            <a:endParaRPr lang="en-US" sz="800" dirty="0"/>
-          </a:p>
-          <a:p>
-            <a:pPr algn="ctr"/>
-            <a:r>
-              <a:rPr lang="en-US" sz="800" dirty="0"/>
-              <a:t>Services via REST API</a:t>
-            </a:r>
-          </a:p>
-        </p:txBody>
-      </p:sp>
-      <p:sp>
-        <p:nvSpPr>
-          <p:cNvPr id="9" name="Rectangle 8">
-            <a:extLst>
-              <a:ext uri="{FF2B5EF4-FFF2-40B4-BE49-F238E27FC236}">
-                <a16:creationId xmlns:a16="http://schemas.microsoft.com/office/drawing/2014/main" id="{6337990E-CA5C-5E9E-B92E-0D2BC0C31F0B}"/>
-              </a:ext>
-            </a:extLst>
-          </p:cNvPr>
-          <p:cNvSpPr/>
-          <p:nvPr/>
-        </p:nvSpPr>
-        <p:spPr>
-          <a:xfrm>
-            <a:off x="7748724" y="2581844"/>
-            <a:ext cx="869364" cy="1650807"/>
-          </a:xfrm>
-          <a:prstGeom prst="rect">
-            <a:avLst/>
-          </a:prstGeom>
-          <a:solidFill>
-            <a:srgbClr val="7030A0"/>
-          </a:solidFill>
-        </p:spPr>
-        <p:style>
-          <a:lnRef idx="2">
-            <a:schemeClr val="accent1">
-              <a:shade val="15000"/>
-            </a:schemeClr>
-          </a:lnRef>
-          <a:fillRef idx="1">
-            <a:schemeClr val="accent1"/>
-          </a:fillRef>
-          <a:effectRef idx="0">
-            <a:schemeClr val="accent1"/>
-          </a:effectRef>
-          <a:fontRef idx="minor">
-            <a:schemeClr val="lt1"/>
-          </a:fontRef>
-        </p:style>
-        <p:txBody>
-          <a:bodyPr lIns="0" tIns="0" rIns="0" bIns="0" rtlCol="0" anchor="ctr"/>
-          <a:lstStyle/>
-          <a:p>
-            <a:pPr algn="ctr"/>
-            <a:r>
-              <a:rPr lang="en-US" dirty="0"/>
-              <a:t>Query Parser</a:t>
-            </a:r>
-            <a:endParaRPr lang="en-US" sz="1100" dirty="0"/>
-          </a:p>
-          <a:p>
-            <a:pPr algn="ctr"/>
-            <a:r>
-              <a:rPr lang="en-US" sz="1100" u="sng" dirty="0"/>
-              <a:t>app/parser</a:t>
-            </a:r>
-          </a:p>
-          <a:p>
-            <a:pPr algn="ctr"/>
-            <a:endParaRPr lang="en-US" sz="800" dirty="0"/>
-          </a:p>
-          <a:p>
-            <a:pPr algn="ctr"/>
-            <a:r>
-              <a:rPr lang="en-US" sz="800" dirty="0"/>
-              <a:t>Converts user string to </a:t>
-            </a:r>
-            <a:r>
-              <a:rPr lang="en-US" sz="800" dirty="0">
-                <a:solidFill>
-                  <a:srgbClr val="B17ED8"/>
-                </a:solidFill>
-                <a:latin typeface="Adobe Gothic Std B" panose="020B0800000000000000" pitchFamily="34" charset="-128"/>
-                <a:ea typeface="Adobe Gothic Std B" panose="020B0800000000000000" pitchFamily="34" charset="-128"/>
-              </a:rPr>
-              <a:t>Query</a:t>
-            </a:r>
-            <a:r>
-              <a:rPr lang="en-US" sz="800" dirty="0"/>
-              <a:t> object </a:t>
-            </a:r>
-          </a:p>
-          <a:p>
-            <a:pPr algn="ctr"/>
-            <a:r>
-              <a:rPr lang="en-US" sz="800" dirty="0"/>
-              <a:t>(via Qwen)</a:t>
-            </a:r>
-          </a:p>
-        </p:txBody>
-      </p:sp>
-      <p:sp>
-        <p:nvSpPr>
-          <p:cNvPr id="11" name="Rectangle 10">
-            <a:extLst>
-              <a:ext uri="{FF2B5EF4-FFF2-40B4-BE49-F238E27FC236}">
-                <a16:creationId xmlns:a16="http://schemas.microsoft.com/office/drawing/2014/main" id="{FD350345-C206-49FB-1B55-4BFF02E6ED8D}"/>
-              </a:ext>
-            </a:extLst>
-          </p:cNvPr>
-          <p:cNvSpPr/>
-          <p:nvPr/>
-        </p:nvSpPr>
-        <p:spPr>
-          <a:xfrm>
-            <a:off x="9136593" y="2581844"/>
-            <a:ext cx="1102254" cy="1650807"/>
-          </a:xfrm>
-          <a:prstGeom prst="rect">
-            <a:avLst/>
-          </a:prstGeom>
-          <a:solidFill>
-            <a:srgbClr val="7030A0"/>
-          </a:solidFill>
-        </p:spPr>
-        <p:style>
-          <a:lnRef idx="2">
-            <a:schemeClr val="accent1">
-              <a:shade val="15000"/>
-            </a:schemeClr>
-          </a:lnRef>
-          <a:fillRef idx="1">
-            <a:schemeClr val="accent1"/>
-          </a:fillRef>
-          <a:effectRef idx="0">
-            <a:schemeClr val="accent1"/>
-          </a:effectRef>
-          <a:fontRef idx="minor">
-            <a:schemeClr val="lt1"/>
-          </a:fontRef>
-        </p:style>
-        <p:txBody>
-          <a:bodyPr lIns="0" tIns="0" rIns="0" bIns="0" rtlCol="0" anchor="ctr"/>
-          <a:lstStyle/>
-          <a:p>
-            <a:pPr algn="ctr"/>
-            <a:r>
-              <a:rPr lang="en-US" dirty="0"/>
-              <a:t>Query Mapper</a:t>
-            </a:r>
-            <a:endParaRPr lang="en-US" sz="1100" dirty="0"/>
-          </a:p>
-          <a:p>
-            <a:pPr algn="ctr"/>
-            <a:r>
-              <a:rPr lang="en-US" sz="1100" u="sng" dirty="0"/>
-              <a:t>app/semantic</a:t>
-            </a:r>
-          </a:p>
-          <a:p>
-            <a:pPr algn="ctr"/>
-            <a:endParaRPr lang="en-US" sz="800" dirty="0"/>
-          </a:p>
-          <a:p>
-            <a:pPr algn="ctr"/>
-            <a:r>
-              <a:rPr lang="en-US" sz="800" dirty="0"/>
-              <a:t>Normalizes request to what is retrievable from the database</a:t>
-            </a:r>
-          </a:p>
-        </p:txBody>
-      </p:sp>
-      <p:sp>
-        <p:nvSpPr>
-          <p:cNvPr id="13" name="Rectangle 12">
-            <a:extLst>
-              <a:ext uri="{FF2B5EF4-FFF2-40B4-BE49-F238E27FC236}">
-                <a16:creationId xmlns:a16="http://schemas.microsoft.com/office/drawing/2014/main" id="{59DE70CD-39A9-A20F-7E9F-7837F6D26DB9}"/>
-              </a:ext>
-            </a:extLst>
-          </p:cNvPr>
-          <p:cNvSpPr/>
-          <p:nvPr/>
-        </p:nvSpPr>
-        <p:spPr>
-          <a:xfrm>
-            <a:off x="10823273" y="2581844"/>
-            <a:ext cx="929349" cy="1650807"/>
-          </a:xfrm>
-          <a:prstGeom prst="rect">
-            <a:avLst/>
-          </a:prstGeom>
-          <a:solidFill>
-            <a:srgbClr val="7030A0"/>
-          </a:solidFill>
-        </p:spPr>
-        <p:style>
-          <a:lnRef idx="2">
-            <a:schemeClr val="accent1">
-              <a:shade val="15000"/>
-            </a:schemeClr>
-          </a:lnRef>
-          <a:fillRef idx="1">
-            <a:schemeClr val="accent1"/>
-          </a:fillRef>
-          <a:effectRef idx="0">
-            <a:schemeClr val="accent1"/>
-          </a:effectRef>
-          <a:fontRef idx="minor">
-            <a:schemeClr val="lt1"/>
-          </a:fontRef>
-        </p:style>
-        <p:txBody>
-          <a:bodyPr lIns="0" tIns="0" rIns="0" bIns="0" rtlCol="0" anchor="ctr"/>
-          <a:lstStyle/>
-          <a:p>
-            <a:pPr algn="ctr"/>
-            <a:r>
-              <a:rPr lang="en-US" sz="1600" dirty="0"/>
-              <a:t>Executor</a:t>
-            </a:r>
-            <a:endParaRPr lang="en-US" sz="1400" dirty="0"/>
-          </a:p>
-          <a:p>
-            <a:pPr algn="ctr"/>
-            <a:r>
-              <a:rPr lang="en-US" sz="1100" u="sng" dirty="0"/>
-              <a:t>app/retrieval</a:t>
-            </a:r>
-          </a:p>
-          <a:p>
-            <a:pPr algn="ctr"/>
-            <a:endParaRPr lang="en-US" sz="800" dirty="0"/>
-          </a:p>
-          <a:p>
-            <a:pPr algn="ctr"/>
-            <a:r>
-              <a:rPr lang="en-US" sz="800" dirty="0"/>
-              <a:t>Generates SQL to execute </a:t>
-            </a:r>
-            <a:r>
-              <a:rPr lang="en-US" sz="800" dirty="0">
-                <a:solidFill>
-                  <a:srgbClr val="B17ED8"/>
-                </a:solidFill>
-                <a:latin typeface="Adobe Gothic Std B" panose="020B0800000000000000" pitchFamily="34" charset="-128"/>
-                <a:ea typeface="Adobe Gothic Std B" panose="020B0800000000000000" pitchFamily="34" charset="-128"/>
-              </a:rPr>
-              <a:t>QueryPlan</a:t>
-            </a:r>
-            <a:r>
-              <a:rPr lang="en-US" sz="800" dirty="0"/>
-              <a:t> (via Qwen), sanitizes then executes SQL</a:t>
-            </a:r>
-          </a:p>
-        </p:txBody>
-      </p:sp>
       <p:cxnSp>
         <p:nvCxnSpPr>
           <p:cNvPr id="14" name="Straight Arrow Connector 13">
@@ -7918,53 +7666,8 @@
         </p:nvCxnSpPr>
         <p:spPr>
           <a:xfrm flipH="1">
-            <a:off x="1678180" y="2287716"/>
+            <a:off x="1678180" y="2835021"/>
             <a:ext cx="552826" cy="0"/>
-          </a:xfrm>
-          <a:prstGeom prst="straightConnector1">
-            <a:avLst/>
-          </a:prstGeom>
-          <a:ln w="12700">
-            <a:solidFill>
-              <a:schemeClr val="tx1"/>
-            </a:solidFill>
-            <a:headEnd type="arrow"/>
-            <a:tailEnd type="none"/>
-          </a:ln>
-        </p:spPr>
-        <p:style>
-          <a:lnRef idx="1">
-            <a:schemeClr val="accent1"/>
-          </a:lnRef>
-          <a:fillRef idx="0">
-            <a:schemeClr val="accent1"/>
-          </a:fillRef>
-          <a:effectRef idx="0">
-            <a:schemeClr val="accent1"/>
-          </a:effectRef>
-          <a:fontRef idx="minor">
-            <a:schemeClr val="tx1"/>
-          </a:fontRef>
-        </p:style>
-      </p:cxnSp>
-      <p:cxnSp>
-        <p:nvCxnSpPr>
-          <p:cNvPr id="18" name="Straight Arrow Connector 17">
-            <a:extLst>
-              <a:ext uri="{FF2B5EF4-FFF2-40B4-BE49-F238E27FC236}">
-                <a16:creationId xmlns:a16="http://schemas.microsoft.com/office/drawing/2014/main" id="{289F1476-8289-F0DD-9B6E-4A04F3B111E0}"/>
-              </a:ext>
-            </a:extLst>
-          </p:cNvPr>
-          <p:cNvCxnSpPr>
-            <a:cxnSpLocks/>
-          </p:cNvCxnSpPr>
-          <p:nvPr/>
-        </p:nvCxnSpPr>
-        <p:spPr>
-          <a:xfrm flipH="1">
-            <a:off x="3259163" y="2287715"/>
-            <a:ext cx="1309366" cy="0"/>
           </a:xfrm>
           <a:prstGeom prst="straightConnector1">
             <a:avLst/>
@@ -8003,14 +7706,14 @@
           </p:cNvPr>
           <p:cNvCxnSpPr>
             <a:cxnSpLocks/>
-            <a:endCxn id="9" idx="2"/>
+            <a:endCxn id="143" idx="2"/>
           </p:cNvCxnSpPr>
           <p:nvPr/>
         </p:nvCxnSpPr>
         <p:spPr>
-          <a:xfrm flipV="1">
-            <a:off x="8183406" y="4232651"/>
-            <a:ext cx="0" cy="687522"/>
+          <a:xfrm flipH="1" flipV="1">
+            <a:off x="6948754" y="3473508"/>
+            <a:ext cx="7718" cy="545074"/>
           </a:xfrm>
           <a:prstGeom prst="straightConnector1">
             <a:avLst/>
@@ -8039,285 +7742,6 @@
           </a:fontRef>
         </p:style>
       </p:cxnSp>
-      <p:cxnSp>
-        <p:nvCxnSpPr>
-          <p:cNvPr id="29" name="Straight Arrow Connector 28">
-            <a:extLst>
-              <a:ext uri="{FF2B5EF4-FFF2-40B4-BE49-F238E27FC236}">
-                <a16:creationId xmlns:a16="http://schemas.microsoft.com/office/drawing/2014/main" id="{60EFA422-E47F-91E3-42D0-2A8BC5CE310A}"/>
-              </a:ext>
-            </a:extLst>
-          </p:cNvPr>
-          <p:cNvCxnSpPr>
-            <a:cxnSpLocks/>
-            <a:stCxn id="13" idx="1"/>
-            <a:endCxn id="11" idx="3"/>
-          </p:cNvCxnSpPr>
-          <p:nvPr/>
-        </p:nvCxnSpPr>
-        <p:spPr>
-          <a:xfrm flipH="1">
-            <a:off x="10238847" y="3407248"/>
-            <a:ext cx="584426" cy="0"/>
-          </a:xfrm>
-          <a:prstGeom prst="straightConnector1">
-            <a:avLst/>
-          </a:prstGeom>
-          <a:ln w="12700">
-            <a:solidFill>
-              <a:schemeClr val="tx1"/>
-            </a:solidFill>
-            <a:headEnd type="arrow"/>
-            <a:tailEnd type="none"/>
-          </a:ln>
-        </p:spPr>
-        <p:style>
-          <a:lnRef idx="1">
-            <a:schemeClr val="accent1"/>
-          </a:lnRef>
-          <a:fillRef idx="0">
-            <a:schemeClr val="accent1"/>
-          </a:fillRef>
-          <a:effectRef idx="0">
-            <a:schemeClr val="accent1"/>
-          </a:effectRef>
-          <a:fontRef idx="minor">
-            <a:schemeClr val="tx1"/>
-          </a:fontRef>
-        </p:style>
-      </p:cxnSp>
-      <p:cxnSp>
-        <p:nvCxnSpPr>
-          <p:cNvPr id="35" name="Straight Arrow Connector 34">
-            <a:extLst>
-              <a:ext uri="{FF2B5EF4-FFF2-40B4-BE49-F238E27FC236}">
-                <a16:creationId xmlns:a16="http://schemas.microsoft.com/office/drawing/2014/main" id="{A91024CF-1BBB-6447-AC43-8CCFBE29F66A}"/>
-              </a:ext>
-            </a:extLst>
-          </p:cNvPr>
-          <p:cNvCxnSpPr>
-            <a:cxnSpLocks/>
-            <a:endCxn id="11" idx="2"/>
-          </p:cNvCxnSpPr>
-          <p:nvPr/>
-        </p:nvCxnSpPr>
-        <p:spPr>
-          <a:xfrm flipH="1" flipV="1">
-            <a:off x="9687720" y="4232651"/>
-            <a:ext cx="15264" cy="687522"/>
-          </a:xfrm>
-          <a:prstGeom prst="straightConnector1">
-            <a:avLst/>
-          </a:prstGeom>
-          <a:ln w="12700">
-            <a:solidFill>
-              <a:schemeClr val="tx1"/>
-            </a:solidFill>
-            <a:prstDash val="dash"/>
-            <a:headEnd type="arrow"/>
-            <a:tailEnd type="arrow"/>
-          </a:ln>
-        </p:spPr>
-        <p:style>
-          <a:lnRef idx="1">
-            <a:schemeClr val="accent1"/>
-          </a:lnRef>
-          <a:fillRef idx="0">
-            <a:schemeClr val="accent1"/>
-          </a:fillRef>
-          <a:effectRef idx="0">
-            <a:schemeClr val="accent1"/>
-          </a:effectRef>
-          <a:fontRef idx="minor">
-            <a:schemeClr val="tx1"/>
-          </a:fontRef>
-        </p:style>
-      </p:cxnSp>
-      <p:cxnSp>
-        <p:nvCxnSpPr>
-          <p:cNvPr id="37" name="Straight Arrow Connector 36">
-            <a:extLst>
-              <a:ext uri="{FF2B5EF4-FFF2-40B4-BE49-F238E27FC236}">
-                <a16:creationId xmlns:a16="http://schemas.microsoft.com/office/drawing/2014/main" id="{837E65A8-E98B-A3F1-EC69-60F3FB12BFCB}"/>
-              </a:ext>
-            </a:extLst>
-          </p:cNvPr>
-          <p:cNvCxnSpPr>
-            <a:cxnSpLocks/>
-          </p:cNvCxnSpPr>
-          <p:nvPr/>
-        </p:nvCxnSpPr>
-        <p:spPr>
-          <a:xfrm flipH="1">
-            <a:off x="10657590" y="4232651"/>
-            <a:ext cx="231288" cy="208593"/>
-          </a:xfrm>
-          <a:prstGeom prst="straightConnector1">
-            <a:avLst/>
-          </a:prstGeom>
-          <a:ln w="12700">
-            <a:solidFill>
-              <a:schemeClr val="tx1"/>
-            </a:solidFill>
-            <a:prstDash val="dash"/>
-            <a:headEnd type="arrow"/>
-            <a:tailEnd type="arrow"/>
-          </a:ln>
-        </p:spPr>
-        <p:style>
-          <a:lnRef idx="1">
-            <a:schemeClr val="accent1"/>
-          </a:lnRef>
-          <a:fillRef idx="0">
-            <a:schemeClr val="accent1"/>
-          </a:fillRef>
-          <a:effectRef idx="0">
-            <a:schemeClr val="accent1"/>
-          </a:effectRef>
-          <a:fontRef idx="minor">
-            <a:schemeClr val="tx1"/>
-          </a:fontRef>
-        </p:style>
-      </p:cxnSp>
-      <p:cxnSp>
-        <p:nvCxnSpPr>
-          <p:cNvPr id="42" name="Straight Arrow Connector 41">
-            <a:extLst>
-              <a:ext uri="{FF2B5EF4-FFF2-40B4-BE49-F238E27FC236}">
-                <a16:creationId xmlns:a16="http://schemas.microsoft.com/office/drawing/2014/main" id="{59FA540F-0D32-6ABF-F082-1F95536F248C}"/>
-              </a:ext>
-            </a:extLst>
-          </p:cNvPr>
-          <p:cNvCxnSpPr>
-            <a:cxnSpLocks/>
-          </p:cNvCxnSpPr>
-          <p:nvPr/>
-        </p:nvCxnSpPr>
-        <p:spPr>
-          <a:xfrm>
-            <a:off x="10258677" y="4232651"/>
-            <a:ext cx="204729" cy="208593"/>
-          </a:xfrm>
-          <a:prstGeom prst="straightConnector1">
-            <a:avLst/>
-          </a:prstGeom>
-          <a:ln w="12700">
-            <a:solidFill>
-              <a:schemeClr val="tx1"/>
-            </a:solidFill>
-            <a:prstDash val="dash"/>
-            <a:headEnd type="arrow"/>
-            <a:tailEnd type="arrow"/>
-          </a:ln>
-        </p:spPr>
-        <p:style>
-          <a:lnRef idx="1">
-            <a:schemeClr val="accent1"/>
-          </a:lnRef>
-          <a:fillRef idx="0">
-            <a:schemeClr val="accent1"/>
-          </a:fillRef>
-          <a:effectRef idx="0">
-            <a:schemeClr val="accent1"/>
-          </a:effectRef>
-          <a:fontRef idx="minor">
-            <a:schemeClr val="tx1"/>
-          </a:fontRef>
-        </p:style>
-      </p:cxnSp>
-      <p:cxnSp>
-        <p:nvCxnSpPr>
-          <p:cNvPr id="43" name="Straight Arrow Connector 42">
-            <a:extLst>
-              <a:ext uri="{FF2B5EF4-FFF2-40B4-BE49-F238E27FC236}">
-                <a16:creationId xmlns:a16="http://schemas.microsoft.com/office/drawing/2014/main" id="{6DD88032-5E17-4F47-AA9F-FBDAC2D2C59F}"/>
-              </a:ext>
-            </a:extLst>
-          </p:cNvPr>
-          <p:cNvCxnSpPr>
-            <a:cxnSpLocks/>
-            <a:stCxn id="11" idx="1"/>
-            <a:endCxn id="9" idx="3"/>
-          </p:cNvCxnSpPr>
-          <p:nvPr/>
-        </p:nvCxnSpPr>
-        <p:spPr>
-          <a:xfrm flipH="1">
-            <a:off x="8618088" y="3407248"/>
-            <a:ext cx="518505" cy="0"/>
-          </a:xfrm>
-          <a:prstGeom prst="straightConnector1">
-            <a:avLst/>
-          </a:prstGeom>
-          <a:ln w="12700">
-            <a:solidFill>
-              <a:schemeClr val="tx1"/>
-            </a:solidFill>
-            <a:headEnd type="arrow"/>
-            <a:tailEnd type="none"/>
-          </a:ln>
-        </p:spPr>
-        <p:style>
-          <a:lnRef idx="1">
-            <a:schemeClr val="accent1"/>
-          </a:lnRef>
-          <a:fillRef idx="0">
-            <a:schemeClr val="accent1"/>
-          </a:fillRef>
-          <a:effectRef idx="0">
-            <a:schemeClr val="accent1"/>
-          </a:effectRef>
-          <a:fontRef idx="minor">
-            <a:schemeClr val="tx1"/>
-          </a:fontRef>
-        </p:style>
-      </p:cxnSp>
-      <p:cxnSp>
-        <p:nvCxnSpPr>
-          <p:cNvPr id="47" name="Straight Arrow Connector 46">
-            <a:extLst>
-              <a:ext uri="{FF2B5EF4-FFF2-40B4-BE49-F238E27FC236}">
-                <a16:creationId xmlns:a16="http://schemas.microsoft.com/office/drawing/2014/main" id="{8365C1E3-C6AD-0E59-D654-7A64454F99F0}"/>
-              </a:ext>
-            </a:extLst>
-          </p:cNvPr>
-          <p:cNvCxnSpPr>
-            <a:cxnSpLocks/>
-          </p:cNvCxnSpPr>
-          <p:nvPr/>
-        </p:nvCxnSpPr>
-        <p:spPr>
-          <a:xfrm flipV="1">
-            <a:off x="11181177" y="4232651"/>
-            <a:ext cx="0" cy="687522"/>
-          </a:xfrm>
-          <a:prstGeom prst="straightConnector1">
-            <a:avLst/>
-          </a:prstGeom>
-          <a:ln w="12700">
-            <a:solidFill>
-              <a:schemeClr val="tx1"/>
-            </a:solidFill>
-            <a:prstDash val="dash"/>
-            <a:headEnd type="arrow"/>
-            <a:tailEnd type="arrow"/>
-          </a:ln>
-        </p:spPr>
-        <p:style>
-          <a:lnRef idx="1">
-            <a:schemeClr val="accent1"/>
-          </a:lnRef>
-          <a:fillRef idx="0">
-            <a:schemeClr val="accent1"/>
-          </a:fillRef>
-          <a:effectRef idx="0">
-            <a:schemeClr val="accent1"/>
-          </a:effectRef>
-          <a:fontRef idx="minor">
-            <a:schemeClr val="tx1"/>
-          </a:fontRef>
-        </p:style>
-      </p:cxnSp>
       <p:sp>
         <p:nvSpPr>
           <p:cNvPr id="48" name="Rectangle 47">
@@ -8332,8 +7756,8 @@
         </p:nvSpPr>
         <p:spPr>
           <a:xfrm>
-            <a:off x="7800128" y="4920175"/>
-            <a:ext cx="1167573" cy="1100082"/>
+            <a:off x="6522912" y="4070262"/>
+            <a:ext cx="1167573" cy="1020070"/>
           </a:xfrm>
           <a:prstGeom prst="rect">
             <a:avLst/>
@@ -8394,57 +7818,12 @@
           </a:p>
         </p:txBody>
       </p:sp>
-      <p:cxnSp>
-        <p:nvCxnSpPr>
-          <p:cNvPr id="64" name="Straight Arrow Connector 63">
-            <a:extLst>
-              <a:ext uri="{FF2B5EF4-FFF2-40B4-BE49-F238E27FC236}">
-                <a16:creationId xmlns:a16="http://schemas.microsoft.com/office/drawing/2014/main" id="{876C400E-DE7F-DE8B-23CD-DE4F9C59641B}"/>
-              </a:ext>
-            </a:extLst>
-          </p:cNvPr>
-          <p:cNvCxnSpPr>
-            <a:cxnSpLocks/>
-          </p:cNvCxnSpPr>
-          <p:nvPr/>
-        </p:nvCxnSpPr>
-        <p:spPr>
-          <a:xfrm flipV="1">
-            <a:off x="3260789" y="1146641"/>
-            <a:ext cx="1307740" cy="1"/>
-          </a:xfrm>
-          <a:prstGeom prst="straightConnector1">
-            <a:avLst/>
-          </a:prstGeom>
-          <a:ln w="12700">
-            <a:solidFill>
-              <a:schemeClr val="tx1"/>
-            </a:solidFill>
-            <a:headEnd type="arrow"/>
-            <a:tailEnd type="none"/>
-          </a:ln>
-        </p:spPr>
-        <p:style>
-          <a:lnRef idx="1">
-            <a:schemeClr val="accent1"/>
-          </a:lnRef>
-          <a:fillRef idx="0">
-            <a:schemeClr val="accent1"/>
-          </a:fillRef>
-          <a:effectRef idx="0">
-            <a:schemeClr val="accent1"/>
-          </a:effectRef>
-          <a:fontRef idx="minor">
-            <a:schemeClr val="tx1"/>
-          </a:fontRef>
-        </p:style>
-      </p:cxnSp>
-      <p:sp>
-        <p:nvSpPr>
-          <p:cNvPr id="73" name="Rectangle 72">
-            <a:extLst>
-              <a:ext uri="{FF2B5EF4-FFF2-40B4-BE49-F238E27FC236}">
-                <a16:creationId xmlns:a16="http://schemas.microsoft.com/office/drawing/2014/main" id="{3A768D3E-E65E-59D0-A9DE-9B81B3F86D94}"/>
+      <p:sp>
+        <p:nvSpPr>
+          <p:cNvPr id="117" name="Flowchart: Off-page Connector 116">
+            <a:extLst>
+              <a:ext uri="{FF2B5EF4-FFF2-40B4-BE49-F238E27FC236}">
+                <a16:creationId xmlns:a16="http://schemas.microsoft.com/office/drawing/2014/main" id="{D7C4B127-ED58-CB38-3043-477F8C136243}"/>
               </a:ext>
             </a:extLst>
           </p:cNvPr>
@@ -8452,263 +7831,8 @@
           <p:nvPr/>
         </p:nvSpPr>
         <p:spPr>
-          <a:xfrm>
-            <a:off x="10186804" y="4441244"/>
-            <a:ext cx="721904" cy="404410"/>
-          </a:xfrm>
-          <a:prstGeom prst="rect">
-            <a:avLst/>
-          </a:prstGeom>
-          <a:solidFill>
-            <a:srgbClr val="F7A5A5"/>
-          </a:solidFill>
-        </p:spPr>
-        <p:style>
-          <a:lnRef idx="2">
-            <a:schemeClr val="accent1">
-              <a:shade val="15000"/>
-            </a:schemeClr>
-          </a:lnRef>
-          <a:fillRef idx="1">
-            <a:schemeClr val="accent1"/>
-          </a:fillRef>
-          <a:effectRef idx="0">
-            <a:schemeClr val="accent1"/>
-          </a:effectRef>
-          <a:fontRef idx="minor">
-            <a:schemeClr val="lt1"/>
-          </a:fontRef>
-        </p:style>
-        <p:txBody>
-          <a:bodyPr lIns="0" tIns="45720" rIns="0" bIns="0" rtlCol="0" anchor="t"/>
-          <a:lstStyle/>
-          <a:p>
-            <a:pPr algn="ctr"/>
-            <a:r>
-              <a:rPr lang="en-US" sz="1100" dirty="0"/>
-              <a:t>🛢️</a:t>
-            </a:r>
-            <a:r>
-              <a:rPr lang="en-US" sz="900" b="1" dirty="0"/>
-              <a:t> </a:t>
-            </a:r>
-            <a:r>
-              <a:rPr lang="en-US" sz="1200" b="1" dirty="0"/>
-              <a:t>DB</a:t>
-            </a:r>
-          </a:p>
-          <a:p>
-            <a:pPr marL="171450" indent="-91440">
-              <a:buFont typeface="Arial" panose="020B0604020202020204" pitchFamily="34" charset="0"/>
-              <a:buChar char="•"/>
-            </a:pPr>
-            <a:r>
-              <a:rPr lang="en-US" sz="900" dirty="0"/>
-              <a:t>xbrl</a:t>
-            </a:r>
-          </a:p>
-        </p:txBody>
-      </p:sp>
-      <p:cxnSp>
-        <p:nvCxnSpPr>
-          <p:cNvPr id="109" name="Connector: Elbow 108">
-            <a:extLst>
-              <a:ext uri="{FF2B5EF4-FFF2-40B4-BE49-F238E27FC236}">
-                <a16:creationId xmlns:a16="http://schemas.microsoft.com/office/drawing/2014/main" id="{68CCE979-38C1-892C-888A-C361A055421E}"/>
-              </a:ext>
-            </a:extLst>
-          </p:cNvPr>
-          <p:cNvCxnSpPr>
-            <a:cxnSpLocks/>
-            <a:stCxn id="11" idx="0"/>
-            <a:endCxn id="143" idx="3"/>
-          </p:cNvCxnSpPr>
-          <p:nvPr/>
-        </p:nvCxnSpPr>
-        <p:spPr>
-          <a:xfrm rot="16200000" flipV="1">
-            <a:off x="8657709" y="1551832"/>
-            <a:ext cx="1068588" cy="991435"/>
-          </a:xfrm>
-          <a:prstGeom prst="curvedConnector2">
-            <a:avLst/>
-          </a:prstGeom>
-          <a:ln w="12700">
-            <a:solidFill>
-              <a:schemeClr val="tx1"/>
-            </a:solidFill>
-            <a:headEnd type="none"/>
-            <a:tailEnd type="arrow"/>
-          </a:ln>
-        </p:spPr>
-        <p:style>
-          <a:lnRef idx="1">
-            <a:schemeClr val="accent1"/>
-          </a:lnRef>
-          <a:fillRef idx="0">
-            <a:schemeClr val="accent1"/>
-          </a:fillRef>
-          <a:effectRef idx="0">
-            <a:schemeClr val="accent1"/>
-          </a:effectRef>
-          <a:fontRef idx="minor">
-            <a:schemeClr val="tx1"/>
-          </a:fontRef>
-        </p:style>
-      </p:cxnSp>
-      <p:sp>
-        <p:nvSpPr>
-          <p:cNvPr id="112" name="TextBox 111">
-            <a:extLst>
-              <a:ext uri="{FF2B5EF4-FFF2-40B4-BE49-F238E27FC236}">
-                <a16:creationId xmlns:a16="http://schemas.microsoft.com/office/drawing/2014/main" id="{9FFA8364-6776-D3D2-5096-EBE29B8BFD78}"/>
-              </a:ext>
-            </a:extLst>
-          </p:cNvPr>
-          <p:cNvSpPr txBox="1"/>
-          <p:nvPr/>
-        </p:nvSpPr>
-        <p:spPr>
-          <a:xfrm>
-            <a:off x="8712076" y="2038246"/>
-            <a:ext cx="687689" cy="338554"/>
-          </a:xfrm>
-          <a:prstGeom prst="rect">
-            <a:avLst/>
-          </a:prstGeom>
-          <a:noFill/>
-        </p:spPr>
-        <p:txBody>
-          <a:bodyPr wrap="square" lIns="0" tIns="0" rIns="0" bIns="0" rtlCol="0">
-            <a:spAutoFit/>
-          </a:bodyPr>
-          <a:lstStyle/>
-          <a:p>
-            <a:pPr algn="r"/>
-            <a:r>
-              <a:rPr lang="en-US" sz="1100" i="1" dirty="0"/>
-              <a:t>Refusal </a:t>
-            </a:r>
-            <a:r>
-              <a:rPr lang="en-US" sz="1100" dirty="0"/>
-              <a:t>|</a:t>
-            </a:r>
-            <a:r>
-              <a:rPr lang="en-US" sz="1100" i="1" dirty="0"/>
-              <a:t> </a:t>
-            </a:r>
-          </a:p>
-          <a:p>
-            <a:pPr algn="r"/>
-            <a:r>
-              <a:rPr lang="en-US" sz="1100" i="1" dirty="0"/>
-              <a:t>Clarification</a:t>
-            </a:r>
-          </a:p>
-        </p:txBody>
-      </p:sp>
-      <p:cxnSp>
-        <p:nvCxnSpPr>
-          <p:cNvPr id="113" name="Connector: Elbow 108">
-            <a:extLst>
-              <a:ext uri="{FF2B5EF4-FFF2-40B4-BE49-F238E27FC236}">
-                <a16:creationId xmlns:a16="http://schemas.microsoft.com/office/drawing/2014/main" id="{AE26BF72-4C1B-E05E-E217-85426BF0C49D}"/>
-              </a:ext>
-            </a:extLst>
-          </p:cNvPr>
-          <p:cNvCxnSpPr>
-            <a:cxnSpLocks/>
-            <a:stCxn id="13" idx="0"/>
-          </p:cNvCxnSpPr>
-          <p:nvPr/>
-        </p:nvCxnSpPr>
-        <p:spPr>
-          <a:xfrm rot="16200000" flipV="1">
-            <a:off x="9340062" y="633957"/>
-            <a:ext cx="1302232" cy="2593541"/>
-          </a:xfrm>
-          <a:prstGeom prst="curvedConnector2">
-            <a:avLst/>
-          </a:prstGeom>
-          <a:ln w="12700">
-            <a:solidFill>
-              <a:schemeClr val="tx1"/>
-            </a:solidFill>
-            <a:headEnd type="none"/>
-            <a:tailEnd type="arrow"/>
-          </a:ln>
-        </p:spPr>
-        <p:style>
-          <a:lnRef idx="1">
-            <a:schemeClr val="accent1"/>
-          </a:lnRef>
-          <a:fillRef idx="0">
-            <a:schemeClr val="accent1"/>
-          </a:fillRef>
-          <a:effectRef idx="0">
-            <a:schemeClr val="accent1"/>
-          </a:effectRef>
-          <a:fontRef idx="minor">
-            <a:schemeClr val="tx1"/>
-          </a:fontRef>
-        </p:style>
-      </p:cxnSp>
-      <p:sp>
-        <p:nvSpPr>
-          <p:cNvPr id="114" name="TextBox 113">
-            <a:extLst>
-              <a:ext uri="{FF2B5EF4-FFF2-40B4-BE49-F238E27FC236}">
-                <a16:creationId xmlns:a16="http://schemas.microsoft.com/office/drawing/2014/main" id="{49CA53C4-D49B-F86E-D5A4-FD5CADAE70DC}"/>
-              </a:ext>
-            </a:extLst>
-          </p:cNvPr>
-          <p:cNvSpPr txBox="1"/>
-          <p:nvPr/>
-        </p:nvSpPr>
-        <p:spPr>
-          <a:xfrm>
-            <a:off x="9219702" y="1118029"/>
-            <a:ext cx="615163" cy="161583"/>
-          </a:xfrm>
-          <a:prstGeom prst="rect">
-            <a:avLst/>
-          </a:prstGeom>
-          <a:noFill/>
-        </p:spPr>
-        <p:txBody>
-          <a:bodyPr wrap="square" lIns="0" tIns="0" rIns="0" bIns="0" rtlCol="0">
-            <a:spAutoFit/>
-          </a:bodyPr>
-          <a:lstStyle/>
-          <a:p>
-            <a:r>
-              <a:rPr lang="en-US" sz="1050" dirty="0">
-                <a:solidFill>
-                  <a:srgbClr val="B17ED8"/>
-                </a:solidFill>
-                <a:latin typeface="Adobe Gothic Std B" panose="020B0800000000000000" pitchFamily="34" charset="-128"/>
-                <a:ea typeface="Adobe Gothic Std B" panose="020B0800000000000000" pitchFamily="34" charset="-128"/>
-              </a:rPr>
-              <a:t>ResultSet</a:t>
-            </a:r>
-          </a:p>
-        </p:txBody>
-      </p:sp>
-      <p:sp>
-        <p:nvSpPr>
-          <p:cNvPr id="117" name="Flowchart: Off-page Connector 116">
-            <a:extLst>
-              <a:ext uri="{FF2B5EF4-FFF2-40B4-BE49-F238E27FC236}">
-                <a16:creationId xmlns:a16="http://schemas.microsoft.com/office/drawing/2014/main" id="{D7C4B127-ED58-CB38-3043-477F8C136243}"/>
-              </a:ext>
-            </a:extLst>
-          </p:cNvPr>
-          <p:cNvSpPr/>
-          <p:nvPr/>
-        </p:nvSpPr>
-        <p:spPr>
           <a:xfrm rot="16200000">
-            <a:off x="1998780" y="1993941"/>
+            <a:off x="1998780" y="2541246"/>
             <a:ext cx="186884" cy="240280"/>
           </a:xfrm>
           <a:prstGeom prst="flowChartOffpageConnector">
@@ -8769,7 +7893,7 @@
         </p:nvSpPr>
         <p:spPr>
           <a:xfrm rot="16200000">
-            <a:off x="4367380" y="1942872"/>
+            <a:off x="4062433" y="2490177"/>
             <a:ext cx="186884" cy="240280"/>
           </a:xfrm>
           <a:prstGeom prst="flowChartOffpageConnector">
@@ -8818,10 +7942,10 @@
       </p:sp>
       <p:sp>
         <p:nvSpPr>
-          <p:cNvPr id="119" name="Flowchart: Off-page Connector 118">
-            <a:extLst>
-              <a:ext uri="{FF2B5EF4-FFF2-40B4-BE49-F238E27FC236}">
-                <a16:creationId xmlns:a16="http://schemas.microsoft.com/office/drawing/2014/main" id="{94CB7192-7274-F3D6-30B4-7233CC08C58F}"/>
+          <p:cNvPr id="123" name="Flowchart: Off-page Connector 122">
+            <a:extLst>
+              <a:ext uri="{FF2B5EF4-FFF2-40B4-BE49-F238E27FC236}">
+                <a16:creationId xmlns:a16="http://schemas.microsoft.com/office/drawing/2014/main" id="{9BEDBC72-BA05-EBD9-A868-CF9DCC0AD9A0}"/>
               </a:ext>
             </a:extLst>
           </p:cNvPr>
@@ -8830,130 +7954,8 @@
         </p:nvSpPr>
         <p:spPr>
           <a:xfrm rot="16200000">
-            <a:off x="7516138" y="2608945"/>
-            <a:ext cx="186884" cy="240280"/>
-          </a:xfrm>
-          <a:prstGeom prst="flowChartOffpageConnector">
-            <a:avLst/>
-          </a:prstGeom>
-          <a:solidFill>
-            <a:schemeClr val="accent4">
-              <a:lumMod val="60000"/>
-              <a:lumOff val="40000"/>
-            </a:schemeClr>
-          </a:solidFill>
-        </p:spPr>
-        <p:style>
-          <a:lnRef idx="2">
-            <a:schemeClr val="accent1">
-              <a:shade val="15000"/>
-            </a:schemeClr>
-          </a:lnRef>
-          <a:fillRef idx="1">
-            <a:schemeClr val="accent1"/>
-          </a:fillRef>
-          <a:effectRef idx="0">
-            <a:schemeClr val="accent1"/>
-          </a:effectRef>
-          <a:fontRef idx="minor">
-            <a:schemeClr val="lt1"/>
-          </a:fontRef>
-        </p:style>
-        <p:txBody>
-          <a:bodyPr vert="vert" rtlCol="0" anchor="ctr"/>
-          <a:lstStyle/>
-          <a:p>
-            <a:pPr algn="ctr"/>
-            <a:r>
-              <a:rPr lang="en-US" sz="1400" b="1" dirty="0">
-                <a:solidFill>
-                  <a:schemeClr val="accent4">
-                    <a:lumMod val="75000"/>
-                  </a:schemeClr>
-                </a:solidFill>
-              </a:rPr>
-              <a:t>3</a:t>
-            </a:r>
-          </a:p>
-        </p:txBody>
-      </p:sp>
-      <p:sp>
-        <p:nvSpPr>
-          <p:cNvPr id="120" name="Flowchart: Off-page Connector 119">
-            <a:extLst>
-              <a:ext uri="{FF2B5EF4-FFF2-40B4-BE49-F238E27FC236}">
-                <a16:creationId xmlns:a16="http://schemas.microsoft.com/office/drawing/2014/main" id="{01DB02D4-794E-6EA2-5C1C-E49399D79D95}"/>
-              </a:ext>
-            </a:extLst>
-          </p:cNvPr>
-          <p:cNvSpPr/>
-          <p:nvPr/>
-        </p:nvSpPr>
-        <p:spPr>
-          <a:xfrm rot="16200000">
-            <a:off x="8907723" y="2608944"/>
-            <a:ext cx="186884" cy="240280"/>
-          </a:xfrm>
-          <a:prstGeom prst="flowChartOffpageConnector">
-            <a:avLst/>
-          </a:prstGeom>
-          <a:solidFill>
-            <a:schemeClr val="accent4">
-              <a:lumMod val="60000"/>
-              <a:lumOff val="40000"/>
-            </a:schemeClr>
-          </a:solidFill>
-        </p:spPr>
-        <p:style>
-          <a:lnRef idx="2">
-            <a:schemeClr val="accent1">
-              <a:shade val="15000"/>
-            </a:schemeClr>
-          </a:lnRef>
-          <a:fillRef idx="1">
-            <a:schemeClr val="accent1"/>
-          </a:fillRef>
-          <a:effectRef idx="0">
-            <a:schemeClr val="accent1"/>
-          </a:effectRef>
-          <a:fontRef idx="minor">
-            <a:schemeClr val="lt1"/>
-          </a:fontRef>
-        </p:style>
-        <p:txBody>
-          <a:bodyPr vert="vert" rtlCol="0" anchor="ctr"/>
-          <a:lstStyle/>
-          <a:p>
-            <a:pPr algn="ctr"/>
-            <a:r>
-              <a:rPr lang="en-US" sz="1400" b="1" dirty="0">
-                <a:solidFill>
-                  <a:schemeClr val="accent4">
-                    <a:lumMod val="75000"/>
-                  </a:schemeClr>
-                </a:solidFill>
-              </a:rPr>
-              <a:t>4</a:t>
-            </a:r>
-          </a:p>
-        </p:txBody>
-      </p:sp>
-      <p:sp>
-        <p:nvSpPr>
-          <p:cNvPr id="121" name="Flowchart: Off-page Connector 120">
-            <a:extLst>
-              <a:ext uri="{FF2B5EF4-FFF2-40B4-BE49-F238E27FC236}">
-                <a16:creationId xmlns:a16="http://schemas.microsoft.com/office/drawing/2014/main" id="{4E3134F4-88B8-F4FE-19CF-EE627B72415C}"/>
-              </a:ext>
-            </a:extLst>
-          </p:cNvPr>
-          <p:cNvSpPr/>
-          <p:nvPr/>
-        </p:nvSpPr>
-        <p:spPr>
-          <a:xfrm rot="16200000">
-            <a:off x="10601774" y="2608944"/>
-            <a:ext cx="186884" cy="240280"/>
+            <a:off x="1983719" y="1415231"/>
+            <a:ext cx="186884" cy="210161"/>
           </a:xfrm>
           <a:prstGeom prst="flowChartOffpageConnector">
             <a:avLst/>
@@ -9001,128 +8003,6 @@
       </p:sp>
       <p:sp>
         <p:nvSpPr>
-          <p:cNvPr id="122" name="Flowchart: Off-page Connector 121">
-            <a:extLst>
-              <a:ext uri="{FF2B5EF4-FFF2-40B4-BE49-F238E27FC236}">
-                <a16:creationId xmlns:a16="http://schemas.microsoft.com/office/drawing/2014/main" id="{473F88A9-2CB3-E503-D874-718B48B13C8E}"/>
-              </a:ext>
-            </a:extLst>
-          </p:cNvPr>
-          <p:cNvSpPr/>
-          <p:nvPr/>
-        </p:nvSpPr>
-        <p:spPr>
-          <a:xfrm rot="16200000">
-            <a:off x="8395553" y="1033332"/>
-            <a:ext cx="186884" cy="210161"/>
-          </a:xfrm>
-          <a:prstGeom prst="flowChartOffpageConnector">
-            <a:avLst/>
-          </a:prstGeom>
-          <a:solidFill>
-            <a:schemeClr val="accent4">
-              <a:lumMod val="60000"/>
-              <a:lumOff val="40000"/>
-            </a:schemeClr>
-          </a:solidFill>
-        </p:spPr>
-        <p:style>
-          <a:lnRef idx="2">
-            <a:schemeClr val="accent1">
-              <a:shade val="15000"/>
-            </a:schemeClr>
-          </a:lnRef>
-          <a:fillRef idx="1">
-            <a:schemeClr val="accent1"/>
-          </a:fillRef>
-          <a:effectRef idx="0">
-            <a:schemeClr val="accent1"/>
-          </a:effectRef>
-          <a:fontRef idx="minor">
-            <a:schemeClr val="lt1"/>
-          </a:fontRef>
-        </p:style>
-        <p:txBody>
-          <a:bodyPr vert="vert" rtlCol="0" anchor="ctr"/>
-          <a:lstStyle/>
-          <a:p>
-            <a:pPr algn="ctr"/>
-            <a:r>
-              <a:rPr lang="en-US" sz="1400" b="1" dirty="0">
-                <a:solidFill>
-                  <a:schemeClr val="accent4">
-                    <a:lumMod val="75000"/>
-                  </a:schemeClr>
-                </a:solidFill>
-              </a:rPr>
-              <a:t>6</a:t>
-            </a:r>
-          </a:p>
-        </p:txBody>
-      </p:sp>
-      <p:sp>
-        <p:nvSpPr>
-          <p:cNvPr id="123" name="Flowchart: Off-page Connector 122">
-            <a:extLst>
-              <a:ext uri="{FF2B5EF4-FFF2-40B4-BE49-F238E27FC236}">
-                <a16:creationId xmlns:a16="http://schemas.microsoft.com/office/drawing/2014/main" id="{9BEDBC72-BA05-EBD9-A868-CF9DCC0AD9A0}"/>
-              </a:ext>
-            </a:extLst>
-          </p:cNvPr>
-          <p:cNvSpPr/>
-          <p:nvPr/>
-        </p:nvSpPr>
-        <p:spPr>
-          <a:xfrm rot="16200000">
-            <a:off x="1983719" y="867926"/>
-            <a:ext cx="186884" cy="210161"/>
-          </a:xfrm>
-          <a:prstGeom prst="flowChartOffpageConnector">
-            <a:avLst/>
-          </a:prstGeom>
-          <a:solidFill>
-            <a:schemeClr val="accent4">
-              <a:lumMod val="60000"/>
-              <a:lumOff val="40000"/>
-            </a:schemeClr>
-          </a:solidFill>
-        </p:spPr>
-        <p:style>
-          <a:lnRef idx="2">
-            <a:schemeClr val="accent1">
-              <a:shade val="15000"/>
-            </a:schemeClr>
-          </a:lnRef>
-          <a:fillRef idx="1">
-            <a:schemeClr val="accent1"/>
-          </a:fillRef>
-          <a:effectRef idx="0">
-            <a:schemeClr val="accent1"/>
-          </a:effectRef>
-          <a:fontRef idx="minor">
-            <a:schemeClr val="lt1"/>
-          </a:fontRef>
-        </p:style>
-        <p:txBody>
-          <a:bodyPr vert="vert" rtlCol="0" anchor="ctr"/>
-          <a:lstStyle/>
-          <a:p>
-            <a:pPr algn="ctr"/>
-            <a:r>
-              <a:rPr lang="en-US" sz="1400" b="1" dirty="0">
-                <a:solidFill>
-                  <a:schemeClr val="accent4">
-                    <a:lumMod val="75000"/>
-                  </a:schemeClr>
-                </a:solidFill>
-              </a:rPr>
-              <a:t>8</a:t>
-            </a:r>
-          </a:p>
-        </p:txBody>
-      </p:sp>
-      <p:sp>
-        <p:nvSpPr>
           <p:cNvPr id="125" name="Title 1024">
             <a:extLst>
               <a:ext uri="{FF2B5EF4-FFF2-40B4-BE49-F238E27FC236}">
@@ -9137,8 +8017,8 @@
         </p:nvSpPr>
         <p:spPr>
           <a:xfrm>
-            <a:off x="115735" y="64032"/>
-            <a:ext cx="4615498" cy="476956"/>
+            <a:off x="115734" y="64032"/>
+            <a:ext cx="5103687" cy="476956"/>
           </a:xfrm>
           <a:prstGeom prst="rect">
             <a:avLst/>
@@ -9171,7 +8051,7 @@
             <a:pPr algn="l"/>
             <a:r>
               <a:rPr lang="en-US" sz="4000" dirty="0"/>
-              <a:t>Query Phase</a:t>
+              <a:t>Query Phase (Web App)</a:t>
             </a:r>
           </a:p>
         </p:txBody>
@@ -9190,8 +8070,8 @@
         </p:nvSpPr>
         <p:spPr>
           <a:xfrm>
-            <a:off x="2236659" y="829460"/>
-            <a:ext cx="1022504" cy="1891091"/>
+            <a:off x="2236659" y="1376765"/>
+            <a:ext cx="1022504" cy="2096746"/>
           </a:xfrm>
           <a:prstGeom prst="rect">
             <a:avLst/>
@@ -9225,16 +8105,9 @@
             <a:pPr algn="ctr"/>
             <a:r>
               <a:rPr lang="en-US" sz="1600" dirty="0"/>
-              <a:t>Web App</a:t>
+              <a:t>Web Client</a:t>
             </a:r>
             <a:endParaRPr lang="en-US" sz="1400" dirty="0"/>
-          </a:p>
-          <a:p>
-            <a:pPr algn="ctr"/>
-            <a:r>
-              <a:rPr lang="en-US" sz="800" dirty="0"/>
-              <a:t>(Front End)</a:t>
-            </a:r>
           </a:p>
           <a:p>
             <a:pPr algn="ctr"/>
@@ -9249,17 +8122,13 @@
           </a:p>
           <a:p>
             <a:pPr algn="ctr"/>
-            <a:endParaRPr lang="en-US" sz="800" dirty="0"/>
-          </a:p>
-          <a:p>
-            <a:pPr algn="ctr"/>
             <a:r>
               <a:rPr lang="en-US" sz="800" dirty="0"/>
               <a:t>📚 </a:t>
             </a:r>
             <a:r>
               <a:rPr lang="en-US" sz="800" b="1" u="sng" dirty="0"/>
-              <a:t>Angular</a:t>
+              <a:t>Angular 22</a:t>
             </a:r>
             <a:endParaRPr lang="en-US" sz="800" dirty="0"/>
           </a:p>
@@ -9273,6 +8142,20 @@
               <a:rPr lang="en-US" sz="800" b="1" u="sng" dirty="0"/>
               <a:t>ngrx/signals</a:t>
             </a:r>
+          </a:p>
+          <a:p>
+            <a:pPr algn="ctr"/>
+            <a:r>
+              <a:rPr lang="en-US" sz="800" dirty="0"/>
+              <a:t>📚 </a:t>
+            </a:r>
+            <a:r>
+              <a:rPr lang="en-US" sz="800" b="1" u="sng" dirty="0"/>
+              <a:t>ng-apexcharts </a:t>
+            </a:r>
+            <a:br>
+              <a:rPr lang="en-US" sz="800" b="1" u="sng" dirty="0"/>
+            </a:br>
             <a:endParaRPr lang="en-US" sz="800" dirty="0"/>
           </a:p>
           <a:p>
@@ -9283,7 +8166,7 @@
             <a:pPr algn="ctr"/>
             <a:r>
               <a:rPr lang="en-US" sz="800" dirty="0"/>
-              <a:t>Interacts with backend web services </a:t>
+              <a:t>Interacts user with the web services </a:t>
             </a:r>
           </a:p>
         </p:txBody>
@@ -9305,7 +8188,7 @@
         </p:nvCxnSpPr>
         <p:spPr>
           <a:xfrm flipH="1">
-            <a:off x="1678180" y="1146642"/>
+            <a:off x="1678180" y="1693947"/>
             <a:ext cx="552826" cy="0"/>
           </a:xfrm>
           <a:prstGeom prst="straightConnector1">
@@ -9348,7 +8231,7 @@
         </p:nvSpPr>
         <p:spPr>
           <a:xfrm rot="16200000">
-            <a:off x="4343854" y="916049"/>
+            <a:off x="4045019" y="1369910"/>
             <a:ext cx="186884" cy="210161"/>
           </a:xfrm>
           <a:prstGeom prst="flowChartOffpageConnector">
@@ -9379,6 +8262,2569 @@
         </p:style>
         <p:txBody>
           <a:bodyPr vert="vert" rtlCol="0" anchor="ctr"/>
+          <a:lstStyle/>
+          <a:p>
+            <a:pPr algn="ctr"/>
+            <a:r>
+              <a:rPr lang="en-US" sz="1400" b="1" dirty="0">
+                <a:solidFill>
+                  <a:schemeClr val="accent4">
+                    <a:lumMod val="75000"/>
+                  </a:schemeClr>
+                </a:solidFill>
+              </a:rPr>
+              <a:t>4</a:t>
+            </a:r>
+          </a:p>
+        </p:txBody>
+      </p:sp>
+      <p:sp>
+        <p:nvSpPr>
+          <p:cNvPr id="143" name="Rectangle 142">
+            <a:extLst>
+              <a:ext uri="{FF2B5EF4-FFF2-40B4-BE49-F238E27FC236}">
+                <a16:creationId xmlns:a16="http://schemas.microsoft.com/office/drawing/2014/main" id="{38DEB2BA-D85C-50E6-40BC-A6CD7A7ADEEE}"/>
+              </a:ext>
+            </a:extLst>
+          </p:cNvPr>
+          <p:cNvSpPr/>
+          <p:nvPr/>
+        </p:nvSpPr>
+        <p:spPr>
+          <a:xfrm>
+            <a:off x="6393311" y="1376765"/>
+            <a:ext cx="1110885" cy="2096743"/>
+          </a:xfrm>
+          <a:prstGeom prst="rect">
+            <a:avLst/>
+          </a:prstGeom>
+          <a:solidFill>
+            <a:srgbClr val="7030A0"/>
+          </a:solidFill>
+        </p:spPr>
+        <p:style>
+          <a:lnRef idx="2">
+            <a:schemeClr val="accent1">
+              <a:shade val="15000"/>
+            </a:schemeClr>
+          </a:lnRef>
+          <a:fillRef idx="1">
+            <a:schemeClr val="accent1"/>
+          </a:fillRef>
+          <a:effectRef idx="0">
+            <a:schemeClr val="accent1"/>
+          </a:effectRef>
+          <a:fontRef idx="minor">
+            <a:schemeClr val="lt1"/>
+          </a:fontRef>
+        </p:style>
+        <p:txBody>
+          <a:bodyPr lIns="0" tIns="0" rIns="0" bIns="0" rtlCol="0" anchor="ctr"/>
+          <a:lstStyle/>
+          <a:p>
+            <a:pPr algn="ctr"/>
+            <a:r>
+              <a:rPr lang="en-US" sz="1600" dirty="0"/>
+              <a:t>Query Pipeline</a:t>
+            </a:r>
+            <a:endParaRPr lang="en-US" sz="1400" dirty="0"/>
+          </a:p>
+          <a:p>
+            <a:pPr algn="ctr"/>
+            <a:endParaRPr lang="en-US" sz="800" dirty="0"/>
+          </a:p>
+          <a:p>
+            <a:pPr algn="ctr"/>
+            <a:r>
+              <a:rPr lang="en-US" sz="800" dirty="0"/>
+              <a:t>Takes a query string and produces an answer meant to be returned to the user</a:t>
+            </a:r>
+          </a:p>
+          <a:p>
+            <a:pPr algn="ctr"/>
+            <a:endParaRPr lang="en-US" sz="800" dirty="0"/>
+          </a:p>
+          <a:p>
+            <a:pPr algn="ctr"/>
+            <a:endParaRPr lang="en-US" sz="800" dirty="0"/>
+          </a:p>
+          <a:p>
+            <a:pPr algn="ctr"/>
+            <a:endParaRPr lang="en-US" sz="800" dirty="0"/>
+          </a:p>
+          <a:p>
+            <a:pPr algn="ctr"/>
+            <a:endParaRPr lang="en-US" sz="800" dirty="0"/>
+          </a:p>
+        </p:txBody>
+      </p:sp>
+      <p:sp>
+        <p:nvSpPr>
+          <p:cNvPr id="154" name="Flowchart: Off-page Connector 153">
+            <a:extLst>
+              <a:ext uri="{FF2B5EF4-FFF2-40B4-BE49-F238E27FC236}">
+                <a16:creationId xmlns:a16="http://schemas.microsoft.com/office/drawing/2014/main" id="{A3D4D619-1AF9-A9AD-A963-8280C6167FD0}"/>
+              </a:ext>
+            </a:extLst>
+          </p:cNvPr>
+          <p:cNvSpPr/>
+          <p:nvPr/>
+        </p:nvSpPr>
+        <p:spPr>
+          <a:xfrm rot="16200000">
+            <a:off x="6472356" y="1369911"/>
+            <a:ext cx="186884" cy="210161"/>
+          </a:xfrm>
+          <a:prstGeom prst="flowChartOffpageConnector">
+            <a:avLst/>
+          </a:prstGeom>
+          <a:solidFill>
+            <a:schemeClr val="accent4">
+              <a:lumMod val="60000"/>
+              <a:lumOff val="40000"/>
+            </a:schemeClr>
+          </a:solidFill>
+        </p:spPr>
+        <p:style>
+          <a:lnRef idx="2">
+            <a:schemeClr val="accent1">
+              <a:shade val="15000"/>
+            </a:schemeClr>
+          </a:lnRef>
+          <a:fillRef idx="1">
+            <a:schemeClr val="accent1"/>
+          </a:fillRef>
+          <a:effectRef idx="0">
+            <a:schemeClr val="accent1"/>
+          </a:effectRef>
+          <a:fontRef idx="minor">
+            <a:schemeClr val="lt1"/>
+          </a:fontRef>
+        </p:style>
+        <p:txBody>
+          <a:bodyPr vert="vert" rtlCol="0" anchor="ctr"/>
+          <a:lstStyle/>
+          <a:p>
+            <a:pPr algn="ctr"/>
+            <a:r>
+              <a:rPr lang="en-US" sz="1400" b="1" dirty="0">
+                <a:solidFill>
+                  <a:schemeClr val="accent4">
+                    <a:lumMod val="75000"/>
+                  </a:schemeClr>
+                </a:solidFill>
+              </a:rPr>
+              <a:t>3</a:t>
+            </a:r>
+          </a:p>
+        </p:txBody>
+      </p:sp>
+      <p:sp>
+        <p:nvSpPr>
+          <p:cNvPr id="165" name="TextBox 164">
+            <a:extLst>
+              <a:ext uri="{FF2B5EF4-FFF2-40B4-BE49-F238E27FC236}">
+                <a16:creationId xmlns:a16="http://schemas.microsoft.com/office/drawing/2014/main" id="{505832D6-FBC7-265D-705F-64A8EB21D9EC}"/>
+              </a:ext>
+            </a:extLst>
+          </p:cNvPr>
+          <p:cNvSpPr txBox="1"/>
+          <p:nvPr/>
+        </p:nvSpPr>
+        <p:spPr>
+          <a:xfrm>
+            <a:off x="5644221" y="1724493"/>
+            <a:ext cx="816496" cy="161583"/>
+          </a:xfrm>
+          <a:prstGeom prst="rect">
+            <a:avLst/>
+          </a:prstGeom>
+          <a:noFill/>
+        </p:spPr>
+        <p:txBody>
+          <a:bodyPr wrap="square" lIns="0" tIns="0" rIns="0" bIns="0" rtlCol="0">
+            <a:spAutoFit/>
+          </a:bodyPr>
+          <a:lstStyle/>
+          <a:p>
+            <a:r>
+              <a:rPr lang="en-US" sz="1050" dirty="0">
+                <a:solidFill>
+                  <a:srgbClr val="B17ED8"/>
+                </a:solidFill>
+                <a:latin typeface="Adobe Gothic Std B" panose="020B0800000000000000" pitchFamily="34" charset="-128"/>
+                <a:ea typeface="Adobe Gothic Std B" panose="020B0800000000000000" pitchFamily="34" charset="-128"/>
+              </a:rPr>
+              <a:t>Outcome</a:t>
+            </a:r>
+          </a:p>
+        </p:txBody>
+      </p:sp>
+      <p:sp>
+        <p:nvSpPr>
+          <p:cNvPr id="183" name="Rectangle 182">
+            <a:extLst>
+              <a:ext uri="{FF2B5EF4-FFF2-40B4-BE49-F238E27FC236}">
+                <a16:creationId xmlns:a16="http://schemas.microsoft.com/office/drawing/2014/main" id="{D43E0C22-7646-FF2D-BCA6-8C88A2D3837F}"/>
+              </a:ext>
+            </a:extLst>
+          </p:cNvPr>
+          <p:cNvSpPr/>
+          <p:nvPr/>
+        </p:nvSpPr>
+        <p:spPr>
+          <a:xfrm>
+            <a:off x="4392218" y="4070261"/>
+            <a:ext cx="998858" cy="1410974"/>
+          </a:xfrm>
+          <a:prstGeom prst="rect">
+            <a:avLst/>
+          </a:prstGeom>
+          <a:solidFill>
+            <a:srgbClr val="F4B183"/>
+          </a:solidFill>
+        </p:spPr>
+        <p:style>
+          <a:lnRef idx="2">
+            <a:schemeClr val="accent1">
+              <a:shade val="15000"/>
+            </a:schemeClr>
+          </a:lnRef>
+          <a:fillRef idx="1">
+            <a:schemeClr val="accent1"/>
+          </a:fillRef>
+          <a:effectRef idx="0">
+            <a:schemeClr val="accent1"/>
+          </a:effectRef>
+          <a:fontRef idx="minor">
+            <a:schemeClr val="lt1"/>
+          </a:fontRef>
+        </p:style>
+        <p:txBody>
+          <a:bodyPr lIns="45720" tIns="45720" rIns="0" bIns="0" rtlCol="0" anchor="t"/>
+          <a:lstStyle/>
+          <a:p>
+            <a:pPr algn="ctr"/>
+            <a:r>
+              <a:rPr lang="en-US" sz="1100" dirty="0"/>
+              <a:t>🛢️</a:t>
+            </a:r>
+            <a:r>
+              <a:rPr lang="en-US" sz="900" b="1" dirty="0"/>
+              <a:t> </a:t>
+            </a:r>
+            <a:r>
+              <a:rPr lang="en-US" sz="1200" b="1" dirty="0"/>
+              <a:t>DB</a:t>
+            </a:r>
+          </a:p>
+          <a:p>
+            <a:pPr marL="171450" indent="-91440">
+              <a:buFont typeface="Arial" panose="020B0604020202020204" pitchFamily="34" charset="0"/>
+              <a:buChar char="•"/>
+            </a:pPr>
+            <a:r>
+              <a:rPr lang="en-US" sz="900" dirty="0"/>
+              <a:t>user</a:t>
+            </a:r>
+          </a:p>
+          <a:p>
+            <a:pPr marL="171450" indent="-91440">
+              <a:buFont typeface="Arial" panose="020B0604020202020204" pitchFamily="34" charset="0"/>
+              <a:buChar char="•"/>
+            </a:pPr>
+            <a:r>
+              <a:rPr lang="en-US" sz="900" dirty="0"/>
+              <a:t>oauth_account</a:t>
+            </a:r>
+          </a:p>
+          <a:p>
+            <a:pPr marL="171450" indent="-91440">
+              <a:buFont typeface="Arial" panose="020B0604020202020204" pitchFamily="34" charset="0"/>
+              <a:buChar char="•"/>
+            </a:pPr>
+            <a:r>
+              <a:rPr lang="en-US" sz="900" dirty="0"/>
+              <a:t>access_token</a:t>
+            </a:r>
+          </a:p>
+          <a:p>
+            <a:pPr marL="171450" indent="-91440">
+              <a:buFont typeface="Arial" panose="020B0604020202020204" pitchFamily="34" charset="0"/>
+              <a:buChar char="•"/>
+            </a:pPr>
+            <a:r>
+              <a:rPr lang="en-US" sz="900" dirty="0"/>
+              <a:t>invite</a:t>
+            </a:r>
+          </a:p>
+          <a:p>
+            <a:pPr marL="171450" indent="-91440">
+              <a:buFont typeface="Arial" panose="020B0604020202020204" pitchFamily="34" charset="0"/>
+              <a:buChar char="•"/>
+            </a:pPr>
+            <a:r>
+              <a:rPr lang="en-US" sz="900" dirty="0"/>
+              <a:t>conversation</a:t>
+            </a:r>
+          </a:p>
+          <a:p>
+            <a:pPr marL="171450" indent="-91440">
+              <a:buFont typeface="Arial" panose="020B0604020202020204" pitchFamily="34" charset="0"/>
+              <a:buChar char="•"/>
+            </a:pPr>
+            <a:r>
+              <a:rPr lang="en-US" sz="900" dirty="0"/>
+              <a:t>job</a:t>
+            </a:r>
+          </a:p>
+          <a:p>
+            <a:pPr marL="171450" indent="-91440">
+              <a:buFont typeface="Arial" panose="020B0604020202020204" pitchFamily="34" charset="0"/>
+              <a:buChar char="•"/>
+            </a:pPr>
+            <a:r>
+              <a:rPr lang="en-US" sz="900" dirty="0"/>
+              <a:t>job_trace</a:t>
+            </a:r>
+          </a:p>
+        </p:txBody>
+      </p:sp>
+      <p:sp>
+        <p:nvSpPr>
+          <p:cNvPr id="30" name="TextBox 29">
+            <a:extLst>
+              <a:ext uri="{FF2B5EF4-FFF2-40B4-BE49-F238E27FC236}">
+                <a16:creationId xmlns:a16="http://schemas.microsoft.com/office/drawing/2014/main" id="{AFB64D13-631E-C589-C4ED-A89D01281540}"/>
+              </a:ext>
+            </a:extLst>
+          </p:cNvPr>
+          <p:cNvSpPr txBox="1"/>
+          <p:nvPr/>
+        </p:nvSpPr>
+        <p:spPr>
+          <a:xfrm>
+            <a:off x="5565437" y="2634336"/>
+            <a:ext cx="737772" cy="169277"/>
+          </a:xfrm>
+          <a:prstGeom prst="rect">
+            <a:avLst/>
+          </a:prstGeom>
+          <a:noFill/>
+        </p:spPr>
+        <p:txBody>
+          <a:bodyPr wrap="square" lIns="0" tIns="0" rIns="0" bIns="0" rtlCol="0">
+            <a:spAutoFit/>
+          </a:bodyPr>
+          <a:lstStyle>
+            <a:defPPr>
+              <a:defRPr lang="en-US"/>
+            </a:defPPr>
+            <a:lvl1pPr algn="r">
+              <a:defRPr sz="1100" i="1"/>
+            </a:lvl1pPr>
+          </a:lstStyle>
+          <a:p>
+            <a:pPr algn="ctr"/>
+            <a:r>
+              <a:rPr lang="en-US" dirty="0"/>
+              <a:t>query string</a:t>
+            </a:r>
+          </a:p>
+        </p:txBody>
+      </p:sp>
+      <p:sp>
+        <p:nvSpPr>
+          <p:cNvPr id="72" name="Rectangle 71">
+            <a:extLst>
+              <a:ext uri="{FF2B5EF4-FFF2-40B4-BE49-F238E27FC236}">
+                <a16:creationId xmlns:a16="http://schemas.microsoft.com/office/drawing/2014/main" id="{5A941F4F-B015-3346-7BDB-4BC9B9B87C6A}"/>
+              </a:ext>
+            </a:extLst>
+          </p:cNvPr>
+          <p:cNvSpPr/>
+          <p:nvPr/>
+        </p:nvSpPr>
+        <p:spPr>
+          <a:xfrm>
+            <a:off x="4285400" y="1376765"/>
+            <a:ext cx="1194727" cy="2100352"/>
+          </a:xfrm>
+          <a:prstGeom prst="rect">
+            <a:avLst/>
+          </a:prstGeom>
+          <a:solidFill>
+            <a:srgbClr val="7030A0"/>
+          </a:solidFill>
+        </p:spPr>
+        <p:style>
+          <a:lnRef idx="2">
+            <a:schemeClr val="accent1">
+              <a:shade val="15000"/>
+            </a:schemeClr>
+          </a:lnRef>
+          <a:fillRef idx="1">
+            <a:schemeClr val="accent1"/>
+          </a:fillRef>
+          <a:effectRef idx="0">
+            <a:schemeClr val="accent1"/>
+          </a:effectRef>
+          <a:fontRef idx="minor">
+            <a:schemeClr val="lt1"/>
+          </a:fontRef>
+        </p:style>
+        <p:txBody>
+          <a:bodyPr lIns="0" tIns="0" rIns="0" bIns="0" rtlCol="0" anchor="ctr"/>
+          <a:lstStyle/>
+          <a:p>
+            <a:pPr algn="ctr"/>
+            <a:r>
+              <a:rPr lang="en-US" sz="1600" dirty="0"/>
+              <a:t>Web Server</a:t>
+            </a:r>
+            <a:endParaRPr lang="en-US" sz="1400" dirty="0"/>
+          </a:p>
+          <a:p>
+            <a:pPr algn="ctr"/>
+            <a:r>
+              <a:rPr lang="en-US" sz="1100" u="sng" dirty="0"/>
+              <a:t>app/api/</a:t>
+            </a:r>
+          </a:p>
+          <a:p>
+            <a:pPr algn="ctr"/>
+            <a:endParaRPr lang="en-US" sz="1100" u="sng" dirty="0"/>
+          </a:p>
+          <a:p>
+            <a:pPr algn="ctr"/>
+            <a:r>
+              <a:rPr lang="en-US" sz="800" dirty="0"/>
+              <a:t>📚</a:t>
+            </a:r>
+            <a:r>
+              <a:rPr lang="en-US" sz="1100" dirty="0"/>
+              <a:t> </a:t>
+            </a:r>
+            <a:r>
+              <a:rPr lang="en-US" sz="800" b="1" u="sng" dirty="0"/>
+              <a:t>uvicorn</a:t>
+            </a:r>
+          </a:p>
+          <a:p>
+            <a:pPr algn="ctr"/>
+            <a:r>
+              <a:rPr lang="en-US" sz="800" dirty="0"/>
+              <a:t>📚 </a:t>
+            </a:r>
+            <a:r>
+              <a:rPr lang="en-US" sz="800" b="1" u="sng" dirty="0"/>
+              <a:t>FastAPI </a:t>
+            </a:r>
+          </a:p>
+          <a:p>
+            <a:pPr algn="ctr"/>
+            <a:r>
+              <a:rPr lang="en-US" sz="800" dirty="0"/>
+              <a:t>📚 </a:t>
+            </a:r>
+            <a:r>
+              <a:rPr lang="en-US" sz="800" b="1" u="sng" dirty="0"/>
+              <a:t>FastAPI Users</a:t>
+            </a:r>
+          </a:p>
+          <a:p>
+            <a:pPr algn="ctr"/>
+            <a:r>
+              <a:rPr lang="en-US" sz="800" dirty="0"/>
+              <a:t>📚</a:t>
+            </a:r>
+            <a:r>
+              <a:rPr lang="en-US" sz="800" b="1" u="sng" dirty="0"/>
+              <a:t>openapi-typescript</a:t>
+            </a:r>
+          </a:p>
+          <a:p>
+            <a:pPr algn="ctr"/>
+            <a:r>
+              <a:rPr lang="en-US" sz="800" b="1" dirty="0"/>
+              <a:t> </a:t>
+            </a:r>
+            <a:r>
+              <a:rPr lang="en-US" sz="800" dirty="0"/>
+              <a:t>📚 </a:t>
+            </a:r>
+            <a:r>
+              <a:rPr lang="en-US" sz="800" b="1" u="sng" dirty="0"/>
+              <a:t>httpx-oauth</a:t>
+            </a:r>
+          </a:p>
+          <a:p>
+            <a:pPr algn="ctr"/>
+            <a:endParaRPr lang="en-US" sz="800" dirty="0"/>
+          </a:p>
+          <a:p>
+            <a:pPr algn="ctr"/>
+            <a:endParaRPr lang="en-US" sz="800" dirty="0"/>
+          </a:p>
+          <a:p>
+            <a:pPr algn="ctr"/>
+            <a:r>
+              <a:rPr lang="en-US" sz="800" dirty="0"/>
+              <a:t>Exposes REST API services</a:t>
+            </a:r>
+          </a:p>
+        </p:txBody>
+      </p:sp>
+      <p:cxnSp>
+        <p:nvCxnSpPr>
+          <p:cNvPr id="146" name="Straight Arrow Connector 145">
+            <a:extLst>
+              <a:ext uri="{FF2B5EF4-FFF2-40B4-BE49-F238E27FC236}">
+                <a16:creationId xmlns:a16="http://schemas.microsoft.com/office/drawing/2014/main" id="{7B9890BF-AA75-9B52-CA47-20B28D8B417A}"/>
+              </a:ext>
+            </a:extLst>
+          </p:cNvPr>
+          <p:cNvCxnSpPr>
+            <a:cxnSpLocks/>
+          </p:cNvCxnSpPr>
+          <p:nvPr/>
+        </p:nvCxnSpPr>
+        <p:spPr>
+          <a:xfrm>
+            <a:off x="5476394" y="1906884"/>
+            <a:ext cx="916917" cy="0"/>
+          </a:xfrm>
+          <a:prstGeom prst="straightConnector1">
+            <a:avLst/>
+          </a:prstGeom>
+          <a:ln w="12700">
+            <a:solidFill>
+              <a:schemeClr val="tx1"/>
+            </a:solidFill>
+            <a:headEnd type="arrow"/>
+            <a:tailEnd type="none"/>
+          </a:ln>
+        </p:spPr>
+        <p:style>
+          <a:lnRef idx="1">
+            <a:schemeClr val="accent1"/>
+          </a:lnRef>
+          <a:fillRef idx="0">
+            <a:schemeClr val="accent1"/>
+          </a:fillRef>
+          <a:effectRef idx="0">
+            <a:schemeClr val="accent1"/>
+          </a:effectRef>
+          <a:fontRef idx="minor">
+            <a:schemeClr val="tx1"/>
+          </a:fontRef>
+        </p:style>
+      </p:cxnSp>
+      <p:cxnSp>
+        <p:nvCxnSpPr>
+          <p:cNvPr id="185" name="Straight Arrow Connector 184">
+            <a:extLst>
+              <a:ext uri="{FF2B5EF4-FFF2-40B4-BE49-F238E27FC236}">
+                <a16:creationId xmlns:a16="http://schemas.microsoft.com/office/drawing/2014/main" id="{055BC9F6-8C0A-8440-8CB2-B3B3E5CAD35D}"/>
+              </a:ext>
+            </a:extLst>
+          </p:cNvPr>
+          <p:cNvCxnSpPr>
+            <a:cxnSpLocks/>
+            <a:stCxn id="72" idx="2"/>
+            <a:endCxn id="16" idx="0"/>
+          </p:cNvCxnSpPr>
+          <p:nvPr/>
+        </p:nvCxnSpPr>
+        <p:spPr>
+          <a:xfrm>
+            <a:off x="4882764" y="3477117"/>
+            <a:ext cx="7718" cy="545074"/>
+          </a:xfrm>
+          <a:prstGeom prst="straightConnector1">
+            <a:avLst/>
+          </a:prstGeom>
+          <a:ln w="12700">
+            <a:solidFill>
+              <a:schemeClr val="tx1"/>
+            </a:solidFill>
+            <a:prstDash val="dash"/>
+            <a:headEnd type="arrow"/>
+            <a:tailEnd type="arrow"/>
+          </a:ln>
+        </p:spPr>
+        <p:style>
+          <a:lnRef idx="1">
+            <a:schemeClr val="accent1"/>
+          </a:lnRef>
+          <a:fillRef idx="0">
+            <a:schemeClr val="accent1"/>
+          </a:fillRef>
+          <a:effectRef idx="0">
+            <a:schemeClr val="accent1"/>
+          </a:effectRef>
+          <a:fontRef idx="minor">
+            <a:schemeClr val="tx1"/>
+          </a:fontRef>
+        </p:style>
+      </p:cxnSp>
+      <p:cxnSp>
+        <p:nvCxnSpPr>
+          <p:cNvPr id="18" name="Straight Arrow Connector 17">
+            <a:extLst>
+              <a:ext uri="{FF2B5EF4-FFF2-40B4-BE49-F238E27FC236}">
+                <a16:creationId xmlns:a16="http://schemas.microsoft.com/office/drawing/2014/main" id="{289F1476-8289-F0DD-9B6E-4A04F3B111E0}"/>
+              </a:ext>
+            </a:extLst>
+          </p:cNvPr>
+          <p:cNvCxnSpPr>
+            <a:cxnSpLocks/>
+          </p:cNvCxnSpPr>
+          <p:nvPr/>
+        </p:nvCxnSpPr>
+        <p:spPr>
+          <a:xfrm flipH="1">
+            <a:off x="3259163" y="2835020"/>
+            <a:ext cx="1016852" cy="0"/>
+          </a:xfrm>
+          <a:prstGeom prst="straightConnector1">
+            <a:avLst/>
+          </a:prstGeom>
+          <a:ln w="12700">
+            <a:solidFill>
+              <a:schemeClr val="tx1"/>
+            </a:solidFill>
+            <a:headEnd type="arrow"/>
+            <a:tailEnd type="none"/>
+          </a:ln>
+        </p:spPr>
+        <p:style>
+          <a:lnRef idx="1">
+            <a:schemeClr val="accent1"/>
+          </a:lnRef>
+          <a:fillRef idx="0">
+            <a:schemeClr val="accent1"/>
+          </a:fillRef>
+          <a:effectRef idx="0">
+            <a:schemeClr val="accent1"/>
+          </a:effectRef>
+          <a:fontRef idx="minor">
+            <a:schemeClr val="tx1"/>
+          </a:fontRef>
+        </p:style>
+      </p:cxnSp>
+      <p:cxnSp>
+        <p:nvCxnSpPr>
+          <p:cNvPr id="64" name="Straight Arrow Connector 63">
+            <a:extLst>
+              <a:ext uri="{FF2B5EF4-FFF2-40B4-BE49-F238E27FC236}">
+                <a16:creationId xmlns:a16="http://schemas.microsoft.com/office/drawing/2014/main" id="{876C400E-DE7F-DE8B-23CD-DE4F9C59641B}"/>
+              </a:ext>
+            </a:extLst>
+          </p:cNvPr>
+          <p:cNvCxnSpPr>
+            <a:cxnSpLocks/>
+          </p:cNvCxnSpPr>
+          <p:nvPr/>
+        </p:nvCxnSpPr>
+        <p:spPr>
+          <a:xfrm>
+            <a:off x="3260789" y="1693947"/>
+            <a:ext cx="1015226" cy="0"/>
+          </a:xfrm>
+          <a:prstGeom prst="straightConnector1">
+            <a:avLst/>
+          </a:prstGeom>
+          <a:ln w="12700">
+            <a:solidFill>
+              <a:schemeClr val="tx1"/>
+            </a:solidFill>
+            <a:headEnd type="arrow"/>
+            <a:tailEnd type="none"/>
+          </a:ln>
+        </p:spPr>
+        <p:style>
+          <a:lnRef idx="1">
+            <a:schemeClr val="accent1"/>
+          </a:lnRef>
+          <a:fillRef idx="0">
+            <a:schemeClr val="accent1"/>
+          </a:fillRef>
+          <a:effectRef idx="0">
+            <a:schemeClr val="accent1"/>
+          </a:effectRef>
+          <a:fontRef idx="minor">
+            <a:schemeClr val="tx1"/>
+          </a:fontRef>
+        </p:style>
+      </p:cxnSp>
+      <p:sp>
+        <p:nvSpPr>
+          <p:cNvPr id="7" name="Rectangle 6">
+            <a:extLst>
+              <a:ext uri="{FF2B5EF4-FFF2-40B4-BE49-F238E27FC236}">
+                <a16:creationId xmlns:a16="http://schemas.microsoft.com/office/drawing/2014/main" id="{20F24B60-2905-0E09-E718-C84C2BFDB1B3}"/>
+              </a:ext>
+            </a:extLst>
+          </p:cNvPr>
+          <p:cNvSpPr/>
+          <p:nvPr/>
+        </p:nvSpPr>
+        <p:spPr>
+          <a:xfrm>
+            <a:off x="3591753" y="1376765"/>
+            <a:ext cx="131182" cy="2096745"/>
+          </a:xfrm>
+          <a:prstGeom prst="rect">
+            <a:avLst/>
+          </a:prstGeom>
+          <a:solidFill>
+            <a:schemeClr val="bg1">
+              <a:lumMod val="65000"/>
+            </a:schemeClr>
+          </a:solidFill>
+        </p:spPr>
+        <p:style>
+          <a:lnRef idx="2">
+            <a:schemeClr val="accent1">
+              <a:shade val="15000"/>
+            </a:schemeClr>
+          </a:lnRef>
+          <a:fillRef idx="1">
+            <a:schemeClr val="accent1"/>
+          </a:fillRef>
+          <a:effectRef idx="0">
+            <a:schemeClr val="accent1"/>
+          </a:effectRef>
+          <a:fontRef idx="minor">
+            <a:schemeClr val="lt1"/>
+          </a:fontRef>
+        </p:style>
+        <p:txBody>
+          <a:bodyPr lIns="0" tIns="0" rIns="0" bIns="0" rtlCol="0" anchor="ctr"/>
+          <a:lstStyle/>
+          <a:p>
+            <a:pPr algn="ctr"/>
+            <a:r>
+              <a:rPr lang="en-US" sz="1200" dirty="0"/>
+              <a:t>HTTP</a:t>
+            </a:r>
+            <a:endParaRPr lang="en-US" sz="500" dirty="0"/>
+          </a:p>
+        </p:txBody>
+      </p:sp>
+      <p:grpSp>
+        <p:nvGrpSpPr>
+          <p:cNvPr id="33" name="Group 32">
+            <a:extLst>
+              <a:ext uri="{FF2B5EF4-FFF2-40B4-BE49-F238E27FC236}">
+                <a16:creationId xmlns:a16="http://schemas.microsoft.com/office/drawing/2014/main" id="{BE1018F5-4A75-6D58-6DB4-E7F753803B71}"/>
+              </a:ext>
+            </a:extLst>
+          </p:cNvPr>
+          <p:cNvGrpSpPr/>
+          <p:nvPr/>
+        </p:nvGrpSpPr>
+        <p:grpSpPr>
+          <a:xfrm>
+            <a:off x="8000203" y="1376765"/>
+            <a:ext cx="780332" cy="424557"/>
+            <a:chOff x="8977718" y="4467817"/>
+            <a:chExt cx="780332" cy="424557"/>
+          </a:xfrm>
+        </p:grpSpPr>
+        <p:sp>
+          <p:nvSpPr>
+            <p:cNvPr id="23" name="Rectangle 22">
+              <a:extLst>
+                <a:ext uri="{FF2B5EF4-FFF2-40B4-BE49-F238E27FC236}">
+                  <a16:creationId xmlns:a16="http://schemas.microsoft.com/office/drawing/2014/main" id="{76555E47-F4F0-E310-C381-EBE0E8A67088}"/>
+                </a:ext>
+              </a:extLst>
+            </p:cNvPr>
+            <p:cNvSpPr/>
+            <p:nvPr/>
+          </p:nvSpPr>
+          <p:spPr>
+            <a:xfrm>
+              <a:off x="8977718" y="4467817"/>
+              <a:ext cx="780332" cy="424557"/>
+            </a:xfrm>
+            <a:prstGeom prst="rect">
+              <a:avLst/>
+            </a:prstGeom>
+            <a:solidFill>
+              <a:schemeClr val="accent1">
+                <a:lumMod val="40000"/>
+                <a:lumOff val="60000"/>
+              </a:schemeClr>
+            </a:solidFill>
+          </p:spPr>
+          <p:style>
+            <a:lnRef idx="2">
+              <a:schemeClr val="accent1">
+                <a:shade val="15000"/>
+              </a:schemeClr>
+            </a:lnRef>
+            <a:fillRef idx="1">
+              <a:schemeClr val="accent1"/>
+            </a:fillRef>
+            <a:effectRef idx="0">
+              <a:schemeClr val="accent1"/>
+            </a:effectRef>
+            <a:fontRef idx="minor">
+              <a:schemeClr val="lt1"/>
+            </a:fontRef>
+          </p:style>
+          <p:txBody>
+            <a:bodyPr lIns="0" tIns="45720" rIns="0" bIns="0" rtlCol="0" anchor="ctr"/>
+            <a:lstStyle/>
+            <a:p>
+              <a:r>
+                <a:rPr lang="en-US" sz="900" b="1" dirty="0"/>
+                <a:t>🐳</a:t>
+              </a:r>
+            </a:p>
+            <a:p>
+              <a:pPr algn="ctr"/>
+              <a:endParaRPr lang="en-US" sz="200" i="1" dirty="0"/>
+            </a:p>
+          </p:txBody>
+        </p:sp>
+        <p:sp>
+          <p:nvSpPr>
+            <p:cNvPr id="24" name="Rectangle 23">
+              <a:extLst>
+                <a:ext uri="{FF2B5EF4-FFF2-40B4-BE49-F238E27FC236}">
+                  <a16:creationId xmlns:a16="http://schemas.microsoft.com/office/drawing/2014/main" id="{BEF93897-39CC-878E-B9D7-F294A939278E}"/>
+                </a:ext>
+              </a:extLst>
+            </p:cNvPr>
+            <p:cNvSpPr/>
+            <p:nvPr/>
+          </p:nvSpPr>
+          <p:spPr>
+            <a:xfrm>
+              <a:off x="9154560" y="4493215"/>
+              <a:ext cx="579731" cy="372461"/>
+            </a:xfrm>
+            <a:prstGeom prst="rect">
+              <a:avLst/>
+            </a:prstGeom>
+            <a:solidFill>
+              <a:srgbClr val="F4B183"/>
+            </a:solidFill>
+          </p:spPr>
+          <p:style>
+            <a:lnRef idx="2">
+              <a:schemeClr val="accent1">
+                <a:shade val="15000"/>
+              </a:schemeClr>
+            </a:lnRef>
+            <a:fillRef idx="1">
+              <a:schemeClr val="accent1"/>
+            </a:fillRef>
+            <a:effectRef idx="0">
+              <a:schemeClr val="accent1"/>
+            </a:effectRef>
+            <a:fontRef idx="minor">
+              <a:schemeClr val="lt1"/>
+            </a:fontRef>
+          </p:style>
+          <p:txBody>
+            <a:bodyPr lIns="0" tIns="45720" rIns="0" bIns="0" rtlCol="0" anchor="t"/>
+            <a:lstStyle/>
+            <a:p>
+              <a:pPr algn="ctr"/>
+              <a:r>
+                <a:rPr lang="en-US" sz="1100" dirty="0"/>
+                <a:t>🛢️</a:t>
+              </a:r>
+              <a:r>
+                <a:rPr lang="en-US" sz="900" b="1" dirty="0"/>
+                <a:t> </a:t>
+              </a:r>
+              <a:r>
+                <a:rPr lang="en-US" sz="1200" b="1" dirty="0"/>
+                <a:t>DB</a:t>
+              </a:r>
+            </a:p>
+            <a:p>
+              <a:pPr marL="171450" indent="-91440">
+                <a:buFont typeface="Arial" panose="020B0604020202020204" pitchFamily="34" charset="0"/>
+                <a:buChar char="•"/>
+              </a:pPr>
+              <a:r>
+                <a:rPr lang="en-US" sz="900" dirty="0"/>
+                <a:t>xbrl</a:t>
+              </a:r>
+            </a:p>
+          </p:txBody>
+        </p:sp>
+      </p:grpSp>
+      <p:cxnSp>
+        <p:nvCxnSpPr>
+          <p:cNvPr id="38" name="Straight Arrow Connector 37">
+            <a:extLst>
+              <a:ext uri="{FF2B5EF4-FFF2-40B4-BE49-F238E27FC236}">
+                <a16:creationId xmlns:a16="http://schemas.microsoft.com/office/drawing/2014/main" id="{06A4713F-5E88-B7D3-0663-9307B4B51563}"/>
+              </a:ext>
+            </a:extLst>
+          </p:cNvPr>
+          <p:cNvCxnSpPr>
+            <a:cxnSpLocks/>
+          </p:cNvCxnSpPr>
+          <p:nvPr/>
+        </p:nvCxnSpPr>
+        <p:spPr>
+          <a:xfrm flipH="1">
+            <a:off x="5483381" y="2835020"/>
+            <a:ext cx="909930" cy="0"/>
+          </a:xfrm>
+          <a:prstGeom prst="straightConnector1">
+            <a:avLst/>
+          </a:prstGeom>
+          <a:ln w="12700">
+            <a:solidFill>
+              <a:schemeClr val="tx1"/>
+            </a:solidFill>
+            <a:headEnd type="arrow"/>
+            <a:tailEnd type="none"/>
+          </a:ln>
+        </p:spPr>
+        <p:style>
+          <a:lnRef idx="1">
+            <a:schemeClr val="accent1"/>
+          </a:lnRef>
+          <a:fillRef idx="0">
+            <a:schemeClr val="accent1"/>
+          </a:fillRef>
+          <a:effectRef idx="0">
+            <a:schemeClr val="accent1"/>
+          </a:effectRef>
+          <a:fontRef idx="minor">
+            <a:schemeClr val="tx1"/>
+          </a:fontRef>
+        </p:style>
+      </p:cxnSp>
+      <p:cxnSp>
+        <p:nvCxnSpPr>
+          <p:cNvPr id="56" name="Straight Arrow Connector 55">
+            <a:extLst>
+              <a:ext uri="{FF2B5EF4-FFF2-40B4-BE49-F238E27FC236}">
+                <a16:creationId xmlns:a16="http://schemas.microsoft.com/office/drawing/2014/main" id="{5AD8693A-2225-9F20-4278-50FD31AD2C77}"/>
+              </a:ext>
+            </a:extLst>
+          </p:cNvPr>
+          <p:cNvCxnSpPr>
+            <a:cxnSpLocks/>
+            <a:endCxn id="23" idx="1"/>
+          </p:cNvCxnSpPr>
+          <p:nvPr/>
+        </p:nvCxnSpPr>
+        <p:spPr>
+          <a:xfrm>
+            <a:off x="7504196" y="1588393"/>
+            <a:ext cx="496007" cy="651"/>
+          </a:xfrm>
+          <a:prstGeom prst="straightConnector1">
+            <a:avLst/>
+          </a:prstGeom>
+          <a:ln w="12700">
+            <a:solidFill>
+              <a:schemeClr val="tx1"/>
+            </a:solidFill>
+            <a:prstDash val="dash"/>
+            <a:headEnd type="arrow"/>
+            <a:tailEnd type="arrow"/>
+          </a:ln>
+        </p:spPr>
+        <p:style>
+          <a:lnRef idx="1">
+            <a:schemeClr val="accent1"/>
+          </a:lnRef>
+          <a:fillRef idx="0">
+            <a:schemeClr val="accent1"/>
+          </a:fillRef>
+          <a:effectRef idx="0">
+            <a:schemeClr val="accent1"/>
+          </a:effectRef>
+          <a:fontRef idx="minor">
+            <a:schemeClr val="tx1"/>
+          </a:fontRef>
+        </p:style>
+      </p:cxnSp>
+    </p:spTree>
+    <p:extLst>
+      <p:ext uri="{BB962C8B-B14F-4D97-AF65-F5344CB8AC3E}">
+        <p14:creationId xmlns:p14="http://schemas.microsoft.com/office/powerpoint/2010/main" val="3238737500"/>
+      </p:ext>
+    </p:extLst>
+  </p:cSld>
+  <p:clrMapOvr>
+    <a:masterClrMapping/>
+  </p:clrMapOvr>
+</p:sld>
+</file>
+
+<file path=ppt/slides/slide3.xml><?xml version="1.0" encoding="utf-8"?>
+<p:sld xmlns:a="http://schemas.openxmlformats.org/drawingml/2006/main" xmlns:r="http://schemas.openxmlformats.org/officeDocument/2006/relationships" xmlns:p="http://schemas.openxmlformats.org/presentationml/2006/main">
+  <p:cSld>
+    <p:spTree>
+      <p:nvGrpSpPr>
+        <p:cNvPr id="1" name="">
+          <a:extLst>
+            <a:ext uri="{FF2B5EF4-FFF2-40B4-BE49-F238E27FC236}">
+              <a16:creationId xmlns:a16="http://schemas.microsoft.com/office/drawing/2014/main" id="{C7FC19C9-B69E-A21D-EA73-F65929C00906}"/>
+            </a:ext>
+          </a:extLst>
+        </p:cNvPr>
+        <p:cNvGrpSpPr/>
+        <p:nvPr/>
+      </p:nvGrpSpPr>
+      <p:grpSpPr>
+        <a:xfrm>
+          <a:off x="0" y="0"/>
+          <a:ext cx="0" cy="0"/>
+          <a:chOff x="0" y="0"/>
+          <a:chExt cx="0" cy="0"/>
+        </a:xfrm>
+      </p:grpSpPr>
+      <p:sp>
+        <p:nvSpPr>
+          <p:cNvPr id="149" name="Rectangle 148">
+            <a:extLst>
+              <a:ext uri="{FF2B5EF4-FFF2-40B4-BE49-F238E27FC236}">
+                <a16:creationId xmlns:a16="http://schemas.microsoft.com/office/drawing/2014/main" id="{FC10E233-D5E2-651A-1038-DCBEB7367256}"/>
+              </a:ext>
+            </a:extLst>
+          </p:cNvPr>
+          <p:cNvSpPr/>
+          <p:nvPr/>
+        </p:nvSpPr>
+        <p:spPr>
+          <a:xfrm>
+            <a:off x="1302897" y="1034541"/>
+            <a:ext cx="9349530" cy="2729851"/>
+          </a:xfrm>
+          <a:prstGeom prst="rect">
+            <a:avLst/>
+          </a:prstGeom>
+          <a:solidFill>
+            <a:srgbClr val="B17ED8">
+              <a:alpha val="36000"/>
+            </a:srgbClr>
+          </a:solidFill>
+        </p:spPr>
+        <p:style>
+          <a:lnRef idx="2">
+            <a:schemeClr val="accent1">
+              <a:shade val="15000"/>
+            </a:schemeClr>
+          </a:lnRef>
+          <a:fillRef idx="1">
+            <a:schemeClr val="accent1"/>
+          </a:fillRef>
+          <a:effectRef idx="0">
+            <a:schemeClr val="accent1"/>
+          </a:effectRef>
+          <a:fontRef idx="minor">
+            <a:schemeClr val="lt1"/>
+          </a:fontRef>
+        </p:style>
+        <p:txBody>
+          <a:bodyPr lIns="0" tIns="0" rIns="0" bIns="0" rtlCol="0" anchor="t"/>
+          <a:lstStyle/>
+          <a:p>
+            <a:pPr algn="ctr"/>
+            <a:r>
+              <a:rPr lang="en-US" sz="2000" dirty="0">
+                <a:solidFill>
+                  <a:schemeClr val="tx1"/>
+                </a:solidFill>
+              </a:rPr>
+              <a:t>Query Pipeline</a:t>
+            </a:r>
+          </a:p>
+        </p:txBody>
+      </p:sp>
+      <p:sp>
+        <p:nvSpPr>
+          <p:cNvPr id="107" name="Rectangle 106">
+            <a:extLst>
+              <a:ext uri="{FF2B5EF4-FFF2-40B4-BE49-F238E27FC236}">
+                <a16:creationId xmlns:a16="http://schemas.microsoft.com/office/drawing/2014/main" id="{79C5CE47-1E8E-0C99-067C-C5B392C14A2E}"/>
+              </a:ext>
+            </a:extLst>
+          </p:cNvPr>
+          <p:cNvSpPr/>
+          <p:nvPr/>
+        </p:nvSpPr>
+        <p:spPr>
+          <a:xfrm>
+            <a:off x="4126489" y="1735056"/>
+            <a:ext cx="6406921" cy="1691989"/>
+          </a:xfrm>
+          <a:prstGeom prst="rect">
+            <a:avLst/>
+          </a:prstGeom>
+          <a:solidFill>
+            <a:schemeClr val="bg1">
+              <a:alpha val="32000"/>
+            </a:schemeClr>
+          </a:solidFill>
+        </p:spPr>
+        <p:style>
+          <a:lnRef idx="2">
+            <a:schemeClr val="accent1">
+              <a:shade val="15000"/>
+            </a:schemeClr>
+          </a:lnRef>
+          <a:fillRef idx="1">
+            <a:schemeClr val="accent1"/>
+          </a:fillRef>
+          <a:effectRef idx="0">
+            <a:schemeClr val="accent1"/>
+          </a:effectRef>
+          <a:fontRef idx="minor">
+            <a:schemeClr val="lt1"/>
+          </a:fontRef>
+        </p:style>
+        <p:txBody>
+          <a:bodyPr lIns="0" tIns="0" rIns="0" bIns="0" rtlCol="0" anchor="ctr"/>
+          <a:lstStyle/>
+          <a:p>
+            <a:pPr algn="ctr"/>
+            <a:endParaRPr lang="en-US" sz="1600" dirty="0"/>
+          </a:p>
+        </p:txBody>
+      </p:sp>
+      <p:sp>
+        <p:nvSpPr>
+          <p:cNvPr id="165" name="TextBox 164">
+            <a:extLst>
+              <a:ext uri="{FF2B5EF4-FFF2-40B4-BE49-F238E27FC236}">
+                <a16:creationId xmlns:a16="http://schemas.microsoft.com/office/drawing/2014/main" id="{D6DB44C7-7895-8DDF-DAFC-DEFEF8F7178B}"/>
+              </a:ext>
+            </a:extLst>
+          </p:cNvPr>
+          <p:cNvSpPr txBox="1"/>
+          <p:nvPr/>
+        </p:nvSpPr>
+        <p:spPr>
+          <a:xfrm>
+            <a:off x="3139381" y="1537574"/>
+            <a:ext cx="949756" cy="415498"/>
+          </a:xfrm>
+          <a:prstGeom prst="rect">
+            <a:avLst/>
+          </a:prstGeom>
+          <a:noFill/>
+        </p:spPr>
+        <p:txBody>
+          <a:bodyPr wrap="square" lIns="0" tIns="0" rIns="0" bIns="0" rtlCol="0">
+            <a:spAutoFit/>
+          </a:bodyPr>
+          <a:lstStyle/>
+          <a:p>
+            <a:pPr marL="171450" indent="-171450">
+              <a:buFont typeface="Arial" panose="020B0604020202020204" pitchFamily="34" charset="0"/>
+              <a:buChar char="•"/>
+            </a:pPr>
+            <a:r>
+              <a:rPr lang="en-US" sz="900" dirty="0">
+                <a:solidFill>
+                  <a:srgbClr val="B17ED8"/>
+                </a:solidFill>
+                <a:latin typeface="Adobe Gothic Std B" panose="020B0800000000000000" pitchFamily="34" charset="-128"/>
+                <a:ea typeface="Adobe Gothic Std B" panose="020B0800000000000000" pitchFamily="34" charset="-128"/>
+              </a:rPr>
+              <a:t>AnswerView</a:t>
+            </a:r>
+          </a:p>
+          <a:p>
+            <a:pPr marL="171450" indent="-171450">
+              <a:buFont typeface="Arial" panose="020B0604020202020204" pitchFamily="34" charset="0"/>
+              <a:buChar char="•"/>
+            </a:pPr>
+            <a:r>
+              <a:rPr lang="en-US" sz="900" dirty="0">
+                <a:solidFill>
+                  <a:srgbClr val="B17ED8"/>
+                </a:solidFill>
+                <a:latin typeface="Adobe Gothic Std B" panose="020B0800000000000000" pitchFamily="34" charset="-128"/>
+                <a:ea typeface="Adobe Gothic Std B" panose="020B0800000000000000" pitchFamily="34" charset="-128"/>
+              </a:rPr>
+              <a:t>Refusal</a:t>
+            </a:r>
+          </a:p>
+          <a:p>
+            <a:pPr marL="171450" indent="-171450">
+              <a:buFont typeface="Arial" panose="020B0604020202020204" pitchFamily="34" charset="0"/>
+              <a:buChar char="•"/>
+            </a:pPr>
+            <a:r>
+              <a:rPr lang="en-US" sz="900" dirty="0">
+                <a:solidFill>
+                  <a:srgbClr val="B17ED8"/>
+                </a:solidFill>
+                <a:latin typeface="Adobe Gothic Std B" panose="020B0800000000000000" pitchFamily="34" charset="-128"/>
+                <a:ea typeface="Adobe Gothic Std B" panose="020B0800000000000000" pitchFamily="34" charset="-128"/>
+              </a:rPr>
+              <a:t>AskRecord</a:t>
+            </a:r>
+          </a:p>
+        </p:txBody>
+      </p:sp>
+      <p:sp>
+        <p:nvSpPr>
+          <p:cNvPr id="30" name="TextBox 29">
+            <a:extLst>
+              <a:ext uri="{FF2B5EF4-FFF2-40B4-BE49-F238E27FC236}">
+                <a16:creationId xmlns:a16="http://schemas.microsoft.com/office/drawing/2014/main" id="{3303F9E9-32FA-82BB-BEE9-63DFD82299FF}"/>
+              </a:ext>
+            </a:extLst>
+          </p:cNvPr>
+          <p:cNvSpPr txBox="1"/>
+          <p:nvPr/>
+        </p:nvSpPr>
+        <p:spPr>
+          <a:xfrm>
+            <a:off x="-27740" y="3111381"/>
+            <a:ext cx="1330636" cy="169277"/>
+          </a:xfrm>
+          <a:prstGeom prst="rect">
+            <a:avLst/>
+          </a:prstGeom>
+          <a:noFill/>
+        </p:spPr>
+        <p:txBody>
+          <a:bodyPr wrap="square" lIns="0" tIns="0" rIns="0" bIns="0" rtlCol="0">
+            <a:spAutoFit/>
+          </a:bodyPr>
+          <a:lstStyle>
+            <a:defPPr>
+              <a:defRPr lang="en-US"/>
+            </a:defPPr>
+            <a:lvl1pPr algn="r">
+              <a:defRPr sz="1100" i="1"/>
+            </a:lvl1pPr>
+          </a:lstStyle>
+          <a:p>
+            <a:pPr algn="ctr"/>
+            <a:r>
+              <a:rPr lang="en-US" dirty="0"/>
+              <a:t>Query String</a:t>
+            </a:r>
+          </a:p>
+        </p:txBody>
+      </p:sp>
+      <p:sp>
+        <p:nvSpPr>
+          <p:cNvPr id="8" name="Title 1024">
+            <a:extLst>
+              <a:ext uri="{FF2B5EF4-FFF2-40B4-BE49-F238E27FC236}">
+                <a16:creationId xmlns:a16="http://schemas.microsoft.com/office/drawing/2014/main" id="{EDFDF07F-6649-2322-EA71-954A0A2B68B1}"/>
+              </a:ext>
+            </a:extLst>
+          </p:cNvPr>
+          <p:cNvSpPr txBox="1">
+            <a:spLocks/>
+          </p:cNvSpPr>
+          <p:nvPr/>
+        </p:nvSpPr>
+        <p:spPr>
+          <a:xfrm>
+            <a:off x="115734" y="64032"/>
+            <a:ext cx="6631754" cy="476956"/>
+          </a:xfrm>
+          <a:prstGeom prst="rect">
+            <a:avLst/>
+          </a:prstGeom>
+        </p:spPr>
+        <p:txBody>
+          <a:bodyPr vert="horz" lIns="91440" tIns="45720" rIns="91440" bIns="45720" rtlCol="0" anchor="t">
+            <a:noAutofit/>
+          </a:bodyPr>
+          <a:lstStyle>
+            <a:lvl1pPr algn="ctr" defTabSz="914400" rtl="0" eaLnBrk="1" latinLnBrk="0" hangingPunct="1">
+              <a:lnSpc>
+                <a:spcPct val="90000"/>
+              </a:lnSpc>
+              <a:spcBef>
+                <a:spcPct val="0"/>
+              </a:spcBef>
+              <a:buNone/>
+              <a:defRPr sz="6000" kern="1200">
+                <a:solidFill>
+                  <a:schemeClr val="tx1"/>
+                </a:solidFill>
+                <a:latin typeface="+mj-lt"/>
+                <a:ea typeface="+mj-ea"/>
+                <a:cs typeface="+mj-cs"/>
+              </a:defRPr>
+            </a:lvl1pPr>
+          </a:lstStyle>
+          <a:p>
+            <a:pPr algn="l"/>
+            <a:r>
+              <a:rPr lang="en-US" sz="4000" dirty="0"/>
+              <a:t>Query Phase (Query Pipeline)</a:t>
+            </a:r>
+          </a:p>
+        </p:txBody>
+      </p:sp>
+      <p:sp>
+        <p:nvSpPr>
+          <p:cNvPr id="46" name="Rectangle 45">
+            <a:extLst>
+              <a:ext uri="{FF2B5EF4-FFF2-40B4-BE49-F238E27FC236}">
+                <a16:creationId xmlns:a16="http://schemas.microsoft.com/office/drawing/2014/main" id="{71DC958C-D4FA-DCDD-139A-67A8C909CAEA}"/>
+              </a:ext>
+            </a:extLst>
+          </p:cNvPr>
+          <p:cNvSpPr/>
+          <p:nvPr/>
+        </p:nvSpPr>
+        <p:spPr>
+          <a:xfrm>
+            <a:off x="1883458" y="1502537"/>
+            <a:ext cx="1074329" cy="2100348"/>
+          </a:xfrm>
+          <a:prstGeom prst="rect">
+            <a:avLst/>
+          </a:prstGeom>
+          <a:solidFill>
+            <a:srgbClr val="7030A0"/>
+          </a:solidFill>
+        </p:spPr>
+        <p:style>
+          <a:lnRef idx="2">
+            <a:schemeClr val="accent1">
+              <a:shade val="15000"/>
+            </a:schemeClr>
+          </a:lnRef>
+          <a:fillRef idx="1">
+            <a:schemeClr val="accent1"/>
+          </a:fillRef>
+          <a:effectRef idx="0">
+            <a:schemeClr val="accent1"/>
+          </a:effectRef>
+          <a:fontRef idx="minor">
+            <a:schemeClr val="lt1"/>
+          </a:fontRef>
+        </p:style>
+        <p:txBody>
+          <a:bodyPr lIns="0" tIns="0" rIns="0" bIns="0" rtlCol="0" anchor="ctr"/>
+          <a:lstStyle/>
+          <a:p>
+            <a:pPr algn="ctr"/>
+            <a:r>
+              <a:rPr lang="en-US" sz="1600" dirty="0"/>
+              <a:t>Job Chain</a:t>
+            </a:r>
+          </a:p>
+          <a:p>
+            <a:pPr algn="ctr"/>
+            <a:endParaRPr lang="en-US" sz="800" dirty="0"/>
+          </a:p>
+          <a:p>
+            <a:pPr algn="ctr"/>
+            <a:r>
+              <a:rPr lang="en-US" sz="800" dirty="0"/>
+              <a:t>Manages pipeline for query response. </a:t>
+            </a:r>
+          </a:p>
+          <a:p>
+            <a:pPr algn="ctr"/>
+            <a:endParaRPr lang="en-US" sz="800" dirty="0"/>
+          </a:p>
+          <a:p>
+            <a:pPr algn="ctr"/>
+            <a:r>
+              <a:rPr lang="en-US" sz="800" dirty="0"/>
+              <a:t>Compiles </a:t>
+            </a:r>
+            <a:r>
+              <a:rPr lang="en-US" sz="800" dirty="0">
+                <a:solidFill>
+                  <a:srgbClr val="B17ED8"/>
+                </a:solidFill>
+                <a:latin typeface="Adobe Gothic Std B" panose="020B0800000000000000" pitchFamily="34" charset="-128"/>
+                <a:ea typeface="Adobe Gothic Std B" panose="020B0800000000000000" pitchFamily="34" charset="-128"/>
+              </a:rPr>
+              <a:t>Outcome</a:t>
+            </a:r>
+            <a:r>
+              <a:rPr lang="en-US" sz="800" dirty="0"/>
+              <a:t> from answers, refusals, and clarifications.</a:t>
+            </a:r>
+            <a:endParaRPr lang="en-US" sz="1600" dirty="0"/>
+          </a:p>
+        </p:txBody>
+      </p:sp>
+      <p:cxnSp>
+        <p:nvCxnSpPr>
+          <p:cNvPr id="55" name="Straight Arrow Connector 54">
+            <a:extLst>
+              <a:ext uri="{FF2B5EF4-FFF2-40B4-BE49-F238E27FC236}">
+                <a16:creationId xmlns:a16="http://schemas.microsoft.com/office/drawing/2014/main" id="{454153D7-C55D-54D0-9FFC-9393D9882ABA}"/>
+              </a:ext>
+            </a:extLst>
+          </p:cNvPr>
+          <p:cNvCxnSpPr>
+            <a:cxnSpLocks/>
+          </p:cNvCxnSpPr>
+          <p:nvPr/>
+        </p:nvCxnSpPr>
+        <p:spPr>
+          <a:xfrm flipH="1">
+            <a:off x="1046589" y="3196020"/>
+            <a:ext cx="835607" cy="0"/>
+          </a:xfrm>
+          <a:prstGeom prst="straightConnector1">
+            <a:avLst/>
+          </a:prstGeom>
+          <a:ln w="12700">
+            <a:solidFill>
+              <a:schemeClr val="tx1"/>
+            </a:solidFill>
+            <a:headEnd type="arrow"/>
+            <a:tailEnd type="none"/>
+          </a:ln>
+        </p:spPr>
+        <p:style>
+          <a:lnRef idx="1">
+            <a:schemeClr val="accent1"/>
+          </a:lnRef>
+          <a:fillRef idx="0">
+            <a:schemeClr val="accent1"/>
+          </a:fillRef>
+          <a:effectRef idx="0">
+            <a:schemeClr val="accent1"/>
+          </a:effectRef>
+          <a:fontRef idx="minor">
+            <a:schemeClr val="tx1"/>
+          </a:fontRef>
+        </p:style>
+      </p:cxnSp>
+      <p:sp>
+        <p:nvSpPr>
+          <p:cNvPr id="59" name="TextBox 58">
+            <a:extLst>
+              <a:ext uri="{FF2B5EF4-FFF2-40B4-BE49-F238E27FC236}">
+                <a16:creationId xmlns:a16="http://schemas.microsoft.com/office/drawing/2014/main" id="{1351D387-E38A-B197-5008-2F88EDCFA812}"/>
+              </a:ext>
+            </a:extLst>
+          </p:cNvPr>
+          <p:cNvSpPr txBox="1"/>
+          <p:nvPr/>
+        </p:nvSpPr>
+        <p:spPr>
+          <a:xfrm>
+            <a:off x="362030" y="1927809"/>
+            <a:ext cx="816496" cy="161583"/>
+          </a:xfrm>
+          <a:prstGeom prst="rect">
+            <a:avLst/>
+          </a:prstGeom>
+          <a:noFill/>
+        </p:spPr>
+        <p:txBody>
+          <a:bodyPr wrap="square" lIns="0" tIns="0" rIns="0" bIns="0" rtlCol="0">
+            <a:spAutoFit/>
+          </a:bodyPr>
+          <a:lstStyle/>
+          <a:p>
+            <a:r>
+              <a:rPr lang="en-US" sz="1050" dirty="0">
+                <a:solidFill>
+                  <a:srgbClr val="B17ED8"/>
+                </a:solidFill>
+                <a:latin typeface="Adobe Gothic Std B" panose="020B0800000000000000" pitchFamily="34" charset="-128"/>
+                <a:ea typeface="Adobe Gothic Std B" panose="020B0800000000000000" pitchFamily="34" charset="-128"/>
+              </a:rPr>
+              <a:t>Outcome</a:t>
+            </a:r>
+          </a:p>
+        </p:txBody>
+      </p:sp>
+      <p:cxnSp>
+        <p:nvCxnSpPr>
+          <p:cNvPr id="60" name="Straight Arrow Connector 59">
+            <a:extLst>
+              <a:ext uri="{FF2B5EF4-FFF2-40B4-BE49-F238E27FC236}">
+                <a16:creationId xmlns:a16="http://schemas.microsoft.com/office/drawing/2014/main" id="{074DC7D7-33A0-A995-F27E-B00D4774DD4C}"/>
+              </a:ext>
+            </a:extLst>
+          </p:cNvPr>
+          <p:cNvCxnSpPr>
+            <a:cxnSpLocks/>
+          </p:cNvCxnSpPr>
+          <p:nvPr/>
+        </p:nvCxnSpPr>
+        <p:spPr>
+          <a:xfrm>
+            <a:off x="1046589" y="2008601"/>
+            <a:ext cx="835607" cy="0"/>
+          </a:xfrm>
+          <a:prstGeom prst="straightConnector1">
+            <a:avLst/>
+          </a:prstGeom>
+          <a:ln w="12700">
+            <a:solidFill>
+              <a:schemeClr val="tx1"/>
+            </a:solidFill>
+            <a:headEnd type="arrow"/>
+            <a:tailEnd type="none"/>
+          </a:ln>
+        </p:spPr>
+        <p:style>
+          <a:lnRef idx="1">
+            <a:schemeClr val="accent1"/>
+          </a:lnRef>
+          <a:fillRef idx="0">
+            <a:schemeClr val="accent1"/>
+          </a:fillRef>
+          <a:effectRef idx="0">
+            <a:schemeClr val="accent1"/>
+          </a:effectRef>
+          <a:fontRef idx="minor">
+            <a:schemeClr val="tx1"/>
+          </a:fontRef>
+        </p:style>
+      </p:cxnSp>
+      <p:sp>
+        <p:nvSpPr>
+          <p:cNvPr id="97" name="Rectangle 96">
+            <a:extLst>
+              <a:ext uri="{FF2B5EF4-FFF2-40B4-BE49-F238E27FC236}">
+                <a16:creationId xmlns:a16="http://schemas.microsoft.com/office/drawing/2014/main" id="{0C56EF47-A4ED-F0F2-A51A-EF1B100C8689}"/>
+              </a:ext>
+            </a:extLst>
+          </p:cNvPr>
+          <p:cNvSpPr/>
+          <p:nvPr/>
+        </p:nvSpPr>
+        <p:spPr>
+          <a:xfrm>
+            <a:off x="9266583" y="1882438"/>
+            <a:ext cx="1101061" cy="1410125"/>
+          </a:xfrm>
+          <a:prstGeom prst="rect">
+            <a:avLst/>
+          </a:prstGeom>
+          <a:solidFill>
+            <a:srgbClr val="7030A0"/>
+          </a:solidFill>
+        </p:spPr>
+        <p:style>
+          <a:lnRef idx="2">
+            <a:schemeClr val="accent1">
+              <a:shade val="15000"/>
+            </a:schemeClr>
+          </a:lnRef>
+          <a:fillRef idx="1">
+            <a:schemeClr val="accent1"/>
+          </a:fillRef>
+          <a:effectRef idx="0">
+            <a:schemeClr val="accent1"/>
+          </a:effectRef>
+          <a:fontRef idx="minor">
+            <a:schemeClr val="lt1"/>
+          </a:fontRef>
+        </p:style>
+        <p:txBody>
+          <a:bodyPr lIns="0" tIns="0" rIns="0" bIns="0" rtlCol="0" anchor="ctr"/>
+          <a:lstStyle/>
+          <a:p>
+            <a:pPr algn="ctr"/>
+            <a:r>
+              <a:rPr lang="en-US" sz="1600" dirty="0"/>
+              <a:t>Presenter</a:t>
+            </a:r>
+            <a:endParaRPr lang="en-US" sz="1400" dirty="0"/>
+          </a:p>
+          <a:p>
+            <a:pPr algn="ctr"/>
+            <a:r>
+              <a:rPr lang="en-US" sz="1100" u="sng" dirty="0"/>
+              <a:t>app/presenter/</a:t>
+            </a:r>
+          </a:p>
+          <a:p>
+            <a:pPr algn="ctr"/>
+            <a:endParaRPr lang="en-US" sz="800" dirty="0"/>
+          </a:p>
+          <a:p>
+            <a:pPr algn="ctr"/>
+            <a:r>
+              <a:rPr lang="en-US" sz="800" dirty="0"/>
+              <a:t>Formats results for viewing</a:t>
+            </a:r>
+          </a:p>
+        </p:txBody>
+      </p:sp>
+      <p:sp>
+        <p:nvSpPr>
+          <p:cNvPr id="98" name="Rectangle 97">
+            <a:extLst>
+              <a:ext uri="{FF2B5EF4-FFF2-40B4-BE49-F238E27FC236}">
+                <a16:creationId xmlns:a16="http://schemas.microsoft.com/office/drawing/2014/main" id="{79EAFD57-6D17-2C34-F219-9BD0FABD8E29}"/>
+              </a:ext>
+            </a:extLst>
+          </p:cNvPr>
+          <p:cNvSpPr/>
+          <p:nvPr/>
+        </p:nvSpPr>
+        <p:spPr>
+          <a:xfrm>
+            <a:off x="4312076" y="1882438"/>
+            <a:ext cx="1102254" cy="1410125"/>
+          </a:xfrm>
+          <a:prstGeom prst="rect">
+            <a:avLst/>
+          </a:prstGeom>
+          <a:solidFill>
+            <a:srgbClr val="7030A0"/>
+          </a:solidFill>
+        </p:spPr>
+        <p:style>
+          <a:lnRef idx="2">
+            <a:schemeClr val="accent1">
+              <a:shade val="15000"/>
+            </a:schemeClr>
+          </a:lnRef>
+          <a:fillRef idx="1">
+            <a:schemeClr val="accent1"/>
+          </a:fillRef>
+          <a:effectRef idx="0">
+            <a:schemeClr val="accent1"/>
+          </a:effectRef>
+          <a:fontRef idx="minor">
+            <a:schemeClr val="lt1"/>
+          </a:fontRef>
+        </p:style>
+        <p:txBody>
+          <a:bodyPr lIns="0" tIns="0" rIns="0" bIns="0" rtlCol="0" anchor="ctr"/>
+          <a:lstStyle/>
+          <a:p>
+            <a:pPr algn="ctr"/>
+            <a:r>
+              <a:rPr lang="en-US" dirty="0"/>
+              <a:t>Query Parser</a:t>
+            </a:r>
+            <a:endParaRPr lang="en-US" sz="1100" dirty="0"/>
+          </a:p>
+          <a:p>
+            <a:pPr algn="ctr"/>
+            <a:r>
+              <a:rPr lang="en-US" sz="1100" u="sng" dirty="0"/>
+              <a:t>app/parser</a:t>
+            </a:r>
+          </a:p>
+          <a:p>
+            <a:pPr algn="ctr"/>
+            <a:endParaRPr lang="en-US" sz="800" dirty="0"/>
+          </a:p>
+          <a:p>
+            <a:pPr algn="ctr"/>
+            <a:r>
+              <a:rPr lang="en-US" sz="800" dirty="0"/>
+              <a:t>Converts user string to </a:t>
+            </a:r>
+            <a:r>
+              <a:rPr lang="en-US" sz="800" dirty="0">
+                <a:solidFill>
+                  <a:srgbClr val="B17ED8"/>
+                </a:solidFill>
+                <a:latin typeface="Adobe Gothic Std B" panose="020B0800000000000000" pitchFamily="34" charset="-128"/>
+                <a:ea typeface="Adobe Gothic Std B" panose="020B0800000000000000" pitchFamily="34" charset="-128"/>
+              </a:rPr>
+              <a:t>Query</a:t>
+            </a:r>
+            <a:r>
+              <a:rPr lang="en-US" sz="800" dirty="0"/>
+              <a:t> object </a:t>
+            </a:r>
+          </a:p>
+          <a:p>
+            <a:pPr algn="ctr"/>
+            <a:r>
+              <a:rPr lang="en-US" sz="800" dirty="0"/>
+              <a:t>(via Qwen)</a:t>
+            </a:r>
+          </a:p>
+        </p:txBody>
+      </p:sp>
+      <p:sp>
+        <p:nvSpPr>
+          <p:cNvPr id="99" name="Rectangle 98">
+            <a:extLst>
+              <a:ext uri="{FF2B5EF4-FFF2-40B4-BE49-F238E27FC236}">
+                <a16:creationId xmlns:a16="http://schemas.microsoft.com/office/drawing/2014/main" id="{50886A4E-E86C-428F-612D-C74CE6466DE7}"/>
+              </a:ext>
+            </a:extLst>
+          </p:cNvPr>
+          <p:cNvSpPr/>
+          <p:nvPr/>
+        </p:nvSpPr>
+        <p:spPr>
+          <a:xfrm>
+            <a:off x="5932835" y="1882438"/>
+            <a:ext cx="1102254" cy="1410125"/>
+          </a:xfrm>
+          <a:prstGeom prst="rect">
+            <a:avLst/>
+          </a:prstGeom>
+          <a:solidFill>
+            <a:srgbClr val="7030A0"/>
+          </a:solidFill>
+        </p:spPr>
+        <p:style>
+          <a:lnRef idx="2">
+            <a:schemeClr val="accent1">
+              <a:shade val="15000"/>
+            </a:schemeClr>
+          </a:lnRef>
+          <a:fillRef idx="1">
+            <a:schemeClr val="accent1"/>
+          </a:fillRef>
+          <a:effectRef idx="0">
+            <a:schemeClr val="accent1"/>
+          </a:effectRef>
+          <a:fontRef idx="minor">
+            <a:schemeClr val="lt1"/>
+          </a:fontRef>
+        </p:style>
+        <p:txBody>
+          <a:bodyPr lIns="0" tIns="0" rIns="0" bIns="0" rtlCol="0" anchor="ctr"/>
+          <a:lstStyle/>
+          <a:p>
+            <a:pPr algn="ctr"/>
+            <a:r>
+              <a:rPr lang="en-US" dirty="0"/>
+              <a:t>Query Mapper</a:t>
+            </a:r>
+            <a:endParaRPr lang="en-US" sz="1100" dirty="0"/>
+          </a:p>
+          <a:p>
+            <a:pPr algn="ctr"/>
+            <a:r>
+              <a:rPr lang="en-US" sz="1100" u="sng" dirty="0"/>
+              <a:t>app/semantic</a:t>
+            </a:r>
+          </a:p>
+          <a:p>
+            <a:pPr algn="ctr"/>
+            <a:endParaRPr lang="en-US" sz="800" dirty="0"/>
+          </a:p>
+          <a:p>
+            <a:pPr algn="ctr"/>
+            <a:r>
+              <a:rPr lang="en-US" sz="700" dirty="0"/>
+              <a:t>Normalizes </a:t>
+            </a:r>
+            <a:r>
+              <a:rPr lang="en-US" sz="700" dirty="0">
+                <a:solidFill>
+                  <a:srgbClr val="B17ED8"/>
+                </a:solidFill>
+                <a:latin typeface="Adobe Gothic Std B" panose="020B0800000000000000" pitchFamily="34" charset="-128"/>
+                <a:ea typeface="Adobe Gothic Std B" panose="020B0800000000000000" pitchFamily="34" charset="-128"/>
+              </a:rPr>
+              <a:t>Query</a:t>
+            </a:r>
+            <a:r>
+              <a:rPr lang="en-US" sz="700" dirty="0"/>
+              <a:t> (via aliases, embedding distances, etc…) to what is retrievable from the database</a:t>
+            </a:r>
+          </a:p>
+        </p:txBody>
+      </p:sp>
+      <p:sp>
+        <p:nvSpPr>
+          <p:cNvPr id="100" name="Rectangle 99">
+            <a:extLst>
+              <a:ext uri="{FF2B5EF4-FFF2-40B4-BE49-F238E27FC236}">
+                <a16:creationId xmlns:a16="http://schemas.microsoft.com/office/drawing/2014/main" id="{4305B2E4-C5C8-9D29-7F0C-C63FBEE98E0D}"/>
+              </a:ext>
+            </a:extLst>
+          </p:cNvPr>
+          <p:cNvSpPr/>
+          <p:nvPr/>
+        </p:nvSpPr>
+        <p:spPr>
+          <a:xfrm>
+            <a:off x="7588964" y="1882438"/>
+            <a:ext cx="1094086" cy="1410125"/>
+          </a:xfrm>
+          <a:prstGeom prst="rect">
+            <a:avLst/>
+          </a:prstGeom>
+          <a:solidFill>
+            <a:srgbClr val="7030A0"/>
+          </a:solidFill>
+        </p:spPr>
+        <p:style>
+          <a:lnRef idx="2">
+            <a:schemeClr val="accent1">
+              <a:shade val="15000"/>
+            </a:schemeClr>
+          </a:lnRef>
+          <a:fillRef idx="1">
+            <a:schemeClr val="accent1"/>
+          </a:fillRef>
+          <a:effectRef idx="0">
+            <a:schemeClr val="accent1"/>
+          </a:effectRef>
+          <a:fontRef idx="minor">
+            <a:schemeClr val="lt1"/>
+          </a:fontRef>
+        </p:style>
+        <p:txBody>
+          <a:bodyPr lIns="0" tIns="0" rIns="0" bIns="0" rtlCol="0" anchor="ctr"/>
+          <a:lstStyle/>
+          <a:p>
+            <a:pPr algn="ctr"/>
+            <a:r>
+              <a:rPr lang="en-US" sz="1600" dirty="0"/>
+              <a:t>Query</a:t>
+            </a:r>
+            <a:br>
+              <a:rPr lang="en-US" sz="1600" dirty="0"/>
+            </a:br>
+            <a:r>
+              <a:rPr lang="en-US" sz="1600" dirty="0"/>
+              <a:t>Executor</a:t>
+            </a:r>
+            <a:endParaRPr lang="en-US" sz="1400" dirty="0"/>
+          </a:p>
+          <a:p>
+            <a:pPr algn="ctr"/>
+            <a:r>
+              <a:rPr lang="en-US" sz="1100" u="sng" dirty="0"/>
+              <a:t>app/retrieval</a:t>
+            </a:r>
+          </a:p>
+          <a:p>
+            <a:pPr algn="ctr"/>
+            <a:endParaRPr lang="en-US" sz="800" dirty="0"/>
+          </a:p>
+          <a:p>
+            <a:pPr algn="ctr"/>
+            <a:r>
+              <a:rPr lang="en-US" sz="800" dirty="0"/>
+              <a:t>Generates SQL to execute </a:t>
+            </a:r>
+            <a:r>
+              <a:rPr lang="en-US" sz="800" dirty="0">
+                <a:solidFill>
+                  <a:srgbClr val="B17ED8"/>
+                </a:solidFill>
+                <a:latin typeface="Adobe Gothic Std B" panose="020B0800000000000000" pitchFamily="34" charset="-128"/>
+                <a:ea typeface="Adobe Gothic Std B" panose="020B0800000000000000" pitchFamily="34" charset="-128"/>
+              </a:rPr>
+              <a:t>QueryPlan</a:t>
+            </a:r>
+            <a:r>
+              <a:rPr lang="en-US" sz="800" dirty="0"/>
+              <a:t> (via Qwen), sanitizes then executes SQL</a:t>
+            </a:r>
+          </a:p>
+        </p:txBody>
+      </p:sp>
+      <p:cxnSp>
+        <p:nvCxnSpPr>
+          <p:cNvPr id="101" name="Straight Arrow Connector 100">
+            <a:extLst>
+              <a:ext uri="{FF2B5EF4-FFF2-40B4-BE49-F238E27FC236}">
+                <a16:creationId xmlns:a16="http://schemas.microsoft.com/office/drawing/2014/main" id="{526B9B01-14C7-4EA9-2BF8-16F291CA728B}"/>
+              </a:ext>
+            </a:extLst>
+          </p:cNvPr>
+          <p:cNvCxnSpPr>
+            <a:cxnSpLocks/>
+            <a:stCxn id="100" idx="1"/>
+            <a:endCxn id="99" idx="3"/>
+          </p:cNvCxnSpPr>
+          <p:nvPr/>
+        </p:nvCxnSpPr>
+        <p:spPr>
+          <a:xfrm flipH="1">
+            <a:off x="7035089" y="2587501"/>
+            <a:ext cx="553875" cy="0"/>
+          </a:xfrm>
+          <a:prstGeom prst="straightConnector1">
+            <a:avLst/>
+          </a:prstGeom>
+          <a:ln w="12700">
+            <a:solidFill>
+              <a:schemeClr val="tx1"/>
+            </a:solidFill>
+            <a:headEnd type="arrow"/>
+            <a:tailEnd type="none"/>
+          </a:ln>
+        </p:spPr>
+        <p:style>
+          <a:lnRef idx="1">
+            <a:schemeClr val="accent1"/>
+          </a:lnRef>
+          <a:fillRef idx="0">
+            <a:schemeClr val="accent1"/>
+          </a:fillRef>
+          <a:effectRef idx="0">
+            <a:schemeClr val="accent1"/>
+          </a:effectRef>
+          <a:fontRef idx="minor">
+            <a:schemeClr val="tx1"/>
+          </a:fontRef>
+        </p:style>
+      </p:cxnSp>
+      <p:cxnSp>
+        <p:nvCxnSpPr>
+          <p:cNvPr id="102" name="Straight Arrow Connector 101">
+            <a:extLst>
+              <a:ext uri="{FF2B5EF4-FFF2-40B4-BE49-F238E27FC236}">
+                <a16:creationId xmlns:a16="http://schemas.microsoft.com/office/drawing/2014/main" id="{52D95B39-4184-507F-6CDC-3A9A0D40555D}"/>
+              </a:ext>
+            </a:extLst>
+          </p:cNvPr>
+          <p:cNvCxnSpPr>
+            <a:cxnSpLocks/>
+            <a:stCxn id="99" idx="1"/>
+            <a:endCxn id="98" idx="3"/>
+          </p:cNvCxnSpPr>
+          <p:nvPr/>
+        </p:nvCxnSpPr>
+        <p:spPr>
+          <a:xfrm flipH="1">
+            <a:off x="5414330" y="2587501"/>
+            <a:ext cx="518505" cy="0"/>
+          </a:xfrm>
+          <a:prstGeom prst="straightConnector1">
+            <a:avLst/>
+          </a:prstGeom>
+          <a:ln w="12700">
+            <a:solidFill>
+              <a:schemeClr val="tx1"/>
+            </a:solidFill>
+            <a:headEnd type="arrow"/>
+            <a:tailEnd type="none"/>
+          </a:ln>
+        </p:spPr>
+        <p:style>
+          <a:lnRef idx="1">
+            <a:schemeClr val="accent1"/>
+          </a:lnRef>
+          <a:fillRef idx="0">
+            <a:schemeClr val="accent1"/>
+          </a:fillRef>
+          <a:effectRef idx="0">
+            <a:schemeClr val="accent1"/>
+          </a:effectRef>
+          <a:fontRef idx="minor">
+            <a:schemeClr val="tx1"/>
+          </a:fontRef>
+        </p:style>
+      </p:cxnSp>
+      <p:sp>
+        <p:nvSpPr>
+          <p:cNvPr id="103" name="TextBox 102">
+            <a:extLst>
+              <a:ext uri="{FF2B5EF4-FFF2-40B4-BE49-F238E27FC236}">
+                <a16:creationId xmlns:a16="http://schemas.microsoft.com/office/drawing/2014/main" id="{EB5FCE78-0C7F-DC8A-1BC1-3BE31142800C}"/>
+              </a:ext>
+            </a:extLst>
+          </p:cNvPr>
+          <p:cNvSpPr txBox="1"/>
+          <p:nvPr/>
+        </p:nvSpPr>
+        <p:spPr>
+          <a:xfrm>
+            <a:off x="7069957" y="2427092"/>
+            <a:ext cx="615163" cy="123111"/>
+          </a:xfrm>
+          <a:prstGeom prst="rect">
+            <a:avLst/>
+          </a:prstGeom>
+          <a:noFill/>
+        </p:spPr>
+        <p:txBody>
+          <a:bodyPr wrap="square" lIns="0" tIns="0" rIns="0" bIns="0" rtlCol="0">
+            <a:spAutoFit/>
+          </a:bodyPr>
+          <a:lstStyle/>
+          <a:p>
+            <a:r>
+              <a:rPr lang="en-US" sz="800" dirty="0">
+                <a:solidFill>
+                  <a:srgbClr val="B17ED8"/>
+                </a:solidFill>
+                <a:latin typeface="Adobe Gothic Std B" panose="020B0800000000000000" pitchFamily="34" charset="-128"/>
+                <a:ea typeface="Adobe Gothic Std B" panose="020B0800000000000000" pitchFamily="34" charset="-128"/>
+              </a:rPr>
+              <a:t>QueryPlan</a:t>
+            </a:r>
+          </a:p>
+        </p:txBody>
+      </p:sp>
+      <p:sp>
+        <p:nvSpPr>
+          <p:cNvPr id="104" name="TextBox 103">
+            <a:extLst>
+              <a:ext uri="{FF2B5EF4-FFF2-40B4-BE49-F238E27FC236}">
+                <a16:creationId xmlns:a16="http://schemas.microsoft.com/office/drawing/2014/main" id="{43580DDF-EF18-2F5B-FEF1-4B4FDF01DAA4}"/>
+              </a:ext>
+            </a:extLst>
+          </p:cNvPr>
+          <p:cNvSpPr txBox="1"/>
+          <p:nvPr/>
+        </p:nvSpPr>
+        <p:spPr>
+          <a:xfrm>
+            <a:off x="5514092" y="2427167"/>
+            <a:ext cx="346693" cy="123111"/>
+          </a:xfrm>
+          <a:prstGeom prst="rect">
+            <a:avLst/>
+          </a:prstGeom>
+          <a:noFill/>
+        </p:spPr>
+        <p:txBody>
+          <a:bodyPr wrap="square" lIns="0" tIns="0" rIns="0" bIns="0" rtlCol="0">
+            <a:spAutoFit/>
+          </a:bodyPr>
+          <a:lstStyle/>
+          <a:p>
+            <a:r>
+              <a:rPr lang="en-US" sz="800" dirty="0">
+                <a:solidFill>
+                  <a:srgbClr val="B17ED8"/>
+                </a:solidFill>
+                <a:latin typeface="Adobe Gothic Std B" panose="020B0800000000000000" pitchFamily="34" charset="-128"/>
+                <a:ea typeface="Adobe Gothic Std B" panose="020B0800000000000000" pitchFamily="34" charset="-128"/>
+              </a:rPr>
+              <a:t>Query</a:t>
+            </a:r>
+          </a:p>
+        </p:txBody>
+      </p:sp>
+      <p:cxnSp>
+        <p:nvCxnSpPr>
+          <p:cNvPr id="105" name="Straight Arrow Connector 104">
+            <a:extLst>
+              <a:ext uri="{FF2B5EF4-FFF2-40B4-BE49-F238E27FC236}">
+                <a16:creationId xmlns:a16="http://schemas.microsoft.com/office/drawing/2014/main" id="{C41C8D15-08E1-B59C-AD42-44A99A8B3675}"/>
+              </a:ext>
+            </a:extLst>
+          </p:cNvPr>
+          <p:cNvCxnSpPr>
+            <a:cxnSpLocks/>
+          </p:cNvCxnSpPr>
+          <p:nvPr/>
+        </p:nvCxnSpPr>
+        <p:spPr>
+          <a:xfrm flipH="1">
+            <a:off x="8682157" y="2585880"/>
+            <a:ext cx="584426" cy="0"/>
+          </a:xfrm>
+          <a:prstGeom prst="straightConnector1">
+            <a:avLst/>
+          </a:prstGeom>
+          <a:ln w="12700">
+            <a:solidFill>
+              <a:schemeClr val="tx1"/>
+            </a:solidFill>
+            <a:headEnd type="arrow"/>
+            <a:tailEnd type="none"/>
+          </a:ln>
+        </p:spPr>
+        <p:style>
+          <a:lnRef idx="1">
+            <a:schemeClr val="accent1"/>
+          </a:lnRef>
+          <a:fillRef idx="0">
+            <a:schemeClr val="accent1"/>
+          </a:fillRef>
+          <a:effectRef idx="0">
+            <a:schemeClr val="accent1"/>
+          </a:effectRef>
+          <a:fontRef idx="minor">
+            <a:schemeClr val="tx1"/>
+          </a:fontRef>
+        </p:style>
+      </p:cxnSp>
+      <p:sp>
+        <p:nvSpPr>
+          <p:cNvPr id="106" name="TextBox 105">
+            <a:extLst>
+              <a:ext uri="{FF2B5EF4-FFF2-40B4-BE49-F238E27FC236}">
+                <a16:creationId xmlns:a16="http://schemas.microsoft.com/office/drawing/2014/main" id="{438F6DBD-DA3E-B858-D65A-4EAC4420210F}"/>
+              </a:ext>
+            </a:extLst>
+          </p:cNvPr>
+          <p:cNvSpPr txBox="1"/>
+          <p:nvPr/>
+        </p:nvSpPr>
+        <p:spPr>
+          <a:xfrm>
+            <a:off x="8717025" y="2425471"/>
+            <a:ext cx="615163" cy="123111"/>
+          </a:xfrm>
+          <a:prstGeom prst="rect">
+            <a:avLst/>
+          </a:prstGeom>
+          <a:noFill/>
+        </p:spPr>
+        <p:txBody>
+          <a:bodyPr wrap="square" lIns="0" tIns="0" rIns="0" bIns="0" rtlCol="0">
+            <a:spAutoFit/>
+          </a:bodyPr>
+          <a:lstStyle/>
+          <a:p>
+            <a:r>
+              <a:rPr lang="en-US" sz="800" dirty="0">
+                <a:solidFill>
+                  <a:srgbClr val="B17ED8"/>
+                </a:solidFill>
+                <a:latin typeface="Adobe Gothic Std B" panose="020B0800000000000000" pitchFamily="34" charset="-128"/>
+                <a:ea typeface="Adobe Gothic Std B" panose="020B0800000000000000" pitchFamily="34" charset="-128"/>
+              </a:rPr>
+              <a:t>ResultSet</a:t>
+            </a:r>
+          </a:p>
+        </p:txBody>
+      </p:sp>
+      <p:cxnSp>
+        <p:nvCxnSpPr>
+          <p:cNvPr id="110" name="Straight Arrow Connector 109">
+            <a:extLst>
+              <a:ext uri="{FF2B5EF4-FFF2-40B4-BE49-F238E27FC236}">
+                <a16:creationId xmlns:a16="http://schemas.microsoft.com/office/drawing/2014/main" id="{357D60AF-37F0-18F2-6712-57B5468B443B}"/>
+              </a:ext>
+            </a:extLst>
+          </p:cNvPr>
+          <p:cNvCxnSpPr>
+            <a:cxnSpLocks/>
+          </p:cNvCxnSpPr>
+          <p:nvPr/>
+        </p:nvCxnSpPr>
+        <p:spPr>
+          <a:xfrm>
+            <a:off x="2957787" y="2008600"/>
+            <a:ext cx="1168702" cy="1"/>
+          </a:xfrm>
+          <a:prstGeom prst="straightConnector1">
+            <a:avLst/>
+          </a:prstGeom>
+          <a:ln w="12700">
+            <a:solidFill>
+              <a:schemeClr val="tx1"/>
+            </a:solidFill>
+            <a:headEnd type="arrow"/>
+            <a:tailEnd type="none"/>
+          </a:ln>
+        </p:spPr>
+        <p:style>
+          <a:lnRef idx="1">
+            <a:schemeClr val="accent1"/>
+          </a:lnRef>
+          <a:fillRef idx="0">
+            <a:schemeClr val="accent1"/>
+          </a:fillRef>
+          <a:effectRef idx="0">
+            <a:schemeClr val="accent1"/>
+          </a:effectRef>
+          <a:fontRef idx="minor">
+            <a:schemeClr val="tx1"/>
+          </a:fontRef>
+        </p:style>
+      </p:cxnSp>
+      <p:cxnSp>
+        <p:nvCxnSpPr>
+          <p:cNvPr id="127" name="Straight Arrow Connector 126">
+            <a:extLst>
+              <a:ext uri="{FF2B5EF4-FFF2-40B4-BE49-F238E27FC236}">
+                <a16:creationId xmlns:a16="http://schemas.microsoft.com/office/drawing/2014/main" id="{A9562065-B2DB-5424-8209-2E6AD267DD08}"/>
+              </a:ext>
+            </a:extLst>
+          </p:cNvPr>
+          <p:cNvCxnSpPr>
+            <a:cxnSpLocks/>
+          </p:cNvCxnSpPr>
+          <p:nvPr/>
+        </p:nvCxnSpPr>
+        <p:spPr>
+          <a:xfrm>
+            <a:off x="2957787" y="3196019"/>
+            <a:ext cx="1168702" cy="0"/>
+          </a:xfrm>
+          <a:prstGeom prst="straightConnector1">
+            <a:avLst/>
+          </a:prstGeom>
+          <a:ln w="12700">
+            <a:solidFill>
+              <a:schemeClr val="tx1"/>
+            </a:solidFill>
+            <a:headEnd type="none"/>
+            <a:tailEnd type="arrow"/>
+          </a:ln>
+        </p:spPr>
+        <p:style>
+          <a:lnRef idx="1">
+            <a:schemeClr val="accent1"/>
+          </a:lnRef>
+          <a:fillRef idx="0">
+            <a:schemeClr val="accent1"/>
+          </a:fillRef>
+          <a:effectRef idx="0">
+            <a:schemeClr val="accent1"/>
+          </a:effectRef>
+          <a:fontRef idx="minor">
+            <a:schemeClr val="tx1"/>
+          </a:fontRef>
+        </p:style>
+      </p:cxnSp>
+      <p:sp>
+        <p:nvSpPr>
+          <p:cNvPr id="129" name="TextBox 128">
+            <a:extLst>
+              <a:ext uri="{FF2B5EF4-FFF2-40B4-BE49-F238E27FC236}">
+                <a16:creationId xmlns:a16="http://schemas.microsoft.com/office/drawing/2014/main" id="{C1384186-620F-14A6-A147-03D5B321C543}"/>
+              </a:ext>
+            </a:extLst>
+          </p:cNvPr>
+          <p:cNvSpPr txBox="1"/>
+          <p:nvPr/>
+        </p:nvSpPr>
+        <p:spPr>
+          <a:xfrm>
+            <a:off x="3321095" y="3196019"/>
+            <a:ext cx="503037" cy="338554"/>
+          </a:xfrm>
+          <a:prstGeom prst="rect">
+            <a:avLst/>
+          </a:prstGeom>
+          <a:noFill/>
+        </p:spPr>
+        <p:txBody>
+          <a:bodyPr wrap="square" lIns="0" tIns="0" rIns="0" bIns="0" rtlCol="0">
+            <a:spAutoFit/>
+          </a:bodyPr>
+          <a:lstStyle>
+            <a:defPPr>
+              <a:defRPr lang="en-US"/>
+            </a:defPPr>
+            <a:lvl1pPr algn="r">
+              <a:defRPr sz="1100" i="1"/>
+            </a:lvl1pPr>
+          </a:lstStyle>
+          <a:p>
+            <a:pPr algn="ctr"/>
+            <a:r>
+              <a:rPr lang="en-US" dirty="0"/>
+              <a:t>Query</a:t>
+            </a:r>
+          </a:p>
+          <a:p>
+            <a:pPr algn="ctr"/>
+            <a:r>
+              <a:rPr lang="en-US" dirty="0"/>
+              <a:t>String</a:t>
+            </a:r>
+          </a:p>
+        </p:txBody>
+      </p:sp>
+      <p:sp>
+        <p:nvSpPr>
+          <p:cNvPr id="131" name="Flowchart: Off-page Connector 130">
+            <a:extLst>
+              <a:ext uri="{FF2B5EF4-FFF2-40B4-BE49-F238E27FC236}">
+                <a16:creationId xmlns:a16="http://schemas.microsoft.com/office/drawing/2014/main" id="{326A38D6-2ACC-CD3A-719A-B4C908A9A4AD}"/>
+              </a:ext>
+            </a:extLst>
+          </p:cNvPr>
+          <p:cNvSpPr/>
+          <p:nvPr/>
+        </p:nvSpPr>
+        <p:spPr>
+          <a:xfrm rot="16200000">
+            <a:off x="1621026" y="2892143"/>
+            <a:ext cx="186884" cy="240280"/>
+          </a:xfrm>
+          <a:prstGeom prst="flowChartOffpageConnector">
+            <a:avLst/>
+          </a:prstGeom>
+          <a:solidFill>
+            <a:schemeClr val="accent4">
+              <a:lumMod val="60000"/>
+              <a:lumOff val="40000"/>
+            </a:schemeClr>
+          </a:solidFill>
+        </p:spPr>
+        <p:style>
+          <a:lnRef idx="2">
+            <a:schemeClr val="accent1">
+              <a:shade val="15000"/>
+            </a:schemeClr>
+          </a:lnRef>
+          <a:fillRef idx="1">
+            <a:schemeClr val="accent1"/>
+          </a:fillRef>
+          <a:effectRef idx="0">
+            <a:schemeClr val="accent1"/>
+          </a:effectRef>
+          <a:fontRef idx="minor">
+            <a:schemeClr val="lt1"/>
+          </a:fontRef>
+        </p:style>
+        <p:txBody>
+          <a:bodyPr vert="vert" rtlCol="0" anchor="ctr"/>
+          <a:lstStyle/>
+          <a:p>
+            <a:pPr algn="ctr"/>
+            <a:r>
+              <a:rPr lang="en-US" sz="1400" b="1" dirty="0">
+                <a:solidFill>
+                  <a:schemeClr val="accent4">
+                    <a:lumMod val="75000"/>
+                  </a:schemeClr>
+                </a:solidFill>
+              </a:rPr>
+              <a:t>1</a:t>
+            </a:r>
+          </a:p>
+        </p:txBody>
+      </p:sp>
+      <p:sp>
+        <p:nvSpPr>
+          <p:cNvPr id="133" name="Flowchart: Off-page Connector 132">
+            <a:extLst>
+              <a:ext uri="{FF2B5EF4-FFF2-40B4-BE49-F238E27FC236}">
+                <a16:creationId xmlns:a16="http://schemas.microsoft.com/office/drawing/2014/main" id="{5E639E39-B3A4-01ED-988B-718A368346BE}"/>
+              </a:ext>
+            </a:extLst>
+          </p:cNvPr>
+          <p:cNvSpPr/>
+          <p:nvPr/>
+        </p:nvSpPr>
+        <p:spPr>
+          <a:xfrm rot="16200000">
+            <a:off x="7518123" y="1844331"/>
+            <a:ext cx="186884" cy="210161"/>
+          </a:xfrm>
+          <a:prstGeom prst="flowChartOffpageConnector">
+            <a:avLst/>
+          </a:prstGeom>
+          <a:solidFill>
+            <a:schemeClr val="accent4">
+              <a:lumMod val="60000"/>
+              <a:lumOff val="40000"/>
+            </a:schemeClr>
+          </a:solidFill>
+        </p:spPr>
+        <p:style>
+          <a:lnRef idx="2">
+            <a:schemeClr val="accent1">
+              <a:shade val="15000"/>
+            </a:schemeClr>
+          </a:lnRef>
+          <a:fillRef idx="1">
+            <a:schemeClr val="accent1"/>
+          </a:fillRef>
+          <a:effectRef idx="0">
+            <a:schemeClr val="accent1"/>
+          </a:effectRef>
+          <a:fontRef idx="minor">
+            <a:schemeClr val="lt1"/>
+          </a:fontRef>
+        </p:style>
+        <p:txBody>
+          <a:bodyPr vert="vert" rtlCol="0" anchor="ctr"/>
+          <a:lstStyle/>
+          <a:p>
+            <a:pPr algn="ctr"/>
+            <a:r>
+              <a:rPr lang="en-US" sz="1400" b="1" dirty="0">
+                <a:solidFill>
+                  <a:schemeClr val="accent4">
+                    <a:lumMod val="75000"/>
+                  </a:schemeClr>
+                </a:solidFill>
+              </a:rPr>
+              <a:t>5</a:t>
+            </a:r>
+          </a:p>
+        </p:txBody>
+      </p:sp>
+      <p:sp>
+        <p:nvSpPr>
+          <p:cNvPr id="134" name="Flowchart: Off-page Connector 133">
+            <a:extLst>
+              <a:ext uri="{FF2B5EF4-FFF2-40B4-BE49-F238E27FC236}">
+                <a16:creationId xmlns:a16="http://schemas.microsoft.com/office/drawing/2014/main" id="{F05350B0-5BD2-7A59-7FA5-D942D9417DB4}"/>
+              </a:ext>
+            </a:extLst>
+          </p:cNvPr>
+          <p:cNvSpPr/>
+          <p:nvPr/>
+        </p:nvSpPr>
+        <p:spPr>
+          <a:xfrm rot="16200000">
+            <a:off x="5870446" y="1844331"/>
+            <a:ext cx="186884" cy="210161"/>
+          </a:xfrm>
+          <a:prstGeom prst="flowChartOffpageConnector">
+            <a:avLst/>
+          </a:prstGeom>
+          <a:solidFill>
+            <a:schemeClr val="accent4">
+              <a:lumMod val="60000"/>
+              <a:lumOff val="40000"/>
+            </a:schemeClr>
+          </a:solidFill>
+        </p:spPr>
+        <p:style>
+          <a:lnRef idx="2">
+            <a:schemeClr val="accent1">
+              <a:shade val="15000"/>
+            </a:schemeClr>
+          </a:lnRef>
+          <a:fillRef idx="1">
+            <a:schemeClr val="accent1"/>
+          </a:fillRef>
+          <a:effectRef idx="0">
+            <a:schemeClr val="accent1"/>
+          </a:effectRef>
+          <a:fontRef idx="minor">
+            <a:schemeClr val="lt1"/>
+          </a:fontRef>
+        </p:style>
+        <p:txBody>
+          <a:bodyPr vert="vert" rtlCol="0" anchor="ctr"/>
+          <a:lstStyle/>
+          <a:p>
+            <a:pPr algn="ctr"/>
+            <a:r>
+              <a:rPr lang="en-US" sz="1400" b="1" dirty="0">
+                <a:solidFill>
+                  <a:schemeClr val="accent4">
+                    <a:lumMod val="75000"/>
+                  </a:schemeClr>
+                </a:solidFill>
+              </a:rPr>
+              <a:t>4</a:t>
+            </a:r>
+          </a:p>
+        </p:txBody>
+      </p:sp>
+      <p:sp>
+        <p:nvSpPr>
+          <p:cNvPr id="135" name="Flowchart: Off-page Connector 134">
+            <a:extLst>
+              <a:ext uri="{FF2B5EF4-FFF2-40B4-BE49-F238E27FC236}">
+                <a16:creationId xmlns:a16="http://schemas.microsoft.com/office/drawing/2014/main" id="{9FC44CE4-17CF-A95B-CBF1-1E3607ED01CF}"/>
+              </a:ext>
+            </a:extLst>
+          </p:cNvPr>
+          <p:cNvSpPr/>
+          <p:nvPr/>
+        </p:nvSpPr>
+        <p:spPr>
+          <a:xfrm rot="16200000">
+            <a:off x="4214640" y="1844332"/>
+            <a:ext cx="186884" cy="210161"/>
+          </a:xfrm>
+          <a:prstGeom prst="flowChartOffpageConnector">
+            <a:avLst/>
+          </a:prstGeom>
+          <a:solidFill>
+            <a:schemeClr val="accent4">
+              <a:lumMod val="60000"/>
+              <a:lumOff val="40000"/>
+            </a:schemeClr>
+          </a:solidFill>
+        </p:spPr>
+        <p:style>
+          <a:lnRef idx="2">
+            <a:schemeClr val="accent1">
+              <a:shade val="15000"/>
+            </a:schemeClr>
+          </a:lnRef>
+          <a:fillRef idx="1">
+            <a:schemeClr val="accent1"/>
+          </a:fillRef>
+          <a:effectRef idx="0">
+            <a:schemeClr val="accent1"/>
+          </a:effectRef>
+          <a:fontRef idx="minor">
+            <a:schemeClr val="lt1"/>
+          </a:fontRef>
+        </p:style>
+        <p:txBody>
+          <a:bodyPr vert="vert" rtlCol="0" anchor="ctr"/>
+          <a:lstStyle/>
+          <a:p>
+            <a:pPr algn="ctr"/>
+            <a:r>
+              <a:rPr lang="en-US" sz="1400" b="1" dirty="0">
+                <a:solidFill>
+                  <a:schemeClr val="accent4">
+                    <a:lumMod val="75000"/>
+                  </a:schemeClr>
+                </a:solidFill>
+              </a:rPr>
+              <a:t>3</a:t>
+            </a:r>
+          </a:p>
+        </p:txBody>
+      </p:sp>
+      <p:sp>
+        <p:nvSpPr>
+          <p:cNvPr id="137" name="Flowchart: Off-page Connector 136">
+            <a:extLst>
+              <a:ext uri="{FF2B5EF4-FFF2-40B4-BE49-F238E27FC236}">
+                <a16:creationId xmlns:a16="http://schemas.microsoft.com/office/drawing/2014/main" id="{5ABECD12-6462-9C9C-9279-3CBD2EDAE57E}"/>
+              </a:ext>
+            </a:extLst>
+          </p:cNvPr>
+          <p:cNvSpPr/>
+          <p:nvPr/>
+        </p:nvSpPr>
+        <p:spPr>
+          <a:xfrm>
+            <a:off x="3479171" y="1268120"/>
+            <a:ext cx="186884" cy="210161"/>
+          </a:xfrm>
+          <a:prstGeom prst="flowChartOffpageConnector">
+            <a:avLst/>
+          </a:prstGeom>
+          <a:solidFill>
+            <a:schemeClr val="accent4">
+              <a:lumMod val="60000"/>
+              <a:lumOff val="40000"/>
+            </a:schemeClr>
+          </a:solidFill>
+        </p:spPr>
+        <p:style>
+          <a:lnRef idx="2">
+            <a:schemeClr val="accent1">
+              <a:shade val="15000"/>
+            </a:schemeClr>
+          </a:lnRef>
+          <a:fillRef idx="1">
+            <a:schemeClr val="accent1"/>
+          </a:fillRef>
+          <a:effectRef idx="0">
+            <a:schemeClr val="accent1"/>
+          </a:effectRef>
+          <a:fontRef idx="minor">
+            <a:schemeClr val="lt1"/>
+          </a:fontRef>
+        </p:style>
+        <p:txBody>
+          <a:bodyPr vert="horz" rtlCol="0" anchor="ctr"/>
           <a:lstStyle/>
           <a:p>
             <a:pPr algn="ctr"/>
@@ -9397,10 +10843,10 @@
       </p:sp>
       <p:sp>
         <p:nvSpPr>
-          <p:cNvPr id="7" name="Rectangle 6">
-            <a:extLst>
-              <a:ext uri="{FF2B5EF4-FFF2-40B4-BE49-F238E27FC236}">
-                <a16:creationId xmlns:a16="http://schemas.microsoft.com/office/drawing/2014/main" id="{20F24B60-2905-0E09-E718-C84C2BFDB1B3}"/>
+          <p:cNvPr id="154" name="Flowchart: Off-page Connector 153">
+            <a:extLst>
+              <a:ext uri="{FF2B5EF4-FFF2-40B4-BE49-F238E27FC236}">
+                <a16:creationId xmlns:a16="http://schemas.microsoft.com/office/drawing/2014/main" id="{E85C4C68-30E6-2816-1340-D29C5B1FD405}"/>
               </a:ext>
             </a:extLst>
           </p:cNvPr>
@@ -9408,228 +10854,8 @@
           <p:nvPr/>
         </p:nvSpPr>
         <p:spPr>
-          <a:xfrm>
-            <a:off x="3865914" y="746390"/>
-            <a:ext cx="122599" cy="2248872"/>
-          </a:xfrm>
-          <a:prstGeom prst="rect">
-            <a:avLst/>
-          </a:prstGeom>
-          <a:solidFill>
-            <a:schemeClr val="bg1">
-              <a:lumMod val="65000"/>
-            </a:schemeClr>
-          </a:solidFill>
-        </p:spPr>
-        <p:style>
-          <a:lnRef idx="2">
-            <a:schemeClr val="accent1">
-              <a:shade val="15000"/>
-            </a:schemeClr>
-          </a:lnRef>
-          <a:fillRef idx="1">
-            <a:schemeClr val="accent1"/>
-          </a:fillRef>
-          <a:effectRef idx="0">
-            <a:schemeClr val="accent1"/>
-          </a:effectRef>
-          <a:fontRef idx="minor">
-            <a:schemeClr val="lt1"/>
-          </a:fontRef>
-        </p:style>
-        <p:txBody>
-          <a:bodyPr lIns="0" tIns="0" rIns="0" bIns="0" rtlCol="0" anchor="ctr"/>
-          <a:lstStyle/>
-          <a:p>
-            <a:pPr algn="ctr"/>
-            <a:r>
-              <a:rPr lang="en-US" sz="1200" dirty="0"/>
-              <a:t>HTTP</a:t>
-            </a:r>
-            <a:endParaRPr lang="en-US" sz="500" dirty="0"/>
-          </a:p>
-        </p:txBody>
-      </p:sp>
-      <p:sp>
-        <p:nvSpPr>
-          <p:cNvPr id="143" name="Rectangle 142">
-            <a:extLst>
-              <a:ext uri="{FF2B5EF4-FFF2-40B4-BE49-F238E27FC236}">
-                <a16:creationId xmlns:a16="http://schemas.microsoft.com/office/drawing/2014/main" id="{38DEB2BA-D85C-50E6-40BC-A6CD7A7ADEEE}"/>
-              </a:ext>
-            </a:extLst>
-          </p:cNvPr>
-          <p:cNvSpPr/>
-          <p:nvPr/>
-        </p:nvSpPr>
-        <p:spPr>
-          <a:xfrm>
-            <a:off x="7673781" y="829460"/>
-            <a:ext cx="1022504" cy="1367591"/>
-          </a:xfrm>
-          <a:prstGeom prst="rect">
-            <a:avLst/>
-          </a:prstGeom>
-          <a:solidFill>
-            <a:srgbClr val="7030A0"/>
-          </a:solidFill>
-        </p:spPr>
-        <p:style>
-          <a:lnRef idx="2">
-            <a:schemeClr val="accent1">
-              <a:shade val="15000"/>
-            </a:schemeClr>
-          </a:lnRef>
-          <a:fillRef idx="1">
-            <a:schemeClr val="accent1"/>
-          </a:fillRef>
-          <a:effectRef idx="0">
-            <a:schemeClr val="accent1"/>
-          </a:effectRef>
-          <a:fontRef idx="minor">
-            <a:schemeClr val="lt1"/>
-          </a:fontRef>
-        </p:style>
-        <p:txBody>
-          <a:bodyPr lIns="0" tIns="0" rIns="0" bIns="0" rtlCol="0" anchor="ctr"/>
-          <a:lstStyle/>
-          <a:p>
-            <a:pPr algn="ctr"/>
-            <a:r>
-              <a:rPr lang="en-US" sz="1600" dirty="0"/>
-              <a:t>Presenter</a:t>
-            </a:r>
-            <a:endParaRPr lang="en-US" sz="1400" dirty="0"/>
-          </a:p>
-          <a:p>
-            <a:pPr algn="ctr"/>
-            <a:r>
-              <a:rPr lang="en-US" sz="1100" u="sng" dirty="0"/>
-              <a:t>app/presenter/</a:t>
-            </a:r>
-          </a:p>
-          <a:p>
-            <a:pPr algn="ctr"/>
-            <a:endParaRPr lang="en-US" sz="800" dirty="0"/>
-          </a:p>
-          <a:p>
-            <a:pPr algn="ctr"/>
-            <a:r>
-              <a:rPr lang="en-US" sz="800" dirty="0"/>
-              <a:t>Formats any query result into proper format for display</a:t>
-            </a:r>
-          </a:p>
-        </p:txBody>
-      </p:sp>
-      <p:cxnSp>
-        <p:nvCxnSpPr>
-          <p:cNvPr id="145" name="Connector: Elbow 144">
-            <a:extLst>
-              <a:ext uri="{FF2B5EF4-FFF2-40B4-BE49-F238E27FC236}">
-                <a16:creationId xmlns:a16="http://schemas.microsoft.com/office/drawing/2014/main" id="{A6A16BBE-2B6E-7F70-B4BE-7034BADC2191}"/>
-              </a:ext>
-            </a:extLst>
-          </p:cNvPr>
-          <p:cNvCxnSpPr>
-            <a:cxnSpLocks/>
-            <a:endCxn id="9" idx="1"/>
-          </p:cNvCxnSpPr>
-          <p:nvPr/>
-        </p:nvCxnSpPr>
-        <p:spPr>
-          <a:xfrm>
-            <a:off x="5781341" y="2287715"/>
-            <a:ext cx="1967383" cy="1119533"/>
-          </a:xfrm>
-          <a:prstGeom prst="bentConnector3">
-            <a:avLst>
-              <a:gd name="adj1" fmla="val 50000"/>
-            </a:avLst>
-          </a:prstGeom>
-          <a:ln w="12700">
-            <a:solidFill>
-              <a:schemeClr val="tx1"/>
-            </a:solidFill>
-            <a:headEnd type="none"/>
-            <a:tailEnd type="arrow"/>
-          </a:ln>
-        </p:spPr>
-        <p:style>
-          <a:lnRef idx="1">
-            <a:schemeClr val="accent1"/>
-          </a:lnRef>
-          <a:fillRef idx="0">
-            <a:schemeClr val="accent1"/>
-          </a:fillRef>
-          <a:effectRef idx="0">
-            <a:schemeClr val="accent1"/>
-          </a:effectRef>
-          <a:fontRef idx="minor">
-            <a:schemeClr val="tx1"/>
-          </a:fontRef>
-        </p:style>
-      </p:cxnSp>
-      <p:cxnSp>
-        <p:nvCxnSpPr>
-          <p:cNvPr id="146" name="Straight Arrow Connector 145">
-            <a:extLst>
-              <a:ext uri="{FF2B5EF4-FFF2-40B4-BE49-F238E27FC236}">
-                <a16:creationId xmlns:a16="http://schemas.microsoft.com/office/drawing/2014/main" id="{7B9890BF-AA75-9B52-CA47-20B28D8B417A}"/>
-              </a:ext>
-            </a:extLst>
-          </p:cNvPr>
-          <p:cNvCxnSpPr>
-            <a:cxnSpLocks/>
-            <a:endCxn id="143" idx="1"/>
-          </p:cNvCxnSpPr>
-          <p:nvPr/>
-        </p:nvCxnSpPr>
-        <p:spPr>
-          <a:xfrm>
-            <a:off x="5781341" y="1513255"/>
-            <a:ext cx="1892440" cy="1"/>
-          </a:xfrm>
-          <a:prstGeom prst="straightConnector1">
-            <a:avLst/>
-          </a:prstGeom>
-          <a:ln w="12700">
-            <a:solidFill>
-              <a:schemeClr val="tx1"/>
-            </a:solidFill>
-            <a:headEnd type="arrow"/>
-            <a:tailEnd type="none"/>
-          </a:ln>
-        </p:spPr>
-        <p:style>
-          <a:lnRef idx="1">
-            <a:schemeClr val="accent1"/>
-          </a:lnRef>
-          <a:fillRef idx="0">
-            <a:schemeClr val="accent1"/>
-          </a:fillRef>
-          <a:effectRef idx="0">
-            <a:schemeClr val="accent1"/>
-          </a:effectRef>
-          <a:fontRef idx="minor">
-            <a:schemeClr val="tx1"/>
-          </a:fontRef>
-        </p:style>
-      </p:cxnSp>
-      <p:sp>
-        <p:nvSpPr>
-          <p:cNvPr id="154" name="Flowchart: Off-page Connector 153">
-            <a:extLst>
-              <a:ext uri="{FF2B5EF4-FFF2-40B4-BE49-F238E27FC236}">
-                <a16:creationId xmlns:a16="http://schemas.microsoft.com/office/drawing/2014/main" id="{A3D4D619-1AF9-A9AD-A963-8280C6167FD0}"/>
-              </a:ext>
-            </a:extLst>
-          </p:cNvPr>
-          <p:cNvSpPr/>
-          <p:nvPr/>
-        </p:nvSpPr>
-        <p:spPr>
           <a:xfrm rot="16200000">
-            <a:off x="7427288" y="934318"/>
+            <a:off x="9192071" y="1844331"/>
             <a:ext cx="186884" cy="210161"/>
           </a:xfrm>
           <a:prstGeom prst="flowChartOffpageConnector">
@@ -9678,96 +10904,10 @@
       </p:sp>
       <p:sp>
         <p:nvSpPr>
-          <p:cNvPr id="165" name="TextBox 164">
-            <a:extLst>
-              <a:ext uri="{FF2B5EF4-FFF2-40B4-BE49-F238E27FC236}">
-                <a16:creationId xmlns:a16="http://schemas.microsoft.com/office/drawing/2014/main" id="{505832D6-FBC7-265D-705F-64A8EB21D9EC}"/>
-              </a:ext>
-            </a:extLst>
-          </p:cNvPr>
-          <p:cNvSpPr txBox="1"/>
-          <p:nvPr/>
-        </p:nvSpPr>
-        <p:spPr>
-          <a:xfrm>
-            <a:off x="6187329" y="1297875"/>
-            <a:ext cx="816496" cy="161583"/>
-          </a:xfrm>
-          <a:prstGeom prst="rect">
-            <a:avLst/>
-          </a:prstGeom>
-          <a:noFill/>
-        </p:spPr>
-        <p:txBody>
-          <a:bodyPr wrap="square" lIns="0" tIns="0" rIns="0" bIns="0" rtlCol="0">
-            <a:spAutoFit/>
-          </a:bodyPr>
-          <a:lstStyle/>
-          <a:p>
-            <a:r>
-              <a:rPr lang="en-US" sz="1050" dirty="0">
-                <a:solidFill>
-                  <a:srgbClr val="B17ED8"/>
-                </a:solidFill>
-                <a:latin typeface="Adobe Gothic Std B" panose="020B0800000000000000" pitchFamily="34" charset="-128"/>
-                <a:ea typeface="Adobe Gothic Std B" panose="020B0800000000000000" pitchFamily="34" charset="-128"/>
-              </a:rPr>
-              <a:t>AnswerView</a:t>
-            </a:r>
-          </a:p>
-        </p:txBody>
-      </p:sp>
-      <p:cxnSp>
-        <p:nvCxnSpPr>
-          <p:cNvPr id="166" name="Straight Arrow Connector 165">
-            <a:extLst>
-              <a:ext uri="{FF2B5EF4-FFF2-40B4-BE49-F238E27FC236}">
-                <a16:creationId xmlns:a16="http://schemas.microsoft.com/office/drawing/2014/main" id="{CFFBE3C2-AC0C-258A-4C4D-A6CFE921302D}"/>
-              </a:ext>
-            </a:extLst>
-          </p:cNvPr>
-          <p:cNvCxnSpPr>
-            <a:cxnSpLocks/>
-          </p:cNvCxnSpPr>
-          <p:nvPr/>
-        </p:nvCxnSpPr>
-        <p:spPr>
-          <a:xfrm flipH="1">
-            <a:off x="8451201" y="2197051"/>
-            <a:ext cx="1627" cy="384793"/>
-          </a:xfrm>
-          <a:prstGeom prst="straightConnector1">
-            <a:avLst/>
-          </a:prstGeom>
-          <a:ln w="12700">
-            <a:solidFill>
-              <a:schemeClr val="tx1"/>
-            </a:solidFill>
-            <a:headEnd type="arrow"/>
-            <a:tailEnd type="none"/>
-          </a:ln>
-        </p:spPr>
-        <p:style>
-          <a:lnRef idx="1">
-            <a:schemeClr val="accent1"/>
-          </a:lnRef>
-          <a:fillRef idx="0">
-            <a:schemeClr val="accent1"/>
-          </a:fillRef>
-          <a:effectRef idx="0">
-            <a:schemeClr val="accent1"/>
-          </a:effectRef>
-          <a:fontRef idx="minor">
-            <a:schemeClr val="tx1"/>
-          </a:fontRef>
-        </p:style>
-      </p:cxnSp>
-      <p:sp>
-        <p:nvSpPr>
-          <p:cNvPr id="183" name="Rectangle 182">
-            <a:extLst>
-              <a:ext uri="{FF2B5EF4-FFF2-40B4-BE49-F238E27FC236}">
-                <a16:creationId xmlns:a16="http://schemas.microsoft.com/office/drawing/2014/main" id="{D43E0C22-7646-FF2D-BCA6-8C88A2D3837F}"/>
+          <p:cNvPr id="170" name="Flowchart: Off-page Connector 169">
+            <a:extLst>
+              <a:ext uri="{FF2B5EF4-FFF2-40B4-BE49-F238E27FC236}">
+                <a16:creationId xmlns:a16="http://schemas.microsoft.com/office/drawing/2014/main" id="{F0F81F5A-6138-7379-514D-1EC2C93DE62E}"/>
               </a:ext>
             </a:extLst>
           </p:cNvPr>
@@ -9776,14 +10916,17 @@
         </p:nvSpPr>
         <p:spPr>
           <a:xfrm>
-            <a:off x="4684549" y="3098801"/>
-            <a:ext cx="998858" cy="1276986"/>
-          </a:xfrm>
-          <a:prstGeom prst="rect">
+            <a:off x="553758" y="1694983"/>
+            <a:ext cx="186884" cy="210161"/>
+          </a:xfrm>
+          <a:prstGeom prst="flowChartOffpageConnector">
             <a:avLst/>
           </a:prstGeom>
           <a:solidFill>
-            <a:srgbClr val="F7A5A5"/>
+            <a:schemeClr val="accent4">
+              <a:lumMod val="60000"/>
+              <a:lumOff val="40000"/>
+            </a:schemeClr>
           </a:solidFill>
         </p:spPr>
         <p:style>
@@ -9803,221 +10946,80 @@
           </a:fontRef>
         </p:style>
         <p:txBody>
-          <a:bodyPr lIns="45720" tIns="45720" rIns="0" bIns="0" rtlCol="0" anchor="t"/>
-          <a:lstStyle/>
-          <a:p>
-            <a:pPr algn="ctr"/>
-            <a:r>
-              <a:rPr lang="en-US" sz="1100" dirty="0"/>
-              <a:t>🛢️</a:t>
-            </a:r>
-            <a:r>
-              <a:rPr lang="en-US" sz="900" b="1" dirty="0"/>
-              <a:t> </a:t>
-            </a:r>
-            <a:r>
-              <a:rPr lang="en-US" sz="1200" b="1" dirty="0"/>
-              <a:t>DB</a:t>
-            </a:r>
-          </a:p>
-          <a:p>
-            <a:pPr marL="171450" indent="-91440">
-              <a:buFont typeface="Arial" panose="020B0604020202020204" pitchFamily="34" charset="0"/>
-              <a:buChar char="•"/>
-            </a:pPr>
-            <a:r>
-              <a:rPr lang="en-US" sz="900" dirty="0"/>
-              <a:t>user</a:t>
-            </a:r>
-          </a:p>
-          <a:p>
-            <a:pPr marL="171450" indent="-91440">
-              <a:buFont typeface="Arial" panose="020B0604020202020204" pitchFamily="34" charset="0"/>
-              <a:buChar char="•"/>
-            </a:pPr>
-            <a:r>
-              <a:rPr lang="en-US" sz="900" dirty="0"/>
-              <a:t>oauth_account</a:t>
-            </a:r>
-          </a:p>
-          <a:p>
-            <a:pPr marL="171450" indent="-91440">
-              <a:buFont typeface="Arial" panose="020B0604020202020204" pitchFamily="34" charset="0"/>
-              <a:buChar char="•"/>
-            </a:pPr>
-            <a:r>
-              <a:rPr lang="en-US" sz="900" dirty="0"/>
-              <a:t>access_token</a:t>
-            </a:r>
-          </a:p>
-          <a:p>
-            <a:pPr marL="171450" indent="-91440">
-              <a:buFont typeface="Arial" panose="020B0604020202020204" pitchFamily="34" charset="0"/>
-              <a:buChar char="•"/>
-            </a:pPr>
-            <a:r>
-              <a:rPr lang="en-US" sz="900" dirty="0"/>
-              <a:t>invite</a:t>
-            </a:r>
-          </a:p>
-          <a:p>
-            <a:pPr marL="171450" indent="-91440">
-              <a:buFont typeface="Arial" panose="020B0604020202020204" pitchFamily="34" charset="0"/>
-              <a:buChar char="•"/>
-            </a:pPr>
-            <a:r>
-              <a:rPr lang="en-US" sz="900" dirty="0"/>
-              <a:t>conversation</a:t>
-            </a:r>
-          </a:p>
-          <a:p>
-            <a:pPr marL="171450" indent="-91440">
-              <a:buFont typeface="Arial" panose="020B0604020202020204" pitchFamily="34" charset="0"/>
-              <a:buChar char="•"/>
-            </a:pPr>
-            <a:r>
-              <a:rPr lang="en-US" sz="900" dirty="0"/>
-              <a:t>job</a:t>
-            </a:r>
-          </a:p>
-          <a:p>
-            <a:pPr marL="171450" indent="-91440">
-              <a:buFont typeface="Arial" panose="020B0604020202020204" pitchFamily="34" charset="0"/>
-              <a:buChar char="•"/>
-            </a:pPr>
-            <a:r>
-              <a:rPr lang="en-US" sz="900" dirty="0"/>
-              <a:t>job_trace</a:t>
-            </a:r>
-          </a:p>
-        </p:txBody>
-      </p:sp>
-      <p:cxnSp>
-        <p:nvCxnSpPr>
-          <p:cNvPr id="185" name="Straight Arrow Connector 184">
-            <a:extLst>
-              <a:ext uri="{FF2B5EF4-FFF2-40B4-BE49-F238E27FC236}">
-                <a16:creationId xmlns:a16="http://schemas.microsoft.com/office/drawing/2014/main" id="{055BC9F6-8C0A-8440-8CB2-B3B3E5CAD35D}"/>
-              </a:ext>
-            </a:extLst>
-          </p:cNvPr>
-          <p:cNvCxnSpPr>
-            <a:cxnSpLocks/>
-            <a:stCxn id="8" idx="2"/>
-            <a:endCxn id="183" idx="0"/>
-          </p:cNvCxnSpPr>
-          <p:nvPr/>
-        </p:nvCxnSpPr>
-        <p:spPr>
-          <a:xfrm>
-            <a:off x="5183978" y="2720551"/>
-            <a:ext cx="0" cy="378250"/>
-          </a:xfrm>
-          <a:prstGeom prst="straightConnector1">
-            <a:avLst/>
-          </a:prstGeom>
-          <a:ln w="12700">
-            <a:solidFill>
-              <a:schemeClr val="tx1"/>
-            </a:solidFill>
-            <a:prstDash val="dash"/>
-            <a:headEnd type="arrow"/>
-            <a:tailEnd type="arrow"/>
-          </a:ln>
+          <a:bodyPr vert="horz" rtlCol="0" anchor="ctr"/>
+          <a:lstStyle/>
+          <a:p>
+            <a:pPr algn="ctr"/>
+            <a:r>
+              <a:rPr lang="en-US" sz="1400" b="1" dirty="0">
+                <a:solidFill>
+                  <a:schemeClr val="accent4">
+                    <a:lumMod val="75000"/>
+                  </a:schemeClr>
+                </a:solidFill>
+              </a:rPr>
+              <a:t>8</a:t>
+            </a:r>
+          </a:p>
+        </p:txBody>
+      </p:sp>
+      <p:sp>
+        <p:nvSpPr>
+          <p:cNvPr id="171" name="Flowchart: Off-page Connector 170">
+            <a:extLst>
+              <a:ext uri="{FF2B5EF4-FFF2-40B4-BE49-F238E27FC236}">
+                <a16:creationId xmlns:a16="http://schemas.microsoft.com/office/drawing/2014/main" id="{14306686-A043-2F61-D21D-D555F01B689C}"/>
+              </a:ext>
+            </a:extLst>
+          </p:cNvPr>
+          <p:cNvSpPr/>
+          <p:nvPr/>
+        </p:nvSpPr>
+        <p:spPr>
+          <a:xfrm>
+            <a:off x="3479171" y="2955615"/>
+            <a:ext cx="186884" cy="210161"/>
+          </a:xfrm>
+          <a:prstGeom prst="flowChartOffpageConnector">
+            <a:avLst/>
+          </a:prstGeom>
+          <a:solidFill>
+            <a:schemeClr val="accent4">
+              <a:lumMod val="60000"/>
+              <a:lumOff val="40000"/>
+            </a:schemeClr>
+          </a:solidFill>
         </p:spPr>
         <p:style>
-          <a:lnRef idx="1">
-            <a:schemeClr val="accent1"/>
+          <a:lnRef idx="2">
+            <a:schemeClr val="accent1">
+              <a:shade val="15000"/>
+            </a:schemeClr>
           </a:lnRef>
-          <a:fillRef idx="0">
+          <a:fillRef idx="1">
             <a:schemeClr val="accent1"/>
           </a:fillRef>
           <a:effectRef idx="0">
             <a:schemeClr val="accent1"/>
           </a:effectRef>
           <a:fontRef idx="minor">
-            <a:schemeClr val="tx1"/>
+            <a:schemeClr val="lt1"/>
           </a:fontRef>
         </p:style>
-      </p:cxnSp>
-      <p:sp>
-        <p:nvSpPr>
-          <p:cNvPr id="189" name="TextBox 188">
-            <a:extLst>
-              <a:ext uri="{FF2B5EF4-FFF2-40B4-BE49-F238E27FC236}">
-                <a16:creationId xmlns:a16="http://schemas.microsoft.com/office/drawing/2014/main" id="{5D7D4E3B-7177-E706-D8D1-F7B7B8B72474}"/>
-              </a:ext>
-            </a:extLst>
-          </p:cNvPr>
-          <p:cNvSpPr txBox="1"/>
-          <p:nvPr/>
-        </p:nvSpPr>
-        <p:spPr>
-          <a:xfrm>
-            <a:off x="10273715" y="3265564"/>
-            <a:ext cx="615163" cy="123111"/>
-          </a:xfrm>
-          <a:prstGeom prst="rect">
-            <a:avLst/>
-          </a:prstGeom>
-          <a:noFill/>
-        </p:spPr>
-        <p:txBody>
-          <a:bodyPr wrap="square" lIns="0" tIns="0" rIns="0" bIns="0" rtlCol="0">
-            <a:spAutoFit/>
-          </a:bodyPr>
-          <a:lstStyle/>
-          <a:p>
-            <a:r>
-              <a:rPr lang="en-US" sz="800" dirty="0">
+        <p:txBody>
+          <a:bodyPr vert="horz" rtlCol="0" anchor="ctr"/>
+          <a:lstStyle/>
+          <a:p>
+            <a:pPr algn="ctr"/>
+            <a:r>
+              <a:rPr lang="en-US" sz="1400" b="1" dirty="0">
                 <a:solidFill>
-                  <a:srgbClr val="B17ED8"/>
+                  <a:schemeClr val="accent4">
+                    <a:lumMod val="75000"/>
+                  </a:schemeClr>
                 </a:solidFill>
-                <a:latin typeface="Adobe Gothic Std B" panose="020B0800000000000000" pitchFamily="34" charset="-128"/>
-                <a:ea typeface="Adobe Gothic Std B" panose="020B0800000000000000" pitchFamily="34" charset="-128"/>
               </a:rPr>
-              <a:t>QueryPlan</a:t>
-            </a:r>
-          </a:p>
-        </p:txBody>
-      </p:sp>
-      <p:sp>
-        <p:nvSpPr>
-          <p:cNvPr id="3" name="TextBox 2">
-            <a:extLst>
-              <a:ext uri="{FF2B5EF4-FFF2-40B4-BE49-F238E27FC236}">
-                <a16:creationId xmlns:a16="http://schemas.microsoft.com/office/drawing/2014/main" id="{4FF3AF5F-2767-8959-DD92-DEA8FE731543}"/>
-              </a:ext>
-            </a:extLst>
-          </p:cNvPr>
-          <p:cNvSpPr txBox="1"/>
-          <p:nvPr/>
-        </p:nvSpPr>
-        <p:spPr>
-          <a:xfrm>
-            <a:off x="8717850" y="3265639"/>
-            <a:ext cx="346693" cy="123111"/>
-          </a:xfrm>
-          <a:prstGeom prst="rect">
-            <a:avLst/>
-          </a:prstGeom>
-          <a:noFill/>
-        </p:spPr>
-        <p:txBody>
-          <a:bodyPr wrap="square" lIns="0" tIns="0" rIns="0" bIns="0" rtlCol="0">
-            <a:spAutoFit/>
-          </a:bodyPr>
-          <a:lstStyle/>
-          <a:p>
-            <a:r>
-              <a:rPr lang="en-US" sz="800" dirty="0">
-                <a:solidFill>
-                  <a:srgbClr val="B17ED8"/>
-                </a:solidFill>
-                <a:latin typeface="Adobe Gothic Std B" panose="020B0800000000000000" pitchFamily="34" charset="-128"/>
-                <a:ea typeface="Adobe Gothic Std B" panose="020B0800000000000000" pitchFamily="34" charset="-128"/>
-              </a:rPr>
-              <a:t>Query</a:t>
+              <a:t>2</a:t>
             </a:r>
           </a:p>
         </p:txBody>
@@ -10025,7 +11027,7 @@
     </p:spTree>
     <p:extLst>
       <p:ext uri="{BB962C8B-B14F-4D97-AF65-F5344CB8AC3E}">
-        <p14:creationId xmlns:p14="http://schemas.microsoft.com/office/powerpoint/2010/main" val="3238737500"/>
+        <p14:creationId xmlns:p14="http://schemas.microsoft.com/office/powerpoint/2010/main" val="2019995292"/>
       </p:ext>
     </p:extLst>
   </p:cSld>

--- a/Project and Tool Layout.pptx
+++ b/Project and Tool Layout.pptx
@@ -6,8 +6,10 @@
   </p:sldMasterIdLst>
   <p:sldIdLst>
     <p:sldId id="256" r:id="rId2"/>
-    <p:sldId id="258" r:id="rId3"/>
+    <p:sldId id="262" r:id="rId3"/>
     <p:sldId id="259" r:id="rId4"/>
+    <p:sldId id="261" r:id="rId5"/>
+    <p:sldId id="263" r:id="rId6"/>
   </p:sldIdLst>
   <p:sldSz cx="12192000" cy="6858000"/>
   <p:notesSz cx="6858000" cy="9144000"/>
@@ -7049,7 +7051,7 @@
         <p:cNvPr id="1" name="">
           <a:extLst>
             <a:ext uri="{FF2B5EF4-FFF2-40B4-BE49-F238E27FC236}">
-              <a16:creationId xmlns:a16="http://schemas.microsoft.com/office/drawing/2014/main" id="{232DE0EE-A8BD-8F30-7418-87BB25146CDB}"/>
+              <a16:creationId xmlns:a16="http://schemas.microsoft.com/office/drawing/2014/main" id="{368AEC65-3B98-6345-4C16-ED19647360A8}"/>
             </a:ext>
           </a:extLst>
         </p:cNvPr>
@@ -7066,10 +7068,10 @@
       </p:grpSpPr>
       <p:sp>
         <p:nvSpPr>
-          <p:cNvPr id="16" name="Rectangle 15">
-            <a:extLst>
-              <a:ext uri="{FF2B5EF4-FFF2-40B4-BE49-F238E27FC236}">
-                <a16:creationId xmlns:a16="http://schemas.microsoft.com/office/drawing/2014/main" id="{1AEE394A-9CF7-8092-C774-EE074321C810}"/>
+          <p:cNvPr id="26" name="Rectangle 25">
+            <a:extLst>
+              <a:ext uri="{FF2B5EF4-FFF2-40B4-BE49-F238E27FC236}">
+                <a16:creationId xmlns:a16="http://schemas.microsoft.com/office/drawing/2014/main" id="{0182A2C5-7A73-3DB2-4DD1-197E91DF6C5B}"/>
               </a:ext>
             </a:extLst>
           </p:cNvPr>
@@ -7078,8 +7080,8 @@
         </p:nvSpPr>
         <p:spPr>
           <a:xfrm>
-            <a:off x="4363385" y="4022191"/>
-            <a:ext cx="1054194" cy="1650802"/>
+            <a:off x="4190128" y="3952550"/>
+            <a:ext cx="1361961" cy="1950232"/>
           </a:xfrm>
           <a:prstGeom prst="rect">
             <a:avLst/>
@@ -7114,7 +7116,14 @@
             <a:pPr algn="ctr"/>
             <a:r>
               <a:rPr lang="en-US" sz="900" b="1" dirty="0"/>
-              <a:t>🐳</a:t>
+              <a:t>🐳 Docker Container</a:t>
+            </a:r>
+          </a:p>
+          <a:p>
+            <a:pPr algn="ctr"/>
+            <a:r>
+              <a:rPr lang="en-US" sz="900" i="1" dirty="0"/>
+              <a:t>“caddy:alpine”</a:t>
             </a:r>
           </a:p>
           <a:p>
@@ -7125,10 +7134,10 @@
       </p:sp>
       <p:sp>
         <p:nvSpPr>
-          <p:cNvPr id="70" name="Rectangle 69">
-            <a:extLst>
-              <a:ext uri="{FF2B5EF4-FFF2-40B4-BE49-F238E27FC236}">
-                <a16:creationId xmlns:a16="http://schemas.microsoft.com/office/drawing/2014/main" id="{BFB9CE4D-708B-E48E-981B-EFC68A40D09E}"/>
+          <p:cNvPr id="16" name="Rectangle 15">
+            <a:extLst>
+              <a:ext uri="{FF2B5EF4-FFF2-40B4-BE49-F238E27FC236}">
+                <a16:creationId xmlns:a16="http://schemas.microsoft.com/office/drawing/2014/main" id="{6D5D0154-9275-7858-6C49-C800DB167249}"/>
               </a:ext>
             </a:extLst>
           </p:cNvPr>
@@ -7137,8 +7146,8 @@
         </p:nvSpPr>
         <p:spPr>
           <a:xfrm>
-            <a:off x="3991324" y="1019045"/>
-            <a:ext cx="3582830" cy="2525089"/>
+            <a:off x="7999996" y="1319396"/>
+            <a:ext cx="1204074" cy="1313244"/>
           </a:xfrm>
           <a:prstGeom prst="rect">
             <a:avLst/>
@@ -7167,34 +7176,25 @@
           </a:fontRef>
         </p:style>
         <p:txBody>
-          <a:bodyPr lIns="0" tIns="45720" rIns="0" bIns="0" rtlCol="0" anchor="t"/>
-          <a:lstStyle/>
-          <a:p>
-            <a:pPr algn="ctr"/>
+          <a:bodyPr lIns="0" tIns="45720" rIns="0" bIns="0" rtlCol="0" anchor="ctr"/>
+          <a:lstStyle/>
+          <a:p>
             <a:r>
               <a:rPr lang="en-US" sz="900" b="1" dirty="0"/>
-              <a:t>🐳 Docker Container</a:t>
-            </a:r>
-          </a:p>
-          <a:p>
-            <a:pPr algn="ctr"/>
-            <a:r>
-              <a:rPr lang="en-US" sz="900" i="1" dirty="0"/>
-              <a:t>“python:3.13-slim”</a:t>
-            </a:r>
-          </a:p>
-          <a:p>
-            <a:pPr algn="ctr"/>
+              <a:t>🐳</a:t>
+            </a:r>
+          </a:p>
+          <a:p>
             <a:endParaRPr lang="en-US" sz="200" i="1" dirty="0"/>
           </a:p>
         </p:txBody>
       </p:sp>
       <p:sp>
         <p:nvSpPr>
-          <p:cNvPr id="50" name="Rectangle 49">
-            <a:extLst>
-              <a:ext uri="{FF2B5EF4-FFF2-40B4-BE49-F238E27FC236}">
-                <a16:creationId xmlns:a16="http://schemas.microsoft.com/office/drawing/2014/main" id="{D620D2BF-387D-D4BF-5090-B9D7F5E1A177}"/>
+          <p:cNvPr id="70" name="Rectangle 69">
+            <a:extLst>
+              <a:ext uri="{FF2B5EF4-FFF2-40B4-BE49-F238E27FC236}">
+                <a16:creationId xmlns:a16="http://schemas.microsoft.com/office/drawing/2014/main" id="{774AE4ED-1C08-76BE-F2E4-4F2624145F75}"/>
               </a:ext>
             </a:extLst>
           </p:cNvPr>
@@ -7203,8 +7203,8 @@
         </p:nvSpPr>
         <p:spPr>
           <a:xfrm>
-            <a:off x="6393311" y="4022195"/>
-            <a:ext cx="4028187" cy="1650802"/>
+            <a:off x="3991324" y="1319396"/>
+            <a:ext cx="3582830" cy="2188475"/>
           </a:xfrm>
           <a:prstGeom prst="rect">
             <a:avLst/>
@@ -7233,7 +7233,7 @@
           </a:fontRef>
         </p:style>
         <p:txBody>
-          <a:bodyPr lIns="0" tIns="45720" rIns="0" bIns="0" rtlCol="0" anchor="b"/>
+          <a:bodyPr lIns="0" tIns="45720" rIns="0" bIns="0" rtlCol="0" anchor="t"/>
           <a:lstStyle/>
           <a:p>
             <a:pPr algn="ctr"/>
@@ -7246,7 +7246,7 @@
             <a:pPr algn="ctr"/>
             <a:r>
               <a:rPr lang="en-US" sz="900" i="1" dirty="0"/>
-              <a:t>“ollama/ollama:latest”</a:t>
+              <a:t>“python:3.13-slim”</a:t>
             </a:r>
           </a:p>
           <a:p>
@@ -7257,10 +7257,10 @@
       </p:sp>
       <p:sp>
         <p:nvSpPr>
-          <p:cNvPr id="51" name="Rectangle 50">
-            <a:extLst>
-              <a:ext uri="{FF2B5EF4-FFF2-40B4-BE49-F238E27FC236}">
-                <a16:creationId xmlns:a16="http://schemas.microsoft.com/office/drawing/2014/main" id="{E3B161CA-3951-5003-8932-A211335401FC}"/>
+          <p:cNvPr id="50" name="Rectangle 49">
+            <a:extLst>
+              <a:ext uri="{FF2B5EF4-FFF2-40B4-BE49-F238E27FC236}">
+                <a16:creationId xmlns:a16="http://schemas.microsoft.com/office/drawing/2014/main" id="{9BAEFE4A-8D34-CA13-BD6E-205310D6356D}"/>
               </a:ext>
             </a:extLst>
           </p:cNvPr>
@@ -7269,16 +7269,16 @@
         </p:nvSpPr>
         <p:spPr>
           <a:xfrm>
-            <a:off x="6452504" y="4070264"/>
-            <a:ext cx="3714012" cy="1249275"/>
+            <a:off x="7999996" y="3507872"/>
+            <a:ext cx="4028187" cy="1650802"/>
           </a:xfrm>
           <a:prstGeom prst="rect">
             <a:avLst/>
           </a:prstGeom>
           <a:solidFill>
-            <a:schemeClr val="accent2">
-              <a:lumMod val="60000"/>
-              <a:lumOff val="40000"/>
+            <a:schemeClr val="accent1">
+              <a:lumMod val="40000"/>
+              <a:lumOff val="60000"/>
             </a:schemeClr>
           </a:solidFill>
         </p:spPr>
@@ -7299,23 +7299,34 @@
           </a:fontRef>
         </p:style>
         <p:txBody>
-          <a:bodyPr lIns="0" tIns="0" rIns="0" bIns="0" rtlCol="0" anchor="b"/>
-          <a:lstStyle/>
-          <a:p>
-            <a:pPr algn="ctr"/>
-            <a:r>
-              <a:rPr lang="en-US" sz="1600" dirty="0"/>
-              <a:t>Ollama</a:t>
-            </a:r>
-          </a:p>
-        </p:txBody>
-      </p:sp>
-      <p:sp>
-        <p:nvSpPr>
-          <p:cNvPr id="52" name="Rectangle 51">
-            <a:extLst>
-              <a:ext uri="{FF2B5EF4-FFF2-40B4-BE49-F238E27FC236}">
-                <a16:creationId xmlns:a16="http://schemas.microsoft.com/office/drawing/2014/main" id="{562CBA80-95B2-D658-D869-139D92552C8F}"/>
+          <a:bodyPr lIns="0" tIns="45720" rIns="0" bIns="0" rtlCol="0" anchor="b"/>
+          <a:lstStyle/>
+          <a:p>
+            <a:pPr algn="ctr"/>
+            <a:r>
+              <a:rPr lang="en-US" sz="900" b="1" dirty="0"/>
+              <a:t>🐳 Docker Container</a:t>
+            </a:r>
+          </a:p>
+          <a:p>
+            <a:pPr algn="ctr"/>
+            <a:r>
+              <a:rPr lang="en-US" sz="900" i="1" dirty="0"/>
+              <a:t>“ollama/ollama:latest”</a:t>
+            </a:r>
+          </a:p>
+          <a:p>
+            <a:pPr algn="ctr"/>
+            <a:endParaRPr lang="en-US" sz="200" i="1" dirty="0"/>
+          </a:p>
+        </p:txBody>
+      </p:sp>
+      <p:sp>
+        <p:nvSpPr>
+          <p:cNvPr id="51" name="Rectangle 50">
+            <a:extLst>
+              <a:ext uri="{FF2B5EF4-FFF2-40B4-BE49-F238E27FC236}">
+                <a16:creationId xmlns:a16="http://schemas.microsoft.com/office/drawing/2014/main" id="{9E6B355C-7982-97C9-2B35-93572DD5AC98}"/>
               </a:ext>
             </a:extLst>
           </p:cNvPr>
@@ -7324,15 +7335,16 @@
         </p:nvSpPr>
         <p:spPr>
           <a:xfrm>
-            <a:off x="7772580" y="4070263"/>
-            <a:ext cx="1020305" cy="1020069"/>
+            <a:off x="8059189" y="3555941"/>
+            <a:ext cx="3714012" cy="1249275"/>
           </a:xfrm>
           <a:prstGeom prst="rect">
             <a:avLst/>
           </a:prstGeom>
           <a:solidFill>
             <a:schemeClr val="accent2">
-              <a:lumMod val="75000"/>
+              <a:lumMod val="60000"/>
+              <a:lumOff val="40000"/>
             </a:schemeClr>
           </a:solidFill>
         </p:spPr>
@@ -7353,42 +7365,23 @@
           </a:fontRef>
         </p:style>
         <p:txBody>
-          <a:bodyPr lIns="0" tIns="0" rIns="0" bIns="0" rtlCol="0" anchor="ctr"/>
-          <a:lstStyle/>
-          <a:p>
-            <a:pPr algn="ctr"/>
-            <a:r>
-              <a:rPr lang="en-US" sz="1200" b="1" dirty="0"/>
-              <a:t>Embedding Model</a:t>
-            </a:r>
-            <a:endParaRPr lang="en-US" sz="900" b="1" dirty="0"/>
-          </a:p>
-          <a:p>
-            <a:pPr algn="ctr"/>
-            <a:r>
-              <a:rPr lang="en-US" sz="900" dirty="0"/>
-              <a:t>📚 </a:t>
-            </a:r>
-            <a:r>
-              <a:rPr lang="en-US" sz="900" b="1" u="sng" dirty="0"/>
-              <a:t>nomic-embed-</a:t>
-            </a:r>
-          </a:p>
-          <a:p>
-            <a:pPr algn="ctr"/>
-            <a:r>
-              <a:rPr lang="en-US" sz="900" b="1" u="sng" dirty="0"/>
-              <a:t>text-v1.5</a:t>
-            </a:r>
-          </a:p>
-        </p:txBody>
-      </p:sp>
-      <p:sp>
-        <p:nvSpPr>
-          <p:cNvPr id="89" name="Rectangle 88">
-            <a:extLst>
-              <a:ext uri="{FF2B5EF4-FFF2-40B4-BE49-F238E27FC236}">
-                <a16:creationId xmlns:a16="http://schemas.microsoft.com/office/drawing/2014/main" id="{609F7108-FF93-609D-A945-2510E83DD8FF}"/>
+          <a:bodyPr lIns="0" tIns="0" rIns="0" bIns="0" rtlCol="0" anchor="b"/>
+          <a:lstStyle/>
+          <a:p>
+            <a:pPr algn="ctr"/>
+            <a:r>
+              <a:rPr lang="en-US" sz="1600" dirty="0"/>
+              <a:t>Ollama</a:t>
+            </a:r>
+          </a:p>
+        </p:txBody>
+      </p:sp>
+      <p:sp>
+        <p:nvSpPr>
+          <p:cNvPr id="52" name="Rectangle 51">
+            <a:extLst>
+              <a:ext uri="{FF2B5EF4-FFF2-40B4-BE49-F238E27FC236}">
+                <a16:creationId xmlns:a16="http://schemas.microsoft.com/office/drawing/2014/main" id="{E9918C49-6A57-37AE-A20E-CF1DC8DC3ADD}"/>
               </a:ext>
             </a:extLst>
           </p:cNvPr>
@@ -7397,8 +7390,8 @@
         </p:nvSpPr>
         <p:spPr>
           <a:xfrm>
-            <a:off x="8874980" y="4070261"/>
-            <a:ext cx="1222081" cy="1020069"/>
+            <a:off x="9379265" y="3555940"/>
+            <a:ext cx="1020305" cy="1020069"/>
           </a:xfrm>
           <a:prstGeom prst="rect">
             <a:avLst/>
@@ -7431,20 +7424,10 @@
           <a:p>
             <a:pPr algn="ctr"/>
             <a:r>
-              <a:rPr lang="en-US" sz="1600" b="1" i="1" dirty="0"/>
-              <a:t>SQL Emitter</a:t>
-            </a:r>
-          </a:p>
-          <a:p>
-            <a:pPr algn="ctr"/>
-            <a:r>
-              <a:rPr lang="en-US" sz="800" b="1" i="1" dirty="0"/>
-              <a:t>(Local LLM)</a:t>
-            </a:r>
-          </a:p>
-          <a:p>
-            <a:pPr algn="ctr"/>
-            <a:endParaRPr lang="en-US" sz="800" b="1" i="1" dirty="0"/>
+              <a:rPr lang="en-US" sz="1200" b="1" dirty="0"/>
+              <a:t>Embedding Model</a:t>
+            </a:r>
+            <a:endParaRPr lang="en-US" sz="900" b="1" dirty="0"/>
           </a:p>
           <a:p>
             <a:pPr algn="ctr"/>
@@ -7454,17 +7437,24 @@
             </a:r>
             <a:r>
               <a:rPr lang="en-US" sz="900" b="1" u="sng" dirty="0"/>
-              <a:t>Qwen2.5-Coder:7b</a:t>
-            </a:r>
-          </a:p>
-        </p:txBody>
-      </p:sp>
-      <p:sp>
-        <p:nvSpPr>
-          <p:cNvPr id="2" name="Rectangle 1">
-            <a:extLst>
-              <a:ext uri="{FF2B5EF4-FFF2-40B4-BE49-F238E27FC236}">
-                <a16:creationId xmlns:a16="http://schemas.microsoft.com/office/drawing/2014/main" id="{81D6A0B9-4705-2CEA-1EC6-D1806A8968BE}"/>
+              <a:t>nomic-embed-</a:t>
+            </a:r>
+          </a:p>
+          <a:p>
+            <a:pPr algn="ctr"/>
+            <a:r>
+              <a:rPr lang="en-US" sz="900" b="1" u="sng" dirty="0"/>
+              <a:t>text-v1.5</a:t>
+            </a:r>
+          </a:p>
+        </p:txBody>
+      </p:sp>
+      <p:sp>
+        <p:nvSpPr>
+          <p:cNvPr id="89" name="Rectangle 88">
+            <a:extLst>
+              <a:ext uri="{FF2B5EF4-FFF2-40B4-BE49-F238E27FC236}">
+                <a16:creationId xmlns:a16="http://schemas.microsoft.com/office/drawing/2014/main" id="{2740222D-2A35-EE1C-DA2F-C9D254AC42E4}"/>
               </a:ext>
             </a:extLst>
           </p:cNvPr>
@@ -7473,14 +7463,16 @@
         </p:nvSpPr>
         <p:spPr>
           <a:xfrm>
-            <a:off x="10166516" y="4070265"/>
-            <a:ext cx="202062" cy="1249274"/>
+            <a:off x="10481665" y="3555938"/>
+            <a:ext cx="1222081" cy="1020069"/>
           </a:xfrm>
           <a:prstGeom prst="rect">
             <a:avLst/>
           </a:prstGeom>
           <a:solidFill>
-            <a:srgbClr val="B17ED8"/>
+            <a:schemeClr val="accent2">
+              <a:lumMod val="75000"/>
+            </a:schemeClr>
           </a:solidFill>
         </p:spPr>
         <p:style>
@@ -7500,6 +7492,80 @@
           </a:fontRef>
         </p:style>
         <p:txBody>
+          <a:bodyPr lIns="0" tIns="0" rIns="0" bIns="0" rtlCol="0" anchor="ctr"/>
+          <a:lstStyle/>
+          <a:p>
+            <a:pPr algn="ctr"/>
+            <a:r>
+              <a:rPr lang="en-US" sz="1600" b="1" i="1" dirty="0"/>
+              <a:t>SQL Emitter</a:t>
+            </a:r>
+          </a:p>
+          <a:p>
+            <a:pPr algn="ctr"/>
+            <a:r>
+              <a:rPr lang="en-US" sz="800" b="1" i="1" dirty="0"/>
+              <a:t>(Local LLM)</a:t>
+            </a:r>
+          </a:p>
+          <a:p>
+            <a:pPr algn="ctr"/>
+            <a:endParaRPr lang="en-US" sz="800" b="1" i="1" dirty="0"/>
+          </a:p>
+          <a:p>
+            <a:pPr algn="ctr"/>
+            <a:r>
+              <a:rPr lang="en-US" sz="900" dirty="0"/>
+              <a:t>📚 </a:t>
+            </a:r>
+            <a:r>
+              <a:rPr lang="en-US" sz="900" b="1" u="sng" dirty="0"/>
+              <a:t>Qwen2.5-Coder:7b</a:t>
+            </a:r>
+          </a:p>
+        </p:txBody>
+      </p:sp>
+      <p:sp>
+        <p:nvSpPr>
+          <p:cNvPr id="2" name="Rectangle 1">
+            <a:extLst>
+              <a:ext uri="{FF2B5EF4-FFF2-40B4-BE49-F238E27FC236}">
+                <a16:creationId xmlns:a16="http://schemas.microsoft.com/office/drawing/2014/main" id="{14169A20-3607-4878-9868-AC7D3106E5B6}"/>
+              </a:ext>
+            </a:extLst>
+          </p:cNvPr>
+          <p:cNvSpPr/>
+          <p:nvPr/>
+        </p:nvSpPr>
+        <p:spPr>
+          <a:xfrm>
+            <a:off x="11773201" y="3555942"/>
+            <a:ext cx="202062" cy="1249274"/>
+          </a:xfrm>
+          <a:prstGeom prst="rect">
+            <a:avLst/>
+          </a:prstGeom>
+          <a:solidFill>
+            <a:srgbClr val="B17ED8"/>
+          </a:solidFill>
+        </p:spPr>
+        <p:style>
+          <a:lnRef idx="2">
+            <a:schemeClr val="accent1">
+              <a:shade val="15000"/>
+            </a:schemeClr>
+          </a:lnRef>
+          <a:fillRef idx="1">
+            <a:schemeClr val="accent1"/>
+          </a:fillRef>
+          <a:effectRef idx="0">
+            <a:schemeClr val="accent1"/>
+          </a:effectRef>
+          <a:fontRef idx="minor">
+            <a:schemeClr val="lt1"/>
+          </a:fontRef>
+        </p:style>
+        <p:txBody>
           <a:bodyPr vert="vert270" lIns="0" tIns="0" rIns="0" bIns="0" rtlCol="0" anchor="ctr"/>
           <a:lstStyle/>
           <a:p>
@@ -7516,7 +7582,7 @@
           <p:cNvPr id="5" name="Rectangle 4">
             <a:extLst>
               <a:ext uri="{FF2B5EF4-FFF2-40B4-BE49-F238E27FC236}">
-                <a16:creationId xmlns:a16="http://schemas.microsoft.com/office/drawing/2014/main" id="{377B6516-346C-8990-ACB5-79355B120195}"/>
+                <a16:creationId xmlns:a16="http://schemas.microsoft.com/office/drawing/2014/main" id="{F6C400ED-A1D1-98B2-554D-0095EC19BCE1}"/>
               </a:ext>
             </a:extLst>
           </p:cNvPr>
@@ -7525,7 +7591,7 @@
         </p:nvSpPr>
         <p:spPr>
           <a:xfrm>
-            <a:off x="562127" y="2634336"/>
+            <a:off x="289131" y="2934686"/>
             <a:ext cx="1116053" cy="401369"/>
           </a:xfrm>
           <a:prstGeom prst="rect">
@@ -7585,7 +7651,7 @@
           <p:cNvPr id="6" name="Rectangle 5">
             <a:extLst>
               <a:ext uri="{FF2B5EF4-FFF2-40B4-BE49-F238E27FC236}">
-                <a16:creationId xmlns:a16="http://schemas.microsoft.com/office/drawing/2014/main" id="{FDB002BE-836F-8408-1F21-4AD91EC21A2B}"/>
+                <a16:creationId xmlns:a16="http://schemas.microsoft.com/office/drawing/2014/main" id="{D34EC8A3-F27D-267B-C2D7-3D2E75E31A82}"/>
               </a:ext>
             </a:extLst>
           </p:cNvPr>
@@ -7594,7 +7660,7 @@
         </p:nvSpPr>
         <p:spPr>
           <a:xfrm>
-            <a:off x="562127" y="1493262"/>
+            <a:off x="289131" y="1793612"/>
             <a:ext cx="1116053" cy="401369"/>
           </a:xfrm>
           <a:prstGeom prst="rect">
@@ -7654,7 +7720,7 @@
           <p:cNvPr id="14" name="Straight Arrow Connector 13">
             <a:extLst>
               <a:ext uri="{FF2B5EF4-FFF2-40B4-BE49-F238E27FC236}">
-                <a16:creationId xmlns:a16="http://schemas.microsoft.com/office/drawing/2014/main" id="{C823C645-2515-192B-C854-507A34F34D39}"/>
+                <a16:creationId xmlns:a16="http://schemas.microsoft.com/office/drawing/2014/main" id="{41BAB05B-B55F-384A-6961-7BB5EF013628}"/>
               </a:ext>
             </a:extLst>
           </p:cNvPr>
@@ -7666,7 +7732,7 @@
         </p:nvCxnSpPr>
         <p:spPr>
           <a:xfrm flipH="1">
-            <a:off x="1678180" y="2835021"/>
+            <a:off x="1405184" y="3135371"/>
             <a:ext cx="552826" cy="0"/>
           </a:xfrm>
           <a:prstGeom prst="straightConnector1">
@@ -7695,59 +7761,12 @@
           </a:fontRef>
         </p:style>
       </p:cxnSp>
-      <p:cxnSp>
-        <p:nvCxnSpPr>
-          <p:cNvPr id="25" name="Straight Arrow Connector 24">
-            <a:extLst>
-              <a:ext uri="{FF2B5EF4-FFF2-40B4-BE49-F238E27FC236}">
-                <a16:creationId xmlns:a16="http://schemas.microsoft.com/office/drawing/2014/main" id="{827F5B4B-693B-6867-1F64-A4FD871C749E}"/>
-              </a:ext>
-            </a:extLst>
-          </p:cNvPr>
-          <p:cNvCxnSpPr>
-            <a:cxnSpLocks/>
-            <a:endCxn id="143" idx="2"/>
-          </p:cNvCxnSpPr>
-          <p:nvPr/>
-        </p:nvCxnSpPr>
-        <p:spPr>
-          <a:xfrm flipH="1" flipV="1">
-            <a:off x="6948754" y="3473508"/>
-            <a:ext cx="7718" cy="545074"/>
-          </a:xfrm>
-          <a:prstGeom prst="straightConnector1">
-            <a:avLst/>
-          </a:prstGeom>
-          <a:ln w="12700">
-            <a:solidFill>
-              <a:schemeClr val="tx1"/>
-            </a:solidFill>
-            <a:prstDash val="dash"/>
-            <a:headEnd type="arrow"/>
-            <a:tailEnd type="arrow"/>
-          </a:ln>
-        </p:spPr>
-        <p:style>
-          <a:lnRef idx="1">
-            <a:schemeClr val="accent1"/>
-          </a:lnRef>
-          <a:fillRef idx="0">
-            <a:schemeClr val="accent1"/>
-          </a:fillRef>
-          <a:effectRef idx="0">
-            <a:schemeClr val="accent1"/>
-          </a:effectRef>
-          <a:fontRef idx="minor">
-            <a:schemeClr val="tx1"/>
-          </a:fontRef>
-        </p:style>
-      </p:cxnSp>
       <p:sp>
         <p:nvSpPr>
           <p:cNvPr id="48" name="Rectangle 47">
             <a:extLst>
               <a:ext uri="{FF2B5EF4-FFF2-40B4-BE49-F238E27FC236}">
-                <a16:creationId xmlns:a16="http://schemas.microsoft.com/office/drawing/2014/main" id="{A1207485-D60E-FB2A-3919-B3EDA31AD605}"/>
+                <a16:creationId xmlns:a16="http://schemas.microsoft.com/office/drawing/2014/main" id="{B58C6C6F-EE91-089F-EA14-A17A90605B49}"/>
               </a:ext>
             </a:extLst>
           </p:cNvPr>
@@ -7756,7 +7775,7 @@
         </p:nvSpPr>
         <p:spPr>
           <a:xfrm>
-            <a:off x="6522912" y="4070262"/>
+            <a:off x="8129597" y="3555939"/>
             <a:ext cx="1167573" cy="1020070"/>
           </a:xfrm>
           <a:prstGeom prst="rect">
@@ -7823,7 +7842,7 @@
           <p:cNvPr id="117" name="Flowchart: Off-page Connector 116">
             <a:extLst>
               <a:ext uri="{FF2B5EF4-FFF2-40B4-BE49-F238E27FC236}">
-                <a16:creationId xmlns:a16="http://schemas.microsoft.com/office/drawing/2014/main" id="{D7C4B127-ED58-CB38-3043-477F8C136243}"/>
+                <a16:creationId xmlns:a16="http://schemas.microsoft.com/office/drawing/2014/main" id="{B27948CA-E4CF-2729-211D-66E1797C976A}"/>
               </a:ext>
             </a:extLst>
           </p:cNvPr>
@@ -7832,7 +7851,7 @@
         </p:nvSpPr>
         <p:spPr>
           <a:xfrm rot="16200000">
-            <a:off x="1998780" y="2541246"/>
+            <a:off x="1725784" y="2841596"/>
             <a:ext cx="186884" cy="240280"/>
           </a:xfrm>
           <a:prstGeom prst="flowChartOffpageConnector">
@@ -7881,10 +7900,10 @@
       </p:sp>
       <p:sp>
         <p:nvSpPr>
-          <p:cNvPr id="118" name="Flowchart: Off-page Connector 117">
-            <a:extLst>
-              <a:ext uri="{FF2B5EF4-FFF2-40B4-BE49-F238E27FC236}">
-                <a16:creationId xmlns:a16="http://schemas.microsoft.com/office/drawing/2014/main" id="{CC198E2C-579D-69D7-7BE8-AD75D8EE4092}"/>
+          <p:cNvPr id="123" name="Flowchart: Off-page Connector 122">
+            <a:extLst>
+              <a:ext uri="{FF2B5EF4-FFF2-40B4-BE49-F238E27FC236}">
+                <a16:creationId xmlns:a16="http://schemas.microsoft.com/office/drawing/2014/main" id="{C1CE6106-0B66-3171-6219-313F2DB3FD76}"/>
               </a:ext>
             </a:extLst>
           </p:cNvPr>
@@ -7893,8 +7912,8 @@
         </p:nvSpPr>
         <p:spPr>
           <a:xfrm rot="16200000">
-            <a:off x="4062433" y="2490177"/>
-            <a:ext cx="186884" cy="240280"/>
+            <a:off x="1710723" y="1715581"/>
+            <a:ext cx="186884" cy="210161"/>
           </a:xfrm>
           <a:prstGeom prst="flowChartOffpageConnector">
             <a:avLst/>
@@ -7935,68 +7954,7 @@
                   </a:schemeClr>
                 </a:solidFill>
               </a:rPr>
-              <a:t>2</a:t>
-            </a:r>
-          </a:p>
-        </p:txBody>
-      </p:sp>
-      <p:sp>
-        <p:nvSpPr>
-          <p:cNvPr id="123" name="Flowchart: Off-page Connector 122">
-            <a:extLst>
-              <a:ext uri="{FF2B5EF4-FFF2-40B4-BE49-F238E27FC236}">
-                <a16:creationId xmlns:a16="http://schemas.microsoft.com/office/drawing/2014/main" id="{9BEDBC72-BA05-EBD9-A868-CF9DCC0AD9A0}"/>
-              </a:ext>
-            </a:extLst>
-          </p:cNvPr>
-          <p:cNvSpPr/>
-          <p:nvPr/>
-        </p:nvSpPr>
-        <p:spPr>
-          <a:xfrm rot="16200000">
-            <a:off x="1983719" y="1415231"/>
-            <a:ext cx="186884" cy="210161"/>
-          </a:xfrm>
-          <a:prstGeom prst="flowChartOffpageConnector">
-            <a:avLst/>
-          </a:prstGeom>
-          <a:solidFill>
-            <a:schemeClr val="accent4">
-              <a:lumMod val="60000"/>
-              <a:lumOff val="40000"/>
-            </a:schemeClr>
-          </a:solidFill>
-        </p:spPr>
-        <p:style>
-          <a:lnRef idx="2">
-            <a:schemeClr val="accent1">
-              <a:shade val="15000"/>
-            </a:schemeClr>
-          </a:lnRef>
-          <a:fillRef idx="1">
-            <a:schemeClr val="accent1"/>
-          </a:fillRef>
-          <a:effectRef idx="0">
-            <a:schemeClr val="accent1"/>
-          </a:effectRef>
-          <a:fontRef idx="minor">
-            <a:schemeClr val="lt1"/>
-          </a:fontRef>
-        </p:style>
-        <p:txBody>
-          <a:bodyPr vert="vert" rtlCol="0" anchor="ctr"/>
-          <a:lstStyle/>
-          <a:p>
-            <a:pPr algn="ctr"/>
-            <a:r>
-              <a:rPr lang="en-US" sz="1400" b="1" dirty="0">
-                <a:solidFill>
-                  <a:schemeClr val="accent4">
-                    <a:lumMod val="75000"/>
-                  </a:schemeClr>
-                </a:solidFill>
-              </a:rPr>
-              <a:t>5</a:t>
+              <a:t>6</a:t>
             </a:r>
           </a:p>
         </p:txBody>
@@ -8006,7 +7964,7 @@
           <p:cNvPr id="125" name="Title 1024">
             <a:extLst>
               <a:ext uri="{FF2B5EF4-FFF2-40B4-BE49-F238E27FC236}">
-                <a16:creationId xmlns:a16="http://schemas.microsoft.com/office/drawing/2014/main" id="{068CC61E-01B3-DEF8-1A06-BC2F944CE8A4}"/>
+                <a16:creationId xmlns:a16="http://schemas.microsoft.com/office/drawing/2014/main" id="{5EE825B2-9BE9-CBC2-F2EB-AE70D921BE6A}"/>
               </a:ext>
             </a:extLst>
           </p:cNvPr>
@@ -8061,7 +8019,7 @@
           <p:cNvPr id="128" name="Rectangle 127">
             <a:extLst>
               <a:ext uri="{FF2B5EF4-FFF2-40B4-BE49-F238E27FC236}">
-                <a16:creationId xmlns:a16="http://schemas.microsoft.com/office/drawing/2014/main" id="{A153D90E-A2E5-4404-AD68-B92944BEAE64}"/>
+                <a16:creationId xmlns:a16="http://schemas.microsoft.com/office/drawing/2014/main" id="{55ABFD7C-8047-1744-6E35-0FE92F8A9237}"/>
               </a:ext>
             </a:extLst>
           </p:cNvPr>
@@ -8070,8 +8028,8 @@
         </p:nvSpPr>
         <p:spPr>
           <a:xfrm>
-            <a:off x="2236659" y="1376765"/>
-            <a:ext cx="1022504" cy="2096746"/>
+            <a:off x="1963663" y="1677115"/>
+            <a:ext cx="1022504" cy="3413662"/>
           </a:xfrm>
           <a:prstGeom prst="rect">
             <a:avLst/>
@@ -8105,54 +8063,16 @@
             <a:pPr algn="ctr"/>
             <a:r>
               <a:rPr lang="en-US" sz="1600" dirty="0"/>
-              <a:t>Web Client</a:t>
+              <a:t>Client</a:t>
             </a:r>
             <a:endParaRPr lang="en-US" sz="1400" dirty="0"/>
           </a:p>
           <a:p>
             <a:pPr algn="ctr"/>
-            <a:r>
-              <a:rPr lang="en-US" sz="800" u="sng" dirty="0"/>
-              <a:t>web/</a:t>
-            </a:r>
-          </a:p>
-          <a:p>
-            <a:pPr algn="ctr"/>
             <a:endParaRPr lang="en-US" sz="800" dirty="0"/>
           </a:p>
           <a:p>
             <a:pPr algn="ctr"/>
-            <a:r>
-              <a:rPr lang="en-US" sz="800" dirty="0"/>
-              <a:t>📚 </a:t>
-            </a:r>
-            <a:r>
-              <a:rPr lang="en-US" sz="800" b="1" u="sng" dirty="0"/>
-              <a:t>Angular 22</a:t>
-            </a:r>
-            <a:endParaRPr lang="en-US" sz="800" dirty="0"/>
-          </a:p>
-          <a:p>
-            <a:pPr algn="ctr"/>
-            <a:r>
-              <a:rPr lang="en-US" sz="800" dirty="0"/>
-              <a:t>📚 </a:t>
-            </a:r>
-            <a:r>
-              <a:rPr lang="en-US" sz="800" b="1" u="sng" dirty="0"/>
-              <a:t>ngrx/signals</a:t>
-            </a:r>
-          </a:p>
-          <a:p>
-            <a:pPr algn="ctr"/>
-            <a:r>
-              <a:rPr lang="en-US" sz="800" dirty="0"/>
-              <a:t>📚 </a:t>
-            </a:r>
-            <a:r>
-              <a:rPr lang="en-US" sz="800" b="1" u="sng" dirty="0"/>
-              <a:t>ng-apexcharts </a:t>
-            </a:r>
             <a:br>
               <a:rPr lang="en-US" sz="800" b="1" u="sng" dirty="0"/>
             </a:br>
@@ -8166,7 +8086,7 @@
             <a:pPr algn="ctr"/>
             <a:r>
               <a:rPr lang="en-US" sz="800" dirty="0"/>
-              <a:t>Interacts user with the web services </a:t>
+              <a:t>The HTML+JS pages a user interacts with to interface with the API</a:t>
             </a:r>
           </a:p>
         </p:txBody>
@@ -8176,7 +8096,7 @@
           <p:cNvPr id="132" name="Straight Arrow Connector 131">
             <a:extLst>
               <a:ext uri="{FF2B5EF4-FFF2-40B4-BE49-F238E27FC236}">
-                <a16:creationId xmlns:a16="http://schemas.microsoft.com/office/drawing/2014/main" id="{63A5CFC1-5969-1075-024E-14A656251337}"/>
+                <a16:creationId xmlns:a16="http://schemas.microsoft.com/office/drawing/2014/main" id="{85D2EE65-92C0-CE5A-2337-0D48B3185910}"/>
               </a:ext>
             </a:extLst>
           </p:cNvPr>
@@ -8188,7 +8108,7 @@
         </p:nvCxnSpPr>
         <p:spPr>
           <a:xfrm flipH="1">
-            <a:off x="1678180" y="1693947"/>
+            <a:off x="1405184" y="1994297"/>
             <a:ext cx="552826" cy="0"/>
           </a:xfrm>
           <a:prstGeom prst="straightConnector1">
@@ -8219,10 +8139,10 @@
       </p:cxnSp>
       <p:sp>
         <p:nvSpPr>
-          <p:cNvPr id="136" name="Flowchart: Off-page Connector 135">
-            <a:extLst>
-              <a:ext uri="{FF2B5EF4-FFF2-40B4-BE49-F238E27FC236}">
-                <a16:creationId xmlns:a16="http://schemas.microsoft.com/office/drawing/2014/main" id="{A1B0BCD8-DCD6-7861-F57A-66F9A0626BD6}"/>
+          <p:cNvPr id="143" name="Rectangle 142">
+            <a:extLst>
+              <a:ext uri="{FF2B5EF4-FFF2-40B4-BE49-F238E27FC236}">
+                <a16:creationId xmlns:a16="http://schemas.microsoft.com/office/drawing/2014/main" id="{5BD03DCB-AA87-E567-C5CE-8484550EF2AC}"/>
               </a:ext>
             </a:extLst>
           </p:cNvPr>
@@ -8230,8 +8150,88 @@
           <p:nvPr/>
         </p:nvSpPr>
         <p:spPr>
+          <a:xfrm>
+            <a:off x="6393310" y="1677116"/>
+            <a:ext cx="1110885" cy="1751234"/>
+          </a:xfrm>
+          <a:prstGeom prst="rect">
+            <a:avLst/>
+          </a:prstGeom>
+          <a:solidFill>
+            <a:srgbClr val="7030A0"/>
+          </a:solidFill>
+        </p:spPr>
+        <p:style>
+          <a:lnRef idx="2">
+            <a:schemeClr val="accent1">
+              <a:shade val="15000"/>
+            </a:schemeClr>
+          </a:lnRef>
+          <a:fillRef idx="1">
+            <a:schemeClr val="accent1"/>
+          </a:fillRef>
+          <a:effectRef idx="0">
+            <a:schemeClr val="accent1"/>
+          </a:effectRef>
+          <a:fontRef idx="minor">
+            <a:schemeClr val="lt1"/>
+          </a:fontRef>
+        </p:style>
+        <p:txBody>
+          <a:bodyPr lIns="0" tIns="0" rIns="0" bIns="0" rtlCol="0" anchor="ctr"/>
+          <a:lstStyle/>
+          <a:p>
+            <a:pPr algn="ctr"/>
+            <a:r>
+              <a:rPr lang="en-US" sz="1600" dirty="0"/>
+              <a:t>Query Pipeline</a:t>
+            </a:r>
+            <a:endParaRPr lang="en-US" sz="1400" dirty="0"/>
+          </a:p>
+          <a:p>
+            <a:pPr algn="ctr"/>
+            <a:endParaRPr lang="en-US" sz="800" dirty="0"/>
+          </a:p>
+          <a:p>
+            <a:pPr algn="ctr"/>
+            <a:r>
+              <a:rPr lang="en-US" sz="800" dirty="0"/>
+              <a:t>Takes a query string and produces an answer meant to be returned to the user</a:t>
+            </a:r>
+          </a:p>
+          <a:p>
+            <a:pPr algn="ctr"/>
+            <a:endParaRPr lang="en-US" sz="800" dirty="0"/>
+          </a:p>
+          <a:p>
+            <a:pPr algn="ctr"/>
+            <a:endParaRPr lang="en-US" sz="800" dirty="0"/>
+          </a:p>
+          <a:p>
+            <a:pPr algn="ctr"/>
+            <a:endParaRPr lang="en-US" sz="800" dirty="0"/>
+          </a:p>
+          <a:p>
+            <a:pPr algn="ctr"/>
+            <a:endParaRPr lang="en-US" sz="800" dirty="0"/>
+          </a:p>
+        </p:txBody>
+      </p:sp>
+      <p:sp>
+        <p:nvSpPr>
+          <p:cNvPr id="154" name="Flowchart: Off-page Connector 153">
+            <a:extLst>
+              <a:ext uri="{FF2B5EF4-FFF2-40B4-BE49-F238E27FC236}">
+                <a16:creationId xmlns:a16="http://schemas.microsoft.com/office/drawing/2014/main" id="{3DDA18EE-EBA5-71D4-6143-FFEF7FFBC3C1}"/>
+              </a:ext>
+            </a:extLst>
+          </p:cNvPr>
+          <p:cNvSpPr/>
+          <p:nvPr/>
+        </p:nvSpPr>
+        <p:spPr>
           <a:xfrm rot="16200000">
-            <a:off x="4045019" y="1369910"/>
+            <a:off x="6426289" y="1857144"/>
             <a:ext cx="186884" cy="210161"/>
           </a:xfrm>
           <a:prstGeom prst="flowChartOffpageConnector">
@@ -8280,151 +8280,10 @@
       </p:sp>
       <p:sp>
         <p:nvSpPr>
-          <p:cNvPr id="143" name="Rectangle 142">
-            <a:extLst>
-              <a:ext uri="{FF2B5EF4-FFF2-40B4-BE49-F238E27FC236}">
-                <a16:creationId xmlns:a16="http://schemas.microsoft.com/office/drawing/2014/main" id="{38DEB2BA-D85C-50E6-40BC-A6CD7A7ADEEE}"/>
-              </a:ext>
-            </a:extLst>
-          </p:cNvPr>
-          <p:cNvSpPr/>
-          <p:nvPr/>
-        </p:nvSpPr>
-        <p:spPr>
-          <a:xfrm>
-            <a:off x="6393311" y="1376765"/>
-            <a:ext cx="1110885" cy="2096743"/>
-          </a:xfrm>
-          <a:prstGeom prst="rect">
-            <a:avLst/>
-          </a:prstGeom>
-          <a:solidFill>
-            <a:srgbClr val="7030A0"/>
-          </a:solidFill>
-        </p:spPr>
-        <p:style>
-          <a:lnRef idx="2">
-            <a:schemeClr val="accent1">
-              <a:shade val="15000"/>
-            </a:schemeClr>
-          </a:lnRef>
-          <a:fillRef idx="1">
-            <a:schemeClr val="accent1"/>
-          </a:fillRef>
-          <a:effectRef idx="0">
-            <a:schemeClr val="accent1"/>
-          </a:effectRef>
-          <a:fontRef idx="minor">
-            <a:schemeClr val="lt1"/>
-          </a:fontRef>
-        </p:style>
-        <p:txBody>
-          <a:bodyPr lIns="0" tIns="0" rIns="0" bIns="0" rtlCol="0" anchor="ctr"/>
-          <a:lstStyle/>
-          <a:p>
-            <a:pPr algn="ctr"/>
-            <a:r>
-              <a:rPr lang="en-US" sz="1600" dirty="0"/>
-              <a:t>Query Pipeline</a:t>
-            </a:r>
-            <a:endParaRPr lang="en-US" sz="1400" dirty="0"/>
-          </a:p>
-          <a:p>
-            <a:pPr algn="ctr"/>
-            <a:endParaRPr lang="en-US" sz="800" dirty="0"/>
-          </a:p>
-          <a:p>
-            <a:pPr algn="ctr"/>
-            <a:r>
-              <a:rPr lang="en-US" sz="800" dirty="0"/>
-              <a:t>Takes a query string and produces an answer meant to be returned to the user</a:t>
-            </a:r>
-          </a:p>
-          <a:p>
-            <a:pPr algn="ctr"/>
-            <a:endParaRPr lang="en-US" sz="800" dirty="0"/>
-          </a:p>
-          <a:p>
-            <a:pPr algn="ctr"/>
-            <a:endParaRPr lang="en-US" sz="800" dirty="0"/>
-          </a:p>
-          <a:p>
-            <a:pPr algn="ctr"/>
-            <a:endParaRPr lang="en-US" sz="800" dirty="0"/>
-          </a:p>
-          <a:p>
-            <a:pPr algn="ctr"/>
-            <a:endParaRPr lang="en-US" sz="800" dirty="0"/>
-          </a:p>
-        </p:txBody>
-      </p:sp>
-      <p:sp>
-        <p:nvSpPr>
-          <p:cNvPr id="154" name="Flowchart: Off-page Connector 153">
-            <a:extLst>
-              <a:ext uri="{FF2B5EF4-FFF2-40B4-BE49-F238E27FC236}">
-                <a16:creationId xmlns:a16="http://schemas.microsoft.com/office/drawing/2014/main" id="{A3D4D619-1AF9-A9AD-A963-8280C6167FD0}"/>
-              </a:ext>
-            </a:extLst>
-          </p:cNvPr>
-          <p:cNvSpPr/>
-          <p:nvPr/>
-        </p:nvSpPr>
-        <p:spPr>
-          <a:xfrm rot="16200000">
-            <a:off x="6472356" y="1369911"/>
-            <a:ext cx="186884" cy="210161"/>
-          </a:xfrm>
-          <a:prstGeom prst="flowChartOffpageConnector">
-            <a:avLst/>
-          </a:prstGeom>
-          <a:solidFill>
-            <a:schemeClr val="accent4">
-              <a:lumMod val="60000"/>
-              <a:lumOff val="40000"/>
-            </a:schemeClr>
-          </a:solidFill>
-        </p:spPr>
-        <p:style>
-          <a:lnRef idx="2">
-            <a:schemeClr val="accent1">
-              <a:shade val="15000"/>
-            </a:schemeClr>
-          </a:lnRef>
-          <a:fillRef idx="1">
-            <a:schemeClr val="accent1"/>
-          </a:fillRef>
-          <a:effectRef idx="0">
-            <a:schemeClr val="accent1"/>
-          </a:effectRef>
-          <a:fontRef idx="minor">
-            <a:schemeClr val="lt1"/>
-          </a:fontRef>
-        </p:style>
-        <p:txBody>
-          <a:bodyPr vert="vert" rtlCol="0" anchor="ctr"/>
-          <a:lstStyle/>
-          <a:p>
-            <a:pPr algn="ctr"/>
-            <a:r>
-              <a:rPr lang="en-US" sz="1400" b="1" dirty="0">
-                <a:solidFill>
-                  <a:schemeClr val="accent4">
-                    <a:lumMod val="75000"/>
-                  </a:schemeClr>
-                </a:solidFill>
-              </a:rPr>
-              <a:t>3</a:t>
-            </a:r>
-          </a:p>
-        </p:txBody>
-      </p:sp>
-      <p:sp>
-        <p:nvSpPr>
           <p:cNvPr id="165" name="TextBox 164">
             <a:extLst>
               <a:ext uri="{FF2B5EF4-FFF2-40B4-BE49-F238E27FC236}">
-                <a16:creationId xmlns:a16="http://schemas.microsoft.com/office/drawing/2014/main" id="{505832D6-FBC7-265D-705F-64A8EB21D9EC}"/>
+                <a16:creationId xmlns:a16="http://schemas.microsoft.com/office/drawing/2014/main" id="{6B0950B3-78D4-69C2-2294-8BC7043B4DB1}"/>
               </a:ext>
             </a:extLst>
           </p:cNvPr>
@@ -8433,7 +8292,7 @@
         </p:nvSpPr>
         <p:spPr>
           <a:xfrm>
-            <a:off x="5644221" y="1724493"/>
+            <a:off x="5644221" y="2024843"/>
             <a:ext cx="816496" cy="161583"/>
           </a:xfrm>
           <a:prstGeom prst="rect">
@@ -8465,7 +8324,7 @@
           <p:cNvPr id="183" name="Rectangle 182">
             <a:extLst>
               <a:ext uri="{FF2B5EF4-FFF2-40B4-BE49-F238E27FC236}">
-                <a16:creationId xmlns:a16="http://schemas.microsoft.com/office/drawing/2014/main" id="{D43E0C22-7646-FF2D-BCA6-8C88A2D3837F}"/>
+                <a16:creationId xmlns:a16="http://schemas.microsoft.com/office/drawing/2014/main" id="{9BF8ECE2-6235-84CA-1DF5-BC7AF1D1FE51}"/>
               </a:ext>
             </a:extLst>
           </p:cNvPr>
@@ -8474,8 +8333,8 @@
         </p:nvSpPr>
         <p:spPr>
           <a:xfrm>
-            <a:off x="4392218" y="4070261"/>
-            <a:ext cx="998858" cy="1410974"/>
+            <a:off x="8171517" y="1367467"/>
+            <a:ext cx="998858" cy="1218498"/>
           </a:xfrm>
           <a:prstGeom prst="rect">
             <a:avLst/>
@@ -8595,7 +8454,7 @@
           <p:cNvPr id="30" name="TextBox 29">
             <a:extLst>
               <a:ext uri="{FF2B5EF4-FFF2-40B4-BE49-F238E27FC236}">
-                <a16:creationId xmlns:a16="http://schemas.microsoft.com/office/drawing/2014/main" id="{AFB64D13-631E-C589-C4ED-A89D01281540}"/>
+                <a16:creationId xmlns:a16="http://schemas.microsoft.com/office/drawing/2014/main" id="{888B736F-A957-5F64-656F-8D69256243E6}"/>
               </a:ext>
             </a:extLst>
           </p:cNvPr>
@@ -8604,7 +8463,7 @@
         </p:nvSpPr>
         <p:spPr>
           <a:xfrm>
-            <a:off x="5565437" y="2634336"/>
+            <a:off x="5565437" y="2934686"/>
             <a:ext cx="737772" cy="169277"/>
           </a:xfrm>
           <a:prstGeom prst="rect">
@@ -8638,7 +8497,7 @@
           <p:cNvPr id="72" name="Rectangle 71">
             <a:extLst>
               <a:ext uri="{FF2B5EF4-FFF2-40B4-BE49-F238E27FC236}">
-                <a16:creationId xmlns:a16="http://schemas.microsoft.com/office/drawing/2014/main" id="{5A941F4F-B015-3346-7BDB-4BC9B9B87C6A}"/>
+                <a16:creationId xmlns:a16="http://schemas.microsoft.com/office/drawing/2014/main" id="{9D483037-9860-406C-BE6D-CA21303232EA}"/>
               </a:ext>
             </a:extLst>
           </p:cNvPr>
@@ -8647,8 +8506,8 @@
         </p:nvSpPr>
         <p:spPr>
           <a:xfrm>
-            <a:off x="4285400" y="1376765"/>
-            <a:ext cx="1194727" cy="2100352"/>
+            <a:off x="4285400" y="1677115"/>
+            <a:ext cx="1194727" cy="1706832"/>
           </a:xfrm>
           <a:prstGeom prst="rect">
             <a:avLst/>
@@ -8680,7 +8539,7 @@
             <a:pPr algn="ctr"/>
             <a:r>
               <a:rPr lang="en-US" sz="1600" dirty="0"/>
-              <a:t>Web Server</a:t>
+              <a:t>API Server</a:t>
             </a:r>
             <a:endParaRPr lang="en-US" sz="1400" dirty="0"/>
           </a:p>
@@ -8780,7 +8639,7 @@
           <p:cNvPr id="146" name="Straight Arrow Connector 145">
             <a:extLst>
               <a:ext uri="{FF2B5EF4-FFF2-40B4-BE49-F238E27FC236}">
-                <a16:creationId xmlns:a16="http://schemas.microsoft.com/office/drawing/2014/main" id="{7B9890BF-AA75-9B52-CA47-20B28D8B417A}"/>
+                <a16:creationId xmlns:a16="http://schemas.microsoft.com/office/drawing/2014/main" id="{3A891E70-4A0D-ACF8-65DD-BB996E3244AD}"/>
               </a:ext>
             </a:extLst>
           </p:cNvPr>
@@ -8791,7 +8650,7 @@
         </p:nvCxnSpPr>
         <p:spPr>
           <a:xfrm>
-            <a:off x="5476394" y="1906884"/>
+            <a:off x="5476394" y="2207234"/>
             <a:ext cx="916917" cy="0"/>
           </a:xfrm>
           <a:prstGeom prst="straightConnector1">
@@ -8820,150 +8679,12 @@
           </a:fontRef>
         </p:style>
       </p:cxnSp>
-      <p:cxnSp>
-        <p:nvCxnSpPr>
-          <p:cNvPr id="185" name="Straight Arrow Connector 184">
-            <a:extLst>
-              <a:ext uri="{FF2B5EF4-FFF2-40B4-BE49-F238E27FC236}">
-                <a16:creationId xmlns:a16="http://schemas.microsoft.com/office/drawing/2014/main" id="{055BC9F6-8C0A-8440-8CB2-B3B3E5CAD35D}"/>
-              </a:ext>
-            </a:extLst>
-          </p:cNvPr>
-          <p:cNvCxnSpPr>
-            <a:cxnSpLocks/>
-            <a:stCxn id="72" idx="2"/>
-            <a:endCxn id="16" idx="0"/>
-          </p:cNvCxnSpPr>
-          <p:nvPr/>
-        </p:nvCxnSpPr>
-        <p:spPr>
-          <a:xfrm>
-            <a:off x="4882764" y="3477117"/>
-            <a:ext cx="7718" cy="545074"/>
-          </a:xfrm>
-          <a:prstGeom prst="straightConnector1">
-            <a:avLst/>
-          </a:prstGeom>
-          <a:ln w="12700">
-            <a:solidFill>
-              <a:schemeClr val="tx1"/>
-            </a:solidFill>
-            <a:prstDash val="dash"/>
-            <a:headEnd type="arrow"/>
-            <a:tailEnd type="arrow"/>
-          </a:ln>
-        </p:spPr>
-        <p:style>
-          <a:lnRef idx="1">
-            <a:schemeClr val="accent1"/>
-          </a:lnRef>
-          <a:fillRef idx="0">
-            <a:schemeClr val="accent1"/>
-          </a:fillRef>
-          <a:effectRef idx="0">
-            <a:schemeClr val="accent1"/>
-          </a:effectRef>
-          <a:fontRef idx="minor">
-            <a:schemeClr val="tx1"/>
-          </a:fontRef>
-        </p:style>
-      </p:cxnSp>
-      <p:cxnSp>
-        <p:nvCxnSpPr>
-          <p:cNvPr id="18" name="Straight Arrow Connector 17">
-            <a:extLst>
-              <a:ext uri="{FF2B5EF4-FFF2-40B4-BE49-F238E27FC236}">
-                <a16:creationId xmlns:a16="http://schemas.microsoft.com/office/drawing/2014/main" id="{289F1476-8289-F0DD-9B6E-4A04F3B111E0}"/>
-              </a:ext>
-            </a:extLst>
-          </p:cNvPr>
-          <p:cNvCxnSpPr>
-            <a:cxnSpLocks/>
-          </p:cNvCxnSpPr>
-          <p:nvPr/>
-        </p:nvCxnSpPr>
-        <p:spPr>
-          <a:xfrm flipH="1">
-            <a:off x="3259163" y="2835020"/>
-            <a:ext cx="1016852" cy="0"/>
-          </a:xfrm>
-          <a:prstGeom prst="straightConnector1">
-            <a:avLst/>
-          </a:prstGeom>
-          <a:ln w="12700">
-            <a:solidFill>
-              <a:schemeClr val="tx1"/>
-            </a:solidFill>
-            <a:headEnd type="arrow"/>
-            <a:tailEnd type="none"/>
-          </a:ln>
-        </p:spPr>
-        <p:style>
-          <a:lnRef idx="1">
-            <a:schemeClr val="accent1"/>
-          </a:lnRef>
-          <a:fillRef idx="0">
-            <a:schemeClr val="accent1"/>
-          </a:fillRef>
-          <a:effectRef idx="0">
-            <a:schemeClr val="accent1"/>
-          </a:effectRef>
-          <a:fontRef idx="minor">
-            <a:schemeClr val="tx1"/>
-          </a:fontRef>
-        </p:style>
-      </p:cxnSp>
-      <p:cxnSp>
-        <p:nvCxnSpPr>
-          <p:cNvPr id="64" name="Straight Arrow Connector 63">
-            <a:extLst>
-              <a:ext uri="{FF2B5EF4-FFF2-40B4-BE49-F238E27FC236}">
-                <a16:creationId xmlns:a16="http://schemas.microsoft.com/office/drawing/2014/main" id="{876C400E-DE7F-DE8B-23CD-DE4F9C59641B}"/>
-              </a:ext>
-            </a:extLst>
-          </p:cNvPr>
-          <p:cNvCxnSpPr>
-            <a:cxnSpLocks/>
-          </p:cNvCxnSpPr>
-          <p:nvPr/>
-        </p:nvCxnSpPr>
-        <p:spPr>
-          <a:xfrm>
-            <a:off x="3260789" y="1693947"/>
-            <a:ext cx="1015226" cy="0"/>
-          </a:xfrm>
-          <a:prstGeom prst="straightConnector1">
-            <a:avLst/>
-          </a:prstGeom>
-          <a:ln w="12700">
-            <a:solidFill>
-              <a:schemeClr val="tx1"/>
-            </a:solidFill>
-            <a:headEnd type="arrow"/>
-            <a:tailEnd type="none"/>
-          </a:ln>
-        </p:spPr>
-        <p:style>
-          <a:lnRef idx="1">
-            <a:schemeClr val="accent1"/>
-          </a:lnRef>
-          <a:fillRef idx="0">
-            <a:schemeClr val="accent1"/>
-          </a:fillRef>
-          <a:effectRef idx="0">
-            <a:schemeClr val="accent1"/>
-          </a:effectRef>
-          <a:fontRef idx="minor">
-            <a:schemeClr val="tx1"/>
-          </a:fontRef>
-        </p:style>
-      </p:cxnSp>
-      <p:sp>
-        <p:nvSpPr>
-          <p:cNvPr id="7" name="Rectangle 6">
-            <a:extLst>
-              <a:ext uri="{FF2B5EF4-FFF2-40B4-BE49-F238E27FC236}">
-                <a16:creationId xmlns:a16="http://schemas.microsoft.com/office/drawing/2014/main" id="{20F24B60-2905-0E09-E718-C84C2BFDB1B3}"/>
+      <p:sp>
+        <p:nvSpPr>
+          <p:cNvPr id="23" name="Rectangle 22">
+            <a:extLst>
+              <a:ext uri="{FF2B5EF4-FFF2-40B4-BE49-F238E27FC236}">
+                <a16:creationId xmlns:a16="http://schemas.microsoft.com/office/drawing/2014/main" id="{3B4BA202-17B6-5B5C-0859-508CF5F6256D}"/>
               </a:ext>
             </a:extLst>
           </p:cNvPr>
@@ -8972,15 +8693,16 @@
         </p:nvSpPr>
         <p:spPr>
           <a:xfrm>
-            <a:off x="3591753" y="1376765"/>
-            <a:ext cx="131182" cy="2096745"/>
+            <a:off x="8000202" y="2710813"/>
+            <a:ext cx="1053987" cy="424557"/>
           </a:xfrm>
           <a:prstGeom prst="rect">
             <a:avLst/>
           </a:prstGeom>
           <a:solidFill>
-            <a:schemeClr val="bg1">
-              <a:lumMod val="65000"/>
+            <a:schemeClr val="accent1">
+              <a:lumMod val="40000"/>
+              <a:lumOff val="60000"/>
             </a:schemeClr>
           </a:solidFill>
         </p:spPr>
@@ -9001,173 +8723,96 @@
           </a:fontRef>
         </p:style>
         <p:txBody>
-          <a:bodyPr lIns="0" tIns="0" rIns="0" bIns="0" rtlCol="0" anchor="ctr"/>
-          <a:lstStyle/>
-          <a:p>
-            <a:pPr algn="ctr"/>
-            <a:r>
-              <a:rPr lang="en-US" sz="1200" dirty="0"/>
-              <a:t>HTTP</a:t>
-            </a:r>
-            <a:endParaRPr lang="en-US" sz="500" dirty="0"/>
-          </a:p>
-        </p:txBody>
-      </p:sp>
-      <p:grpSp>
-        <p:nvGrpSpPr>
-          <p:cNvPr id="33" name="Group 32">
-            <a:extLst>
-              <a:ext uri="{FF2B5EF4-FFF2-40B4-BE49-F238E27FC236}">
-                <a16:creationId xmlns:a16="http://schemas.microsoft.com/office/drawing/2014/main" id="{BE1018F5-4A75-6D58-6DB4-E7F753803B71}"/>
-              </a:ext>
-            </a:extLst>
-          </p:cNvPr>
-          <p:cNvGrpSpPr/>
-          <p:nvPr/>
-        </p:nvGrpSpPr>
-        <p:grpSpPr>
-          <a:xfrm>
-            <a:off x="8000203" y="1376765"/>
-            <a:ext cx="780332" cy="424557"/>
-            <a:chOff x="8977718" y="4467817"/>
-            <a:chExt cx="780332" cy="424557"/>
-          </a:xfrm>
-        </p:grpSpPr>
-        <p:sp>
-          <p:nvSpPr>
-            <p:cNvPr id="23" name="Rectangle 22">
-              <a:extLst>
-                <a:ext uri="{FF2B5EF4-FFF2-40B4-BE49-F238E27FC236}">
-                  <a16:creationId xmlns:a16="http://schemas.microsoft.com/office/drawing/2014/main" id="{76555E47-F4F0-E310-C381-EBE0E8A67088}"/>
-                </a:ext>
-              </a:extLst>
-            </p:cNvPr>
-            <p:cNvSpPr/>
-            <p:nvPr/>
-          </p:nvSpPr>
-          <p:spPr>
-            <a:xfrm>
-              <a:off x="8977718" y="4467817"/>
-              <a:ext cx="780332" cy="424557"/>
-            </a:xfrm>
-            <a:prstGeom prst="rect">
-              <a:avLst/>
-            </a:prstGeom>
-            <a:solidFill>
-              <a:schemeClr val="accent1">
-                <a:lumMod val="40000"/>
-                <a:lumOff val="60000"/>
-              </a:schemeClr>
-            </a:solidFill>
-          </p:spPr>
-          <p:style>
-            <a:lnRef idx="2">
-              <a:schemeClr val="accent1">
-                <a:shade val="15000"/>
-              </a:schemeClr>
-            </a:lnRef>
-            <a:fillRef idx="1">
-              <a:schemeClr val="accent1"/>
-            </a:fillRef>
-            <a:effectRef idx="0">
-              <a:schemeClr val="accent1"/>
-            </a:effectRef>
-            <a:fontRef idx="minor">
-              <a:schemeClr val="lt1"/>
-            </a:fontRef>
-          </p:style>
-          <p:txBody>
-            <a:bodyPr lIns="0" tIns="45720" rIns="0" bIns="0" rtlCol="0" anchor="ctr"/>
-            <a:lstStyle/>
-            <a:p>
-              <a:r>
-                <a:rPr lang="en-US" sz="900" b="1" dirty="0"/>
-                <a:t>🐳</a:t>
-              </a:r>
-            </a:p>
-            <a:p>
-              <a:pPr algn="ctr"/>
-              <a:endParaRPr lang="en-US" sz="200" i="1" dirty="0"/>
-            </a:p>
-          </p:txBody>
-        </p:sp>
-        <p:sp>
-          <p:nvSpPr>
-            <p:cNvPr id="24" name="Rectangle 23">
-              <a:extLst>
-                <a:ext uri="{FF2B5EF4-FFF2-40B4-BE49-F238E27FC236}">
-                  <a16:creationId xmlns:a16="http://schemas.microsoft.com/office/drawing/2014/main" id="{BEF93897-39CC-878E-B9D7-F294A939278E}"/>
-                </a:ext>
-              </a:extLst>
-            </p:cNvPr>
-            <p:cNvSpPr/>
-            <p:nvPr/>
-          </p:nvSpPr>
-          <p:spPr>
-            <a:xfrm>
-              <a:off x="9154560" y="4493215"/>
-              <a:ext cx="579731" cy="372461"/>
-            </a:xfrm>
-            <a:prstGeom prst="rect">
-              <a:avLst/>
-            </a:prstGeom>
-            <a:solidFill>
-              <a:srgbClr val="F4B183"/>
-            </a:solidFill>
-          </p:spPr>
-          <p:style>
-            <a:lnRef idx="2">
-              <a:schemeClr val="accent1">
-                <a:shade val="15000"/>
-              </a:schemeClr>
-            </a:lnRef>
-            <a:fillRef idx="1">
-              <a:schemeClr val="accent1"/>
-            </a:fillRef>
-            <a:effectRef idx="0">
-              <a:schemeClr val="accent1"/>
-            </a:effectRef>
-            <a:fontRef idx="minor">
-              <a:schemeClr val="lt1"/>
-            </a:fontRef>
-          </p:style>
-          <p:txBody>
-            <a:bodyPr lIns="0" tIns="45720" rIns="0" bIns="0" rtlCol="0" anchor="t"/>
-            <a:lstStyle/>
-            <a:p>
-              <a:pPr algn="ctr"/>
-              <a:r>
-                <a:rPr lang="en-US" sz="1100" dirty="0"/>
-                <a:t>🛢️</a:t>
-              </a:r>
-              <a:r>
-                <a:rPr lang="en-US" sz="900" b="1" dirty="0"/>
-                <a:t> </a:t>
-              </a:r>
-              <a:r>
-                <a:rPr lang="en-US" sz="1200" b="1" dirty="0"/>
-                <a:t>DB</a:t>
-              </a:r>
-            </a:p>
-            <a:p>
-              <a:pPr marL="171450" indent="-91440">
-                <a:buFont typeface="Arial" panose="020B0604020202020204" pitchFamily="34" charset="0"/>
-                <a:buChar char="•"/>
-              </a:pPr>
-              <a:r>
-                <a:rPr lang="en-US" sz="900" dirty="0"/>
-                <a:t>xbrl</a:t>
-              </a:r>
-            </a:p>
-          </p:txBody>
-        </p:sp>
-      </p:grpSp>
+          <a:bodyPr lIns="0" tIns="45720" rIns="0" bIns="0" rtlCol="0" anchor="ctr"/>
+          <a:lstStyle/>
+          <a:p>
+            <a:r>
+              <a:rPr lang="en-US" sz="900" b="1" dirty="0"/>
+              <a:t>🐳</a:t>
+            </a:r>
+          </a:p>
+          <a:p>
+            <a:pPr algn="ctr"/>
+            <a:endParaRPr lang="en-US" sz="200" i="1" dirty="0"/>
+          </a:p>
+        </p:txBody>
+      </p:sp>
+      <p:sp>
+        <p:nvSpPr>
+          <p:cNvPr id="24" name="Rectangle 23">
+            <a:extLst>
+              <a:ext uri="{FF2B5EF4-FFF2-40B4-BE49-F238E27FC236}">
+                <a16:creationId xmlns:a16="http://schemas.microsoft.com/office/drawing/2014/main" id="{47BCC2B6-C74A-2DE2-83B5-4B306E2FF2DC}"/>
+              </a:ext>
+            </a:extLst>
+          </p:cNvPr>
+          <p:cNvSpPr/>
+          <p:nvPr/>
+        </p:nvSpPr>
+        <p:spPr>
+          <a:xfrm>
+            <a:off x="8171517" y="2736211"/>
+            <a:ext cx="850581" cy="372461"/>
+          </a:xfrm>
+          <a:prstGeom prst="rect">
+            <a:avLst/>
+          </a:prstGeom>
+          <a:solidFill>
+            <a:srgbClr val="F4B183"/>
+          </a:solidFill>
+        </p:spPr>
+        <p:style>
+          <a:lnRef idx="2">
+            <a:schemeClr val="accent1">
+              <a:shade val="15000"/>
+            </a:schemeClr>
+          </a:lnRef>
+          <a:fillRef idx="1">
+            <a:schemeClr val="accent1"/>
+          </a:fillRef>
+          <a:effectRef idx="0">
+            <a:schemeClr val="accent1"/>
+          </a:effectRef>
+          <a:fontRef idx="minor">
+            <a:schemeClr val="lt1"/>
+          </a:fontRef>
+        </p:style>
+        <p:txBody>
+          <a:bodyPr lIns="0" tIns="45720" rIns="0" bIns="0" rtlCol="0" anchor="t"/>
+          <a:lstStyle/>
+          <a:p>
+            <a:pPr algn="ctr"/>
+            <a:r>
+              <a:rPr lang="en-US" sz="1100" dirty="0"/>
+              <a:t>🛢️</a:t>
+            </a:r>
+            <a:r>
+              <a:rPr lang="en-US" sz="900" b="1" dirty="0"/>
+              <a:t> </a:t>
+            </a:r>
+            <a:r>
+              <a:rPr lang="en-US" sz="1200" b="1" dirty="0"/>
+              <a:t>DB</a:t>
+            </a:r>
+          </a:p>
+          <a:p>
+            <a:pPr marL="171450" indent="-91440">
+              <a:buFont typeface="Arial" panose="020B0604020202020204" pitchFamily="34" charset="0"/>
+              <a:buChar char="•"/>
+            </a:pPr>
+            <a:r>
+              <a:rPr lang="en-US" sz="900" dirty="0"/>
+              <a:t>xbrl</a:t>
+            </a:r>
+          </a:p>
+        </p:txBody>
+      </p:sp>
       <p:cxnSp>
         <p:nvCxnSpPr>
           <p:cNvPr id="38" name="Straight Arrow Connector 37">
             <a:extLst>
               <a:ext uri="{FF2B5EF4-FFF2-40B4-BE49-F238E27FC236}">
-                <a16:creationId xmlns:a16="http://schemas.microsoft.com/office/drawing/2014/main" id="{06A4713F-5E88-B7D3-0663-9307B4B51563}"/>
+                <a16:creationId xmlns:a16="http://schemas.microsoft.com/office/drawing/2014/main" id="{3ABA23A2-9E0A-EF85-AE84-C67620465958}"/>
               </a:ext>
             </a:extLst>
           </p:cNvPr>
@@ -9178,7 +8823,7 @@
         </p:nvCxnSpPr>
         <p:spPr>
           <a:xfrm flipH="1">
-            <a:off x="5483381" y="2835020"/>
+            <a:off x="5483381" y="3135370"/>
             <a:ext cx="909930" cy="0"/>
           </a:xfrm>
           <a:prstGeom prst="straightConnector1">
@@ -9212,7 +8857,7 @@
           <p:cNvPr id="56" name="Straight Arrow Connector 55">
             <a:extLst>
               <a:ext uri="{FF2B5EF4-FFF2-40B4-BE49-F238E27FC236}">
-                <a16:creationId xmlns:a16="http://schemas.microsoft.com/office/drawing/2014/main" id="{5AD8693A-2225-9F20-4278-50FD31AD2C77}"/>
+                <a16:creationId xmlns:a16="http://schemas.microsoft.com/office/drawing/2014/main" id="{5C4D6691-A751-DA49-0A56-0EE36C6105F2}"/>
               </a:ext>
             </a:extLst>
           </p:cNvPr>
@@ -9224,8 +8869,8 @@
         </p:nvCxnSpPr>
         <p:spPr>
           <a:xfrm>
-            <a:off x="7504196" y="1588393"/>
-            <a:ext cx="496007" cy="651"/>
+            <a:off x="7504196" y="2922441"/>
+            <a:ext cx="496006" cy="651"/>
           </a:xfrm>
           <a:prstGeom prst="straightConnector1">
             <a:avLst/>
@@ -9254,10 +8899,683 @@
           </a:fontRef>
         </p:style>
       </p:cxnSp>
+      <p:sp>
+        <p:nvSpPr>
+          <p:cNvPr id="74" name="Rectangle 73">
+            <a:extLst>
+              <a:ext uri="{FF2B5EF4-FFF2-40B4-BE49-F238E27FC236}">
+                <a16:creationId xmlns:a16="http://schemas.microsoft.com/office/drawing/2014/main" id="{1480122E-229C-B491-3E8E-590CD91098D8}"/>
+              </a:ext>
+            </a:extLst>
+          </p:cNvPr>
+          <p:cNvSpPr/>
+          <p:nvPr/>
+        </p:nvSpPr>
+        <p:spPr>
+          <a:xfrm>
+            <a:off x="4285400" y="4013034"/>
+            <a:ext cx="1194727" cy="1534841"/>
+          </a:xfrm>
+          <a:prstGeom prst="rect">
+            <a:avLst/>
+          </a:prstGeom>
+          <a:solidFill>
+            <a:schemeClr val="tx2">
+              <a:lumMod val="60000"/>
+              <a:lumOff val="40000"/>
+            </a:schemeClr>
+          </a:solidFill>
+        </p:spPr>
+        <p:style>
+          <a:lnRef idx="2">
+            <a:schemeClr val="accent1">
+              <a:shade val="15000"/>
+            </a:schemeClr>
+          </a:lnRef>
+          <a:fillRef idx="1">
+            <a:schemeClr val="accent1"/>
+          </a:fillRef>
+          <a:effectRef idx="0">
+            <a:schemeClr val="accent1"/>
+          </a:effectRef>
+          <a:fontRef idx="minor">
+            <a:schemeClr val="lt1"/>
+          </a:fontRef>
+        </p:style>
+        <p:txBody>
+          <a:bodyPr lIns="0" tIns="0" rIns="0" bIns="0" rtlCol="0" anchor="ctr"/>
+          <a:lstStyle/>
+          <a:p>
+            <a:pPr algn="ctr"/>
+            <a:r>
+              <a:rPr lang="en-US" sz="1600" dirty="0"/>
+              <a:t>Web Server</a:t>
+            </a:r>
+          </a:p>
+          <a:p>
+            <a:pPr algn="ctr"/>
+            <a:r>
+              <a:rPr lang="en-US" sz="600" dirty="0"/>
+              <a:t>(Caddy)</a:t>
+            </a:r>
+            <a:endParaRPr lang="en-US" sz="500" dirty="0"/>
+          </a:p>
+          <a:p>
+            <a:pPr algn="ctr"/>
+            <a:r>
+              <a:rPr lang="en-US" sz="1100" u="sng" dirty="0"/>
+              <a:t>web/</a:t>
+            </a:r>
+          </a:p>
+          <a:p>
+            <a:pPr algn="ctr"/>
+            <a:endParaRPr lang="en-US" sz="1100" u="sng" dirty="0"/>
+          </a:p>
+          <a:p>
+            <a:pPr algn="ctr"/>
+            <a:r>
+              <a:rPr lang="en-US" sz="800" dirty="0"/>
+              <a:t>📚 </a:t>
+            </a:r>
+            <a:r>
+              <a:rPr lang="en-US" sz="800" b="1" u="sng" dirty="0"/>
+              <a:t>Angular 22</a:t>
+            </a:r>
+            <a:endParaRPr lang="en-US" sz="800" dirty="0"/>
+          </a:p>
+          <a:p>
+            <a:pPr algn="ctr"/>
+            <a:r>
+              <a:rPr lang="en-US" sz="800" dirty="0"/>
+              <a:t>📚 </a:t>
+            </a:r>
+            <a:r>
+              <a:rPr lang="en-US" sz="800" b="1" u="sng" dirty="0"/>
+              <a:t>ngrx/signals</a:t>
+            </a:r>
+          </a:p>
+          <a:p>
+            <a:pPr algn="ctr"/>
+            <a:r>
+              <a:rPr lang="en-US" sz="800" dirty="0"/>
+              <a:t>📚 </a:t>
+            </a:r>
+            <a:r>
+              <a:rPr lang="en-US" sz="800" b="1" u="sng" dirty="0"/>
+              <a:t>ng-apexcharts</a:t>
+            </a:r>
+            <a:endParaRPr lang="en-US" sz="800" dirty="0"/>
+          </a:p>
+          <a:p>
+            <a:pPr algn="ctr"/>
+            <a:endParaRPr lang="en-US" sz="800" dirty="0"/>
+          </a:p>
+          <a:p>
+            <a:pPr algn="ctr"/>
+            <a:r>
+              <a:rPr lang="en-US" sz="800" dirty="0"/>
+              <a:t>Serves the Client </a:t>
+            </a:r>
+          </a:p>
+          <a:p>
+            <a:pPr algn="ctr"/>
+            <a:r>
+              <a:rPr lang="en-US" sz="800" dirty="0"/>
+              <a:t>HTML+JS pages</a:t>
+            </a:r>
+          </a:p>
+        </p:txBody>
+      </p:sp>
+      <p:cxnSp>
+        <p:nvCxnSpPr>
+          <p:cNvPr id="75" name="Straight Arrow Connector 74">
+            <a:extLst>
+              <a:ext uri="{FF2B5EF4-FFF2-40B4-BE49-F238E27FC236}">
+                <a16:creationId xmlns:a16="http://schemas.microsoft.com/office/drawing/2014/main" id="{5FE23C77-9F11-958A-0905-9E33B1CF083B}"/>
+              </a:ext>
+            </a:extLst>
+          </p:cNvPr>
+          <p:cNvCxnSpPr>
+            <a:cxnSpLocks/>
+            <a:stCxn id="74" idx="1"/>
+          </p:cNvCxnSpPr>
+          <p:nvPr/>
+        </p:nvCxnSpPr>
+        <p:spPr>
+          <a:xfrm flipH="1">
+            <a:off x="3010464" y="4780455"/>
+            <a:ext cx="1274936" cy="0"/>
+          </a:xfrm>
+          <a:prstGeom prst="straightConnector1">
+            <a:avLst/>
+          </a:prstGeom>
+          <a:ln w="12700">
+            <a:solidFill>
+              <a:schemeClr val="tx1"/>
+            </a:solidFill>
+            <a:headEnd type="arrow"/>
+            <a:tailEnd type="arrow"/>
+          </a:ln>
+        </p:spPr>
+        <p:style>
+          <a:lnRef idx="1">
+            <a:schemeClr val="accent1"/>
+          </a:lnRef>
+          <a:fillRef idx="0">
+            <a:schemeClr val="accent1"/>
+          </a:fillRef>
+          <a:effectRef idx="0">
+            <a:schemeClr val="accent1"/>
+          </a:effectRef>
+          <a:fontRef idx="minor">
+            <a:schemeClr val="tx1"/>
+          </a:fontRef>
+        </p:style>
+      </p:cxnSp>
+      <p:cxnSp>
+        <p:nvCxnSpPr>
+          <p:cNvPr id="83" name="Connector: Elbow 82">
+            <a:extLst>
+              <a:ext uri="{FF2B5EF4-FFF2-40B4-BE49-F238E27FC236}">
+                <a16:creationId xmlns:a16="http://schemas.microsoft.com/office/drawing/2014/main" id="{BD89F9C4-E0A3-4696-2C7F-04DF17EAC057}"/>
+              </a:ext>
+            </a:extLst>
+          </p:cNvPr>
+          <p:cNvCxnSpPr>
+            <a:cxnSpLocks/>
+            <a:stCxn id="72" idx="0"/>
+            <a:endCxn id="16" idx="0"/>
+          </p:cNvCxnSpPr>
+          <p:nvPr/>
+        </p:nvCxnSpPr>
+        <p:spPr>
+          <a:xfrm rot="5400000" flipH="1" flipV="1">
+            <a:off x="6563539" y="-361378"/>
+            <a:ext cx="357719" cy="3719269"/>
+          </a:xfrm>
+          <a:prstGeom prst="bentConnector3">
+            <a:avLst>
+              <a:gd name="adj1" fmla="val 163905"/>
+            </a:avLst>
+          </a:prstGeom>
+          <a:ln w="12700">
+            <a:solidFill>
+              <a:schemeClr val="tx1"/>
+            </a:solidFill>
+            <a:prstDash val="dash"/>
+            <a:headEnd type="arrow"/>
+            <a:tailEnd type="arrow"/>
+          </a:ln>
+        </p:spPr>
+        <p:style>
+          <a:lnRef idx="1">
+            <a:schemeClr val="accent1"/>
+          </a:lnRef>
+          <a:fillRef idx="0">
+            <a:schemeClr val="accent1"/>
+          </a:fillRef>
+          <a:effectRef idx="0">
+            <a:schemeClr val="accent1"/>
+          </a:effectRef>
+          <a:fontRef idx="minor">
+            <a:schemeClr val="tx1"/>
+          </a:fontRef>
+        </p:style>
+      </p:cxnSp>
+      <p:sp>
+        <p:nvSpPr>
+          <p:cNvPr id="4" name="TextBox 3">
+            <a:extLst>
+              <a:ext uri="{FF2B5EF4-FFF2-40B4-BE49-F238E27FC236}">
+                <a16:creationId xmlns:a16="http://schemas.microsoft.com/office/drawing/2014/main" id="{CBC2861F-785C-642F-E5A6-CD4C94ACA223}"/>
+              </a:ext>
+            </a:extLst>
+          </p:cNvPr>
+          <p:cNvSpPr txBox="1"/>
+          <p:nvPr/>
+        </p:nvSpPr>
+        <p:spPr>
+          <a:xfrm>
+            <a:off x="3266505" y="4804373"/>
+            <a:ext cx="816833" cy="169277"/>
+          </a:xfrm>
+          <a:prstGeom prst="rect">
+            <a:avLst/>
+          </a:prstGeom>
+          <a:noFill/>
+        </p:spPr>
+        <p:txBody>
+          <a:bodyPr wrap="square" lIns="0" tIns="0" rIns="0" bIns="0" rtlCol="0">
+            <a:spAutoFit/>
+          </a:bodyPr>
+          <a:lstStyle>
+            <a:defPPr>
+              <a:defRPr lang="en-US"/>
+            </a:defPPr>
+            <a:lvl1pPr algn="r">
+              <a:defRPr sz="1100" i="1"/>
+            </a:lvl1pPr>
+          </a:lstStyle>
+          <a:p>
+            <a:pPr algn="ctr"/>
+            <a:r>
+              <a:rPr lang="en-US" dirty="0"/>
+              <a:t>JSON + events</a:t>
+            </a:r>
+          </a:p>
+        </p:txBody>
+      </p:sp>
+      <p:sp>
+        <p:nvSpPr>
+          <p:cNvPr id="9" name="TextBox 8">
+            <a:extLst>
+              <a:ext uri="{FF2B5EF4-FFF2-40B4-BE49-F238E27FC236}">
+                <a16:creationId xmlns:a16="http://schemas.microsoft.com/office/drawing/2014/main" id="{A8018FAA-AEBE-E7A7-CB24-80C4201B4236}"/>
+              </a:ext>
+            </a:extLst>
+          </p:cNvPr>
+          <p:cNvSpPr txBox="1"/>
+          <p:nvPr/>
+        </p:nvSpPr>
+        <p:spPr>
+          <a:xfrm>
+            <a:off x="3318085" y="4968158"/>
+            <a:ext cx="670228" cy="169277"/>
+          </a:xfrm>
+          <a:prstGeom prst="rect">
+            <a:avLst/>
+          </a:prstGeom>
+          <a:noFill/>
+        </p:spPr>
+        <p:txBody>
+          <a:bodyPr wrap="square" lIns="0" tIns="0" rIns="0" bIns="0" rtlCol="0">
+            <a:spAutoFit/>
+          </a:bodyPr>
+          <a:lstStyle>
+            <a:defPPr>
+              <a:defRPr lang="en-US"/>
+            </a:defPPr>
+            <a:lvl1pPr algn="r">
+              <a:defRPr sz="1100" i="1"/>
+            </a:lvl1pPr>
+          </a:lstStyle>
+          <a:p>
+            <a:pPr algn="ctr"/>
+            <a:r>
+              <a:rPr lang="en-US" dirty="0"/>
+              <a:t>HTML + JS</a:t>
+            </a:r>
+          </a:p>
+        </p:txBody>
+      </p:sp>
+      <p:sp>
+        <p:nvSpPr>
+          <p:cNvPr id="10" name="TextBox 9">
+            <a:extLst>
+              <a:ext uri="{FF2B5EF4-FFF2-40B4-BE49-F238E27FC236}">
+                <a16:creationId xmlns:a16="http://schemas.microsoft.com/office/drawing/2014/main" id="{C13DA346-7CB0-96D7-8EC5-FD9E1EA22013}"/>
+              </a:ext>
+            </a:extLst>
+          </p:cNvPr>
+          <p:cNvSpPr txBox="1"/>
+          <p:nvPr/>
+        </p:nvSpPr>
+        <p:spPr>
+          <a:xfrm>
+            <a:off x="3213585" y="4576007"/>
+            <a:ext cx="816833" cy="153888"/>
+          </a:xfrm>
+          <a:prstGeom prst="rect">
+            <a:avLst/>
+          </a:prstGeom>
+          <a:noFill/>
+        </p:spPr>
+        <p:txBody>
+          <a:bodyPr wrap="square" lIns="0" tIns="0" rIns="0" bIns="0" rtlCol="0">
+            <a:spAutoFit/>
+          </a:bodyPr>
+          <a:lstStyle>
+            <a:defPPr>
+              <a:defRPr lang="en-US"/>
+            </a:defPPr>
+            <a:lvl1pPr algn="r">
+              <a:defRPr sz="1100" i="1"/>
+            </a:lvl1pPr>
+          </a:lstStyle>
+          <a:p>
+            <a:pPr algn="ctr"/>
+            <a:r>
+              <a:rPr lang="en-US" sz="1000" i="0" dirty="0"/>
+              <a:t>HTTP Requests</a:t>
+            </a:r>
+          </a:p>
+        </p:txBody>
+      </p:sp>
+      <p:sp>
+        <p:nvSpPr>
+          <p:cNvPr id="12" name="TextBox 11">
+            <a:extLst>
+              <a:ext uri="{FF2B5EF4-FFF2-40B4-BE49-F238E27FC236}">
+                <a16:creationId xmlns:a16="http://schemas.microsoft.com/office/drawing/2014/main" id="{052EA57F-A625-2207-FF4A-A8C1D6F8B879}"/>
+              </a:ext>
+            </a:extLst>
+          </p:cNvPr>
+          <p:cNvSpPr txBox="1"/>
+          <p:nvPr/>
+        </p:nvSpPr>
+        <p:spPr>
+          <a:xfrm>
+            <a:off x="4791970" y="3645572"/>
+            <a:ext cx="670228" cy="169277"/>
+          </a:xfrm>
+          <a:prstGeom prst="rect">
+            <a:avLst/>
+          </a:prstGeom>
+          <a:noFill/>
+        </p:spPr>
+        <p:txBody>
+          <a:bodyPr wrap="square" lIns="0" tIns="0" rIns="0" bIns="0" rtlCol="0">
+            <a:spAutoFit/>
+          </a:bodyPr>
+          <a:lstStyle>
+            <a:defPPr>
+              <a:defRPr lang="en-US"/>
+            </a:defPPr>
+            <a:lvl1pPr algn="r">
+              <a:defRPr sz="1100" i="1"/>
+            </a:lvl1pPr>
+          </a:lstStyle>
+          <a:p>
+            <a:pPr algn="ctr"/>
+            <a:r>
+              <a:rPr lang="en-US" dirty="0"/>
+              <a:t>/api/*</a:t>
+            </a:r>
+          </a:p>
+        </p:txBody>
+      </p:sp>
+      <p:cxnSp>
+        <p:nvCxnSpPr>
+          <p:cNvPr id="15" name="Straight Arrow Connector 14">
+            <a:extLst>
+              <a:ext uri="{FF2B5EF4-FFF2-40B4-BE49-F238E27FC236}">
+                <a16:creationId xmlns:a16="http://schemas.microsoft.com/office/drawing/2014/main" id="{F7CB8C70-34A9-BA52-6569-8902A81C5D57}"/>
+              </a:ext>
+            </a:extLst>
+          </p:cNvPr>
+          <p:cNvCxnSpPr>
+            <a:cxnSpLocks/>
+            <a:stCxn id="74" idx="0"/>
+            <a:endCxn id="72" idx="2"/>
+          </p:cNvCxnSpPr>
+          <p:nvPr/>
+        </p:nvCxnSpPr>
+        <p:spPr>
+          <a:xfrm flipV="1">
+            <a:off x="4882764" y="3383947"/>
+            <a:ext cx="0" cy="629087"/>
+          </a:xfrm>
+          <a:prstGeom prst="straightConnector1">
+            <a:avLst/>
+          </a:prstGeom>
+          <a:ln w="12700">
+            <a:solidFill>
+              <a:schemeClr val="tx1"/>
+            </a:solidFill>
+            <a:headEnd type="arrow"/>
+            <a:tailEnd type="arrow"/>
+          </a:ln>
+        </p:spPr>
+        <p:style>
+          <a:lnRef idx="1">
+            <a:schemeClr val="accent1"/>
+          </a:lnRef>
+          <a:fillRef idx="0">
+            <a:schemeClr val="accent1"/>
+          </a:fillRef>
+          <a:effectRef idx="0">
+            <a:schemeClr val="accent1"/>
+          </a:effectRef>
+          <a:fontRef idx="minor">
+            <a:schemeClr val="tx1"/>
+          </a:fontRef>
+        </p:style>
+      </p:cxnSp>
+      <p:cxnSp>
+        <p:nvCxnSpPr>
+          <p:cNvPr id="92" name="Connector: Elbow 91">
+            <a:extLst>
+              <a:ext uri="{FF2B5EF4-FFF2-40B4-BE49-F238E27FC236}">
+                <a16:creationId xmlns:a16="http://schemas.microsoft.com/office/drawing/2014/main" id="{A005EC75-6ED2-9062-08C5-B31A711C156A}"/>
+              </a:ext>
+            </a:extLst>
+          </p:cNvPr>
+          <p:cNvCxnSpPr>
+            <a:cxnSpLocks/>
+            <a:stCxn id="50" idx="1"/>
+            <a:endCxn id="143" idx="2"/>
+          </p:cNvCxnSpPr>
+          <p:nvPr/>
+        </p:nvCxnSpPr>
+        <p:spPr>
+          <a:xfrm rot="10800000">
+            <a:off x="6948754" y="3428351"/>
+            <a:ext cx="1051243" cy="904923"/>
+          </a:xfrm>
+          <a:prstGeom prst="bentConnector2">
+            <a:avLst/>
+          </a:prstGeom>
+          <a:ln w="12700">
+            <a:solidFill>
+              <a:schemeClr val="tx1"/>
+            </a:solidFill>
+            <a:prstDash val="dash"/>
+            <a:headEnd type="arrow"/>
+            <a:tailEnd type="arrow"/>
+          </a:ln>
+        </p:spPr>
+        <p:style>
+          <a:lnRef idx="1">
+            <a:schemeClr val="accent1"/>
+          </a:lnRef>
+          <a:fillRef idx="0">
+            <a:schemeClr val="accent1"/>
+          </a:fillRef>
+          <a:effectRef idx="0">
+            <a:schemeClr val="accent1"/>
+          </a:effectRef>
+          <a:fontRef idx="minor">
+            <a:schemeClr val="tx1"/>
+          </a:fontRef>
+        </p:style>
+      </p:cxnSp>
+      <p:sp>
+        <p:nvSpPr>
+          <p:cNvPr id="118" name="Flowchart: Off-page Connector 117">
+            <a:extLst>
+              <a:ext uri="{FF2B5EF4-FFF2-40B4-BE49-F238E27FC236}">
+                <a16:creationId xmlns:a16="http://schemas.microsoft.com/office/drawing/2014/main" id="{F263E383-04D9-4274-55DF-1B367571C0F0}"/>
+              </a:ext>
+            </a:extLst>
+          </p:cNvPr>
+          <p:cNvSpPr/>
+          <p:nvPr/>
+        </p:nvSpPr>
+        <p:spPr>
+          <a:xfrm rot="16200000">
+            <a:off x="4150911" y="4072697"/>
+            <a:ext cx="186884" cy="240280"/>
+          </a:xfrm>
+          <a:prstGeom prst="flowChartOffpageConnector">
+            <a:avLst/>
+          </a:prstGeom>
+          <a:solidFill>
+            <a:schemeClr val="accent4">
+              <a:lumMod val="60000"/>
+              <a:lumOff val="40000"/>
+            </a:schemeClr>
+          </a:solidFill>
+        </p:spPr>
+        <p:style>
+          <a:lnRef idx="2">
+            <a:schemeClr val="accent1">
+              <a:shade val="15000"/>
+            </a:schemeClr>
+          </a:lnRef>
+          <a:fillRef idx="1">
+            <a:schemeClr val="accent1"/>
+          </a:fillRef>
+          <a:effectRef idx="0">
+            <a:schemeClr val="accent1"/>
+          </a:effectRef>
+          <a:fontRef idx="minor">
+            <a:schemeClr val="lt1"/>
+          </a:fontRef>
+        </p:style>
+        <p:txBody>
+          <a:bodyPr vert="vert" rtlCol="0" anchor="ctr"/>
+          <a:lstStyle/>
+          <a:p>
+            <a:pPr algn="ctr"/>
+            <a:r>
+              <a:rPr lang="en-US" sz="1400" b="1" dirty="0">
+                <a:solidFill>
+                  <a:schemeClr val="accent4">
+                    <a:lumMod val="75000"/>
+                  </a:schemeClr>
+                </a:solidFill>
+              </a:rPr>
+              <a:t>2</a:t>
+            </a:r>
+          </a:p>
+        </p:txBody>
+      </p:sp>
+      <p:sp>
+        <p:nvSpPr>
+          <p:cNvPr id="28" name="Flowchart: Off-page Connector 27">
+            <a:extLst>
+              <a:ext uri="{FF2B5EF4-FFF2-40B4-BE49-F238E27FC236}">
+                <a16:creationId xmlns:a16="http://schemas.microsoft.com/office/drawing/2014/main" id="{3C23E572-F47B-64A0-F8DD-7D260DF9E656}"/>
+              </a:ext>
+            </a:extLst>
+          </p:cNvPr>
+          <p:cNvSpPr/>
+          <p:nvPr/>
+        </p:nvSpPr>
+        <p:spPr>
+          <a:xfrm rot="16200000">
+            <a:off x="5353566" y="2923047"/>
+            <a:ext cx="186884" cy="210161"/>
+          </a:xfrm>
+          <a:prstGeom prst="flowChartOffpageConnector">
+            <a:avLst/>
+          </a:prstGeom>
+          <a:solidFill>
+            <a:schemeClr val="accent4">
+              <a:lumMod val="60000"/>
+              <a:lumOff val="40000"/>
+            </a:schemeClr>
+          </a:solidFill>
+        </p:spPr>
+        <p:style>
+          <a:lnRef idx="2">
+            <a:schemeClr val="accent1">
+              <a:shade val="15000"/>
+            </a:schemeClr>
+          </a:lnRef>
+          <a:fillRef idx="1">
+            <a:schemeClr val="accent1"/>
+          </a:fillRef>
+          <a:effectRef idx="0">
+            <a:schemeClr val="accent1"/>
+          </a:effectRef>
+          <a:fontRef idx="minor">
+            <a:schemeClr val="lt1"/>
+          </a:fontRef>
+        </p:style>
+        <p:txBody>
+          <a:bodyPr vert="vert" rtlCol="0" anchor="ctr"/>
+          <a:lstStyle/>
+          <a:p>
+            <a:pPr algn="ctr"/>
+            <a:r>
+              <a:rPr lang="en-US" sz="1400" b="1" dirty="0">
+                <a:solidFill>
+                  <a:schemeClr val="accent4">
+                    <a:lumMod val="75000"/>
+                  </a:schemeClr>
+                </a:solidFill>
+              </a:rPr>
+              <a:t>3</a:t>
+            </a:r>
+          </a:p>
+        </p:txBody>
+      </p:sp>
+      <p:sp>
+        <p:nvSpPr>
+          <p:cNvPr id="136" name="Flowchart: Off-page Connector 135">
+            <a:extLst>
+              <a:ext uri="{FF2B5EF4-FFF2-40B4-BE49-F238E27FC236}">
+                <a16:creationId xmlns:a16="http://schemas.microsoft.com/office/drawing/2014/main" id="{E13A9921-036D-16B5-52F3-0B666968F8B0}"/>
+              </a:ext>
+            </a:extLst>
+          </p:cNvPr>
+          <p:cNvSpPr/>
+          <p:nvPr/>
+        </p:nvSpPr>
+        <p:spPr>
+          <a:xfrm rot="16200000">
+            <a:off x="5399276" y="1982657"/>
+            <a:ext cx="186884" cy="210161"/>
+          </a:xfrm>
+          <a:prstGeom prst="flowChartOffpageConnector">
+            <a:avLst/>
+          </a:prstGeom>
+          <a:solidFill>
+            <a:schemeClr val="accent4">
+              <a:lumMod val="60000"/>
+              <a:lumOff val="40000"/>
+            </a:schemeClr>
+          </a:solidFill>
+        </p:spPr>
+        <p:style>
+          <a:lnRef idx="2">
+            <a:schemeClr val="accent1">
+              <a:shade val="15000"/>
+            </a:schemeClr>
+          </a:lnRef>
+          <a:fillRef idx="1">
+            <a:schemeClr val="accent1"/>
+          </a:fillRef>
+          <a:effectRef idx="0">
+            <a:schemeClr val="accent1"/>
+          </a:effectRef>
+          <a:fontRef idx="minor">
+            <a:schemeClr val="lt1"/>
+          </a:fontRef>
+        </p:style>
+        <p:txBody>
+          <a:bodyPr vert="vert" rtlCol="0" anchor="ctr"/>
+          <a:lstStyle/>
+          <a:p>
+            <a:pPr algn="ctr"/>
+            <a:r>
+              <a:rPr lang="en-US" sz="1400" b="1" dirty="0">
+                <a:solidFill>
+                  <a:schemeClr val="accent4">
+                    <a:lumMod val="75000"/>
+                  </a:schemeClr>
+                </a:solidFill>
+              </a:rPr>
+              <a:t>5</a:t>
+            </a:r>
+          </a:p>
+        </p:txBody>
+      </p:sp>
     </p:spTree>
     <p:extLst>
       <p:ext uri="{BB962C8B-B14F-4D97-AF65-F5344CB8AC3E}">
-        <p14:creationId xmlns:p14="http://schemas.microsoft.com/office/powerpoint/2010/main" val="3238737500"/>
+        <p14:creationId xmlns:p14="http://schemas.microsoft.com/office/powerpoint/2010/main" val="87944047"/>
       </p:ext>
     </p:extLst>
   </p:cSld>
@@ -11028,6 +11346,1669 @@
     <p:extLst>
       <p:ext uri="{BB962C8B-B14F-4D97-AF65-F5344CB8AC3E}">
         <p14:creationId xmlns:p14="http://schemas.microsoft.com/office/powerpoint/2010/main" val="2019995292"/>
+      </p:ext>
+    </p:extLst>
+  </p:cSld>
+  <p:clrMapOvr>
+    <a:masterClrMapping/>
+  </p:clrMapOvr>
+</p:sld>
+</file>
+
+<file path=ppt/slides/slide4.xml><?xml version="1.0" encoding="utf-8"?>
+<p:sld xmlns:a="http://schemas.openxmlformats.org/drawingml/2006/main" xmlns:r="http://schemas.openxmlformats.org/officeDocument/2006/relationships" xmlns:p="http://schemas.openxmlformats.org/presentationml/2006/main">
+  <p:cSld>
+    <p:spTree>
+      <p:nvGrpSpPr>
+        <p:cNvPr id="1" name="">
+          <a:extLst>
+            <a:ext uri="{FF2B5EF4-FFF2-40B4-BE49-F238E27FC236}">
+              <a16:creationId xmlns:a16="http://schemas.microsoft.com/office/drawing/2014/main" id="{C7CE0D83-8119-E82B-CA99-B9342FEC22DD}"/>
+            </a:ext>
+          </a:extLst>
+        </p:cNvPr>
+        <p:cNvGrpSpPr/>
+        <p:nvPr/>
+      </p:nvGrpSpPr>
+      <p:grpSpPr>
+        <a:xfrm>
+          <a:off x="0" y="0"/>
+          <a:ext cx="0" cy="0"/>
+          <a:chOff x="0" y="0"/>
+          <a:chExt cx="0" cy="0"/>
+        </a:xfrm>
+      </p:grpSpPr>
+      <p:sp>
+        <p:nvSpPr>
+          <p:cNvPr id="201" name="Rectangle: Rounded Corners 200">
+            <a:extLst>
+              <a:ext uri="{FF2B5EF4-FFF2-40B4-BE49-F238E27FC236}">
+                <a16:creationId xmlns:a16="http://schemas.microsoft.com/office/drawing/2014/main" id="{E73DDC3C-908A-4491-D677-669A6CAE5244}"/>
+              </a:ext>
+            </a:extLst>
+          </p:cNvPr>
+          <p:cNvSpPr/>
+          <p:nvPr/>
+        </p:nvSpPr>
+        <p:spPr>
+          <a:xfrm>
+            <a:off x="4098114" y="3744368"/>
+            <a:ext cx="4932420" cy="2109127"/>
+          </a:xfrm>
+          <a:prstGeom prst="roundRect">
+            <a:avLst>
+              <a:gd name="adj" fmla="val 5996"/>
+            </a:avLst>
+          </a:prstGeom>
+          <a:noFill/>
+          <a:ln>
+            <a:prstDash val="sysDash"/>
+          </a:ln>
+        </p:spPr>
+        <p:style>
+          <a:lnRef idx="2">
+            <a:schemeClr val="accent1">
+              <a:shade val="15000"/>
+            </a:schemeClr>
+          </a:lnRef>
+          <a:fillRef idx="1">
+            <a:schemeClr val="accent1"/>
+          </a:fillRef>
+          <a:effectRef idx="0">
+            <a:schemeClr val="accent1"/>
+          </a:effectRef>
+          <a:fontRef idx="minor">
+            <a:schemeClr val="lt1"/>
+          </a:fontRef>
+        </p:style>
+        <p:txBody>
+          <a:bodyPr lIns="0" tIns="0" rIns="0" bIns="0" rtlCol="0" anchor="t"/>
+          <a:lstStyle/>
+          <a:p>
+            <a:pPr algn="ctr"/>
+            <a:r>
+              <a:rPr lang="en-US" sz="1200" dirty="0">
+                <a:solidFill>
+                  <a:schemeClr val="tx1"/>
+                </a:solidFill>
+              </a:rPr>
+              <a:t>Build Time</a:t>
+            </a:r>
+          </a:p>
+        </p:txBody>
+      </p:sp>
+      <p:sp>
+        <p:nvSpPr>
+          <p:cNvPr id="57" name="Rectangle 56">
+            <a:extLst>
+              <a:ext uri="{FF2B5EF4-FFF2-40B4-BE49-F238E27FC236}">
+                <a16:creationId xmlns:a16="http://schemas.microsoft.com/office/drawing/2014/main" id="{C062ABCF-6465-DFB0-05C3-695005C43686}"/>
+              </a:ext>
+            </a:extLst>
+          </p:cNvPr>
+          <p:cNvSpPr/>
+          <p:nvPr/>
+        </p:nvSpPr>
+        <p:spPr>
+          <a:xfrm>
+            <a:off x="4897822" y="4081568"/>
+            <a:ext cx="1635112" cy="1484422"/>
+          </a:xfrm>
+          <a:prstGeom prst="rect">
+            <a:avLst/>
+          </a:prstGeom>
+          <a:solidFill>
+            <a:schemeClr val="accent4">
+              <a:lumMod val="75000"/>
+            </a:schemeClr>
+          </a:solidFill>
+        </p:spPr>
+        <p:style>
+          <a:lnRef idx="2">
+            <a:schemeClr val="accent1">
+              <a:shade val="15000"/>
+            </a:schemeClr>
+          </a:lnRef>
+          <a:fillRef idx="1">
+            <a:schemeClr val="accent1"/>
+          </a:fillRef>
+          <a:effectRef idx="0">
+            <a:schemeClr val="accent1"/>
+          </a:effectRef>
+          <a:fontRef idx="minor">
+            <a:schemeClr val="lt1"/>
+          </a:fontRef>
+        </p:style>
+        <p:txBody>
+          <a:bodyPr lIns="0" tIns="0" rIns="0" bIns="0" rtlCol="0" anchor="t"/>
+          <a:lstStyle/>
+          <a:p>
+            <a:pPr algn="ctr"/>
+            <a:r>
+              <a:rPr lang="en-US" dirty="0"/>
+              <a:t>Angular CLI</a:t>
+            </a:r>
+          </a:p>
+        </p:txBody>
+      </p:sp>
+      <p:sp>
+        <p:nvSpPr>
+          <p:cNvPr id="75" name="Rectangle 74">
+            <a:extLst>
+              <a:ext uri="{FF2B5EF4-FFF2-40B4-BE49-F238E27FC236}">
+                <a16:creationId xmlns:a16="http://schemas.microsoft.com/office/drawing/2014/main" id="{17252D85-CAAC-DB4A-0095-44C0AAEDA212}"/>
+              </a:ext>
+            </a:extLst>
+          </p:cNvPr>
+          <p:cNvSpPr/>
+          <p:nvPr/>
+        </p:nvSpPr>
+        <p:spPr>
+          <a:xfrm>
+            <a:off x="5187161" y="4459735"/>
+            <a:ext cx="1121308" cy="948726"/>
+          </a:xfrm>
+          <a:prstGeom prst="rect">
+            <a:avLst/>
+          </a:prstGeom>
+          <a:solidFill>
+            <a:schemeClr val="accent4">
+              <a:lumMod val="75000"/>
+            </a:schemeClr>
+          </a:solidFill>
+          <a:ln>
+            <a:solidFill>
+              <a:schemeClr val="tx1"/>
+            </a:solidFill>
+          </a:ln>
+        </p:spPr>
+        <p:style>
+          <a:lnRef idx="2">
+            <a:schemeClr val="accent1">
+              <a:shade val="15000"/>
+            </a:schemeClr>
+          </a:lnRef>
+          <a:fillRef idx="1">
+            <a:schemeClr val="accent1"/>
+          </a:fillRef>
+          <a:effectRef idx="0">
+            <a:schemeClr val="accent1"/>
+          </a:effectRef>
+          <a:fontRef idx="minor">
+            <a:schemeClr val="lt1"/>
+          </a:fontRef>
+        </p:style>
+        <p:txBody>
+          <a:bodyPr lIns="0" tIns="0" rIns="0" bIns="0" rtlCol="0" anchor="t"/>
+          <a:lstStyle/>
+          <a:p>
+            <a:pPr algn="ctr"/>
+            <a:endParaRPr lang="en-US" sz="300" dirty="0"/>
+          </a:p>
+          <a:p>
+            <a:pPr algn="ctr"/>
+            <a:r>
+              <a:rPr lang="en-US" sz="1100" dirty="0"/>
+              <a:t>Angular </a:t>
+            </a:r>
+          </a:p>
+          <a:p>
+            <a:pPr algn="ctr"/>
+            <a:r>
+              <a:rPr lang="en-US" sz="1100" dirty="0"/>
+              <a:t>Compiler</a:t>
+            </a:r>
+          </a:p>
+        </p:txBody>
+      </p:sp>
+      <p:sp>
+        <p:nvSpPr>
+          <p:cNvPr id="8" name="Title 1024">
+            <a:extLst>
+              <a:ext uri="{FF2B5EF4-FFF2-40B4-BE49-F238E27FC236}">
+                <a16:creationId xmlns:a16="http://schemas.microsoft.com/office/drawing/2014/main" id="{5E4304EA-1867-FA67-AD3A-E6BCE48DD203}"/>
+              </a:ext>
+            </a:extLst>
+          </p:cNvPr>
+          <p:cNvSpPr txBox="1">
+            <a:spLocks/>
+          </p:cNvSpPr>
+          <p:nvPr/>
+        </p:nvSpPr>
+        <p:spPr>
+          <a:xfrm>
+            <a:off x="115734" y="64032"/>
+            <a:ext cx="11304254" cy="476956"/>
+          </a:xfrm>
+          <a:prstGeom prst="rect">
+            <a:avLst/>
+          </a:prstGeom>
+        </p:spPr>
+        <p:txBody>
+          <a:bodyPr vert="horz" lIns="91440" tIns="45720" rIns="91440" bIns="45720" rtlCol="0" anchor="t">
+            <a:noAutofit/>
+          </a:bodyPr>
+          <a:lstStyle>
+            <a:lvl1pPr algn="ctr" defTabSz="914400" rtl="0" eaLnBrk="1" latinLnBrk="0" hangingPunct="1">
+              <a:lnSpc>
+                <a:spcPct val="90000"/>
+              </a:lnSpc>
+              <a:spcBef>
+                <a:spcPct val="0"/>
+              </a:spcBef>
+              <a:buNone/>
+              <a:defRPr sz="6000" kern="1200">
+                <a:solidFill>
+                  <a:schemeClr val="tx1"/>
+                </a:solidFill>
+                <a:latin typeface="+mj-lt"/>
+                <a:ea typeface="+mj-ea"/>
+                <a:cs typeface="+mj-cs"/>
+              </a:defRPr>
+            </a:lvl1pPr>
+          </a:lstStyle>
+          <a:p>
+            <a:pPr algn="l"/>
+            <a:r>
+              <a:rPr lang="en-US" sz="4000" dirty="0"/>
+              <a:t>Web Server Setup + Overview (Production)</a:t>
+            </a:r>
+          </a:p>
+        </p:txBody>
+      </p:sp>
+      <p:sp>
+        <p:nvSpPr>
+          <p:cNvPr id="18" name="Rectangle 17">
+            <a:extLst>
+              <a:ext uri="{FF2B5EF4-FFF2-40B4-BE49-F238E27FC236}">
+                <a16:creationId xmlns:a16="http://schemas.microsoft.com/office/drawing/2014/main" id="{CE75BE4D-1EF4-F1F6-7D2E-04E70C2E6CFF}"/>
+              </a:ext>
+            </a:extLst>
+          </p:cNvPr>
+          <p:cNvSpPr/>
+          <p:nvPr/>
+        </p:nvSpPr>
+        <p:spPr>
+          <a:xfrm>
+            <a:off x="495393" y="2059720"/>
+            <a:ext cx="1022504" cy="2648452"/>
+          </a:xfrm>
+          <a:prstGeom prst="rect">
+            <a:avLst/>
+          </a:prstGeom>
+          <a:solidFill>
+            <a:schemeClr val="accent6">
+              <a:lumMod val="75000"/>
+            </a:schemeClr>
+          </a:solidFill>
+        </p:spPr>
+        <p:style>
+          <a:lnRef idx="2">
+            <a:schemeClr val="accent1">
+              <a:shade val="15000"/>
+            </a:schemeClr>
+          </a:lnRef>
+          <a:fillRef idx="1">
+            <a:schemeClr val="accent1"/>
+          </a:fillRef>
+          <a:effectRef idx="0">
+            <a:schemeClr val="accent1"/>
+          </a:effectRef>
+          <a:fontRef idx="minor">
+            <a:schemeClr val="lt1"/>
+          </a:fontRef>
+        </p:style>
+        <p:txBody>
+          <a:bodyPr lIns="0" tIns="0" rIns="0" bIns="0" rtlCol="0" anchor="ctr"/>
+          <a:lstStyle/>
+          <a:p>
+            <a:pPr algn="ctr"/>
+            <a:r>
+              <a:rPr lang="en-US" sz="1600" dirty="0"/>
+              <a:t>Client</a:t>
+            </a:r>
+            <a:endParaRPr lang="en-US" sz="1400" dirty="0"/>
+          </a:p>
+        </p:txBody>
+      </p:sp>
+      <p:sp>
+        <p:nvSpPr>
+          <p:cNvPr id="26" name="Rectangle 25">
+            <a:extLst>
+              <a:ext uri="{FF2B5EF4-FFF2-40B4-BE49-F238E27FC236}">
+                <a16:creationId xmlns:a16="http://schemas.microsoft.com/office/drawing/2014/main" id="{7A494E3D-5A7F-6C83-1EB3-A0B1FCE2EBFD}"/>
+              </a:ext>
+            </a:extLst>
+          </p:cNvPr>
+          <p:cNvSpPr/>
+          <p:nvPr/>
+        </p:nvSpPr>
+        <p:spPr>
+          <a:xfrm>
+            <a:off x="4897822" y="1139593"/>
+            <a:ext cx="2133600" cy="1911912"/>
+          </a:xfrm>
+          <a:prstGeom prst="rect">
+            <a:avLst/>
+          </a:prstGeom>
+          <a:solidFill>
+            <a:srgbClr val="B17ED8"/>
+          </a:solidFill>
+        </p:spPr>
+        <p:style>
+          <a:lnRef idx="2">
+            <a:schemeClr val="accent1">
+              <a:shade val="15000"/>
+            </a:schemeClr>
+          </a:lnRef>
+          <a:fillRef idx="1">
+            <a:schemeClr val="accent1"/>
+          </a:fillRef>
+          <a:effectRef idx="0">
+            <a:schemeClr val="accent1"/>
+          </a:effectRef>
+          <a:fontRef idx="minor">
+            <a:schemeClr val="lt1"/>
+          </a:fontRef>
+        </p:style>
+        <p:txBody>
+          <a:bodyPr lIns="0" tIns="0" rIns="0" bIns="0" rtlCol="0" anchor="t"/>
+          <a:lstStyle/>
+          <a:p>
+            <a:pPr algn="ctr"/>
+            <a:r>
+              <a:rPr lang="en-US" sz="1600" dirty="0"/>
+              <a:t>API Server</a:t>
+            </a:r>
+          </a:p>
+          <a:p>
+            <a:pPr algn="ctr"/>
+            <a:r>
+              <a:rPr lang="en-US" sz="1400" dirty="0"/>
+              <a:t>(uvicorn + FastAPI)</a:t>
+            </a:r>
+          </a:p>
+          <a:p>
+            <a:pPr algn="ctr"/>
+            <a:endParaRPr lang="en-US" sz="1400" dirty="0"/>
+          </a:p>
+          <a:p>
+            <a:pPr algn="ctr"/>
+            <a:r>
+              <a:rPr lang="en-US" sz="900" dirty="0"/>
+              <a:t>uvicorn = sets up the server</a:t>
+            </a:r>
+          </a:p>
+          <a:p>
+            <a:pPr algn="ctr"/>
+            <a:r>
+              <a:rPr lang="en-US" sz="900" dirty="0"/>
+              <a:t>FastAPI = maps API requests to Python code</a:t>
+            </a:r>
+            <a:endParaRPr lang="en-US" sz="1100" dirty="0"/>
+          </a:p>
+        </p:txBody>
+      </p:sp>
+      <p:sp>
+        <p:nvSpPr>
+          <p:cNvPr id="36" name="Rectangle 35">
+            <a:extLst>
+              <a:ext uri="{FF2B5EF4-FFF2-40B4-BE49-F238E27FC236}">
+                <a16:creationId xmlns:a16="http://schemas.microsoft.com/office/drawing/2014/main" id="{E6224A39-3D33-19B6-80A8-E20ACAE07553}"/>
+              </a:ext>
+            </a:extLst>
+          </p:cNvPr>
+          <p:cNvSpPr/>
+          <p:nvPr/>
+        </p:nvSpPr>
+        <p:spPr>
+          <a:xfrm>
+            <a:off x="2687447" y="2754444"/>
+            <a:ext cx="1194727" cy="1349112"/>
+          </a:xfrm>
+          <a:prstGeom prst="rect">
+            <a:avLst/>
+          </a:prstGeom>
+          <a:solidFill>
+            <a:schemeClr val="tx2">
+              <a:lumMod val="60000"/>
+              <a:lumOff val="40000"/>
+            </a:schemeClr>
+          </a:solidFill>
+        </p:spPr>
+        <p:style>
+          <a:lnRef idx="2">
+            <a:schemeClr val="accent1">
+              <a:shade val="15000"/>
+            </a:schemeClr>
+          </a:lnRef>
+          <a:fillRef idx="1">
+            <a:schemeClr val="accent1"/>
+          </a:fillRef>
+          <a:effectRef idx="0">
+            <a:schemeClr val="accent1"/>
+          </a:effectRef>
+          <a:fontRef idx="minor">
+            <a:schemeClr val="lt1"/>
+          </a:fontRef>
+        </p:style>
+        <p:txBody>
+          <a:bodyPr lIns="0" tIns="0" rIns="0" bIns="0" rtlCol="0" anchor="ctr"/>
+          <a:lstStyle/>
+          <a:p>
+            <a:pPr algn="ctr"/>
+            <a:r>
+              <a:rPr lang="en-US" sz="1600" dirty="0"/>
+              <a:t>Web Server</a:t>
+            </a:r>
+          </a:p>
+          <a:p>
+            <a:pPr algn="ctr"/>
+            <a:r>
+              <a:rPr lang="en-US" sz="1400" dirty="0"/>
+              <a:t>(Caddy)</a:t>
+            </a:r>
+          </a:p>
+        </p:txBody>
+      </p:sp>
+      <p:cxnSp>
+        <p:nvCxnSpPr>
+          <p:cNvPr id="37" name="Straight Arrow Connector 36">
+            <a:extLst>
+              <a:ext uri="{FF2B5EF4-FFF2-40B4-BE49-F238E27FC236}">
+                <a16:creationId xmlns:a16="http://schemas.microsoft.com/office/drawing/2014/main" id="{1A9DBC32-9357-2C90-6437-601190DF46DF}"/>
+              </a:ext>
+            </a:extLst>
+          </p:cNvPr>
+          <p:cNvCxnSpPr>
+            <a:cxnSpLocks/>
+          </p:cNvCxnSpPr>
+          <p:nvPr/>
+        </p:nvCxnSpPr>
+        <p:spPr>
+          <a:xfrm flipH="1">
+            <a:off x="6308469" y="4599057"/>
+            <a:ext cx="1241270" cy="0"/>
+          </a:xfrm>
+          <a:prstGeom prst="straightConnector1">
+            <a:avLst/>
+          </a:prstGeom>
+          <a:ln w="12700">
+            <a:solidFill>
+              <a:schemeClr val="tx1"/>
+            </a:solidFill>
+            <a:headEnd type="none"/>
+            <a:tailEnd type="arrow"/>
+          </a:ln>
+        </p:spPr>
+        <p:style>
+          <a:lnRef idx="1">
+            <a:schemeClr val="accent1"/>
+          </a:lnRef>
+          <a:fillRef idx="0">
+            <a:schemeClr val="accent1"/>
+          </a:fillRef>
+          <a:effectRef idx="0">
+            <a:schemeClr val="accent1"/>
+          </a:effectRef>
+          <a:fontRef idx="minor">
+            <a:schemeClr val="tx1"/>
+          </a:fontRef>
+        </p:style>
+      </p:cxnSp>
+      <p:sp>
+        <p:nvSpPr>
+          <p:cNvPr id="204" name="TextBox 203">
+            <a:extLst>
+              <a:ext uri="{FF2B5EF4-FFF2-40B4-BE49-F238E27FC236}">
+                <a16:creationId xmlns:a16="http://schemas.microsoft.com/office/drawing/2014/main" id="{5B1A7DC2-A50F-BD1F-E3FD-FD8DCCB0B9AF}"/>
+              </a:ext>
+            </a:extLst>
+          </p:cNvPr>
+          <p:cNvSpPr txBox="1"/>
+          <p:nvPr/>
+        </p:nvSpPr>
+        <p:spPr>
+          <a:xfrm>
+            <a:off x="6590998" y="4260502"/>
+            <a:ext cx="805597" cy="338554"/>
+          </a:xfrm>
+          <a:prstGeom prst="rect">
+            <a:avLst/>
+          </a:prstGeom>
+          <a:noFill/>
+        </p:spPr>
+        <p:txBody>
+          <a:bodyPr wrap="square" lIns="0" tIns="0" rIns="0" bIns="0" rtlCol="0">
+            <a:spAutoFit/>
+          </a:bodyPr>
+          <a:lstStyle>
+            <a:defPPr>
+              <a:defRPr lang="en-US"/>
+            </a:defPPr>
+            <a:lvl1pPr algn="r">
+              <a:defRPr sz="1100" i="1"/>
+            </a:lvl1pPr>
+          </a:lstStyle>
+          <a:p>
+            <a:pPr algn="ctr"/>
+            <a:r>
+              <a:rPr lang="en-US" dirty="0"/>
+              <a:t>Angular Templates</a:t>
+            </a:r>
+          </a:p>
+        </p:txBody>
+      </p:sp>
+      <p:sp>
+        <p:nvSpPr>
+          <p:cNvPr id="41" name="TextBox 40">
+            <a:extLst>
+              <a:ext uri="{FF2B5EF4-FFF2-40B4-BE49-F238E27FC236}">
+                <a16:creationId xmlns:a16="http://schemas.microsoft.com/office/drawing/2014/main" id="{D8350608-DDD1-A87C-0F8E-5AE20180D5EC}"/>
+              </a:ext>
+            </a:extLst>
+          </p:cNvPr>
+          <p:cNvSpPr txBox="1"/>
+          <p:nvPr/>
+        </p:nvSpPr>
+        <p:spPr>
+          <a:xfrm>
+            <a:off x="1694255" y="3205571"/>
+            <a:ext cx="816833" cy="169277"/>
+          </a:xfrm>
+          <a:prstGeom prst="rect">
+            <a:avLst/>
+          </a:prstGeom>
+          <a:noFill/>
+        </p:spPr>
+        <p:txBody>
+          <a:bodyPr wrap="square" lIns="0" tIns="0" rIns="0" bIns="0" rtlCol="0">
+            <a:spAutoFit/>
+          </a:bodyPr>
+          <a:lstStyle>
+            <a:defPPr>
+              <a:defRPr lang="en-US"/>
+            </a:defPPr>
+            <a:lvl1pPr algn="r">
+              <a:defRPr sz="1100" i="1"/>
+            </a:lvl1pPr>
+          </a:lstStyle>
+          <a:p>
+            <a:pPr algn="ctr"/>
+            <a:r>
+              <a:rPr lang="en-US" dirty="0"/>
+              <a:t>JSON + events</a:t>
+            </a:r>
+          </a:p>
+        </p:txBody>
+      </p:sp>
+      <p:sp>
+        <p:nvSpPr>
+          <p:cNvPr id="42" name="Rectangle 41">
+            <a:extLst>
+              <a:ext uri="{FF2B5EF4-FFF2-40B4-BE49-F238E27FC236}">
+                <a16:creationId xmlns:a16="http://schemas.microsoft.com/office/drawing/2014/main" id="{1E0EC690-9A6C-3574-0E58-340057310248}"/>
+              </a:ext>
+            </a:extLst>
+          </p:cNvPr>
+          <p:cNvSpPr/>
+          <p:nvPr/>
+        </p:nvSpPr>
+        <p:spPr>
+          <a:xfrm>
+            <a:off x="7549738" y="4081569"/>
+            <a:ext cx="1241269" cy="1484422"/>
+          </a:xfrm>
+          <a:prstGeom prst="rect">
+            <a:avLst/>
+          </a:prstGeom>
+          <a:solidFill>
+            <a:srgbClr val="FFC021"/>
+          </a:solidFill>
+        </p:spPr>
+        <p:style>
+          <a:lnRef idx="2">
+            <a:schemeClr val="accent1">
+              <a:shade val="15000"/>
+            </a:schemeClr>
+          </a:lnRef>
+          <a:fillRef idx="1">
+            <a:schemeClr val="accent1"/>
+          </a:fillRef>
+          <a:effectRef idx="0">
+            <a:schemeClr val="accent1"/>
+          </a:effectRef>
+          <a:fontRef idx="minor">
+            <a:schemeClr val="lt1"/>
+          </a:fontRef>
+        </p:style>
+        <p:txBody>
+          <a:bodyPr lIns="0" tIns="0" rIns="0" bIns="0" rtlCol="0" anchor="ctr"/>
+          <a:lstStyle/>
+          <a:p>
+            <a:pPr algn="ctr"/>
+            <a:r>
+              <a:rPr lang="en-US" dirty="0"/>
+              <a:t>Web Code</a:t>
+            </a:r>
+          </a:p>
+          <a:p>
+            <a:pPr algn="ctr"/>
+            <a:r>
+              <a:rPr lang="en-US" sz="1000" dirty="0"/>
+              <a:t>📚 </a:t>
+            </a:r>
+            <a:r>
+              <a:rPr lang="en-US" sz="1000" b="1" u="sng" dirty="0"/>
+              <a:t>Angular</a:t>
+            </a:r>
+          </a:p>
+          <a:p>
+            <a:pPr algn="ctr"/>
+            <a:r>
+              <a:rPr lang="en-US" sz="1000" dirty="0"/>
+              <a:t>📚 </a:t>
+            </a:r>
+            <a:r>
+              <a:rPr lang="en-US" sz="1000" b="1" u="sng" dirty="0"/>
+              <a:t>various libs </a:t>
+            </a:r>
+          </a:p>
+          <a:p>
+            <a:pPr algn="ctr"/>
+            <a:r>
+              <a:rPr lang="en-US" sz="900" b="1" i="1" u="sng" dirty="0"/>
+              <a:t>(e.g. charts, webstores, etc…)</a:t>
+            </a:r>
+            <a:endParaRPr lang="en-US" sz="1400" i="1" u="sng" dirty="0"/>
+          </a:p>
+        </p:txBody>
+      </p:sp>
+      <p:cxnSp>
+        <p:nvCxnSpPr>
+          <p:cNvPr id="48" name="Straight Arrow Connector 47">
+            <a:extLst>
+              <a:ext uri="{FF2B5EF4-FFF2-40B4-BE49-F238E27FC236}">
+                <a16:creationId xmlns:a16="http://schemas.microsoft.com/office/drawing/2014/main" id="{79E87979-DC65-D8F0-F4A6-EF70FCC13A63}"/>
+              </a:ext>
+            </a:extLst>
+          </p:cNvPr>
+          <p:cNvCxnSpPr>
+            <a:cxnSpLocks/>
+          </p:cNvCxnSpPr>
+          <p:nvPr/>
+        </p:nvCxnSpPr>
+        <p:spPr>
+          <a:xfrm flipH="1">
+            <a:off x="1517897" y="3429000"/>
+            <a:ext cx="1169550" cy="0"/>
+          </a:xfrm>
+          <a:prstGeom prst="straightConnector1">
+            <a:avLst/>
+          </a:prstGeom>
+          <a:ln w="12700">
+            <a:solidFill>
+              <a:schemeClr val="tx1"/>
+            </a:solidFill>
+            <a:headEnd type="none"/>
+            <a:tailEnd type="arrow"/>
+          </a:ln>
+        </p:spPr>
+        <p:style>
+          <a:lnRef idx="1">
+            <a:schemeClr val="accent1"/>
+          </a:lnRef>
+          <a:fillRef idx="0">
+            <a:schemeClr val="accent1"/>
+          </a:fillRef>
+          <a:effectRef idx="0">
+            <a:schemeClr val="accent1"/>
+          </a:effectRef>
+          <a:fontRef idx="minor">
+            <a:schemeClr val="tx1"/>
+          </a:fontRef>
+        </p:style>
+      </p:cxnSp>
+      <p:sp>
+        <p:nvSpPr>
+          <p:cNvPr id="49" name="TextBox 48">
+            <a:extLst>
+              <a:ext uri="{FF2B5EF4-FFF2-40B4-BE49-F238E27FC236}">
+                <a16:creationId xmlns:a16="http://schemas.microsoft.com/office/drawing/2014/main" id="{2C89E25A-1F61-9793-EBCA-2737AC655A09}"/>
+              </a:ext>
+            </a:extLst>
+          </p:cNvPr>
+          <p:cNvSpPr txBox="1"/>
+          <p:nvPr/>
+        </p:nvSpPr>
+        <p:spPr>
+          <a:xfrm>
+            <a:off x="1767558" y="3489971"/>
+            <a:ext cx="670228" cy="169277"/>
+          </a:xfrm>
+          <a:prstGeom prst="rect">
+            <a:avLst/>
+          </a:prstGeom>
+          <a:noFill/>
+        </p:spPr>
+        <p:txBody>
+          <a:bodyPr wrap="square" lIns="0" tIns="0" rIns="0" bIns="0" rtlCol="0">
+            <a:spAutoFit/>
+          </a:bodyPr>
+          <a:lstStyle>
+            <a:defPPr>
+              <a:defRPr lang="en-US"/>
+            </a:defPPr>
+            <a:lvl1pPr algn="r">
+              <a:defRPr sz="1100" i="1"/>
+            </a:lvl1pPr>
+          </a:lstStyle>
+          <a:p>
+            <a:pPr algn="ctr"/>
+            <a:r>
+              <a:rPr lang="en-US" dirty="0"/>
+              <a:t>HTML + JS</a:t>
+            </a:r>
+          </a:p>
+        </p:txBody>
+      </p:sp>
+      <p:cxnSp>
+        <p:nvCxnSpPr>
+          <p:cNvPr id="61" name="Straight Arrow Connector 60">
+            <a:extLst>
+              <a:ext uri="{FF2B5EF4-FFF2-40B4-BE49-F238E27FC236}">
+                <a16:creationId xmlns:a16="http://schemas.microsoft.com/office/drawing/2014/main" id="{7105EF8B-8CE0-6520-7456-E5F41597766C}"/>
+              </a:ext>
+            </a:extLst>
+          </p:cNvPr>
+          <p:cNvCxnSpPr>
+            <a:cxnSpLocks/>
+          </p:cNvCxnSpPr>
+          <p:nvPr/>
+        </p:nvCxnSpPr>
+        <p:spPr>
+          <a:xfrm flipH="1">
+            <a:off x="6308469" y="5070829"/>
+            <a:ext cx="1241270" cy="0"/>
+          </a:xfrm>
+          <a:prstGeom prst="straightConnector1">
+            <a:avLst/>
+          </a:prstGeom>
+          <a:ln w="12700">
+            <a:solidFill>
+              <a:schemeClr val="tx1"/>
+            </a:solidFill>
+            <a:headEnd type="none"/>
+            <a:tailEnd type="arrow"/>
+          </a:ln>
+        </p:spPr>
+        <p:style>
+          <a:lnRef idx="1">
+            <a:schemeClr val="accent1"/>
+          </a:lnRef>
+          <a:fillRef idx="0">
+            <a:schemeClr val="accent1"/>
+          </a:fillRef>
+          <a:effectRef idx="0">
+            <a:schemeClr val="accent1"/>
+          </a:effectRef>
+          <a:fontRef idx="minor">
+            <a:schemeClr val="tx1"/>
+          </a:fontRef>
+        </p:style>
+      </p:cxnSp>
+      <p:sp>
+        <p:nvSpPr>
+          <p:cNvPr id="62" name="TextBox 61">
+            <a:extLst>
+              <a:ext uri="{FF2B5EF4-FFF2-40B4-BE49-F238E27FC236}">
+                <a16:creationId xmlns:a16="http://schemas.microsoft.com/office/drawing/2014/main" id="{C3407928-0390-2E9B-FC8E-1DDD3447C28F}"/>
+              </a:ext>
+            </a:extLst>
+          </p:cNvPr>
+          <p:cNvSpPr txBox="1"/>
+          <p:nvPr/>
+        </p:nvSpPr>
+        <p:spPr>
+          <a:xfrm>
+            <a:off x="6590998" y="4889982"/>
+            <a:ext cx="805597" cy="169277"/>
+          </a:xfrm>
+          <a:prstGeom prst="rect">
+            <a:avLst/>
+          </a:prstGeom>
+          <a:noFill/>
+        </p:spPr>
+        <p:txBody>
+          <a:bodyPr wrap="square" lIns="0" tIns="0" rIns="0" bIns="0" rtlCol="0">
+            <a:spAutoFit/>
+          </a:bodyPr>
+          <a:lstStyle>
+            <a:defPPr>
+              <a:defRPr lang="en-US"/>
+            </a:defPPr>
+            <a:lvl1pPr algn="r">
+              <a:defRPr sz="1100" i="1"/>
+            </a:lvl1pPr>
+          </a:lstStyle>
+          <a:p>
+            <a:pPr algn="ctr"/>
+            <a:r>
+              <a:rPr lang="en-US" dirty="0"/>
+              <a:t>TS</a:t>
+            </a:r>
+          </a:p>
+        </p:txBody>
+      </p:sp>
+      <p:sp>
+        <p:nvSpPr>
+          <p:cNvPr id="63" name="Rectangle 62">
+            <a:extLst>
+              <a:ext uri="{FF2B5EF4-FFF2-40B4-BE49-F238E27FC236}">
+                <a16:creationId xmlns:a16="http://schemas.microsoft.com/office/drawing/2014/main" id="{D47973AE-F83C-A3D9-4FC3-742EBFBB6B10}"/>
+              </a:ext>
+            </a:extLst>
+          </p:cNvPr>
+          <p:cNvSpPr/>
+          <p:nvPr/>
+        </p:nvSpPr>
+        <p:spPr>
+          <a:xfrm>
+            <a:off x="5340304" y="4924693"/>
+            <a:ext cx="815022" cy="292272"/>
+          </a:xfrm>
+          <a:prstGeom prst="rect">
+            <a:avLst/>
+          </a:prstGeom>
+          <a:solidFill>
+            <a:schemeClr val="accent4">
+              <a:lumMod val="75000"/>
+            </a:schemeClr>
+          </a:solidFill>
+          <a:ln>
+            <a:solidFill>
+              <a:schemeClr val="tx1"/>
+            </a:solidFill>
+          </a:ln>
+        </p:spPr>
+        <p:style>
+          <a:lnRef idx="2">
+            <a:schemeClr val="accent1">
+              <a:shade val="15000"/>
+            </a:schemeClr>
+          </a:lnRef>
+          <a:fillRef idx="1">
+            <a:schemeClr val="accent1"/>
+          </a:fillRef>
+          <a:effectRef idx="0">
+            <a:schemeClr val="accent1"/>
+          </a:effectRef>
+          <a:fontRef idx="minor">
+            <a:schemeClr val="lt1"/>
+          </a:fontRef>
+        </p:style>
+        <p:txBody>
+          <a:bodyPr lIns="0" tIns="0" rIns="0" bIns="0" rtlCol="0" anchor="ctr"/>
+          <a:lstStyle/>
+          <a:p>
+            <a:pPr algn="ctr"/>
+            <a:r>
+              <a:rPr lang="en-US" sz="1400" dirty="0"/>
+              <a:t>tsc</a:t>
+            </a:r>
+          </a:p>
+        </p:txBody>
+      </p:sp>
+      <p:sp>
+        <p:nvSpPr>
+          <p:cNvPr id="114" name="TextBox 113">
+            <a:extLst>
+              <a:ext uri="{FF2B5EF4-FFF2-40B4-BE49-F238E27FC236}">
+                <a16:creationId xmlns:a16="http://schemas.microsoft.com/office/drawing/2014/main" id="{6F0C7F54-AA32-53B3-A1F2-DF62DB4B8DAC}"/>
+              </a:ext>
+            </a:extLst>
+          </p:cNvPr>
+          <p:cNvSpPr txBox="1"/>
+          <p:nvPr/>
+        </p:nvSpPr>
+        <p:spPr>
+          <a:xfrm>
+            <a:off x="6590998" y="5239184"/>
+            <a:ext cx="805597" cy="169277"/>
+          </a:xfrm>
+          <a:prstGeom prst="rect">
+            <a:avLst/>
+          </a:prstGeom>
+          <a:noFill/>
+        </p:spPr>
+        <p:txBody>
+          <a:bodyPr wrap="square" lIns="0" tIns="0" rIns="0" bIns="0" rtlCol="0">
+            <a:spAutoFit/>
+          </a:bodyPr>
+          <a:lstStyle>
+            <a:defPPr>
+              <a:defRPr lang="en-US"/>
+            </a:defPPr>
+            <a:lvl1pPr algn="r">
+              <a:defRPr sz="1100" i="1"/>
+            </a:lvl1pPr>
+          </a:lstStyle>
+          <a:p>
+            <a:pPr algn="ctr"/>
+            <a:r>
+              <a:rPr lang="en-US" dirty="0"/>
+              <a:t>HTML</a:t>
+            </a:r>
+          </a:p>
+        </p:txBody>
+      </p:sp>
+      <p:sp>
+        <p:nvSpPr>
+          <p:cNvPr id="124" name="TextBox 123">
+            <a:extLst>
+              <a:ext uri="{FF2B5EF4-FFF2-40B4-BE49-F238E27FC236}">
+                <a16:creationId xmlns:a16="http://schemas.microsoft.com/office/drawing/2014/main" id="{29BB77FE-F358-DEAB-CD1E-8D1C5E183E81}"/>
+              </a:ext>
+            </a:extLst>
+          </p:cNvPr>
+          <p:cNvSpPr txBox="1"/>
+          <p:nvPr/>
+        </p:nvSpPr>
+        <p:spPr>
+          <a:xfrm>
+            <a:off x="4850267" y="5588208"/>
+            <a:ext cx="1795096" cy="161583"/>
+          </a:xfrm>
+          <a:prstGeom prst="rect">
+            <a:avLst/>
+          </a:prstGeom>
+          <a:noFill/>
+        </p:spPr>
+        <p:txBody>
+          <a:bodyPr wrap="square" lIns="0" tIns="0" rIns="0" bIns="0" rtlCol="0">
+            <a:spAutoFit/>
+          </a:bodyPr>
+          <a:lstStyle>
+            <a:defPPr>
+              <a:defRPr lang="en-US"/>
+            </a:defPPr>
+            <a:lvl1pPr algn="r">
+              <a:defRPr sz="1100" i="1"/>
+            </a:lvl1pPr>
+          </a:lstStyle>
+          <a:p>
+            <a:pPr algn="ctr"/>
+            <a:r>
+              <a:rPr lang="en-US" sz="1050" b="1" i="0" dirty="0"/>
+              <a:t>Node.js </a:t>
+            </a:r>
+            <a:r>
+              <a:rPr lang="en-US" sz="1050" i="0" dirty="0"/>
+              <a:t>Runtime</a:t>
+            </a:r>
+          </a:p>
+        </p:txBody>
+      </p:sp>
+      <p:sp>
+        <p:nvSpPr>
+          <p:cNvPr id="125" name="TextBox 124">
+            <a:extLst>
+              <a:ext uri="{FF2B5EF4-FFF2-40B4-BE49-F238E27FC236}">
+                <a16:creationId xmlns:a16="http://schemas.microsoft.com/office/drawing/2014/main" id="{BE2D3868-9DA1-4C51-098E-021EF69E3C76}"/>
+              </a:ext>
+            </a:extLst>
+          </p:cNvPr>
+          <p:cNvSpPr txBox="1"/>
+          <p:nvPr/>
+        </p:nvSpPr>
+        <p:spPr>
+          <a:xfrm>
+            <a:off x="5067074" y="3063075"/>
+            <a:ext cx="1795096" cy="161583"/>
+          </a:xfrm>
+          <a:prstGeom prst="rect">
+            <a:avLst/>
+          </a:prstGeom>
+          <a:noFill/>
+        </p:spPr>
+        <p:txBody>
+          <a:bodyPr wrap="square" lIns="0" tIns="0" rIns="0" bIns="0" rtlCol="0">
+            <a:spAutoFit/>
+          </a:bodyPr>
+          <a:lstStyle>
+            <a:defPPr>
+              <a:defRPr lang="en-US"/>
+            </a:defPPr>
+            <a:lvl1pPr algn="r">
+              <a:defRPr sz="1100" i="1"/>
+            </a:lvl1pPr>
+          </a:lstStyle>
+          <a:p>
+            <a:pPr algn="ctr"/>
+            <a:r>
+              <a:rPr lang="en-US" sz="1050" b="1" i="0" dirty="0"/>
+              <a:t>Python </a:t>
+            </a:r>
+            <a:r>
+              <a:rPr lang="en-US" sz="1050" i="0" dirty="0"/>
+              <a:t>Runtime</a:t>
+            </a:r>
+          </a:p>
+        </p:txBody>
+      </p:sp>
+      <p:sp>
+        <p:nvSpPr>
+          <p:cNvPr id="139" name="TextBox 138">
+            <a:extLst>
+              <a:ext uri="{FF2B5EF4-FFF2-40B4-BE49-F238E27FC236}">
+                <a16:creationId xmlns:a16="http://schemas.microsoft.com/office/drawing/2014/main" id="{1616A251-7504-2F8B-57F2-E0C651EBD173}"/>
+              </a:ext>
+            </a:extLst>
+          </p:cNvPr>
+          <p:cNvSpPr txBox="1"/>
+          <p:nvPr/>
+        </p:nvSpPr>
+        <p:spPr>
+          <a:xfrm>
+            <a:off x="2667424" y="4118949"/>
+            <a:ext cx="1214750" cy="161583"/>
+          </a:xfrm>
+          <a:prstGeom prst="rect">
+            <a:avLst/>
+          </a:prstGeom>
+          <a:noFill/>
+        </p:spPr>
+        <p:txBody>
+          <a:bodyPr wrap="square" lIns="0" tIns="0" rIns="0" bIns="0" rtlCol="0">
+            <a:spAutoFit/>
+          </a:bodyPr>
+          <a:lstStyle>
+            <a:defPPr>
+              <a:defRPr lang="en-US"/>
+            </a:defPPr>
+            <a:lvl1pPr algn="r">
+              <a:defRPr sz="1100" i="1"/>
+            </a:lvl1pPr>
+          </a:lstStyle>
+          <a:p>
+            <a:pPr algn="ctr"/>
+            <a:r>
+              <a:rPr lang="en-US" sz="1050" b="1" i="0" dirty="0"/>
+              <a:t>Go </a:t>
+            </a:r>
+            <a:r>
+              <a:rPr lang="en-US" sz="1050" i="0" dirty="0"/>
+              <a:t>Runtime</a:t>
+            </a:r>
+          </a:p>
+        </p:txBody>
+      </p:sp>
+      <p:sp>
+        <p:nvSpPr>
+          <p:cNvPr id="162" name="TextBox 161">
+            <a:extLst>
+              <a:ext uri="{FF2B5EF4-FFF2-40B4-BE49-F238E27FC236}">
+                <a16:creationId xmlns:a16="http://schemas.microsoft.com/office/drawing/2014/main" id="{46B9F577-D81F-780D-D351-5E3D1F94E885}"/>
+              </a:ext>
+            </a:extLst>
+          </p:cNvPr>
+          <p:cNvSpPr txBox="1"/>
+          <p:nvPr/>
+        </p:nvSpPr>
+        <p:spPr>
+          <a:xfrm>
+            <a:off x="399270" y="4724501"/>
+            <a:ext cx="1214750" cy="161583"/>
+          </a:xfrm>
+          <a:prstGeom prst="rect">
+            <a:avLst/>
+          </a:prstGeom>
+          <a:noFill/>
+        </p:spPr>
+        <p:txBody>
+          <a:bodyPr wrap="square" lIns="0" tIns="0" rIns="0" bIns="0" rtlCol="0">
+            <a:spAutoFit/>
+          </a:bodyPr>
+          <a:lstStyle>
+            <a:defPPr>
+              <a:defRPr lang="en-US"/>
+            </a:defPPr>
+            <a:lvl1pPr algn="r">
+              <a:defRPr sz="1100" i="1"/>
+            </a:lvl1pPr>
+          </a:lstStyle>
+          <a:p>
+            <a:pPr algn="ctr"/>
+            <a:r>
+              <a:rPr lang="en-US" sz="1050" b="1" i="0" dirty="0"/>
+              <a:t>Browser</a:t>
+            </a:r>
+            <a:r>
+              <a:rPr lang="en-US" sz="1050" i="0" dirty="0"/>
+              <a:t> Runtime</a:t>
+            </a:r>
+          </a:p>
+        </p:txBody>
+      </p:sp>
+      <p:cxnSp>
+        <p:nvCxnSpPr>
+          <p:cNvPr id="168" name="Straight Arrow Connector 167">
+            <a:extLst>
+              <a:ext uri="{FF2B5EF4-FFF2-40B4-BE49-F238E27FC236}">
+                <a16:creationId xmlns:a16="http://schemas.microsoft.com/office/drawing/2014/main" id="{84DFB570-0728-E7F6-53E4-B903A546F000}"/>
+              </a:ext>
+            </a:extLst>
+          </p:cNvPr>
+          <p:cNvCxnSpPr>
+            <a:cxnSpLocks/>
+          </p:cNvCxnSpPr>
+          <p:nvPr/>
+        </p:nvCxnSpPr>
+        <p:spPr>
+          <a:xfrm flipH="1">
+            <a:off x="6527431" y="5430679"/>
+            <a:ext cx="1003635" cy="0"/>
+          </a:xfrm>
+          <a:prstGeom prst="straightConnector1">
+            <a:avLst/>
+          </a:prstGeom>
+          <a:ln w="12700">
+            <a:solidFill>
+              <a:schemeClr val="tx1"/>
+            </a:solidFill>
+            <a:headEnd type="none"/>
+            <a:tailEnd type="arrow"/>
+          </a:ln>
+        </p:spPr>
+        <p:style>
+          <a:lnRef idx="1">
+            <a:schemeClr val="accent1"/>
+          </a:lnRef>
+          <a:fillRef idx="0">
+            <a:schemeClr val="accent1"/>
+          </a:fillRef>
+          <a:effectRef idx="0">
+            <a:schemeClr val="accent1"/>
+          </a:effectRef>
+          <a:fontRef idx="minor">
+            <a:schemeClr val="tx1"/>
+          </a:fontRef>
+        </p:style>
+      </p:cxnSp>
+      <p:sp>
+        <p:nvSpPr>
+          <p:cNvPr id="180" name="Rectangle 179">
+            <a:extLst>
+              <a:ext uri="{FF2B5EF4-FFF2-40B4-BE49-F238E27FC236}">
+                <a16:creationId xmlns:a16="http://schemas.microsoft.com/office/drawing/2014/main" id="{16C97DD2-5066-9719-DB27-72927C397F4A}"/>
+              </a:ext>
+            </a:extLst>
+          </p:cNvPr>
+          <p:cNvSpPr/>
+          <p:nvPr/>
+        </p:nvSpPr>
+        <p:spPr>
+          <a:xfrm>
+            <a:off x="5110292" y="2207908"/>
+            <a:ext cx="592914" cy="693499"/>
+          </a:xfrm>
+          <a:prstGeom prst="rect">
+            <a:avLst/>
+          </a:prstGeom>
+          <a:solidFill>
+            <a:srgbClr val="7030A0"/>
+          </a:solidFill>
+        </p:spPr>
+        <p:style>
+          <a:lnRef idx="2">
+            <a:schemeClr val="accent1">
+              <a:shade val="15000"/>
+            </a:schemeClr>
+          </a:lnRef>
+          <a:fillRef idx="1">
+            <a:schemeClr val="accent1"/>
+          </a:fillRef>
+          <a:effectRef idx="0">
+            <a:schemeClr val="accent1"/>
+          </a:effectRef>
+          <a:fontRef idx="minor">
+            <a:schemeClr val="lt1"/>
+          </a:fontRef>
+        </p:style>
+        <p:txBody>
+          <a:bodyPr lIns="0" tIns="0" rIns="0" bIns="0" rtlCol="0" anchor="ctr"/>
+          <a:lstStyle/>
+          <a:p>
+            <a:pPr algn="ctr"/>
+            <a:r>
+              <a:rPr lang="en-US" sz="1200" dirty="0"/>
+              <a:t>Job </a:t>
+            </a:r>
+          </a:p>
+          <a:p>
+            <a:pPr algn="ctr"/>
+            <a:r>
+              <a:rPr lang="en-US" sz="1200" dirty="0"/>
+              <a:t>Runner</a:t>
+            </a:r>
+            <a:endParaRPr lang="en-US" sz="1100" dirty="0"/>
+          </a:p>
+        </p:txBody>
+      </p:sp>
+      <p:sp>
+        <p:nvSpPr>
+          <p:cNvPr id="181" name="Rectangle 180">
+            <a:extLst>
+              <a:ext uri="{FF2B5EF4-FFF2-40B4-BE49-F238E27FC236}">
+                <a16:creationId xmlns:a16="http://schemas.microsoft.com/office/drawing/2014/main" id="{8B7C8766-2D31-46B4-2449-B34C3F54CE34}"/>
+              </a:ext>
+            </a:extLst>
+          </p:cNvPr>
+          <p:cNvSpPr/>
+          <p:nvPr/>
+        </p:nvSpPr>
+        <p:spPr>
+          <a:xfrm>
+            <a:off x="6030254" y="2207908"/>
+            <a:ext cx="834306" cy="693499"/>
+          </a:xfrm>
+          <a:prstGeom prst="rect">
+            <a:avLst/>
+          </a:prstGeom>
+          <a:solidFill>
+            <a:srgbClr val="7030A0"/>
+          </a:solidFill>
+        </p:spPr>
+        <p:style>
+          <a:lnRef idx="2">
+            <a:schemeClr val="accent1">
+              <a:shade val="15000"/>
+            </a:schemeClr>
+          </a:lnRef>
+          <a:fillRef idx="1">
+            <a:schemeClr val="accent1"/>
+          </a:fillRef>
+          <a:effectRef idx="0">
+            <a:schemeClr val="accent1"/>
+          </a:effectRef>
+          <a:fontRef idx="minor">
+            <a:schemeClr val="lt1"/>
+          </a:fontRef>
+        </p:style>
+        <p:txBody>
+          <a:bodyPr lIns="0" tIns="0" rIns="0" bIns="0" rtlCol="0" anchor="ctr"/>
+          <a:lstStyle/>
+          <a:p>
+            <a:pPr algn="ctr"/>
+            <a:r>
+              <a:rPr lang="en-US" sz="1200" dirty="0"/>
+              <a:t>Query </a:t>
+            </a:r>
+          </a:p>
+          <a:p>
+            <a:pPr algn="ctr"/>
+            <a:r>
+              <a:rPr lang="en-US" sz="1200" dirty="0"/>
+              <a:t>Pipeline</a:t>
+            </a:r>
+            <a:endParaRPr lang="en-US" sz="1100" dirty="0"/>
+          </a:p>
+        </p:txBody>
+      </p:sp>
+      <p:cxnSp>
+        <p:nvCxnSpPr>
+          <p:cNvPr id="182" name="Straight Arrow Connector 181">
+            <a:extLst>
+              <a:ext uri="{FF2B5EF4-FFF2-40B4-BE49-F238E27FC236}">
+                <a16:creationId xmlns:a16="http://schemas.microsoft.com/office/drawing/2014/main" id="{20C0564A-DF24-9727-7344-62CABE709AF1}"/>
+              </a:ext>
+            </a:extLst>
+          </p:cNvPr>
+          <p:cNvCxnSpPr>
+            <a:cxnSpLocks/>
+            <a:stCxn id="181" idx="1"/>
+            <a:endCxn id="180" idx="3"/>
+          </p:cNvCxnSpPr>
+          <p:nvPr/>
+        </p:nvCxnSpPr>
+        <p:spPr>
+          <a:xfrm flipH="1">
+            <a:off x="5703206" y="2554658"/>
+            <a:ext cx="327048" cy="0"/>
+          </a:xfrm>
+          <a:prstGeom prst="straightConnector1">
+            <a:avLst/>
+          </a:prstGeom>
+          <a:ln w="12700">
+            <a:solidFill>
+              <a:schemeClr val="tx1"/>
+            </a:solidFill>
+            <a:headEnd type="arrow"/>
+            <a:tailEnd type="arrow"/>
+          </a:ln>
+        </p:spPr>
+        <p:style>
+          <a:lnRef idx="1">
+            <a:schemeClr val="accent1"/>
+          </a:lnRef>
+          <a:fillRef idx="0">
+            <a:schemeClr val="accent1"/>
+          </a:fillRef>
+          <a:effectRef idx="0">
+            <a:schemeClr val="accent1"/>
+          </a:effectRef>
+          <a:fontRef idx="minor">
+            <a:schemeClr val="tx1"/>
+          </a:fontRef>
+        </p:style>
+      </p:cxnSp>
+      <p:cxnSp>
+        <p:nvCxnSpPr>
+          <p:cNvPr id="191" name="Connector: Elbow 190">
+            <a:extLst>
+              <a:ext uri="{FF2B5EF4-FFF2-40B4-BE49-F238E27FC236}">
+                <a16:creationId xmlns:a16="http://schemas.microsoft.com/office/drawing/2014/main" id="{3F7DE3FA-3E17-6D71-888C-61149959A1DE}"/>
+              </a:ext>
+            </a:extLst>
+          </p:cNvPr>
+          <p:cNvCxnSpPr>
+            <a:stCxn id="36" idx="3"/>
+            <a:endCxn id="26" idx="1"/>
+          </p:cNvCxnSpPr>
+          <p:nvPr/>
+        </p:nvCxnSpPr>
+        <p:spPr>
+          <a:xfrm flipV="1">
+            <a:off x="3882174" y="2095549"/>
+            <a:ext cx="1015648" cy="1333451"/>
+          </a:xfrm>
+          <a:prstGeom prst="bentConnector3">
+            <a:avLst>
+              <a:gd name="adj1" fmla="val 64458"/>
+            </a:avLst>
+          </a:prstGeom>
+          <a:ln w="12700">
+            <a:solidFill>
+              <a:schemeClr val="tx1"/>
+            </a:solidFill>
+            <a:headEnd type="arrow"/>
+            <a:tailEnd type="arrow"/>
+          </a:ln>
+        </p:spPr>
+        <p:style>
+          <a:lnRef idx="1">
+            <a:schemeClr val="accent1"/>
+          </a:lnRef>
+          <a:fillRef idx="0">
+            <a:schemeClr val="accent1"/>
+          </a:fillRef>
+          <a:effectRef idx="0">
+            <a:schemeClr val="accent1"/>
+          </a:effectRef>
+          <a:fontRef idx="minor">
+            <a:schemeClr val="tx1"/>
+          </a:fontRef>
+        </p:style>
+      </p:cxnSp>
+      <p:sp>
+        <p:nvSpPr>
+          <p:cNvPr id="192" name="TextBox 191">
+            <a:extLst>
+              <a:ext uri="{FF2B5EF4-FFF2-40B4-BE49-F238E27FC236}">
+                <a16:creationId xmlns:a16="http://schemas.microsoft.com/office/drawing/2014/main" id="{66CB1DB6-A46F-32AA-63C5-7AC68DE24DB0}"/>
+              </a:ext>
+            </a:extLst>
+          </p:cNvPr>
+          <p:cNvSpPr txBox="1"/>
+          <p:nvPr/>
+        </p:nvSpPr>
+        <p:spPr>
+          <a:xfrm>
+            <a:off x="3943632" y="3205571"/>
+            <a:ext cx="670228" cy="169277"/>
+          </a:xfrm>
+          <a:prstGeom prst="rect">
+            <a:avLst/>
+          </a:prstGeom>
+          <a:noFill/>
+        </p:spPr>
+        <p:txBody>
+          <a:bodyPr wrap="square" lIns="0" tIns="0" rIns="0" bIns="0" rtlCol="0">
+            <a:spAutoFit/>
+          </a:bodyPr>
+          <a:lstStyle>
+            <a:defPPr>
+              <a:defRPr lang="en-US"/>
+            </a:defPPr>
+            <a:lvl1pPr algn="r">
+              <a:defRPr sz="1100" i="1"/>
+            </a:lvl1pPr>
+          </a:lstStyle>
+          <a:p>
+            <a:pPr algn="ctr"/>
+            <a:r>
+              <a:rPr lang="en-US" dirty="0"/>
+              <a:t>/api/*</a:t>
+            </a:r>
+          </a:p>
+        </p:txBody>
+      </p:sp>
+      <p:sp>
+        <p:nvSpPr>
+          <p:cNvPr id="194" name="TextBox 193">
+            <a:extLst>
+              <a:ext uri="{FF2B5EF4-FFF2-40B4-BE49-F238E27FC236}">
+                <a16:creationId xmlns:a16="http://schemas.microsoft.com/office/drawing/2014/main" id="{A1283FDE-C319-A20A-66F9-5AE78967A256}"/>
+              </a:ext>
+            </a:extLst>
+          </p:cNvPr>
+          <p:cNvSpPr txBox="1"/>
+          <p:nvPr/>
+        </p:nvSpPr>
+        <p:spPr>
+          <a:xfrm>
+            <a:off x="4227593" y="4623533"/>
+            <a:ext cx="670228" cy="169277"/>
+          </a:xfrm>
+          <a:prstGeom prst="rect">
+            <a:avLst/>
+          </a:prstGeom>
+          <a:noFill/>
+        </p:spPr>
+        <p:txBody>
+          <a:bodyPr wrap="square" lIns="0" tIns="0" rIns="0" bIns="0" rtlCol="0">
+            <a:spAutoFit/>
+          </a:bodyPr>
+          <a:lstStyle>
+            <a:defPPr>
+              <a:defRPr lang="en-US"/>
+            </a:defPPr>
+            <a:lvl1pPr algn="r">
+              <a:defRPr sz="1100" i="1"/>
+            </a:lvl1pPr>
+          </a:lstStyle>
+          <a:p>
+            <a:pPr algn="ctr"/>
+            <a:r>
+              <a:rPr lang="en-US" dirty="0"/>
+              <a:t>HTML + JS</a:t>
+            </a:r>
+          </a:p>
+        </p:txBody>
+      </p:sp>
+      <p:cxnSp>
+        <p:nvCxnSpPr>
+          <p:cNvPr id="195" name="Connector: Elbow 194">
+            <a:extLst>
+              <a:ext uri="{FF2B5EF4-FFF2-40B4-BE49-F238E27FC236}">
+                <a16:creationId xmlns:a16="http://schemas.microsoft.com/office/drawing/2014/main" id="{4174DE66-9A99-EAAD-04F9-7CDF09B37AF9}"/>
+              </a:ext>
+            </a:extLst>
+          </p:cNvPr>
+          <p:cNvCxnSpPr>
+            <a:cxnSpLocks/>
+            <a:stCxn id="57" idx="1"/>
+          </p:cNvCxnSpPr>
+          <p:nvPr/>
+        </p:nvCxnSpPr>
+        <p:spPr>
+          <a:xfrm rot="10800000">
+            <a:off x="3889896" y="3882619"/>
+            <a:ext cx="1007926" cy="941161"/>
+          </a:xfrm>
+          <a:prstGeom prst="bentConnector3">
+            <a:avLst>
+              <a:gd name="adj1" fmla="val 67217"/>
+            </a:avLst>
+          </a:prstGeom>
+          <a:ln w="12700">
+            <a:solidFill>
+              <a:schemeClr val="tx1"/>
+            </a:solidFill>
+            <a:headEnd type="none"/>
+            <a:tailEnd type="arrow"/>
+          </a:ln>
+        </p:spPr>
+        <p:style>
+          <a:lnRef idx="1">
+            <a:schemeClr val="accent1"/>
+          </a:lnRef>
+          <a:fillRef idx="0">
+            <a:schemeClr val="accent1"/>
+          </a:fillRef>
+          <a:effectRef idx="0">
+            <a:schemeClr val="accent1"/>
+          </a:effectRef>
+          <a:fontRef idx="minor">
+            <a:schemeClr val="tx1"/>
+          </a:fontRef>
+        </p:style>
+      </p:cxnSp>
+    </p:spTree>
+    <p:extLst>
+      <p:ext uri="{BB962C8B-B14F-4D97-AF65-F5344CB8AC3E}">
+        <p14:creationId xmlns:p14="http://schemas.microsoft.com/office/powerpoint/2010/main" val="3252050584"/>
+      </p:ext>
+    </p:extLst>
+  </p:cSld>
+  <p:clrMapOvr>
+    <a:masterClrMapping/>
+  </p:clrMapOvr>
+</p:sld>
+</file>
+
+<file path=ppt/slides/slide5.xml><?xml version="1.0" encoding="utf-8"?>
+<p:sld xmlns:a="http://schemas.openxmlformats.org/drawingml/2006/main" xmlns:r="http://schemas.openxmlformats.org/officeDocument/2006/relationships" xmlns:p="http://schemas.openxmlformats.org/presentationml/2006/main">
+  <p:cSld>
+    <p:spTree>
+      <p:nvGrpSpPr>
+        <p:cNvPr id="1" name="">
+          <a:extLst>
+            <a:ext uri="{FF2B5EF4-FFF2-40B4-BE49-F238E27FC236}">
+              <a16:creationId xmlns:a16="http://schemas.microsoft.com/office/drawing/2014/main" id="{0461C334-E282-6245-304B-5E831FC89E80}"/>
+            </a:ext>
+          </a:extLst>
+        </p:cNvPr>
+        <p:cNvGrpSpPr/>
+        <p:nvPr/>
+      </p:nvGrpSpPr>
+      <p:grpSpPr>
+        <a:xfrm>
+          <a:off x="0" y="0"/>
+          <a:ext cx="0" cy="0"/>
+          <a:chOff x="0" y="0"/>
+          <a:chExt cx="0" cy="0"/>
+        </a:xfrm>
+      </p:grpSpPr>
+      <p:sp>
+        <p:nvSpPr>
+          <p:cNvPr id="8" name="Title 1024">
+            <a:extLst>
+              <a:ext uri="{FF2B5EF4-FFF2-40B4-BE49-F238E27FC236}">
+                <a16:creationId xmlns:a16="http://schemas.microsoft.com/office/drawing/2014/main" id="{86579F43-2FFF-68F3-7AD4-CC820DA75A28}"/>
+              </a:ext>
+            </a:extLst>
+          </p:cNvPr>
+          <p:cNvSpPr txBox="1">
+            <a:spLocks/>
+          </p:cNvSpPr>
+          <p:nvPr/>
+        </p:nvSpPr>
+        <p:spPr>
+          <a:xfrm>
+            <a:off x="115734" y="64032"/>
+            <a:ext cx="11304254" cy="476956"/>
+          </a:xfrm>
+          <a:prstGeom prst="rect">
+            <a:avLst/>
+          </a:prstGeom>
+        </p:spPr>
+        <p:txBody>
+          <a:bodyPr vert="horz" lIns="91440" tIns="45720" rIns="91440" bIns="45720" rtlCol="0" anchor="t">
+            <a:noAutofit/>
+          </a:bodyPr>
+          <a:lstStyle>
+            <a:lvl1pPr algn="ctr" defTabSz="914400" rtl="0" eaLnBrk="1" latinLnBrk="0" hangingPunct="1">
+              <a:lnSpc>
+                <a:spcPct val="90000"/>
+              </a:lnSpc>
+              <a:spcBef>
+                <a:spcPct val="0"/>
+              </a:spcBef>
+              <a:buNone/>
+              <a:defRPr sz="6000" kern="1200">
+                <a:solidFill>
+                  <a:schemeClr val="tx1"/>
+                </a:solidFill>
+                <a:latin typeface="+mj-lt"/>
+                <a:ea typeface="+mj-ea"/>
+                <a:cs typeface="+mj-cs"/>
+              </a:defRPr>
+            </a:lvl1pPr>
+          </a:lstStyle>
+          <a:p>
+            <a:pPr algn="l"/>
+            <a:r>
+              <a:rPr lang="en-US" sz="4000" dirty="0"/>
+              <a:t>Web Server Setup + Overview (Development)</a:t>
+            </a:r>
+          </a:p>
+        </p:txBody>
+      </p:sp>
+      <p:pic>
+        <p:nvPicPr>
+          <p:cNvPr id="3" name="Picture 2">
+            <a:extLst>
+              <a:ext uri="{FF2B5EF4-FFF2-40B4-BE49-F238E27FC236}">
+                <a16:creationId xmlns:a16="http://schemas.microsoft.com/office/drawing/2014/main" id="{28E8EDB6-D5B6-9853-B0C8-6B2D6B6118CC}"/>
+              </a:ext>
+            </a:extLst>
+          </p:cNvPr>
+          <p:cNvPicPr>
+            <a:picLocks noChangeAspect="1"/>
+          </p:cNvPicPr>
+          <p:nvPr/>
+        </p:nvPicPr>
+        <p:blipFill>
+          <a:blip r:embed="rId2"/>
+          <a:stretch>
+            <a:fillRect/>
+          </a:stretch>
+        </p:blipFill>
+        <p:spPr>
+          <a:xfrm>
+            <a:off x="2715390" y="826942"/>
+            <a:ext cx="6761220" cy="5600849"/>
+          </a:xfrm>
+          <a:prstGeom prst="rect">
+            <a:avLst/>
+          </a:prstGeom>
+        </p:spPr>
+      </p:pic>
+    </p:spTree>
+    <p:extLst>
+      <p:ext uri="{BB962C8B-B14F-4D97-AF65-F5344CB8AC3E}">
+        <p14:creationId xmlns:p14="http://schemas.microsoft.com/office/powerpoint/2010/main" val="3006188234"/>
       </p:ext>
     </p:extLst>
   </p:cSld>

--- a/Project and Tool Layout.pptx
+++ b/Project and Tool Layout.pptx
@@ -263,7 +263,7 @@
           <a:p>
             <a:fld id="{E779FE8C-703A-4904-A4E0-13778480428C}" type="datetimeFigureOut">
               <a:rPr lang="en-US" smtClean="0"/>
-              <a:t>9/29/2026</a:t>
+              <a:t>10/4/2026</a:t>
             </a:fld>
             <a:endParaRPr lang="en-US"/>
           </a:p>
@@ -461,7 +461,7 @@
           <a:p>
             <a:fld id="{E779FE8C-703A-4904-A4E0-13778480428C}" type="datetimeFigureOut">
               <a:rPr lang="en-US" smtClean="0"/>
-              <a:t>9/29/2026</a:t>
+              <a:t>10/4/2026</a:t>
             </a:fld>
             <a:endParaRPr lang="en-US"/>
           </a:p>
@@ -669,7 +669,7 @@
           <a:p>
             <a:fld id="{E779FE8C-703A-4904-A4E0-13778480428C}" type="datetimeFigureOut">
               <a:rPr lang="en-US" smtClean="0"/>
-              <a:t>9/29/2026</a:t>
+              <a:t>10/4/2026</a:t>
             </a:fld>
             <a:endParaRPr lang="en-US"/>
           </a:p>
@@ -867,7 +867,7 @@
           <a:p>
             <a:fld id="{E779FE8C-703A-4904-A4E0-13778480428C}" type="datetimeFigureOut">
               <a:rPr lang="en-US" smtClean="0"/>
-              <a:t>9/29/2026</a:t>
+              <a:t>10/4/2026</a:t>
             </a:fld>
             <a:endParaRPr lang="en-US"/>
           </a:p>
@@ -1142,7 +1142,7 @@
           <a:p>
             <a:fld id="{E779FE8C-703A-4904-A4E0-13778480428C}" type="datetimeFigureOut">
               <a:rPr lang="en-US" smtClean="0"/>
-              <a:t>9/29/2026</a:t>
+              <a:t>10/4/2026</a:t>
             </a:fld>
             <a:endParaRPr lang="en-US"/>
           </a:p>
@@ -1407,7 +1407,7 @@
           <a:p>
             <a:fld id="{E779FE8C-703A-4904-A4E0-13778480428C}" type="datetimeFigureOut">
               <a:rPr lang="en-US" smtClean="0"/>
-              <a:t>9/29/2026</a:t>
+              <a:t>10/4/2026</a:t>
             </a:fld>
             <a:endParaRPr lang="en-US"/>
           </a:p>
@@ -1819,7 +1819,7 @@
           <a:p>
             <a:fld id="{E779FE8C-703A-4904-A4E0-13778480428C}" type="datetimeFigureOut">
               <a:rPr lang="en-US" smtClean="0"/>
-              <a:t>9/29/2026</a:t>
+              <a:t>10/4/2026</a:t>
             </a:fld>
             <a:endParaRPr lang="en-US"/>
           </a:p>
@@ -1960,7 +1960,7 @@
           <a:p>
             <a:fld id="{E779FE8C-703A-4904-A4E0-13778480428C}" type="datetimeFigureOut">
               <a:rPr lang="en-US" smtClean="0"/>
-              <a:t>9/29/2026</a:t>
+              <a:t>10/4/2026</a:t>
             </a:fld>
             <a:endParaRPr lang="en-US"/>
           </a:p>
@@ -2073,7 +2073,7 @@
           <a:p>
             <a:fld id="{E779FE8C-703A-4904-A4E0-13778480428C}" type="datetimeFigureOut">
               <a:rPr lang="en-US" smtClean="0"/>
-              <a:t>9/29/2026</a:t>
+              <a:t>10/4/2026</a:t>
             </a:fld>
             <a:endParaRPr lang="en-US"/>
           </a:p>
@@ -2384,7 +2384,7 @@
           <a:p>
             <a:fld id="{E779FE8C-703A-4904-A4E0-13778480428C}" type="datetimeFigureOut">
               <a:rPr lang="en-US" smtClean="0"/>
-              <a:t>9/29/2026</a:t>
+              <a:t>10/4/2026</a:t>
             </a:fld>
             <a:endParaRPr lang="en-US"/>
           </a:p>
@@ -2672,7 +2672,7 @@
           <a:p>
             <a:fld id="{E779FE8C-703A-4904-A4E0-13778480428C}" type="datetimeFigureOut">
               <a:rPr lang="en-US" smtClean="0"/>
-              <a:t>9/29/2026</a:t>
+              <a:t>10/4/2026</a:t>
             </a:fld>
             <a:endParaRPr lang="en-US"/>
           </a:p>
@@ -2913,7 +2913,7 @@
           <a:p>
             <a:fld id="{E779FE8C-703A-4904-A4E0-13778480428C}" type="datetimeFigureOut">
               <a:rPr lang="en-US" smtClean="0"/>
-              <a:t>9/29/2026</a:t>
+              <a:t>10/4/2026</a:t>
             </a:fld>
             <a:endParaRPr lang="en-US"/>
           </a:p>
@@ -11342,6 +11342,250 @@
           </a:p>
         </p:txBody>
       </p:sp>
+      <p:sp>
+        <p:nvSpPr>
+          <p:cNvPr id="2" name="Rectangle 1">
+            <a:extLst>
+              <a:ext uri="{FF2B5EF4-FFF2-40B4-BE49-F238E27FC236}">
+                <a16:creationId xmlns:a16="http://schemas.microsoft.com/office/drawing/2014/main" id="{0F5E5C78-236F-05F6-28BF-904602ADAF3D}"/>
+              </a:ext>
+            </a:extLst>
+          </p:cNvPr>
+          <p:cNvSpPr/>
+          <p:nvPr/>
+        </p:nvSpPr>
+        <p:spPr>
+          <a:xfrm>
+            <a:off x="4279416" y="4135049"/>
+            <a:ext cx="1167573" cy="1020070"/>
+          </a:xfrm>
+          <a:prstGeom prst="rect">
+            <a:avLst/>
+          </a:prstGeom>
+          <a:solidFill>
+            <a:schemeClr val="accent2">
+              <a:lumMod val="75000"/>
+            </a:schemeClr>
+          </a:solidFill>
+        </p:spPr>
+        <p:style>
+          <a:lnRef idx="2">
+            <a:schemeClr val="accent1">
+              <a:shade val="15000"/>
+            </a:schemeClr>
+          </a:lnRef>
+          <a:fillRef idx="1">
+            <a:schemeClr val="accent1"/>
+          </a:fillRef>
+          <a:effectRef idx="0">
+            <a:schemeClr val="accent1"/>
+          </a:effectRef>
+          <a:fontRef idx="minor">
+            <a:schemeClr val="lt1"/>
+          </a:fontRef>
+        </p:style>
+        <p:txBody>
+          <a:bodyPr lIns="0" tIns="0" rIns="0" bIns="0" rtlCol="0" anchor="ctr"/>
+          <a:lstStyle/>
+          <a:p>
+            <a:pPr algn="ctr"/>
+            <a:r>
+              <a:rPr lang="en-US" sz="1600" b="1" i="1" dirty="0"/>
+              <a:t>Parser LLM</a:t>
+            </a:r>
+          </a:p>
+          <a:p>
+            <a:pPr algn="ctr"/>
+            <a:r>
+              <a:rPr lang="en-US" sz="800" b="1" i="1" dirty="0"/>
+              <a:t>(Local LLM)</a:t>
+            </a:r>
+          </a:p>
+          <a:p>
+            <a:pPr algn="ctr"/>
+            <a:endParaRPr lang="en-US" sz="800" b="1" i="1" dirty="0"/>
+          </a:p>
+          <a:p>
+            <a:pPr algn="ctr"/>
+            <a:r>
+              <a:rPr lang="en-US" sz="900" dirty="0"/>
+              <a:t>📚 </a:t>
+            </a:r>
+            <a:r>
+              <a:rPr lang="en-US" sz="900" b="1" u="sng" dirty="0"/>
+              <a:t>Qwen2.5-Coder:7b</a:t>
+            </a:r>
+          </a:p>
+        </p:txBody>
+      </p:sp>
+      <p:sp>
+        <p:nvSpPr>
+          <p:cNvPr id="3" name="Rectangle 2">
+            <a:extLst>
+              <a:ext uri="{FF2B5EF4-FFF2-40B4-BE49-F238E27FC236}">
+                <a16:creationId xmlns:a16="http://schemas.microsoft.com/office/drawing/2014/main" id="{C578AC07-B70B-8652-47C9-4163CE2F1EE9}"/>
+              </a:ext>
+            </a:extLst>
+          </p:cNvPr>
+          <p:cNvSpPr/>
+          <p:nvPr/>
+        </p:nvSpPr>
+        <p:spPr>
+          <a:xfrm>
+            <a:off x="7549452" y="4135049"/>
+            <a:ext cx="1167573" cy="1020070"/>
+          </a:xfrm>
+          <a:prstGeom prst="rect">
+            <a:avLst/>
+          </a:prstGeom>
+          <a:solidFill>
+            <a:schemeClr val="accent2">
+              <a:lumMod val="75000"/>
+            </a:schemeClr>
+          </a:solidFill>
+        </p:spPr>
+        <p:style>
+          <a:lnRef idx="2">
+            <a:schemeClr val="accent1">
+              <a:shade val="15000"/>
+            </a:schemeClr>
+          </a:lnRef>
+          <a:fillRef idx="1">
+            <a:schemeClr val="accent1"/>
+          </a:fillRef>
+          <a:effectRef idx="0">
+            <a:schemeClr val="accent1"/>
+          </a:effectRef>
+          <a:fontRef idx="minor">
+            <a:schemeClr val="lt1"/>
+          </a:fontRef>
+        </p:style>
+        <p:txBody>
+          <a:bodyPr lIns="0" tIns="0" rIns="0" bIns="0" rtlCol="0" anchor="ctr"/>
+          <a:lstStyle/>
+          <a:p>
+            <a:pPr algn="ctr"/>
+            <a:r>
+              <a:rPr lang="en-US" sz="1600" b="1" i="1" dirty="0"/>
+              <a:t>SQL Emitter</a:t>
+            </a:r>
+          </a:p>
+          <a:p>
+            <a:pPr algn="ctr"/>
+            <a:r>
+              <a:rPr lang="en-US" sz="800" b="1" i="1" dirty="0"/>
+              <a:t>(Local LLM)</a:t>
+            </a:r>
+          </a:p>
+          <a:p>
+            <a:pPr algn="ctr"/>
+            <a:endParaRPr lang="en-US" sz="800" b="1" i="1" dirty="0"/>
+          </a:p>
+          <a:p>
+            <a:pPr algn="ctr"/>
+            <a:r>
+              <a:rPr lang="en-US" sz="900" dirty="0"/>
+              <a:t>📚 </a:t>
+            </a:r>
+            <a:r>
+              <a:rPr lang="en-US" sz="900" b="1" u="sng" dirty="0"/>
+              <a:t>Qwen2.5-Coder:7b</a:t>
+            </a:r>
+          </a:p>
+        </p:txBody>
+      </p:sp>
+      <p:cxnSp>
+        <p:nvCxnSpPr>
+          <p:cNvPr id="4" name="Straight Arrow Connector 3">
+            <a:extLst>
+              <a:ext uri="{FF2B5EF4-FFF2-40B4-BE49-F238E27FC236}">
+                <a16:creationId xmlns:a16="http://schemas.microsoft.com/office/drawing/2014/main" id="{8B58BA4F-0C03-ED1B-B5E7-C0FB83832989}"/>
+              </a:ext>
+            </a:extLst>
+          </p:cNvPr>
+          <p:cNvCxnSpPr>
+            <a:cxnSpLocks/>
+            <a:stCxn id="2" idx="0"/>
+            <a:endCxn id="98" idx="2"/>
+          </p:cNvCxnSpPr>
+          <p:nvPr/>
+        </p:nvCxnSpPr>
+        <p:spPr>
+          <a:xfrm flipV="1">
+            <a:off x="4863203" y="3292563"/>
+            <a:ext cx="0" cy="842486"/>
+          </a:xfrm>
+          <a:prstGeom prst="straightConnector1">
+            <a:avLst/>
+          </a:prstGeom>
+          <a:ln w="12700">
+            <a:solidFill>
+              <a:schemeClr val="tx1"/>
+            </a:solidFill>
+            <a:headEnd type="arrow"/>
+            <a:tailEnd type="arrow"/>
+          </a:ln>
+        </p:spPr>
+        <p:style>
+          <a:lnRef idx="1">
+            <a:schemeClr val="accent1"/>
+          </a:lnRef>
+          <a:fillRef idx="0">
+            <a:schemeClr val="accent1"/>
+          </a:fillRef>
+          <a:effectRef idx="0">
+            <a:schemeClr val="accent1"/>
+          </a:effectRef>
+          <a:fontRef idx="minor">
+            <a:schemeClr val="tx1"/>
+          </a:fontRef>
+        </p:style>
+      </p:cxnSp>
+      <p:cxnSp>
+        <p:nvCxnSpPr>
+          <p:cNvPr id="7" name="Straight Arrow Connector 6">
+            <a:extLst>
+              <a:ext uri="{FF2B5EF4-FFF2-40B4-BE49-F238E27FC236}">
+                <a16:creationId xmlns:a16="http://schemas.microsoft.com/office/drawing/2014/main" id="{C5CF1426-ECE9-0BCE-780C-467C02FCE021}"/>
+              </a:ext>
+            </a:extLst>
+          </p:cNvPr>
+          <p:cNvCxnSpPr>
+            <a:cxnSpLocks/>
+          </p:cNvCxnSpPr>
+          <p:nvPr/>
+        </p:nvCxnSpPr>
+        <p:spPr>
+          <a:xfrm flipV="1">
+            <a:off x="8141358" y="3292563"/>
+            <a:ext cx="0" cy="842486"/>
+          </a:xfrm>
+          <a:prstGeom prst="straightConnector1">
+            <a:avLst/>
+          </a:prstGeom>
+          <a:ln w="12700">
+            <a:solidFill>
+              <a:schemeClr val="tx1"/>
+            </a:solidFill>
+            <a:headEnd type="arrow"/>
+            <a:tailEnd type="arrow"/>
+          </a:ln>
+        </p:spPr>
+        <p:style>
+          <a:lnRef idx="1">
+            <a:schemeClr val="accent1"/>
+          </a:lnRef>
+          <a:fillRef idx="0">
+            <a:schemeClr val="accent1"/>
+          </a:fillRef>
+          <a:effectRef idx="0">
+            <a:schemeClr val="accent1"/>
+          </a:effectRef>
+          <a:fontRef idx="minor">
+            <a:schemeClr val="tx1"/>
+          </a:fontRef>
+        </p:style>
+      </p:cxnSp>
     </p:spTree>
     <p:extLst>
       <p:ext uri="{BB962C8B-B14F-4D97-AF65-F5344CB8AC3E}">
